--- a/public/aral3d-presentation.pptx
+++ b/public/aral3d-presentation.pptx
@@ -4373,7 +4373,7 @@
         </p:nvSpPr>
         <p:spPr>
           <a:xfrm>
-            <a:off x="548640" y="2103120"/>
+            <a:off x="548640" y="1828800"/>
             <a:ext cx="8229600" cy="457200"/>
           </a:xfrm>
           <a:prstGeom prst="rect">
@@ -4412,7 +4412,7 @@
         </p:nvSpPr>
         <p:spPr>
           <a:xfrm>
-            <a:off x="8778240" y="2103120"/>
+            <a:off x="8778240" y="1828800"/>
             <a:ext cx="2926080" cy="457200"/>
           </a:xfrm>
           <a:prstGeom prst="rect">
@@ -4451,7 +4451,7 @@
         </p:nvSpPr>
         <p:spPr>
           <a:xfrm>
-            <a:off x="548640" y="2651760"/>
+            <a:off x="548640" y="2377440"/>
             <a:ext cx="11094415" cy="0"/>
           </a:xfrm>
           <a:prstGeom prst="line">
@@ -4476,7 +4476,7 @@
         </p:nvSpPr>
         <p:spPr>
           <a:xfrm>
-            <a:off x="548640" y="2788920"/>
+            <a:off x="548640" y="2423160"/>
             <a:ext cx="8229600" cy="457200"/>
           </a:xfrm>
           <a:prstGeom prst="rect">
@@ -4515,7 +4515,7 @@
         </p:nvSpPr>
         <p:spPr>
           <a:xfrm>
-            <a:off x="8778240" y="2788920"/>
+            <a:off x="8778240" y="2423160"/>
             <a:ext cx="2926080" cy="457200"/>
           </a:xfrm>
           <a:prstGeom prst="rect">
@@ -4554,7 +4554,7 @@
         </p:nvSpPr>
         <p:spPr>
           <a:xfrm>
-            <a:off x="548640" y="3337560"/>
+            <a:off x="548640" y="2971800"/>
             <a:ext cx="11094415" cy="0"/>
           </a:xfrm>
           <a:prstGeom prst="line">
@@ -4579,7 +4579,7 @@
         </p:nvSpPr>
         <p:spPr>
           <a:xfrm>
-            <a:off x="548640" y="3474720"/>
+            <a:off x="548640" y="3017520"/>
             <a:ext cx="8229600" cy="457200"/>
           </a:xfrm>
           <a:prstGeom prst="rect">
@@ -4618,7 +4618,7 @@
         </p:nvSpPr>
         <p:spPr>
           <a:xfrm>
-            <a:off x="8778240" y="3474720"/>
+            <a:off x="8778240" y="3017520"/>
             <a:ext cx="2926080" cy="457200"/>
           </a:xfrm>
           <a:prstGeom prst="rect">
@@ -4657,7 +4657,7 @@
         </p:nvSpPr>
         <p:spPr>
           <a:xfrm>
-            <a:off x="548640" y="4023360"/>
+            <a:off x="548640" y="3566160"/>
             <a:ext cx="11094415" cy="0"/>
           </a:xfrm>
           <a:prstGeom prst="line">
@@ -4682,7 +4682,7 @@
         </p:nvSpPr>
         <p:spPr>
           <a:xfrm>
-            <a:off x="548640" y="4160520"/>
+            <a:off x="548640" y="3611880"/>
             <a:ext cx="8229600" cy="457200"/>
           </a:xfrm>
           <a:prstGeom prst="rect">
@@ -4721,7 +4721,7 @@
         </p:nvSpPr>
         <p:spPr>
           <a:xfrm>
-            <a:off x="8778240" y="4160520"/>
+            <a:off x="8778240" y="3611880"/>
             <a:ext cx="2926080" cy="457200"/>
           </a:xfrm>
           <a:prstGeom prst="rect">
@@ -4760,7 +4760,7 @@
         </p:nvSpPr>
         <p:spPr>
           <a:xfrm>
-            <a:off x="548640" y="4709160"/>
+            <a:off x="548640" y="4160520"/>
             <a:ext cx="11094415" cy="0"/>
           </a:xfrm>
           <a:prstGeom prst="line">
@@ -4785,7 +4785,7 @@
         </p:nvSpPr>
         <p:spPr>
           <a:xfrm>
-            <a:off x="548640" y="4846320"/>
+            <a:off x="548640" y="4206240"/>
             <a:ext cx="8229600" cy="457200"/>
           </a:xfrm>
           <a:prstGeom prst="rect">
@@ -4824,7 +4824,7 @@
         </p:nvSpPr>
         <p:spPr>
           <a:xfrm>
-            <a:off x="8778240" y="4846320"/>
+            <a:off x="8778240" y="4206240"/>
             <a:ext cx="2926080" cy="457200"/>
           </a:xfrm>
           <a:prstGeom prst="rect">
@@ -4863,7 +4863,7 @@
         </p:nvSpPr>
         <p:spPr>
           <a:xfrm>
-            <a:off x="548640" y="5394960"/>
+            <a:off x="548640" y="4754880"/>
             <a:ext cx="11094415" cy="0"/>
           </a:xfrm>
           <a:prstGeom prst="line">
@@ -4888,7 +4888,7 @@
         </p:nvSpPr>
         <p:spPr>
           <a:xfrm>
-            <a:off x="548640" y="5532120"/>
+            <a:off x="548640" y="4800600"/>
             <a:ext cx="8229600" cy="457200"/>
           </a:xfrm>
           <a:prstGeom prst="rect">
@@ -4927,7 +4927,7 @@
         </p:nvSpPr>
         <p:spPr>
           <a:xfrm>
-            <a:off x="8778240" y="5532120"/>
+            <a:off x="8778240" y="4800600"/>
             <a:ext cx="2926080" cy="457200"/>
           </a:xfrm>
           <a:prstGeom prst="rect">
@@ -4966,7 +4966,7 @@
         </p:nvSpPr>
         <p:spPr>
           <a:xfrm>
-            <a:off x="548640" y="6080760"/>
+            <a:off x="548640" y="5349240"/>
             <a:ext cx="11094415" cy="0"/>
           </a:xfrm>
           <a:prstGeom prst="line">
@@ -4991,7 +4991,7 @@
         </p:nvSpPr>
         <p:spPr>
           <a:xfrm>
-            <a:off x="548640" y="6309360"/>
+            <a:off x="548640" y="5486400"/>
             <a:ext cx="8229600" cy="457200"/>
           </a:xfrm>
           <a:prstGeom prst="rect">
@@ -5030,7 +5030,7 @@
         </p:nvSpPr>
         <p:spPr>
           <a:xfrm>
-            <a:off x="8778240" y="6263640"/>
+            <a:off x="8778240" y="5440680"/>
             <a:ext cx="2926080" cy="548640"/>
           </a:xfrm>
           <a:prstGeom prst="rect">

--- a/public/aral3d-presentation.pptx
+++ b/public/aral3d-presentation.pptx
@@ -19,10 +19,9 @@
     <p:sldId id="267" r:id="rId13"/>
     <p:sldId id="268" r:id="rId14"/>
     <p:sldId id="269" r:id="rId15"/>
-    <p:sldId id="270" r:id="rId16"/>
   </p:sldIdLst>
   <p:notesMasterIdLst>
-    <p:notesMasterId r:id="rId17"/>
+    <p:notesMasterId r:id="rId16"/>
   </p:notesMasterIdLst>
   <p:sldSz cx="12192000" cy="6858000"/>
   <p:notesSz cx="6858000" cy="12192000"/>
@@ -980,94 +979,6 @@
             <a:fld id="{F7021451-1387-4CA6-816F-3879F97B5CBC}" type="slidenum">
               <a:rPr lang="en-US"/>
               <a:t>14</a:t>
-            </a:fld>
-            <a:endParaRPr lang="en-US"/>
-          </a:p>
-        </p:txBody>
-      </p:sp>
-    </p:spTree>
-    <p:extLst>
-      <p:ext uri="{BB962C8B-B14F-4D97-AF65-F5344CB8AC3E}">
-        <p14:creationId xmlns:p14="http://schemas.microsoft.com/office/powerpoint/2010/main" val="1024086991"/>
-      </p:ext>
-    </p:extLst>
-  </p:cSld>
-  <p:clrMapOvr>
-    <a:masterClrMapping/>
-  </p:clrMapOvr>
-</p:notes>
-</file>
-
-<file path=ppt/notesSlides/notesSlide15.xml><?xml version="1.0" encoding="utf-8"?>
-<p:notes xmlns:a="http://schemas.openxmlformats.org/drawingml/2006/main" xmlns:r="http://schemas.openxmlformats.org/officeDocument/2006/relationships" xmlns:p="http://schemas.openxmlformats.org/presentationml/2006/main">
-  <p:cSld>
-    <p:spTree>
-      <p:nvGrpSpPr>
-        <p:cNvPr id="1" name=""/>
-        <p:cNvGrpSpPr/>
-        <p:nvPr/>
-      </p:nvGrpSpPr>
-      <p:grpSpPr>
-        <a:xfrm>
-          <a:off x="0" y="0"/>
-          <a:ext cx="0" cy="0"/>
-          <a:chOff x="0" y="0"/>
-          <a:chExt cx="0" cy="0"/>
-        </a:xfrm>
-      </p:grpSpPr>
-      <p:sp>
-        <p:nvSpPr>
-          <p:cNvPr id="2" name="Slide Image Placeholder 1"/>
-          <p:cNvSpPr>
-            <a:spLocks noGrp="1" noRot="1" noChangeAspect="1"/>
-          </p:cNvSpPr>
-          <p:nvPr>
-            <p:ph type="sldImg"/>
-          </p:nvPr>
-        </p:nvSpPr>
-        <p:spPr/>
-      </p:sp>
-      <p:sp>
-        <p:nvSpPr>
-          <p:cNvPr id="3" name="Notes Placeholder 2"/>
-          <p:cNvSpPr>
-            <a:spLocks noGrp="1"/>
-          </p:cNvSpPr>
-          <p:nvPr>
-            <p:ph type="body" idx="1"/>
-          </p:nvPr>
-        </p:nvSpPr>
-        <p:spPr/>
-        <p:txBody>
-          <a:bodyPr/>
-          <a:lstStyle/>
-          <a:p>
-            <a:r>
-              <a:rPr lang="en-US" dirty="0"/>
-              <a:t/>
-            </a:r>
-            <a:endParaRPr lang="en-US" dirty="0"/>
-          </a:p>
-        </p:txBody>
-      </p:sp>
-      <p:sp>
-        <p:nvSpPr>
-          <p:cNvPr id="4" name="Slide Number Placeholder 3"/>
-          <p:cNvSpPr>
-            <a:spLocks noGrp="1"/>
-          </p:cNvSpPr>
-          <p:nvPr>
-            <p:ph type="sldNum" sz="quarter" idx="10"/>
-          </p:nvPr>
-        </p:nvSpPr>
-        <p:spPr/>
-        <p:txBody>
-          <a:bodyPr/>
-          <a:lstStyle/>
-          <a:p>
-            <a:fld id="{F7021451-1387-4CA6-816F-3879F97B5CBC}" type="slidenum">
-              <a:rPr lang="en-US"/>
-              <a:t>15</a:t>
             </a:fld>
             <a:endParaRPr lang="en-US"/>
           </a:p>
@@ -2146,9 +2057,9 @@
               <a:buNone/>
             </a:pPr>
             <a:r>
-              <a:rPr lang="en-US" sz="1000" spc="1200" kern="0" dirty="0">
-                <a:solidFill>
-                  <a:srgbClr val="0F766E"/>
+              <a:rPr lang="en-US" sz="1000" b="1" spc="1200" kern="0" dirty="0">
+                <a:solidFill>
+                  <a:srgbClr val="3B82F6"/>
                 </a:solidFill>
                 <a:latin typeface="IBM Plex Mono" pitchFamily="34" charset="0"/>
                 <a:ea typeface="IBM Plex Mono" pitchFamily="34" charset="-122"/>
@@ -2168,34 +2079,34 @@
         </p:nvSpPr>
         <p:spPr>
           <a:xfrm>
-            <a:off x="548640" y="2194560"/>
-            <a:ext cx="10972800" cy="1463040"/>
-          </a:xfrm>
-          <a:prstGeom prst="rect">
-            <a:avLst/>
-          </a:prstGeom>
-          <a:noFill/>
-          <a:ln/>
-        </p:spPr>
-        <p:txBody>
-          <a:bodyPr wrap="square" rtlCol="0" anchor="ctr"/>
-          <a:lstStyle/>
-          <a:p>
-            <a:pPr indent="0" marL="0">
-              <a:buNone/>
-            </a:pPr>
-            <a:r>
-              <a:rPr lang="en-US" sz="12000" spc="-400" kern="0" dirty="0">
+            <a:off x="548640" y="1828800"/>
+            <a:ext cx="10972800" cy="1828800"/>
+          </a:xfrm>
+          <a:prstGeom prst="rect">
+            <a:avLst/>
+          </a:prstGeom>
+          <a:noFill/>
+          <a:ln/>
+        </p:spPr>
+        <p:txBody>
+          <a:bodyPr wrap="square" rtlCol="0" anchor="ctr"/>
+          <a:lstStyle/>
+          <a:p>
+            <a:pPr indent="0" marL="0">
+              <a:buNone/>
+            </a:pPr>
+            <a:r>
+              <a:rPr lang="en-US" sz="16000" b="1" spc="800" kern="0" dirty="0">
                 <a:solidFill>
                   <a:srgbClr val="111418"/>
                 </a:solidFill>
-                <a:latin typeface="Inter" pitchFamily="34" charset="0"/>
-                <a:ea typeface="Inter" pitchFamily="34" charset="-122"/>
-                <a:cs typeface="Inter" pitchFamily="34" charset="-120"/>
-              </a:rPr>
-              <a:t>Aral3D</a:t>
-            </a:r>
-            <a:endParaRPr lang="en-US" sz="12000" dirty="0"/>
+                <a:latin typeface="Trebuchet MS" pitchFamily="34" charset="0"/>
+                <a:ea typeface="Trebuchet MS" pitchFamily="34" charset="-122"/>
+                <a:cs typeface="Trebuchet MS" pitchFamily="34" charset="-120"/>
+              </a:rPr>
+              <a:t>ARAL3D</a:t>
+            </a:r>
+            <a:endParaRPr lang="en-US" sz="16000" dirty="0"/>
           </a:p>
         </p:txBody>
       </p:sp>
@@ -2207,30 +2118,30 @@
         </p:nvSpPr>
         <p:spPr>
           <a:xfrm>
-            <a:off x="548640" y="3840480"/>
-            <a:ext cx="10972800" cy="731520"/>
-          </a:xfrm>
-          <a:prstGeom prst="rect">
-            <a:avLst/>
-          </a:prstGeom>
-          <a:noFill/>
-          <a:ln/>
-        </p:spPr>
-        <p:txBody>
-          <a:bodyPr wrap="square" rtlCol="0" anchor="ctr"/>
-          <a:lstStyle/>
-          <a:p>
-            <a:pPr indent="0" marL="0">
-              <a:buNone/>
-            </a:pPr>
-            <a:r>
-              <a:rPr lang="en-US" sz="3200" dirty="0">
-                <a:solidFill>
-                  <a:srgbClr val="111418"/>
-                </a:solidFill>
-                <a:latin typeface="Inter" pitchFamily="34" charset="0"/>
-                <a:ea typeface="Inter" pitchFamily="34" charset="-122"/>
-                <a:cs typeface="Inter" pitchFamily="34" charset="-120"/>
+            <a:off x="548640" y="4023360"/>
+            <a:ext cx="10972800" cy="640080"/>
+          </a:xfrm>
+          <a:prstGeom prst="rect">
+            <a:avLst/>
+          </a:prstGeom>
+          <a:noFill/>
+          <a:ln/>
+        </p:spPr>
+        <p:txBody>
+          <a:bodyPr wrap="square" rtlCol="0" anchor="ctr"/>
+          <a:lstStyle/>
+          <a:p>
+            <a:pPr indent="0" marL="0">
+              <a:buNone/>
+            </a:pPr>
+            <a:r>
+              <a:rPr lang="en-US" sz="3200" i="1" dirty="0">
+                <a:solidFill>
+                  <a:srgbClr val="EC4899"/>
+                </a:solidFill>
+                <a:latin typeface="Georgia" pitchFamily="34" charset="0"/>
+                <a:ea typeface="Georgia" pitchFamily="34" charset="-122"/>
+                <a:cs typeface="Georgia" pitchFamily="34" charset="-120"/>
               </a:rPr>
               <a:t>A 3D platform for the Aral Sea basin.</a:t>
             </a:r>
@@ -2246,7 +2157,7 @@
         </p:nvSpPr>
         <p:spPr>
           <a:xfrm>
-            <a:off x="548640" y="4937760"/>
+            <a:off x="548640" y="5120640"/>
             <a:ext cx="11094415" cy="0"/>
           </a:xfrm>
           <a:prstGeom prst="line">
@@ -2269,7 +2180,7 @@
         </p:nvSpPr>
         <p:spPr>
           <a:xfrm>
-            <a:off x="548640" y="5120640"/>
+            <a:off x="548640" y="5303520"/>
             <a:ext cx="10058400" cy="457200"/>
           </a:xfrm>
           <a:prstGeom prst="rect">
@@ -2288,7 +2199,7 @@
             <a:r>
               <a:rPr lang="en-US" sz="1300" dirty="0">
                 <a:solidFill>
-                  <a:srgbClr val="6B7077"/>
+                  <a:srgbClr val="5B6068"/>
                 </a:solidFill>
                 <a:latin typeface="IBM Plex Mono" pitchFamily="34" charset="0"/>
                 <a:ea typeface="IBM Plex Mono" pitchFamily="34" charset="-122"/>
@@ -2327,7 +2238,7 @@
             <a:r>
               <a:rPr lang="en-US" sz="1000" spc="600" kern="0" dirty="0">
                 <a:solidFill>
-                  <a:srgbClr val="6B7077"/>
+                  <a:srgbClr val="5B6068"/>
                 </a:solidFill>
                 <a:latin typeface="IBM Plex Mono" pitchFamily="34" charset="0"/>
                 <a:ea typeface="IBM Plex Mono" pitchFamily="34" charset="-122"/>
@@ -2396,15 +2307,15 @@
               <a:buNone/>
             </a:pPr>
             <a:r>
-              <a:rPr lang="en-US" sz="900" spc="800" kern="0" dirty="0">
-                <a:solidFill>
-                  <a:srgbClr val="0F766E"/>
+              <a:rPr lang="en-US" sz="900" b="1" spc="800" kern="0" dirty="0">
+                <a:solidFill>
+                  <a:srgbClr val="3B82F6"/>
                 </a:solidFill>
                 <a:latin typeface="IBM Plex Mono" pitchFamily="34" charset="0"/>
                 <a:ea typeface="IBM Plex Mono" pitchFamily="34" charset="-122"/>
                 <a:cs typeface="IBM Plex Mono" pitchFamily="34" charset="-120"/>
               </a:rPr>
-              <a:t>6-MONTH PLAN</a:t>
+              <a:t>6-MONTH BUDGET</a:t>
             </a:r>
             <a:endParaRPr lang="en-US" sz="900" dirty="0"/>
           </a:p>
@@ -2419,33 +2330,33 @@
         <p:spPr>
           <a:xfrm>
             <a:off x="548640" y="914400"/>
-            <a:ext cx="10972800" cy="822960"/>
-          </a:xfrm>
-          <a:prstGeom prst="rect">
-            <a:avLst/>
-          </a:prstGeom>
-          <a:noFill/>
-          <a:ln/>
-        </p:spPr>
-        <p:txBody>
-          <a:bodyPr wrap="square" rtlCol="0" anchor="ctr"/>
-          <a:lstStyle/>
-          <a:p>
-            <a:pPr indent="0" marL="0">
-              <a:buNone/>
-            </a:pPr>
-            <a:r>
-              <a:rPr lang="en-US" sz="4000" dirty="0">
+            <a:ext cx="10972800" cy="914400"/>
+          </a:xfrm>
+          <a:prstGeom prst="rect">
+            <a:avLst/>
+          </a:prstGeom>
+          <a:noFill/>
+          <a:ln/>
+        </p:spPr>
+        <p:txBody>
+          <a:bodyPr wrap="square" rtlCol="0" anchor="ctr"/>
+          <a:lstStyle/>
+          <a:p>
+            <a:pPr indent="0" marL="0">
+              <a:buNone/>
+            </a:pPr>
+            <a:r>
+              <a:rPr lang="en-US" sz="4800" b="1" spc="400" kern="0" dirty="0">
                 <a:solidFill>
                   <a:srgbClr val="111418"/>
                 </a:solidFill>
-                <a:latin typeface="Inter" pitchFamily="34" charset="0"/>
-                <a:ea typeface="Inter" pitchFamily="34" charset="-122"/>
-                <a:cs typeface="Inter" pitchFamily="34" charset="-120"/>
-              </a:rPr>
-              <a:t>Six months.</a:t>
-            </a:r>
-            <a:endParaRPr lang="en-US" sz="4000" dirty="0"/>
+                <a:latin typeface="Trebuchet MS" pitchFamily="34" charset="0"/>
+                <a:ea typeface="Trebuchet MS" pitchFamily="34" charset="-122"/>
+                <a:cs typeface="Trebuchet MS" pitchFamily="34" charset="-120"/>
+              </a:rPr>
+              <a:t>WHERE IT GOES.</a:t>
+            </a:r>
+            <a:endParaRPr lang="en-US" sz="4800" dirty="0"/>
           </a:p>
         </p:txBody>
       </p:sp>
@@ -2457,71 +2368,71 @@
         </p:nvSpPr>
         <p:spPr>
           <a:xfrm>
-            <a:off x="548640" y="2103120"/>
-            <a:ext cx="914400" cy="457200"/>
-          </a:xfrm>
-          <a:prstGeom prst="rect">
-            <a:avLst/>
-          </a:prstGeom>
-          <a:noFill/>
-          <a:ln/>
-        </p:spPr>
-        <p:txBody>
-          <a:bodyPr wrap="square" rtlCol="0" anchor="ctr"/>
-          <a:lstStyle/>
-          <a:p>
-            <a:pPr indent="0" marL="0">
-              <a:buNone/>
-            </a:pPr>
-            <a:r>
-              <a:rPr lang="en-US" sz="1400" dirty="0">
-                <a:solidFill>
-                  <a:srgbClr val="0F766E"/>
+            <a:off x="548640" y="2194560"/>
+            <a:ext cx="8229600" cy="457200"/>
+          </a:xfrm>
+          <a:prstGeom prst="rect">
+            <a:avLst/>
+          </a:prstGeom>
+          <a:noFill/>
+          <a:ln/>
+        </p:spPr>
+        <p:txBody>
+          <a:bodyPr wrap="square" rtlCol="0" anchor="ctr"/>
+          <a:lstStyle/>
+          <a:p>
+            <a:pPr indent="0" marL="0">
+              <a:buNone/>
+            </a:pPr>
+            <a:r>
+              <a:rPr lang="en-US" sz="1800" dirty="0">
+                <a:solidFill>
+                  <a:srgbClr val="111418"/>
+                </a:solidFill>
+                <a:latin typeface="Trebuchet MS" pitchFamily="34" charset="0"/>
+                <a:ea typeface="Trebuchet MS" pitchFamily="34" charset="-122"/>
+                <a:cs typeface="Trebuchet MS" pitchFamily="34" charset="-120"/>
+              </a:rPr>
+              <a:t>Product polishing and frontend</a:t>
+            </a:r>
+            <a:endParaRPr lang="en-US" sz="1800" dirty="0"/>
+          </a:p>
+        </p:txBody>
+      </p:sp>
+      <p:sp>
+        <p:nvSpPr>
+          <p:cNvPr id="5" name="Text 3"/>
+          <p:cNvSpPr/>
+          <p:nvPr/>
+        </p:nvSpPr>
+        <p:spPr>
+          <a:xfrm>
+            <a:off x="8778240" y="2194560"/>
+            <a:ext cx="2926080" cy="457200"/>
+          </a:xfrm>
+          <a:prstGeom prst="rect">
+            <a:avLst/>
+          </a:prstGeom>
+          <a:noFill/>
+          <a:ln/>
+        </p:spPr>
+        <p:txBody>
+          <a:bodyPr wrap="square" rtlCol="0" anchor="ctr"/>
+          <a:lstStyle/>
+          <a:p>
+            <a:pPr algn="r" indent="0" marL="0">
+              <a:buNone/>
+            </a:pPr>
+            <a:r>
+              <a:rPr lang="en-US" sz="1800" b="1" dirty="0">
+                <a:solidFill>
+                  <a:srgbClr val="3B82F6"/>
                 </a:solidFill>
                 <a:latin typeface="IBM Plex Mono" pitchFamily="34" charset="0"/>
                 <a:ea typeface="IBM Plex Mono" pitchFamily="34" charset="-122"/>
                 <a:cs typeface="IBM Plex Mono" pitchFamily="34" charset="-120"/>
               </a:rPr>
-              <a:t>M1</a:t>
-            </a:r>
-            <a:endParaRPr lang="en-US" sz="1400" dirty="0"/>
-          </a:p>
-        </p:txBody>
-      </p:sp>
-      <p:sp>
-        <p:nvSpPr>
-          <p:cNvPr id="5" name="Text 3"/>
-          <p:cNvSpPr/>
-          <p:nvPr/>
-        </p:nvSpPr>
-        <p:spPr>
-          <a:xfrm>
-            <a:off x="1645920" y="2103120"/>
-            <a:ext cx="10058400" cy="457200"/>
-          </a:xfrm>
-          <a:prstGeom prst="rect">
-            <a:avLst/>
-          </a:prstGeom>
-          <a:noFill/>
-          <a:ln/>
-        </p:spPr>
-        <p:txBody>
-          <a:bodyPr wrap="square" rtlCol="0" anchor="ctr"/>
-          <a:lstStyle/>
-          <a:p>
-            <a:pPr indent="0" marL="0">
-              <a:buNone/>
-            </a:pPr>
-            <a:r>
-              <a:rPr lang="en-US" sz="1800" dirty="0">
-                <a:solidFill>
-                  <a:srgbClr val="111418"/>
-                </a:solidFill>
-                <a:latin typeface="Inter" pitchFamily="34" charset="0"/>
-                <a:ea typeface="Inter" pitchFamily="34" charset="-122"/>
-                <a:cs typeface="Inter" pitchFamily="34" charset="-120"/>
-              </a:rPr>
-              <a:t>Polish product, public demo.</a:t>
+              <a:t>$8,000</a:t>
             </a:r>
             <a:endParaRPr lang="en-US" sz="1800" dirty="0"/>
           </a:p>
@@ -2535,7 +2446,7 @@
         </p:nvSpPr>
         <p:spPr>
           <a:xfrm>
-            <a:off x="548640" y="2651760"/>
+            <a:off x="548640" y="2743200"/>
             <a:ext cx="11094415" cy="0"/>
           </a:xfrm>
           <a:prstGeom prst="line">
@@ -2558,71 +2469,71 @@
         </p:nvSpPr>
         <p:spPr>
           <a:xfrm>
-            <a:off x="548640" y="2788920"/>
-            <a:ext cx="914400" cy="457200"/>
-          </a:xfrm>
-          <a:prstGeom prst="rect">
-            <a:avLst/>
-          </a:prstGeom>
-          <a:noFill/>
-          <a:ln/>
-        </p:spPr>
-        <p:txBody>
-          <a:bodyPr wrap="square" rtlCol="0" anchor="ctr"/>
-          <a:lstStyle/>
-          <a:p>
-            <a:pPr indent="0" marL="0">
-              <a:buNone/>
-            </a:pPr>
-            <a:r>
-              <a:rPr lang="en-US" sz="1400" dirty="0">
-                <a:solidFill>
-                  <a:srgbClr val="0F766E"/>
+            <a:off x="548640" y="2761488"/>
+            <a:ext cx="8229600" cy="457200"/>
+          </a:xfrm>
+          <a:prstGeom prst="rect">
+            <a:avLst/>
+          </a:prstGeom>
+          <a:noFill/>
+          <a:ln/>
+        </p:spPr>
+        <p:txBody>
+          <a:bodyPr wrap="square" rtlCol="0" anchor="ctr"/>
+          <a:lstStyle/>
+          <a:p>
+            <a:pPr indent="0" marL="0">
+              <a:buNone/>
+            </a:pPr>
+            <a:r>
+              <a:rPr lang="en-US" sz="1800" dirty="0">
+                <a:solidFill>
+                  <a:srgbClr val="111418"/>
+                </a:solidFill>
+                <a:latin typeface="Trebuchet MS" pitchFamily="34" charset="0"/>
+                <a:ea typeface="Trebuchet MS" pitchFamily="34" charset="-122"/>
+                <a:cs typeface="Trebuchet MS" pitchFamily="34" charset="-120"/>
+              </a:rPr>
+              <a:t>Educational module and curriculum</a:t>
+            </a:r>
+            <a:endParaRPr lang="en-US" sz="1800" dirty="0"/>
+          </a:p>
+        </p:txBody>
+      </p:sp>
+      <p:sp>
+        <p:nvSpPr>
+          <p:cNvPr id="8" name="Text 6"/>
+          <p:cNvSpPr/>
+          <p:nvPr/>
+        </p:nvSpPr>
+        <p:spPr>
+          <a:xfrm>
+            <a:off x="8778240" y="2761488"/>
+            <a:ext cx="2926080" cy="457200"/>
+          </a:xfrm>
+          <a:prstGeom prst="rect">
+            <a:avLst/>
+          </a:prstGeom>
+          <a:noFill/>
+          <a:ln/>
+        </p:spPr>
+        <p:txBody>
+          <a:bodyPr wrap="square" rtlCol="0" anchor="ctr"/>
+          <a:lstStyle/>
+          <a:p>
+            <a:pPr algn="r" indent="0" marL="0">
+              <a:buNone/>
+            </a:pPr>
+            <a:r>
+              <a:rPr lang="en-US" sz="1800" b="1" dirty="0">
+                <a:solidFill>
+                  <a:srgbClr val="3B82F6"/>
                 </a:solidFill>
                 <a:latin typeface="IBM Plex Mono" pitchFamily="34" charset="0"/>
                 <a:ea typeface="IBM Plex Mono" pitchFamily="34" charset="-122"/>
                 <a:cs typeface="IBM Plex Mono" pitchFamily="34" charset="-120"/>
               </a:rPr>
-              <a:t>M2</a:t>
-            </a:r>
-            <a:endParaRPr lang="en-US" sz="1400" dirty="0"/>
-          </a:p>
-        </p:txBody>
-      </p:sp>
-      <p:sp>
-        <p:nvSpPr>
-          <p:cNvPr id="8" name="Text 6"/>
-          <p:cNvSpPr/>
-          <p:nvPr/>
-        </p:nvSpPr>
-        <p:spPr>
-          <a:xfrm>
-            <a:off x="1645920" y="2788920"/>
-            <a:ext cx="10058400" cy="457200"/>
-          </a:xfrm>
-          <a:prstGeom prst="rect">
-            <a:avLst/>
-          </a:prstGeom>
-          <a:noFill/>
-          <a:ln/>
-        </p:spPr>
-        <p:txBody>
-          <a:bodyPr wrap="square" rtlCol="0" anchor="ctr"/>
-          <a:lstStyle/>
-          <a:p>
-            <a:pPr indent="0" marL="0">
-              <a:buNone/>
-            </a:pPr>
-            <a:r>
-              <a:rPr lang="en-US" sz="1800" dirty="0">
-                <a:solidFill>
-                  <a:srgbClr val="111418"/>
-                </a:solidFill>
-                <a:latin typeface="Inter" pitchFamily="34" charset="0"/>
-                <a:ea typeface="Inter" pitchFamily="34" charset="-122"/>
-                <a:cs typeface="Inter" pitchFamily="34" charset="-120"/>
-              </a:rPr>
-              <a:t>Educational version and ministry talks.</a:t>
+              <a:t>$6,000</a:t>
             </a:r>
             <a:endParaRPr lang="en-US" sz="1800" dirty="0"/>
           </a:p>
@@ -2636,7 +2547,7 @@
         </p:nvSpPr>
         <p:spPr>
           <a:xfrm>
-            <a:off x="548640" y="3337560"/>
+            <a:off x="548640" y="3310128"/>
             <a:ext cx="11094415" cy="0"/>
           </a:xfrm>
           <a:prstGeom prst="line">
@@ -2659,71 +2570,71 @@
         </p:nvSpPr>
         <p:spPr>
           <a:xfrm>
-            <a:off x="548640" y="3474720"/>
-            <a:ext cx="914400" cy="457200"/>
-          </a:xfrm>
-          <a:prstGeom prst="rect">
-            <a:avLst/>
-          </a:prstGeom>
-          <a:noFill/>
-          <a:ln/>
-        </p:spPr>
-        <p:txBody>
-          <a:bodyPr wrap="square" rtlCol="0" anchor="ctr"/>
-          <a:lstStyle/>
-          <a:p>
-            <a:pPr indent="0" marL="0">
-              <a:buNone/>
-            </a:pPr>
-            <a:r>
-              <a:rPr lang="en-US" sz="1400" dirty="0">
-                <a:solidFill>
-                  <a:srgbClr val="0F766E"/>
+            <a:off x="548640" y="3328416"/>
+            <a:ext cx="8229600" cy="457200"/>
+          </a:xfrm>
+          <a:prstGeom prst="rect">
+            <a:avLst/>
+          </a:prstGeom>
+          <a:noFill/>
+          <a:ln/>
+        </p:spPr>
+        <p:txBody>
+          <a:bodyPr wrap="square" rtlCol="0" anchor="ctr"/>
+          <a:lstStyle/>
+          <a:p>
+            <a:pPr indent="0" marL="0">
+              <a:buNone/>
+            </a:pPr>
+            <a:r>
+              <a:rPr lang="en-US" sz="1800" dirty="0">
+                <a:solidFill>
+                  <a:srgbClr val="111418"/>
+                </a:solidFill>
+                <a:latin typeface="Trebuchet MS" pitchFamily="34" charset="0"/>
+                <a:ea typeface="Trebuchet MS" pitchFamily="34" charset="-122"/>
+                <a:cs typeface="Trebuchet MS" pitchFamily="34" charset="-120"/>
+              </a:rPr>
+              <a:t>Museum and exhibition adaptation</a:t>
+            </a:r>
+            <a:endParaRPr lang="en-US" sz="1800" dirty="0"/>
+          </a:p>
+        </p:txBody>
+      </p:sp>
+      <p:sp>
+        <p:nvSpPr>
+          <p:cNvPr id="11" name="Text 9"/>
+          <p:cNvSpPr/>
+          <p:nvPr/>
+        </p:nvSpPr>
+        <p:spPr>
+          <a:xfrm>
+            <a:off x="8778240" y="3328416"/>
+            <a:ext cx="2926080" cy="457200"/>
+          </a:xfrm>
+          <a:prstGeom prst="rect">
+            <a:avLst/>
+          </a:prstGeom>
+          <a:noFill/>
+          <a:ln/>
+        </p:spPr>
+        <p:txBody>
+          <a:bodyPr wrap="square" rtlCol="0" anchor="ctr"/>
+          <a:lstStyle/>
+          <a:p>
+            <a:pPr algn="r" indent="0" marL="0">
+              <a:buNone/>
+            </a:pPr>
+            <a:r>
+              <a:rPr lang="en-US" sz="1800" b="1" dirty="0">
+                <a:solidFill>
+                  <a:srgbClr val="3B82F6"/>
                 </a:solidFill>
                 <a:latin typeface="IBM Plex Mono" pitchFamily="34" charset="0"/>
                 <a:ea typeface="IBM Plex Mono" pitchFamily="34" charset="-122"/>
                 <a:cs typeface="IBM Plex Mono" pitchFamily="34" charset="-120"/>
               </a:rPr>
-              <a:t>M3</a:t>
-            </a:r>
-            <a:endParaRPr lang="en-US" sz="1400" dirty="0"/>
-          </a:p>
-        </p:txBody>
-      </p:sp>
-      <p:sp>
-        <p:nvSpPr>
-          <p:cNvPr id="11" name="Text 9"/>
-          <p:cNvSpPr/>
-          <p:nvPr/>
-        </p:nvSpPr>
-        <p:spPr>
-          <a:xfrm>
-            <a:off x="1645920" y="3474720"/>
-            <a:ext cx="10058400" cy="457200"/>
-          </a:xfrm>
-          <a:prstGeom prst="rect">
-            <a:avLst/>
-          </a:prstGeom>
-          <a:noFill/>
-          <a:ln/>
-        </p:spPr>
-        <p:txBody>
-          <a:bodyPr wrap="square" rtlCol="0" anchor="ctr"/>
-          <a:lstStyle/>
-          <a:p>
-            <a:pPr indent="0" marL="0">
-              <a:buNone/>
-            </a:pPr>
-            <a:r>
-              <a:rPr lang="en-US" sz="1800" dirty="0">
-                <a:solidFill>
-                  <a:srgbClr val="111418"/>
-                </a:solidFill>
-                <a:latin typeface="Inter" pitchFamily="34" charset="0"/>
-                <a:ea typeface="Inter" pitchFamily="34" charset="-122"/>
-                <a:cs typeface="Inter" pitchFamily="34" charset="-120"/>
-              </a:rPr>
-              <a:t>First curriculum-ready learning module.</a:t>
+              <a:t>$9,000</a:t>
             </a:r>
             <a:endParaRPr lang="en-US" sz="1800" dirty="0"/>
           </a:p>
@@ -2737,7 +2648,7 @@
         </p:nvSpPr>
         <p:spPr>
           <a:xfrm>
-            <a:off x="548640" y="4023360"/>
+            <a:off x="548640" y="3877056"/>
             <a:ext cx="11094415" cy="0"/>
           </a:xfrm>
           <a:prstGeom prst="line">
@@ -2760,71 +2671,71 @@
         </p:nvSpPr>
         <p:spPr>
           <a:xfrm>
-            <a:off x="548640" y="4160520"/>
-            <a:ext cx="914400" cy="457200"/>
-          </a:xfrm>
-          <a:prstGeom prst="rect">
-            <a:avLst/>
-          </a:prstGeom>
-          <a:noFill/>
-          <a:ln/>
-        </p:spPr>
-        <p:txBody>
-          <a:bodyPr wrap="square" rtlCol="0" anchor="ctr"/>
-          <a:lstStyle/>
-          <a:p>
-            <a:pPr indent="0" marL="0">
-              <a:buNone/>
-            </a:pPr>
-            <a:r>
-              <a:rPr lang="en-US" sz="1400" dirty="0">
-                <a:solidFill>
-                  <a:srgbClr val="0F766E"/>
+            <a:off x="548640" y="3895344"/>
+            <a:ext cx="8229600" cy="457200"/>
+          </a:xfrm>
+          <a:prstGeom prst="rect">
+            <a:avLst/>
+          </a:prstGeom>
+          <a:noFill/>
+          <a:ln/>
+        </p:spPr>
+        <p:txBody>
+          <a:bodyPr wrap="square" rtlCol="0" anchor="ctr"/>
+          <a:lstStyle/>
+          <a:p>
+            <a:pPr indent="0" marL="0">
+              <a:buNone/>
+            </a:pPr>
+            <a:r>
+              <a:rPr lang="en-US" sz="1800" dirty="0">
+                <a:solidFill>
+                  <a:srgbClr val="111418"/>
+                </a:solidFill>
+                <a:latin typeface="Trebuchet MS" pitchFamily="34" charset="0"/>
+                <a:ea typeface="Trebuchet MS" pitchFamily="34" charset="-122"/>
+                <a:cs typeface="Trebuchet MS" pitchFamily="34" charset="-120"/>
+              </a:rPr>
+              <a:t>Visual and interface design</a:t>
+            </a:r>
+            <a:endParaRPr lang="en-US" sz="1800" dirty="0"/>
+          </a:p>
+        </p:txBody>
+      </p:sp>
+      <p:sp>
+        <p:nvSpPr>
+          <p:cNvPr id="14" name="Text 12"/>
+          <p:cNvSpPr/>
+          <p:nvPr/>
+        </p:nvSpPr>
+        <p:spPr>
+          <a:xfrm>
+            <a:off x="8778240" y="3895344"/>
+            <a:ext cx="2926080" cy="457200"/>
+          </a:xfrm>
+          <a:prstGeom prst="rect">
+            <a:avLst/>
+          </a:prstGeom>
+          <a:noFill/>
+          <a:ln/>
+        </p:spPr>
+        <p:txBody>
+          <a:bodyPr wrap="square" rtlCol="0" anchor="ctr"/>
+          <a:lstStyle/>
+          <a:p>
+            <a:pPr algn="r" indent="0" marL="0">
+              <a:buNone/>
+            </a:pPr>
+            <a:r>
+              <a:rPr lang="en-US" sz="1800" b="1" dirty="0">
+                <a:solidFill>
+                  <a:srgbClr val="3B82F6"/>
                 </a:solidFill>
                 <a:latin typeface="IBM Plex Mono" pitchFamily="34" charset="0"/>
                 <a:ea typeface="IBM Plex Mono" pitchFamily="34" charset="-122"/>
                 <a:cs typeface="IBM Plex Mono" pitchFamily="34" charset="-120"/>
               </a:rPr>
-              <a:t>M4</a:t>
-            </a:r>
-            <a:endParaRPr lang="en-US" sz="1400" dirty="0"/>
-          </a:p>
-        </p:txBody>
-      </p:sp>
-      <p:sp>
-        <p:nvSpPr>
-          <p:cNvPr id="14" name="Text 12"/>
-          <p:cNvSpPr/>
-          <p:nvPr/>
-        </p:nvSpPr>
-        <p:spPr>
-          <a:xfrm>
-            <a:off x="1645920" y="4160520"/>
-            <a:ext cx="10058400" cy="457200"/>
-          </a:xfrm>
-          <a:prstGeom prst="rect">
-            <a:avLst/>
-          </a:prstGeom>
-          <a:noFill/>
-          <a:ln/>
-        </p:spPr>
-        <p:txBody>
-          <a:bodyPr wrap="square" rtlCol="0" anchor="ctr"/>
-          <a:lstStyle/>
-          <a:p>
-            <a:pPr indent="0" marL="0">
-              <a:buNone/>
-            </a:pPr>
-            <a:r>
-              <a:rPr lang="en-US" sz="1800" dirty="0">
-                <a:solidFill>
-                  <a:srgbClr val="111418"/>
-                </a:solidFill>
-                <a:latin typeface="Inter" pitchFamily="34" charset="0"/>
-                <a:ea typeface="Inter" pitchFamily="34" charset="-122"/>
-                <a:cs typeface="Inter" pitchFamily="34" charset="-120"/>
-              </a:rPr>
-              <a:t>Adapt for Aral Culture Summit 2026.</a:t>
+              <a:t>$3,000</a:t>
             </a:r>
             <a:endParaRPr lang="en-US" sz="1800" dirty="0"/>
           </a:p>
@@ -2838,7 +2749,7 @@
         </p:nvSpPr>
         <p:spPr>
           <a:xfrm>
-            <a:off x="548640" y="4709160"/>
+            <a:off x="548640" y="4443984"/>
             <a:ext cx="11094415" cy="0"/>
           </a:xfrm>
           <a:prstGeom prst="line">
@@ -2861,71 +2772,71 @@
         </p:nvSpPr>
         <p:spPr>
           <a:xfrm>
-            <a:off x="548640" y="4846320"/>
-            <a:ext cx="914400" cy="457200"/>
-          </a:xfrm>
-          <a:prstGeom prst="rect">
-            <a:avLst/>
-          </a:prstGeom>
-          <a:noFill/>
-          <a:ln/>
-        </p:spPr>
-        <p:txBody>
-          <a:bodyPr wrap="square" rtlCol="0" anchor="ctr"/>
-          <a:lstStyle/>
-          <a:p>
-            <a:pPr indent="0" marL="0">
-              <a:buNone/>
-            </a:pPr>
-            <a:r>
-              <a:rPr lang="en-US" sz="1400" dirty="0">
-                <a:solidFill>
-                  <a:srgbClr val="0F766E"/>
+            <a:off x="548640" y="4462272"/>
+            <a:ext cx="8229600" cy="457200"/>
+          </a:xfrm>
+          <a:prstGeom prst="rect">
+            <a:avLst/>
+          </a:prstGeom>
+          <a:noFill/>
+          <a:ln/>
+        </p:spPr>
+        <p:txBody>
+          <a:bodyPr wrap="square" rtlCol="0" anchor="ctr"/>
+          <a:lstStyle/>
+          <a:p>
+            <a:pPr indent="0" marL="0">
+              <a:buNone/>
+            </a:pPr>
+            <a:r>
+              <a:rPr lang="en-US" sz="1800" dirty="0">
+                <a:solidFill>
+                  <a:srgbClr val="111418"/>
+                </a:solidFill>
+                <a:latin typeface="Trebuchet MS" pitchFamily="34" charset="0"/>
+                <a:ea typeface="Trebuchet MS" pitchFamily="34" charset="-122"/>
+                <a:cs typeface="Trebuchet MS" pitchFamily="34" charset="-120"/>
+              </a:rPr>
+              <a:t>Documentation, video, materials</a:t>
+            </a:r>
+            <a:endParaRPr lang="en-US" sz="1800" dirty="0"/>
+          </a:p>
+        </p:txBody>
+      </p:sp>
+      <p:sp>
+        <p:nvSpPr>
+          <p:cNvPr id="17" name="Text 15"/>
+          <p:cNvSpPr/>
+          <p:nvPr/>
+        </p:nvSpPr>
+        <p:spPr>
+          <a:xfrm>
+            <a:off x="8778240" y="4462272"/>
+            <a:ext cx="2926080" cy="457200"/>
+          </a:xfrm>
+          <a:prstGeom prst="rect">
+            <a:avLst/>
+          </a:prstGeom>
+          <a:noFill/>
+          <a:ln/>
+        </p:spPr>
+        <p:txBody>
+          <a:bodyPr wrap="square" rtlCol="0" anchor="ctr"/>
+          <a:lstStyle/>
+          <a:p>
+            <a:pPr algn="r" indent="0" marL="0">
+              <a:buNone/>
+            </a:pPr>
+            <a:r>
+              <a:rPr lang="en-US" sz="1800" b="1" dirty="0">
+                <a:solidFill>
+                  <a:srgbClr val="3B82F6"/>
                 </a:solidFill>
                 <a:latin typeface="IBM Plex Mono" pitchFamily="34" charset="0"/>
                 <a:ea typeface="IBM Plex Mono" pitchFamily="34" charset="-122"/>
                 <a:cs typeface="IBM Plex Mono" pitchFamily="34" charset="-120"/>
               </a:rPr>
-              <a:t>M5</a:t>
-            </a:r>
-            <a:endParaRPr lang="en-US" sz="1400" dirty="0"/>
-          </a:p>
-        </p:txBody>
-      </p:sp>
-      <p:sp>
-        <p:nvSpPr>
-          <p:cNvPr id="17" name="Text 15"/>
-          <p:cNvSpPr/>
-          <p:nvPr/>
-        </p:nvSpPr>
-        <p:spPr>
-          <a:xfrm>
-            <a:off x="1645920" y="4846320"/>
-            <a:ext cx="10058400" cy="457200"/>
-          </a:xfrm>
-          <a:prstGeom prst="rect">
-            <a:avLst/>
-          </a:prstGeom>
-          <a:noFill/>
-          <a:ln/>
-        </p:spPr>
-        <p:txBody>
-          <a:bodyPr wrap="square" rtlCol="0" anchor="ctr"/>
-          <a:lstStyle/>
-          <a:p>
-            <a:pPr indent="0" marL="0">
-              <a:buNone/>
-            </a:pPr>
-            <a:r>
-              <a:rPr lang="en-US" sz="1800" dirty="0">
-                <a:solidFill>
-                  <a:srgbClr val="111418"/>
-                </a:solidFill>
-                <a:latin typeface="Inter" pitchFamily="34" charset="0"/>
-                <a:ea typeface="Inter" pitchFamily="34" charset="-122"/>
-                <a:cs typeface="Inter" pitchFamily="34" charset="-120"/>
-              </a:rPr>
-              <a:t>Museum versions: Savitsky, Aral Sea Museum, CCA Tashkent.</a:t>
+              <a:t>$2,000</a:t>
             </a:r>
             <a:endParaRPr lang="en-US" sz="1800" dirty="0"/>
           </a:p>
@@ -2939,7 +2850,7 @@
         </p:nvSpPr>
         <p:spPr>
           <a:xfrm>
-            <a:off x="548640" y="5394960"/>
+            <a:off x="548640" y="5010912"/>
             <a:ext cx="11094415" cy="0"/>
           </a:xfrm>
           <a:prstGeom prst="line">
@@ -2962,71 +2873,71 @@
         </p:nvSpPr>
         <p:spPr>
           <a:xfrm>
-            <a:off x="548640" y="5532120"/>
-            <a:ext cx="914400" cy="457200"/>
-          </a:xfrm>
-          <a:prstGeom prst="rect">
-            <a:avLst/>
-          </a:prstGeom>
-          <a:noFill/>
-          <a:ln/>
-        </p:spPr>
-        <p:txBody>
-          <a:bodyPr wrap="square" rtlCol="0" anchor="ctr"/>
-          <a:lstStyle/>
-          <a:p>
-            <a:pPr indent="0" marL="0">
-              <a:buNone/>
-            </a:pPr>
-            <a:r>
-              <a:rPr lang="en-US" sz="1400" dirty="0">
-                <a:solidFill>
-                  <a:srgbClr val="0F766E"/>
+            <a:off x="548640" y="5029200"/>
+            <a:ext cx="8229600" cy="457200"/>
+          </a:xfrm>
+          <a:prstGeom prst="rect">
+            <a:avLst/>
+          </a:prstGeom>
+          <a:noFill/>
+          <a:ln/>
+        </p:spPr>
+        <p:txBody>
+          <a:bodyPr wrap="square" rtlCol="0" anchor="ctr"/>
+          <a:lstStyle/>
+          <a:p>
+            <a:pPr indent="0" marL="0">
+              <a:buNone/>
+            </a:pPr>
+            <a:r>
+              <a:rPr lang="en-US" sz="1800" dirty="0">
+                <a:solidFill>
+                  <a:srgbClr val="111418"/>
+                </a:solidFill>
+                <a:latin typeface="Trebuchet MS" pitchFamily="34" charset="0"/>
+                <a:ea typeface="Trebuchet MS" pitchFamily="34" charset="-122"/>
+                <a:cs typeface="Trebuchet MS" pitchFamily="34" charset="-120"/>
+              </a:rPr>
+              <a:t>Coordination and production</a:t>
+            </a:r>
+            <a:endParaRPr lang="en-US" sz="1800" dirty="0"/>
+          </a:p>
+        </p:txBody>
+      </p:sp>
+      <p:sp>
+        <p:nvSpPr>
+          <p:cNvPr id="20" name="Text 18"/>
+          <p:cNvSpPr/>
+          <p:nvPr/>
+        </p:nvSpPr>
+        <p:spPr>
+          <a:xfrm>
+            <a:off x="8778240" y="5029200"/>
+            <a:ext cx="2926080" cy="457200"/>
+          </a:xfrm>
+          <a:prstGeom prst="rect">
+            <a:avLst/>
+          </a:prstGeom>
+          <a:noFill/>
+          <a:ln/>
+        </p:spPr>
+        <p:txBody>
+          <a:bodyPr wrap="square" rtlCol="0" anchor="ctr"/>
+          <a:lstStyle/>
+          <a:p>
+            <a:pPr algn="r" indent="0" marL="0">
+              <a:buNone/>
+            </a:pPr>
+            <a:r>
+              <a:rPr lang="en-US" sz="1800" b="1" dirty="0">
+                <a:solidFill>
+                  <a:srgbClr val="3B82F6"/>
                 </a:solidFill>
                 <a:latin typeface="IBM Plex Mono" pitchFamily="34" charset="0"/>
                 <a:ea typeface="IBM Plex Mono" pitchFamily="34" charset="-122"/>
                 <a:cs typeface="IBM Plex Mono" pitchFamily="34" charset="-120"/>
               </a:rPr>
-              <a:t>M6</a:t>
-            </a:r>
-            <a:endParaRPr lang="en-US" sz="1400" dirty="0"/>
-          </a:p>
-        </p:txBody>
-      </p:sp>
-      <p:sp>
-        <p:nvSpPr>
-          <p:cNvPr id="20" name="Text 18"/>
-          <p:cNvSpPr/>
-          <p:nvPr/>
-        </p:nvSpPr>
-        <p:spPr>
-          <a:xfrm>
-            <a:off x="1645920" y="5532120"/>
-            <a:ext cx="10058400" cy="457200"/>
-          </a:xfrm>
-          <a:prstGeom prst="rect">
-            <a:avLst/>
-          </a:prstGeom>
-          <a:noFill/>
-          <a:ln/>
-        </p:spPr>
-        <p:txBody>
-          <a:bodyPr wrap="square" rtlCol="0" anchor="ctr"/>
-          <a:lstStyle/>
-          <a:p>
-            <a:pPr indent="0" marL="0">
-              <a:buNone/>
-            </a:pPr>
-            <a:r>
-              <a:rPr lang="en-US" sz="1800" dirty="0">
-                <a:solidFill>
-                  <a:srgbClr val="111418"/>
-                </a:solidFill>
-                <a:latin typeface="Inter" pitchFamily="34" charset="0"/>
-                <a:ea typeface="Inter" pitchFamily="34" charset="-122"/>
-                <a:cs typeface="Inter" pitchFamily="34" charset="-120"/>
-              </a:rPr>
-              <a:t>Documentation, demo video, 3-year roadmap.</a:t>
+              <a:t>$2,000</a:t>
             </a:r>
             <a:endParaRPr lang="en-US" sz="1800" dirty="0"/>
           </a:p>
@@ -3040,7 +2951,7 @@
         </p:nvSpPr>
         <p:spPr>
           <a:xfrm>
-            <a:off x="548640" y="6080760"/>
+            <a:off x="548640" y="5577840"/>
             <a:ext cx="11094415" cy="0"/>
           </a:xfrm>
           <a:prstGeom prst="line">
@@ -3063,32 +2974,110 @@
         </p:nvSpPr>
         <p:spPr>
           <a:xfrm>
-            <a:off x="10728655" y="6400800"/>
-            <a:ext cx="1097280" cy="274320"/>
-          </a:xfrm>
-          <a:prstGeom prst="rect">
-            <a:avLst/>
-          </a:prstGeom>
-          <a:noFill/>
-          <a:ln/>
-        </p:spPr>
-        <p:txBody>
-          <a:bodyPr wrap="square" rtlCol="0" anchor="ctr"/>
-          <a:lstStyle/>
-          <a:p>
-            <a:pPr algn="r" indent="0" marL="0">
-              <a:buNone/>
-            </a:pPr>
-            <a:r>
-              <a:rPr lang="en-US" sz="900" spc="400" kern="0" dirty="0">
-                <a:solidFill>
-                  <a:srgbClr val="6B7077"/>
+            <a:off x="548640" y="5687568"/>
+            <a:ext cx="8229600" cy="457200"/>
+          </a:xfrm>
+          <a:prstGeom prst="rect">
+            <a:avLst/>
+          </a:prstGeom>
+          <a:noFill/>
+          <a:ln/>
+        </p:spPr>
+        <p:txBody>
+          <a:bodyPr wrap="square" rtlCol="0" anchor="ctr"/>
+          <a:lstStyle/>
+          <a:p>
+            <a:pPr indent="0" marL="0">
+              <a:buNone/>
+            </a:pPr>
+            <a:r>
+              <a:rPr lang="en-US" sz="1400" spc="800" kern="0" dirty="0">
+                <a:solidFill>
+                  <a:srgbClr val="5B6068"/>
                 </a:solidFill>
                 <a:latin typeface="IBM Plex Mono" pitchFamily="34" charset="0"/>
                 <a:ea typeface="IBM Plex Mono" pitchFamily="34" charset="-122"/>
                 <a:cs typeface="IBM Plex Mono" pitchFamily="34" charset="-120"/>
               </a:rPr>
-              <a:t>10 / 15</a:t>
+              <a:t>TOTAL</a:t>
+            </a:r>
+            <a:endParaRPr lang="en-US" sz="1400" dirty="0"/>
+          </a:p>
+        </p:txBody>
+      </p:sp>
+      <p:sp>
+        <p:nvSpPr>
+          <p:cNvPr id="23" name="Text 21"/>
+          <p:cNvSpPr/>
+          <p:nvPr/>
+        </p:nvSpPr>
+        <p:spPr>
+          <a:xfrm>
+            <a:off x="8778240" y="5596128"/>
+            <a:ext cx="2926080" cy="640080"/>
+          </a:xfrm>
+          <a:prstGeom prst="rect">
+            <a:avLst/>
+          </a:prstGeom>
+          <a:noFill/>
+          <a:ln/>
+        </p:spPr>
+        <p:txBody>
+          <a:bodyPr wrap="square" rtlCol="0" anchor="ctr"/>
+          <a:lstStyle/>
+          <a:p>
+            <a:pPr algn="r" indent="0" marL="0">
+              <a:buNone/>
+            </a:pPr>
+            <a:r>
+              <a:rPr lang="en-US" sz="3000" b="1" spc="200" kern="0" dirty="0">
+                <a:solidFill>
+                  <a:srgbClr val="EC4899"/>
+                </a:solidFill>
+                <a:latin typeface="Trebuchet MS" pitchFamily="34" charset="0"/>
+                <a:ea typeface="Trebuchet MS" pitchFamily="34" charset="-122"/>
+                <a:cs typeface="Trebuchet MS" pitchFamily="34" charset="-120"/>
+              </a:rPr>
+              <a:t>$30,000</a:t>
+            </a:r>
+            <a:endParaRPr lang="en-US" sz="3000" dirty="0"/>
+          </a:p>
+        </p:txBody>
+      </p:sp>
+      <p:sp>
+        <p:nvSpPr>
+          <p:cNvPr id="24" name="Text 22"/>
+          <p:cNvSpPr/>
+          <p:nvPr/>
+        </p:nvSpPr>
+        <p:spPr>
+          <a:xfrm>
+            <a:off x="10728655" y="6400800"/>
+            <a:ext cx="1097280" cy="274320"/>
+          </a:xfrm>
+          <a:prstGeom prst="rect">
+            <a:avLst/>
+          </a:prstGeom>
+          <a:noFill/>
+          <a:ln/>
+        </p:spPr>
+        <p:txBody>
+          <a:bodyPr wrap="square" rtlCol="0" anchor="ctr"/>
+          <a:lstStyle/>
+          <a:p>
+            <a:pPr algn="r" indent="0" marL="0">
+              <a:buNone/>
+            </a:pPr>
+            <a:r>
+              <a:rPr lang="en-US" sz="900" dirty="0">
+                <a:solidFill>
+                  <a:srgbClr val="5B6068"/>
+                </a:solidFill>
+                <a:latin typeface="IBM Plex Mono" pitchFamily="34" charset="0"/>
+                <a:ea typeface="IBM Plex Mono" pitchFamily="34" charset="-122"/>
+                <a:cs typeface="IBM Plex Mono" pitchFamily="34" charset="-120"/>
+              </a:rPr>
+              <a:t>10 / 14</a:t>
             </a:r>
             <a:endParaRPr lang="en-US" sz="900" dirty="0"/>
           </a:p>
@@ -3096,7 +3085,7 @@
       </p:sp>
       <p:sp>
         <p:nvSpPr>
-          <p:cNvPr id="23" name="Text 21"/>
+          <p:cNvPr id="25" name="Text 23"/>
           <p:cNvSpPr/>
           <p:nvPr/>
         </p:nvSpPr>
@@ -3121,7 +3110,7 @@
             <a:r>
               <a:rPr lang="en-US" sz="900" spc="600" kern="0" dirty="0">
                 <a:solidFill>
-                  <a:srgbClr val="6B7077"/>
+                  <a:srgbClr val="5B6068"/>
                 </a:solidFill>
                 <a:latin typeface="IBM Plex Mono" pitchFamily="34" charset="0"/>
                 <a:ea typeface="IBM Plex Mono" pitchFamily="34" charset="-122"/>
@@ -3190,15 +3179,15 @@
               <a:buNone/>
             </a:pPr>
             <a:r>
-              <a:rPr lang="en-US" sz="900" spc="800" kern="0" dirty="0">
-                <a:solidFill>
-                  <a:srgbClr val="0F766E"/>
+              <a:rPr lang="en-US" sz="900" b="1" spc="800" kern="0" dirty="0">
+                <a:solidFill>
+                  <a:srgbClr val="3B82F6"/>
                 </a:solidFill>
                 <a:latin typeface="IBM Plex Mono" pitchFamily="34" charset="0"/>
                 <a:ea typeface="IBM Plex Mono" pitchFamily="34" charset="-122"/>
                 <a:cs typeface="IBM Plex Mono" pitchFamily="34" charset="-120"/>
               </a:rPr>
-              <a:t>6-MONTH BUDGET</a:t>
+              <a:t>3-YEAR PLAN</a:t>
             </a:r>
             <a:endParaRPr lang="en-US" sz="900" dirty="0"/>
           </a:p>
@@ -3213,33 +3202,33 @@
         <p:spPr>
           <a:xfrm>
             <a:off x="548640" y="914400"/>
-            <a:ext cx="10972800" cy="822960"/>
-          </a:xfrm>
-          <a:prstGeom prst="rect">
-            <a:avLst/>
-          </a:prstGeom>
-          <a:noFill/>
-          <a:ln/>
-        </p:spPr>
-        <p:txBody>
-          <a:bodyPr wrap="square" rtlCol="0" anchor="ctr"/>
-          <a:lstStyle/>
-          <a:p>
-            <a:pPr indent="0" marL="0">
-              <a:buNone/>
-            </a:pPr>
-            <a:r>
-              <a:rPr lang="en-US" sz="4000" dirty="0">
+            <a:ext cx="10972800" cy="914400"/>
+          </a:xfrm>
+          <a:prstGeom prst="rect">
+            <a:avLst/>
+          </a:prstGeom>
+          <a:noFill/>
+          <a:ln/>
+        </p:spPr>
+        <p:txBody>
+          <a:bodyPr wrap="square" rtlCol="0" anchor="ctr"/>
+          <a:lstStyle/>
+          <a:p>
+            <a:pPr indent="0" marL="0">
+              <a:buNone/>
+            </a:pPr>
+            <a:r>
+              <a:rPr lang="en-US" sz="4800" b="1" spc="400" kern="0" dirty="0">
                 <a:solidFill>
                   <a:srgbClr val="111418"/>
                 </a:solidFill>
-                <a:latin typeface="Inter" pitchFamily="34" charset="0"/>
-                <a:ea typeface="Inter" pitchFamily="34" charset="-122"/>
-                <a:cs typeface="Inter" pitchFamily="34" charset="-120"/>
-              </a:rPr>
-              <a:t>Where it goes.</a:t>
-            </a:r>
-            <a:endParaRPr lang="en-US" sz="4000" dirty="0"/>
+                <a:latin typeface="Trebuchet MS" pitchFamily="34" charset="0"/>
+                <a:ea typeface="Trebuchet MS" pitchFamily="34" charset="-122"/>
+                <a:cs typeface="Trebuchet MS" pitchFamily="34" charset="-120"/>
+              </a:rPr>
+              <a:t>$150K · 3 YEARS.</a:t>
+            </a:r>
+            <a:endParaRPr lang="en-US" sz="4800" dirty="0"/>
           </a:p>
         </p:txBody>
       </p:sp>
@@ -3251,350 +3240,242 @@
         </p:nvSpPr>
         <p:spPr>
           <a:xfrm>
-            <a:off x="548640" y="1828800"/>
-            <a:ext cx="8229600" cy="457200"/>
-          </a:xfrm>
-          <a:prstGeom prst="rect">
-            <a:avLst/>
-          </a:prstGeom>
-          <a:noFill/>
-          <a:ln/>
-        </p:spPr>
-        <p:txBody>
-          <a:bodyPr wrap="square" rtlCol="0" anchor="ctr"/>
-          <a:lstStyle/>
-          <a:p>
-            <a:pPr indent="0" marL="0">
-              <a:buNone/>
-            </a:pPr>
-            <a:r>
-              <a:rPr lang="en-US" sz="1800" dirty="0">
-                <a:solidFill>
-                  <a:srgbClr val="111418"/>
-                </a:solidFill>
-                <a:latin typeface="Inter" pitchFamily="34" charset="0"/>
-                <a:ea typeface="Inter" pitchFamily="34" charset="-122"/>
-                <a:cs typeface="Inter" pitchFamily="34" charset="-120"/>
-              </a:rPr>
-              <a:t>Product polishing and frontend</a:t>
-            </a:r>
-            <a:endParaRPr lang="en-US" sz="1800" dirty="0"/>
-          </a:p>
-        </p:txBody>
-      </p:sp>
-      <p:sp>
-        <p:nvSpPr>
-          <p:cNvPr id="5" name="Text 3"/>
-          <p:cNvSpPr/>
-          <p:nvPr/>
-        </p:nvSpPr>
-        <p:spPr>
-          <a:xfrm>
-            <a:off x="8778240" y="1828800"/>
-            <a:ext cx="2926080" cy="457200"/>
-          </a:xfrm>
-          <a:prstGeom prst="rect">
-            <a:avLst/>
-          </a:prstGeom>
-          <a:noFill/>
-          <a:ln/>
-        </p:spPr>
-        <p:txBody>
-          <a:bodyPr wrap="square" rtlCol="0" anchor="ctr"/>
-          <a:lstStyle/>
-          <a:p>
-            <a:pPr algn="r" indent="0" marL="0">
-              <a:buNone/>
-            </a:pPr>
-            <a:r>
-              <a:rPr lang="en-US" sz="1800" dirty="0">
-                <a:solidFill>
-                  <a:srgbClr val="0F766E"/>
+            <a:off x="548640" y="2560320"/>
+            <a:ext cx="1097280" cy="548640"/>
+          </a:xfrm>
+          <a:prstGeom prst="rect">
+            <a:avLst/>
+          </a:prstGeom>
+          <a:noFill/>
+          <a:ln/>
+        </p:spPr>
+        <p:txBody>
+          <a:bodyPr wrap="square" rtlCol="0" anchor="ctr"/>
+          <a:lstStyle/>
+          <a:p>
+            <a:pPr indent="0" marL="0">
+              <a:buNone/>
+            </a:pPr>
+            <a:r>
+              <a:rPr lang="en-US" sz="2000" b="1" dirty="0">
+                <a:solidFill>
+                  <a:srgbClr val="3B82F6"/>
                 </a:solidFill>
                 <a:latin typeface="IBM Plex Mono" pitchFamily="34" charset="0"/>
                 <a:ea typeface="IBM Plex Mono" pitchFamily="34" charset="-122"/>
                 <a:cs typeface="IBM Plex Mono" pitchFamily="34" charset="-120"/>
               </a:rPr>
-              <a:t>$8,000</a:t>
-            </a:r>
-            <a:endParaRPr lang="en-US" sz="1800" dirty="0"/>
-          </a:p>
-        </p:txBody>
-      </p:sp>
-      <p:sp>
-        <p:nvSpPr>
-          <p:cNvPr id="6" name="Shape 4"/>
-          <p:cNvSpPr/>
-          <p:nvPr/>
-        </p:nvSpPr>
-        <p:spPr>
-          <a:xfrm>
-            <a:off x="548640" y="2377440"/>
-            <a:ext cx="11094415" cy="0"/>
-          </a:xfrm>
-          <a:prstGeom prst="line">
-            <a:avLst/>
-          </a:prstGeom>
-          <a:noFill/>
-          <a:ln w="9525">
-            <a:solidFill>
-              <a:srgbClr val="E5E5E2"/>
-            </a:solidFill>
-            <a:prstDash val="solid"/>
-          </a:ln>
-        </p:spPr>
-      </p:sp>
-      <p:sp>
-        <p:nvSpPr>
-          <p:cNvPr id="7" name="Text 5"/>
-          <p:cNvSpPr/>
-          <p:nvPr/>
-        </p:nvSpPr>
-        <p:spPr>
-          <a:xfrm>
-            <a:off x="548640" y="2423160"/>
-            <a:ext cx="8229600" cy="457200"/>
-          </a:xfrm>
-          <a:prstGeom prst="rect">
-            <a:avLst/>
-          </a:prstGeom>
-          <a:noFill/>
-          <a:ln/>
-        </p:spPr>
-        <p:txBody>
-          <a:bodyPr wrap="square" rtlCol="0" anchor="ctr"/>
-          <a:lstStyle/>
-          <a:p>
-            <a:pPr indent="0" marL="0">
-              <a:buNone/>
-            </a:pPr>
-            <a:r>
-              <a:rPr lang="en-US" sz="1800" dirty="0">
+              <a:t>Y1</a:t>
+            </a:r>
+            <a:endParaRPr lang="en-US" sz="2000" dirty="0"/>
+          </a:p>
+        </p:txBody>
+      </p:sp>
+      <p:sp>
+        <p:nvSpPr>
+          <p:cNvPr id="5" name="Text 3"/>
+          <p:cNvSpPr/>
+          <p:nvPr/>
+        </p:nvSpPr>
+        <p:spPr>
+          <a:xfrm>
+            <a:off x="1828800" y="2560320"/>
+            <a:ext cx="10058400" cy="640080"/>
+          </a:xfrm>
+          <a:prstGeom prst="rect">
+            <a:avLst/>
+          </a:prstGeom>
+          <a:noFill/>
+          <a:ln/>
+        </p:spPr>
+        <p:txBody>
+          <a:bodyPr wrap="square" rtlCol="0" anchor="ctr"/>
+          <a:lstStyle/>
+          <a:p>
+            <a:pPr indent="0" marL="0">
+              <a:buNone/>
+            </a:pPr>
+            <a:r>
+              <a:rPr lang="en-US" sz="2000" dirty="0">
                 <a:solidFill>
                   <a:srgbClr val="111418"/>
                 </a:solidFill>
-                <a:latin typeface="Inter" pitchFamily="34" charset="0"/>
-                <a:ea typeface="Inter" pitchFamily="34" charset="-122"/>
-                <a:cs typeface="Inter" pitchFamily="34" charset="-120"/>
-              </a:rPr>
-              <a:t>Educational module and curriculum</a:t>
-            </a:r>
-            <a:endParaRPr lang="en-US" sz="1800" dirty="0"/>
-          </a:p>
-        </p:txBody>
-      </p:sp>
-      <p:sp>
-        <p:nvSpPr>
-          <p:cNvPr id="8" name="Text 6"/>
-          <p:cNvSpPr/>
-          <p:nvPr/>
-        </p:nvSpPr>
-        <p:spPr>
-          <a:xfrm>
-            <a:off x="8778240" y="2423160"/>
-            <a:ext cx="2926080" cy="457200"/>
-          </a:xfrm>
-          <a:prstGeom prst="rect">
-            <a:avLst/>
-          </a:prstGeom>
-          <a:noFill/>
-          <a:ln/>
-        </p:spPr>
-        <p:txBody>
-          <a:bodyPr wrap="square" rtlCol="0" anchor="ctr"/>
-          <a:lstStyle/>
-          <a:p>
-            <a:pPr algn="r" indent="0" marL="0">
-              <a:buNone/>
-            </a:pPr>
-            <a:r>
-              <a:rPr lang="en-US" sz="1800" dirty="0">
-                <a:solidFill>
-                  <a:srgbClr val="0F766E"/>
+                <a:latin typeface="Trebuchet MS" pitchFamily="34" charset="0"/>
+                <a:ea typeface="Trebuchet MS" pitchFamily="34" charset="-122"/>
+                <a:cs typeface="Trebuchet MS" pitchFamily="34" charset="-120"/>
+              </a:rPr>
+              <a:t>Curriculum alignment, school pilots, museum installations.</a:t>
+            </a:r>
+            <a:endParaRPr lang="en-US" sz="2000" dirty="0"/>
+          </a:p>
+        </p:txBody>
+      </p:sp>
+      <p:sp>
+        <p:nvSpPr>
+          <p:cNvPr id="6" name="Text 4"/>
+          <p:cNvSpPr/>
+          <p:nvPr/>
+        </p:nvSpPr>
+        <p:spPr>
+          <a:xfrm>
+            <a:off x="548640" y="3566160"/>
+            <a:ext cx="1097280" cy="548640"/>
+          </a:xfrm>
+          <a:prstGeom prst="rect">
+            <a:avLst/>
+          </a:prstGeom>
+          <a:noFill/>
+          <a:ln/>
+        </p:spPr>
+        <p:txBody>
+          <a:bodyPr wrap="square" rtlCol="0" anchor="ctr"/>
+          <a:lstStyle/>
+          <a:p>
+            <a:pPr indent="0" marL="0">
+              <a:buNone/>
+            </a:pPr>
+            <a:r>
+              <a:rPr lang="en-US" sz="2000" b="1" dirty="0">
+                <a:solidFill>
+                  <a:srgbClr val="EC4899"/>
                 </a:solidFill>
                 <a:latin typeface="IBM Plex Mono" pitchFamily="34" charset="0"/>
                 <a:ea typeface="IBM Plex Mono" pitchFamily="34" charset="-122"/>
                 <a:cs typeface="IBM Plex Mono" pitchFamily="34" charset="-120"/>
               </a:rPr>
-              <a:t>$6,000</a:t>
-            </a:r>
-            <a:endParaRPr lang="en-US" sz="1800" dirty="0"/>
-          </a:p>
-        </p:txBody>
-      </p:sp>
-      <p:sp>
-        <p:nvSpPr>
-          <p:cNvPr id="9" name="Shape 7"/>
-          <p:cNvSpPr/>
-          <p:nvPr/>
-        </p:nvSpPr>
-        <p:spPr>
-          <a:xfrm>
-            <a:off x="548640" y="2971800"/>
-            <a:ext cx="11094415" cy="0"/>
-          </a:xfrm>
-          <a:prstGeom prst="line">
-            <a:avLst/>
-          </a:prstGeom>
-          <a:noFill/>
-          <a:ln w="9525">
-            <a:solidFill>
-              <a:srgbClr val="E5E5E2"/>
-            </a:solidFill>
-            <a:prstDash val="solid"/>
-          </a:ln>
-        </p:spPr>
-      </p:sp>
-      <p:sp>
-        <p:nvSpPr>
-          <p:cNvPr id="10" name="Text 8"/>
-          <p:cNvSpPr/>
-          <p:nvPr/>
-        </p:nvSpPr>
-        <p:spPr>
-          <a:xfrm>
-            <a:off x="548640" y="3017520"/>
-            <a:ext cx="8229600" cy="457200"/>
-          </a:xfrm>
-          <a:prstGeom prst="rect">
-            <a:avLst/>
-          </a:prstGeom>
-          <a:noFill/>
-          <a:ln/>
-        </p:spPr>
-        <p:txBody>
-          <a:bodyPr wrap="square" rtlCol="0" anchor="ctr"/>
-          <a:lstStyle/>
-          <a:p>
-            <a:pPr indent="0" marL="0">
-              <a:buNone/>
-            </a:pPr>
-            <a:r>
-              <a:rPr lang="en-US" sz="1800" dirty="0">
+              <a:t>Y2</a:t>
+            </a:r>
+            <a:endParaRPr lang="en-US" sz="2000" dirty="0"/>
+          </a:p>
+        </p:txBody>
+      </p:sp>
+      <p:sp>
+        <p:nvSpPr>
+          <p:cNvPr id="7" name="Text 5"/>
+          <p:cNvSpPr/>
+          <p:nvPr/>
+        </p:nvSpPr>
+        <p:spPr>
+          <a:xfrm>
+            <a:off x="1828800" y="3566160"/>
+            <a:ext cx="10058400" cy="640080"/>
+          </a:xfrm>
+          <a:prstGeom prst="rect">
+            <a:avLst/>
+          </a:prstGeom>
+          <a:noFill/>
+          <a:ln/>
+        </p:spPr>
+        <p:txBody>
+          <a:bodyPr wrap="square" rtlCol="0" anchor="ctr"/>
+          <a:lstStyle/>
+          <a:p>
+            <a:pPr indent="0" marL="0">
+              <a:buNone/>
+            </a:pPr>
+            <a:r>
+              <a:rPr lang="en-US" sz="2000" dirty="0">
                 <a:solidFill>
                   <a:srgbClr val="111418"/>
                 </a:solidFill>
-                <a:latin typeface="Inter" pitchFamily="34" charset="0"/>
-                <a:ea typeface="Inter" pitchFamily="34" charset="-122"/>
-                <a:cs typeface="Inter" pitchFamily="34" charset="-120"/>
-              </a:rPr>
-              <a:t>Museum and exhibition adaptation</a:t>
-            </a:r>
-            <a:endParaRPr lang="en-US" sz="1800" dirty="0"/>
-          </a:p>
-        </p:txBody>
-      </p:sp>
-      <p:sp>
-        <p:nvSpPr>
-          <p:cNvPr id="11" name="Text 9"/>
-          <p:cNvSpPr/>
-          <p:nvPr/>
-        </p:nvSpPr>
-        <p:spPr>
-          <a:xfrm>
-            <a:off x="8778240" y="3017520"/>
-            <a:ext cx="2926080" cy="457200"/>
-          </a:xfrm>
-          <a:prstGeom prst="rect">
-            <a:avLst/>
-          </a:prstGeom>
-          <a:noFill/>
-          <a:ln/>
-        </p:spPr>
-        <p:txBody>
-          <a:bodyPr wrap="square" rtlCol="0" anchor="ctr"/>
-          <a:lstStyle/>
-          <a:p>
-            <a:pPr algn="r" indent="0" marL="0">
-              <a:buNone/>
-            </a:pPr>
-            <a:r>
-              <a:rPr lang="en-US" sz="1800" dirty="0">
-                <a:solidFill>
-                  <a:srgbClr val="0F766E"/>
+                <a:latin typeface="Trebuchet MS" pitchFamily="34" charset="0"/>
+                <a:ea typeface="Trebuchet MS" pitchFamily="34" charset="-122"/>
+                <a:cs typeface="Trebuchet MS" pitchFamily="34" charset="-120"/>
+              </a:rPr>
+              <a:t>New learning modules, exhibition formats, regional stories.</a:t>
+            </a:r>
+            <a:endParaRPr lang="en-US" sz="2000" dirty="0"/>
+          </a:p>
+        </p:txBody>
+      </p:sp>
+      <p:sp>
+        <p:nvSpPr>
+          <p:cNvPr id="8" name="Text 6"/>
+          <p:cNvSpPr/>
+          <p:nvPr/>
+        </p:nvSpPr>
+        <p:spPr>
+          <a:xfrm>
+            <a:off x="548640" y="4572000"/>
+            <a:ext cx="1097280" cy="548640"/>
+          </a:xfrm>
+          <a:prstGeom prst="rect">
+            <a:avLst/>
+          </a:prstGeom>
+          <a:noFill/>
+          <a:ln/>
+        </p:spPr>
+        <p:txBody>
+          <a:bodyPr wrap="square" rtlCol="0" anchor="ctr"/>
+          <a:lstStyle/>
+          <a:p>
+            <a:pPr indent="0" marL="0">
+              <a:buNone/>
+            </a:pPr>
+            <a:r>
+              <a:rPr lang="en-US" sz="2000" b="1" dirty="0">
+                <a:solidFill>
+                  <a:srgbClr val="10B981"/>
                 </a:solidFill>
                 <a:latin typeface="IBM Plex Mono" pitchFamily="34" charset="0"/>
                 <a:ea typeface="IBM Plex Mono" pitchFamily="34" charset="-122"/>
                 <a:cs typeface="IBM Plex Mono" pitchFamily="34" charset="-120"/>
               </a:rPr>
-              <a:t>$9,000</a:t>
-            </a:r>
-            <a:endParaRPr lang="en-US" sz="1800" dirty="0"/>
-          </a:p>
-        </p:txBody>
-      </p:sp>
-      <p:sp>
-        <p:nvSpPr>
-          <p:cNvPr id="12" name="Shape 10"/>
-          <p:cNvSpPr/>
-          <p:nvPr/>
-        </p:nvSpPr>
-        <p:spPr>
-          <a:xfrm>
-            <a:off x="548640" y="3566160"/>
-            <a:ext cx="11094415" cy="0"/>
-          </a:xfrm>
-          <a:prstGeom prst="line">
-            <a:avLst/>
-          </a:prstGeom>
-          <a:noFill/>
-          <a:ln w="9525">
-            <a:solidFill>
-              <a:srgbClr val="E5E5E2"/>
-            </a:solidFill>
-            <a:prstDash val="solid"/>
-          </a:ln>
-        </p:spPr>
-      </p:sp>
-      <p:sp>
-        <p:nvSpPr>
-          <p:cNvPr id="13" name="Text 11"/>
-          <p:cNvSpPr/>
-          <p:nvPr/>
-        </p:nvSpPr>
-        <p:spPr>
-          <a:xfrm>
-            <a:off x="548640" y="3611880"/>
-            <a:ext cx="8229600" cy="457200"/>
-          </a:xfrm>
-          <a:prstGeom prst="rect">
-            <a:avLst/>
-          </a:prstGeom>
-          <a:noFill/>
-          <a:ln/>
-        </p:spPr>
-        <p:txBody>
-          <a:bodyPr wrap="square" rtlCol="0" anchor="ctr"/>
-          <a:lstStyle/>
-          <a:p>
-            <a:pPr indent="0" marL="0">
-              <a:buNone/>
-            </a:pPr>
-            <a:r>
-              <a:rPr lang="en-US" sz="1800" dirty="0">
+              <a:t>Y3</a:t>
+            </a:r>
+            <a:endParaRPr lang="en-US" sz="2000" dirty="0"/>
+          </a:p>
+        </p:txBody>
+      </p:sp>
+      <p:sp>
+        <p:nvSpPr>
+          <p:cNvPr id="9" name="Text 7"/>
+          <p:cNvSpPr/>
+          <p:nvPr/>
+        </p:nvSpPr>
+        <p:spPr>
+          <a:xfrm>
+            <a:off x="1828800" y="4572000"/>
+            <a:ext cx="10058400" cy="640080"/>
+          </a:xfrm>
+          <a:prstGeom prst="rect">
+            <a:avLst/>
+          </a:prstGeom>
+          <a:noFill/>
+          <a:ln/>
+        </p:spPr>
+        <p:txBody>
+          <a:bodyPr wrap="square" rtlCol="0" anchor="ctr"/>
+          <a:lstStyle/>
+          <a:p>
+            <a:pPr indent="0" marL="0">
+              <a:buNone/>
+            </a:pPr>
+            <a:r>
+              <a:rPr lang="en-US" sz="2000" dirty="0">
                 <a:solidFill>
                   <a:srgbClr val="111418"/>
                 </a:solidFill>
-                <a:latin typeface="Inter" pitchFamily="34" charset="0"/>
-                <a:ea typeface="Inter" pitchFamily="34" charset="-122"/>
-                <a:cs typeface="Inter" pitchFamily="34" charset="-120"/>
-              </a:rPr>
-              <a:t>Visual and interface design</a:t>
-            </a:r>
-            <a:endParaRPr lang="en-US" sz="1800" dirty="0"/>
-          </a:p>
-        </p:txBody>
-      </p:sp>
-      <p:sp>
-        <p:nvSpPr>
-          <p:cNvPr id="14" name="Text 12"/>
-          <p:cNvSpPr/>
-          <p:nvPr/>
-        </p:nvSpPr>
-        <p:spPr>
-          <a:xfrm>
-            <a:off x="8778240" y="3611880"/>
-            <a:ext cx="2926080" cy="457200"/>
+                <a:latin typeface="Trebuchet MS" pitchFamily="34" charset="0"/>
+                <a:ea typeface="Trebuchet MS" pitchFamily="34" charset="-122"/>
+                <a:cs typeface="Trebuchet MS" pitchFamily="34" charset="-120"/>
+              </a:rPr>
+              <a:t>Free public platform for education, culture and ecology.</a:t>
+            </a:r>
+            <a:endParaRPr lang="en-US" sz="2000" dirty="0"/>
+          </a:p>
+        </p:txBody>
+      </p:sp>
+      <p:sp>
+        <p:nvSpPr>
+          <p:cNvPr id="10" name="Text 8"/>
+          <p:cNvSpPr/>
+          <p:nvPr/>
+        </p:nvSpPr>
+        <p:spPr>
+          <a:xfrm>
+            <a:off x="10728655" y="6400800"/>
+            <a:ext cx="1097280" cy="274320"/>
           </a:xfrm>
           <a:prstGeom prst="rect">
             <a:avLst/>
@@ -3610,357 +3491,15 @@
               <a:buNone/>
             </a:pPr>
             <a:r>
-              <a:rPr lang="en-US" sz="1800" dirty="0">
-                <a:solidFill>
-                  <a:srgbClr val="0F766E"/>
+              <a:rPr lang="en-US" sz="900" dirty="0">
+                <a:solidFill>
+                  <a:srgbClr val="5B6068"/>
                 </a:solidFill>
                 <a:latin typeface="IBM Plex Mono" pitchFamily="34" charset="0"/>
                 <a:ea typeface="IBM Plex Mono" pitchFamily="34" charset="-122"/>
                 <a:cs typeface="IBM Plex Mono" pitchFamily="34" charset="-120"/>
               </a:rPr>
-              <a:t>$3,000</a:t>
-            </a:r>
-            <a:endParaRPr lang="en-US" sz="1800" dirty="0"/>
-          </a:p>
-        </p:txBody>
-      </p:sp>
-      <p:sp>
-        <p:nvSpPr>
-          <p:cNvPr id="15" name="Shape 13"/>
-          <p:cNvSpPr/>
-          <p:nvPr/>
-        </p:nvSpPr>
-        <p:spPr>
-          <a:xfrm>
-            <a:off x="548640" y="4160520"/>
-            <a:ext cx="11094415" cy="0"/>
-          </a:xfrm>
-          <a:prstGeom prst="line">
-            <a:avLst/>
-          </a:prstGeom>
-          <a:noFill/>
-          <a:ln w="9525">
-            <a:solidFill>
-              <a:srgbClr val="E5E5E2"/>
-            </a:solidFill>
-            <a:prstDash val="solid"/>
-          </a:ln>
-        </p:spPr>
-      </p:sp>
-      <p:sp>
-        <p:nvSpPr>
-          <p:cNvPr id="16" name="Text 14"/>
-          <p:cNvSpPr/>
-          <p:nvPr/>
-        </p:nvSpPr>
-        <p:spPr>
-          <a:xfrm>
-            <a:off x="548640" y="4206240"/>
-            <a:ext cx="8229600" cy="457200"/>
-          </a:xfrm>
-          <a:prstGeom prst="rect">
-            <a:avLst/>
-          </a:prstGeom>
-          <a:noFill/>
-          <a:ln/>
-        </p:spPr>
-        <p:txBody>
-          <a:bodyPr wrap="square" rtlCol="0" anchor="ctr"/>
-          <a:lstStyle/>
-          <a:p>
-            <a:pPr indent="0" marL="0">
-              <a:buNone/>
-            </a:pPr>
-            <a:r>
-              <a:rPr lang="en-US" sz="1800" dirty="0">
-                <a:solidFill>
-                  <a:srgbClr val="111418"/>
-                </a:solidFill>
-                <a:latin typeface="Inter" pitchFamily="34" charset="0"/>
-                <a:ea typeface="Inter" pitchFamily="34" charset="-122"/>
-                <a:cs typeface="Inter" pitchFamily="34" charset="-120"/>
-              </a:rPr>
-              <a:t>Documentation, video, materials</a:t>
-            </a:r>
-            <a:endParaRPr lang="en-US" sz="1800" dirty="0"/>
-          </a:p>
-        </p:txBody>
-      </p:sp>
-      <p:sp>
-        <p:nvSpPr>
-          <p:cNvPr id="17" name="Text 15"/>
-          <p:cNvSpPr/>
-          <p:nvPr/>
-        </p:nvSpPr>
-        <p:spPr>
-          <a:xfrm>
-            <a:off x="8778240" y="4206240"/>
-            <a:ext cx="2926080" cy="457200"/>
-          </a:xfrm>
-          <a:prstGeom prst="rect">
-            <a:avLst/>
-          </a:prstGeom>
-          <a:noFill/>
-          <a:ln/>
-        </p:spPr>
-        <p:txBody>
-          <a:bodyPr wrap="square" rtlCol="0" anchor="ctr"/>
-          <a:lstStyle/>
-          <a:p>
-            <a:pPr algn="r" indent="0" marL="0">
-              <a:buNone/>
-            </a:pPr>
-            <a:r>
-              <a:rPr lang="en-US" sz="1800" dirty="0">
-                <a:solidFill>
-                  <a:srgbClr val="0F766E"/>
-                </a:solidFill>
-                <a:latin typeface="IBM Plex Mono" pitchFamily="34" charset="0"/>
-                <a:ea typeface="IBM Plex Mono" pitchFamily="34" charset="-122"/>
-                <a:cs typeface="IBM Plex Mono" pitchFamily="34" charset="-120"/>
-              </a:rPr>
-              <a:t>$2,000</a:t>
-            </a:r>
-            <a:endParaRPr lang="en-US" sz="1800" dirty="0"/>
-          </a:p>
-        </p:txBody>
-      </p:sp>
-      <p:sp>
-        <p:nvSpPr>
-          <p:cNvPr id="18" name="Shape 16"/>
-          <p:cNvSpPr/>
-          <p:nvPr/>
-        </p:nvSpPr>
-        <p:spPr>
-          <a:xfrm>
-            <a:off x="548640" y="4754880"/>
-            <a:ext cx="11094415" cy="0"/>
-          </a:xfrm>
-          <a:prstGeom prst="line">
-            <a:avLst/>
-          </a:prstGeom>
-          <a:noFill/>
-          <a:ln w="9525">
-            <a:solidFill>
-              <a:srgbClr val="E5E5E2"/>
-            </a:solidFill>
-            <a:prstDash val="solid"/>
-          </a:ln>
-        </p:spPr>
-      </p:sp>
-      <p:sp>
-        <p:nvSpPr>
-          <p:cNvPr id="19" name="Text 17"/>
-          <p:cNvSpPr/>
-          <p:nvPr/>
-        </p:nvSpPr>
-        <p:spPr>
-          <a:xfrm>
-            <a:off x="548640" y="4800600"/>
-            <a:ext cx="8229600" cy="457200"/>
-          </a:xfrm>
-          <a:prstGeom prst="rect">
-            <a:avLst/>
-          </a:prstGeom>
-          <a:noFill/>
-          <a:ln/>
-        </p:spPr>
-        <p:txBody>
-          <a:bodyPr wrap="square" rtlCol="0" anchor="ctr"/>
-          <a:lstStyle/>
-          <a:p>
-            <a:pPr indent="0" marL="0">
-              <a:buNone/>
-            </a:pPr>
-            <a:r>
-              <a:rPr lang="en-US" sz="1800" dirty="0">
-                <a:solidFill>
-                  <a:srgbClr val="111418"/>
-                </a:solidFill>
-                <a:latin typeface="Inter" pitchFamily="34" charset="0"/>
-                <a:ea typeface="Inter" pitchFamily="34" charset="-122"/>
-                <a:cs typeface="Inter" pitchFamily="34" charset="-120"/>
-              </a:rPr>
-              <a:t>Coordination and production</a:t>
-            </a:r>
-            <a:endParaRPr lang="en-US" sz="1800" dirty="0"/>
-          </a:p>
-        </p:txBody>
-      </p:sp>
-      <p:sp>
-        <p:nvSpPr>
-          <p:cNvPr id="20" name="Text 18"/>
-          <p:cNvSpPr/>
-          <p:nvPr/>
-        </p:nvSpPr>
-        <p:spPr>
-          <a:xfrm>
-            <a:off x="8778240" y="4800600"/>
-            <a:ext cx="2926080" cy="457200"/>
-          </a:xfrm>
-          <a:prstGeom prst="rect">
-            <a:avLst/>
-          </a:prstGeom>
-          <a:noFill/>
-          <a:ln/>
-        </p:spPr>
-        <p:txBody>
-          <a:bodyPr wrap="square" rtlCol="0" anchor="ctr"/>
-          <a:lstStyle/>
-          <a:p>
-            <a:pPr algn="r" indent="0" marL="0">
-              <a:buNone/>
-            </a:pPr>
-            <a:r>
-              <a:rPr lang="en-US" sz="1800" dirty="0">
-                <a:solidFill>
-                  <a:srgbClr val="0F766E"/>
-                </a:solidFill>
-                <a:latin typeface="IBM Plex Mono" pitchFamily="34" charset="0"/>
-                <a:ea typeface="IBM Plex Mono" pitchFamily="34" charset="-122"/>
-                <a:cs typeface="IBM Plex Mono" pitchFamily="34" charset="-120"/>
-              </a:rPr>
-              <a:t>$2,000</a:t>
-            </a:r>
-            <a:endParaRPr lang="en-US" sz="1800" dirty="0"/>
-          </a:p>
-        </p:txBody>
-      </p:sp>
-      <p:sp>
-        <p:nvSpPr>
-          <p:cNvPr id="21" name="Shape 19"/>
-          <p:cNvSpPr/>
-          <p:nvPr/>
-        </p:nvSpPr>
-        <p:spPr>
-          <a:xfrm>
-            <a:off x="548640" y="5349240"/>
-            <a:ext cx="11094415" cy="0"/>
-          </a:xfrm>
-          <a:prstGeom prst="line">
-            <a:avLst/>
-          </a:prstGeom>
-          <a:noFill/>
-          <a:ln w="9525">
-            <a:solidFill>
-              <a:srgbClr val="E5E5E2"/>
-            </a:solidFill>
-            <a:prstDash val="solid"/>
-          </a:ln>
-        </p:spPr>
-      </p:sp>
-      <p:sp>
-        <p:nvSpPr>
-          <p:cNvPr id="22" name="Text 20"/>
-          <p:cNvSpPr/>
-          <p:nvPr/>
-        </p:nvSpPr>
-        <p:spPr>
-          <a:xfrm>
-            <a:off x="548640" y="5486400"/>
-            <a:ext cx="8229600" cy="457200"/>
-          </a:xfrm>
-          <a:prstGeom prst="rect">
-            <a:avLst/>
-          </a:prstGeom>
-          <a:noFill/>
-          <a:ln/>
-        </p:spPr>
-        <p:txBody>
-          <a:bodyPr wrap="square" rtlCol="0" anchor="ctr"/>
-          <a:lstStyle/>
-          <a:p>
-            <a:pPr indent="0" marL="0">
-              <a:buNone/>
-            </a:pPr>
-            <a:r>
-              <a:rPr lang="en-US" sz="1400" spc="800" kern="0" dirty="0">
-                <a:solidFill>
-                  <a:srgbClr val="6B7077"/>
-                </a:solidFill>
-                <a:latin typeface="IBM Plex Mono" pitchFamily="34" charset="0"/>
-                <a:ea typeface="IBM Plex Mono" pitchFamily="34" charset="-122"/>
-                <a:cs typeface="IBM Plex Mono" pitchFamily="34" charset="-120"/>
-              </a:rPr>
-              <a:t>TOTAL</a:t>
-            </a:r>
-            <a:endParaRPr lang="en-US" sz="1400" dirty="0"/>
-          </a:p>
-        </p:txBody>
-      </p:sp>
-      <p:sp>
-        <p:nvSpPr>
-          <p:cNvPr id="23" name="Text 21"/>
-          <p:cNvSpPr/>
-          <p:nvPr/>
-        </p:nvSpPr>
-        <p:spPr>
-          <a:xfrm>
-            <a:off x="8778240" y="5440680"/>
-            <a:ext cx="2926080" cy="548640"/>
-          </a:xfrm>
-          <a:prstGeom prst="rect">
-            <a:avLst/>
-          </a:prstGeom>
-          <a:noFill/>
-          <a:ln/>
-        </p:spPr>
-        <p:txBody>
-          <a:bodyPr wrap="square" rtlCol="0" anchor="ctr"/>
-          <a:lstStyle/>
-          <a:p>
-            <a:pPr algn="r" indent="0" marL="0">
-              <a:buNone/>
-            </a:pPr>
-            <a:r>
-              <a:rPr lang="en-US" sz="2800" dirty="0">
-                <a:solidFill>
-                  <a:srgbClr val="111418"/>
-                </a:solidFill>
-                <a:latin typeface="Inter" pitchFamily="34" charset="0"/>
-                <a:ea typeface="Inter" pitchFamily="34" charset="-122"/>
-                <a:cs typeface="Inter" pitchFamily="34" charset="-120"/>
-              </a:rPr>
-              <a:t>$30,000</a:t>
-            </a:r>
-            <a:endParaRPr lang="en-US" sz="2800" dirty="0"/>
-          </a:p>
-        </p:txBody>
-      </p:sp>
-      <p:sp>
-        <p:nvSpPr>
-          <p:cNvPr id="24" name="Text 22"/>
-          <p:cNvSpPr/>
-          <p:nvPr/>
-        </p:nvSpPr>
-        <p:spPr>
-          <a:xfrm>
-            <a:off x="10728655" y="6400800"/>
-            <a:ext cx="1097280" cy="274320"/>
-          </a:xfrm>
-          <a:prstGeom prst="rect">
-            <a:avLst/>
-          </a:prstGeom>
-          <a:noFill/>
-          <a:ln/>
-        </p:spPr>
-        <p:txBody>
-          <a:bodyPr wrap="square" rtlCol="0" anchor="ctr"/>
-          <a:lstStyle/>
-          <a:p>
-            <a:pPr algn="r" indent="0" marL="0">
-              <a:buNone/>
-            </a:pPr>
-            <a:r>
-              <a:rPr lang="en-US" sz="900" spc="400" kern="0" dirty="0">
-                <a:solidFill>
-                  <a:srgbClr val="6B7077"/>
-                </a:solidFill>
-                <a:latin typeface="IBM Plex Mono" pitchFamily="34" charset="0"/>
-                <a:ea typeface="IBM Plex Mono" pitchFamily="34" charset="-122"/>
-                <a:cs typeface="IBM Plex Mono" pitchFamily="34" charset="-120"/>
-              </a:rPr>
-              <a:t>11 / 15</a:t>
+              <a:t>11 / 14</a:t>
             </a:r>
             <a:endParaRPr lang="en-US" sz="900" dirty="0"/>
           </a:p>
@@ -3968,7 +3507,7 @@
       </p:sp>
       <p:sp>
         <p:nvSpPr>
-          <p:cNvPr id="25" name="Text 23"/>
+          <p:cNvPr id="11" name="Text 9"/>
           <p:cNvSpPr/>
           <p:nvPr/>
         </p:nvSpPr>
@@ -3993,7 +3532,7 @@
             <a:r>
               <a:rPr lang="en-US" sz="900" spc="600" kern="0" dirty="0">
                 <a:solidFill>
-                  <a:srgbClr val="6B7077"/>
+                  <a:srgbClr val="5B6068"/>
                 </a:solidFill>
                 <a:latin typeface="IBM Plex Mono" pitchFamily="34" charset="0"/>
                 <a:ea typeface="IBM Plex Mono" pitchFamily="34" charset="-122"/>
@@ -4062,15 +3601,15 @@
               <a:buNone/>
             </a:pPr>
             <a:r>
-              <a:rPr lang="en-US" sz="900" spc="800" kern="0" dirty="0">
-                <a:solidFill>
-                  <a:srgbClr val="0F766E"/>
+              <a:rPr lang="en-US" sz="900" b="1" spc="800" kern="0" dirty="0">
+                <a:solidFill>
+                  <a:srgbClr val="3B82F6"/>
                 </a:solidFill>
                 <a:latin typeface="IBM Plex Mono" pitchFamily="34" charset="0"/>
                 <a:ea typeface="IBM Plex Mono" pitchFamily="34" charset="-122"/>
                 <a:cs typeface="IBM Plex Mono" pitchFamily="34" charset="-120"/>
               </a:rPr>
-              <a:t>3-YEAR PLAN</a:t>
+              <a:t>WHERE IT GOES</a:t>
             </a:r>
             <a:endParaRPr lang="en-US" sz="900" dirty="0"/>
           </a:p>
@@ -4085,33 +3624,33 @@
         <p:spPr>
           <a:xfrm>
             <a:off x="548640" y="914400"/>
-            <a:ext cx="10972800" cy="822960"/>
-          </a:xfrm>
-          <a:prstGeom prst="rect">
-            <a:avLst/>
-          </a:prstGeom>
-          <a:noFill/>
-          <a:ln/>
-        </p:spPr>
-        <p:txBody>
-          <a:bodyPr wrap="square" rtlCol="0" anchor="ctr"/>
-          <a:lstStyle/>
-          <a:p>
-            <a:pPr indent="0" marL="0">
-              <a:buNone/>
-            </a:pPr>
-            <a:r>
-              <a:rPr lang="en-US" sz="4000" dirty="0">
+            <a:ext cx="10972800" cy="914400"/>
+          </a:xfrm>
+          <a:prstGeom prst="rect">
+            <a:avLst/>
+          </a:prstGeom>
+          <a:noFill/>
+          <a:ln/>
+        </p:spPr>
+        <p:txBody>
+          <a:bodyPr wrap="square" rtlCol="0" anchor="ctr"/>
+          <a:lstStyle/>
+          <a:p>
+            <a:pPr indent="0" marL="0">
+              <a:buNone/>
+            </a:pPr>
+            <a:r>
+              <a:rPr lang="en-US" sz="4800" b="1" spc="400" kern="0" dirty="0">
                 <a:solidFill>
                   <a:srgbClr val="111418"/>
                 </a:solidFill>
-                <a:latin typeface="Inter" pitchFamily="34" charset="0"/>
-                <a:ea typeface="Inter" pitchFamily="34" charset="-122"/>
-                <a:cs typeface="Inter" pitchFamily="34" charset="-120"/>
-              </a:rPr>
-              <a:t>$150K over 3 years.</a:t>
-            </a:r>
-            <a:endParaRPr lang="en-US" sz="4000" dirty="0"/>
+                <a:latin typeface="Trebuchet MS" pitchFamily="34" charset="0"/>
+                <a:ea typeface="Trebuchet MS" pitchFamily="34" charset="-122"/>
+                <a:cs typeface="Trebuchet MS" pitchFamily="34" charset="-120"/>
+              </a:rPr>
+              <a:t>VENUES.</a:t>
+            </a:r>
+            <a:endParaRPr lang="en-US" sz="4800" dirty="0"/>
           </a:p>
         </p:txBody>
       </p:sp>
@@ -4124,31 +3663,70 @@
         <p:spPr>
           <a:xfrm>
             <a:off x="548640" y="2377440"/>
-            <a:ext cx="1097280" cy="457200"/>
-          </a:xfrm>
-          <a:prstGeom prst="rect">
-            <a:avLst/>
-          </a:prstGeom>
-          <a:noFill/>
-          <a:ln/>
-        </p:spPr>
-        <p:txBody>
-          <a:bodyPr wrap="square" rtlCol="0" anchor="ctr"/>
-          <a:lstStyle/>
-          <a:p>
-            <a:pPr indent="0" marL="0">
-              <a:buNone/>
-            </a:pPr>
-            <a:r>
-              <a:rPr lang="en-US" sz="1800" dirty="0">
-                <a:solidFill>
-                  <a:srgbClr val="0F766E"/>
+            <a:ext cx="640080" cy="457200"/>
+          </a:xfrm>
+          <a:prstGeom prst="rect">
+            <a:avLst/>
+          </a:prstGeom>
+          <a:noFill/>
+          <a:ln/>
+        </p:spPr>
+        <p:txBody>
+          <a:bodyPr wrap="square" rtlCol="0" anchor="ctr"/>
+          <a:lstStyle/>
+          <a:p>
+            <a:pPr indent="0" marL="0">
+              <a:buNone/>
+            </a:pPr>
+            <a:r>
+              <a:rPr lang="en-US" sz="1100" b="1" dirty="0">
+                <a:solidFill>
+                  <a:srgbClr val="3B82F6"/>
                 </a:solidFill>
                 <a:latin typeface="IBM Plex Mono" pitchFamily="34" charset="0"/>
                 <a:ea typeface="IBM Plex Mono" pitchFamily="34" charset="-122"/>
                 <a:cs typeface="IBM Plex Mono" pitchFamily="34" charset="-120"/>
               </a:rPr>
-              <a:t>Y1</a:t>
+              <a:t>01</a:t>
+            </a:r>
+            <a:endParaRPr lang="en-US" sz="1100" dirty="0"/>
+          </a:p>
+        </p:txBody>
+      </p:sp>
+      <p:sp>
+        <p:nvSpPr>
+          <p:cNvPr id="5" name="Text 3"/>
+          <p:cNvSpPr/>
+          <p:nvPr/>
+        </p:nvSpPr>
+        <p:spPr>
+          <a:xfrm>
+            <a:off x="1188720" y="2377440"/>
+            <a:ext cx="4846320" cy="457200"/>
+          </a:xfrm>
+          <a:prstGeom prst="rect">
+            <a:avLst/>
+          </a:prstGeom>
+          <a:noFill/>
+          <a:ln/>
+        </p:spPr>
+        <p:txBody>
+          <a:bodyPr wrap="square" rtlCol="0" anchor="ctr"/>
+          <a:lstStyle/>
+          <a:p>
+            <a:pPr indent="0" marL="0">
+              <a:buNone/>
+            </a:pPr>
+            <a:r>
+              <a:rPr lang="en-US" sz="1800" dirty="0">
+                <a:solidFill>
+                  <a:srgbClr val="111418"/>
+                </a:solidFill>
+                <a:latin typeface="Trebuchet MS" pitchFamily="34" charset="0"/>
+                <a:ea typeface="Trebuchet MS" pitchFamily="34" charset="-122"/>
+                <a:cs typeface="Trebuchet MS" pitchFamily="34" charset="-120"/>
+              </a:rPr>
+              <a:t>Aral Culture Summit 2026</a:t>
             </a:r>
             <a:endParaRPr lang="en-US" sz="1800" dirty="0"/>
           </a:p>
@@ -4156,77 +3734,77 @@
       </p:sp>
       <p:sp>
         <p:nvSpPr>
-          <p:cNvPr id="5" name="Text 3"/>
-          <p:cNvSpPr/>
-          <p:nvPr/>
-        </p:nvSpPr>
-        <p:spPr>
-          <a:xfrm>
-            <a:off x="1828800" y="2377440"/>
-            <a:ext cx="10058400" cy="640080"/>
-          </a:xfrm>
-          <a:prstGeom prst="rect">
-            <a:avLst/>
-          </a:prstGeom>
-          <a:noFill/>
-          <a:ln/>
-        </p:spPr>
-        <p:txBody>
-          <a:bodyPr wrap="square" rtlCol="0" anchor="ctr"/>
-          <a:lstStyle/>
-          <a:p>
-            <a:pPr indent="0" marL="0">
-              <a:buNone/>
-            </a:pPr>
-            <a:r>
-              <a:rPr lang="en-US" sz="2000" dirty="0">
-                <a:solidFill>
-                  <a:srgbClr val="111418"/>
-                </a:solidFill>
-                <a:latin typeface="Inter" pitchFamily="34" charset="0"/>
-                <a:ea typeface="Inter" pitchFamily="34" charset="-122"/>
-                <a:cs typeface="Inter" pitchFamily="34" charset="-120"/>
-              </a:rPr>
-              <a:t>Curriculum alignment, school pilots, museum installations.</a:t>
-            </a:r>
-            <a:endParaRPr lang="en-US" sz="2000" dirty="0"/>
-          </a:p>
-        </p:txBody>
-      </p:sp>
-      <p:sp>
-        <p:nvSpPr>
           <p:cNvPr id="6" name="Text 4"/>
           <p:cNvSpPr/>
           <p:nvPr/>
         </p:nvSpPr>
         <p:spPr>
           <a:xfrm>
-            <a:off x="548640" y="3383280"/>
-            <a:ext cx="1097280" cy="457200"/>
-          </a:xfrm>
-          <a:prstGeom prst="rect">
-            <a:avLst/>
-          </a:prstGeom>
-          <a:noFill/>
-          <a:ln/>
-        </p:spPr>
-        <p:txBody>
-          <a:bodyPr wrap="square" rtlCol="0" anchor="ctr"/>
-          <a:lstStyle/>
-          <a:p>
-            <a:pPr indent="0" marL="0">
-              <a:buNone/>
-            </a:pPr>
-            <a:r>
-              <a:rPr lang="en-US" sz="1800" dirty="0">
-                <a:solidFill>
-                  <a:srgbClr val="0F766E"/>
+            <a:off x="6217920" y="2377440"/>
+            <a:ext cx="640080" cy="457200"/>
+          </a:xfrm>
+          <a:prstGeom prst="rect">
+            <a:avLst/>
+          </a:prstGeom>
+          <a:noFill/>
+          <a:ln/>
+        </p:spPr>
+        <p:txBody>
+          <a:bodyPr wrap="square" rtlCol="0" anchor="ctr"/>
+          <a:lstStyle/>
+          <a:p>
+            <a:pPr indent="0" marL="0">
+              <a:buNone/>
+            </a:pPr>
+            <a:r>
+              <a:rPr lang="en-US" sz="1100" b="1" dirty="0">
+                <a:solidFill>
+                  <a:srgbClr val="EC4899"/>
                 </a:solidFill>
                 <a:latin typeface="IBM Plex Mono" pitchFamily="34" charset="0"/>
                 <a:ea typeface="IBM Plex Mono" pitchFamily="34" charset="-122"/>
                 <a:cs typeface="IBM Plex Mono" pitchFamily="34" charset="-120"/>
               </a:rPr>
-              <a:t>Y2</a:t>
+              <a:t>02</a:t>
+            </a:r>
+            <a:endParaRPr lang="en-US" sz="1100" dirty="0"/>
+          </a:p>
+        </p:txBody>
+      </p:sp>
+      <p:sp>
+        <p:nvSpPr>
+          <p:cNvPr id="7" name="Text 5"/>
+          <p:cNvSpPr/>
+          <p:nvPr/>
+        </p:nvSpPr>
+        <p:spPr>
+          <a:xfrm>
+            <a:off x="6858000" y="2377440"/>
+            <a:ext cx="4846320" cy="457200"/>
+          </a:xfrm>
+          <a:prstGeom prst="rect">
+            <a:avLst/>
+          </a:prstGeom>
+          <a:noFill/>
+          <a:ln/>
+        </p:spPr>
+        <p:txBody>
+          <a:bodyPr wrap="square" rtlCol="0" anchor="ctr"/>
+          <a:lstStyle/>
+          <a:p>
+            <a:pPr indent="0" marL="0">
+              <a:buNone/>
+            </a:pPr>
+            <a:r>
+              <a:rPr lang="en-US" sz="1800" dirty="0">
+                <a:solidFill>
+                  <a:srgbClr val="111418"/>
+                </a:solidFill>
+                <a:latin typeface="Trebuchet MS" pitchFamily="34" charset="0"/>
+                <a:ea typeface="Trebuchet MS" pitchFamily="34" charset="-122"/>
+                <a:cs typeface="Trebuchet MS" pitchFamily="34" charset="-120"/>
+              </a:rPr>
+              <a:t>Savitsky Museum</a:t>
             </a:r>
             <a:endParaRPr lang="en-US" sz="1800" dirty="0"/>
           </a:p>
@@ -4234,77 +3812,77 @@
       </p:sp>
       <p:sp>
         <p:nvSpPr>
-          <p:cNvPr id="7" name="Text 5"/>
-          <p:cNvSpPr/>
-          <p:nvPr/>
-        </p:nvSpPr>
-        <p:spPr>
-          <a:xfrm>
-            <a:off x="1828800" y="3383280"/>
-            <a:ext cx="10058400" cy="640080"/>
-          </a:xfrm>
-          <a:prstGeom prst="rect">
-            <a:avLst/>
-          </a:prstGeom>
-          <a:noFill/>
-          <a:ln/>
-        </p:spPr>
-        <p:txBody>
-          <a:bodyPr wrap="square" rtlCol="0" anchor="ctr"/>
-          <a:lstStyle/>
-          <a:p>
-            <a:pPr indent="0" marL="0">
-              <a:buNone/>
-            </a:pPr>
-            <a:r>
-              <a:rPr lang="en-US" sz="2000" dirty="0">
-                <a:solidFill>
-                  <a:srgbClr val="111418"/>
-                </a:solidFill>
-                <a:latin typeface="Inter" pitchFamily="34" charset="0"/>
-                <a:ea typeface="Inter" pitchFamily="34" charset="-122"/>
-                <a:cs typeface="Inter" pitchFamily="34" charset="-120"/>
-              </a:rPr>
-              <a:t>New learning modules, exhibition formats, regional stories.</a:t>
-            </a:r>
-            <a:endParaRPr lang="en-US" sz="2000" dirty="0"/>
-          </a:p>
-        </p:txBody>
-      </p:sp>
-      <p:sp>
-        <p:nvSpPr>
           <p:cNvPr id="8" name="Text 6"/>
           <p:cNvSpPr/>
           <p:nvPr/>
         </p:nvSpPr>
         <p:spPr>
           <a:xfrm>
-            <a:off x="548640" y="4389120"/>
-            <a:ext cx="1097280" cy="457200"/>
-          </a:xfrm>
-          <a:prstGeom prst="rect">
-            <a:avLst/>
-          </a:prstGeom>
-          <a:noFill/>
-          <a:ln/>
-        </p:spPr>
-        <p:txBody>
-          <a:bodyPr wrap="square" rtlCol="0" anchor="ctr"/>
-          <a:lstStyle/>
-          <a:p>
-            <a:pPr indent="0" marL="0">
-              <a:buNone/>
-            </a:pPr>
-            <a:r>
-              <a:rPr lang="en-US" sz="1800" dirty="0">
-                <a:solidFill>
-                  <a:srgbClr val="0F766E"/>
+            <a:off x="548640" y="3154680"/>
+            <a:ext cx="640080" cy="457200"/>
+          </a:xfrm>
+          <a:prstGeom prst="rect">
+            <a:avLst/>
+          </a:prstGeom>
+          <a:noFill/>
+          <a:ln/>
+        </p:spPr>
+        <p:txBody>
+          <a:bodyPr wrap="square" rtlCol="0" anchor="ctr"/>
+          <a:lstStyle/>
+          <a:p>
+            <a:pPr indent="0" marL="0">
+              <a:buNone/>
+            </a:pPr>
+            <a:r>
+              <a:rPr lang="en-US" sz="1100" b="1" dirty="0">
+                <a:solidFill>
+                  <a:srgbClr val="10B981"/>
                 </a:solidFill>
                 <a:latin typeface="IBM Plex Mono" pitchFamily="34" charset="0"/>
                 <a:ea typeface="IBM Plex Mono" pitchFamily="34" charset="-122"/>
                 <a:cs typeface="IBM Plex Mono" pitchFamily="34" charset="-120"/>
               </a:rPr>
-              <a:t>Y3</a:t>
+              <a:t>03</a:t>
+            </a:r>
+            <a:endParaRPr lang="en-US" sz="1100" dirty="0"/>
+          </a:p>
+        </p:txBody>
+      </p:sp>
+      <p:sp>
+        <p:nvSpPr>
+          <p:cNvPr id="9" name="Text 7"/>
+          <p:cNvSpPr/>
+          <p:nvPr/>
+        </p:nvSpPr>
+        <p:spPr>
+          <a:xfrm>
+            <a:off x="1188720" y="3154680"/>
+            <a:ext cx="4846320" cy="457200"/>
+          </a:xfrm>
+          <a:prstGeom prst="rect">
+            <a:avLst/>
+          </a:prstGeom>
+          <a:noFill/>
+          <a:ln/>
+        </p:spPr>
+        <p:txBody>
+          <a:bodyPr wrap="square" rtlCol="0" anchor="ctr"/>
+          <a:lstStyle/>
+          <a:p>
+            <a:pPr indent="0" marL="0">
+              <a:buNone/>
+            </a:pPr>
+            <a:r>
+              <a:rPr lang="en-US" sz="1800" dirty="0">
+                <a:solidFill>
+                  <a:srgbClr val="111418"/>
+                </a:solidFill>
+                <a:latin typeface="Trebuchet MS" pitchFamily="34" charset="0"/>
+                <a:ea typeface="Trebuchet MS" pitchFamily="34" charset="-122"/>
+                <a:cs typeface="Trebuchet MS" pitchFamily="34" charset="-120"/>
+              </a:rPr>
+              <a:t>History and Aral Sea Museum</a:t>
             </a:r>
             <a:endParaRPr lang="en-US" sz="1800" dirty="0"/>
           </a:p>
@@ -4312,77 +3890,428 @@
       </p:sp>
       <p:sp>
         <p:nvSpPr>
-          <p:cNvPr id="9" name="Text 7"/>
-          <p:cNvSpPr/>
-          <p:nvPr/>
-        </p:nvSpPr>
-        <p:spPr>
-          <a:xfrm>
-            <a:off x="1828800" y="4389120"/>
-            <a:ext cx="10058400" cy="640080"/>
-          </a:xfrm>
-          <a:prstGeom prst="rect">
-            <a:avLst/>
-          </a:prstGeom>
-          <a:noFill/>
-          <a:ln/>
-        </p:spPr>
-        <p:txBody>
-          <a:bodyPr wrap="square" rtlCol="0" anchor="ctr"/>
-          <a:lstStyle/>
-          <a:p>
-            <a:pPr indent="0" marL="0">
-              <a:buNone/>
-            </a:pPr>
-            <a:r>
-              <a:rPr lang="en-US" sz="2000" dirty="0">
-                <a:solidFill>
-                  <a:srgbClr val="111418"/>
-                </a:solidFill>
-                <a:latin typeface="Inter" pitchFamily="34" charset="0"/>
-                <a:ea typeface="Inter" pitchFamily="34" charset="-122"/>
-                <a:cs typeface="Inter" pitchFamily="34" charset="-120"/>
-              </a:rPr>
-              <a:t>Free public platform for education, culture and ecology.</a:t>
-            </a:r>
-            <a:endParaRPr lang="en-US" sz="2000" dirty="0"/>
-          </a:p>
-        </p:txBody>
-      </p:sp>
-      <p:sp>
-        <p:nvSpPr>
           <p:cNvPr id="10" name="Text 8"/>
           <p:cNvSpPr/>
           <p:nvPr/>
         </p:nvSpPr>
         <p:spPr>
           <a:xfrm>
-            <a:off x="10728655" y="6400800"/>
-            <a:ext cx="1097280" cy="274320"/>
-          </a:xfrm>
-          <a:prstGeom prst="rect">
-            <a:avLst/>
-          </a:prstGeom>
-          <a:noFill/>
-          <a:ln/>
-        </p:spPr>
-        <p:txBody>
-          <a:bodyPr wrap="square" rtlCol="0" anchor="ctr"/>
-          <a:lstStyle/>
-          <a:p>
-            <a:pPr algn="r" indent="0" marL="0">
-              <a:buNone/>
-            </a:pPr>
-            <a:r>
-              <a:rPr lang="en-US" sz="900" spc="400" kern="0" dirty="0">
-                <a:solidFill>
-                  <a:srgbClr val="6B7077"/>
+            <a:off x="6217920" y="3154680"/>
+            <a:ext cx="640080" cy="457200"/>
+          </a:xfrm>
+          <a:prstGeom prst="rect">
+            <a:avLst/>
+          </a:prstGeom>
+          <a:noFill/>
+          <a:ln/>
+        </p:spPr>
+        <p:txBody>
+          <a:bodyPr wrap="square" rtlCol="0" anchor="ctr"/>
+          <a:lstStyle/>
+          <a:p>
+            <a:pPr indent="0" marL="0">
+              <a:buNone/>
+            </a:pPr>
+            <a:r>
+              <a:rPr lang="en-US" sz="1100" b="1" dirty="0">
+                <a:solidFill>
+                  <a:srgbClr val="F59E0B"/>
                 </a:solidFill>
                 <a:latin typeface="IBM Plex Mono" pitchFamily="34" charset="0"/>
                 <a:ea typeface="IBM Plex Mono" pitchFamily="34" charset="-122"/>
                 <a:cs typeface="IBM Plex Mono" pitchFamily="34" charset="-120"/>
               </a:rPr>
-              <a:t>12 / 15</a:t>
+              <a:t>04</a:t>
+            </a:r>
+            <a:endParaRPr lang="en-US" sz="1100" dirty="0"/>
+          </a:p>
+        </p:txBody>
+      </p:sp>
+      <p:sp>
+        <p:nvSpPr>
+          <p:cNvPr id="11" name="Text 9"/>
+          <p:cNvSpPr/>
+          <p:nvPr/>
+        </p:nvSpPr>
+        <p:spPr>
+          <a:xfrm>
+            <a:off x="6858000" y="3154680"/>
+            <a:ext cx="4846320" cy="457200"/>
+          </a:xfrm>
+          <a:prstGeom prst="rect">
+            <a:avLst/>
+          </a:prstGeom>
+          <a:noFill/>
+          <a:ln/>
+        </p:spPr>
+        <p:txBody>
+          <a:bodyPr wrap="square" rtlCol="0" anchor="ctr"/>
+          <a:lstStyle/>
+          <a:p>
+            <a:pPr indent="0" marL="0">
+              <a:buNone/>
+            </a:pPr>
+            <a:r>
+              <a:rPr lang="en-US" sz="1800" dirty="0">
+                <a:solidFill>
+                  <a:srgbClr val="111418"/>
+                </a:solidFill>
+                <a:latin typeface="Trebuchet MS" pitchFamily="34" charset="0"/>
+                <a:ea typeface="Trebuchet MS" pitchFamily="34" charset="-122"/>
+                <a:cs typeface="Trebuchet MS" pitchFamily="34" charset="-120"/>
+              </a:rPr>
+              <a:t>Center for Contemporary Art, Tashkent</a:t>
+            </a:r>
+            <a:endParaRPr lang="en-US" sz="1800" dirty="0"/>
+          </a:p>
+        </p:txBody>
+      </p:sp>
+      <p:sp>
+        <p:nvSpPr>
+          <p:cNvPr id="12" name="Text 10"/>
+          <p:cNvSpPr/>
+          <p:nvPr/>
+        </p:nvSpPr>
+        <p:spPr>
+          <a:xfrm>
+            <a:off x="548640" y="3931920"/>
+            <a:ext cx="640080" cy="457200"/>
+          </a:xfrm>
+          <a:prstGeom prst="rect">
+            <a:avLst/>
+          </a:prstGeom>
+          <a:noFill/>
+          <a:ln/>
+        </p:spPr>
+        <p:txBody>
+          <a:bodyPr wrap="square" rtlCol="0" anchor="ctr"/>
+          <a:lstStyle/>
+          <a:p>
+            <a:pPr indent="0" marL="0">
+              <a:buNone/>
+            </a:pPr>
+            <a:r>
+              <a:rPr lang="en-US" sz="1100" b="1" dirty="0">
+                <a:solidFill>
+                  <a:srgbClr val="3B82F6"/>
+                </a:solidFill>
+                <a:latin typeface="IBM Plex Mono" pitchFamily="34" charset="0"/>
+                <a:ea typeface="IBM Plex Mono" pitchFamily="34" charset="-122"/>
+                <a:cs typeface="IBM Plex Mono" pitchFamily="34" charset="-120"/>
+              </a:rPr>
+              <a:t>05</a:t>
+            </a:r>
+            <a:endParaRPr lang="en-US" sz="1100" dirty="0"/>
+          </a:p>
+        </p:txBody>
+      </p:sp>
+      <p:sp>
+        <p:nvSpPr>
+          <p:cNvPr id="13" name="Text 11"/>
+          <p:cNvSpPr/>
+          <p:nvPr/>
+        </p:nvSpPr>
+        <p:spPr>
+          <a:xfrm>
+            <a:off x="1188720" y="3931920"/>
+            <a:ext cx="4846320" cy="457200"/>
+          </a:xfrm>
+          <a:prstGeom prst="rect">
+            <a:avLst/>
+          </a:prstGeom>
+          <a:noFill/>
+          <a:ln/>
+        </p:spPr>
+        <p:txBody>
+          <a:bodyPr wrap="square" rtlCol="0" anchor="ctr"/>
+          <a:lstStyle/>
+          <a:p>
+            <a:pPr indent="0" marL="0">
+              <a:buNone/>
+            </a:pPr>
+            <a:r>
+              <a:rPr lang="en-US" sz="1800" dirty="0">
+                <a:solidFill>
+                  <a:srgbClr val="111418"/>
+                </a:solidFill>
+                <a:latin typeface="Trebuchet MS" pitchFamily="34" charset="0"/>
+                <a:ea typeface="Trebuchet MS" pitchFamily="34" charset="-122"/>
+                <a:cs typeface="Trebuchet MS" pitchFamily="34" charset="-120"/>
+              </a:rPr>
+              <a:t>Tashkent Design Week</a:t>
+            </a:r>
+            <a:endParaRPr lang="en-US" sz="1800" dirty="0"/>
+          </a:p>
+        </p:txBody>
+      </p:sp>
+      <p:sp>
+        <p:nvSpPr>
+          <p:cNvPr id="14" name="Text 12"/>
+          <p:cNvSpPr/>
+          <p:nvPr/>
+        </p:nvSpPr>
+        <p:spPr>
+          <a:xfrm>
+            <a:off x="6217920" y="3931920"/>
+            <a:ext cx="640080" cy="457200"/>
+          </a:xfrm>
+          <a:prstGeom prst="rect">
+            <a:avLst/>
+          </a:prstGeom>
+          <a:noFill/>
+          <a:ln/>
+        </p:spPr>
+        <p:txBody>
+          <a:bodyPr wrap="square" rtlCol="0" anchor="ctr"/>
+          <a:lstStyle/>
+          <a:p>
+            <a:pPr indent="0" marL="0">
+              <a:buNone/>
+            </a:pPr>
+            <a:r>
+              <a:rPr lang="en-US" sz="1100" b="1" dirty="0">
+                <a:solidFill>
+                  <a:srgbClr val="EC4899"/>
+                </a:solidFill>
+                <a:latin typeface="IBM Plex Mono" pitchFamily="34" charset="0"/>
+                <a:ea typeface="IBM Plex Mono" pitchFamily="34" charset="-122"/>
+                <a:cs typeface="IBM Plex Mono" pitchFamily="34" charset="-120"/>
+              </a:rPr>
+              <a:t>06</a:t>
+            </a:r>
+            <a:endParaRPr lang="en-US" sz="1100" dirty="0"/>
+          </a:p>
+        </p:txBody>
+      </p:sp>
+      <p:sp>
+        <p:nvSpPr>
+          <p:cNvPr id="15" name="Text 13"/>
+          <p:cNvSpPr/>
+          <p:nvPr/>
+        </p:nvSpPr>
+        <p:spPr>
+          <a:xfrm>
+            <a:off x="6858000" y="3931920"/>
+            <a:ext cx="4846320" cy="457200"/>
+          </a:xfrm>
+          <a:prstGeom prst="rect">
+            <a:avLst/>
+          </a:prstGeom>
+          <a:noFill/>
+          <a:ln/>
+        </p:spPr>
+        <p:txBody>
+          <a:bodyPr wrap="square" rtlCol="0" anchor="ctr"/>
+          <a:lstStyle/>
+          <a:p>
+            <a:pPr indent="0" marL="0">
+              <a:buNone/>
+            </a:pPr>
+            <a:r>
+              <a:rPr lang="en-US" sz="1800" dirty="0">
+                <a:solidFill>
+                  <a:srgbClr val="111418"/>
+                </a:solidFill>
+                <a:latin typeface="Trebuchet MS" pitchFamily="34" charset="0"/>
+                <a:ea typeface="Trebuchet MS" pitchFamily="34" charset="-122"/>
+                <a:cs typeface="Trebuchet MS" pitchFamily="34" charset="-120"/>
+              </a:rPr>
+              <a:t>Milan Design Week</a:t>
+            </a:r>
+            <a:endParaRPr lang="en-US" sz="1800" dirty="0"/>
+          </a:p>
+        </p:txBody>
+      </p:sp>
+      <p:sp>
+        <p:nvSpPr>
+          <p:cNvPr id="16" name="Text 14"/>
+          <p:cNvSpPr/>
+          <p:nvPr/>
+        </p:nvSpPr>
+        <p:spPr>
+          <a:xfrm>
+            <a:off x="548640" y="4709160"/>
+            <a:ext cx="640080" cy="457200"/>
+          </a:xfrm>
+          <a:prstGeom prst="rect">
+            <a:avLst/>
+          </a:prstGeom>
+          <a:noFill/>
+          <a:ln/>
+        </p:spPr>
+        <p:txBody>
+          <a:bodyPr wrap="square" rtlCol="0" anchor="ctr"/>
+          <a:lstStyle/>
+          <a:p>
+            <a:pPr indent="0" marL="0">
+              <a:buNone/>
+            </a:pPr>
+            <a:r>
+              <a:rPr lang="en-US" sz="1100" b="1" dirty="0">
+                <a:solidFill>
+                  <a:srgbClr val="10B981"/>
+                </a:solidFill>
+                <a:latin typeface="IBM Plex Mono" pitchFamily="34" charset="0"/>
+                <a:ea typeface="IBM Plex Mono" pitchFamily="34" charset="-122"/>
+                <a:cs typeface="IBM Plex Mono" pitchFamily="34" charset="-120"/>
+              </a:rPr>
+              <a:t>07</a:t>
+            </a:r>
+            <a:endParaRPr lang="en-US" sz="1100" dirty="0"/>
+          </a:p>
+        </p:txBody>
+      </p:sp>
+      <p:sp>
+        <p:nvSpPr>
+          <p:cNvPr id="17" name="Text 15"/>
+          <p:cNvSpPr/>
+          <p:nvPr/>
+        </p:nvSpPr>
+        <p:spPr>
+          <a:xfrm>
+            <a:off x="1188720" y="4709160"/>
+            <a:ext cx="4846320" cy="457200"/>
+          </a:xfrm>
+          <a:prstGeom prst="rect">
+            <a:avLst/>
+          </a:prstGeom>
+          <a:noFill/>
+          <a:ln/>
+        </p:spPr>
+        <p:txBody>
+          <a:bodyPr wrap="square" rtlCol="0" anchor="ctr"/>
+          <a:lstStyle/>
+          <a:p>
+            <a:pPr indent="0" marL="0">
+              <a:buNone/>
+            </a:pPr>
+            <a:r>
+              <a:rPr lang="en-US" sz="1800" dirty="0">
+                <a:solidFill>
+                  <a:srgbClr val="111418"/>
+                </a:solidFill>
+                <a:latin typeface="Trebuchet MS" pitchFamily="34" charset="0"/>
+                <a:ea typeface="Trebuchet MS" pitchFamily="34" charset="-122"/>
+                <a:cs typeface="Trebuchet MS" pitchFamily="34" charset="-120"/>
+              </a:rPr>
+              <a:t>Venice Architecture Biennale</a:t>
+            </a:r>
+            <a:endParaRPr lang="en-US" sz="1800" dirty="0"/>
+          </a:p>
+        </p:txBody>
+      </p:sp>
+      <p:sp>
+        <p:nvSpPr>
+          <p:cNvPr id="18" name="Text 16"/>
+          <p:cNvSpPr/>
+          <p:nvPr/>
+        </p:nvSpPr>
+        <p:spPr>
+          <a:xfrm>
+            <a:off x="6217920" y="4709160"/>
+            <a:ext cx="640080" cy="457200"/>
+          </a:xfrm>
+          <a:prstGeom prst="rect">
+            <a:avLst/>
+          </a:prstGeom>
+          <a:noFill/>
+          <a:ln/>
+        </p:spPr>
+        <p:txBody>
+          <a:bodyPr wrap="square" rtlCol="0" anchor="ctr"/>
+          <a:lstStyle/>
+          <a:p>
+            <a:pPr indent="0" marL="0">
+              <a:buNone/>
+            </a:pPr>
+            <a:r>
+              <a:rPr lang="en-US" sz="1100" b="1" dirty="0">
+                <a:solidFill>
+                  <a:srgbClr val="F59E0B"/>
+                </a:solidFill>
+                <a:latin typeface="IBM Plex Mono" pitchFamily="34" charset="0"/>
+                <a:ea typeface="IBM Plex Mono" pitchFamily="34" charset="-122"/>
+                <a:cs typeface="IBM Plex Mono" pitchFamily="34" charset="-120"/>
+              </a:rPr>
+              <a:t>08</a:t>
+            </a:r>
+            <a:endParaRPr lang="en-US" sz="1100" dirty="0"/>
+          </a:p>
+        </p:txBody>
+      </p:sp>
+      <p:sp>
+        <p:nvSpPr>
+          <p:cNvPr id="19" name="Text 17"/>
+          <p:cNvSpPr/>
+          <p:nvPr/>
+        </p:nvSpPr>
+        <p:spPr>
+          <a:xfrm>
+            <a:off x="6858000" y="4709160"/>
+            <a:ext cx="4846320" cy="457200"/>
+          </a:xfrm>
+          <a:prstGeom prst="rect">
+            <a:avLst/>
+          </a:prstGeom>
+          <a:noFill/>
+          <a:ln/>
+        </p:spPr>
+        <p:txBody>
+          <a:bodyPr wrap="square" rtlCol="0" anchor="ctr"/>
+          <a:lstStyle/>
+          <a:p>
+            <a:pPr indent="0" marL="0">
+              <a:buNone/>
+            </a:pPr>
+            <a:r>
+              <a:rPr lang="en-US" sz="1800" dirty="0">
+                <a:solidFill>
+                  <a:srgbClr val="111418"/>
+                </a:solidFill>
+                <a:latin typeface="Trebuchet MS" pitchFamily="34" charset="0"/>
+                <a:ea typeface="Trebuchet MS" pitchFamily="34" charset="-122"/>
+                <a:cs typeface="Trebuchet MS" pitchFamily="34" charset="-120"/>
+              </a:rPr>
+              <a:t>Venice Art Biennale</a:t>
+            </a:r>
+            <a:endParaRPr lang="en-US" sz="1800" dirty="0"/>
+          </a:p>
+        </p:txBody>
+      </p:sp>
+      <p:sp>
+        <p:nvSpPr>
+          <p:cNvPr id="20" name="Text 18"/>
+          <p:cNvSpPr/>
+          <p:nvPr/>
+        </p:nvSpPr>
+        <p:spPr>
+          <a:xfrm>
+            <a:off x="10728655" y="6400800"/>
+            <a:ext cx="1097280" cy="274320"/>
+          </a:xfrm>
+          <a:prstGeom prst="rect">
+            <a:avLst/>
+          </a:prstGeom>
+          <a:noFill/>
+          <a:ln/>
+        </p:spPr>
+        <p:txBody>
+          <a:bodyPr wrap="square" rtlCol="0" anchor="ctr"/>
+          <a:lstStyle/>
+          <a:p>
+            <a:pPr algn="r" indent="0" marL="0">
+              <a:buNone/>
+            </a:pPr>
+            <a:r>
+              <a:rPr lang="en-US" sz="900" dirty="0">
+                <a:solidFill>
+                  <a:srgbClr val="5B6068"/>
+                </a:solidFill>
+                <a:latin typeface="IBM Plex Mono" pitchFamily="34" charset="0"/>
+                <a:ea typeface="IBM Plex Mono" pitchFamily="34" charset="-122"/>
+                <a:cs typeface="IBM Plex Mono" pitchFamily="34" charset="-120"/>
+              </a:rPr>
+              <a:t>12 / 14</a:t>
             </a:r>
             <a:endParaRPr lang="en-US" sz="900" dirty="0"/>
           </a:p>
@@ -4390,7 +4319,7 @@
       </p:sp>
       <p:sp>
         <p:nvSpPr>
-          <p:cNvPr id="11" name="Text 9"/>
+          <p:cNvPr id="21" name="Text 19"/>
           <p:cNvSpPr/>
           <p:nvPr/>
         </p:nvSpPr>
@@ -4415,7 +4344,7 @@
             <a:r>
               <a:rPr lang="en-US" sz="900" spc="600" kern="0" dirty="0">
                 <a:solidFill>
-                  <a:srgbClr val="6B7077"/>
+                  <a:srgbClr val="5B6068"/>
                 </a:solidFill>
                 <a:latin typeface="IBM Plex Mono" pitchFamily="34" charset="0"/>
                 <a:ea typeface="IBM Plex Mono" pitchFamily="34" charset="-122"/>
@@ -4484,15 +4413,15 @@
               <a:buNone/>
             </a:pPr>
             <a:r>
-              <a:rPr lang="en-US" sz="900" spc="800" kern="0" dirty="0">
-                <a:solidFill>
-                  <a:srgbClr val="0F766E"/>
+              <a:rPr lang="en-US" sz="900" b="1" spc="800" kern="0" dirty="0">
+                <a:solidFill>
+                  <a:srgbClr val="3B82F6"/>
                 </a:solidFill>
                 <a:latin typeface="IBM Plex Mono" pitchFamily="34" charset="0"/>
                 <a:ea typeface="IBM Plex Mono" pitchFamily="34" charset="-122"/>
                 <a:cs typeface="IBM Plex Mono" pitchFamily="34" charset="-120"/>
               </a:rPr>
-              <a:t>WHERE IT GOES</a:t>
+              <a:t>FUNDING MODEL</a:t>
             </a:r>
             <a:endParaRPr lang="en-US" sz="900" dirty="0"/>
           </a:p>
@@ -4507,33 +4436,33 @@
         <p:spPr>
           <a:xfrm>
             <a:off x="548640" y="914400"/>
-            <a:ext cx="10972800" cy="822960"/>
-          </a:xfrm>
-          <a:prstGeom prst="rect">
-            <a:avLst/>
-          </a:prstGeom>
-          <a:noFill/>
-          <a:ln/>
-        </p:spPr>
-        <p:txBody>
-          <a:bodyPr wrap="square" rtlCol="0" anchor="ctr"/>
-          <a:lstStyle/>
-          <a:p>
-            <a:pPr indent="0" marL="0">
-              <a:buNone/>
-            </a:pPr>
-            <a:r>
-              <a:rPr lang="en-US" sz="4000" dirty="0">
+            <a:ext cx="10972800" cy="914400"/>
+          </a:xfrm>
+          <a:prstGeom prst="rect">
+            <a:avLst/>
+          </a:prstGeom>
+          <a:noFill/>
+          <a:ln/>
+        </p:spPr>
+        <p:txBody>
+          <a:bodyPr wrap="square" rtlCol="0" anchor="ctr"/>
+          <a:lstStyle/>
+          <a:p>
+            <a:pPr indent="0" marL="0">
+              <a:buNone/>
+            </a:pPr>
+            <a:r>
+              <a:rPr lang="en-US" sz="4800" b="1" spc="400" kern="0" dirty="0">
                 <a:solidFill>
                   <a:srgbClr val="111418"/>
                 </a:solidFill>
-                <a:latin typeface="Inter" pitchFamily="34" charset="0"/>
-                <a:ea typeface="Inter" pitchFamily="34" charset="-122"/>
-                <a:cs typeface="Inter" pitchFamily="34" charset="-120"/>
-              </a:rPr>
-              <a:t>Venues.</a:t>
-            </a:r>
-            <a:endParaRPr lang="en-US" sz="4000" dirty="0"/>
+                <a:latin typeface="Trebuchet MS" pitchFamily="34" charset="0"/>
+                <a:ea typeface="Trebuchet MS" pitchFamily="34" charset="-122"/>
+                <a:cs typeface="Trebuchet MS" pitchFamily="34" charset="-120"/>
+              </a:rPr>
+              <a:t>FREE, BY DEFAULT.</a:t>
+            </a:r>
+            <a:endParaRPr lang="en-US" sz="4800" dirty="0"/>
           </a:p>
         </p:txBody>
       </p:sp>
@@ -4546,663 +4475,234 @@
         <p:spPr>
           <a:xfrm>
             <a:off x="548640" y="2194560"/>
-            <a:ext cx="640080" cy="457200"/>
-          </a:xfrm>
-          <a:prstGeom prst="rect">
-            <a:avLst/>
-          </a:prstGeom>
-          <a:noFill/>
-          <a:ln/>
-        </p:spPr>
-        <p:txBody>
-          <a:bodyPr wrap="square" rtlCol="0" anchor="ctr"/>
-          <a:lstStyle/>
-          <a:p>
-            <a:pPr indent="0" marL="0">
-              <a:buNone/>
-            </a:pPr>
-            <a:r>
-              <a:rPr lang="en-US" sz="1100" dirty="0">
-                <a:solidFill>
-                  <a:srgbClr val="0F766E"/>
+            <a:ext cx="10972800" cy="914400"/>
+          </a:xfrm>
+          <a:prstGeom prst="rect">
+            <a:avLst/>
+          </a:prstGeom>
+          <a:noFill/>
+          <a:ln/>
+        </p:spPr>
+        <p:txBody>
+          <a:bodyPr wrap="square" rtlCol="0" anchor="ctr"/>
+          <a:lstStyle/>
+          <a:p>
+            <a:pPr indent="0" marL="0">
+              <a:buNone/>
+            </a:pPr>
+            <a:r>
+              <a:rPr lang="en-US" sz="2000" i="1" dirty="0">
+                <a:solidFill>
+                  <a:srgbClr val="3B82F6"/>
+                </a:solidFill>
+                <a:latin typeface="Georgia" pitchFamily="34" charset="0"/>
+                <a:ea typeface="Georgia" pitchFamily="34" charset="-122"/>
+                <a:cs typeface="Georgia" pitchFamily="34" charset="-120"/>
+              </a:rPr>
+              <a:t>Aral3D stays free for schools, students, teachers, researchers, museums and public institutions.</a:t>
+            </a:r>
+            <a:endParaRPr lang="en-US" sz="2000" dirty="0"/>
+          </a:p>
+        </p:txBody>
+      </p:sp>
+      <p:sp>
+        <p:nvSpPr>
+          <p:cNvPr id="5" name="Text 3"/>
+          <p:cNvSpPr/>
+          <p:nvPr/>
+        </p:nvSpPr>
+        <p:spPr>
+          <a:xfrm>
+            <a:off x="548640" y="3657600"/>
+            <a:ext cx="5486400" cy="274320"/>
+          </a:xfrm>
+          <a:prstGeom prst="rect">
+            <a:avLst/>
+          </a:prstGeom>
+          <a:noFill/>
+          <a:ln/>
+        </p:spPr>
+        <p:txBody>
+          <a:bodyPr wrap="square" rtlCol="0" anchor="ctr"/>
+          <a:lstStyle/>
+          <a:p>
+            <a:pPr indent="0" marL="0">
+              <a:buNone/>
+            </a:pPr>
+            <a:r>
+              <a:rPr lang="en-US" sz="1000" b="1" spc="800" kern="0" dirty="0">
+                <a:solidFill>
+                  <a:srgbClr val="3B82F6"/>
                 </a:solidFill>
                 <a:latin typeface="IBM Plex Mono" pitchFamily="34" charset="0"/>
                 <a:ea typeface="IBM Plex Mono" pitchFamily="34" charset="-122"/>
                 <a:cs typeface="IBM Plex Mono" pitchFamily="34" charset="-120"/>
               </a:rPr>
-              <a:t>01</a:t>
-            </a:r>
-            <a:endParaRPr lang="en-US" sz="1100" dirty="0"/>
-          </a:p>
-        </p:txBody>
-      </p:sp>
-      <p:sp>
-        <p:nvSpPr>
-          <p:cNvPr id="5" name="Text 3"/>
-          <p:cNvSpPr/>
-          <p:nvPr/>
-        </p:nvSpPr>
-        <p:spPr>
-          <a:xfrm>
-            <a:off x="1188720" y="2194560"/>
-            <a:ext cx="4846320" cy="457200"/>
-          </a:xfrm>
-          <a:prstGeom prst="rect">
-            <a:avLst/>
-          </a:prstGeom>
-          <a:noFill/>
-          <a:ln/>
-        </p:spPr>
-        <p:txBody>
-          <a:bodyPr wrap="square" rtlCol="0" anchor="ctr"/>
-          <a:lstStyle/>
-          <a:p>
-            <a:pPr indent="0" marL="0">
-              <a:buNone/>
-            </a:pPr>
-            <a:r>
-              <a:rPr lang="en-US" sz="1800" dirty="0">
+              <a:t>CORE SUPPORT</a:t>
+            </a:r>
+            <a:endParaRPr lang="en-US" sz="1000" dirty="0"/>
+          </a:p>
+        </p:txBody>
+      </p:sp>
+      <p:sp>
+        <p:nvSpPr>
+          <p:cNvPr id="6" name="Text 4"/>
+          <p:cNvSpPr/>
+          <p:nvPr/>
+        </p:nvSpPr>
+        <p:spPr>
+          <a:xfrm>
+            <a:off x="548640" y="4023360"/>
+            <a:ext cx="5486400" cy="2194560"/>
+          </a:xfrm>
+          <a:prstGeom prst="rect">
+            <a:avLst/>
+          </a:prstGeom>
+          <a:noFill/>
+          <a:ln/>
+        </p:spPr>
+        <p:txBody>
+          <a:bodyPr wrap="square" rtlCol="0" anchor="ctr"/>
+          <a:lstStyle/>
+          <a:p>
+            <a:pPr indent="0" marL="0">
+              <a:buNone/>
+            </a:pPr>
+            <a:r>
+              <a:rPr lang="en-US" sz="1400" dirty="0">
                 <a:solidFill>
                   <a:srgbClr val="111418"/>
                 </a:solidFill>
-                <a:latin typeface="Inter" pitchFamily="34" charset="0"/>
-                <a:ea typeface="Inter" pitchFamily="34" charset="-122"/>
-                <a:cs typeface="Inter" pitchFamily="34" charset="-120"/>
-              </a:rPr>
-              <a:t>Aral Culture Summit 2026</a:t>
-            </a:r>
-            <a:endParaRPr lang="en-US" sz="1800" dirty="0"/>
-          </a:p>
-        </p:txBody>
-      </p:sp>
-      <p:sp>
-        <p:nvSpPr>
-          <p:cNvPr id="6" name="Text 4"/>
-          <p:cNvSpPr/>
-          <p:nvPr/>
-        </p:nvSpPr>
-        <p:spPr>
-          <a:xfrm>
-            <a:off x="6217920" y="2194560"/>
-            <a:ext cx="640080" cy="457200"/>
-          </a:xfrm>
-          <a:prstGeom prst="rect">
-            <a:avLst/>
-          </a:prstGeom>
-          <a:noFill/>
-          <a:ln/>
-        </p:spPr>
-        <p:txBody>
-          <a:bodyPr wrap="square" rtlCol="0" anchor="ctr"/>
-          <a:lstStyle/>
-          <a:p>
-            <a:pPr indent="0" marL="0">
-              <a:buNone/>
-            </a:pPr>
-            <a:r>
-              <a:rPr lang="en-US" sz="1100" dirty="0">
-                <a:solidFill>
-                  <a:srgbClr val="0F766E"/>
+                <a:latin typeface="Trebuchet MS" pitchFamily="34" charset="0"/>
+                <a:ea typeface="Trebuchet MS" pitchFamily="34" charset="-122"/>
+                <a:cs typeface="Trebuchet MS" pitchFamily="34" charset="-120"/>
+              </a:rPr>
+              <a:t>Ministry of Education, Ministry of Ecology, public educational and environmental programs, state museums, universities.</a:t>
+            </a:r>
+            <a:endParaRPr lang="en-US" sz="1400" dirty="0"/>
+          </a:p>
+        </p:txBody>
+      </p:sp>
+      <p:sp>
+        <p:nvSpPr>
+          <p:cNvPr id="7" name="Text 5"/>
+          <p:cNvSpPr/>
+          <p:nvPr/>
+        </p:nvSpPr>
+        <p:spPr>
+          <a:xfrm>
+            <a:off x="6400800" y="3657600"/>
+            <a:ext cx="5486400" cy="274320"/>
+          </a:xfrm>
+          <a:prstGeom prst="rect">
+            <a:avLst/>
+          </a:prstGeom>
+          <a:noFill/>
+          <a:ln/>
+        </p:spPr>
+        <p:txBody>
+          <a:bodyPr wrap="square" rtlCol="0" anchor="ctr"/>
+          <a:lstStyle/>
+          <a:p>
+            <a:pPr indent="0" marL="0">
+              <a:buNone/>
+            </a:pPr>
+            <a:r>
+              <a:rPr lang="en-US" sz="1000" b="1" spc="800" kern="0" dirty="0">
+                <a:solidFill>
+                  <a:srgbClr val="EC4899"/>
                 </a:solidFill>
                 <a:latin typeface="IBM Plex Mono" pitchFamily="34" charset="0"/>
                 <a:ea typeface="IBM Plex Mono" pitchFamily="34" charset="-122"/>
                 <a:cs typeface="IBM Plex Mono" pitchFamily="34" charset="-120"/>
               </a:rPr>
-              <a:t>02</a:t>
-            </a:r>
-            <a:endParaRPr lang="en-US" sz="1100" dirty="0"/>
-          </a:p>
-        </p:txBody>
-      </p:sp>
-      <p:sp>
-        <p:nvSpPr>
-          <p:cNvPr id="7" name="Text 5"/>
-          <p:cNvSpPr/>
-          <p:nvPr/>
-        </p:nvSpPr>
-        <p:spPr>
-          <a:xfrm>
-            <a:off x="6858000" y="2194560"/>
-            <a:ext cx="4846320" cy="457200"/>
-          </a:xfrm>
-          <a:prstGeom prst="rect">
-            <a:avLst/>
-          </a:prstGeom>
-          <a:noFill/>
-          <a:ln/>
-        </p:spPr>
-        <p:txBody>
-          <a:bodyPr wrap="square" rtlCol="0" anchor="ctr"/>
-          <a:lstStyle/>
-          <a:p>
-            <a:pPr indent="0" marL="0">
-              <a:buNone/>
-            </a:pPr>
-            <a:r>
-              <a:rPr lang="en-US" sz="1800" dirty="0">
+              <a:t>OPTIONAL</a:t>
+            </a:r>
+            <a:endParaRPr lang="en-US" sz="1000" dirty="0"/>
+          </a:p>
+        </p:txBody>
+      </p:sp>
+      <p:sp>
+        <p:nvSpPr>
+          <p:cNvPr id="8" name="Text 6"/>
+          <p:cNvSpPr/>
+          <p:nvPr/>
+        </p:nvSpPr>
+        <p:spPr>
+          <a:xfrm>
+            <a:off x="6400800" y="4023360"/>
+            <a:ext cx="5486400" cy="2194560"/>
+          </a:xfrm>
+          <a:prstGeom prst="rect">
+            <a:avLst/>
+          </a:prstGeom>
+          <a:noFill/>
+          <a:ln/>
+        </p:spPr>
+        <p:txBody>
+          <a:bodyPr wrap="square" rtlCol="0" anchor="ctr"/>
+          <a:lstStyle/>
+          <a:p>
+            <a:pPr indent="0" marL="0">
+              <a:buNone/>
+            </a:pPr>
+            <a:r>
+              <a:rPr lang="en-US" sz="1400" dirty="0">
                 <a:solidFill>
                   <a:srgbClr val="111418"/>
                 </a:solidFill>
-                <a:latin typeface="Inter" pitchFamily="34" charset="0"/>
-                <a:ea typeface="Inter" pitchFamily="34" charset="-122"/>
-                <a:cs typeface="Inter" pitchFamily="34" charset="-120"/>
-              </a:rPr>
-              <a:t>Savitsky Museum</a:t>
-            </a:r>
-            <a:endParaRPr lang="en-US" sz="1800" dirty="0"/>
-          </a:p>
-        </p:txBody>
-      </p:sp>
-      <p:sp>
-        <p:nvSpPr>
-          <p:cNvPr id="8" name="Text 6"/>
-          <p:cNvSpPr/>
-          <p:nvPr/>
-        </p:nvSpPr>
-        <p:spPr>
-          <a:xfrm>
-            <a:off x="548640" y="2971800"/>
-            <a:ext cx="640080" cy="457200"/>
-          </a:xfrm>
-          <a:prstGeom prst="rect">
-            <a:avLst/>
-          </a:prstGeom>
-          <a:noFill/>
-          <a:ln/>
-        </p:spPr>
-        <p:txBody>
-          <a:bodyPr wrap="square" rtlCol="0" anchor="ctr"/>
-          <a:lstStyle/>
-          <a:p>
-            <a:pPr indent="0" marL="0">
-              <a:buNone/>
-            </a:pPr>
-            <a:r>
-              <a:rPr lang="en-US" sz="1100" dirty="0">
-                <a:solidFill>
-                  <a:srgbClr val="0F766E"/>
+                <a:latin typeface="Trebuchet MS" pitchFamily="34" charset="0"/>
+                <a:ea typeface="Trebuchet MS" pitchFamily="34" charset="-122"/>
+                <a:cs typeface="Trebuchet MS" pitchFamily="34" charset="-120"/>
+              </a:rPr>
+              <a:t>Private museums, festivals, private educational centers, commissioned exhibition versions, international cultural programs.</a:t>
+            </a:r>
+            <a:endParaRPr lang="en-US" sz="1400" dirty="0"/>
+          </a:p>
+        </p:txBody>
+      </p:sp>
+      <p:sp>
+        <p:nvSpPr>
+          <p:cNvPr id="9" name="Text 7"/>
+          <p:cNvSpPr/>
+          <p:nvPr/>
+        </p:nvSpPr>
+        <p:spPr>
+          <a:xfrm>
+            <a:off x="10728655" y="6400800"/>
+            <a:ext cx="1097280" cy="274320"/>
+          </a:xfrm>
+          <a:prstGeom prst="rect">
+            <a:avLst/>
+          </a:prstGeom>
+          <a:noFill/>
+          <a:ln/>
+        </p:spPr>
+        <p:txBody>
+          <a:bodyPr wrap="square" rtlCol="0" anchor="ctr"/>
+          <a:lstStyle/>
+          <a:p>
+            <a:pPr algn="r" indent="0" marL="0">
+              <a:buNone/>
+            </a:pPr>
+            <a:r>
+              <a:rPr lang="en-US" sz="900" dirty="0">
+                <a:solidFill>
+                  <a:srgbClr val="5B6068"/>
                 </a:solidFill>
                 <a:latin typeface="IBM Plex Mono" pitchFamily="34" charset="0"/>
                 <a:ea typeface="IBM Plex Mono" pitchFamily="34" charset="-122"/>
                 <a:cs typeface="IBM Plex Mono" pitchFamily="34" charset="-120"/>
               </a:rPr>
-              <a:t>03</a:t>
-            </a:r>
-            <a:endParaRPr lang="en-US" sz="1100" dirty="0"/>
-          </a:p>
-        </p:txBody>
-      </p:sp>
-      <p:sp>
-        <p:nvSpPr>
-          <p:cNvPr id="9" name="Text 7"/>
-          <p:cNvSpPr/>
-          <p:nvPr/>
-        </p:nvSpPr>
-        <p:spPr>
-          <a:xfrm>
-            <a:off x="1188720" y="2971800"/>
-            <a:ext cx="4846320" cy="457200"/>
-          </a:xfrm>
-          <a:prstGeom prst="rect">
-            <a:avLst/>
-          </a:prstGeom>
-          <a:noFill/>
-          <a:ln/>
-        </p:spPr>
-        <p:txBody>
-          <a:bodyPr wrap="square" rtlCol="0" anchor="ctr"/>
-          <a:lstStyle/>
-          <a:p>
-            <a:pPr indent="0" marL="0">
-              <a:buNone/>
-            </a:pPr>
-            <a:r>
-              <a:rPr lang="en-US" sz="1800" dirty="0">
-                <a:solidFill>
-                  <a:srgbClr val="111418"/>
-                </a:solidFill>
-                <a:latin typeface="Inter" pitchFamily="34" charset="0"/>
-                <a:ea typeface="Inter" pitchFamily="34" charset="-122"/>
-                <a:cs typeface="Inter" pitchFamily="34" charset="-120"/>
-              </a:rPr>
-              <a:t>History and Aral Sea Museum</a:t>
-            </a:r>
-            <a:endParaRPr lang="en-US" sz="1800" dirty="0"/>
+              <a:t>13 / 14</a:t>
+            </a:r>
+            <a:endParaRPr lang="en-US" sz="900" dirty="0"/>
           </a:p>
         </p:txBody>
       </p:sp>
       <p:sp>
         <p:nvSpPr>
           <p:cNvPr id="10" name="Text 8"/>
-          <p:cNvSpPr/>
-          <p:nvPr/>
-        </p:nvSpPr>
-        <p:spPr>
-          <a:xfrm>
-            <a:off x="6217920" y="2971800"/>
-            <a:ext cx="640080" cy="457200"/>
-          </a:xfrm>
-          <a:prstGeom prst="rect">
-            <a:avLst/>
-          </a:prstGeom>
-          <a:noFill/>
-          <a:ln/>
-        </p:spPr>
-        <p:txBody>
-          <a:bodyPr wrap="square" rtlCol="0" anchor="ctr"/>
-          <a:lstStyle/>
-          <a:p>
-            <a:pPr indent="0" marL="0">
-              <a:buNone/>
-            </a:pPr>
-            <a:r>
-              <a:rPr lang="en-US" sz="1100" dirty="0">
-                <a:solidFill>
-                  <a:srgbClr val="0F766E"/>
-                </a:solidFill>
-                <a:latin typeface="IBM Plex Mono" pitchFamily="34" charset="0"/>
-                <a:ea typeface="IBM Plex Mono" pitchFamily="34" charset="-122"/>
-                <a:cs typeface="IBM Plex Mono" pitchFamily="34" charset="-120"/>
-              </a:rPr>
-              <a:t>04</a:t>
-            </a:r>
-            <a:endParaRPr lang="en-US" sz="1100" dirty="0"/>
-          </a:p>
-        </p:txBody>
-      </p:sp>
-      <p:sp>
-        <p:nvSpPr>
-          <p:cNvPr id="11" name="Text 9"/>
-          <p:cNvSpPr/>
-          <p:nvPr/>
-        </p:nvSpPr>
-        <p:spPr>
-          <a:xfrm>
-            <a:off x="6858000" y="2971800"/>
-            <a:ext cx="4846320" cy="457200"/>
-          </a:xfrm>
-          <a:prstGeom prst="rect">
-            <a:avLst/>
-          </a:prstGeom>
-          <a:noFill/>
-          <a:ln/>
-        </p:spPr>
-        <p:txBody>
-          <a:bodyPr wrap="square" rtlCol="0" anchor="ctr"/>
-          <a:lstStyle/>
-          <a:p>
-            <a:pPr indent="0" marL="0">
-              <a:buNone/>
-            </a:pPr>
-            <a:r>
-              <a:rPr lang="en-US" sz="1800" dirty="0">
-                <a:solidFill>
-                  <a:srgbClr val="111418"/>
-                </a:solidFill>
-                <a:latin typeface="Inter" pitchFamily="34" charset="0"/>
-                <a:ea typeface="Inter" pitchFamily="34" charset="-122"/>
-                <a:cs typeface="Inter" pitchFamily="34" charset="-120"/>
-              </a:rPr>
-              <a:t>Center for Contemporary Art, Tashkent</a:t>
-            </a:r>
-            <a:endParaRPr lang="en-US" sz="1800" dirty="0"/>
-          </a:p>
-        </p:txBody>
-      </p:sp>
-      <p:sp>
-        <p:nvSpPr>
-          <p:cNvPr id="12" name="Text 10"/>
-          <p:cNvSpPr/>
-          <p:nvPr/>
-        </p:nvSpPr>
-        <p:spPr>
-          <a:xfrm>
-            <a:off x="548640" y="3749040"/>
-            <a:ext cx="640080" cy="457200"/>
-          </a:xfrm>
-          <a:prstGeom prst="rect">
-            <a:avLst/>
-          </a:prstGeom>
-          <a:noFill/>
-          <a:ln/>
-        </p:spPr>
-        <p:txBody>
-          <a:bodyPr wrap="square" rtlCol="0" anchor="ctr"/>
-          <a:lstStyle/>
-          <a:p>
-            <a:pPr indent="0" marL="0">
-              <a:buNone/>
-            </a:pPr>
-            <a:r>
-              <a:rPr lang="en-US" sz="1100" dirty="0">
-                <a:solidFill>
-                  <a:srgbClr val="0F766E"/>
-                </a:solidFill>
-                <a:latin typeface="IBM Plex Mono" pitchFamily="34" charset="0"/>
-                <a:ea typeface="IBM Plex Mono" pitchFamily="34" charset="-122"/>
-                <a:cs typeface="IBM Plex Mono" pitchFamily="34" charset="-120"/>
-              </a:rPr>
-              <a:t>05</a:t>
-            </a:r>
-            <a:endParaRPr lang="en-US" sz="1100" dirty="0"/>
-          </a:p>
-        </p:txBody>
-      </p:sp>
-      <p:sp>
-        <p:nvSpPr>
-          <p:cNvPr id="13" name="Text 11"/>
-          <p:cNvSpPr/>
-          <p:nvPr/>
-        </p:nvSpPr>
-        <p:spPr>
-          <a:xfrm>
-            <a:off x="1188720" y="3749040"/>
-            <a:ext cx="4846320" cy="457200"/>
-          </a:xfrm>
-          <a:prstGeom prst="rect">
-            <a:avLst/>
-          </a:prstGeom>
-          <a:noFill/>
-          <a:ln/>
-        </p:spPr>
-        <p:txBody>
-          <a:bodyPr wrap="square" rtlCol="0" anchor="ctr"/>
-          <a:lstStyle/>
-          <a:p>
-            <a:pPr indent="0" marL="0">
-              <a:buNone/>
-            </a:pPr>
-            <a:r>
-              <a:rPr lang="en-US" sz="1800" dirty="0">
-                <a:solidFill>
-                  <a:srgbClr val="111418"/>
-                </a:solidFill>
-                <a:latin typeface="Inter" pitchFamily="34" charset="0"/>
-                <a:ea typeface="Inter" pitchFamily="34" charset="-122"/>
-                <a:cs typeface="Inter" pitchFamily="34" charset="-120"/>
-              </a:rPr>
-              <a:t>Tashkent Design Week</a:t>
-            </a:r>
-            <a:endParaRPr lang="en-US" sz="1800" dirty="0"/>
-          </a:p>
-        </p:txBody>
-      </p:sp>
-      <p:sp>
-        <p:nvSpPr>
-          <p:cNvPr id="14" name="Text 12"/>
-          <p:cNvSpPr/>
-          <p:nvPr/>
-        </p:nvSpPr>
-        <p:spPr>
-          <a:xfrm>
-            <a:off x="6217920" y="3749040"/>
-            <a:ext cx="640080" cy="457200"/>
-          </a:xfrm>
-          <a:prstGeom prst="rect">
-            <a:avLst/>
-          </a:prstGeom>
-          <a:noFill/>
-          <a:ln/>
-        </p:spPr>
-        <p:txBody>
-          <a:bodyPr wrap="square" rtlCol="0" anchor="ctr"/>
-          <a:lstStyle/>
-          <a:p>
-            <a:pPr indent="0" marL="0">
-              <a:buNone/>
-            </a:pPr>
-            <a:r>
-              <a:rPr lang="en-US" sz="1100" dirty="0">
-                <a:solidFill>
-                  <a:srgbClr val="0F766E"/>
-                </a:solidFill>
-                <a:latin typeface="IBM Plex Mono" pitchFamily="34" charset="0"/>
-                <a:ea typeface="IBM Plex Mono" pitchFamily="34" charset="-122"/>
-                <a:cs typeface="IBM Plex Mono" pitchFamily="34" charset="-120"/>
-              </a:rPr>
-              <a:t>06</a:t>
-            </a:r>
-            <a:endParaRPr lang="en-US" sz="1100" dirty="0"/>
-          </a:p>
-        </p:txBody>
-      </p:sp>
-      <p:sp>
-        <p:nvSpPr>
-          <p:cNvPr id="15" name="Text 13"/>
-          <p:cNvSpPr/>
-          <p:nvPr/>
-        </p:nvSpPr>
-        <p:spPr>
-          <a:xfrm>
-            <a:off x="6858000" y="3749040"/>
-            <a:ext cx="4846320" cy="457200"/>
-          </a:xfrm>
-          <a:prstGeom prst="rect">
-            <a:avLst/>
-          </a:prstGeom>
-          <a:noFill/>
-          <a:ln/>
-        </p:spPr>
-        <p:txBody>
-          <a:bodyPr wrap="square" rtlCol="0" anchor="ctr"/>
-          <a:lstStyle/>
-          <a:p>
-            <a:pPr indent="0" marL="0">
-              <a:buNone/>
-            </a:pPr>
-            <a:r>
-              <a:rPr lang="en-US" sz="1800" dirty="0">
-                <a:solidFill>
-                  <a:srgbClr val="111418"/>
-                </a:solidFill>
-                <a:latin typeface="Inter" pitchFamily="34" charset="0"/>
-                <a:ea typeface="Inter" pitchFamily="34" charset="-122"/>
-                <a:cs typeface="Inter" pitchFamily="34" charset="-120"/>
-              </a:rPr>
-              <a:t>Milan Design Week</a:t>
-            </a:r>
-            <a:endParaRPr lang="en-US" sz="1800" dirty="0"/>
-          </a:p>
-        </p:txBody>
-      </p:sp>
-      <p:sp>
-        <p:nvSpPr>
-          <p:cNvPr id="16" name="Text 14"/>
-          <p:cNvSpPr/>
-          <p:nvPr/>
-        </p:nvSpPr>
-        <p:spPr>
-          <a:xfrm>
-            <a:off x="548640" y="4526280"/>
-            <a:ext cx="640080" cy="457200"/>
-          </a:xfrm>
-          <a:prstGeom prst="rect">
-            <a:avLst/>
-          </a:prstGeom>
-          <a:noFill/>
-          <a:ln/>
-        </p:spPr>
-        <p:txBody>
-          <a:bodyPr wrap="square" rtlCol="0" anchor="ctr"/>
-          <a:lstStyle/>
-          <a:p>
-            <a:pPr indent="0" marL="0">
-              <a:buNone/>
-            </a:pPr>
-            <a:r>
-              <a:rPr lang="en-US" sz="1100" dirty="0">
-                <a:solidFill>
-                  <a:srgbClr val="0F766E"/>
-                </a:solidFill>
-                <a:latin typeface="IBM Plex Mono" pitchFamily="34" charset="0"/>
-                <a:ea typeface="IBM Plex Mono" pitchFamily="34" charset="-122"/>
-                <a:cs typeface="IBM Plex Mono" pitchFamily="34" charset="-120"/>
-              </a:rPr>
-              <a:t>07</a:t>
-            </a:r>
-            <a:endParaRPr lang="en-US" sz="1100" dirty="0"/>
-          </a:p>
-        </p:txBody>
-      </p:sp>
-      <p:sp>
-        <p:nvSpPr>
-          <p:cNvPr id="17" name="Text 15"/>
-          <p:cNvSpPr/>
-          <p:nvPr/>
-        </p:nvSpPr>
-        <p:spPr>
-          <a:xfrm>
-            <a:off x="1188720" y="4526280"/>
-            <a:ext cx="4846320" cy="457200"/>
-          </a:xfrm>
-          <a:prstGeom prst="rect">
-            <a:avLst/>
-          </a:prstGeom>
-          <a:noFill/>
-          <a:ln/>
-        </p:spPr>
-        <p:txBody>
-          <a:bodyPr wrap="square" rtlCol="0" anchor="ctr"/>
-          <a:lstStyle/>
-          <a:p>
-            <a:pPr indent="0" marL="0">
-              <a:buNone/>
-            </a:pPr>
-            <a:r>
-              <a:rPr lang="en-US" sz="1800" dirty="0">
-                <a:solidFill>
-                  <a:srgbClr val="111418"/>
-                </a:solidFill>
-                <a:latin typeface="Inter" pitchFamily="34" charset="0"/>
-                <a:ea typeface="Inter" pitchFamily="34" charset="-122"/>
-                <a:cs typeface="Inter" pitchFamily="34" charset="-120"/>
-              </a:rPr>
-              <a:t>Venice Architecture Biennale</a:t>
-            </a:r>
-            <a:endParaRPr lang="en-US" sz="1800" dirty="0"/>
-          </a:p>
-        </p:txBody>
-      </p:sp>
-      <p:sp>
-        <p:nvSpPr>
-          <p:cNvPr id="18" name="Text 16"/>
-          <p:cNvSpPr/>
-          <p:nvPr/>
-        </p:nvSpPr>
-        <p:spPr>
-          <a:xfrm>
-            <a:off x="6217920" y="4526280"/>
-            <a:ext cx="640080" cy="457200"/>
-          </a:xfrm>
-          <a:prstGeom prst="rect">
-            <a:avLst/>
-          </a:prstGeom>
-          <a:noFill/>
-          <a:ln/>
-        </p:spPr>
-        <p:txBody>
-          <a:bodyPr wrap="square" rtlCol="0" anchor="ctr"/>
-          <a:lstStyle/>
-          <a:p>
-            <a:pPr indent="0" marL="0">
-              <a:buNone/>
-            </a:pPr>
-            <a:r>
-              <a:rPr lang="en-US" sz="1100" dirty="0">
-                <a:solidFill>
-                  <a:srgbClr val="0F766E"/>
-                </a:solidFill>
-                <a:latin typeface="IBM Plex Mono" pitchFamily="34" charset="0"/>
-                <a:ea typeface="IBM Plex Mono" pitchFamily="34" charset="-122"/>
-                <a:cs typeface="IBM Plex Mono" pitchFamily="34" charset="-120"/>
-              </a:rPr>
-              <a:t>08</a:t>
-            </a:r>
-            <a:endParaRPr lang="en-US" sz="1100" dirty="0"/>
-          </a:p>
-        </p:txBody>
-      </p:sp>
-      <p:sp>
-        <p:nvSpPr>
-          <p:cNvPr id="19" name="Text 17"/>
-          <p:cNvSpPr/>
-          <p:nvPr/>
-        </p:nvSpPr>
-        <p:spPr>
-          <a:xfrm>
-            <a:off x="6858000" y="4526280"/>
-            <a:ext cx="4846320" cy="457200"/>
-          </a:xfrm>
-          <a:prstGeom prst="rect">
-            <a:avLst/>
-          </a:prstGeom>
-          <a:noFill/>
-          <a:ln/>
-        </p:spPr>
-        <p:txBody>
-          <a:bodyPr wrap="square" rtlCol="0" anchor="ctr"/>
-          <a:lstStyle/>
-          <a:p>
-            <a:pPr indent="0" marL="0">
-              <a:buNone/>
-            </a:pPr>
-            <a:r>
-              <a:rPr lang="en-US" sz="1800" dirty="0">
-                <a:solidFill>
-                  <a:srgbClr val="111418"/>
-                </a:solidFill>
-                <a:latin typeface="Inter" pitchFamily="34" charset="0"/>
-                <a:ea typeface="Inter" pitchFamily="34" charset="-122"/>
-                <a:cs typeface="Inter" pitchFamily="34" charset="-120"/>
-              </a:rPr>
-              <a:t>Venice Art Biennale</a:t>
-            </a:r>
-            <a:endParaRPr lang="en-US" sz="1800" dirty="0"/>
-          </a:p>
-        </p:txBody>
-      </p:sp>
-      <p:sp>
-        <p:nvSpPr>
-          <p:cNvPr id="20" name="Text 18"/>
-          <p:cNvSpPr/>
-          <p:nvPr/>
-        </p:nvSpPr>
-        <p:spPr>
-          <a:xfrm>
-            <a:off x="10728655" y="6400800"/>
-            <a:ext cx="1097280" cy="274320"/>
-          </a:xfrm>
-          <a:prstGeom prst="rect">
-            <a:avLst/>
-          </a:prstGeom>
-          <a:noFill/>
-          <a:ln/>
-        </p:spPr>
-        <p:txBody>
-          <a:bodyPr wrap="square" rtlCol="0" anchor="ctr"/>
-          <a:lstStyle/>
-          <a:p>
-            <a:pPr algn="r" indent="0" marL="0">
-              <a:buNone/>
-            </a:pPr>
-            <a:r>
-              <a:rPr lang="en-US" sz="900" spc="400" kern="0" dirty="0">
-                <a:solidFill>
-                  <a:srgbClr val="6B7077"/>
-                </a:solidFill>
-                <a:latin typeface="IBM Plex Mono" pitchFamily="34" charset="0"/>
-                <a:ea typeface="IBM Plex Mono" pitchFamily="34" charset="-122"/>
-                <a:cs typeface="IBM Plex Mono" pitchFamily="34" charset="-120"/>
-              </a:rPr>
-              <a:t>13 / 15</a:t>
-            </a:r>
-            <a:endParaRPr lang="en-US" sz="900" dirty="0"/>
-          </a:p>
-        </p:txBody>
-      </p:sp>
-      <p:sp>
-        <p:nvSpPr>
-          <p:cNvPr id="21" name="Text 19"/>
           <p:cNvSpPr/>
           <p:nvPr/>
         </p:nvSpPr>
@@ -5227,7 +4727,7 @@
             <a:r>
               <a:rPr lang="en-US" sz="900" spc="600" kern="0" dirty="0">
                 <a:solidFill>
-                  <a:srgbClr val="6B7077"/>
+                  <a:srgbClr val="5B6068"/>
                 </a:solidFill>
                 <a:latin typeface="IBM Plex Mono" pitchFamily="34" charset="0"/>
                 <a:ea typeface="IBM Plex Mono" pitchFamily="34" charset="-122"/>
@@ -5279,34 +4779,34 @@
         </p:nvSpPr>
         <p:spPr>
           <a:xfrm>
-            <a:off x="548640" y="457200"/>
-            <a:ext cx="9144000" cy="274320"/>
-          </a:xfrm>
-          <a:prstGeom prst="rect">
-            <a:avLst/>
-          </a:prstGeom>
-          <a:noFill/>
-          <a:ln/>
-        </p:spPr>
-        <p:txBody>
-          <a:bodyPr wrap="square" rtlCol="0" anchor="ctr"/>
-          <a:lstStyle/>
-          <a:p>
-            <a:pPr indent="0" marL="0">
-              <a:buNone/>
-            </a:pPr>
-            <a:r>
-              <a:rPr lang="en-US" sz="900" spc="800" kern="0" dirty="0">
-                <a:solidFill>
-                  <a:srgbClr val="0F766E"/>
-                </a:solidFill>
-                <a:latin typeface="IBM Plex Mono" pitchFamily="34" charset="0"/>
-                <a:ea typeface="IBM Plex Mono" pitchFamily="34" charset="-122"/>
-                <a:cs typeface="IBM Plex Mono" pitchFamily="34" charset="-120"/>
-              </a:rPr>
-              <a:t>FUNDING MODEL</a:t>
-            </a:r>
-            <a:endParaRPr lang="en-US" sz="900" dirty="0"/>
+            <a:off x="548640" y="2011680"/>
+            <a:ext cx="10972800" cy="1463040"/>
+          </a:xfrm>
+          <a:prstGeom prst="rect">
+            <a:avLst/>
+          </a:prstGeom>
+          <a:noFill/>
+          <a:ln/>
+        </p:spPr>
+        <p:txBody>
+          <a:bodyPr wrap="square" rtlCol="0" anchor="ctr"/>
+          <a:lstStyle/>
+          <a:p>
+            <a:pPr indent="0" marL="0">
+              <a:buNone/>
+            </a:pPr>
+            <a:r>
+              <a:rPr lang="en-US" sz="14000" b="1" spc="800" kern="0" dirty="0">
+                <a:solidFill>
+                  <a:srgbClr val="111418"/>
+                </a:solidFill>
+                <a:latin typeface="Trebuchet MS" pitchFamily="34" charset="0"/>
+                <a:ea typeface="Trebuchet MS" pitchFamily="34" charset="-122"/>
+                <a:cs typeface="Trebuchet MS" pitchFamily="34" charset="-120"/>
+              </a:rPr>
+              <a:t>ARAL3D</a:t>
+            </a:r>
+            <a:endParaRPr lang="en-US" sz="14000" dirty="0"/>
           </a:p>
         </p:txBody>
       </p:sp>
@@ -5318,390 +4818,7 @@
         </p:nvSpPr>
         <p:spPr>
           <a:xfrm>
-            <a:off x="548640" y="914400"/>
-            <a:ext cx="10972800" cy="822960"/>
-          </a:xfrm>
-          <a:prstGeom prst="rect">
-            <a:avLst/>
-          </a:prstGeom>
-          <a:noFill/>
-          <a:ln/>
-        </p:spPr>
-        <p:txBody>
-          <a:bodyPr wrap="square" rtlCol="0" anchor="ctr"/>
-          <a:lstStyle/>
-          <a:p>
-            <a:pPr indent="0" marL="0">
-              <a:buNone/>
-            </a:pPr>
-            <a:r>
-              <a:rPr lang="en-US" sz="4000" dirty="0">
-                <a:solidFill>
-                  <a:srgbClr val="111418"/>
-                </a:solidFill>
-                <a:latin typeface="Inter" pitchFamily="34" charset="0"/>
-                <a:ea typeface="Inter" pitchFamily="34" charset="-122"/>
-                <a:cs typeface="Inter" pitchFamily="34" charset="-120"/>
-              </a:rPr>
-              <a:t>Free, by default.</a:t>
-            </a:r>
-            <a:endParaRPr lang="en-US" sz="4000" dirty="0"/>
-          </a:p>
-        </p:txBody>
-      </p:sp>
-      <p:sp>
-        <p:nvSpPr>
-          <p:cNvPr id="4" name="Text 2"/>
-          <p:cNvSpPr/>
-          <p:nvPr/>
-        </p:nvSpPr>
-        <p:spPr>
-          <a:xfrm>
-            <a:off x="548640" y="1920240"/>
-            <a:ext cx="10972800" cy="914400"/>
-          </a:xfrm>
-          <a:prstGeom prst="rect">
-            <a:avLst/>
-          </a:prstGeom>
-          <a:noFill/>
-          <a:ln/>
-        </p:spPr>
-        <p:txBody>
-          <a:bodyPr wrap="square" rtlCol="0" anchor="ctr"/>
-          <a:lstStyle/>
-          <a:p>
-            <a:pPr indent="0" marL="0">
-              <a:buNone/>
-            </a:pPr>
-            <a:r>
-              <a:rPr lang="en-US" sz="1800" dirty="0">
-                <a:solidFill>
-                  <a:srgbClr val="6B7077"/>
-                </a:solidFill>
-                <a:latin typeface="Inter" pitchFamily="34" charset="0"/>
-                <a:ea typeface="Inter" pitchFamily="34" charset="-122"/>
-                <a:cs typeface="Inter" pitchFamily="34" charset="-120"/>
-              </a:rPr>
-              <a:t>Aral3D stays free for schools, students, teachers, researchers, museums and public institutions.</a:t>
-            </a:r>
-            <a:endParaRPr lang="en-US" sz="1800" dirty="0"/>
-          </a:p>
-        </p:txBody>
-      </p:sp>
-      <p:sp>
-        <p:nvSpPr>
-          <p:cNvPr id="5" name="Text 3"/>
-          <p:cNvSpPr/>
-          <p:nvPr/>
-        </p:nvSpPr>
-        <p:spPr>
-          <a:xfrm>
-            <a:off x="548640" y="3291840"/>
-            <a:ext cx="5486400" cy="274320"/>
-          </a:xfrm>
-          <a:prstGeom prst="rect">
-            <a:avLst/>
-          </a:prstGeom>
-          <a:noFill/>
-          <a:ln/>
-        </p:spPr>
-        <p:txBody>
-          <a:bodyPr wrap="square" rtlCol="0" anchor="ctr"/>
-          <a:lstStyle/>
-          <a:p>
-            <a:pPr indent="0" marL="0">
-              <a:buNone/>
-            </a:pPr>
-            <a:r>
-              <a:rPr lang="en-US" sz="1000" spc="800" kern="0" dirty="0">
-                <a:solidFill>
-                  <a:srgbClr val="0F766E"/>
-                </a:solidFill>
-                <a:latin typeface="IBM Plex Mono" pitchFamily="34" charset="0"/>
-                <a:ea typeface="IBM Plex Mono" pitchFamily="34" charset="-122"/>
-                <a:cs typeface="IBM Plex Mono" pitchFamily="34" charset="-120"/>
-              </a:rPr>
-              <a:t>CORE SUPPORT</a:t>
-            </a:r>
-            <a:endParaRPr lang="en-US" sz="1000" dirty="0"/>
-          </a:p>
-        </p:txBody>
-      </p:sp>
-      <p:sp>
-        <p:nvSpPr>
-          <p:cNvPr id="6" name="Text 4"/>
-          <p:cNvSpPr/>
-          <p:nvPr/>
-        </p:nvSpPr>
-        <p:spPr>
-          <a:xfrm>
-            <a:off x="548640" y="3657600"/>
-            <a:ext cx="5486400" cy="2377440"/>
-          </a:xfrm>
-          <a:prstGeom prst="rect">
-            <a:avLst/>
-          </a:prstGeom>
-          <a:noFill/>
-          <a:ln/>
-        </p:spPr>
-        <p:txBody>
-          <a:bodyPr wrap="square" rtlCol="0" anchor="ctr"/>
-          <a:lstStyle/>
-          <a:p>
-            <a:pPr indent="0" marL="0">
-              <a:buNone/>
-            </a:pPr>
-            <a:r>
-              <a:rPr lang="en-US" sz="1400" dirty="0">
-                <a:solidFill>
-                  <a:srgbClr val="111418"/>
-                </a:solidFill>
-                <a:latin typeface="Inter" pitchFamily="34" charset="0"/>
-                <a:ea typeface="Inter" pitchFamily="34" charset="-122"/>
-                <a:cs typeface="Inter" pitchFamily="34" charset="-120"/>
-              </a:rPr>
-              <a:t>Ministry of Education, Ministry of Ecology, public educational and environmental programs, state museums, universities.</a:t>
-            </a:r>
-            <a:endParaRPr lang="en-US" sz="1400" dirty="0"/>
-          </a:p>
-        </p:txBody>
-      </p:sp>
-      <p:sp>
-        <p:nvSpPr>
-          <p:cNvPr id="7" name="Text 5"/>
-          <p:cNvSpPr/>
-          <p:nvPr/>
-        </p:nvSpPr>
-        <p:spPr>
-          <a:xfrm>
-            <a:off x="6400800" y="3291840"/>
-            <a:ext cx="5486400" cy="274320"/>
-          </a:xfrm>
-          <a:prstGeom prst="rect">
-            <a:avLst/>
-          </a:prstGeom>
-          <a:noFill/>
-          <a:ln/>
-        </p:spPr>
-        <p:txBody>
-          <a:bodyPr wrap="square" rtlCol="0" anchor="ctr"/>
-          <a:lstStyle/>
-          <a:p>
-            <a:pPr indent="0" marL="0">
-              <a:buNone/>
-            </a:pPr>
-            <a:r>
-              <a:rPr lang="en-US" sz="1000" spc="800" kern="0" dirty="0">
-                <a:solidFill>
-                  <a:srgbClr val="0F766E"/>
-                </a:solidFill>
-                <a:latin typeface="IBM Plex Mono" pitchFamily="34" charset="0"/>
-                <a:ea typeface="IBM Plex Mono" pitchFamily="34" charset="-122"/>
-                <a:cs typeface="IBM Plex Mono" pitchFamily="34" charset="-120"/>
-              </a:rPr>
-              <a:t>OPTIONAL</a:t>
-            </a:r>
-            <a:endParaRPr lang="en-US" sz="1000" dirty="0"/>
-          </a:p>
-        </p:txBody>
-      </p:sp>
-      <p:sp>
-        <p:nvSpPr>
-          <p:cNvPr id="8" name="Text 6"/>
-          <p:cNvSpPr/>
-          <p:nvPr/>
-        </p:nvSpPr>
-        <p:spPr>
-          <a:xfrm>
-            <a:off x="6400800" y="3657600"/>
-            <a:ext cx="5486400" cy="2377440"/>
-          </a:xfrm>
-          <a:prstGeom prst="rect">
-            <a:avLst/>
-          </a:prstGeom>
-          <a:noFill/>
-          <a:ln/>
-        </p:spPr>
-        <p:txBody>
-          <a:bodyPr wrap="square" rtlCol="0" anchor="ctr"/>
-          <a:lstStyle/>
-          <a:p>
-            <a:pPr indent="0" marL="0">
-              <a:buNone/>
-            </a:pPr>
-            <a:r>
-              <a:rPr lang="en-US" sz="1400" dirty="0">
-                <a:solidFill>
-                  <a:srgbClr val="111418"/>
-                </a:solidFill>
-                <a:latin typeface="Inter" pitchFamily="34" charset="0"/>
-                <a:ea typeface="Inter" pitchFamily="34" charset="-122"/>
-                <a:cs typeface="Inter" pitchFamily="34" charset="-120"/>
-              </a:rPr>
-              <a:t>Private museums, festivals, private educational centers, commissioned exhibition versions, international cultural programs.</a:t>
-            </a:r>
-            <a:endParaRPr lang="en-US" sz="1400" dirty="0"/>
-          </a:p>
-        </p:txBody>
-      </p:sp>
-      <p:sp>
-        <p:nvSpPr>
-          <p:cNvPr id="9" name="Text 7"/>
-          <p:cNvSpPr/>
-          <p:nvPr/>
-        </p:nvSpPr>
-        <p:spPr>
-          <a:xfrm>
-            <a:off x="10728655" y="6400800"/>
-            <a:ext cx="1097280" cy="274320"/>
-          </a:xfrm>
-          <a:prstGeom prst="rect">
-            <a:avLst/>
-          </a:prstGeom>
-          <a:noFill/>
-          <a:ln/>
-        </p:spPr>
-        <p:txBody>
-          <a:bodyPr wrap="square" rtlCol="0" anchor="ctr"/>
-          <a:lstStyle/>
-          <a:p>
-            <a:pPr algn="r" indent="0" marL="0">
-              <a:buNone/>
-            </a:pPr>
-            <a:r>
-              <a:rPr lang="en-US" sz="900" spc="400" kern="0" dirty="0">
-                <a:solidFill>
-                  <a:srgbClr val="6B7077"/>
-                </a:solidFill>
-                <a:latin typeface="IBM Plex Mono" pitchFamily="34" charset="0"/>
-                <a:ea typeface="IBM Plex Mono" pitchFamily="34" charset="-122"/>
-                <a:cs typeface="IBM Plex Mono" pitchFamily="34" charset="-120"/>
-              </a:rPr>
-              <a:t>14 / 15</a:t>
-            </a:r>
-            <a:endParaRPr lang="en-US" sz="900" dirty="0"/>
-          </a:p>
-        </p:txBody>
-      </p:sp>
-      <p:sp>
-        <p:nvSpPr>
-          <p:cNvPr id="10" name="Text 8"/>
-          <p:cNvSpPr/>
-          <p:nvPr/>
-        </p:nvSpPr>
-        <p:spPr>
-          <a:xfrm>
-            <a:off x="548640" y="6400800"/>
-            <a:ext cx="5486400" cy="274320"/>
-          </a:xfrm>
-          <a:prstGeom prst="rect">
-            <a:avLst/>
-          </a:prstGeom>
-          <a:noFill/>
-          <a:ln/>
-        </p:spPr>
-        <p:txBody>
-          <a:bodyPr wrap="square" rtlCol="0" anchor="ctr"/>
-          <a:lstStyle/>
-          <a:p>
-            <a:pPr indent="0" marL="0">
-              <a:buNone/>
-            </a:pPr>
-            <a:r>
-              <a:rPr lang="en-US" sz="900" spc="600" kern="0" dirty="0">
-                <a:solidFill>
-                  <a:srgbClr val="6B7077"/>
-                </a:solidFill>
-                <a:latin typeface="IBM Plex Mono" pitchFamily="34" charset="0"/>
-                <a:ea typeface="IBM Plex Mono" pitchFamily="34" charset="-122"/>
-                <a:cs typeface="IBM Plex Mono" pitchFamily="34" charset="-120"/>
-              </a:rPr>
-              <a:t>ARAL3D</a:t>
-            </a:r>
-            <a:endParaRPr lang="en-US" sz="900" dirty="0"/>
-          </a:p>
-        </p:txBody>
-      </p:sp>
-    </p:spTree>
-  </p:cSld>
-  <p:clrMapOvr>
-    <a:masterClrMapping/>
-  </p:clrMapOvr>
-</p:sld>
-</file>
-
-<file path=ppt/slides/slide15.xml><?xml version="1.0" encoding="utf-8"?>
-<p:sld xmlns:a="http://schemas.openxmlformats.org/drawingml/2006/main" xmlns:r="http://schemas.openxmlformats.org/officeDocument/2006/relationships" xmlns:p="http://schemas.openxmlformats.org/presentationml/2006/main">
-  <p:cSld name="Slide 15">
-    <p:bg>
-      <p:bgPr>
-        <a:solidFill>
-          <a:srgbClr val="FFFFFF"/>
-        </a:solidFill>
-      </p:bgPr>
-    </p:bg>
-    <p:spTree>
-      <p:nvGrpSpPr>
-        <p:cNvPr id="1" name=""/>
-        <p:cNvGrpSpPr/>
-        <p:nvPr/>
-      </p:nvGrpSpPr>
-      <p:grpSpPr>
-        <a:xfrm>
-          <a:off x="0" y="0"/>
-          <a:ext cx="0" cy="0"/>
-          <a:chOff x="0" y="0"/>
-          <a:chExt cx="0" cy="0"/>
-        </a:xfrm>
-      </p:grpSpPr>
-      <p:sp>
-        <p:nvSpPr>
-          <p:cNvPr id="2" name="Text 0"/>
-          <p:cNvSpPr/>
-          <p:nvPr/>
-        </p:nvSpPr>
-        <p:spPr>
-          <a:xfrm>
-            <a:off x="548640" y="2194560"/>
-            <a:ext cx="10972800" cy="1097280"/>
-          </a:xfrm>
-          <a:prstGeom prst="rect">
-            <a:avLst/>
-          </a:prstGeom>
-          <a:noFill/>
-          <a:ln/>
-        </p:spPr>
-        <p:txBody>
-          <a:bodyPr wrap="square" rtlCol="0" anchor="ctr"/>
-          <a:lstStyle/>
-          <a:p>
-            <a:pPr indent="0" marL="0">
-              <a:buNone/>
-            </a:pPr>
-            <a:r>
-              <a:rPr lang="en-US" sz="8000" spc="-300" kern="0" dirty="0">
-                <a:solidFill>
-                  <a:srgbClr val="111418"/>
-                </a:solidFill>
-                <a:latin typeface="Inter" pitchFamily="34" charset="0"/>
-                <a:ea typeface="Inter" pitchFamily="34" charset="-122"/>
-                <a:cs typeface="Inter" pitchFamily="34" charset="-120"/>
-              </a:rPr>
-              <a:t>Aral3D</a:t>
-            </a:r>
-            <a:endParaRPr lang="en-US" sz="8000" dirty="0"/>
-          </a:p>
-        </p:txBody>
-      </p:sp>
-      <p:sp>
-        <p:nvSpPr>
-          <p:cNvPr id="3" name="Text 1"/>
-          <p:cNvSpPr/>
-          <p:nvPr/>
-        </p:nvSpPr>
-        <p:spPr>
-          <a:xfrm>
-            <a:off x="548640" y="3383280"/>
+            <a:off x="548640" y="3840480"/>
             <a:ext cx="10972800" cy="731520"/>
           </a:xfrm>
           <a:prstGeom prst="rect">
@@ -5718,17 +4835,17 @@
               <a:buNone/>
             </a:pPr>
             <a:r>
-              <a:rPr lang="en-US" sz="2400" dirty="0">
-                <a:solidFill>
-                  <a:srgbClr val="6B7077"/>
-                </a:solidFill>
-                <a:latin typeface="Inter" pitchFamily="34" charset="0"/>
-                <a:ea typeface="Inter" pitchFamily="34" charset="-122"/>
-                <a:cs typeface="Inter" pitchFamily="34" charset="-120"/>
+              <a:rPr lang="en-US" sz="2800" i="1" dirty="0">
+                <a:solidFill>
+                  <a:srgbClr val="EC4899"/>
+                </a:solidFill>
+                <a:latin typeface="Georgia" pitchFamily="34" charset="0"/>
+                <a:ea typeface="Georgia" pitchFamily="34" charset="-122"/>
+                <a:cs typeface="Georgia" pitchFamily="34" charset="-120"/>
               </a:rPr>
               <a:t>A 3D platform for the Aral Sea basin.</a:t>
             </a:r>
-            <a:endParaRPr lang="en-US" sz="2400" dirty="0"/>
+            <a:endParaRPr lang="en-US" sz="2800" dirty="0"/>
           </a:p>
         </p:txBody>
       </p:sp>
@@ -5740,7 +4857,7 @@
         </p:nvSpPr>
         <p:spPr>
           <a:xfrm>
-            <a:off x="548640" y="5120640"/>
+            <a:off x="548640" y="5303520"/>
             <a:ext cx="11094415" cy="0"/>
           </a:xfrm>
           <a:prstGeom prst="line">
@@ -5763,7 +4880,7 @@
         </p:nvSpPr>
         <p:spPr>
           <a:xfrm>
-            <a:off x="548640" y="5394960"/>
+            <a:off x="548640" y="5577840"/>
             <a:ext cx="10972800" cy="365760"/>
           </a:xfrm>
           <a:prstGeom prst="rect">
@@ -5780,9 +4897,9 @@
               <a:buNone/>
             </a:pPr>
             <a:r>
-              <a:rPr lang="en-US" sz="1200" spc="600" kern="0" dirty="0">
-                <a:solidFill>
-                  <a:srgbClr val="0F766E"/>
+              <a:rPr lang="en-US" sz="1200" b="1" spc="600" kern="0" dirty="0">
+                <a:solidFill>
+                  <a:srgbClr val="3B82F6"/>
                 </a:solidFill>
                 <a:latin typeface="IBM Plex Mono" pitchFamily="34" charset="0"/>
                 <a:ea typeface="IBM Plex Mono" pitchFamily="34" charset="-122"/>
@@ -5851,15 +4968,15 @@
               <a:buNone/>
             </a:pPr>
             <a:r>
-              <a:rPr lang="en-US" sz="900" spc="800" kern="0" dirty="0">
-                <a:solidFill>
-                  <a:srgbClr val="0F766E"/>
+              <a:rPr lang="en-US" sz="900" b="1" spc="800" kern="0" dirty="0">
+                <a:solidFill>
+                  <a:srgbClr val="EC4899"/>
                 </a:solidFill>
                 <a:latin typeface="IBM Plex Mono" pitchFamily="34" charset="0"/>
                 <a:ea typeface="IBM Plex Mono" pitchFamily="34" charset="-122"/>
                 <a:cs typeface="IBM Plex Mono" pitchFamily="34" charset="-120"/>
               </a:rPr>
-              <a:t>WHAT IT IS</a:t>
+              <a:t>STARTING POINT</a:t>
             </a:r>
             <a:endParaRPr lang="en-US" sz="900" dirty="0"/>
           </a:p>
@@ -5873,40 +4990,118 @@
         </p:nvSpPr>
         <p:spPr>
           <a:xfrm>
-            <a:off x="548640" y="2011680"/>
-            <a:ext cx="10972800" cy="3200400"/>
-          </a:xfrm>
-          <a:prstGeom prst="rect">
-            <a:avLst/>
-          </a:prstGeom>
-          <a:noFill/>
-          <a:ln/>
-        </p:spPr>
-        <p:txBody>
-          <a:bodyPr wrap="square" rtlCol="0" anchor="t"/>
-          <a:lstStyle/>
-          <a:p>
-            <a:pPr indent="0" marL="0">
-              <a:buNone/>
-            </a:pPr>
-            <a:r>
-              <a:rPr lang="en-US" sz="4000" spc="-100" kern="0" dirty="0">
+            <a:off x="548640" y="1645920"/>
+            <a:ext cx="10972800" cy="1463040"/>
+          </a:xfrm>
+          <a:prstGeom prst="rect">
+            <a:avLst/>
+          </a:prstGeom>
+          <a:noFill/>
+          <a:ln/>
+        </p:spPr>
+        <p:txBody>
+          <a:bodyPr wrap="square" rtlCol="0" anchor="ctr"/>
+          <a:lstStyle/>
+          <a:p>
+            <a:pPr indent="0" marL="0">
+              <a:buNone/>
+            </a:pPr>
+            <a:r>
+              <a:rPr lang="en-US" sz="11000" b="1" spc="600" kern="0" dirty="0">
                 <a:solidFill>
                   <a:srgbClr val="111418"/>
                 </a:solidFill>
-                <a:latin typeface="Inter" pitchFamily="34" charset="0"/>
-                <a:ea typeface="Inter" pitchFamily="34" charset="-122"/>
-                <a:cs typeface="Inter" pitchFamily="34" charset="-120"/>
-              </a:rPr>
-              <a:t>An interactive 3D environment of the Aral Sea basin for schools, museums and researchers.</a:t>
-            </a:r>
-            <a:endParaRPr lang="en-US" sz="4000" dirty="0"/>
+                <a:latin typeface="Trebuchet MS" pitchFamily="34" charset="0"/>
+                <a:ea typeface="Trebuchet MS" pitchFamily="34" charset="-122"/>
+                <a:cs typeface="Trebuchet MS" pitchFamily="34" charset="-120"/>
+              </a:rPr>
+              <a:t>WHAT IS WATER?</a:t>
+            </a:r>
+            <a:endParaRPr lang="en-US" sz="11000" dirty="0"/>
           </a:p>
         </p:txBody>
       </p:sp>
       <p:sp>
         <p:nvSpPr>
           <p:cNvPr id="4" name="Text 2"/>
+          <p:cNvSpPr/>
+          <p:nvPr/>
+        </p:nvSpPr>
+        <p:spPr>
+          <a:xfrm>
+            <a:off x="548640" y="3566160"/>
+            <a:ext cx="10972800" cy="731520"/>
+          </a:xfrm>
+          <a:prstGeom prst="rect">
+            <a:avLst/>
+          </a:prstGeom>
+          <a:noFill/>
+          <a:ln/>
+        </p:spPr>
+        <p:txBody>
+          <a:bodyPr wrap="square" rtlCol="0" anchor="ctr"/>
+          <a:lstStyle/>
+          <a:p>
+            <a:pPr indent="0" marL="0">
+              <a:buNone/>
+            </a:pPr>
+            <a:r>
+              <a:rPr lang="en-US" sz="3400" i="1" dirty="0">
+                <a:solidFill>
+                  <a:srgbClr val="3B82F6"/>
+                </a:solidFill>
+                <a:latin typeface="Georgia" pitchFamily="34" charset="0"/>
+                <a:ea typeface="Georgia" pitchFamily="34" charset="-122"/>
+                <a:cs typeface="Georgia" pitchFamily="34" charset="-120"/>
+              </a:rPr>
+              <a:t>How we picture water shapes how we use it.</a:t>
+            </a:r>
+            <a:endParaRPr lang="en-US" sz="3400" dirty="0"/>
+          </a:p>
+        </p:txBody>
+      </p:sp>
+      <p:sp>
+        <p:nvSpPr>
+          <p:cNvPr id="5" name="Text 3"/>
+          <p:cNvSpPr/>
+          <p:nvPr/>
+        </p:nvSpPr>
+        <p:spPr>
+          <a:xfrm>
+            <a:off x="548640" y="4480560"/>
+            <a:ext cx="10058400" cy="1463040"/>
+          </a:xfrm>
+          <a:prstGeom prst="rect">
+            <a:avLst/>
+          </a:prstGeom>
+          <a:noFill/>
+          <a:ln/>
+        </p:spPr>
+        <p:txBody>
+          <a:bodyPr wrap="square" rtlCol="0" anchor="ctr"/>
+          <a:lstStyle/>
+          <a:p>
+            <a:pPr indent="0" marL="0">
+              <a:buNone/>
+            </a:pPr>
+            <a:r>
+              <a:rPr lang="en-US" sz="2000" dirty="0">
+                <a:solidFill>
+                  <a:srgbClr val="5B6068"/>
+                </a:solidFill>
+                <a:latin typeface="Trebuchet MS" pitchFamily="34" charset="0"/>
+                <a:ea typeface="Trebuchet MS" pitchFamily="34" charset="-122"/>
+                <a:cs typeface="Trebuchet MS" pitchFamily="34" charset="-120"/>
+              </a:rPr>
+              <a:t>Aral3D explores different ways of seeing the basin — as map, as terrain, as climate, as everyday life.</a:t>
+            </a:r>
+            <a:endParaRPr lang="en-US" sz="2000" dirty="0"/>
+          </a:p>
+        </p:txBody>
+      </p:sp>
+      <p:sp>
+        <p:nvSpPr>
+          <p:cNvPr id="6" name="Text 4"/>
           <p:cNvSpPr/>
           <p:nvPr/>
         </p:nvSpPr>
@@ -5929,15 +5124,15 @@
               <a:buNone/>
             </a:pPr>
             <a:r>
-              <a:rPr lang="en-US" sz="900" spc="400" kern="0" dirty="0">
-                <a:solidFill>
-                  <a:srgbClr val="6B7077"/>
+              <a:rPr lang="en-US" sz="900" dirty="0">
+                <a:solidFill>
+                  <a:srgbClr val="5B6068"/>
                 </a:solidFill>
                 <a:latin typeface="IBM Plex Mono" pitchFamily="34" charset="0"/>
                 <a:ea typeface="IBM Plex Mono" pitchFamily="34" charset="-122"/>
                 <a:cs typeface="IBM Plex Mono" pitchFamily="34" charset="-120"/>
               </a:rPr>
-              <a:t>02 / 15</a:t>
+              <a:t>02 / 14</a:t>
             </a:r>
             <a:endParaRPr lang="en-US" sz="900" dirty="0"/>
           </a:p>
@@ -5945,7 +5140,7 @@
       </p:sp>
       <p:sp>
         <p:nvSpPr>
-          <p:cNvPr id="5" name="Text 3"/>
+          <p:cNvPr id="7" name="Text 5"/>
           <p:cNvSpPr/>
           <p:nvPr/>
         </p:nvSpPr>
@@ -5970,7 +5165,7 @@
             <a:r>
               <a:rPr lang="en-US" sz="900" spc="600" kern="0" dirty="0">
                 <a:solidFill>
-                  <a:srgbClr val="6B7077"/>
+                  <a:srgbClr val="5B6068"/>
                 </a:solidFill>
                 <a:latin typeface="IBM Plex Mono" pitchFamily="34" charset="0"/>
                 <a:ea typeface="IBM Plex Mono" pitchFamily="34" charset="-122"/>
@@ -6039,15 +5234,15 @@
               <a:buNone/>
             </a:pPr>
             <a:r>
-              <a:rPr lang="en-US" sz="900" spc="800" kern="0" dirty="0">
-                <a:solidFill>
-                  <a:srgbClr val="0F766E"/>
+              <a:rPr lang="en-US" sz="900" b="1" spc="800" kern="0" dirty="0">
+                <a:solidFill>
+                  <a:srgbClr val="3B82F6"/>
                 </a:solidFill>
                 <a:latin typeface="IBM Plex Mono" pitchFamily="34" charset="0"/>
                 <a:ea typeface="IBM Plex Mono" pitchFamily="34" charset="-122"/>
                 <a:cs typeface="IBM Plex Mono" pitchFamily="34" charset="-120"/>
               </a:rPr>
-              <a:t>STARTING POINT</a:t>
+              <a:t>THE PLATFORM</a:t>
             </a:r>
             <a:endParaRPr lang="en-US" sz="900" dirty="0"/>
           </a:p>
@@ -6061,75 +5256,61 @@
         </p:nvSpPr>
         <p:spPr>
           <a:xfrm>
-            <a:off x="548640" y="1828800"/>
-            <a:ext cx="10972800" cy="1280160"/>
-          </a:xfrm>
-          <a:prstGeom prst="rect">
-            <a:avLst/>
-          </a:prstGeom>
-          <a:noFill/>
-          <a:ln/>
-        </p:spPr>
-        <p:txBody>
-          <a:bodyPr wrap="square" rtlCol="0" anchor="ctr"/>
-          <a:lstStyle/>
-          <a:p>
-            <a:pPr indent="0" marL="0">
-              <a:buNone/>
-            </a:pPr>
-            <a:r>
-              <a:rPr lang="en-US" sz="8800" spc="-300" kern="0" dirty="0">
+            <a:off x="548640" y="914400"/>
+            <a:ext cx="10972800" cy="914400"/>
+          </a:xfrm>
+          <a:prstGeom prst="rect">
+            <a:avLst/>
+          </a:prstGeom>
+          <a:noFill/>
+          <a:ln/>
+        </p:spPr>
+        <p:txBody>
+          <a:bodyPr wrap="square" rtlCol="0" anchor="ctr"/>
+          <a:lstStyle/>
+          <a:p>
+            <a:pPr indent="0" marL="0">
+              <a:buNone/>
+            </a:pPr>
+            <a:r>
+              <a:rPr lang="en-US" sz="5400" b="1" spc="400" kern="0" dirty="0">
                 <a:solidFill>
                   <a:srgbClr val="111418"/>
                 </a:solidFill>
-                <a:latin typeface="Inter" pitchFamily="34" charset="0"/>
-                <a:ea typeface="Inter" pitchFamily="34" charset="-122"/>
-                <a:cs typeface="Inter" pitchFamily="34" charset="-120"/>
-              </a:rPr>
-              <a:t>What is water?</a:t>
-            </a:r>
-            <a:endParaRPr lang="en-US" sz="8800" dirty="0"/>
-          </a:p>
-        </p:txBody>
-      </p:sp>
-      <p:sp>
-        <p:nvSpPr>
-          <p:cNvPr id="4" name="Text 2"/>
-          <p:cNvSpPr/>
-          <p:nvPr/>
-        </p:nvSpPr>
-        <p:spPr>
-          <a:xfrm>
-            <a:off x="548640" y="3657600"/>
-            <a:ext cx="10058400" cy="2011680"/>
-          </a:xfrm>
-          <a:prstGeom prst="rect">
-            <a:avLst/>
-          </a:prstGeom>
-          <a:noFill/>
-          <a:ln/>
-        </p:spPr>
-        <p:txBody>
-          <a:bodyPr wrap="square" rtlCol="0" anchor="ctr"/>
-          <a:lstStyle/>
-          <a:p>
-            <a:pPr indent="0" marL="0">
-              <a:buNone/>
-            </a:pPr>
-            <a:r>
-              <a:rPr lang="en-US" sz="2000" dirty="0">
-                <a:solidFill>
-                  <a:srgbClr val="6B7077"/>
-                </a:solidFill>
-                <a:latin typeface="Inter" pitchFamily="34" charset="0"/>
-                <a:ea typeface="Inter" pitchFamily="34" charset="-122"/>
-                <a:cs typeface="Inter" pitchFamily="34" charset="-120"/>
-              </a:rPr>
-              <a:t>How we picture water shapes how we use it. The project explores different ways of seeing the Aral basin — as map, as terrain, as climate, as everyday life.</a:t>
-            </a:r>
-            <a:endParaRPr lang="en-US" sz="2000" dirty="0"/>
-          </a:p>
-        </p:txBody>
+                <a:latin typeface="Trebuchet MS" pitchFamily="34" charset="0"/>
+                <a:ea typeface="Trebuchet MS" pitchFamily="34" charset="-122"/>
+                <a:cs typeface="Trebuchet MS" pitchFamily="34" charset="-120"/>
+              </a:rPr>
+              <a:t>TWO MODES.</a:t>
+            </a:r>
+            <a:endParaRPr lang="en-US" sz="5400" dirty="0"/>
+          </a:p>
+        </p:txBody>
+      </p:sp>
+      <p:sp>
+        <p:nvSpPr>
+          <p:cNvPr id="4" name="Shape 2"/>
+          <p:cNvSpPr/>
+          <p:nvPr/>
+        </p:nvSpPr>
+        <p:spPr>
+          <a:xfrm>
+            <a:off x="548640" y="2377440"/>
+            <a:ext cx="5486400" cy="3840480"/>
+          </a:xfrm>
+          <a:prstGeom prst="rect">
+            <a:avLst/>
+          </a:prstGeom>
+          <a:solidFill>
+            <a:srgbClr val="F4F8FF"/>
+          </a:solidFill>
+          <a:ln w="25400">
+            <a:solidFill>
+              <a:srgbClr val="3B82F6"/>
+            </a:solidFill>
+            <a:prstDash val="solid"/>
+          </a:ln>
+        </p:spPr>
       </p:sp>
       <p:sp>
         <p:nvSpPr>
@@ -6139,32 +5320,291 @@
         </p:nvSpPr>
         <p:spPr>
           <a:xfrm>
-            <a:off x="10728655" y="6400800"/>
-            <a:ext cx="1097280" cy="274320"/>
-          </a:xfrm>
-          <a:prstGeom prst="rect">
-            <a:avLst/>
-          </a:prstGeom>
-          <a:noFill/>
-          <a:ln/>
-        </p:spPr>
-        <p:txBody>
-          <a:bodyPr wrap="square" rtlCol="0" anchor="ctr"/>
-          <a:lstStyle/>
-          <a:p>
-            <a:pPr algn="r" indent="0" marL="0">
-              <a:buNone/>
-            </a:pPr>
-            <a:r>
-              <a:rPr lang="en-US" sz="900" spc="400" kern="0" dirty="0">
-                <a:solidFill>
-                  <a:srgbClr val="6B7077"/>
+            <a:off x="822960" y="2606040"/>
+            <a:ext cx="4572000" cy="365760"/>
+          </a:xfrm>
+          <a:prstGeom prst="rect">
+            <a:avLst/>
+          </a:prstGeom>
+          <a:noFill/>
+          <a:ln/>
+        </p:spPr>
+        <p:txBody>
+          <a:bodyPr wrap="square" rtlCol="0" anchor="ctr"/>
+          <a:lstStyle/>
+          <a:p>
+            <a:pPr indent="0" marL="0">
+              <a:buNone/>
+            </a:pPr>
+            <a:r>
+              <a:rPr lang="en-US" sz="1100" b="1" spc="800" kern="0" dirty="0">
+                <a:solidFill>
+                  <a:srgbClr val="3B82F6"/>
                 </a:solidFill>
                 <a:latin typeface="IBM Plex Mono" pitchFamily="34" charset="0"/>
                 <a:ea typeface="IBM Plex Mono" pitchFamily="34" charset="-122"/>
                 <a:cs typeface="IBM Plex Mono" pitchFamily="34" charset="-120"/>
               </a:rPr>
-              <a:t>03 / 15</a:t>
+              <a:t>01 — GAME</a:t>
+            </a:r>
+            <a:endParaRPr lang="en-US" sz="1100" dirty="0"/>
+          </a:p>
+        </p:txBody>
+      </p:sp>
+      <p:sp>
+        <p:nvSpPr>
+          <p:cNvPr id="6" name="Text 4"/>
+          <p:cNvSpPr/>
+          <p:nvPr/>
+        </p:nvSpPr>
+        <p:spPr>
+          <a:xfrm>
+            <a:off x="822960" y="3108960"/>
+            <a:ext cx="4937760" cy="731520"/>
+          </a:xfrm>
+          <a:prstGeom prst="rect">
+            <a:avLst/>
+          </a:prstGeom>
+          <a:noFill/>
+          <a:ln/>
+        </p:spPr>
+        <p:txBody>
+          <a:bodyPr wrap="square" rtlCol="0" anchor="ctr"/>
+          <a:lstStyle/>
+          <a:p>
+            <a:pPr indent="0" marL="0">
+              <a:buNone/>
+            </a:pPr>
+            <a:r>
+              <a:rPr lang="en-US" sz="3400" b="1" spc="300" kern="0" dirty="0">
+                <a:solidFill>
+                  <a:srgbClr val="111418"/>
+                </a:solidFill>
+                <a:latin typeface="Trebuchet MS" pitchFamily="34" charset="0"/>
+                <a:ea typeface="Trebuchet MS" pitchFamily="34" charset="-122"/>
+                <a:cs typeface="Trebuchet MS" pitchFamily="34" charset="-120"/>
+              </a:rPr>
+              <a:t>PLAY THE BASIN</a:t>
+            </a:r>
+            <a:endParaRPr lang="en-US" sz="3400" dirty="0"/>
+          </a:p>
+        </p:txBody>
+      </p:sp>
+      <p:sp>
+        <p:nvSpPr>
+          <p:cNvPr id="7" name="Text 5"/>
+          <p:cNvSpPr/>
+          <p:nvPr/>
+        </p:nvSpPr>
+        <p:spPr>
+          <a:xfrm>
+            <a:off x="822960" y="4206240"/>
+            <a:ext cx="4937760" cy="1828800"/>
+          </a:xfrm>
+          <a:prstGeom prst="rect">
+            <a:avLst/>
+          </a:prstGeom>
+          <a:noFill/>
+          <a:ln/>
+        </p:spPr>
+        <p:txBody>
+          <a:bodyPr wrap="square" rtlCol="0" anchor="ctr"/>
+          <a:lstStyle/>
+          <a:p>
+            <a:pPr indent="0" marL="0">
+              <a:buNone/>
+            </a:pPr>
+            <a:r>
+              <a:rPr lang="en-US" sz="1700" dirty="0">
+                <a:solidFill>
+                  <a:srgbClr val="5B6068"/>
+                </a:solidFill>
+                <a:latin typeface="Trebuchet MS" pitchFamily="34" charset="0"/>
+                <a:ea typeface="Trebuchet MS" pitchFamily="34" charset="-122"/>
+                <a:cs typeface="Trebuchet MS" pitchFamily="34" charset="-120"/>
+              </a:rPr>
+              <a:t>Short missions and playable worlds for students, schools and museum visitors.</a:t>
+            </a:r>
+            <a:endParaRPr lang="en-US" sz="1700" dirty="0"/>
+          </a:p>
+        </p:txBody>
+      </p:sp>
+      <p:sp>
+        <p:nvSpPr>
+          <p:cNvPr id="8" name="Shape 6"/>
+          <p:cNvSpPr/>
+          <p:nvPr/>
+        </p:nvSpPr>
+        <p:spPr>
+          <a:xfrm>
+            <a:off x="6309360" y="2377440"/>
+            <a:ext cx="5486400" cy="3840480"/>
+          </a:xfrm>
+          <a:prstGeom prst="rect">
+            <a:avLst/>
+          </a:prstGeom>
+          <a:solidFill>
+            <a:srgbClr val="FFF4F9"/>
+          </a:solidFill>
+          <a:ln w="25400">
+            <a:solidFill>
+              <a:srgbClr val="EC4899"/>
+            </a:solidFill>
+            <a:prstDash val="solid"/>
+          </a:ln>
+        </p:spPr>
+      </p:sp>
+      <p:sp>
+        <p:nvSpPr>
+          <p:cNvPr id="9" name="Text 7"/>
+          <p:cNvSpPr/>
+          <p:nvPr/>
+        </p:nvSpPr>
+        <p:spPr>
+          <a:xfrm>
+            <a:off x="6583680" y="2606040"/>
+            <a:ext cx="4572000" cy="365760"/>
+          </a:xfrm>
+          <a:prstGeom prst="rect">
+            <a:avLst/>
+          </a:prstGeom>
+          <a:noFill/>
+          <a:ln/>
+        </p:spPr>
+        <p:txBody>
+          <a:bodyPr wrap="square" rtlCol="0" anchor="ctr"/>
+          <a:lstStyle/>
+          <a:p>
+            <a:pPr indent="0" marL="0">
+              <a:buNone/>
+            </a:pPr>
+            <a:r>
+              <a:rPr lang="en-US" sz="1100" b="1" spc="800" kern="0" dirty="0">
+                <a:solidFill>
+                  <a:srgbClr val="EC4899"/>
+                </a:solidFill>
+                <a:latin typeface="IBM Plex Mono" pitchFamily="34" charset="0"/>
+                <a:ea typeface="IBM Plex Mono" pitchFamily="34" charset="-122"/>
+                <a:cs typeface="IBM Plex Mono" pitchFamily="34" charset="-120"/>
+              </a:rPr>
+              <a:t>02 — EXPLORE</a:t>
+            </a:r>
+            <a:endParaRPr lang="en-US" sz="1100" dirty="0"/>
+          </a:p>
+        </p:txBody>
+      </p:sp>
+      <p:sp>
+        <p:nvSpPr>
+          <p:cNvPr id="10" name="Text 8"/>
+          <p:cNvSpPr/>
+          <p:nvPr/>
+        </p:nvSpPr>
+        <p:spPr>
+          <a:xfrm>
+            <a:off x="6583680" y="3108960"/>
+            <a:ext cx="4937760" cy="731520"/>
+          </a:xfrm>
+          <a:prstGeom prst="rect">
+            <a:avLst/>
+          </a:prstGeom>
+          <a:noFill/>
+          <a:ln/>
+        </p:spPr>
+        <p:txBody>
+          <a:bodyPr wrap="square" rtlCol="0" anchor="ctr"/>
+          <a:lstStyle/>
+          <a:p>
+            <a:pPr indent="0" marL="0">
+              <a:buNone/>
+            </a:pPr>
+            <a:r>
+              <a:rPr lang="en-US" sz="3400" b="1" spc="300" kern="0" dirty="0">
+                <a:solidFill>
+                  <a:srgbClr val="111418"/>
+                </a:solidFill>
+                <a:latin typeface="Trebuchet MS" pitchFamily="34" charset="0"/>
+                <a:ea typeface="Trebuchet MS" pitchFamily="34" charset="-122"/>
+                <a:cs typeface="Trebuchet MS" pitchFamily="34" charset="-120"/>
+              </a:rPr>
+              <a:t>READ THE BASIN</a:t>
+            </a:r>
+            <a:endParaRPr lang="en-US" sz="3400" dirty="0"/>
+          </a:p>
+        </p:txBody>
+      </p:sp>
+      <p:sp>
+        <p:nvSpPr>
+          <p:cNvPr id="11" name="Text 9"/>
+          <p:cNvSpPr/>
+          <p:nvPr/>
+        </p:nvSpPr>
+        <p:spPr>
+          <a:xfrm>
+            <a:off x="6583680" y="4206240"/>
+            <a:ext cx="4937760" cy="1828800"/>
+          </a:xfrm>
+          <a:prstGeom prst="rect">
+            <a:avLst/>
+          </a:prstGeom>
+          <a:noFill/>
+          <a:ln/>
+        </p:spPr>
+        <p:txBody>
+          <a:bodyPr wrap="square" rtlCol="0" anchor="ctr"/>
+          <a:lstStyle/>
+          <a:p>
+            <a:pPr indent="0" marL="0">
+              <a:buNone/>
+            </a:pPr>
+            <a:r>
+              <a:rPr lang="en-US" sz="1700" dirty="0">
+                <a:solidFill>
+                  <a:srgbClr val="5B6068"/>
+                </a:solidFill>
+                <a:latin typeface="Trebuchet MS" pitchFamily="34" charset="0"/>
+                <a:ea typeface="Trebuchet MS" pitchFamily="34" charset="-122"/>
+                <a:cs typeface="Trebuchet MS" pitchFamily="34" charset="-120"/>
+              </a:rPr>
+              <a:t>Real elevation, historical basins, demographics, climate and water timeline. Shareable views.</a:t>
+            </a:r>
+            <a:endParaRPr lang="en-US" sz="1700" dirty="0"/>
+          </a:p>
+        </p:txBody>
+      </p:sp>
+      <p:sp>
+        <p:nvSpPr>
+          <p:cNvPr id="12" name="Text 10"/>
+          <p:cNvSpPr/>
+          <p:nvPr/>
+        </p:nvSpPr>
+        <p:spPr>
+          <a:xfrm>
+            <a:off x="10728655" y="6400800"/>
+            <a:ext cx="1097280" cy="274320"/>
+          </a:xfrm>
+          <a:prstGeom prst="rect">
+            <a:avLst/>
+          </a:prstGeom>
+          <a:noFill/>
+          <a:ln/>
+        </p:spPr>
+        <p:txBody>
+          <a:bodyPr wrap="square" rtlCol="0" anchor="ctr"/>
+          <a:lstStyle/>
+          <a:p>
+            <a:pPr algn="r" indent="0" marL="0">
+              <a:buNone/>
+            </a:pPr>
+            <a:r>
+              <a:rPr lang="en-US" sz="900" dirty="0">
+                <a:solidFill>
+                  <a:srgbClr val="5B6068"/>
+                </a:solidFill>
+                <a:latin typeface="IBM Plex Mono" pitchFamily="34" charset="0"/>
+                <a:ea typeface="IBM Plex Mono" pitchFamily="34" charset="-122"/>
+                <a:cs typeface="IBM Plex Mono" pitchFamily="34" charset="-120"/>
+              </a:rPr>
+              <a:t>03 / 14</a:t>
             </a:r>
             <a:endParaRPr lang="en-US" sz="900" dirty="0"/>
           </a:p>
@@ -6172,7 +5612,7 @@
       </p:sp>
       <p:sp>
         <p:nvSpPr>
-          <p:cNvPr id="6" name="Text 4"/>
+          <p:cNvPr id="13" name="Text 11"/>
           <p:cNvSpPr/>
           <p:nvPr/>
         </p:nvSpPr>
@@ -6197,7 +5637,7 @@
             <a:r>
               <a:rPr lang="en-US" sz="900" spc="600" kern="0" dirty="0">
                 <a:solidFill>
-                  <a:srgbClr val="6B7077"/>
+                  <a:srgbClr val="5B6068"/>
                 </a:solidFill>
                 <a:latin typeface="IBM Plex Mono" pitchFamily="34" charset="0"/>
                 <a:ea typeface="IBM Plex Mono" pitchFamily="34" charset="-122"/>
@@ -6241,54 +5681,97 @@
           <a:chExt cx="0" cy="0"/>
         </a:xfrm>
       </p:grpSpPr>
-      <p:sp>
-        <p:nvSpPr>
-          <p:cNvPr id="2" name="Text 0"/>
-          <p:cNvSpPr/>
-          <p:nvPr/>
-        </p:nvSpPr>
-        <p:spPr>
-          <a:xfrm>
-            <a:off x="548640" y="457200"/>
-            <a:ext cx="9144000" cy="274320"/>
-          </a:xfrm>
-          <a:prstGeom prst="rect">
-            <a:avLst/>
-          </a:prstGeom>
-          <a:noFill/>
-          <a:ln/>
-        </p:spPr>
-        <p:txBody>
-          <a:bodyPr wrap="square" rtlCol="0" anchor="ctr"/>
-          <a:lstStyle/>
-          <a:p>
-            <a:pPr indent="0" marL="0">
-              <a:buNone/>
-            </a:pPr>
-            <a:r>
-              <a:rPr lang="en-US" sz="900" spc="800" kern="0" dirty="0">
-                <a:solidFill>
-                  <a:srgbClr val="0F766E"/>
+      <p:pic>
+        <p:nvPicPr>
+          <p:cNvPr id="2" name="Image 0" descr="docs/screenshots/04-game-mission1.png">    </p:cNvPr>
+          <p:cNvPicPr>
+            <a:picLocks noChangeAspect="1"/>
+          </p:cNvPicPr>
+          <p:nvPr/>
+        </p:nvPicPr>
+        <p:blipFill>
+          <a:blip r:embed="rId1"/>
+          <a:srcRect l="0" r="0" t="0" b="0"/>
+          <a:stretch/>
+        </p:blipFill>
+        <p:spPr>
+          <a:xfrm>
+            <a:off x="0" y="0"/>
+            <a:ext cx="12191695" cy="5029200"/>
+          </a:xfrm>
+          <a:prstGeom prst="rect">
+            <a:avLst/>
+          </a:prstGeom>
+        </p:spPr>
+      </p:pic>
+      <p:sp>
+        <p:nvSpPr>
+          <p:cNvPr id="3" name="Shape 0"/>
+          <p:cNvSpPr/>
+          <p:nvPr/>
+        </p:nvSpPr>
+        <p:spPr>
+          <a:xfrm>
+            <a:off x="0" y="5029200"/>
+            <a:ext cx="12191695" cy="1828800"/>
+          </a:xfrm>
+          <a:prstGeom prst="rect">
+            <a:avLst/>
+          </a:prstGeom>
+          <a:solidFill>
+            <a:srgbClr val="FFFFFF"/>
+          </a:solidFill>
+          <a:ln/>
+        </p:spPr>
+      </p:sp>
+      <p:sp>
+        <p:nvSpPr>
+          <p:cNvPr id="4" name="Text 1"/>
+          <p:cNvSpPr/>
+          <p:nvPr/>
+        </p:nvSpPr>
+        <p:spPr>
+          <a:xfrm>
+            <a:off x="548640" y="5303520"/>
+            <a:ext cx="7315200" cy="274320"/>
+          </a:xfrm>
+          <a:prstGeom prst="rect">
+            <a:avLst/>
+          </a:prstGeom>
+          <a:noFill/>
+          <a:ln/>
+        </p:spPr>
+        <p:txBody>
+          <a:bodyPr wrap="square" rtlCol="0" anchor="ctr"/>
+          <a:lstStyle/>
+          <a:p>
+            <a:pPr indent="0" marL="0">
+              <a:buNone/>
+            </a:pPr>
+            <a:r>
+              <a:rPr lang="en-US" sz="1000" b="1" spc="800" kern="0" dirty="0">
+                <a:solidFill>
+                  <a:srgbClr val="3B82F6"/>
                 </a:solidFill>
                 <a:latin typeface="IBM Plex Mono" pitchFamily="34" charset="0"/>
                 <a:ea typeface="IBM Plex Mono" pitchFamily="34" charset="-122"/>
                 <a:cs typeface="IBM Plex Mono" pitchFamily="34" charset="-120"/>
               </a:rPr>
-              <a:t>THE PLATFORM</a:t>
-            </a:r>
-            <a:endParaRPr lang="en-US" sz="900" dirty="0"/>
-          </a:p>
-        </p:txBody>
-      </p:sp>
-      <p:sp>
-        <p:nvSpPr>
-          <p:cNvPr id="3" name="Text 1"/>
-          <p:cNvSpPr/>
-          <p:nvPr/>
-        </p:nvSpPr>
-        <p:spPr>
-          <a:xfrm>
-            <a:off x="548640" y="914400"/>
+              <a:t>GAME · MISSION 01</a:t>
+            </a:r>
+            <a:endParaRPr lang="en-US" sz="1000" dirty="0"/>
+          </a:p>
+        </p:txBody>
+      </p:sp>
+      <p:sp>
+        <p:nvSpPr>
+          <p:cNvPr id="5" name="Text 2"/>
+          <p:cNvSpPr/>
+          <p:nvPr/>
+        </p:nvSpPr>
+        <p:spPr>
+          <a:xfrm>
+            <a:off x="548640" y="5669280"/>
             <a:ext cx="10972800" cy="822960"/>
           </a:xfrm>
           <a:prstGeom prst="rect">
@@ -6305,338 +5788,54 @@
               <a:buNone/>
             </a:pPr>
             <a:r>
-              <a:rPr lang="en-US" sz="4400" dirty="0">
+              <a:rPr lang="en-US" sz="4000" b="1" spc="400" kern="0" dirty="0">
                 <a:solidFill>
                   <a:srgbClr val="111418"/>
                 </a:solidFill>
-                <a:latin typeface="Inter" pitchFamily="34" charset="0"/>
-                <a:ea typeface="Inter" pitchFamily="34" charset="-122"/>
-                <a:cs typeface="Inter" pitchFamily="34" charset="-120"/>
-              </a:rPr>
-              <a:t>Two modes.</a:t>
-            </a:r>
-            <a:endParaRPr lang="en-US" sz="4400" dirty="0"/>
-          </a:p>
-        </p:txBody>
-      </p:sp>
-      <p:sp>
-        <p:nvSpPr>
-          <p:cNvPr id="4" name="Shape 2"/>
-          <p:cNvSpPr/>
-          <p:nvPr/>
-        </p:nvSpPr>
-        <p:spPr>
-          <a:xfrm>
-            <a:off x="548640" y="2194560"/>
-            <a:ext cx="5486400" cy="4023360"/>
-          </a:xfrm>
-          <a:prstGeom prst="rect">
-            <a:avLst/>
-          </a:prstGeom>
-          <a:solidFill>
-            <a:srgbClr val="FAFAF8"/>
-          </a:solidFill>
-          <a:ln w="12700">
-            <a:solidFill>
-              <a:srgbClr val="E5E5E2"/>
-            </a:solidFill>
-            <a:prstDash val="solid"/>
-          </a:ln>
-        </p:spPr>
-      </p:sp>
-      <p:sp>
-        <p:nvSpPr>
-          <p:cNvPr id="5" name="Text 3"/>
-          <p:cNvSpPr/>
-          <p:nvPr/>
-        </p:nvSpPr>
-        <p:spPr>
-          <a:xfrm>
-            <a:off x="822960" y="2423160"/>
-            <a:ext cx="4572000" cy="365760"/>
-          </a:xfrm>
-          <a:prstGeom prst="rect">
-            <a:avLst/>
-          </a:prstGeom>
-          <a:noFill/>
-          <a:ln/>
-        </p:spPr>
-        <p:txBody>
-          <a:bodyPr wrap="square" rtlCol="0" anchor="ctr"/>
-          <a:lstStyle/>
-          <a:p>
-            <a:pPr indent="0" marL="0">
-              <a:buNone/>
-            </a:pPr>
-            <a:r>
-              <a:rPr lang="en-US" sz="1100" spc="800" kern="0" dirty="0">
-                <a:solidFill>
-                  <a:srgbClr val="0F766E"/>
+                <a:latin typeface="Trebuchet MS" pitchFamily="34" charset="0"/>
+                <a:ea typeface="Trebuchet MS" pitchFamily="34" charset="-122"/>
+                <a:cs typeface="Trebuchet MS" pitchFamily="34" charset="-120"/>
+              </a:rPr>
+              <a:t>WELCOME TO NUKUS</a:t>
+            </a:r>
+            <a:endParaRPr lang="en-US" sz="4000" dirty="0"/>
+          </a:p>
+        </p:txBody>
+      </p:sp>
+      <p:sp>
+        <p:nvSpPr>
+          <p:cNvPr id="6" name="Text 3"/>
+          <p:cNvSpPr/>
+          <p:nvPr/>
+        </p:nvSpPr>
+        <p:spPr>
+          <a:xfrm>
+            <a:off x="10728655" y="6400800"/>
+            <a:ext cx="1097280" cy="274320"/>
+          </a:xfrm>
+          <a:prstGeom prst="rect">
+            <a:avLst/>
+          </a:prstGeom>
+          <a:noFill/>
+          <a:ln/>
+        </p:spPr>
+        <p:txBody>
+          <a:bodyPr wrap="square" rtlCol="0" anchor="ctr"/>
+          <a:lstStyle/>
+          <a:p>
+            <a:pPr algn="r" indent="0" marL="0">
+              <a:buNone/>
+            </a:pPr>
+            <a:r>
+              <a:rPr lang="en-US" sz="900" dirty="0">
+                <a:solidFill>
+                  <a:srgbClr val="5B6068"/>
                 </a:solidFill>
                 <a:latin typeface="IBM Plex Mono" pitchFamily="34" charset="0"/>
                 <a:ea typeface="IBM Plex Mono" pitchFamily="34" charset="-122"/>
                 <a:cs typeface="IBM Plex Mono" pitchFamily="34" charset="-120"/>
               </a:rPr>
-              <a:t>01 — GAME</a:t>
-            </a:r>
-            <a:endParaRPr lang="en-US" sz="1100" dirty="0"/>
-          </a:p>
-        </p:txBody>
-      </p:sp>
-      <p:sp>
-        <p:nvSpPr>
-          <p:cNvPr id="6" name="Text 4"/>
-          <p:cNvSpPr/>
-          <p:nvPr/>
-        </p:nvSpPr>
-        <p:spPr>
-          <a:xfrm>
-            <a:off x="822960" y="2880360"/>
-            <a:ext cx="4572000" cy="640080"/>
-          </a:xfrm>
-          <a:prstGeom prst="rect">
-            <a:avLst/>
-          </a:prstGeom>
-          <a:noFill/>
-          <a:ln/>
-        </p:spPr>
-        <p:txBody>
-          <a:bodyPr wrap="square" rtlCol="0" anchor="ctr"/>
-          <a:lstStyle/>
-          <a:p>
-            <a:pPr indent="0" marL="0">
-              <a:buNone/>
-            </a:pPr>
-            <a:r>
-              <a:rPr lang="en-US" sz="2800" dirty="0">
-                <a:solidFill>
-                  <a:srgbClr val="111418"/>
-                </a:solidFill>
-                <a:latin typeface="Inter" pitchFamily="34" charset="0"/>
-                <a:ea typeface="Inter" pitchFamily="34" charset="-122"/>
-                <a:cs typeface="Inter" pitchFamily="34" charset="-120"/>
-              </a:rPr>
-              <a:t>Educational levels</a:t>
-            </a:r>
-            <a:endParaRPr lang="en-US" sz="2800" dirty="0"/>
-          </a:p>
-        </p:txBody>
-      </p:sp>
-      <p:sp>
-        <p:nvSpPr>
-          <p:cNvPr id="7" name="Text 5"/>
-          <p:cNvSpPr/>
-          <p:nvPr/>
-        </p:nvSpPr>
-        <p:spPr>
-          <a:xfrm>
-            <a:off x="822960" y="3840480"/>
-            <a:ext cx="4937760" cy="2194560"/>
-          </a:xfrm>
-          <a:prstGeom prst="rect">
-            <a:avLst/>
-          </a:prstGeom>
-          <a:noFill/>
-          <a:ln/>
-        </p:spPr>
-        <p:txBody>
-          <a:bodyPr wrap="square" rtlCol="0" anchor="ctr"/>
-          <a:lstStyle/>
-          <a:p>
-            <a:pPr indent="0" marL="0">
-              <a:buNone/>
-            </a:pPr>
-            <a:r>
-              <a:rPr lang="en-US" sz="1600" dirty="0">
-                <a:solidFill>
-                  <a:srgbClr val="6B7077"/>
-                </a:solidFill>
-                <a:latin typeface="Inter" pitchFamily="34" charset="0"/>
-                <a:ea typeface="Inter" pitchFamily="34" charset="-122"/>
-                <a:cs typeface="Inter" pitchFamily="34" charset="-120"/>
-              </a:rPr>
-              <a:t>Short missions and playable worlds for students, schools and museum visitors.</a:t>
-            </a:r>
-            <a:endParaRPr lang="en-US" sz="1600" dirty="0"/>
-          </a:p>
-        </p:txBody>
-      </p:sp>
-      <p:sp>
-        <p:nvSpPr>
-          <p:cNvPr id="8" name="Shape 6"/>
-          <p:cNvSpPr/>
-          <p:nvPr/>
-        </p:nvSpPr>
-        <p:spPr>
-          <a:xfrm>
-            <a:off x="6309360" y="2194560"/>
-            <a:ext cx="5486400" cy="4023360"/>
-          </a:xfrm>
-          <a:prstGeom prst="rect">
-            <a:avLst/>
-          </a:prstGeom>
-          <a:solidFill>
-            <a:srgbClr val="FAFAF8"/>
-          </a:solidFill>
-          <a:ln w="12700">
-            <a:solidFill>
-              <a:srgbClr val="E5E5E2"/>
-            </a:solidFill>
-            <a:prstDash val="solid"/>
-          </a:ln>
-        </p:spPr>
-      </p:sp>
-      <p:sp>
-        <p:nvSpPr>
-          <p:cNvPr id="9" name="Text 7"/>
-          <p:cNvSpPr/>
-          <p:nvPr/>
-        </p:nvSpPr>
-        <p:spPr>
-          <a:xfrm>
-            <a:off x="6583680" y="2423160"/>
-            <a:ext cx="4572000" cy="365760"/>
-          </a:xfrm>
-          <a:prstGeom prst="rect">
-            <a:avLst/>
-          </a:prstGeom>
-          <a:noFill/>
-          <a:ln/>
-        </p:spPr>
-        <p:txBody>
-          <a:bodyPr wrap="square" rtlCol="0" anchor="ctr"/>
-          <a:lstStyle/>
-          <a:p>
-            <a:pPr indent="0" marL="0">
-              <a:buNone/>
-            </a:pPr>
-            <a:r>
-              <a:rPr lang="en-US" sz="1100" spc="800" kern="0" dirty="0">
-                <a:solidFill>
-                  <a:srgbClr val="0F766E"/>
-                </a:solidFill>
-                <a:latin typeface="IBM Plex Mono" pitchFamily="34" charset="0"/>
-                <a:ea typeface="IBM Plex Mono" pitchFamily="34" charset="-122"/>
-                <a:cs typeface="IBM Plex Mono" pitchFamily="34" charset="-120"/>
-              </a:rPr>
-              <a:t>02 — EXPLORE</a:t>
-            </a:r>
-            <a:endParaRPr lang="en-US" sz="1100" dirty="0"/>
-          </a:p>
-        </p:txBody>
-      </p:sp>
-      <p:sp>
-        <p:nvSpPr>
-          <p:cNvPr id="10" name="Text 8"/>
-          <p:cNvSpPr/>
-          <p:nvPr/>
-        </p:nvSpPr>
-        <p:spPr>
-          <a:xfrm>
-            <a:off x="6583680" y="2880360"/>
-            <a:ext cx="4572000" cy="640080"/>
-          </a:xfrm>
-          <a:prstGeom prst="rect">
-            <a:avLst/>
-          </a:prstGeom>
-          <a:noFill/>
-          <a:ln/>
-        </p:spPr>
-        <p:txBody>
-          <a:bodyPr wrap="square" rtlCol="0" anchor="ctr"/>
-          <a:lstStyle/>
-          <a:p>
-            <a:pPr indent="0" marL="0">
-              <a:buNone/>
-            </a:pPr>
-            <a:r>
-              <a:rPr lang="en-US" sz="2800" dirty="0">
-                <a:solidFill>
-                  <a:srgbClr val="111418"/>
-                </a:solidFill>
-                <a:latin typeface="Inter" pitchFamily="34" charset="0"/>
-                <a:ea typeface="Inter" pitchFamily="34" charset="-122"/>
-                <a:cs typeface="Inter" pitchFamily="34" charset="-120"/>
-              </a:rPr>
-              <a:t>Data exploration</a:t>
-            </a:r>
-            <a:endParaRPr lang="en-US" sz="2800" dirty="0"/>
-          </a:p>
-        </p:txBody>
-      </p:sp>
-      <p:sp>
-        <p:nvSpPr>
-          <p:cNvPr id="11" name="Text 9"/>
-          <p:cNvSpPr/>
-          <p:nvPr/>
-        </p:nvSpPr>
-        <p:spPr>
-          <a:xfrm>
-            <a:off x="6583680" y="3840480"/>
-            <a:ext cx="4937760" cy="2194560"/>
-          </a:xfrm>
-          <a:prstGeom prst="rect">
-            <a:avLst/>
-          </a:prstGeom>
-          <a:noFill/>
-          <a:ln/>
-        </p:spPr>
-        <p:txBody>
-          <a:bodyPr wrap="square" rtlCol="0" anchor="ctr"/>
-          <a:lstStyle/>
-          <a:p>
-            <a:pPr indent="0" marL="0">
-              <a:buNone/>
-            </a:pPr>
-            <a:r>
-              <a:rPr lang="en-US" sz="1600" dirty="0">
-                <a:solidFill>
-                  <a:srgbClr val="6B7077"/>
-                </a:solidFill>
-                <a:latin typeface="Inter" pitchFamily="34" charset="0"/>
-                <a:ea typeface="Inter" pitchFamily="34" charset="-122"/>
-                <a:cs typeface="Inter" pitchFamily="34" charset="-120"/>
-              </a:rPr>
-              <a:t>Real elevation, historical basins, demographics, climate and water timeline. Shareable views.</a:t>
-            </a:r>
-            <a:endParaRPr lang="en-US" sz="1600" dirty="0"/>
-          </a:p>
-        </p:txBody>
-      </p:sp>
-      <p:sp>
-        <p:nvSpPr>
-          <p:cNvPr id="12" name="Text 10"/>
-          <p:cNvSpPr/>
-          <p:nvPr/>
-        </p:nvSpPr>
-        <p:spPr>
-          <a:xfrm>
-            <a:off x="10728655" y="6400800"/>
-            <a:ext cx="1097280" cy="274320"/>
-          </a:xfrm>
-          <a:prstGeom prst="rect">
-            <a:avLst/>
-          </a:prstGeom>
-          <a:noFill/>
-          <a:ln/>
-        </p:spPr>
-        <p:txBody>
-          <a:bodyPr wrap="square" rtlCol="0" anchor="ctr"/>
-          <a:lstStyle/>
-          <a:p>
-            <a:pPr algn="r" indent="0" marL="0">
-              <a:buNone/>
-            </a:pPr>
-            <a:r>
-              <a:rPr lang="en-US" sz="900" spc="400" kern="0" dirty="0">
-                <a:solidFill>
-                  <a:srgbClr val="6B7077"/>
-                </a:solidFill>
-                <a:latin typeface="IBM Plex Mono" pitchFamily="34" charset="0"/>
-                <a:ea typeface="IBM Plex Mono" pitchFamily="34" charset="-122"/>
-                <a:cs typeface="IBM Plex Mono" pitchFamily="34" charset="-120"/>
-              </a:rPr>
-              <a:t>04 / 15</a:t>
+              <a:t>04 / 14</a:t>
             </a:r>
             <a:endParaRPr lang="en-US" sz="900" dirty="0"/>
           </a:p>
@@ -6644,7 +5843,7 @@
       </p:sp>
       <p:sp>
         <p:nvSpPr>
-          <p:cNvPr id="13" name="Text 11"/>
+          <p:cNvPr id="7" name="Text 4"/>
           <p:cNvSpPr/>
           <p:nvPr/>
         </p:nvSpPr>
@@ -6669,7 +5868,7 @@
             <a:r>
               <a:rPr lang="en-US" sz="900" spc="600" kern="0" dirty="0">
                 <a:solidFill>
-                  <a:srgbClr val="6B7077"/>
+                  <a:srgbClr val="5B6068"/>
                 </a:solidFill>
                 <a:latin typeface="IBM Plex Mono" pitchFamily="34" charset="0"/>
                 <a:ea typeface="IBM Plex Mono" pitchFamily="34" charset="-122"/>
@@ -6695,7 +5894,7 @@
     <p:bg>
       <p:bgPr>
         <a:solidFill>
-          <a:srgbClr val="000000"/>
+          <a:srgbClr val="FFFFFF"/>
         </a:solidFill>
       </p:bgPr>
     </p:bg>
@@ -6715,7 +5914,7 @@
       </p:grpSpPr>
       <p:pic>
         <p:nvPicPr>
-          <p:cNvPr id="2" name="Image 0" descr="docs/screenshots/01-landing.png">    </p:cNvPr>
+          <p:cNvPr id="2" name="Image 0" descr="docs/screenshots/03-voxel-survive.png">    </p:cNvPr>
           <p:cNvPicPr>
             <a:picLocks noChangeAspect="1"/>
           </p:cNvPicPr>
@@ -6729,7 +5928,7 @@
         <p:spPr>
           <a:xfrm>
             <a:off x="0" y="0"/>
-            <a:ext cx="12191695" cy="6858000"/>
+            <a:ext cx="12191695" cy="5029200"/>
           </a:xfrm>
           <a:prstGeom prst="rect">
             <a:avLst/>
@@ -6781,15 +5980,15 @@
               <a:buNone/>
             </a:pPr>
             <a:r>
-              <a:rPr lang="en-US" sz="1000" spc="800" kern="0" dirty="0">
-                <a:solidFill>
-                  <a:srgbClr val="0F766E"/>
+              <a:rPr lang="en-US" sz="1000" b="1" spc="800" kern="0" dirty="0">
+                <a:solidFill>
+                  <a:srgbClr val="10B981"/>
                 </a:solidFill>
                 <a:latin typeface="IBM Plex Mono" pitchFamily="34" charset="0"/>
                 <a:ea typeface="IBM Plex Mono" pitchFamily="34" charset="-122"/>
                 <a:cs typeface="IBM Plex Mono" pitchFamily="34" charset="-120"/>
               </a:rPr>
-              <a:t>LANDING</a:t>
+              <a:t>GAME · VOXEL</a:t>
             </a:r>
             <a:endParaRPr lang="en-US" sz="1000" dirty="0"/>
           </a:p>
@@ -6820,17 +6019,17 @@
               <a:buNone/>
             </a:pPr>
             <a:r>
-              <a:rPr lang="en-US" sz="3200" dirty="0">
+              <a:rPr lang="en-US" sz="4000" b="1" spc="400" kern="0" dirty="0">
                 <a:solidFill>
                   <a:srgbClr val="111418"/>
                 </a:solidFill>
-                <a:latin typeface="Inter" pitchFamily="34" charset="0"/>
-                <a:ea typeface="Inter" pitchFamily="34" charset="-122"/>
-                <a:cs typeface="Inter" pitchFamily="34" charset="-120"/>
-              </a:rPr>
-              <a:t>Entry point.</a:t>
-            </a:r>
-            <a:endParaRPr lang="en-US" sz="3200" dirty="0"/>
+                <a:latin typeface="Trebuchet MS" pitchFamily="34" charset="0"/>
+                <a:ea typeface="Trebuchet MS" pitchFamily="34" charset="-122"/>
+                <a:cs typeface="Trebuchet MS" pitchFamily="34" charset="-120"/>
+              </a:rPr>
+              <a:t>BUILD AND SURVIVE</a:t>
+            </a:r>
+            <a:endParaRPr lang="en-US" sz="4000" dirty="0"/>
           </a:p>
         </p:txBody>
       </p:sp>
@@ -6859,15 +6058,15 @@
               <a:buNone/>
             </a:pPr>
             <a:r>
-              <a:rPr lang="en-US" sz="900" spc="400" kern="0" dirty="0">
-                <a:solidFill>
-                  <a:srgbClr val="6B7077"/>
+              <a:rPr lang="en-US" sz="900" dirty="0">
+                <a:solidFill>
+                  <a:srgbClr val="5B6068"/>
                 </a:solidFill>
                 <a:latin typeface="IBM Plex Mono" pitchFamily="34" charset="0"/>
                 <a:ea typeface="IBM Plex Mono" pitchFamily="34" charset="-122"/>
                 <a:cs typeface="IBM Plex Mono" pitchFamily="34" charset="-120"/>
               </a:rPr>
-              <a:t>05 / 15</a:t>
+              <a:t>05 / 14</a:t>
             </a:r>
             <a:endParaRPr lang="en-US" sz="900" dirty="0"/>
           </a:p>
@@ -6900,7 +6099,7 @@
             <a:r>
               <a:rPr lang="en-US" sz="900" spc="600" kern="0" dirty="0">
                 <a:solidFill>
-                  <a:srgbClr val="6B7077"/>
+                  <a:srgbClr val="5B6068"/>
                 </a:solidFill>
                 <a:latin typeface="IBM Plex Mono" pitchFamily="34" charset="0"/>
                 <a:ea typeface="IBM Plex Mono" pitchFamily="34" charset="-122"/>
@@ -6926,7 +6125,7 @@
     <p:bg>
       <p:bgPr>
         <a:solidFill>
-          <a:srgbClr val="000000"/>
+          <a:srgbClr val="FFFFFF"/>
         </a:solidFill>
       </p:bgPr>
     </p:bg>
@@ -6960,7 +6159,7 @@
         <p:spPr>
           <a:xfrm>
             <a:off x="0" y="0"/>
-            <a:ext cx="12191695" cy="6858000"/>
+            <a:ext cx="12191695" cy="5029200"/>
           </a:xfrm>
           <a:prstGeom prst="rect">
             <a:avLst/>
@@ -7012,15 +6211,15 @@
               <a:buNone/>
             </a:pPr>
             <a:r>
-              <a:rPr lang="en-US" sz="1000" spc="800" kern="0" dirty="0">
-                <a:solidFill>
-                  <a:srgbClr val="0F766E"/>
+              <a:rPr lang="en-US" sz="1000" b="1" spc="800" kern="0" dirty="0">
+                <a:solidFill>
+                  <a:srgbClr val="EC4899"/>
                 </a:solidFill>
                 <a:latin typeface="IBM Plex Mono" pitchFamily="34" charset="0"/>
                 <a:ea typeface="IBM Plex Mono" pitchFamily="34" charset="-122"/>
                 <a:cs typeface="IBM Plex Mono" pitchFamily="34" charset="-120"/>
               </a:rPr>
-              <a:t>EXPLORE MODE</a:t>
+              <a:t>EXPLORE</a:t>
             </a:r>
             <a:endParaRPr lang="en-US" sz="1000" dirty="0"/>
           </a:p>
@@ -7051,17 +6250,17 @@
               <a:buNone/>
             </a:pPr>
             <a:r>
-              <a:rPr lang="en-US" sz="3200" dirty="0">
+              <a:rPr lang="en-US" sz="4000" b="1" spc="400" kern="0" dirty="0">
                 <a:solidFill>
                   <a:srgbClr val="111418"/>
                 </a:solidFill>
-                <a:latin typeface="Inter" pitchFamily="34" charset="0"/>
-                <a:ea typeface="Inter" pitchFamily="34" charset="-122"/>
-                <a:cs typeface="Inter" pitchFamily="34" charset="-120"/>
-              </a:rPr>
-              <a:t>Data exploration view.</a:t>
-            </a:r>
-            <a:endParaRPr lang="en-US" sz="3200" dirty="0"/>
+                <a:latin typeface="Trebuchet MS" pitchFamily="34" charset="0"/>
+                <a:ea typeface="Trebuchet MS" pitchFamily="34" charset="-122"/>
+                <a:cs typeface="Trebuchet MS" pitchFamily="34" charset="-120"/>
+              </a:rPr>
+              <a:t>REAL DATA, REAL TERRAIN</a:t>
+            </a:r>
+            <a:endParaRPr lang="en-US" sz="4000" dirty="0"/>
           </a:p>
         </p:txBody>
       </p:sp>
@@ -7090,15 +6289,15 @@
               <a:buNone/>
             </a:pPr>
             <a:r>
-              <a:rPr lang="en-US" sz="900" spc="400" kern="0" dirty="0">
-                <a:solidFill>
-                  <a:srgbClr val="6B7077"/>
+              <a:rPr lang="en-US" sz="900" dirty="0">
+                <a:solidFill>
+                  <a:srgbClr val="5B6068"/>
                 </a:solidFill>
                 <a:latin typeface="IBM Plex Mono" pitchFamily="34" charset="0"/>
                 <a:ea typeface="IBM Plex Mono" pitchFamily="34" charset="-122"/>
                 <a:cs typeface="IBM Plex Mono" pitchFamily="34" charset="-120"/>
               </a:rPr>
-              <a:t>06 / 15</a:t>
+              <a:t>06 / 14</a:t>
             </a:r>
             <a:endParaRPr lang="en-US" sz="900" dirty="0"/>
           </a:p>
@@ -7131,7 +6330,7 @@
             <a:r>
               <a:rPr lang="en-US" sz="900" spc="600" kern="0" dirty="0">
                 <a:solidFill>
-                  <a:srgbClr val="6B7077"/>
+                  <a:srgbClr val="5B6068"/>
                 </a:solidFill>
                 <a:latin typeface="IBM Plex Mono" pitchFamily="34" charset="0"/>
                 <a:ea typeface="IBM Plex Mono" pitchFamily="34" charset="-122"/>
@@ -7157,7 +6356,7 @@
     <p:bg>
       <p:bgPr>
         <a:solidFill>
-          <a:srgbClr val="000000"/>
+          <a:srgbClr val="FFFFFF"/>
         </a:solidFill>
       </p:bgPr>
     </p:bg>
@@ -7175,161 +6374,623 @@
           <a:chExt cx="0" cy="0"/>
         </a:xfrm>
       </p:grpSpPr>
-      <p:pic>
-        <p:nvPicPr>
-          <p:cNvPr id="2" name="Image 0" descr="docs/screenshots/03-voxel-survive.png">    </p:cNvPr>
-          <p:cNvPicPr>
-            <a:picLocks noChangeAspect="1"/>
-          </p:cNvPicPr>
-          <p:nvPr/>
-        </p:nvPicPr>
-        <p:blipFill>
-          <a:blip r:embed="rId1"/>
-          <a:srcRect l="0" r="0" t="0" b="0"/>
-          <a:stretch/>
-        </p:blipFill>
-        <p:spPr>
-          <a:xfrm>
-            <a:off x="0" y="0"/>
-            <a:ext cx="12191695" cy="6858000"/>
-          </a:xfrm>
-          <a:prstGeom prst="rect">
-            <a:avLst/>
-          </a:prstGeom>
-        </p:spPr>
-      </p:pic>
-      <p:sp>
-        <p:nvSpPr>
-          <p:cNvPr id="3" name="Shape 0"/>
-          <p:cNvSpPr/>
-          <p:nvPr/>
-        </p:nvSpPr>
-        <p:spPr>
-          <a:xfrm>
-            <a:off x="0" y="5029200"/>
-            <a:ext cx="12191695" cy="1828800"/>
-          </a:xfrm>
-          <a:prstGeom prst="rect">
-            <a:avLst/>
-          </a:prstGeom>
-          <a:solidFill>
-            <a:srgbClr val="FFFFFF"/>
-          </a:solidFill>
-          <a:ln/>
-        </p:spPr>
-      </p:sp>
-      <p:sp>
-        <p:nvSpPr>
-          <p:cNvPr id="4" name="Text 1"/>
-          <p:cNvSpPr/>
-          <p:nvPr/>
-        </p:nvSpPr>
-        <p:spPr>
-          <a:xfrm>
-            <a:off x="548640" y="5303520"/>
-            <a:ext cx="7315200" cy="274320"/>
-          </a:xfrm>
-          <a:prstGeom prst="rect">
-            <a:avLst/>
-          </a:prstGeom>
-          <a:noFill/>
-          <a:ln/>
-        </p:spPr>
-        <p:txBody>
-          <a:bodyPr wrap="square" rtlCol="0" anchor="ctr"/>
-          <a:lstStyle/>
-          <a:p>
-            <a:pPr indent="0" marL="0">
-              <a:buNone/>
-            </a:pPr>
-            <a:r>
-              <a:rPr lang="en-US" sz="1000" spc="800" kern="0" dirty="0">
-                <a:solidFill>
-                  <a:srgbClr val="0F766E"/>
+      <p:sp>
+        <p:nvSpPr>
+          <p:cNvPr id="2" name="Text 0"/>
+          <p:cNvSpPr/>
+          <p:nvPr/>
+        </p:nvSpPr>
+        <p:spPr>
+          <a:xfrm>
+            <a:off x="548640" y="457200"/>
+            <a:ext cx="9144000" cy="274320"/>
+          </a:xfrm>
+          <a:prstGeom prst="rect">
+            <a:avLst/>
+          </a:prstGeom>
+          <a:noFill/>
+          <a:ln/>
+        </p:spPr>
+        <p:txBody>
+          <a:bodyPr wrap="square" rtlCol="0" anchor="ctr"/>
+          <a:lstStyle/>
+          <a:p>
+            <a:pPr indent="0" marL="0">
+              <a:buNone/>
+            </a:pPr>
+            <a:r>
+              <a:rPr lang="en-US" sz="900" b="1" spc="800" kern="0" dirty="0">
+                <a:solidFill>
+                  <a:srgbClr val="3B82F6"/>
                 </a:solidFill>
                 <a:latin typeface="IBM Plex Mono" pitchFamily="34" charset="0"/>
                 <a:ea typeface="IBM Plex Mono" pitchFamily="34" charset="-122"/>
                 <a:cs typeface="IBM Plex Mono" pitchFamily="34" charset="-120"/>
               </a:rPr>
-              <a:t>GAME MODE — VOXEL</a:t>
-            </a:r>
-            <a:endParaRPr lang="en-US" sz="1000" dirty="0"/>
-          </a:p>
-        </p:txBody>
-      </p:sp>
-      <p:sp>
-        <p:nvSpPr>
-          <p:cNvPr id="5" name="Text 2"/>
-          <p:cNvSpPr/>
-          <p:nvPr/>
-        </p:nvSpPr>
-        <p:spPr>
-          <a:xfrm>
-            <a:off x="548640" y="5669280"/>
-            <a:ext cx="10972800" cy="822960"/>
-          </a:xfrm>
-          <a:prstGeom prst="rect">
-            <a:avLst/>
-          </a:prstGeom>
-          <a:noFill/>
-          <a:ln/>
-        </p:spPr>
-        <p:txBody>
-          <a:bodyPr wrap="square" rtlCol="0" anchor="ctr"/>
-          <a:lstStyle/>
-          <a:p>
-            <a:pPr indent="0" marL="0">
-              <a:buNone/>
-            </a:pPr>
-            <a:r>
-              <a:rPr lang="en-US" sz="3200" dirty="0">
+              <a:t>WHO IT IS FOR</a:t>
+            </a:r>
+            <a:endParaRPr lang="en-US" sz="900" dirty="0"/>
+          </a:p>
+        </p:txBody>
+      </p:sp>
+      <p:sp>
+        <p:nvSpPr>
+          <p:cNvPr id="3" name="Text 1"/>
+          <p:cNvSpPr/>
+          <p:nvPr/>
+        </p:nvSpPr>
+        <p:spPr>
+          <a:xfrm>
+            <a:off x="548640" y="914400"/>
+            <a:ext cx="10972800" cy="914400"/>
+          </a:xfrm>
+          <a:prstGeom prst="rect">
+            <a:avLst/>
+          </a:prstGeom>
+          <a:noFill/>
+          <a:ln/>
+        </p:spPr>
+        <p:txBody>
+          <a:bodyPr wrap="square" rtlCol="0" anchor="ctr"/>
+          <a:lstStyle/>
+          <a:p>
+            <a:pPr indent="0" marL="0">
+              <a:buNone/>
+            </a:pPr>
+            <a:r>
+              <a:rPr lang="en-US" sz="5400" b="1" spc="400" kern="0" dirty="0">
                 <a:solidFill>
                   <a:srgbClr val="111418"/>
                 </a:solidFill>
-                <a:latin typeface="Inter" pitchFamily="34" charset="0"/>
-                <a:ea typeface="Inter" pitchFamily="34" charset="-122"/>
-                <a:cs typeface="Inter" pitchFamily="34" charset="-120"/>
-              </a:rPr>
-              <a:t>A playable level.</a:t>
-            </a:r>
-            <a:endParaRPr lang="en-US" sz="3200" dirty="0"/>
-          </a:p>
-        </p:txBody>
-      </p:sp>
-      <p:sp>
-        <p:nvSpPr>
-          <p:cNvPr id="6" name="Text 3"/>
-          <p:cNvSpPr/>
-          <p:nvPr/>
-        </p:nvSpPr>
-        <p:spPr>
-          <a:xfrm>
-            <a:off x="10728655" y="6400800"/>
-            <a:ext cx="1097280" cy="274320"/>
-          </a:xfrm>
-          <a:prstGeom prst="rect">
-            <a:avLst/>
-          </a:prstGeom>
-          <a:noFill/>
-          <a:ln/>
-        </p:spPr>
-        <p:txBody>
-          <a:bodyPr wrap="square" rtlCol="0" anchor="ctr"/>
-          <a:lstStyle/>
-          <a:p>
-            <a:pPr algn="r" indent="0" marL="0">
-              <a:buNone/>
-            </a:pPr>
-            <a:r>
-              <a:rPr lang="en-US" sz="900" spc="400" kern="0" dirty="0">
-                <a:solidFill>
-                  <a:srgbClr val="6B7077"/>
+                <a:latin typeface="Trebuchet MS" pitchFamily="34" charset="0"/>
+                <a:ea typeface="Trebuchet MS" pitchFamily="34" charset="-122"/>
+                <a:cs typeface="Trebuchet MS" pitchFamily="34" charset="-120"/>
+              </a:rPr>
+              <a:t>AUDIENCES.</a:t>
+            </a:r>
+            <a:endParaRPr lang="en-US" sz="5400" dirty="0"/>
+          </a:p>
+        </p:txBody>
+      </p:sp>
+      <p:sp>
+        <p:nvSpPr>
+          <p:cNvPr id="4" name="Text 2"/>
+          <p:cNvSpPr/>
+          <p:nvPr/>
+        </p:nvSpPr>
+        <p:spPr>
+          <a:xfrm>
+            <a:off x="548640" y="2377440"/>
+            <a:ext cx="2926080" cy="365760"/>
+          </a:xfrm>
+          <a:prstGeom prst="rect">
+            <a:avLst/>
+          </a:prstGeom>
+          <a:noFill/>
+          <a:ln/>
+        </p:spPr>
+        <p:txBody>
+          <a:bodyPr wrap="square" rtlCol="0" anchor="ctr"/>
+          <a:lstStyle/>
+          <a:p>
+            <a:pPr indent="0" marL="0">
+              <a:buNone/>
+            </a:pPr>
+            <a:r>
+              <a:rPr lang="en-US" sz="1100" b="1" spc="600" kern="0" dirty="0">
+                <a:solidFill>
+                  <a:srgbClr val="3B82F6"/>
                 </a:solidFill>
                 <a:latin typeface="IBM Plex Mono" pitchFamily="34" charset="0"/>
                 <a:ea typeface="IBM Plex Mono" pitchFamily="34" charset="-122"/>
                 <a:cs typeface="IBM Plex Mono" pitchFamily="34" charset="-120"/>
               </a:rPr>
-              <a:t>07 / 15</a:t>
+              <a:t>SCHOOLS</a:t>
+            </a:r>
+            <a:endParaRPr lang="en-US" sz="1100" dirty="0"/>
+          </a:p>
+        </p:txBody>
+      </p:sp>
+      <p:sp>
+        <p:nvSpPr>
+          <p:cNvPr id="5" name="Text 3"/>
+          <p:cNvSpPr/>
+          <p:nvPr/>
+        </p:nvSpPr>
+        <p:spPr>
+          <a:xfrm>
+            <a:off x="3474720" y="2377440"/>
+            <a:ext cx="8229600" cy="365760"/>
+          </a:xfrm>
+          <a:prstGeom prst="rect">
+            <a:avLst/>
+          </a:prstGeom>
+          <a:noFill/>
+          <a:ln/>
+        </p:spPr>
+        <p:txBody>
+          <a:bodyPr wrap="square" rtlCol="0" anchor="ctr"/>
+          <a:lstStyle/>
+          <a:p>
+            <a:pPr indent="0" marL="0">
+              <a:buNone/>
+            </a:pPr>
+            <a:r>
+              <a:rPr lang="en-US" sz="1700" dirty="0">
+                <a:solidFill>
+                  <a:srgbClr val="111418"/>
+                </a:solidFill>
+                <a:latin typeface="Trebuchet MS" pitchFamily="34" charset="0"/>
+                <a:ea typeface="Trebuchet MS" pitchFamily="34" charset="-122"/>
+                <a:cs typeface="Trebuchet MS" pitchFamily="34" charset="-120"/>
+              </a:rPr>
+              <a:t>Curriculum-ready missions and classroom workshops.</a:t>
+            </a:r>
+            <a:endParaRPr lang="en-US" sz="1700" dirty="0"/>
+          </a:p>
+        </p:txBody>
+      </p:sp>
+      <p:sp>
+        <p:nvSpPr>
+          <p:cNvPr id="6" name="Shape 4"/>
+          <p:cNvSpPr/>
+          <p:nvPr/>
+        </p:nvSpPr>
+        <p:spPr>
+          <a:xfrm>
+            <a:off x="548640" y="2880360"/>
+            <a:ext cx="11094415" cy="0"/>
+          </a:xfrm>
+          <a:prstGeom prst="line">
+            <a:avLst/>
+          </a:prstGeom>
+          <a:noFill/>
+          <a:ln w="9525">
+            <a:solidFill>
+              <a:srgbClr val="E5E5E2"/>
+            </a:solidFill>
+            <a:prstDash val="solid"/>
+          </a:ln>
+        </p:spPr>
+      </p:sp>
+      <p:sp>
+        <p:nvSpPr>
+          <p:cNvPr id="7" name="Text 5"/>
+          <p:cNvSpPr/>
+          <p:nvPr/>
+        </p:nvSpPr>
+        <p:spPr>
+          <a:xfrm>
+            <a:off x="548640" y="3090672"/>
+            <a:ext cx="2926080" cy="365760"/>
+          </a:xfrm>
+          <a:prstGeom prst="rect">
+            <a:avLst/>
+          </a:prstGeom>
+          <a:noFill/>
+          <a:ln/>
+        </p:spPr>
+        <p:txBody>
+          <a:bodyPr wrap="square" rtlCol="0" anchor="ctr"/>
+          <a:lstStyle/>
+          <a:p>
+            <a:pPr indent="0" marL="0">
+              <a:buNone/>
+            </a:pPr>
+            <a:r>
+              <a:rPr lang="en-US" sz="1100" b="1" spc="600" kern="0" dirty="0">
+                <a:solidFill>
+                  <a:srgbClr val="EC4899"/>
+                </a:solidFill>
+                <a:latin typeface="IBM Plex Mono" pitchFamily="34" charset="0"/>
+                <a:ea typeface="IBM Plex Mono" pitchFamily="34" charset="-122"/>
+                <a:cs typeface="IBM Plex Mono" pitchFamily="34" charset="-120"/>
+              </a:rPr>
+              <a:t>MUSEUMS</a:t>
+            </a:r>
+            <a:endParaRPr lang="en-US" sz="1100" dirty="0"/>
+          </a:p>
+        </p:txBody>
+      </p:sp>
+      <p:sp>
+        <p:nvSpPr>
+          <p:cNvPr id="8" name="Text 6"/>
+          <p:cNvSpPr/>
+          <p:nvPr/>
+        </p:nvSpPr>
+        <p:spPr>
+          <a:xfrm>
+            <a:off x="3474720" y="3090672"/>
+            <a:ext cx="8229600" cy="365760"/>
+          </a:xfrm>
+          <a:prstGeom prst="rect">
+            <a:avLst/>
+          </a:prstGeom>
+          <a:noFill/>
+          <a:ln/>
+        </p:spPr>
+        <p:txBody>
+          <a:bodyPr wrap="square" rtlCol="0" anchor="ctr"/>
+          <a:lstStyle/>
+          <a:p>
+            <a:pPr indent="0" marL="0">
+              <a:buNone/>
+            </a:pPr>
+            <a:r>
+              <a:rPr lang="en-US" sz="1700" dirty="0">
+                <a:solidFill>
+                  <a:srgbClr val="111418"/>
+                </a:solidFill>
+                <a:latin typeface="Trebuchet MS" pitchFamily="34" charset="0"/>
+                <a:ea typeface="Trebuchet MS" pitchFamily="34" charset="-122"/>
+                <a:cs typeface="Trebuchet MS" pitchFamily="34" charset="-120"/>
+              </a:rPr>
+              <a:t>Touchscreens, projections and controller installations.</a:t>
+            </a:r>
+            <a:endParaRPr lang="en-US" sz="1700" dirty="0"/>
+          </a:p>
+        </p:txBody>
+      </p:sp>
+      <p:sp>
+        <p:nvSpPr>
+          <p:cNvPr id="9" name="Shape 7"/>
+          <p:cNvSpPr/>
+          <p:nvPr/>
+        </p:nvSpPr>
+        <p:spPr>
+          <a:xfrm>
+            <a:off x="548640" y="3593592"/>
+            <a:ext cx="11094415" cy="0"/>
+          </a:xfrm>
+          <a:prstGeom prst="line">
+            <a:avLst/>
+          </a:prstGeom>
+          <a:noFill/>
+          <a:ln w="9525">
+            <a:solidFill>
+              <a:srgbClr val="E5E5E2"/>
+            </a:solidFill>
+            <a:prstDash val="solid"/>
+          </a:ln>
+        </p:spPr>
+      </p:sp>
+      <p:sp>
+        <p:nvSpPr>
+          <p:cNvPr id="10" name="Text 8"/>
+          <p:cNvSpPr/>
+          <p:nvPr/>
+        </p:nvSpPr>
+        <p:spPr>
+          <a:xfrm>
+            <a:off x="548640" y="3803904"/>
+            <a:ext cx="2926080" cy="365760"/>
+          </a:xfrm>
+          <a:prstGeom prst="rect">
+            <a:avLst/>
+          </a:prstGeom>
+          <a:noFill/>
+          <a:ln/>
+        </p:spPr>
+        <p:txBody>
+          <a:bodyPr wrap="square" rtlCol="0" anchor="ctr"/>
+          <a:lstStyle/>
+          <a:p>
+            <a:pPr indent="0" marL="0">
+              <a:buNone/>
+            </a:pPr>
+            <a:r>
+              <a:rPr lang="en-US" sz="1100" b="1" spc="600" kern="0" dirty="0">
+                <a:solidFill>
+                  <a:srgbClr val="10B981"/>
+                </a:solidFill>
+                <a:latin typeface="IBM Plex Mono" pitchFamily="34" charset="0"/>
+                <a:ea typeface="IBM Plex Mono" pitchFamily="34" charset="-122"/>
+                <a:cs typeface="IBM Plex Mono" pitchFamily="34" charset="-120"/>
+              </a:rPr>
+              <a:t>RESEARCHERS</a:t>
+            </a:r>
+            <a:endParaRPr lang="en-US" sz="1100" dirty="0"/>
+          </a:p>
+        </p:txBody>
+      </p:sp>
+      <p:sp>
+        <p:nvSpPr>
+          <p:cNvPr id="11" name="Text 9"/>
+          <p:cNvSpPr/>
+          <p:nvPr/>
+        </p:nvSpPr>
+        <p:spPr>
+          <a:xfrm>
+            <a:off x="3474720" y="3803904"/>
+            <a:ext cx="8229600" cy="365760"/>
+          </a:xfrm>
+          <a:prstGeom prst="rect">
+            <a:avLst/>
+          </a:prstGeom>
+          <a:noFill/>
+          <a:ln/>
+        </p:spPr>
+        <p:txBody>
+          <a:bodyPr wrap="square" rtlCol="0" anchor="ctr"/>
+          <a:lstStyle/>
+          <a:p>
+            <a:pPr indent="0" marL="0">
+              <a:buNone/>
+            </a:pPr>
+            <a:r>
+              <a:rPr lang="en-US" sz="1700" dirty="0">
+                <a:solidFill>
+                  <a:srgbClr val="111418"/>
+                </a:solidFill>
+                <a:latin typeface="Trebuchet MS" pitchFamily="34" charset="0"/>
+                <a:ea typeface="Trebuchet MS" pitchFamily="34" charset="-122"/>
+                <a:cs typeface="Trebuchet MS" pitchFamily="34" charset="-120"/>
+              </a:rPr>
+              <a:t>Real elevation and historical layers with shareable views.</a:t>
+            </a:r>
+            <a:endParaRPr lang="en-US" sz="1700" dirty="0"/>
+          </a:p>
+        </p:txBody>
+      </p:sp>
+      <p:sp>
+        <p:nvSpPr>
+          <p:cNvPr id="12" name="Shape 10"/>
+          <p:cNvSpPr/>
+          <p:nvPr/>
+        </p:nvSpPr>
+        <p:spPr>
+          <a:xfrm>
+            <a:off x="548640" y="4306824"/>
+            <a:ext cx="11094415" cy="0"/>
+          </a:xfrm>
+          <a:prstGeom prst="line">
+            <a:avLst/>
+          </a:prstGeom>
+          <a:noFill/>
+          <a:ln w="9525">
+            <a:solidFill>
+              <a:srgbClr val="E5E5E2"/>
+            </a:solidFill>
+            <a:prstDash val="solid"/>
+          </a:ln>
+        </p:spPr>
+      </p:sp>
+      <p:sp>
+        <p:nvSpPr>
+          <p:cNvPr id="13" name="Text 11"/>
+          <p:cNvSpPr/>
+          <p:nvPr/>
+        </p:nvSpPr>
+        <p:spPr>
+          <a:xfrm>
+            <a:off x="548640" y="4517136"/>
+            <a:ext cx="2926080" cy="365760"/>
+          </a:xfrm>
+          <a:prstGeom prst="rect">
+            <a:avLst/>
+          </a:prstGeom>
+          <a:noFill/>
+          <a:ln/>
+        </p:spPr>
+        <p:txBody>
+          <a:bodyPr wrap="square" rtlCol="0" anchor="ctr"/>
+          <a:lstStyle/>
+          <a:p>
+            <a:pPr indent="0" marL="0">
+              <a:buNone/>
+            </a:pPr>
+            <a:r>
+              <a:rPr lang="en-US" sz="1100" b="1" spc="600" kern="0" dirty="0">
+                <a:solidFill>
+                  <a:srgbClr val="F59E0B"/>
+                </a:solidFill>
+                <a:latin typeface="IBM Plex Mono" pitchFamily="34" charset="0"/>
+                <a:ea typeface="IBM Plex Mono" pitchFamily="34" charset="-122"/>
+                <a:cs typeface="IBM Plex Mono" pitchFamily="34" charset="-120"/>
+              </a:rPr>
+              <a:t>MINISTRIES</a:t>
+            </a:r>
+            <a:endParaRPr lang="en-US" sz="1100" dirty="0"/>
+          </a:p>
+        </p:txBody>
+      </p:sp>
+      <p:sp>
+        <p:nvSpPr>
+          <p:cNvPr id="14" name="Text 12"/>
+          <p:cNvSpPr/>
+          <p:nvPr/>
+        </p:nvSpPr>
+        <p:spPr>
+          <a:xfrm>
+            <a:off x="3474720" y="4517136"/>
+            <a:ext cx="8229600" cy="365760"/>
+          </a:xfrm>
+          <a:prstGeom prst="rect">
+            <a:avLst/>
+          </a:prstGeom>
+          <a:noFill/>
+          <a:ln/>
+        </p:spPr>
+        <p:txBody>
+          <a:bodyPr wrap="square" rtlCol="0" anchor="ctr"/>
+          <a:lstStyle/>
+          <a:p>
+            <a:pPr indent="0" marL="0">
+              <a:buNone/>
+            </a:pPr>
+            <a:r>
+              <a:rPr lang="en-US" sz="1700" dirty="0">
+                <a:solidFill>
+                  <a:srgbClr val="111418"/>
+                </a:solidFill>
+                <a:latin typeface="Trebuchet MS" pitchFamily="34" charset="0"/>
+                <a:ea typeface="Trebuchet MS" pitchFamily="34" charset="-122"/>
+                <a:cs typeface="Trebuchet MS" pitchFamily="34" charset="-120"/>
+              </a:rPr>
+              <a:t>Scenario tools for water, agriculture and ecology.</a:t>
+            </a:r>
+            <a:endParaRPr lang="en-US" sz="1700" dirty="0"/>
+          </a:p>
+        </p:txBody>
+      </p:sp>
+      <p:sp>
+        <p:nvSpPr>
+          <p:cNvPr id="15" name="Shape 13"/>
+          <p:cNvSpPr/>
+          <p:nvPr/>
+        </p:nvSpPr>
+        <p:spPr>
+          <a:xfrm>
+            <a:off x="548640" y="5020056"/>
+            <a:ext cx="11094415" cy="0"/>
+          </a:xfrm>
+          <a:prstGeom prst="line">
+            <a:avLst/>
+          </a:prstGeom>
+          <a:noFill/>
+          <a:ln w="9525">
+            <a:solidFill>
+              <a:srgbClr val="E5E5E2"/>
+            </a:solidFill>
+            <a:prstDash val="solid"/>
+          </a:ln>
+        </p:spPr>
+      </p:sp>
+      <p:sp>
+        <p:nvSpPr>
+          <p:cNvPr id="16" name="Text 14"/>
+          <p:cNvSpPr/>
+          <p:nvPr/>
+        </p:nvSpPr>
+        <p:spPr>
+          <a:xfrm>
+            <a:off x="548640" y="5230368"/>
+            <a:ext cx="2926080" cy="365760"/>
+          </a:xfrm>
+          <a:prstGeom prst="rect">
+            <a:avLst/>
+          </a:prstGeom>
+          <a:noFill/>
+          <a:ln/>
+        </p:spPr>
+        <p:txBody>
+          <a:bodyPr wrap="square" rtlCol="0" anchor="ctr"/>
+          <a:lstStyle/>
+          <a:p>
+            <a:pPr indent="0" marL="0">
+              <a:buNone/>
+            </a:pPr>
+            <a:r>
+              <a:rPr lang="en-US" sz="1100" b="1" spc="600" kern="0" dirty="0">
+                <a:solidFill>
+                  <a:srgbClr val="3B82F6"/>
+                </a:solidFill>
+                <a:latin typeface="IBM Plex Mono" pitchFamily="34" charset="0"/>
+                <a:ea typeface="IBM Plex Mono" pitchFamily="34" charset="-122"/>
+                <a:cs typeface="IBM Plex Mono" pitchFamily="34" charset="-120"/>
+              </a:rPr>
+              <a:t>PUBLIC</a:t>
+            </a:r>
+            <a:endParaRPr lang="en-US" sz="1100" dirty="0"/>
+          </a:p>
+        </p:txBody>
+      </p:sp>
+      <p:sp>
+        <p:nvSpPr>
+          <p:cNvPr id="17" name="Text 15"/>
+          <p:cNvSpPr/>
+          <p:nvPr/>
+        </p:nvSpPr>
+        <p:spPr>
+          <a:xfrm>
+            <a:off x="3474720" y="5230368"/>
+            <a:ext cx="8229600" cy="365760"/>
+          </a:xfrm>
+          <a:prstGeom prst="rect">
+            <a:avLst/>
+          </a:prstGeom>
+          <a:noFill/>
+          <a:ln/>
+        </p:spPr>
+        <p:txBody>
+          <a:bodyPr wrap="square" rtlCol="0" anchor="ctr"/>
+          <a:lstStyle/>
+          <a:p>
+            <a:pPr indent="0" marL="0">
+              <a:buNone/>
+            </a:pPr>
+            <a:r>
+              <a:rPr lang="en-US" sz="1700" dirty="0">
+                <a:solidFill>
+                  <a:srgbClr val="111418"/>
+                </a:solidFill>
+                <a:latin typeface="Trebuchet MS" pitchFamily="34" charset="0"/>
+                <a:ea typeface="Trebuchet MS" pitchFamily="34" charset="-122"/>
+                <a:cs typeface="Trebuchet MS" pitchFamily="34" charset="-120"/>
+              </a:rPr>
+              <a:t>A playable Aral Sea for festivals and exhibitions.</a:t>
+            </a:r>
+            <a:endParaRPr lang="en-US" sz="1700" dirty="0"/>
+          </a:p>
+        </p:txBody>
+      </p:sp>
+      <p:sp>
+        <p:nvSpPr>
+          <p:cNvPr id="18" name="Shape 16"/>
+          <p:cNvSpPr/>
+          <p:nvPr/>
+        </p:nvSpPr>
+        <p:spPr>
+          <a:xfrm>
+            <a:off x="548640" y="5733288"/>
+            <a:ext cx="11094415" cy="0"/>
+          </a:xfrm>
+          <a:prstGeom prst="line">
+            <a:avLst/>
+          </a:prstGeom>
+          <a:noFill/>
+          <a:ln w="9525">
+            <a:solidFill>
+              <a:srgbClr val="E5E5E2"/>
+            </a:solidFill>
+            <a:prstDash val="solid"/>
+          </a:ln>
+        </p:spPr>
+      </p:sp>
+      <p:sp>
+        <p:nvSpPr>
+          <p:cNvPr id="19" name="Text 17"/>
+          <p:cNvSpPr/>
+          <p:nvPr/>
+        </p:nvSpPr>
+        <p:spPr>
+          <a:xfrm>
+            <a:off x="10728655" y="6400800"/>
+            <a:ext cx="1097280" cy="274320"/>
+          </a:xfrm>
+          <a:prstGeom prst="rect">
+            <a:avLst/>
+          </a:prstGeom>
+          <a:noFill/>
+          <a:ln/>
+        </p:spPr>
+        <p:txBody>
+          <a:bodyPr wrap="square" rtlCol="0" anchor="ctr"/>
+          <a:lstStyle/>
+          <a:p>
+            <a:pPr algn="r" indent="0" marL="0">
+              <a:buNone/>
+            </a:pPr>
+            <a:r>
+              <a:rPr lang="en-US" sz="900" dirty="0">
+                <a:solidFill>
+                  <a:srgbClr val="5B6068"/>
+                </a:solidFill>
+                <a:latin typeface="IBM Plex Mono" pitchFamily="34" charset="0"/>
+                <a:ea typeface="IBM Plex Mono" pitchFamily="34" charset="-122"/>
+                <a:cs typeface="IBM Plex Mono" pitchFamily="34" charset="-120"/>
+              </a:rPr>
+              <a:t>07 / 14</a:t>
             </a:r>
             <a:endParaRPr lang="en-US" sz="900" dirty="0"/>
           </a:p>
@@ -7337,7 +6998,7 @@
       </p:sp>
       <p:sp>
         <p:nvSpPr>
-          <p:cNvPr id="7" name="Text 4"/>
+          <p:cNvPr id="20" name="Text 18"/>
           <p:cNvSpPr/>
           <p:nvPr/>
         </p:nvSpPr>
@@ -7362,7 +7023,7 @@
             <a:r>
               <a:rPr lang="en-US" sz="900" spc="600" kern="0" dirty="0">
                 <a:solidFill>
-                  <a:srgbClr val="6B7077"/>
+                  <a:srgbClr val="5B6068"/>
                 </a:solidFill>
                 <a:latin typeface="IBM Plex Mono" pitchFamily="34" charset="0"/>
                 <a:ea typeface="IBM Plex Mono" pitchFamily="34" charset="-122"/>
@@ -7431,15 +7092,15 @@
               <a:buNone/>
             </a:pPr>
             <a:r>
-              <a:rPr lang="en-US" sz="900" spc="800" kern="0" dirty="0">
-                <a:solidFill>
-                  <a:srgbClr val="0F766E"/>
+              <a:rPr lang="en-US" sz="900" b="1" spc="800" kern="0" dirty="0">
+                <a:solidFill>
+                  <a:srgbClr val="EC4899"/>
                 </a:solidFill>
                 <a:latin typeface="IBM Plex Mono" pitchFamily="34" charset="0"/>
                 <a:ea typeface="IBM Plex Mono" pitchFamily="34" charset="-122"/>
                 <a:cs typeface="IBM Plex Mono" pitchFamily="34" charset="-120"/>
               </a:rPr>
-              <a:t>WHO IT IS FOR</a:t>
+              <a:t>THE ASK</a:t>
             </a:r>
             <a:endParaRPr lang="en-US" sz="900" dirty="0"/>
           </a:p>
@@ -7453,34 +7114,34 @@
         </p:nvSpPr>
         <p:spPr>
           <a:xfrm>
-            <a:off x="548640" y="914400"/>
-            <a:ext cx="10972800" cy="822960"/>
-          </a:xfrm>
-          <a:prstGeom prst="rect">
-            <a:avLst/>
-          </a:prstGeom>
-          <a:noFill/>
-          <a:ln/>
-        </p:spPr>
-        <p:txBody>
-          <a:bodyPr wrap="square" rtlCol="0" anchor="ctr"/>
-          <a:lstStyle/>
-          <a:p>
-            <a:pPr indent="0" marL="0">
-              <a:buNone/>
-            </a:pPr>
-            <a:r>
-              <a:rPr lang="en-US" sz="4400" dirty="0">
+            <a:off x="548640" y="1463040"/>
+            <a:ext cx="10972800" cy="2194560"/>
+          </a:xfrm>
+          <a:prstGeom prst="rect">
+            <a:avLst/>
+          </a:prstGeom>
+          <a:noFill/>
+          <a:ln/>
+        </p:spPr>
+        <p:txBody>
+          <a:bodyPr wrap="square" rtlCol="0" anchor="ctr"/>
+          <a:lstStyle/>
+          <a:p>
+            <a:pPr indent="0" marL="0">
+              <a:buNone/>
+            </a:pPr>
+            <a:r>
+              <a:rPr lang="en-US" sz="20000" b="1" dirty="0">
                 <a:solidFill>
                   <a:srgbClr val="111418"/>
                 </a:solidFill>
-                <a:latin typeface="Inter" pitchFamily="34" charset="0"/>
-                <a:ea typeface="Inter" pitchFamily="34" charset="-122"/>
-                <a:cs typeface="Inter" pitchFamily="34" charset="-120"/>
-              </a:rPr>
-              <a:t>Audiences.</a:t>
-            </a:r>
-            <a:endParaRPr lang="en-US" sz="4400" dirty="0"/>
+                <a:latin typeface="Trebuchet MS" pitchFamily="34" charset="0"/>
+                <a:ea typeface="Trebuchet MS" pitchFamily="34" charset="-122"/>
+                <a:cs typeface="Trebuchet MS" pitchFamily="34" charset="-120"/>
+              </a:rPr>
+              <a:t>$30,000</a:t>
+            </a:r>
+            <a:endParaRPr lang="en-US" sz="20000" dirty="0"/>
           </a:p>
         </p:txBody>
       </p:sp>
@@ -7492,545 +7153,118 @@
         </p:nvSpPr>
         <p:spPr>
           <a:xfrm>
-            <a:off x="548640" y="2194560"/>
-            <a:ext cx="2743200" cy="365760"/>
-          </a:xfrm>
-          <a:prstGeom prst="rect">
-            <a:avLst/>
-          </a:prstGeom>
-          <a:noFill/>
-          <a:ln/>
-        </p:spPr>
-        <p:txBody>
-          <a:bodyPr wrap="square" rtlCol="0" anchor="ctr"/>
-          <a:lstStyle/>
-          <a:p>
-            <a:pPr indent="0" marL="0">
-              <a:buNone/>
-            </a:pPr>
-            <a:r>
-              <a:rPr lang="en-US" sz="1100" spc="600" kern="0" dirty="0">
-                <a:solidFill>
-                  <a:srgbClr val="0F766E"/>
+            <a:off x="548640" y="3840480"/>
+            <a:ext cx="10972800" cy="731520"/>
+          </a:xfrm>
+          <a:prstGeom prst="rect">
+            <a:avLst/>
+          </a:prstGeom>
+          <a:noFill/>
+          <a:ln/>
+        </p:spPr>
+        <p:txBody>
+          <a:bodyPr wrap="square" rtlCol="0" anchor="ctr"/>
+          <a:lstStyle/>
+          <a:p>
+            <a:pPr indent="0" marL="0">
+              <a:buNone/>
+            </a:pPr>
+            <a:r>
+              <a:rPr lang="en-US" sz="3600" i="1" dirty="0">
+                <a:solidFill>
+                  <a:srgbClr val="3B82F6"/>
+                </a:solidFill>
+                <a:latin typeface="Georgia" pitchFamily="34" charset="0"/>
+                <a:ea typeface="Georgia" pitchFamily="34" charset="-122"/>
+                <a:cs typeface="Georgia" pitchFamily="34" charset="-120"/>
+              </a:rPr>
+              <a:t>for six months.</a:t>
+            </a:r>
+            <a:endParaRPr lang="en-US" sz="3600" dirty="0"/>
+          </a:p>
+        </p:txBody>
+      </p:sp>
+      <p:sp>
+        <p:nvSpPr>
+          <p:cNvPr id="5" name="Text 3"/>
+          <p:cNvSpPr/>
+          <p:nvPr/>
+        </p:nvSpPr>
+        <p:spPr>
+          <a:xfrm>
+            <a:off x="548640" y="4754880"/>
+            <a:ext cx="10058400" cy="1371600"/>
+          </a:xfrm>
+          <a:prstGeom prst="rect">
+            <a:avLst/>
+          </a:prstGeom>
+          <a:noFill/>
+          <a:ln/>
+        </p:spPr>
+        <p:txBody>
+          <a:bodyPr wrap="square" rtlCol="0" anchor="ctr"/>
+          <a:lstStyle/>
+          <a:p>
+            <a:pPr indent="0" marL="0">
+              <a:buNone/>
+            </a:pPr>
+            <a:r>
+              <a:rPr lang="en-US" sz="1800" dirty="0">
+                <a:solidFill>
+                  <a:srgbClr val="5B6068"/>
+                </a:solidFill>
+                <a:latin typeface="Trebuchet MS" pitchFamily="34" charset="0"/>
+                <a:ea typeface="Trebuchet MS" pitchFamily="34" charset="-122"/>
+                <a:cs typeface="Trebuchet MS" pitchFamily="34" charset="-120"/>
+              </a:rPr>
+              <a:t>Product polish, curriculum integration with the Ministry of Education, and museum-ready versions.</a:t>
+            </a:r>
+            <a:endParaRPr lang="en-US" sz="1800" dirty="0"/>
+          </a:p>
+        </p:txBody>
+      </p:sp>
+      <p:sp>
+        <p:nvSpPr>
+          <p:cNvPr id="6" name="Text 4"/>
+          <p:cNvSpPr/>
+          <p:nvPr/>
+        </p:nvSpPr>
+        <p:spPr>
+          <a:xfrm>
+            <a:off x="10728655" y="6400800"/>
+            <a:ext cx="1097280" cy="274320"/>
+          </a:xfrm>
+          <a:prstGeom prst="rect">
+            <a:avLst/>
+          </a:prstGeom>
+          <a:noFill/>
+          <a:ln/>
+        </p:spPr>
+        <p:txBody>
+          <a:bodyPr wrap="square" rtlCol="0" anchor="ctr"/>
+          <a:lstStyle/>
+          <a:p>
+            <a:pPr algn="r" indent="0" marL="0">
+              <a:buNone/>
+            </a:pPr>
+            <a:r>
+              <a:rPr lang="en-US" sz="900" dirty="0">
+                <a:solidFill>
+                  <a:srgbClr val="5B6068"/>
                 </a:solidFill>
                 <a:latin typeface="IBM Plex Mono" pitchFamily="34" charset="0"/>
                 <a:ea typeface="IBM Plex Mono" pitchFamily="34" charset="-122"/>
                 <a:cs typeface="IBM Plex Mono" pitchFamily="34" charset="-120"/>
               </a:rPr>
-              <a:t>SCHOOLS</a:t>
-            </a:r>
-            <a:endParaRPr lang="en-US" sz="1100" dirty="0"/>
-          </a:p>
-        </p:txBody>
-      </p:sp>
-      <p:sp>
-        <p:nvSpPr>
-          <p:cNvPr id="5" name="Text 3"/>
-          <p:cNvSpPr/>
-          <p:nvPr/>
-        </p:nvSpPr>
-        <p:spPr>
-          <a:xfrm>
-            <a:off x="3474720" y="2194560"/>
-            <a:ext cx="8229600" cy="365760"/>
-          </a:xfrm>
-          <a:prstGeom prst="rect">
-            <a:avLst/>
-          </a:prstGeom>
-          <a:noFill/>
-          <a:ln/>
-        </p:spPr>
-        <p:txBody>
-          <a:bodyPr wrap="square" rtlCol="0" anchor="ctr"/>
-          <a:lstStyle/>
-          <a:p>
-            <a:pPr indent="0" marL="0">
-              <a:buNone/>
-            </a:pPr>
-            <a:r>
-              <a:rPr lang="en-US" sz="1600" dirty="0">
-                <a:solidFill>
-                  <a:srgbClr val="111418"/>
-                </a:solidFill>
-                <a:latin typeface="Inter" pitchFamily="34" charset="0"/>
-                <a:ea typeface="Inter" pitchFamily="34" charset="-122"/>
-                <a:cs typeface="Inter" pitchFamily="34" charset="-120"/>
-              </a:rPr>
-              <a:t>Curriculum-ready missions and classroom workshops.</a:t>
-            </a:r>
-            <a:endParaRPr lang="en-US" sz="1600" dirty="0"/>
-          </a:p>
-        </p:txBody>
-      </p:sp>
-      <p:sp>
-        <p:nvSpPr>
-          <p:cNvPr id="6" name="Shape 4"/>
-          <p:cNvSpPr/>
-          <p:nvPr/>
-        </p:nvSpPr>
-        <p:spPr>
-          <a:xfrm>
-            <a:off x="548640" y="2697480"/>
-            <a:ext cx="11094415" cy="0"/>
-          </a:xfrm>
-          <a:prstGeom prst="line">
-            <a:avLst/>
-          </a:prstGeom>
-          <a:noFill/>
-          <a:ln w="9525">
-            <a:solidFill>
-              <a:srgbClr val="E5E5E2"/>
-            </a:solidFill>
-            <a:prstDash val="solid"/>
-          </a:ln>
-        </p:spPr>
+              <a:t>08 / 14</a:t>
+            </a:r>
+            <a:endParaRPr lang="en-US" sz="900" dirty="0"/>
+          </a:p>
+        </p:txBody>
       </p:sp>
       <p:sp>
         <p:nvSpPr>
           <p:cNvPr id="7" name="Text 5"/>
-          <p:cNvSpPr/>
-          <p:nvPr/>
-        </p:nvSpPr>
-        <p:spPr>
-          <a:xfrm>
-            <a:off x="548640" y="2971800"/>
-            <a:ext cx="2743200" cy="365760"/>
-          </a:xfrm>
-          <a:prstGeom prst="rect">
-            <a:avLst/>
-          </a:prstGeom>
-          <a:noFill/>
-          <a:ln/>
-        </p:spPr>
-        <p:txBody>
-          <a:bodyPr wrap="square" rtlCol="0" anchor="ctr"/>
-          <a:lstStyle/>
-          <a:p>
-            <a:pPr indent="0" marL="0">
-              <a:buNone/>
-            </a:pPr>
-            <a:r>
-              <a:rPr lang="en-US" sz="1100" spc="600" kern="0" dirty="0">
-                <a:solidFill>
-                  <a:srgbClr val="0F766E"/>
-                </a:solidFill>
-                <a:latin typeface="IBM Plex Mono" pitchFamily="34" charset="0"/>
-                <a:ea typeface="IBM Plex Mono" pitchFamily="34" charset="-122"/>
-                <a:cs typeface="IBM Plex Mono" pitchFamily="34" charset="-120"/>
-              </a:rPr>
-              <a:t>MUSEUMS</a:t>
-            </a:r>
-            <a:endParaRPr lang="en-US" sz="1100" dirty="0"/>
-          </a:p>
-        </p:txBody>
-      </p:sp>
-      <p:sp>
-        <p:nvSpPr>
-          <p:cNvPr id="8" name="Text 6"/>
-          <p:cNvSpPr/>
-          <p:nvPr/>
-        </p:nvSpPr>
-        <p:spPr>
-          <a:xfrm>
-            <a:off x="3474720" y="2971800"/>
-            <a:ext cx="8229600" cy="365760"/>
-          </a:xfrm>
-          <a:prstGeom prst="rect">
-            <a:avLst/>
-          </a:prstGeom>
-          <a:noFill/>
-          <a:ln/>
-        </p:spPr>
-        <p:txBody>
-          <a:bodyPr wrap="square" rtlCol="0" anchor="ctr"/>
-          <a:lstStyle/>
-          <a:p>
-            <a:pPr indent="0" marL="0">
-              <a:buNone/>
-            </a:pPr>
-            <a:r>
-              <a:rPr lang="en-US" sz="1600" dirty="0">
-                <a:solidFill>
-                  <a:srgbClr val="111418"/>
-                </a:solidFill>
-                <a:latin typeface="Inter" pitchFamily="34" charset="0"/>
-                <a:ea typeface="Inter" pitchFamily="34" charset="-122"/>
-                <a:cs typeface="Inter" pitchFamily="34" charset="-120"/>
-              </a:rPr>
-              <a:t>Touchscreens, projections and controller installations.</a:t>
-            </a:r>
-            <a:endParaRPr lang="en-US" sz="1600" dirty="0"/>
-          </a:p>
-        </p:txBody>
-      </p:sp>
-      <p:sp>
-        <p:nvSpPr>
-          <p:cNvPr id="9" name="Shape 7"/>
-          <p:cNvSpPr/>
-          <p:nvPr/>
-        </p:nvSpPr>
-        <p:spPr>
-          <a:xfrm>
-            <a:off x="548640" y="3474720"/>
-            <a:ext cx="11094415" cy="0"/>
-          </a:xfrm>
-          <a:prstGeom prst="line">
-            <a:avLst/>
-          </a:prstGeom>
-          <a:noFill/>
-          <a:ln w="9525">
-            <a:solidFill>
-              <a:srgbClr val="E5E5E2"/>
-            </a:solidFill>
-            <a:prstDash val="solid"/>
-          </a:ln>
-        </p:spPr>
-      </p:sp>
-      <p:sp>
-        <p:nvSpPr>
-          <p:cNvPr id="10" name="Text 8"/>
-          <p:cNvSpPr/>
-          <p:nvPr/>
-        </p:nvSpPr>
-        <p:spPr>
-          <a:xfrm>
-            <a:off x="548640" y="3749040"/>
-            <a:ext cx="2743200" cy="365760"/>
-          </a:xfrm>
-          <a:prstGeom prst="rect">
-            <a:avLst/>
-          </a:prstGeom>
-          <a:noFill/>
-          <a:ln/>
-        </p:spPr>
-        <p:txBody>
-          <a:bodyPr wrap="square" rtlCol="0" anchor="ctr"/>
-          <a:lstStyle/>
-          <a:p>
-            <a:pPr indent="0" marL="0">
-              <a:buNone/>
-            </a:pPr>
-            <a:r>
-              <a:rPr lang="en-US" sz="1100" spc="600" kern="0" dirty="0">
-                <a:solidFill>
-                  <a:srgbClr val="0F766E"/>
-                </a:solidFill>
-                <a:latin typeface="IBM Plex Mono" pitchFamily="34" charset="0"/>
-                <a:ea typeface="IBM Plex Mono" pitchFamily="34" charset="-122"/>
-                <a:cs typeface="IBM Plex Mono" pitchFamily="34" charset="-120"/>
-              </a:rPr>
-              <a:t>RESEARCHERS</a:t>
-            </a:r>
-            <a:endParaRPr lang="en-US" sz="1100" dirty="0"/>
-          </a:p>
-        </p:txBody>
-      </p:sp>
-      <p:sp>
-        <p:nvSpPr>
-          <p:cNvPr id="11" name="Text 9"/>
-          <p:cNvSpPr/>
-          <p:nvPr/>
-        </p:nvSpPr>
-        <p:spPr>
-          <a:xfrm>
-            <a:off x="3474720" y="3749040"/>
-            <a:ext cx="8229600" cy="365760"/>
-          </a:xfrm>
-          <a:prstGeom prst="rect">
-            <a:avLst/>
-          </a:prstGeom>
-          <a:noFill/>
-          <a:ln/>
-        </p:spPr>
-        <p:txBody>
-          <a:bodyPr wrap="square" rtlCol="0" anchor="ctr"/>
-          <a:lstStyle/>
-          <a:p>
-            <a:pPr indent="0" marL="0">
-              <a:buNone/>
-            </a:pPr>
-            <a:r>
-              <a:rPr lang="en-US" sz="1600" dirty="0">
-                <a:solidFill>
-                  <a:srgbClr val="111418"/>
-                </a:solidFill>
-                <a:latin typeface="Inter" pitchFamily="34" charset="0"/>
-                <a:ea typeface="Inter" pitchFamily="34" charset="-122"/>
-                <a:cs typeface="Inter" pitchFamily="34" charset="-120"/>
-              </a:rPr>
-              <a:t>Real elevation and historical layers with shareable views.</a:t>
-            </a:r>
-            <a:endParaRPr lang="en-US" sz="1600" dirty="0"/>
-          </a:p>
-        </p:txBody>
-      </p:sp>
-      <p:sp>
-        <p:nvSpPr>
-          <p:cNvPr id="12" name="Shape 10"/>
-          <p:cNvSpPr/>
-          <p:nvPr/>
-        </p:nvSpPr>
-        <p:spPr>
-          <a:xfrm>
-            <a:off x="548640" y="4251960"/>
-            <a:ext cx="11094415" cy="0"/>
-          </a:xfrm>
-          <a:prstGeom prst="line">
-            <a:avLst/>
-          </a:prstGeom>
-          <a:noFill/>
-          <a:ln w="9525">
-            <a:solidFill>
-              <a:srgbClr val="E5E5E2"/>
-            </a:solidFill>
-            <a:prstDash val="solid"/>
-          </a:ln>
-        </p:spPr>
-      </p:sp>
-      <p:sp>
-        <p:nvSpPr>
-          <p:cNvPr id="13" name="Text 11"/>
-          <p:cNvSpPr/>
-          <p:nvPr/>
-        </p:nvSpPr>
-        <p:spPr>
-          <a:xfrm>
-            <a:off x="548640" y="4526280"/>
-            <a:ext cx="2743200" cy="365760"/>
-          </a:xfrm>
-          <a:prstGeom prst="rect">
-            <a:avLst/>
-          </a:prstGeom>
-          <a:noFill/>
-          <a:ln/>
-        </p:spPr>
-        <p:txBody>
-          <a:bodyPr wrap="square" rtlCol="0" anchor="ctr"/>
-          <a:lstStyle/>
-          <a:p>
-            <a:pPr indent="0" marL="0">
-              <a:buNone/>
-            </a:pPr>
-            <a:r>
-              <a:rPr lang="en-US" sz="1100" spc="600" kern="0" dirty="0">
-                <a:solidFill>
-                  <a:srgbClr val="0F766E"/>
-                </a:solidFill>
-                <a:latin typeface="IBM Plex Mono" pitchFamily="34" charset="0"/>
-                <a:ea typeface="IBM Plex Mono" pitchFamily="34" charset="-122"/>
-                <a:cs typeface="IBM Plex Mono" pitchFamily="34" charset="-120"/>
-              </a:rPr>
-              <a:t>MINISTRIES</a:t>
-            </a:r>
-            <a:endParaRPr lang="en-US" sz="1100" dirty="0"/>
-          </a:p>
-        </p:txBody>
-      </p:sp>
-      <p:sp>
-        <p:nvSpPr>
-          <p:cNvPr id="14" name="Text 12"/>
-          <p:cNvSpPr/>
-          <p:nvPr/>
-        </p:nvSpPr>
-        <p:spPr>
-          <a:xfrm>
-            <a:off x="3474720" y="4526280"/>
-            <a:ext cx="8229600" cy="365760"/>
-          </a:xfrm>
-          <a:prstGeom prst="rect">
-            <a:avLst/>
-          </a:prstGeom>
-          <a:noFill/>
-          <a:ln/>
-        </p:spPr>
-        <p:txBody>
-          <a:bodyPr wrap="square" rtlCol="0" anchor="ctr"/>
-          <a:lstStyle/>
-          <a:p>
-            <a:pPr indent="0" marL="0">
-              <a:buNone/>
-            </a:pPr>
-            <a:r>
-              <a:rPr lang="en-US" sz="1600" dirty="0">
-                <a:solidFill>
-                  <a:srgbClr val="111418"/>
-                </a:solidFill>
-                <a:latin typeface="Inter" pitchFamily="34" charset="0"/>
-                <a:ea typeface="Inter" pitchFamily="34" charset="-122"/>
-                <a:cs typeface="Inter" pitchFamily="34" charset="-120"/>
-              </a:rPr>
-              <a:t>Scenario tools for water, agriculture and ecology.</a:t>
-            </a:r>
-            <a:endParaRPr lang="en-US" sz="1600" dirty="0"/>
-          </a:p>
-        </p:txBody>
-      </p:sp>
-      <p:sp>
-        <p:nvSpPr>
-          <p:cNvPr id="15" name="Shape 13"/>
-          <p:cNvSpPr/>
-          <p:nvPr/>
-        </p:nvSpPr>
-        <p:spPr>
-          <a:xfrm>
-            <a:off x="548640" y="5029200"/>
-            <a:ext cx="11094415" cy="0"/>
-          </a:xfrm>
-          <a:prstGeom prst="line">
-            <a:avLst/>
-          </a:prstGeom>
-          <a:noFill/>
-          <a:ln w="9525">
-            <a:solidFill>
-              <a:srgbClr val="E5E5E2"/>
-            </a:solidFill>
-            <a:prstDash val="solid"/>
-          </a:ln>
-        </p:spPr>
-      </p:sp>
-      <p:sp>
-        <p:nvSpPr>
-          <p:cNvPr id="16" name="Text 14"/>
-          <p:cNvSpPr/>
-          <p:nvPr/>
-        </p:nvSpPr>
-        <p:spPr>
-          <a:xfrm>
-            <a:off x="548640" y="5303520"/>
-            <a:ext cx="2743200" cy="365760"/>
-          </a:xfrm>
-          <a:prstGeom prst="rect">
-            <a:avLst/>
-          </a:prstGeom>
-          <a:noFill/>
-          <a:ln/>
-        </p:spPr>
-        <p:txBody>
-          <a:bodyPr wrap="square" rtlCol="0" anchor="ctr"/>
-          <a:lstStyle/>
-          <a:p>
-            <a:pPr indent="0" marL="0">
-              <a:buNone/>
-            </a:pPr>
-            <a:r>
-              <a:rPr lang="en-US" sz="1100" spc="600" kern="0" dirty="0">
-                <a:solidFill>
-                  <a:srgbClr val="0F766E"/>
-                </a:solidFill>
-                <a:latin typeface="IBM Plex Mono" pitchFamily="34" charset="0"/>
-                <a:ea typeface="IBM Plex Mono" pitchFamily="34" charset="-122"/>
-                <a:cs typeface="IBM Plex Mono" pitchFamily="34" charset="-120"/>
-              </a:rPr>
-              <a:t>PUBLIC</a:t>
-            </a:r>
-            <a:endParaRPr lang="en-US" sz="1100" dirty="0"/>
-          </a:p>
-        </p:txBody>
-      </p:sp>
-      <p:sp>
-        <p:nvSpPr>
-          <p:cNvPr id="17" name="Text 15"/>
-          <p:cNvSpPr/>
-          <p:nvPr/>
-        </p:nvSpPr>
-        <p:spPr>
-          <a:xfrm>
-            <a:off x="3474720" y="5303520"/>
-            <a:ext cx="8229600" cy="365760"/>
-          </a:xfrm>
-          <a:prstGeom prst="rect">
-            <a:avLst/>
-          </a:prstGeom>
-          <a:noFill/>
-          <a:ln/>
-        </p:spPr>
-        <p:txBody>
-          <a:bodyPr wrap="square" rtlCol="0" anchor="ctr"/>
-          <a:lstStyle/>
-          <a:p>
-            <a:pPr indent="0" marL="0">
-              <a:buNone/>
-            </a:pPr>
-            <a:r>
-              <a:rPr lang="en-US" sz="1600" dirty="0">
-                <a:solidFill>
-                  <a:srgbClr val="111418"/>
-                </a:solidFill>
-                <a:latin typeface="Inter" pitchFamily="34" charset="0"/>
-                <a:ea typeface="Inter" pitchFamily="34" charset="-122"/>
-                <a:cs typeface="Inter" pitchFamily="34" charset="-120"/>
-              </a:rPr>
-              <a:t>A playable Aral Sea for festivals and exhibitions.</a:t>
-            </a:r>
-            <a:endParaRPr lang="en-US" sz="1600" dirty="0"/>
-          </a:p>
-        </p:txBody>
-      </p:sp>
-      <p:sp>
-        <p:nvSpPr>
-          <p:cNvPr id="18" name="Shape 16"/>
-          <p:cNvSpPr/>
-          <p:nvPr/>
-        </p:nvSpPr>
-        <p:spPr>
-          <a:xfrm>
-            <a:off x="548640" y="5806440"/>
-            <a:ext cx="11094415" cy="0"/>
-          </a:xfrm>
-          <a:prstGeom prst="line">
-            <a:avLst/>
-          </a:prstGeom>
-          <a:noFill/>
-          <a:ln w="9525">
-            <a:solidFill>
-              <a:srgbClr val="E5E5E2"/>
-            </a:solidFill>
-            <a:prstDash val="solid"/>
-          </a:ln>
-        </p:spPr>
-      </p:sp>
-      <p:sp>
-        <p:nvSpPr>
-          <p:cNvPr id="19" name="Text 17"/>
-          <p:cNvSpPr/>
-          <p:nvPr/>
-        </p:nvSpPr>
-        <p:spPr>
-          <a:xfrm>
-            <a:off x="10728655" y="6400800"/>
-            <a:ext cx="1097280" cy="274320"/>
-          </a:xfrm>
-          <a:prstGeom prst="rect">
-            <a:avLst/>
-          </a:prstGeom>
-          <a:noFill/>
-          <a:ln/>
-        </p:spPr>
-        <p:txBody>
-          <a:bodyPr wrap="square" rtlCol="0" anchor="ctr"/>
-          <a:lstStyle/>
-          <a:p>
-            <a:pPr algn="r" indent="0" marL="0">
-              <a:buNone/>
-            </a:pPr>
-            <a:r>
-              <a:rPr lang="en-US" sz="900" spc="400" kern="0" dirty="0">
-                <a:solidFill>
-                  <a:srgbClr val="6B7077"/>
-                </a:solidFill>
-                <a:latin typeface="IBM Plex Mono" pitchFamily="34" charset="0"/>
-                <a:ea typeface="IBM Plex Mono" pitchFamily="34" charset="-122"/>
-                <a:cs typeface="IBM Plex Mono" pitchFamily="34" charset="-120"/>
-              </a:rPr>
-              <a:t>08 / 15</a:t>
-            </a:r>
-            <a:endParaRPr lang="en-US" sz="900" dirty="0"/>
-          </a:p>
-        </p:txBody>
-      </p:sp>
-      <p:sp>
-        <p:nvSpPr>
-          <p:cNvPr id="20" name="Text 18"/>
           <p:cNvSpPr/>
           <p:nvPr/>
         </p:nvSpPr>
@@ -8055,7 +7289,7 @@
             <a:r>
               <a:rPr lang="en-US" sz="900" spc="600" kern="0" dirty="0">
                 <a:solidFill>
-                  <a:srgbClr val="6B7077"/>
+                  <a:srgbClr val="5B6068"/>
                 </a:solidFill>
                 <a:latin typeface="IBM Plex Mono" pitchFamily="34" charset="0"/>
                 <a:ea typeface="IBM Plex Mono" pitchFamily="34" charset="-122"/>
@@ -8124,15 +7358,15 @@
               <a:buNone/>
             </a:pPr>
             <a:r>
-              <a:rPr lang="en-US" sz="900" spc="800" kern="0" dirty="0">
-                <a:solidFill>
-                  <a:srgbClr val="0F766E"/>
+              <a:rPr lang="en-US" sz="900" b="1" spc="800" kern="0" dirty="0">
+                <a:solidFill>
+                  <a:srgbClr val="3B82F6"/>
                 </a:solidFill>
                 <a:latin typeface="IBM Plex Mono" pitchFamily="34" charset="0"/>
                 <a:ea typeface="IBM Plex Mono" pitchFamily="34" charset="-122"/>
                 <a:cs typeface="IBM Plex Mono" pitchFamily="34" charset="-120"/>
               </a:rPr>
-              <a:t>THE ASK</a:t>
+              <a:t>6-MONTH PLAN</a:t>
             </a:r>
             <a:endParaRPr lang="en-US" sz="900" dirty="0"/>
           </a:p>
@@ -8146,34 +7380,34 @@
         </p:nvSpPr>
         <p:spPr>
           <a:xfrm>
-            <a:off x="548640" y="1645920"/>
-            <a:ext cx="10972800" cy="1828800"/>
-          </a:xfrm>
-          <a:prstGeom prst="rect">
-            <a:avLst/>
-          </a:prstGeom>
-          <a:noFill/>
-          <a:ln/>
-        </p:spPr>
-        <p:txBody>
-          <a:bodyPr wrap="square" rtlCol="0" anchor="ctr"/>
-          <a:lstStyle/>
-          <a:p>
-            <a:pPr indent="0" marL="0">
-              <a:buNone/>
-            </a:pPr>
-            <a:r>
-              <a:rPr lang="en-US" sz="16000" spc="-600" kern="0" dirty="0">
+            <a:off x="548640" y="914400"/>
+            <a:ext cx="10972800" cy="914400"/>
+          </a:xfrm>
+          <a:prstGeom prst="rect">
+            <a:avLst/>
+          </a:prstGeom>
+          <a:noFill/>
+          <a:ln/>
+        </p:spPr>
+        <p:txBody>
+          <a:bodyPr wrap="square" rtlCol="0" anchor="ctr"/>
+          <a:lstStyle/>
+          <a:p>
+            <a:pPr indent="0" marL="0">
+              <a:buNone/>
+            </a:pPr>
+            <a:r>
+              <a:rPr lang="en-US" sz="4800" b="1" spc="400" kern="0" dirty="0">
                 <a:solidFill>
                   <a:srgbClr val="111418"/>
                 </a:solidFill>
-                <a:latin typeface="Inter" pitchFamily="34" charset="0"/>
-                <a:ea typeface="Inter" pitchFamily="34" charset="-122"/>
-                <a:cs typeface="Inter" pitchFamily="34" charset="-120"/>
-              </a:rPr>
-              <a:t>$30,000</a:t>
-            </a:r>
-            <a:endParaRPr lang="en-US" sz="16000" dirty="0"/>
+                <a:latin typeface="Trebuchet MS" pitchFamily="34" charset="0"/>
+                <a:ea typeface="Trebuchet MS" pitchFamily="34" charset="-122"/>
+                <a:cs typeface="Trebuchet MS" pitchFamily="34" charset="-120"/>
+              </a:rPr>
+              <a:t>SIX MONTHS.</a:t>
+            </a:r>
+            <a:endParaRPr lang="en-US" sz="4800" dirty="0"/>
           </a:p>
         </p:txBody>
       </p:sp>
@@ -8185,71 +7419,638 @@
         </p:nvSpPr>
         <p:spPr>
           <a:xfrm>
-            <a:off x="548640" y="4206240"/>
-            <a:ext cx="10058400" cy="1828800"/>
-          </a:xfrm>
-          <a:prstGeom prst="rect">
-            <a:avLst/>
-          </a:prstGeom>
-          <a:noFill/>
-          <a:ln/>
-        </p:spPr>
-        <p:txBody>
-          <a:bodyPr wrap="square" rtlCol="0" anchor="ctr"/>
-          <a:lstStyle/>
-          <a:p>
-            <a:pPr indent="0" marL="0">
-              <a:buNone/>
-            </a:pPr>
-            <a:r>
-              <a:rPr lang="en-US" sz="2000" dirty="0">
-                <a:solidFill>
-                  <a:srgbClr val="6B7077"/>
-                </a:solidFill>
-                <a:latin typeface="Inter" pitchFamily="34" charset="0"/>
-                <a:ea typeface="Inter" pitchFamily="34" charset="-122"/>
-                <a:cs typeface="Inter" pitchFamily="34" charset="-120"/>
-              </a:rPr>
-              <a:t>Six months of work: product polish, curriculum integration with the Ministry of Education, and museum-ready versions.</a:t>
-            </a:r>
-            <a:endParaRPr lang="en-US" sz="2000" dirty="0"/>
-          </a:p>
-        </p:txBody>
-      </p:sp>
-      <p:sp>
-        <p:nvSpPr>
-          <p:cNvPr id="5" name="Text 3"/>
-          <p:cNvSpPr/>
-          <p:nvPr/>
-        </p:nvSpPr>
-        <p:spPr>
-          <a:xfrm>
-            <a:off x="10728655" y="6400800"/>
-            <a:ext cx="1097280" cy="274320"/>
-          </a:xfrm>
-          <a:prstGeom prst="rect">
-            <a:avLst/>
-          </a:prstGeom>
-          <a:noFill/>
-          <a:ln/>
-        </p:spPr>
-        <p:txBody>
-          <a:bodyPr wrap="square" rtlCol="0" anchor="ctr"/>
-          <a:lstStyle/>
-          <a:p>
-            <a:pPr algn="r" indent="0" marL="0">
-              <a:buNone/>
-            </a:pPr>
-            <a:r>
-              <a:rPr lang="en-US" sz="900" spc="400" kern="0" dirty="0">
-                <a:solidFill>
-                  <a:srgbClr val="6B7077"/>
+            <a:off x="548640" y="2286000"/>
+            <a:ext cx="914400" cy="457200"/>
+          </a:xfrm>
+          <a:prstGeom prst="rect">
+            <a:avLst/>
+          </a:prstGeom>
+          <a:noFill/>
+          <a:ln/>
+        </p:spPr>
+        <p:txBody>
+          <a:bodyPr wrap="square" rtlCol="0" anchor="ctr"/>
+          <a:lstStyle/>
+          <a:p>
+            <a:pPr indent="0" marL="0">
+              <a:buNone/>
+            </a:pPr>
+            <a:r>
+              <a:rPr lang="en-US" sz="1400" b="1" dirty="0">
+                <a:solidFill>
+                  <a:srgbClr val="3B82F6"/>
                 </a:solidFill>
                 <a:latin typeface="IBM Plex Mono" pitchFamily="34" charset="0"/>
                 <a:ea typeface="IBM Plex Mono" pitchFamily="34" charset="-122"/>
                 <a:cs typeface="IBM Plex Mono" pitchFamily="34" charset="-120"/>
               </a:rPr>
-              <a:t>09 / 15</a:t>
+              <a:t>M1</a:t>
+            </a:r>
+            <a:endParaRPr lang="en-US" sz="1400" dirty="0"/>
+          </a:p>
+        </p:txBody>
+      </p:sp>
+      <p:sp>
+        <p:nvSpPr>
+          <p:cNvPr id="5" name="Text 3"/>
+          <p:cNvSpPr/>
+          <p:nvPr/>
+        </p:nvSpPr>
+        <p:spPr>
+          <a:xfrm>
+            <a:off x="1645920" y="2286000"/>
+            <a:ext cx="10058400" cy="457200"/>
+          </a:xfrm>
+          <a:prstGeom prst="rect">
+            <a:avLst/>
+          </a:prstGeom>
+          <a:noFill/>
+          <a:ln/>
+        </p:spPr>
+        <p:txBody>
+          <a:bodyPr wrap="square" rtlCol="0" anchor="ctr"/>
+          <a:lstStyle/>
+          <a:p>
+            <a:pPr indent="0" marL="0">
+              <a:buNone/>
+            </a:pPr>
+            <a:r>
+              <a:rPr lang="en-US" sz="1800" dirty="0">
+                <a:solidFill>
+                  <a:srgbClr val="111418"/>
+                </a:solidFill>
+                <a:latin typeface="Trebuchet MS" pitchFamily="34" charset="0"/>
+                <a:ea typeface="Trebuchet MS" pitchFamily="34" charset="-122"/>
+                <a:cs typeface="Trebuchet MS" pitchFamily="34" charset="-120"/>
+              </a:rPr>
+              <a:t>Polish product, public demo.</a:t>
+            </a:r>
+            <a:endParaRPr lang="en-US" sz="1800" dirty="0"/>
+          </a:p>
+        </p:txBody>
+      </p:sp>
+      <p:sp>
+        <p:nvSpPr>
+          <p:cNvPr id="6" name="Shape 4"/>
+          <p:cNvSpPr/>
+          <p:nvPr/>
+        </p:nvSpPr>
+        <p:spPr>
+          <a:xfrm>
+            <a:off x="548640" y="2834640"/>
+            <a:ext cx="11094415" cy="0"/>
+          </a:xfrm>
+          <a:prstGeom prst="line">
+            <a:avLst/>
+          </a:prstGeom>
+          <a:noFill/>
+          <a:ln w="9525">
+            <a:solidFill>
+              <a:srgbClr val="E5E5E2"/>
+            </a:solidFill>
+            <a:prstDash val="solid"/>
+          </a:ln>
+        </p:spPr>
+      </p:sp>
+      <p:sp>
+        <p:nvSpPr>
+          <p:cNvPr id="7" name="Text 5"/>
+          <p:cNvSpPr/>
+          <p:nvPr/>
+        </p:nvSpPr>
+        <p:spPr>
+          <a:xfrm>
+            <a:off x="548640" y="2944368"/>
+            <a:ext cx="914400" cy="457200"/>
+          </a:xfrm>
+          <a:prstGeom prst="rect">
+            <a:avLst/>
+          </a:prstGeom>
+          <a:noFill/>
+          <a:ln/>
+        </p:spPr>
+        <p:txBody>
+          <a:bodyPr wrap="square" rtlCol="0" anchor="ctr"/>
+          <a:lstStyle/>
+          <a:p>
+            <a:pPr indent="0" marL="0">
+              <a:buNone/>
+            </a:pPr>
+            <a:r>
+              <a:rPr lang="en-US" sz="1400" b="1" dirty="0">
+                <a:solidFill>
+                  <a:srgbClr val="3B82F6"/>
+                </a:solidFill>
+                <a:latin typeface="IBM Plex Mono" pitchFamily="34" charset="0"/>
+                <a:ea typeface="IBM Plex Mono" pitchFamily="34" charset="-122"/>
+                <a:cs typeface="IBM Plex Mono" pitchFamily="34" charset="-120"/>
+              </a:rPr>
+              <a:t>M2</a:t>
+            </a:r>
+            <a:endParaRPr lang="en-US" sz="1400" dirty="0"/>
+          </a:p>
+        </p:txBody>
+      </p:sp>
+      <p:sp>
+        <p:nvSpPr>
+          <p:cNvPr id="8" name="Text 6"/>
+          <p:cNvSpPr/>
+          <p:nvPr/>
+        </p:nvSpPr>
+        <p:spPr>
+          <a:xfrm>
+            <a:off x="1645920" y="2944368"/>
+            <a:ext cx="10058400" cy="457200"/>
+          </a:xfrm>
+          <a:prstGeom prst="rect">
+            <a:avLst/>
+          </a:prstGeom>
+          <a:noFill/>
+          <a:ln/>
+        </p:spPr>
+        <p:txBody>
+          <a:bodyPr wrap="square" rtlCol="0" anchor="ctr"/>
+          <a:lstStyle/>
+          <a:p>
+            <a:pPr indent="0" marL="0">
+              <a:buNone/>
+            </a:pPr>
+            <a:r>
+              <a:rPr lang="en-US" sz="1800" dirty="0">
+                <a:solidFill>
+                  <a:srgbClr val="111418"/>
+                </a:solidFill>
+                <a:latin typeface="Trebuchet MS" pitchFamily="34" charset="0"/>
+                <a:ea typeface="Trebuchet MS" pitchFamily="34" charset="-122"/>
+                <a:cs typeface="Trebuchet MS" pitchFamily="34" charset="-120"/>
+              </a:rPr>
+              <a:t>Educational version and ministry talks.</a:t>
+            </a:r>
+            <a:endParaRPr lang="en-US" sz="1800" dirty="0"/>
+          </a:p>
+        </p:txBody>
+      </p:sp>
+      <p:sp>
+        <p:nvSpPr>
+          <p:cNvPr id="9" name="Shape 7"/>
+          <p:cNvSpPr/>
+          <p:nvPr/>
+        </p:nvSpPr>
+        <p:spPr>
+          <a:xfrm>
+            <a:off x="548640" y="3493008"/>
+            <a:ext cx="11094415" cy="0"/>
+          </a:xfrm>
+          <a:prstGeom prst="line">
+            <a:avLst/>
+          </a:prstGeom>
+          <a:noFill/>
+          <a:ln w="9525">
+            <a:solidFill>
+              <a:srgbClr val="E5E5E2"/>
+            </a:solidFill>
+            <a:prstDash val="solid"/>
+          </a:ln>
+        </p:spPr>
+      </p:sp>
+      <p:sp>
+        <p:nvSpPr>
+          <p:cNvPr id="10" name="Text 8"/>
+          <p:cNvSpPr/>
+          <p:nvPr/>
+        </p:nvSpPr>
+        <p:spPr>
+          <a:xfrm>
+            <a:off x="548640" y="3602736"/>
+            <a:ext cx="914400" cy="457200"/>
+          </a:xfrm>
+          <a:prstGeom prst="rect">
+            <a:avLst/>
+          </a:prstGeom>
+          <a:noFill/>
+          <a:ln/>
+        </p:spPr>
+        <p:txBody>
+          <a:bodyPr wrap="square" rtlCol="0" anchor="ctr"/>
+          <a:lstStyle/>
+          <a:p>
+            <a:pPr indent="0" marL="0">
+              <a:buNone/>
+            </a:pPr>
+            <a:r>
+              <a:rPr lang="en-US" sz="1400" b="1" dirty="0">
+                <a:solidFill>
+                  <a:srgbClr val="3B82F6"/>
+                </a:solidFill>
+                <a:latin typeface="IBM Plex Mono" pitchFamily="34" charset="0"/>
+                <a:ea typeface="IBM Plex Mono" pitchFamily="34" charset="-122"/>
+                <a:cs typeface="IBM Plex Mono" pitchFamily="34" charset="-120"/>
+              </a:rPr>
+              <a:t>M3</a:t>
+            </a:r>
+            <a:endParaRPr lang="en-US" sz="1400" dirty="0"/>
+          </a:p>
+        </p:txBody>
+      </p:sp>
+      <p:sp>
+        <p:nvSpPr>
+          <p:cNvPr id="11" name="Text 9"/>
+          <p:cNvSpPr/>
+          <p:nvPr/>
+        </p:nvSpPr>
+        <p:spPr>
+          <a:xfrm>
+            <a:off x="1645920" y="3602736"/>
+            <a:ext cx="10058400" cy="457200"/>
+          </a:xfrm>
+          <a:prstGeom prst="rect">
+            <a:avLst/>
+          </a:prstGeom>
+          <a:noFill/>
+          <a:ln/>
+        </p:spPr>
+        <p:txBody>
+          <a:bodyPr wrap="square" rtlCol="0" anchor="ctr"/>
+          <a:lstStyle/>
+          <a:p>
+            <a:pPr indent="0" marL="0">
+              <a:buNone/>
+            </a:pPr>
+            <a:r>
+              <a:rPr lang="en-US" sz="1800" dirty="0">
+                <a:solidFill>
+                  <a:srgbClr val="111418"/>
+                </a:solidFill>
+                <a:latin typeface="Trebuchet MS" pitchFamily="34" charset="0"/>
+                <a:ea typeface="Trebuchet MS" pitchFamily="34" charset="-122"/>
+                <a:cs typeface="Trebuchet MS" pitchFamily="34" charset="-120"/>
+              </a:rPr>
+              <a:t>First curriculum-ready learning module.</a:t>
+            </a:r>
+            <a:endParaRPr lang="en-US" sz="1800" dirty="0"/>
+          </a:p>
+        </p:txBody>
+      </p:sp>
+      <p:sp>
+        <p:nvSpPr>
+          <p:cNvPr id="12" name="Shape 10"/>
+          <p:cNvSpPr/>
+          <p:nvPr/>
+        </p:nvSpPr>
+        <p:spPr>
+          <a:xfrm>
+            <a:off x="548640" y="4151376"/>
+            <a:ext cx="11094415" cy="0"/>
+          </a:xfrm>
+          <a:prstGeom prst="line">
+            <a:avLst/>
+          </a:prstGeom>
+          <a:noFill/>
+          <a:ln w="9525">
+            <a:solidFill>
+              <a:srgbClr val="E5E5E2"/>
+            </a:solidFill>
+            <a:prstDash val="solid"/>
+          </a:ln>
+        </p:spPr>
+      </p:sp>
+      <p:sp>
+        <p:nvSpPr>
+          <p:cNvPr id="13" name="Text 11"/>
+          <p:cNvSpPr/>
+          <p:nvPr/>
+        </p:nvSpPr>
+        <p:spPr>
+          <a:xfrm>
+            <a:off x="548640" y="4261104"/>
+            <a:ext cx="914400" cy="457200"/>
+          </a:xfrm>
+          <a:prstGeom prst="rect">
+            <a:avLst/>
+          </a:prstGeom>
+          <a:noFill/>
+          <a:ln/>
+        </p:spPr>
+        <p:txBody>
+          <a:bodyPr wrap="square" rtlCol="0" anchor="ctr"/>
+          <a:lstStyle/>
+          <a:p>
+            <a:pPr indent="0" marL="0">
+              <a:buNone/>
+            </a:pPr>
+            <a:r>
+              <a:rPr lang="en-US" sz="1400" b="1" dirty="0">
+                <a:solidFill>
+                  <a:srgbClr val="3B82F6"/>
+                </a:solidFill>
+                <a:latin typeface="IBM Plex Mono" pitchFamily="34" charset="0"/>
+                <a:ea typeface="IBM Plex Mono" pitchFamily="34" charset="-122"/>
+                <a:cs typeface="IBM Plex Mono" pitchFamily="34" charset="-120"/>
+              </a:rPr>
+              <a:t>M4</a:t>
+            </a:r>
+            <a:endParaRPr lang="en-US" sz="1400" dirty="0"/>
+          </a:p>
+        </p:txBody>
+      </p:sp>
+      <p:sp>
+        <p:nvSpPr>
+          <p:cNvPr id="14" name="Text 12"/>
+          <p:cNvSpPr/>
+          <p:nvPr/>
+        </p:nvSpPr>
+        <p:spPr>
+          <a:xfrm>
+            <a:off x="1645920" y="4261104"/>
+            <a:ext cx="10058400" cy="457200"/>
+          </a:xfrm>
+          <a:prstGeom prst="rect">
+            <a:avLst/>
+          </a:prstGeom>
+          <a:noFill/>
+          <a:ln/>
+        </p:spPr>
+        <p:txBody>
+          <a:bodyPr wrap="square" rtlCol="0" anchor="ctr"/>
+          <a:lstStyle/>
+          <a:p>
+            <a:pPr indent="0" marL="0">
+              <a:buNone/>
+            </a:pPr>
+            <a:r>
+              <a:rPr lang="en-US" sz="1800" dirty="0">
+                <a:solidFill>
+                  <a:srgbClr val="111418"/>
+                </a:solidFill>
+                <a:latin typeface="Trebuchet MS" pitchFamily="34" charset="0"/>
+                <a:ea typeface="Trebuchet MS" pitchFamily="34" charset="-122"/>
+                <a:cs typeface="Trebuchet MS" pitchFamily="34" charset="-120"/>
+              </a:rPr>
+              <a:t>Adapt for Aral Culture Summit 2026.</a:t>
+            </a:r>
+            <a:endParaRPr lang="en-US" sz="1800" dirty="0"/>
+          </a:p>
+        </p:txBody>
+      </p:sp>
+      <p:sp>
+        <p:nvSpPr>
+          <p:cNvPr id="15" name="Shape 13"/>
+          <p:cNvSpPr/>
+          <p:nvPr/>
+        </p:nvSpPr>
+        <p:spPr>
+          <a:xfrm>
+            <a:off x="548640" y="4809744"/>
+            <a:ext cx="11094415" cy="0"/>
+          </a:xfrm>
+          <a:prstGeom prst="line">
+            <a:avLst/>
+          </a:prstGeom>
+          <a:noFill/>
+          <a:ln w="9525">
+            <a:solidFill>
+              <a:srgbClr val="E5E5E2"/>
+            </a:solidFill>
+            <a:prstDash val="solid"/>
+          </a:ln>
+        </p:spPr>
+      </p:sp>
+      <p:sp>
+        <p:nvSpPr>
+          <p:cNvPr id="16" name="Text 14"/>
+          <p:cNvSpPr/>
+          <p:nvPr/>
+        </p:nvSpPr>
+        <p:spPr>
+          <a:xfrm>
+            <a:off x="548640" y="4919472"/>
+            <a:ext cx="914400" cy="457200"/>
+          </a:xfrm>
+          <a:prstGeom prst="rect">
+            <a:avLst/>
+          </a:prstGeom>
+          <a:noFill/>
+          <a:ln/>
+        </p:spPr>
+        <p:txBody>
+          <a:bodyPr wrap="square" rtlCol="0" anchor="ctr"/>
+          <a:lstStyle/>
+          <a:p>
+            <a:pPr indent="0" marL="0">
+              <a:buNone/>
+            </a:pPr>
+            <a:r>
+              <a:rPr lang="en-US" sz="1400" b="1" dirty="0">
+                <a:solidFill>
+                  <a:srgbClr val="3B82F6"/>
+                </a:solidFill>
+                <a:latin typeface="IBM Plex Mono" pitchFamily="34" charset="0"/>
+                <a:ea typeface="IBM Plex Mono" pitchFamily="34" charset="-122"/>
+                <a:cs typeface="IBM Plex Mono" pitchFamily="34" charset="-120"/>
+              </a:rPr>
+              <a:t>M5</a:t>
+            </a:r>
+            <a:endParaRPr lang="en-US" sz="1400" dirty="0"/>
+          </a:p>
+        </p:txBody>
+      </p:sp>
+      <p:sp>
+        <p:nvSpPr>
+          <p:cNvPr id="17" name="Text 15"/>
+          <p:cNvSpPr/>
+          <p:nvPr/>
+        </p:nvSpPr>
+        <p:spPr>
+          <a:xfrm>
+            <a:off x="1645920" y="4919472"/>
+            <a:ext cx="10058400" cy="457200"/>
+          </a:xfrm>
+          <a:prstGeom prst="rect">
+            <a:avLst/>
+          </a:prstGeom>
+          <a:noFill/>
+          <a:ln/>
+        </p:spPr>
+        <p:txBody>
+          <a:bodyPr wrap="square" rtlCol="0" anchor="ctr"/>
+          <a:lstStyle/>
+          <a:p>
+            <a:pPr indent="0" marL="0">
+              <a:buNone/>
+            </a:pPr>
+            <a:r>
+              <a:rPr lang="en-US" sz="1800" dirty="0">
+                <a:solidFill>
+                  <a:srgbClr val="111418"/>
+                </a:solidFill>
+                <a:latin typeface="Trebuchet MS" pitchFamily="34" charset="0"/>
+                <a:ea typeface="Trebuchet MS" pitchFamily="34" charset="-122"/>
+                <a:cs typeface="Trebuchet MS" pitchFamily="34" charset="-120"/>
+              </a:rPr>
+              <a:t>Museum versions: Savitsky, Aral Sea Museum, CCA Tashkent.</a:t>
+            </a:r>
+            <a:endParaRPr lang="en-US" sz="1800" dirty="0"/>
+          </a:p>
+        </p:txBody>
+      </p:sp>
+      <p:sp>
+        <p:nvSpPr>
+          <p:cNvPr id="18" name="Shape 16"/>
+          <p:cNvSpPr/>
+          <p:nvPr/>
+        </p:nvSpPr>
+        <p:spPr>
+          <a:xfrm>
+            <a:off x="548640" y="5468112"/>
+            <a:ext cx="11094415" cy="0"/>
+          </a:xfrm>
+          <a:prstGeom prst="line">
+            <a:avLst/>
+          </a:prstGeom>
+          <a:noFill/>
+          <a:ln w="9525">
+            <a:solidFill>
+              <a:srgbClr val="E5E5E2"/>
+            </a:solidFill>
+            <a:prstDash val="solid"/>
+          </a:ln>
+        </p:spPr>
+      </p:sp>
+      <p:sp>
+        <p:nvSpPr>
+          <p:cNvPr id="19" name="Text 17"/>
+          <p:cNvSpPr/>
+          <p:nvPr/>
+        </p:nvSpPr>
+        <p:spPr>
+          <a:xfrm>
+            <a:off x="548640" y="5577840"/>
+            <a:ext cx="914400" cy="457200"/>
+          </a:xfrm>
+          <a:prstGeom prst="rect">
+            <a:avLst/>
+          </a:prstGeom>
+          <a:noFill/>
+          <a:ln/>
+        </p:spPr>
+        <p:txBody>
+          <a:bodyPr wrap="square" rtlCol="0" anchor="ctr"/>
+          <a:lstStyle/>
+          <a:p>
+            <a:pPr indent="0" marL="0">
+              <a:buNone/>
+            </a:pPr>
+            <a:r>
+              <a:rPr lang="en-US" sz="1400" b="1" dirty="0">
+                <a:solidFill>
+                  <a:srgbClr val="3B82F6"/>
+                </a:solidFill>
+                <a:latin typeface="IBM Plex Mono" pitchFamily="34" charset="0"/>
+                <a:ea typeface="IBM Plex Mono" pitchFamily="34" charset="-122"/>
+                <a:cs typeface="IBM Plex Mono" pitchFamily="34" charset="-120"/>
+              </a:rPr>
+              <a:t>M6</a:t>
+            </a:r>
+            <a:endParaRPr lang="en-US" sz="1400" dirty="0"/>
+          </a:p>
+        </p:txBody>
+      </p:sp>
+      <p:sp>
+        <p:nvSpPr>
+          <p:cNvPr id="20" name="Text 18"/>
+          <p:cNvSpPr/>
+          <p:nvPr/>
+        </p:nvSpPr>
+        <p:spPr>
+          <a:xfrm>
+            <a:off x="1645920" y="5577840"/>
+            <a:ext cx="10058400" cy="457200"/>
+          </a:xfrm>
+          <a:prstGeom prst="rect">
+            <a:avLst/>
+          </a:prstGeom>
+          <a:noFill/>
+          <a:ln/>
+        </p:spPr>
+        <p:txBody>
+          <a:bodyPr wrap="square" rtlCol="0" anchor="ctr"/>
+          <a:lstStyle/>
+          <a:p>
+            <a:pPr indent="0" marL="0">
+              <a:buNone/>
+            </a:pPr>
+            <a:r>
+              <a:rPr lang="en-US" sz="1800" dirty="0">
+                <a:solidFill>
+                  <a:srgbClr val="111418"/>
+                </a:solidFill>
+                <a:latin typeface="Trebuchet MS" pitchFamily="34" charset="0"/>
+                <a:ea typeface="Trebuchet MS" pitchFamily="34" charset="-122"/>
+                <a:cs typeface="Trebuchet MS" pitchFamily="34" charset="-120"/>
+              </a:rPr>
+              <a:t>Documentation, demo video, 3-year roadmap.</a:t>
+            </a:r>
+            <a:endParaRPr lang="en-US" sz="1800" dirty="0"/>
+          </a:p>
+        </p:txBody>
+      </p:sp>
+      <p:sp>
+        <p:nvSpPr>
+          <p:cNvPr id="21" name="Shape 19"/>
+          <p:cNvSpPr/>
+          <p:nvPr/>
+        </p:nvSpPr>
+        <p:spPr>
+          <a:xfrm>
+            <a:off x="548640" y="6126480"/>
+            <a:ext cx="11094415" cy="0"/>
+          </a:xfrm>
+          <a:prstGeom prst="line">
+            <a:avLst/>
+          </a:prstGeom>
+          <a:noFill/>
+          <a:ln w="9525">
+            <a:solidFill>
+              <a:srgbClr val="E5E5E2"/>
+            </a:solidFill>
+            <a:prstDash val="solid"/>
+          </a:ln>
+        </p:spPr>
+      </p:sp>
+      <p:sp>
+        <p:nvSpPr>
+          <p:cNvPr id="22" name="Text 20"/>
+          <p:cNvSpPr/>
+          <p:nvPr/>
+        </p:nvSpPr>
+        <p:spPr>
+          <a:xfrm>
+            <a:off x="10728655" y="6400800"/>
+            <a:ext cx="1097280" cy="274320"/>
+          </a:xfrm>
+          <a:prstGeom prst="rect">
+            <a:avLst/>
+          </a:prstGeom>
+          <a:noFill/>
+          <a:ln/>
+        </p:spPr>
+        <p:txBody>
+          <a:bodyPr wrap="square" rtlCol="0" anchor="ctr"/>
+          <a:lstStyle/>
+          <a:p>
+            <a:pPr algn="r" indent="0" marL="0">
+              <a:buNone/>
+            </a:pPr>
+            <a:r>
+              <a:rPr lang="en-US" sz="900" dirty="0">
+                <a:solidFill>
+                  <a:srgbClr val="5B6068"/>
+                </a:solidFill>
+                <a:latin typeface="IBM Plex Mono" pitchFamily="34" charset="0"/>
+                <a:ea typeface="IBM Plex Mono" pitchFamily="34" charset="-122"/>
+                <a:cs typeface="IBM Plex Mono" pitchFamily="34" charset="-120"/>
+              </a:rPr>
+              <a:t>09 / 14</a:t>
             </a:r>
             <a:endParaRPr lang="en-US" sz="900" dirty="0"/>
           </a:p>
@@ -8257,7 +8058,7 @@
       </p:sp>
       <p:sp>
         <p:nvSpPr>
-          <p:cNvPr id="6" name="Text 4"/>
+          <p:cNvPr id="23" name="Text 21"/>
           <p:cNvSpPr/>
           <p:nvPr/>
         </p:nvSpPr>
@@ -8282,7 +8083,7 @@
             <a:r>
               <a:rPr lang="en-US" sz="900" spc="600" kern="0" dirty="0">
                 <a:solidFill>
-                  <a:srgbClr val="6B7077"/>
+                  <a:srgbClr val="5B6068"/>
                 </a:solidFill>
                 <a:latin typeface="IBM Plex Mono" pitchFamily="34" charset="0"/>
                 <a:ea typeface="IBM Plex Mono" pitchFamily="34" charset="-122"/>

--- a/public/aral3d-presentation.pptx
+++ b/public/aral3d-presentation.pptx
@@ -19,9 +19,10 @@
     <p:sldId id="267" r:id="rId13"/>
     <p:sldId id="268" r:id="rId14"/>
     <p:sldId id="269" r:id="rId15"/>
+    <p:sldId id="270" r:id="rId16"/>
   </p:sldIdLst>
   <p:notesMasterIdLst>
-    <p:notesMasterId r:id="rId16"/>
+    <p:notesMasterId r:id="rId17"/>
   </p:notesMasterIdLst>
   <p:sldSz cx="12192000" cy="6858000"/>
   <p:notesSz cx="6858000" cy="12192000"/>
@@ -979,6 +980,94 @@
             <a:fld id="{F7021451-1387-4CA6-816F-3879F97B5CBC}" type="slidenum">
               <a:rPr lang="en-US"/>
               <a:t>14</a:t>
+            </a:fld>
+            <a:endParaRPr lang="en-US"/>
+          </a:p>
+        </p:txBody>
+      </p:sp>
+    </p:spTree>
+    <p:extLst>
+      <p:ext uri="{BB962C8B-B14F-4D97-AF65-F5344CB8AC3E}">
+        <p14:creationId xmlns:p14="http://schemas.microsoft.com/office/powerpoint/2010/main" val="1024086991"/>
+      </p:ext>
+    </p:extLst>
+  </p:cSld>
+  <p:clrMapOvr>
+    <a:masterClrMapping/>
+  </p:clrMapOvr>
+</p:notes>
+</file>
+
+<file path=ppt/notesSlides/notesSlide15.xml><?xml version="1.0" encoding="utf-8"?>
+<p:notes xmlns:a="http://schemas.openxmlformats.org/drawingml/2006/main" xmlns:r="http://schemas.openxmlformats.org/officeDocument/2006/relationships" xmlns:p="http://schemas.openxmlformats.org/presentationml/2006/main">
+  <p:cSld>
+    <p:spTree>
+      <p:nvGrpSpPr>
+        <p:cNvPr id="1" name=""/>
+        <p:cNvGrpSpPr/>
+        <p:nvPr/>
+      </p:nvGrpSpPr>
+      <p:grpSpPr>
+        <a:xfrm>
+          <a:off x="0" y="0"/>
+          <a:ext cx="0" cy="0"/>
+          <a:chOff x="0" y="0"/>
+          <a:chExt cx="0" cy="0"/>
+        </a:xfrm>
+      </p:grpSpPr>
+      <p:sp>
+        <p:nvSpPr>
+          <p:cNvPr id="2" name="Slide Image Placeholder 1"/>
+          <p:cNvSpPr>
+            <a:spLocks noGrp="1" noRot="1" noChangeAspect="1"/>
+          </p:cNvSpPr>
+          <p:nvPr>
+            <p:ph type="sldImg"/>
+          </p:nvPr>
+        </p:nvSpPr>
+        <p:spPr/>
+      </p:sp>
+      <p:sp>
+        <p:nvSpPr>
+          <p:cNvPr id="3" name="Notes Placeholder 2"/>
+          <p:cNvSpPr>
+            <a:spLocks noGrp="1"/>
+          </p:cNvSpPr>
+          <p:nvPr>
+            <p:ph type="body" idx="1"/>
+          </p:nvPr>
+        </p:nvSpPr>
+        <p:spPr/>
+        <p:txBody>
+          <a:bodyPr/>
+          <a:lstStyle/>
+          <a:p>
+            <a:r>
+              <a:rPr lang="en-US" dirty="0"/>
+              <a:t/>
+            </a:r>
+            <a:endParaRPr lang="en-US" dirty="0"/>
+          </a:p>
+        </p:txBody>
+      </p:sp>
+      <p:sp>
+        <p:nvSpPr>
+          <p:cNvPr id="4" name="Slide Number Placeholder 3"/>
+          <p:cNvSpPr>
+            <a:spLocks noGrp="1"/>
+          </p:cNvSpPr>
+          <p:nvPr>
+            <p:ph type="sldNum" sz="quarter" idx="10"/>
+          </p:nvPr>
+        </p:nvSpPr>
+        <p:spPr/>
+        <p:txBody>
+          <a:bodyPr/>
+          <a:lstStyle/>
+          <a:p>
+            <a:fld id="{F7021451-1387-4CA6-816F-3879F97B5CBC}" type="slidenum">
+              <a:rPr lang="en-US"/>
+              <a:t>15</a:t>
             </a:fld>
             <a:endParaRPr lang="en-US"/>
           </a:p>
@@ -2014,7 +2103,7 @@
     <p:bg>
       <p:bgPr>
         <a:solidFill>
-          <a:srgbClr val="FFFFFF"/>
+          <a:srgbClr val="06080E"/>
         </a:solidFill>
       </p:bgPr>
     </p:bg>
@@ -2040,34 +2129,34 @@
         </p:nvSpPr>
         <p:spPr>
           <a:xfrm>
-            <a:off x="548640" y="457200"/>
-            <a:ext cx="7315200" cy="274320"/>
-          </a:xfrm>
-          <a:prstGeom prst="rect">
-            <a:avLst/>
-          </a:prstGeom>
-          <a:noFill/>
-          <a:ln/>
-        </p:spPr>
-        <p:txBody>
-          <a:bodyPr wrap="square" rtlCol="0" anchor="ctr"/>
-          <a:lstStyle/>
-          <a:p>
-            <a:pPr indent="0" marL="0">
-              <a:buNone/>
-            </a:pPr>
-            <a:r>
-              <a:rPr lang="en-US" sz="1000" b="1" spc="1200" kern="0" dirty="0">
-                <a:solidFill>
-                  <a:srgbClr val="3B82F6"/>
+            <a:off x="548640" y="1463040"/>
+            <a:ext cx="10972800" cy="457200"/>
+          </a:xfrm>
+          <a:prstGeom prst="rect">
+            <a:avLst/>
+          </a:prstGeom>
+          <a:noFill/>
+          <a:ln/>
+        </p:spPr>
+        <p:txBody>
+          <a:bodyPr wrap="square" rtlCol="0" anchor="ctr"/>
+          <a:lstStyle/>
+          <a:p>
+            <a:pPr algn="ctr" indent="0" marL="0">
+              <a:buNone/>
+            </a:pPr>
+            <a:r>
+              <a:rPr lang="en-US" sz="1400" b="1" spc="2400" kern="0" dirty="0">
+                <a:solidFill>
+                  <a:srgbClr val="FFFFFF"/>
                 </a:solidFill>
                 <a:latin typeface="IBM Plex Mono" pitchFamily="34" charset="0"/>
                 <a:ea typeface="IBM Plex Mono" pitchFamily="34" charset="-122"/>
                 <a:cs typeface="IBM Plex Mono" pitchFamily="34" charset="-120"/>
               </a:rPr>
-              <a:t>ARAL SCHOOL · 2026</a:t>
-            </a:r>
-            <a:endParaRPr lang="en-US" sz="1000" dirty="0"/>
+              <a:t>LEVEL 00</a:t>
+            </a:r>
+            <a:endParaRPr lang="en-US" sz="1400" dirty="0"/>
           </a:p>
         </p:txBody>
       </p:sp>
@@ -2079,26 +2168,26 @@
         </p:nvSpPr>
         <p:spPr>
           <a:xfrm>
-            <a:off x="548640" y="1828800"/>
-            <a:ext cx="10972800" cy="1828800"/>
-          </a:xfrm>
-          <a:prstGeom prst="rect">
-            <a:avLst/>
-          </a:prstGeom>
-          <a:noFill/>
-          <a:ln/>
-        </p:spPr>
-        <p:txBody>
-          <a:bodyPr wrap="square" rtlCol="0" anchor="ctr"/>
-          <a:lstStyle/>
-          <a:p>
-            <a:pPr indent="0" marL="0">
-              <a:buNone/>
-            </a:pPr>
-            <a:r>
-              <a:rPr lang="en-US" sz="16000" b="1" spc="800" kern="0" dirty="0">
-                <a:solidFill>
-                  <a:srgbClr val="111418"/>
+            <a:off x="548640" y="2194560"/>
+            <a:ext cx="10972800" cy="2011680"/>
+          </a:xfrm>
+          <a:prstGeom prst="rect">
+            <a:avLst/>
+          </a:prstGeom>
+          <a:noFill/>
+          <a:ln/>
+        </p:spPr>
+        <p:txBody>
+          <a:bodyPr wrap="square" rtlCol="0" anchor="ctr"/>
+          <a:lstStyle/>
+          <a:p>
+            <a:pPr algn="ctr" indent="0" marL="0">
+              <a:buNone/>
+            </a:pPr>
+            <a:r>
+              <a:rPr lang="en-US" sz="20000" b="1" spc="800" kern="0" dirty="0">
+                <a:solidFill>
+                  <a:srgbClr val="FFFFFF"/>
                 </a:solidFill>
                 <a:latin typeface="Trebuchet MS" pitchFamily="34" charset="0"/>
                 <a:ea typeface="Trebuchet MS" pitchFamily="34" charset="-122"/>
@@ -2106,7 +2195,7 @@
               </a:rPr>
               <a:t>ARAL3D</a:t>
             </a:r>
-            <a:endParaRPr lang="en-US" sz="16000" dirty="0"/>
+            <a:endParaRPr lang="en-US" sz="20000" dirty="0"/>
           </a:p>
         </p:txBody>
       </p:sp>
@@ -2118,7 +2207,7 @@
         </p:nvSpPr>
         <p:spPr>
           <a:xfrm>
-            <a:off x="548640" y="4023360"/>
+            <a:off x="548640" y="4572000"/>
             <a:ext cx="10972800" cy="640080"/>
           </a:xfrm>
           <a:prstGeom prst="rect">
@@ -2131,13 +2220,13 @@
           <a:bodyPr wrap="square" rtlCol="0" anchor="ctr"/>
           <a:lstStyle/>
           <a:p>
-            <a:pPr indent="0" marL="0">
+            <a:pPr algn="ctr" indent="0" marL="0">
               <a:buNone/>
             </a:pPr>
             <a:r>
               <a:rPr lang="en-US" sz="3200" i="1" dirty="0">
                 <a:solidFill>
-                  <a:srgbClr val="EC4899"/>
+                  <a:srgbClr val="F5F1FF"/>
                 </a:solidFill>
                 <a:latin typeface="Georgia" pitchFamily="34" charset="0"/>
                 <a:ea typeface="Georgia" pitchFamily="34" charset="-122"/>
@@ -2151,22 +2240,65 @@
       </p:sp>
       <p:sp>
         <p:nvSpPr>
-          <p:cNvPr id="5" name="Shape 3"/>
-          <p:cNvSpPr/>
-          <p:nvPr/>
-        </p:nvSpPr>
-        <p:spPr>
-          <a:xfrm>
-            <a:off x="548640" y="5120640"/>
-            <a:ext cx="11094415" cy="0"/>
-          </a:xfrm>
-          <a:prstGeom prst="line">
-            <a:avLst/>
-          </a:prstGeom>
-          <a:noFill/>
-          <a:ln w="9525">
+          <p:cNvPr id="5" name="Text 3"/>
+          <p:cNvSpPr/>
+          <p:nvPr/>
+        </p:nvSpPr>
+        <p:spPr>
+          <a:xfrm>
+            <a:off x="548640" y="5212080"/>
+            <a:ext cx="10972800" cy="640080"/>
+          </a:xfrm>
+          <a:prstGeom prst="rect">
+            <a:avLst/>
+          </a:prstGeom>
+          <a:noFill/>
+          <a:ln/>
+        </p:spPr>
+        <p:txBody>
+          <a:bodyPr wrap="square" rtlCol="0" anchor="ctr"/>
+          <a:lstStyle/>
+          <a:p>
+            <a:pPr algn="ctr" indent="0" marL="0">
+              <a:buNone/>
+            </a:pPr>
+            <a:r>
+              <a:rPr lang="en-US" sz="2800" i="1" dirty="0">
+                <a:solidFill>
+                  <a:srgbClr val="F5F1FF"/>
+                </a:solidFill>
+                <a:latin typeface="Georgia" pitchFamily="34" charset="0"/>
+                <a:ea typeface="Georgia" pitchFamily="34" charset="-122"/>
+                <a:cs typeface="Georgia" pitchFamily="34" charset="-120"/>
+              </a:rPr>
+              <a:t>An educational game and a data exploration tool.</a:t>
+            </a:r>
+            <a:endParaRPr lang="en-US" sz="2800" dirty="0"/>
+          </a:p>
+        </p:txBody>
+      </p:sp>
+      <p:sp>
+        <p:nvSpPr>
+          <p:cNvPr id="6" name="Shape 4"/>
+          <p:cNvSpPr/>
+          <p:nvPr/>
+        </p:nvSpPr>
+        <p:spPr>
+          <a:xfrm>
+            <a:off x="3992728" y="5989320"/>
+            <a:ext cx="4206240" cy="777240"/>
+          </a:xfrm>
+          <a:prstGeom prst="rect">
+            <a:avLst>
+              <a:gd name="adj" fmla="val 5882"/>
+            </a:avLst>
+          </a:prstGeom>
+          <a:solidFill>
+            <a:srgbClr val="0E1530"/>
+          </a:solidFill>
+          <a:ln w="25400">
             <a:solidFill>
-              <a:srgbClr val="E5E5E2"/>
+              <a:srgbClr val="3B82F6"/>
             </a:solidFill>
             <a:prstDash val="solid"/>
           </a:ln>
@@ -2174,79 +2306,104 @@
       </p:sp>
       <p:sp>
         <p:nvSpPr>
-          <p:cNvPr id="6" name="Text 4"/>
-          <p:cNvSpPr/>
-          <p:nvPr/>
-        </p:nvSpPr>
-        <p:spPr>
-          <a:xfrm>
-            <a:off x="548640" y="5303520"/>
-            <a:ext cx="10058400" cy="457200"/>
-          </a:xfrm>
-          <a:prstGeom prst="rect">
-            <a:avLst/>
-          </a:prstGeom>
-          <a:noFill/>
-          <a:ln/>
-        </p:spPr>
-        <p:txBody>
-          <a:bodyPr wrap="square" rtlCol="0" anchor="ctr"/>
-          <a:lstStyle/>
-          <a:p>
-            <a:pPr indent="0" marL="0">
-              <a:buNone/>
-            </a:pPr>
-            <a:r>
-              <a:rPr lang="en-US" sz="1300" dirty="0">
-                <a:solidFill>
-                  <a:srgbClr val="5B6068"/>
+          <p:cNvPr id="7" name="Shape 5"/>
+          <p:cNvSpPr/>
+          <p:nvPr/>
+        </p:nvSpPr>
+        <p:spPr>
+          <a:xfrm>
+            <a:off x="4157320" y="6108192"/>
+            <a:ext cx="548640" cy="548640"/>
+          </a:xfrm>
+          <a:prstGeom prst="ellipse">
+            <a:avLst/>
+          </a:prstGeom>
+          <a:solidFill>
+            <a:srgbClr val="3B82F6"/>
+          </a:solidFill>
+          <a:ln w="25400">
+            <a:solidFill>
+              <a:srgbClr val="3B82F6"/>
+            </a:solidFill>
+            <a:prstDash val="solid"/>
+          </a:ln>
+        </p:spPr>
+      </p:sp>
+      <p:sp>
+        <p:nvSpPr>
+          <p:cNvPr id="8" name="Text 6"/>
+          <p:cNvSpPr/>
+          <p:nvPr/>
+        </p:nvSpPr>
+        <p:spPr>
+          <a:xfrm>
+            <a:off x="4157320" y="6108192"/>
+            <a:ext cx="548640" cy="548640"/>
+          </a:xfrm>
+          <a:prstGeom prst="rect">
+            <a:avLst/>
+          </a:prstGeom>
+          <a:noFill/>
+          <a:ln/>
+        </p:spPr>
+        <p:txBody>
+          <a:bodyPr wrap="square" rtlCol="0" anchor="ctr"/>
+          <a:lstStyle/>
+          <a:p>
+            <a:pPr algn="ctr" indent="0" marL="0">
+              <a:buNone/>
+            </a:pPr>
+            <a:r>
+              <a:rPr lang="en-US" sz="1400" b="1" dirty="0">
+                <a:solidFill>
+                  <a:srgbClr val="FFFFFF"/>
                 </a:solidFill>
                 <a:latin typeface="IBM Plex Mono" pitchFamily="34" charset="0"/>
                 <a:ea typeface="IBM Plex Mono" pitchFamily="34" charset="-122"/>
                 <a:cs typeface="IBM Plex Mono" pitchFamily="34" charset="-120"/>
               </a:rPr>
-              <a:t>Free and public. An educational game and a data exploration tool.</a:t>
-            </a:r>
-            <a:endParaRPr lang="en-US" sz="1300" dirty="0"/>
-          </a:p>
-        </p:txBody>
-      </p:sp>
-      <p:sp>
-        <p:nvSpPr>
-          <p:cNvPr id="7" name="Text 5"/>
-          <p:cNvSpPr/>
-          <p:nvPr/>
-        </p:nvSpPr>
-        <p:spPr>
-          <a:xfrm>
-            <a:off x="548640" y="6400800"/>
-            <a:ext cx="5486400" cy="274320"/>
-          </a:xfrm>
-          <a:prstGeom prst="rect">
-            <a:avLst/>
-          </a:prstGeom>
-          <a:noFill/>
-          <a:ln/>
-        </p:spPr>
-        <p:txBody>
-          <a:bodyPr wrap="square" rtlCol="0" anchor="ctr"/>
-          <a:lstStyle/>
-          <a:p>
-            <a:pPr indent="0" marL="0">
-              <a:buNone/>
-            </a:pPr>
-            <a:r>
-              <a:rPr lang="en-US" sz="1000" spc="600" kern="0" dirty="0">
-                <a:solidFill>
-                  <a:srgbClr val="5B6068"/>
+              <a:t>3</a:t>
+            </a:r>
+            <a:endParaRPr lang="en-US" sz="1400" dirty="0"/>
+          </a:p>
+        </p:txBody>
+      </p:sp>
+      <p:sp>
+        <p:nvSpPr>
+          <p:cNvPr id="9" name="Text 7"/>
+          <p:cNvSpPr/>
+          <p:nvPr/>
+        </p:nvSpPr>
+        <p:spPr>
+          <a:xfrm>
+            <a:off x="4861408" y="6153912"/>
+            <a:ext cx="3246120" cy="457200"/>
+          </a:xfrm>
+          <a:prstGeom prst="rect">
+            <a:avLst/>
+          </a:prstGeom>
+          <a:noFill/>
+          <a:ln/>
+        </p:spPr>
+        <p:txBody>
+          <a:bodyPr wrap="square" rtlCol="0" anchor="ctr"/>
+          <a:lstStyle/>
+          <a:p>
+            <a:pPr indent="0" marL="0">
+              <a:buNone/>
+            </a:pPr>
+            <a:r>
+              <a:rPr lang="en-US" sz="1100" b="1" spc="800" kern="0" dirty="0">
+                <a:solidFill>
+                  <a:srgbClr val="FFFFFF"/>
                 </a:solidFill>
                 <a:latin typeface="IBM Plex Mono" pitchFamily="34" charset="0"/>
                 <a:ea typeface="IBM Plex Mono" pitchFamily="34" charset="-122"/>
                 <a:cs typeface="IBM Plex Mono" pitchFamily="34" charset="-120"/>
               </a:rPr>
-              <a:t>aral3d.com</a:t>
-            </a:r>
-            <a:endParaRPr lang="en-US" sz="1000" dirty="0"/>
+              <a:t>OR RB · PRESS TO BEGIN</a:t>
+            </a:r>
+            <a:endParaRPr lang="en-US" sz="1100" dirty="0"/>
           </a:p>
         </p:txBody>
       </p:sp>
@@ -2290,24 +2447,24 @@
         </p:nvSpPr>
         <p:spPr>
           <a:xfrm>
-            <a:off x="548640" y="457200"/>
-            <a:ext cx="9144000" cy="274320"/>
-          </a:xfrm>
-          <a:prstGeom prst="rect">
-            <a:avLst/>
-          </a:prstGeom>
-          <a:noFill/>
-          <a:ln/>
-        </p:spPr>
-        <p:txBody>
-          <a:bodyPr wrap="square" rtlCol="0" anchor="ctr"/>
-          <a:lstStyle/>
-          <a:p>
-            <a:pPr indent="0" marL="0">
-              <a:buNone/>
-            </a:pPr>
-            <a:r>
-              <a:rPr lang="en-US" sz="900" b="1" spc="800" kern="0" dirty="0">
+            <a:off x="548640" y="822960"/>
+            <a:ext cx="10972800" cy="365760"/>
+          </a:xfrm>
+          <a:prstGeom prst="rect">
+            <a:avLst/>
+          </a:prstGeom>
+          <a:noFill/>
+          <a:ln/>
+        </p:spPr>
+        <p:txBody>
+          <a:bodyPr wrap="square" rtlCol="0" anchor="ctr"/>
+          <a:lstStyle/>
+          <a:p>
+            <a:pPr indent="0" marL="0">
+              <a:buNone/>
+            </a:pPr>
+            <a:r>
+              <a:rPr lang="en-US" sz="1200" b="1" spc="1600" kern="0" dirty="0">
                 <a:solidFill>
                   <a:srgbClr val="3B82F6"/>
                 </a:solidFill>
@@ -2317,7 +2474,7 @@
               </a:rPr>
               <a:t>6-MONTH BUDGET</a:t>
             </a:r>
-            <a:endParaRPr lang="en-US" sz="900" dirty="0"/>
+            <a:endParaRPr lang="en-US" sz="1200" dirty="0"/>
           </a:p>
         </p:txBody>
       </p:sp>
@@ -2329,24 +2486,24 @@
         </p:nvSpPr>
         <p:spPr>
           <a:xfrm>
-            <a:off x="548640" y="914400"/>
-            <a:ext cx="10972800" cy="914400"/>
-          </a:xfrm>
-          <a:prstGeom prst="rect">
-            <a:avLst/>
-          </a:prstGeom>
-          <a:noFill/>
-          <a:ln/>
-        </p:spPr>
-        <p:txBody>
-          <a:bodyPr wrap="square" rtlCol="0" anchor="ctr"/>
-          <a:lstStyle/>
-          <a:p>
-            <a:pPr indent="0" marL="0">
-              <a:buNone/>
-            </a:pPr>
-            <a:r>
-              <a:rPr lang="en-US" sz="4800" b="1" spc="400" kern="0" dirty="0">
+            <a:off x="548640" y="1463040"/>
+            <a:ext cx="10972800" cy="1097280"/>
+          </a:xfrm>
+          <a:prstGeom prst="rect">
+            <a:avLst/>
+          </a:prstGeom>
+          <a:noFill/>
+          <a:ln/>
+        </p:spPr>
+        <p:txBody>
+          <a:bodyPr wrap="square" rtlCol="0" anchor="ctr"/>
+          <a:lstStyle/>
+          <a:p>
+            <a:pPr indent="0" marL="0">
+              <a:buNone/>
+            </a:pPr>
+            <a:r>
+              <a:rPr lang="en-US" sz="5600" b="1" spc="400" kern="0" dirty="0">
                 <a:solidFill>
                   <a:srgbClr val="111418"/>
                 </a:solidFill>
@@ -2356,7 +2513,7 @@
               </a:rPr>
               <a:t>WHERE IT GOES.</a:t>
             </a:r>
-            <a:endParaRPr lang="en-US" sz="4800" dirty="0"/>
+            <a:endParaRPr lang="en-US" sz="5600" dirty="0"/>
           </a:p>
         </p:txBody>
       </p:sp>
@@ -2368,7 +2525,7 @@
         </p:nvSpPr>
         <p:spPr>
           <a:xfrm>
-            <a:off x="548640" y="2194560"/>
+            <a:off x="548640" y="2834640"/>
             <a:ext cx="8229600" cy="457200"/>
           </a:xfrm>
           <a:prstGeom prst="rect">
@@ -2385,7 +2542,7 @@
               <a:buNone/>
             </a:pPr>
             <a:r>
-              <a:rPr lang="en-US" sz="1800" dirty="0">
+              <a:rPr lang="en-US" sz="2000" dirty="0">
                 <a:solidFill>
                   <a:srgbClr val="111418"/>
                 </a:solidFill>
@@ -2395,7 +2552,7 @@
               </a:rPr>
               <a:t>Product polishing and frontend</a:t>
             </a:r>
-            <a:endParaRPr lang="en-US" sz="1800" dirty="0"/>
+            <a:endParaRPr lang="en-US" sz="2000" dirty="0"/>
           </a:p>
         </p:txBody>
       </p:sp>
@@ -2407,7 +2564,7 @@
         </p:nvSpPr>
         <p:spPr>
           <a:xfrm>
-            <a:off x="8778240" y="2194560"/>
+            <a:off x="8778240" y="2834640"/>
             <a:ext cx="2926080" cy="457200"/>
           </a:xfrm>
           <a:prstGeom prst="rect">
@@ -2440,36 +2597,13 @@
       </p:sp>
       <p:sp>
         <p:nvSpPr>
-          <p:cNvPr id="6" name="Shape 4"/>
-          <p:cNvSpPr/>
-          <p:nvPr/>
-        </p:nvSpPr>
-        <p:spPr>
-          <a:xfrm>
-            <a:off x="548640" y="2743200"/>
-            <a:ext cx="11094415" cy="0"/>
-          </a:xfrm>
-          <a:prstGeom prst="line">
-            <a:avLst/>
-          </a:prstGeom>
-          <a:noFill/>
-          <a:ln w="9525">
-            <a:solidFill>
-              <a:srgbClr val="E5E5E2"/>
-            </a:solidFill>
-            <a:prstDash val="solid"/>
-          </a:ln>
-        </p:spPr>
-      </p:sp>
-      <p:sp>
-        <p:nvSpPr>
-          <p:cNvPr id="7" name="Text 5"/>
-          <p:cNvSpPr/>
-          <p:nvPr/>
-        </p:nvSpPr>
-        <p:spPr>
-          <a:xfrm>
-            <a:off x="548640" y="2761488"/>
+          <p:cNvPr id="6" name="Text 4"/>
+          <p:cNvSpPr/>
+          <p:nvPr/>
+        </p:nvSpPr>
+        <p:spPr>
+          <a:xfrm>
+            <a:off x="548640" y="3383280"/>
             <a:ext cx="8229600" cy="457200"/>
           </a:xfrm>
           <a:prstGeom prst="rect">
@@ -2486,7 +2620,7 @@
               <a:buNone/>
             </a:pPr>
             <a:r>
-              <a:rPr lang="en-US" sz="1800" dirty="0">
+              <a:rPr lang="en-US" sz="2000" dirty="0">
                 <a:solidFill>
                   <a:srgbClr val="111418"/>
                 </a:solidFill>
@@ -2496,19 +2630,19 @@
               </a:rPr>
               <a:t>Educational module and curriculum</a:t>
             </a:r>
-            <a:endParaRPr lang="en-US" sz="1800" dirty="0"/>
-          </a:p>
-        </p:txBody>
-      </p:sp>
-      <p:sp>
-        <p:nvSpPr>
-          <p:cNvPr id="8" name="Text 6"/>
-          <p:cNvSpPr/>
-          <p:nvPr/>
-        </p:nvSpPr>
-        <p:spPr>
-          <a:xfrm>
-            <a:off x="8778240" y="2761488"/>
+            <a:endParaRPr lang="en-US" sz="2000" dirty="0"/>
+          </a:p>
+        </p:txBody>
+      </p:sp>
+      <p:sp>
+        <p:nvSpPr>
+          <p:cNvPr id="7" name="Text 5"/>
+          <p:cNvSpPr/>
+          <p:nvPr/>
+        </p:nvSpPr>
+        <p:spPr>
+          <a:xfrm>
+            <a:off x="8778240" y="3383280"/>
             <a:ext cx="2926080" cy="457200"/>
           </a:xfrm>
           <a:prstGeom prst="rect">
@@ -2541,36 +2675,13 @@
       </p:sp>
       <p:sp>
         <p:nvSpPr>
-          <p:cNvPr id="9" name="Shape 7"/>
-          <p:cNvSpPr/>
-          <p:nvPr/>
-        </p:nvSpPr>
-        <p:spPr>
-          <a:xfrm>
-            <a:off x="548640" y="3310128"/>
-            <a:ext cx="11094415" cy="0"/>
-          </a:xfrm>
-          <a:prstGeom prst="line">
-            <a:avLst/>
-          </a:prstGeom>
-          <a:noFill/>
-          <a:ln w="9525">
-            <a:solidFill>
-              <a:srgbClr val="E5E5E2"/>
-            </a:solidFill>
-            <a:prstDash val="solid"/>
-          </a:ln>
-        </p:spPr>
-      </p:sp>
-      <p:sp>
-        <p:nvSpPr>
-          <p:cNvPr id="10" name="Text 8"/>
-          <p:cNvSpPr/>
-          <p:nvPr/>
-        </p:nvSpPr>
-        <p:spPr>
-          <a:xfrm>
-            <a:off x="548640" y="3328416"/>
+          <p:cNvPr id="8" name="Text 6"/>
+          <p:cNvSpPr/>
+          <p:nvPr/>
+        </p:nvSpPr>
+        <p:spPr>
+          <a:xfrm>
+            <a:off x="548640" y="3931920"/>
             <a:ext cx="8229600" cy="457200"/>
           </a:xfrm>
           <a:prstGeom prst="rect">
@@ -2587,7 +2698,7 @@
               <a:buNone/>
             </a:pPr>
             <a:r>
-              <a:rPr lang="en-US" sz="1800" dirty="0">
+              <a:rPr lang="en-US" sz="2000" dirty="0">
                 <a:solidFill>
                   <a:srgbClr val="111418"/>
                 </a:solidFill>
@@ -2597,19 +2708,19 @@
               </a:rPr>
               <a:t>Museum and exhibition adaptation</a:t>
             </a:r>
-            <a:endParaRPr lang="en-US" sz="1800" dirty="0"/>
-          </a:p>
-        </p:txBody>
-      </p:sp>
-      <p:sp>
-        <p:nvSpPr>
-          <p:cNvPr id="11" name="Text 9"/>
-          <p:cNvSpPr/>
-          <p:nvPr/>
-        </p:nvSpPr>
-        <p:spPr>
-          <a:xfrm>
-            <a:off x="8778240" y="3328416"/>
+            <a:endParaRPr lang="en-US" sz="2000" dirty="0"/>
+          </a:p>
+        </p:txBody>
+      </p:sp>
+      <p:sp>
+        <p:nvSpPr>
+          <p:cNvPr id="9" name="Text 7"/>
+          <p:cNvSpPr/>
+          <p:nvPr/>
+        </p:nvSpPr>
+        <p:spPr>
+          <a:xfrm>
+            <a:off x="8778240" y="3931920"/>
             <a:ext cx="2926080" cy="457200"/>
           </a:xfrm>
           <a:prstGeom prst="rect">
@@ -2642,36 +2753,13 @@
       </p:sp>
       <p:sp>
         <p:nvSpPr>
-          <p:cNvPr id="12" name="Shape 10"/>
-          <p:cNvSpPr/>
-          <p:nvPr/>
-        </p:nvSpPr>
-        <p:spPr>
-          <a:xfrm>
-            <a:off x="548640" y="3877056"/>
-            <a:ext cx="11094415" cy="0"/>
-          </a:xfrm>
-          <a:prstGeom prst="line">
-            <a:avLst/>
-          </a:prstGeom>
-          <a:noFill/>
-          <a:ln w="9525">
-            <a:solidFill>
-              <a:srgbClr val="E5E5E2"/>
-            </a:solidFill>
-            <a:prstDash val="solid"/>
-          </a:ln>
-        </p:spPr>
-      </p:sp>
-      <p:sp>
-        <p:nvSpPr>
-          <p:cNvPr id="13" name="Text 11"/>
-          <p:cNvSpPr/>
-          <p:nvPr/>
-        </p:nvSpPr>
-        <p:spPr>
-          <a:xfrm>
-            <a:off x="548640" y="3895344"/>
+          <p:cNvPr id="10" name="Text 8"/>
+          <p:cNvSpPr/>
+          <p:nvPr/>
+        </p:nvSpPr>
+        <p:spPr>
+          <a:xfrm>
+            <a:off x="548640" y="4480560"/>
             <a:ext cx="8229600" cy="457200"/>
           </a:xfrm>
           <a:prstGeom prst="rect">
@@ -2688,7 +2776,7 @@
               <a:buNone/>
             </a:pPr>
             <a:r>
-              <a:rPr lang="en-US" sz="1800" dirty="0">
+              <a:rPr lang="en-US" sz="2000" dirty="0">
                 <a:solidFill>
                   <a:srgbClr val="111418"/>
                 </a:solidFill>
@@ -2698,19 +2786,19 @@
               </a:rPr>
               <a:t>Visual and interface design</a:t>
             </a:r>
-            <a:endParaRPr lang="en-US" sz="1800" dirty="0"/>
-          </a:p>
-        </p:txBody>
-      </p:sp>
-      <p:sp>
-        <p:nvSpPr>
-          <p:cNvPr id="14" name="Text 12"/>
-          <p:cNvSpPr/>
-          <p:nvPr/>
-        </p:nvSpPr>
-        <p:spPr>
-          <a:xfrm>
-            <a:off x="8778240" y="3895344"/>
+            <a:endParaRPr lang="en-US" sz="2000" dirty="0"/>
+          </a:p>
+        </p:txBody>
+      </p:sp>
+      <p:sp>
+        <p:nvSpPr>
+          <p:cNvPr id="11" name="Text 9"/>
+          <p:cNvSpPr/>
+          <p:nvPr/>
+        </p:nvSpPr>
+        <p:spPr>
+          <a:xfrm>
+            <a:off x="8778240" y="4480560"/>
             <a:ext cx="2926080" cy="457200"/>
           </a:xfrm>
           <a:prstGeom prst="rect">
@@ -2743,36 +2831,13 @@
       </p:sp>
       <p:sp>
         <p:nvSpPr>
-          <p:cNvPr id="15" name="Shape 13"/>
-          <p:cNvSpPr/>
-          <p:nvPr/>
-        </p:nvSpPr>
-        <p:spPr>
-          <a:xfrm>
-            <a:off x="548640" y="4443984"/>
-            <a:ext cx="11094415" cy="0"/>
-          </a:xfrm>
-          <a:prstGeom prst="line">
-            <a:avLst/>
-          </a:prstGeom>
-          <a:noFill/>
-          <a:ln w="9525">
-            <a:solidFill>
-              <a:srgbClr val="E5E5E2"/>
-            </a:solidFill>
-            <a:prstDash val="solid"/>
-          </a:ln>
-        </p:spPr>
-      </p:sp>
-      <p:sp>
-        <p:nvSpPr>
-          <p:cNvPr id="16" name="Text 14"/>
-          <p:cNvSpPr/>
-          <p:nvPr/>
-        </p:nvSpPr>
-        <p:spPr>
-          <a:xfrm>
-            <a:off x="548640" y="4462272"/>
+          <p:cNvPr id="12" name="Text 10"/>
+          <p:cNvSpPr/>
+          <p:nvPr/>
+        </p:nvSpPr>
+        <p:spPr>
+          <a:xfrm>
+            <a:off x="548640" y="5029200"/>
             <a:ext cx="8229600" cy="457200"/>
           </a:xfrm>
           <a:prstGeom prst="rect">
@@ -2789,7 +2854,7 @@
               <a:buNone/>
             </a:pPr>
             <a:r>
-              <a:rPr lang="en-US" sz="1800" dirty="0">
+              <a:rPr lang="en-US" sz="2000" dirty="0">
                 <a:solidFill>
                   <a:srgbClr val="111418"/>
                 </a:solidFill>
@@ -2799,19 +2864,19 @@
               </a:rPr>
               <a:t>Documentation, video, materials</a:t>
             </a:r>
-            <a:endParaRPr lang="en-US" sz="1800" dirty="0"/>
-          </a:p>
-        </p:txBody>
-      </p:sp>
-      <p:sp>
-        <p:nvSpPr>
-          <p:cNvPr id="17" name="Text 15"/>
-          <p:cNvSpPr/>
-          <p:nvPr/>
-        </p:nvSpPr>
-        <p:spPr>
-          <a:xfrm>
-            <a:off x="8778240" y="4462272"/>
+            <a:endParaRPr lang="en-US" sz="2000" dirty="0"/>
+          </a:p>
+        </p:txBody>
+      </p:sp>
+      <p:sp>
+        <p:nvSpPr>
+          <p:cNvPr id="13" name="Text 11"/>
+          <p:cNvSpPr/>
+          <p:nvPr/>
+        </p:nvSpPr>
+        <p:spPr>
+          <a:xfrm>
+            <a:off x="8778240" y="5029200"/>
             <a:ext cx="2926080" cy="457200"/>
           </a:xfrm>
           <a:prstGeom prst="rect">
@@ -2844,36 +2909,13 @@
       </p:sp>
       <p:sp>
         <p:nvSpPr>
-          <p:cNvPr id="18" name="Shape 16"/>
-          <p:cNvSpPr/>
-          <p:nvPr/>
-        </p:nvSpPr>
-        <p:spPr>
-          <a:xfrm>
-            <a:off x="548640" y="5010912"/>
-            <a:ext cx="11094415" cy="0"/>
-          </a:xfrm>
-          <a:prstGeom prst="line">
-            <a:avLst/>
-          </a:prstGeom>
-          <a:noFill/>
-          <a:ln w="9525">
-            <a:solidFill>
-              <a:srgbClr val="E5E5E2"/>
-            </a:solidFill>
-            <a:prstDash val="solid"/>
-          </a:ln>
-        </p:spPr>
-      </p:sp>
-      <p:sp>
-        <p:nvSpPr>
-          <p:cNvPr id="19" name="Text 17"/>
-          <p:cNvSpPr/>
-          <p:nvPr/>
-        </p:nvSpPr>
-        <p:spPr>
-          <a:xfrm>
-            <a:off x="548640" y="5029200"/>
+          <p:cNvPr id="14" name="Text 12"/>
+          <p:cNvSpPr/>
+          <p:nvPr/>
+        </p:nvSpPr>
+        <p:spPr>
+          <a:xfrm>
+            <a:off x="548640" y="5577840"/>
             <a:ext cx="8229600" cy="457200"/>
           </a:xfrm>
           <a:prstGeom prst="rect">
@@ -2890,7 +2932,7 @@
               <a:buNone/>
             </a:pPr>
             <a:r>
-              <a:rPr lang="en-US" sz="1800" dirty="0">
+              <a:rPr lang="en-US" sz="2000" dirty="0">
                 <a:solidFill>
                   <a:srgbClr val="111418"/>
                 </a:solidFill>
@@ -2900,19 +2942,19 @@
               </a:rPr>
               <a:t>Coordination and production</a:t>
             </a:r>
-            <a:endParaRPr lang="en-US" sz="1800" dirty="0"/>
-          </a:p>
-        </p:txBody>
-      </p:sp>
-      <p:sp>
-        <p:nvSpPr>
-          <p:cNvPr id="20" name="Text 18"/>
-          <p:cNvSpPr/>
-          <p:nvPr/>
-        </p:nvSpPr>
-        <p:spPr>
-          <a:xfrm>
-            <a:off x="8778240" y="5029200"/>
+            <a:endParaRPr lang="en-US" sz="2000" dirty="0"/>
+          </a:p>
+        </p:txBody>
+      </p:sp>
+      <p:sp>
+        <p:nvSpPr>
+          <p:cNvPr id="15" name="Text 13"/>
+          <p:cNvSpPr/>
+          <p:nvPr/>
+        </p:nvSpPr>
+        <p:spPr>
+          <a:xfrm>
+            <a:off x="8778240" y="5577840"/>
             <a:ext cx="2926080" cy="457200"/>
           </a:xfrm>
           <a:prstGeom prst="rect">
@@ -2945,36 +2987,13 @@
       </p:sp>
       <p:sp>
         <p:nvSpPr>
-          <p:cNvPr id="21" name="Shape 19"/>
-          <p:cNvSpPr/>
-          <p:nvPr/>
-        </p:nvSpPr>
-        <p:spPr>
-          <a:xfrm>
-            <a:off x="548640" y="5577840"/>
-            <a:ext cx="11094415" cy="0"/>
-          </a:xfrm>
-          <a:prstGeom prst="line">
-            <a:avLst/>
-          </a:prstGeom>
-          <a:noFill/>
-          <a:ln w="9525">
-            <a:solidFill>
-              <a:srgbClr val="E5E5E2"/>
-            </a:solidFill>
-            <a:prstDash val="solid"/>
-          </a:ln>
-        </p:spPr>
-      </p:sp>
-      <p:sp>
-        <p:nvSpPr>
-          <p:cNvPr id="22" name="Text 20"/>
-          <p:cNvSpPr/>
-          <p:nvPr/>
-        </p:nvSpPr>
-        <p:spPr>
-          <a:xfrm>
-            <a:off x="548640" y="5687568"/>
+          <p:cNvPr id="16" name="Text 14"/>
+          <p:cNvSpPr/>
+          <p:nvPr/>
+        </p:nvSpPr>
+        <p:spPr>
+          <a:xfrm>
+            <a:off x="548640" y="6263640"/>
             <a:ext cx="8229600" cy="457200"/>
           </a:xfrm>
           <a:prstGeom prst="rect">
@@ -2991,7 +3010,7 @@
               <a:buNone/>
             </a:pPr>
             <a:r>
-              <a:rPr lang="en-US" sz="1400" spc="800" kern="0" dirty="0">
+              <a:rPr lang="en-US" sz="1400" b="1" spc="1000" kern="0" dirty="0">
                 <a:solidFill>
                   <a:srgbClr val="5B6068"/>
                 </a:solidFill>
@@ -3007,13 +3026,13 @@
       </p:sp>
       <p:sp>
         <p:nvSpPr>
-          <p:cNvPr id="23" name="Text 21"/>
-          <p:cNvSpPr/>
-          <p:nvPr/>
-        </p:nvSpPr>
-        <p:spPr>
-          <a:xfrm>
-            <a:off x="8778240" y="5596128"/>
+          <p:cNvPr id="17" name="Text 15"/>
+          <p:cNvSpPr/>
+          <p:nvPr/>
+        </p:nvSpPr>
+        <p:spPr>
+          <a:xfrm>
+            <a:off x="8778240" y="6172200"/>
             <a:ext cx="2926080" cy="640080"/>
           </a:xfrm>
           <a:prstGeom prst="rect">
@@ -3030,7 +3049,7 @@
               <a:buNone/>
             </a:pPr>
             <a:r>
-              <a:rPr lang="en-US" sz="3000" b="1" spc="200" kern="0" dirty="0">
+              <a:rPr lang="en-US" sz="3200" b="1" spc="600" kern="0" dirty="0">
                 <a:solidFill>
                   <a:srgbClr val="EC4899"/>
                 </a:solidFill>
@@ -3040,85 +3059,7 @@
               </a:rPr>
               <a:t>$30,000</a:t>
             </a:r>
-            <a:endParaRPr lang="en-US" sz="3000" dirty="0"/>
-          </a:p>
-        </p:txBody>
-      </p:sp>
-      <p:sp>
-        <p:nvSpPr>
-          <p:cNvPr id="24" name="Text 22"/>
-          <p:cNvSpPr/>
-          <p:nvPr/>
-        </p:nvSpPr>
-        <p:spPr>
-          <a:xfrm>
-            <a:off x="10728655" y="6400800"/>
-            <a:ext cx="1097280" cy="274320"/>
-          </a:xfrm>
-          <a:prstGeom prst="rect">
-            <a:avLst/>
-          </a:prstGeom>
-          <a:noFill/>
-          <a:ln/>
-        </p:spPr>
-        <p:txBody>
-          <a:bodyPr wrap="square" rtlCol="0" anchor="ctr"/>
-          <a:lstStyle/>
-          <a:p>
-            <a:pPr algn="r" indent="0" marL="0">
-              <a:buNone/>
-            </a:pPr>
-            <a:r>
-              <a:rPr lang="en-US" sz="900" dirty="0">
-                <a:solidFill>
-                  <a:srgbClr val="5B6068"/>
-                </a:solidFill>
-                <a:latin typeface="IBM Plex Mono" pitchFamily="34" charset="0"/>
-                <a:ea typeface="IBM Plex Mono" pitchFamily="34" charset="-122"/>
-                <a:cs typeface="IBM Plex Mono" pitchFamily="34" charset="-120"/>
-              </a:rPr>
-              <a:t>10 / 14</a:t>
-            </a:r>
-            <a:endParaRPr lang="en-US" sz="900" dirty="0"/>
-          </a:p>
-        </p:txBody>
-      </p:sp>
-      <p:sp>
-        <p:nvSpPr>
-          <p:cNvPr id="25" name="Text 23"/>
-          <p:cNvSpPr/>
-          <p:nvPr/>
-        </p:nvSpPr>
-        <p:spPr>
-          <a:xfrm>
-            <a:off x="548640" y="6400800"/>
-            <a:ext cx="5486400" cy="274320"/>
-          </a:xfrm>
-          <a:prstGeom prst="rect">
-            <a:avLst/>
-          </a:prstGeom>
-          <a:noFill/>
-          <a:ln/>
-        </p:spPr>
-        <p:txBody>
-          <a:bodyPr wrap="square" rtlCol="0" anchor="ctr"/>
-          <a:lstStyle/>
-          <a:p>
-            <a:pPr indent="0" marL="0">
-              <a:buNone/>
-            </a:pPr>
-            <a:r>
-              <a:rPr lang="en-US" sz="900" spc="600" kern="0" dirty="0">
-                <a:solidFill>
-                  <a:srgbClr val="5B6068"/>
-                </a:solidFill>
-                <a:latin typeface="IBM Plex Mono" pitchFamily="34" charset="0"/>
-                <a:ea typeface="IBM Plex Mono" pitchFamily="34" charset="-122"/>
-                <a:cs typeface="IBM Plex Mono" pitchFamily="34" charset="-120"/>
-              </a:rPr>
-              <a:t>ARAL3D</a:t>
-            </a:r>
-            <a:endParaRPr lang="en-US" sz="900" dirty="0"/>
+            <a:endParaRPr lang="en-US" sz="3200" dirty="0"/>
           </a:p>
         </p:txBody>
       </p:sp>
@@ -3162,24 +3103,24 @@
         </p:nvSpPr>
         <p:spPr>
           <a:xfrm>
-            <a:off x="548640" y="457200"/>
-            <a:ext cx="9144000" cy="274320"/>
-          </a:xfrm>
-          <a:prstGeom prst="rect">
-            <a:avLst/>
-          </a:prstGeom>
-          <a:noFill/>
-          <a:ln/>
-        </p:spPr>
-        <p:txBody>
-          <a:bodyPr wrap="square" rtlCol="0" anchor="ctr"/>
-          <a:lstStyle/>
-          <a:p>
-            <a:pPr indent="0" marL="0">
-              <a:buNone/>
-            </a:pPr>
-            <a:r>
-              <a:rPr lang="en-US" sz="900" b="1" spc="800" kern="0" dirty="0">
+            <a:off x="548640" y="822960"/>
+            <a:ext cx="10972800" cy="365760"/>
+          </a:xfrm>
+          <a:prstGeom prst="rect">
+            <a:avLst/>
+          </a:prstGeom>
+          <a:noFill/>
+          <a:ln/>
+        </p:spPr>
+        <p:txBody>
+          <a:bodyPr wrap="square" rtlCol="0" anchor="ctr"/>
+          <a:lstStyle/>
+          <a:p>
+            <a:pPr indent="0" marL="0">
+              <a:buNone/>
+            </a:pPr>
+            <a:r>
+              <a:rPr lang="en-US" sz="1200" b="1" spc="1600" kern="0" dirty="0">
                 <a:solidFill>
                   <a:srgbClr val="3B82F6"/>
                 </a:solidFill>
@@ -3189,7 +3130,7 @@
               </a:rPr>
               <a:t>3-YEAR PLAN</a:t>
             </a:r>
-            <a:endParaRPr lang="en-US" sz="900" dirty="0"/>
+            <a:endParaRPr lang="en-US" sz="1200" dirty="0"/>
           </a:p>
         </p:txBody>
       </p:sp>
@@ -3201,24 +3142,24 @@
         </p:nvSpPr>
         <p:spPr>
           <a:xfrm>
-            <a:off x="548640" y="914400"/>
-            <a:ext cx="10972800" cy="914400"/>
-          </a:xfrm>
-          <a:prstGeom prst="rect">
-            <a:avLst/>
-          </a:prstGeom>
-          <a:noFill/>
-          <a:ln/>
-        </p:spPr>
-        <p:txBody>
-          <a:bodyPr wrap="square" rtlCol="0" anchor="ctr"/>
-          <a:lstStyle/>
-          <a:p>
-            <a:pPr indent="0" marL="0">
-              <a:buNone/>
-            </a:pPr>
-            <a:r>
-              <a:rPr lang="en-US" sz="4800" b="1" spc="400" kern="0" dirty="0">
+            <a:off x="548640" y="1463040"/>
+            <a:ext cx="10972800" cy="1097280"/>
+          </a:xfrm>
+          <a:prstGeom prst="rect">
+            <a:avLst/>
+          </a:prstGeom>
+          <a:noFill/>
+          <a:ln/>
+        </p:spPr>
+        <p:txBody>
+          <a:bodyPr wrap="square" rtlCol="0" anchor="ctr"/>
+          <a:lstStyle/>
+          <a:p>
+            <a:pPr indent="0" marL="0">
+              <a:buNone/>
+            </a:pPr>
+            <a:r>
+              <a:rPr lang="en-US" sz="5600" b="1" spc="400" kern="0" dirty="0">
                 <a:solidFill>
                   <a:srgbClr val="111418"/>
                 </a:solidFill>
@@ -3228,7 +3169,7 @@
               </a:rPr>
               <a:t>$150K · 3 YEARS.</a:t>
             </a:r>
-            <a:endParaRPr lang="en-US" sz="4800" dirty="0"/>
+            <a:endParaRPr lang="en-US" sz="5600" dirty="0"/>
           </a:p>
         </p:txBody>
       </p:sp>
@@ -3240,7 +3181,7 @@
         </p:nvSpPr>
         <p:spPr>
           <a:xfrm>
-            <a:off x="548640" y="2560320"/>
+            <a:off x="548640" y="3108960"/>
             <a:ext cx="1097280" cy="548640"/>
           </a:xfrm>
           <a:prstGeom prst="rect">
@@ -3257,7 +3198,7 @@
               <a:buNone/>
             </a:pPr>
             <a:r>
-              <a:rPr lang="en-US" sz="2000" b="1" dirty="0">
+              <a:rPr lang="en-US" sz="2200" b="1" dirty="0">
                 <a:solidFill>
                   <a:srgbClr val="3B82F6"/>
                 </a:solidFill>
@@ -3267,7 +3208,7 @@
               </a:rPr>
               <a:t>Y1</a:t>
             </a:r>
-            <a:endParaRPr lang="en-US" sz="2000" dirty="0"/>
+            <a:endParaRPr lang="en-US" sz="2200" dirty="0"/>
           </a:p>
         </p:txBody>
       </p:sp>
@@ -3279,7 +3220,7 @@
         </p:nvSpPr>
         <p:spPr>
           <a:xfrm>
-            <a:off x="1828800" y="2560320"/>
+            <a:off x="1828800" y="3108960"/>
             <a:ext cx="10058400" cy="640080"/>
           </a:xfrm>
           <a:prstGeom prst="rect">
@@ -3296,7 +3237,7 @@
               <a:buNone/>
             </a:pPr>
             <a:r>
-              <a:rPr lang="en-US" sz="2000" dirty="0">
+              <a:rPr lang="en-US" sz="2200" dirty="0">
                 <a:solidFill>
                   <a:srgbClr val="111418"/>
                 </a:solidFill>
@@ -3306,7 +3247,7 @@
               </a:rPr>
               <a:t>Curriculum alignment, school pilots, museum installations.</a:t>
             </a:r>
-            <a:endParaRPr lang="en-US" sz="2000" dirty="0"/>
+            <a:endParaRPr lang="en-US" sz="2200" dirty="0"/>
           </a:p>
         </p:txBody>
       </p:sp>
@@ -3318,7 +3259,7 @@
         </p:nvSpPr>
         <p:spPr>
           <a:xfrm>
-            <a:off x="548640" y="3566160"/>
+            <a:off x="548640" y="4114800"/>
             <a:ext cx="1097280" cy="548640"/>
           </a:xfrm>
           <a:prstGeom prst="rect">
@@ -3335,7 +3276,7 @@
               <a:buNone/>
             </a:pPr>
             <a:r>
-              <a:rPr lang="en-US" sz="2000" b="1" dirty="0">
+              <a:rPr lang="en-US" sz="2200" b="1" dirty="0">
                 <a:solidFill>
                   <a:srgbClr val="EC4899"/>
                 </a:solidFill>
@@ -3345,7 +3286,7 @@
               </a:rPr>
               <a:t>Y2</a:t>
             </a:r>
-            <a:endParaRPr lang="en-US" sz="2000" dirty="0"/>
+            <a:endParaRPr lang="en-US" sz="2200" dirty="0"/>
           </a:p>
         </p:txBody>
       </p:sp>
@@ -3357,7 +3298,7 @@
         </p:nvSpPr>
         <p:spPr>
           <a:xfrm>
-            <a:off x="1828800" y="3566160"/>
+            <a:off x="1828800" y="4114800"/>
             <a:ext cx="10058400" cy="640080"/>
           </a:xfrm>
           <a:prstGeom prst="rect">
@@ -3374,7 +3315,7 @@
               <a:buNone/>
             </a:pPr>
             <a:r>
-              <a:rPr lang="en-US" sz="2000" dirty="0">
+              <a:rPr lang="en-US" sz="2200" dirty="0">
                 <a:solidFill>
                   <a:srgbClr val="111418"/>
                 </a:solidFill>
@@ -3384,7 +3325,7 @@
               </a:rPr>
               <a:t>New learning modules, exhibition formats, regional stories.</a:t>
             </a:r>
-            <a:endParaRPr lang="en-US" sz="2000" dirty="0"/>
+            <a:endParaRPr lang="en-US" sz="2200" dirty="0"/>
           </a:p>
         </p:txBody>
       </p:sp>
@@ -3396,7 +3337,7 @@
         </p:nvSpPr>
         <p:spPr>
           <a:xfrm>
-            <a:off x="548640" y="4572000"/>
+            <a:off x="548640" y="5120640"/>
             <a:ext cx="1097280" cy="548640"/>
           </a:xfrm>
           <a:prstGeom prst="rect">
@@ -3413,7 +3354,7 @@
               <a:buNone/>
             </a:pPr>
             <a:r>
-              <a:rPr lang="en-US" sz="2000" b="1" dirty="0">
+              <a:rPr lang="en-US" sz="2200" b="1" dirty="0">
                 <a:solidFill>
                   <a:srgbClr val="10B981"/>
                 </a:solidFill>
@@ -3423,7 +3364,7 @@
               </a:rPr>
               <a:t>Y3</a:t>
             </a:r>
-            <a:endParaRPr lang="en-US" sz="2000" dirty="0"/>
+            <a:endParaRPr lang="en-US" sz="2200" dirty="0"/>
           </a:p>
         </p:txBody>
       </p:sp>
@@ -3435,7 +3376,7 @@
         </p:nvSpPr>
         <p:spPr>
           <a:xfrm>
-            <a:off x="1828800" y="4572000"/>
+            <a:off x="1828800" y="5120640"/>
             <a:ext cx="10058400" cy="640080"/>
           </a:xfrm>
           <a:prstGeom prst="rect">
@@ -3452,7 +3393,7 @@
               <a:buNone/>
             </a:pPr>
             <a:r>
-              <a:rPr lang="en-US" sz="2000" dirty="0">
+              <a:rPr lang="en-US" sz="2200" dirty="0">
                 <a:solidFill>
                   <a:srgbClr val="111418"/>
                 </a:solidFill>
@@ -3462,85 +3403,7 @@
               </a:rPr>
               <a:t>Free public platform for education, culture and ecology.</a:t>
             </a:r>
-            <a:endParaRPr lang="en-US" sz="2000" dirty="0"/>
-          </a:p>
-        </p:txBody>
-      </p:sp>
-      <p:sp>
-        <p:nvSpPr>
-          <p:cNvPr id="10" name="Text 8"/>
-          <p:cNvSpPr/>
-          <p:nvPr/>
-        </p:nvSpPr>
-        <p:spPr>
-          <a:xfrm>
-            <a:off x="10728655" y="6400800"/>
-            <a:ext cx="1097280" cy="274320"/>
-          </a:xfrm>
-          <a:prstGeom prst="rect">
-            <a:avLst/>
-          </a:prstGeom>
-          <a:noFill/>
-          <a:ln/>
-        </p:spPr>
-        <p:txBody>
-          <a:bodyPr wrap="square" rtlCol="0" anchor="ctr"/>
-          <a:lstStyle/>
-          <a:p>
-            <a:pPr algn="r" indent="0" marL="0">
-              <a:buNone/>
-            </a:pPr>
-            <a:r>
-              <a:rPr lang="en-US" sz="900" dirty="0">
-                <a:solidFill>
-                  <a:srgbClr val="5B6068"/>
-                </a:solidFill>
-                <a:latin typeface="IBM Plex Mono" pitchFamily="34" charset="0"/>
-                <a:ea typeface="IBM Plex Mono" pitchFamily="34" charset="-122"/>
-                <a:cs typeface="IBM Plex Mono" pitchFamily="34" charset="-120"/>
-              </a:rPr>
-              <a:t>11 / 14</a:t>
-            </a:r>
-            <a:endParaRPr lang="en-US" sz="900" dirty="0"/>
-          </a:p>
-        </p:txBody>
-      </p:sp>
-      <p:sp>
-        <p:nvSpPr>
-          <p:cNvPr id="11" name="Text 9"/>
-          <p:cNvSpPr/>
-          <p:nvPr/>
-        </p:nvSpPr>
-        <p:spPr>
-          <a:xfrm>
-            <a:off x="548640" y="6400800"/>
-            <a:ext cx="5486400" cy="274320"/>
-          </a:xfrm>
-          <a:prstGeom prst="rect">
-            <a:avLst/>
-          </a:prstGeom>
-          <a:noFill/>
-          <a:ln/>
-        </p:spPr>
-        <p:txBody>
-          <a:bodyPr wrap="square" rtlCol="0" anchor="ctr"/>
-          <a:lstStyle/>
-          <a:p>
-            <a:pPr indent="0" marL="0">
-              <a:buNone/>
-            </a:pPr>
-            <a:r>
-              <a:rPr lang="en-US" sz="900" spc="600" kern="0" dirty="0">
-                <a:solidFill>
-                  <a:srgbClr val="5B6068"/>
-                </a:solidFill>
-                <a:latin typeface="IBM Plex Mono" pitchFamily="34" charset="0"/>
-                <a:ea typeface="IBM Plex Mono" pitchFamily="34" charset="-122"/>
-                <a:cs typeface="IBM Plex Mono" pitchFamily="34" charset="-120"/>
-              </a:rPr>
-              <a:t>ARAL3D</a:t>
-            </a:r>
-            <a:endParaRPr lang="en-US" sz="900" dirty="0"/>
+            <a:endParaRPr lang="en-US" sz="2200" dirty="0"/>
           </a:p>
         </p:txBody>
       </p:sp>
@@ -3584,24 +3447,24 @@
         </p:nvSpPr>
         <p:spPr>
           <a:xfrm>
-            <a:off x="548640" y="457200"/>
-            <a:ext cx="9144000" cy="274320"/>
-          </a:xfrm>
-          <a:prstGeom prst="rect">
-            <a:avLst/>
-          </a:prstGeom>
-          <a:noFill/>
-          <a:ln/>
-        </p:spPr>
-        <p:txBody>
-          <a:bodyPr wrap="square" rtlCol="0" anchor="ctr"/>
-          <a:lstStyle/>
-          <a:p>
-            <a:pPr indent="0" marL="0">
-              <a:buNone/>
-            </a:pPr>
-            <a:r>
-              <a:rPr lang="en-US" sz="900" b="1" spc="800" kern="0" dirty="0">
+            <a:off x="548640" y="822960"/>
+            <a:ext cx="10972800" cy="365760"/>
+          </a:xfrm>
+          <a:prstGeom prst="rect">
+            <a:avLst/>
+          </a:prstGeom>
+          <a:noFill/>
+          <a:ln/>
+        </p:spPr>
+        <p:txBody>
+          <a:bodyPr wrap="square" rtlCol="0" anchor="ctr"/>
+          <a:lstStyle/>
+          <a:p>
+            <a:pPr indent="0" marL="0">
+              <a:buNone/>
+            </a:pPr>
+            <a:r>
+              <a:rPr lang="en-US" sz="1200" b="1" spc="1600" kern="0" dirty="0">
                 <a:solidFill>
                   <a:srgbClr val="3B82F6"/>
                 </a:solidFill>
@@ -3611,7 +3474,7 @@
               </a:rPr>
               <a:t>WHERE IT GOES</a:t>
             </a:r>
-            <a:endParaRPr lang="en-US" sz="900" dirty="0"/>
+            <a:endParaRPr lang="en-US" sz="1200" dirty="0"/>
           </a:p>
         </p:txBody>
       </p:sp>
@@ -3623,24 +3486,24 @@
         </p:nvSpPr>
         <p:spPr>
           <a:xfrm>
-            <a:off x="548640" y="914400"/>
-            <a:ext cx="10972800" cy="914400"/>
-          </a:xfrm>
-          <a:prstGeom prst="rect">
-            <a:avLst/>
-          </a:prstGeom>
-          <a:noFill/>
-          <a:ln/>
-        </p:spPr>
-        <p:txBody>
-          <a:bodyPr wrap="square" rtlCol="0" anchor="ctr"/>
-          <a:lstStyle/>
-          <a:p>
-            <a:pPr indent="0" marL="0">
-              <a:buNone/>
-            </a:pPr>
-            <a:r>
-              <a:rPr lang="en-US" sz="4800" b="1" spc="400" kern="0" dirty="0">
+            <a:off x="548640" y="1463040"/>
+            <a:ext cx="10972800" cy="1097280"/>
+          </a:xfrm>
+          <a:prstGeom prst="rect">
+            <a:avLst/>
+          </a:prstGeom>
+          <a:noFill/>
+          <a:ln/>
+        </p:spPr>
+        <p:txBody>
+          <a:bodyPr wrap="square" rtlCol="0" anchor="ctr"/>
+          <a:lstStyle/>
+          <a:p>
+            <a:pPr indent="0" marL="0">
+              <a:buNone/>
+            </a:pPr>
+            <a:r>
+              <a:rPr lang="en-US" sz="5600" b="1" spc="400" kern="0" dirty="0">
                 <a:solidFill>
                   <a:srgbClr val="111418"/>
                 </a:solidFill>
@@ -3650,7 +3513,7 @@
               </a:rPr>
               <a:t>VENUES.</a:t>
             </a:r>
-            <a:endParaRPr lang="en-US" sz="4800" dirty="0"/>
+            <a:endParaRPr lang="en-US" sz="5600" dirty="0"/>
           </a:p>
         </p:txBody>
       </p:sp>
@@ -3662,7 +3525,7 @@
         </p:nvSpPr>
         <p:spPr>
           <a:xfrm>
-            <a:off x="548640" y="2377440"/>
+            <a:off x="548640" y="2926080"/>
             <a:ext cx="640080" cy="457200"/>
           </a:xfrm>
           <a:prstGeom prst="rect">
@@ -3679,7 +3542,7 @@
               <a:buNone/>
             </a:pPr>
             <a:r>
-              <a:rPr lang="en-US" sz="1100" b="1" dirty="0">
+              <a:rPr lang="en-US" sz="1300" b="1" dirty="0">
                 <a:solidFill>
                   <a:srgbClr val="3B82F6"/>
                 </a:solidFill>
@@ -3689,7 +3552,7 @@
               </a:rPr>
               <a:t>01</a:t>
             </a:r>
-            <a:endParaRPr lang="en-US" sz="1100" dirty="0"/>
+            <a:endParaRPr lang="en-US" sz="1300" dirty="0"/>
           </a:p>
         </p:txBody>
       </p:sp>
@@ -3701,7 +3564,7 @@
         </p:nvSpPr>
         <p:spPr>
           <a:xfrm>
-            <a:off x="1188720" y="2377440"/>
+            <a:off x="1188720" y="2926080"/>
             <a:ext cx="4846320" cy="457200"/>
           </a:xfrm>
           <a:prstGeom prst="rect">
@@ -3718,7 +3581,7 @@
               <a:buNone/>
             </a:pPr>
             <a:r>
-              <a:rPr lang="en-US" sz="1800" dirty="0">
+              <a:rPr lang="en-US" sz="2000" dirty="0">
                 <a:solidFill>
                   <a:srgbClr val="111418"/>
                 </a:solidFill>
@@ -3728,7 +3591,7 @@
               </a:rPr>
               <a:t>Aral Culture Summit 2026</a:t>
             </a:r>
-            <a:endParaRPr lang="en-US" sz="1800" dirty="0"/>
+            <a:endParaRPr lang="en-US" sz="2000" dirty="0"/>
           </a:p>
         </p:txBody>
       </p:sp>
@@ -3740,7 +3603,7 @@
         </p:nvSpPr>
         <p:spPr>
           <a:xfrm>
-            <a:off x="6217920" y="2377440"/>
+            <a:off x="6217920" y="2926080"/>
             <a:ext cx="640080" cy="457200"/>
           </a:xfrm>
           <a:prstGeom prst="rect">
@@ -3757,7 +3620,7 @@
               <a:buNone/>
             </a:pPr>
             <a:r>
-              <a:rPr lang="en-US" sz="1100" b="1" dirty="0">
+              <a:rPr lang="en-US" sz="1300" b="1" dirty="0">
                 <a:solidFill>
                   <a:srgbClr val="EC4899"/>
                 </a:solidFill>
@@ -3767,7 +3630,7 @@
               </a:rPr>
               <a:t>02</a:t>
             </a:r>
-            <a:endParaRPr lang="en-US" sz="1100" dirty="0"/>
+            <a:endParaRPr lang="en-US" sz="1300" dirty="0"/>
           </a:p>
         </p:txBody>
       </p:sp>
@@ -3779,7 +3642,7 @@
         </p:nvSpPr>
         <p:spPr>
           <a:xfrm>
-            <a:off x="6858000" y="2377440"/>
+            <a:off x="6858000" y="2926080"/>
             <a:ext cx="4846320" cy="457200"/>
           </a:xfrm>
           <a:prstGeom prst="rect">
@@ -3796,7 +3659,7 @@
               <a:buNone/>
             </a:pPr>
             <a:r>
-              <a:rPr lang="en-US" sz="1800" dirty="0">
+              <a:rPr lang="en-US" sz="2000" dirty="0">
                 <a:solidFill>
                   <a:srgbClr val="111418"/>
                 </a:solidFill>
@@ -3806,7 +3669,7 @@
               </a:rPr>
               <a:t>Savitsky Museum</a:t>
             </a:r>
-            <a:endParaRPr lang="en-US" sz="1800" dirty="0"/>
+            <a:endParaRPr lang="en-US" sz="2000" dirty="0"/>
           </a:p>
         </p:txBody>
       </p:sp>
@@ -3818,7 +3681,7 @@
         </p:nvSpPr>
         <p:spPr>
           <a:xfrm>
-            <a:off x="548640" y="3154680"/>
+            <a:off x="548640" y="3703320"/>
             <a:ext cx="640080" cy="457200"/>
           </a:xfrm>
           <a:prstGeom prst="rect">
@@ -3835,7 +3698,7 @@
               <a:buNone/>
             </a:pPr>
             <a:r>
-              <a:rPr lang="en-US" sz="1100" b="1" dirty="0">
+              <a:rPr lang="en-US" sz="1300" b="1" dirty="0">
                 <a:solidFill>
                   <a:srgbClr val="10B981"/>
                 </a:solidFill>
@@ -3845,7 +3708,7 @@
               </a:rPr>
               <a:t>03</a:t>
             </a:r>
-            <a:endParaRPr lang="en-US" sz="1100" dirty="0"/>
+            <a:endParaRPr lang="en-US" sz="1300" dirty="0"/>
           </a:p>
         </p:txBody>
       </p:sp>
@@ -3857,7 +3720,7 @@
         </p:nvSpPr>
         <p:spPr>
           <a:xfrm>
-            <a:off x="1188720" y="3154680"/>
+            <a:off x="1188720" y="3703320"/>
             <a:ext cx="4846320" cy="457200"/>
           </a:xfrm>
           <a:prstGeom prst="rect">
@@ -3874,7 +3737,7 @@
               <a:buNone/>
             </a:pPr>
             <a:r>
-              <a:rPr lang="en-US" sz="1800" dirty="0">
+              <a:rPr lang="en-US" sz="2000" dirty="0">
                 <a:solidFill>
                   <a:srgbClr val="111418"/>
                 </a:solidFill>
@@ -3884,7 +3747,7 @@
               </a:rPr>
               <a:t>History and Aral Sea Museum</a:t>
             </a:r>
-            <a:endParaRPr lang="en-US" sz="1800" dirty="0"/>
+            <a:endParaRPr lang="en-US" sz="2000" dirty="0"/>
           </a:p>
         </p:txBody>
       </p:sp>
@@ -3896,7 +3759,7 @@
         </p:nvSpPr>
         <p:spPr>
           <a:xfrm>
-            <a:off x="6217920" y="3154680"/>
+            <a:off x="6217920" y="3703320"/>
             <a:ext cx="640080" cy="457200"/>
           </a:xfrm>
           <a:prstGeom prst="rect">
@@ -3913,9 +3776,9 @@
               <a:buNone/>
             </a:pPr>
             <a:r>
-              <a:rPr lang="en-US" sz="1100" b="1" dirty="0">
-                <a:solidFill>
-                  <a:srgbClr val="F59E0B"/>
+              <a:rPr lang="en-US" sz="1300" b="1" dirty="0">
+                <a:solidFill>
+                  <a:srgbClr val="3B82F6"/>
                 </a:solidFill>
                 <a:latin typeface="IBM Plex Mono" pitchFamily="34" charset="0"/>
                 <a:ea typeface="IBM Plex Mono" pitchFamily="34" charset="-122"/>
@@ -3923,7 +3786,7 @@
               </a:rPr>
               <a:t>04</a:t>
             </a:r>
-            <a:endParaRPr lang="en-US" sz="1100" dirty="0"/>
+            <a:endParaRPr lang="en-US" sz="1300" dirty="0"/>
           </a:p>
         </p:txBody>
       </p:sp>
@@ -3935,7 +3798,7 @@
         </p:nvSpPr>
         <p:spPr>
           <a:xfrm>
-            <a:off x="6858000" y="3154680"/>
+            <a:off x="6858000" y="3703320"/>
             <a:ext cx="4846320" cy="457200"/>
           </a:xfrm>
           <a:prstGeom prst="rect">
@@ -3952,7 +3815,7 @@
               <a:buNone/>
             </a:pPr>
             <a:r>
-              <a:rPr lang="en-US" sz="1800" dirty="0">
+              <a:rPr lang="en-US" sz="2000" dirty="0">
                 <a:solidFill>
                   <a:srgbClr val="111418"/>
                 </a:solidFill>
@@ -3962,7 +3825,7 @@
               </a:rPr>
               <a:t>Center for Contemporary Art, Tashkent</a:t>
             </a:r>
-            <a:endParaRPr lang="en-US" sz="1800" dirty="0"/>
+            <a:endParaRPr lang="en-US" sz="2000" dirty="0"/>
           </a:p>
         </p:txBody>
       </p:sp>
@@ -3974,7 +3837,7 @@
         </p:nvSpPr>
         <p:spPr>
           <a:xfrm>
-            <a:off x="548640" y="3931920"/>
+            <a:off x="548640" y="4480560"/>
             <a:ext cx="640080" cy="457200"/>
           </a:xfrm>
           <a:prstGeom prst="rect">
@@ -3991,7 +3854,7 @@
               <a:buNone/>
             </a:pPr>
             <a:r>
-              <a:rPr lang="en-US" sz="1100" b="1" dirty="0">
+              <a:rPr lang="en-US" sz="1300" b="1" dirty="0">
                 <a:solidFill>
                   <a:srgbClr val="3B82F6"/>
                 </a:solidFill>
@@ -4001,7 +3864,7 @@
               </a:rPr>
               <a:t>05</a:t>
             </a:r>
-            <a:endParaRPr lang="en-US" sz="1100" dirty="0"/>
+            <a:endParaRPr lang="en-US" sz="1300" dirty="0"/>
           </a:p>
         </p:txBody>
       </p:sp>
@@ -4013,7 +3876,7 @@
         </p:nvSpPr>
         <p:spPr>
           <a:xfrm>
-            <a:off x="1188720" y="3931920"/>
+            <a:off x="1188720" y="4480560"/>
             <a:ext cx="4846320" cy="457200"/>
           </a:xfrm>
           <a:prstGeom prst="rect">
@@ -4030,7 +3893,7 @@
               <a:buNone/>
             </a:pPr>
             <a:r>
-              <a:rPr lang="en-US" sz="1800" dirty="0">
+              <a:rPr lang="en-US" sz="2000" dirty="0">
                 <a:solidFill>
                   <a:srgbClr val="111418"/>
                 </a:solidFill>
@@ -4040,7 +3903,7 @@
               </a:rPr>
               <a:t>Tashkent Design Week</a:t>
             </a:r>
-            <a:endParaRPr lang="en-US" sz="1800" dirty="0"/>
+            <a:endParaRPr lang="en-US" sz="2000" dirty="0"/>
           </a:p>
         </p:txBody>
       </p:sp>
@@ -4052,7 +3915,7 @@
         </p:nvSpPr>
         <p:spPr>
           <a:xfrm>
-            <a:off x="6217920" y="3931920"/>
+            <a:off x="6217920" y="4480560"/>
             <a:ext cx="640080" cy="457200"/>
           </a:xfrm>
           <a:prstGeom prst="rect">
@@ -4069,7 +3932,7 @@
               <a:buNone/>
             </a:pPr>
             <a:r>
-              <a:rPr lang="en-US" sz="1100" b="1" dirty="0">
+              <a:rPr lang="en-US" sz="1300" b="1" dirty="0">
                 <a:solidFill>
                   <a:srgbClr val="EC4899"/>
                 </a:solidFill>
@@ -4079,7 +3942,7 @@
               </a:rPr>
               <a:t>06</a:t>
             </a:r>
-            <a:endParaRPr lang="en-US" sz="1100" dirty="0"/>
+            <a:endParaRPr lang="en-US" sz="1300" dirty="0"/>
           </a:p>
         </p:txBody>
       </p:sp>
@@ -4091,7 +3954,7 @@
         </p:nvSpPr>
         <p:spPr>
           <a:xfrm>
-            <a:off x="6858000" y="3931920"/>
+            <a:off x="6858000" y="4480560"/>
             <a:ext cx="4846320" cy="457200"/>
           </a:xfrm>
           <a:prstGeom prst="rect">
@@ -4108,7 +3971,7 @@
               <a:buNone/>
             </a:pPr>
             <a:r>
-              <a:rPr lang="en-US" sz="1800" dirty="0">
+              <a:rPr lang="en-US" sz="2000" dirty="0">
                 <a:solidFill>
                   <a:srgbClr val="111418"/>
                 </a:solidFill>
@@ -4118,7 +3981,7 @@
               </a:rPr>
               <a:t>Milan Design Week</a:t>
             </a:r>
-            <a:endParaRPr lang="en-US" sz="1800" dirty="0"/>
+            <a:endParaRPr lang="en-US" sz="2000" dirty="0"/>
           </a:p>
         </p:txBody>
       </p:sp>
@@ -4130,7 +3993,7 @@
         </p:nvSpPr>
         <p:spPr>
           <a:xfrm>
-            <a:off x="548640" y="4709160"/>
+            <a:off x="548640" y="5257800"/>
             <a:ext cx="640080" cy="457200"/>
           </a:xfrm>
           <a:prstGeom prst="rect">
@@ -4147,7 +4010,7 @@
               <a:buNone/>
             </a:pPr>
             <a:r>
-              <a:rPr lang="en-US" sz="1100" b="1" dirty="0">
+              <a:rPr lang="en-US" sz="1300" b="1" dirty="0">
                 <a:solidFill>
                   <a:srgbClr val="10B981"/>
                 </a:solidFill>
@@ -4157,7 +4020,7 @@
               </a:rPr>
               <a:t>07</a:t>
             </a:r>
-            <a:endParaRPr lang="en-US" sz="1100" dirty="0"/>
+            <a:endParaRPr lang="en-US" sz="1300" dirty="0"/>
           </a:p>
         </p:txBody>
       </p:sp>
@@ -4169,7 +4032,7 @@
         </p:nvSpPr>
         <p:spPr>
           <a:xfrm>
-            <a:off x="1188720" y="4709160"/>
+            <a:off x="1188720" y="5257800"/>
             <a:ext cx="4846320" cy="457200"/>
           </a:xfrm>
           <a:prstGeom prst="rect">
@@ -4186,7 +4049,7 @@
               <a:buNone/>
             </a:pPr>
             <a:r>
-              <a:rPr lang="en-US" sz="1800" dirty="0">
+              <a:rPr lang="en-US" sz="2000" dirty="0">
                 <a:solidFill>
                   <a:srgbClr val="111418"/>
                 </a:solidFill>
@@ -4196,7 +4059,7 @@
               </a:rPr>
               <a:t>Venice Architecture Biennale</a:t>
             </a:r>
-            <a:endParaRPr lang="en-US" sz="1800" dirty="0"/>
+            <a:endParaRPr lang="en-US" sz="2000" dirty="0"/>
           </a:p>
         </p:txBody>
       </p:sp>
@@ -4208,7 +4071,7 @@
         </p:nvSpPr>
         <p:spPr>
           <a:xfrm>
-            <a:off x="6217920" y="4709160"/>
+            <a:off x="6217920" y="5257800"/>
             <a:ext cx="640080" cy="457200"/>
           </a:xfrm>
           <a:prstGeom prst="rect">
@@ -4225,9 +4088,9 @@
               <a:buNone/>
             </a:pPr>
             <a:r>
-              <a:rPr lang="en-US" sz="1100" b="1" dirty="0">
-                <a:solidFill>
-                  <a:srgbClr val="F59E0B"/>
+              <a:rPr lang="en-US" sz="1300" b="1" dirty="0">
+                <a:solidFill>
+                  <a:srgbClr val="3B82F6"/>
                 </a:solidFill>
                 <a:latin typeface="IBM Plex Mono" pitchFamily="34" charset="0"/>
                 <a:ea typeface="IBM Plex Mono" pitchFamily="34" charset="-122"/>
@@ -4235,7 +4098,7 @@
               </a:rPr>
               <a:t>08</a:t>
             </a:r>
-            <a:endParaRPr lang="en-US" sz="1100" dirty="0"/>
+            <a:endParaRPr lang="en-US" sz="1300" dirty="0"/>
           </a:p>
         </p:txBody>
       </p:sp>
@@ -4247,7 +4110,7 @@
         </p:nvSpPr>
         <p:spPr>
           <a:xfrm>
-            <a:off x="6858000" y="4709160"/>
+            <a:off x="6858000" y="5257800"/>
             <a:ext cx="4846320" cy="457200"/>
           </a:xfrm>
           <a:prstGeom prst="rect">
@@ -4264,7 +4127,7 @@
               <a:buNone/>
             </a:pPr>
             <a:r>
-              <a:rPr lang="en-US" sz="1800" dirty="0">
+              <a:rPr lang="en-US" sz="2000" dirty="0">
                 <a:solidFill>
                   <a:srgbClr val="111418"/>
                 </a:solidFill>
@@ -4274,85 +4137,7 @@
               </a:rPr>
               <a:t>Venice Art Biennale</a:t>
             </a:r>
-            <a:endParaRPr lang="en-US" sz="1800" dirty="0"/>
-          </a:p>
-        </p:txBody>
-      </p:sp>
-      <p:sp>
-        <p:nvSpPr>
-          <p:cNvPr id="20" name="Text 18"/>
-          <p:cNvSpPr/>
-          <p:nvPr/>
-        </p:nvSpPr>
-        <p:spPr>
-          <a:xfrm>
-            <a:off x="10728655" y="6400800"/>
-            <a:ext cx="1097280" cy="274320"/>
-          </a:xfrm>
-          <a:prstGeom prst="rect">
-            <a:avLst/>
-          </a:prstGeom>
-          <a:noFill/>
-          <a:ln/>
-        </p:spPr>
-        <p:txBody>
-          <a:bodyPr wrap="square" rtlCol="0" anchor="ctr"/>
-          <a:lstStyle/>
-          <a:p>
-            <a:pPr algn="r" indent="0" marL="0">
-              <a:buNone/>
-            </a:pPr>
-            <a:r>
-              <a:rPr lang="en-US" sz="900" dirty="0">
-                <a:solidFill>
-                  <a:srgbClr val="5B6068"/>
-                </a:solidFill>
-                <a:latin typeface="IBM Plex Mono" pitchFamily="34" charset="0"/>
-                <a:ea typeface="IBM Plex Mono" pitchFamily="34" charset="-122"/>
-                <a:cs typeface="IBM Plex Mono" pitchFamily="34" charset="-120"/>
-              </a:rPr>
-              <a:t>12 / 14</a:t>
-            </a:r>
-            <a:endParaRPr lang="en-US" sz="900" dirty="0"/>
-          </a:p>
-        </p:txBody>
-      </p:sp>
-      <p:sp>
-        <p:nvSpPr>
-          <p:cNvPr id="21" name="Text 19"/>
-          <p:cNvSpPr/>
-          <p:nvPr/>
-        </p:nvSpPr>
-        <p:spPr>
-          <a:xfrm>
-            <a:off x="548640" y="6400800"/>
-            <a:ext cx="5486400" cy="274320"/>
-          </a:xfrm>
-          <a:prstGeom prst="rect">
-            <a:avLst/>
-          </a:prstGeom>
-          <a:noFill/>
-          <a:ln/>
-        </p:spPr>
-        <p:txBody>
-          <a:bodyPr wrap="square" rtlCol="0" anchor="ctr"/>
-          <a:lstStyle/>
-          <a:p>
-            <a:pPr indent="0" marL="0">
-              <a:buNone/>
-            </a:pPr>
-            <a:r>
-              <a:rPr lang="en-US" sz="900" spc="600" kern="0" dirty="0">
-                <a:solidFill>
-                  <a:srgbClr val="5B6068"/>
-                </a:solidFill>
-                <a:latin typeface="IBM Plex Mono" pitchFamily="34" charset="0"/>
-                <a:ea typeface="IBM Plex Mono" pitchFamily="34" charset="-122"/>
-                <a:cs typeface="IBM Plex Mono" pitchFamily="34" charset="-120"/>
-              </a:rPr>
-              <a:t>ARAL3D</a:t>
-            </a:r>
-            <a:endParaRPr lang="en-US" sz="900" dirty="0"/>
+            <a:endParaRPr lang="en-US" sz="2000" dirty="0"/>
           </a:p>
         </p:txBody>
       </p:sp>
@@ -4396,24 +4181,24 @@
         </p:nvSpPr>
         <p:spPr>
           <a:xfrm>
-            <a:off x="548640" y="457200"/>
-            <a:ext cx="9144000" cy="274320"/>
-          </a:xfrm>
-          <a:prstGeom prst="rect">
-            <a:avLst/>
-          </a:prstGeom>
-          <a:noFill/>
-          <a:ln/>
-        </p:spPr>
-        <p:txBody>
-          <a:bodyPr wrap="square" rtlCol="0" anchor="ctr"/>
-          <a:lstStyle/>
-          <a:p>
-            <a:pPr indent="0" marL="0">
-              <a:buNone/>
-            </a:pPr>
-            <a:r>
-              <a:rPr lang="en-US" sz="900" b="1" spc="800" kern="0" dirty="0">
+            <a:off x="548640" y="822960"/>
+            <a:ext cx="10972800" cy="365760"/>
+          </a:xfrm>
+          <a:prstGeom prst="rect">
+            <a:avLst/>
+          </a:prstGeom>
+          <a:noFill/>
+          <a:ln/>
+        </p:spPr>
+        <p:txBody>
+          <a:bodyPr wrap="square" rtlCol="0" anchor="ctr"/>
+          <a:lstStyle/>
+          <a:p>
+            <a:pPr indent="0" marL="0">
+              <a:buNone/>
+            </a:pPr>
+            <a:r>
+              <a:rPr lang="en-US" sz="1200" b="1" spc="1600" kern="0" dirty="0">
                 <a:solidFill>
                   <a:srgbClr val="3B82F6"/>
                 </a:solidFill>
@@ -4423,7 +4208,7 @@
               </a:rPr>
               <a:t>FUNDING MODEL</a:t>
             </a:r>
-            <a:endParaRPr lang="en-US" sz="900" dirty="0"/>
+            <a:endParaRPr lang="en-US" sz="1200" dirty="0"/>
           </a:p>
         </p:txBody>
       </p:sp>
@@ -4435,24 +4220,24 @@
         </p:nvSpPr>
         <p:spPr>
           <a:xfrm>
-            <a:off x="548640" y="914400"/>
-            <a:ext cx="10972800" cy="914400"/>
-          </a:xfrm>
-          <a:prstGeom prst="rect">
-            <a:avLst/>
-          </a:prstGeom>
-          <a:noFill/>
-          <a:ln/>
-        </p:spPr>
-        <p:txBody>
-          <a:bodyPr wrap="square" rtlCol="0" anchor="ctr"/>
-          <a:lstStyle/>
-          <a:p>
-            <a:pPr indent="0" marL="0">
-              <a:buNone/>
-            </a:pPr>
-            <a:r>
-              <a:rPr lang="en-US" sz="4800" b="1" spc="400" kern="0" dirty="0">
+            <a:off x="548640" y="1463040"/>
+            <a:ext cx="10972800" cy="1097280"/>
+          </a:xfrm>
+          <a:prstGeom prst="rect">
+            <a:avLst/>
+          </a:prstGeom>
+          <a:noFill/>
+          <a:ln/>
+        </p:spPr>
+        <p:txBody>
+          <a:bodyPr wrap="square" rtlCol="0" anchor="ctr"/>
+          <a:lstStyle/>
+          <a:p>
+            <a:pPr indent="0" marL="0">
+              <a:buNone/>
+            </a:pPr>
+            <a:r>
+              <a:rPr lang="en-US" sz="5600" b="1" spc="400" kern="0" dirty="0">
                 <a:solidFill>
                   <a:srgbClr val="111418"/>
                 </a:solidFill>
@@ -4462,7 +4247,7 @@
               </a:rPr>
               <a:t>FREE, BY DEFAULT.</a:t>
             </a:r>
-            <a:endParaRPr lang="en-US" sz="4800" dirty="0"/>
+            <a:endParaRPr lang="en-US" sz="5600" dirty="0"/>
           </a:p>
         </p:txBody>
       </p:sp>
@@ -4474,7 +4259,7 @@
         </p:nvSpPr>
         <p:spPr>
           <a:xfrm>
-            <a:off x="548640" y="2194560"/>
+            <a:off x="548640" y="2743200"/>
             <a:ext cx="10972800" cy="914400"/>
           </a:xfrm>
           <a:prstGeom prst="rect">
@@ -4491,7 +4276,7 @@
               <a:buNone/>
             </a:pPr>
             <a:r>
-              <a:rPr lang="en-US" sz="2000" i="1" dirty="0">
+              <a:rPr lang="en-US" sz="2200" i="1" dirty="0">
                 <a:solidFill>
                   <a:srgbClr val="3B82F6"/>
                 </a:solidFill>
@@ -4501,7 +4286,7 @@
               </a:rPr>
               <a:t>Aral3D stays free for schools, students, teachers, researchers, museums and public institutions.</a:t>
             </a:r>
-            <a:endParaRPr lang="en-US" sz="2000" dirty="0"/>
+            <a:endParaRPr lang="en-US" sz="2200" dirty="0"/>
           </a:p>
         </p:txBody>
       </p:sp>
@@ -4513,7 +4298,7 @@
         </p:nvSpPr>
         <p:spPr>
           <a:xfrm>
-            <a:off x="548640" y="3657600"/>
+            <a:off x="548640" y="4114800"/>
             <a:ext cx="5486400" cy="274320"/>
           </a:xfrm>
           <a:prstGeom prst="rect">
@@ -4530,7 +4315,7 @@
               <a:buNone/>
             </a:pPr>
             <a:r>
-              <a:rPr lang="en-US" sz="1000" b="1" spc="800" kern="0" dirty="0">
+              <a:rPr lang="en-US" sz="1100" b="1" spc="1000" kern="0" dirty="0">
                 <a:solidFill>
                   <a:srgbClr val="3B82F6"/>
                 </a:solidFill>
@@ -4540,7 +4325,7 @@
               </a:rPr>
               <a:t>CORE SUPPORT</a:t>
             </a:r>
-            <a:endParaRPr lang="en-US" sz="1000" dirty="0"/>
+            <a:endParaRPr lang="en-US" sz="1100" dirty="0"/>
           </a:p>
         </p:txBody>
       </p:sp>
@@ -4552,7 +4337,7 @@
         </p:nvSpPr>
         <p:spPr>
           <a:xfrm>
-            <a:off x="548640" y="4023360"/>
+            <a:off x="548640" y="4480560"/>
             <a:ext cx="5486400" cy="2194560"/>
           </a:xfrm>
           <a:prstGeom prst="rect">
@@ -4569,7 +4354,7 @@
               <a:buNone/>
             </a:pPr>
             <a:r>
-              <a:rPr lang="en-US" sz="1400" dirty="0">
+              <a:rPr lang="en-US" sz="1500" dirty="0">
                 <a:solidFill>
                   <a:srgbClr val="111418"/>
                 </a:solidFill>
@@ -4579,7 +4364,7 @@
               </a:rPr>
               <a:t>Ministry of Education, Ministry of Ecology, public educational and environmental programs, state museums, universities.</a:t>
             </a:r>
-            <a:endParaRPr lang="en-US" sz="1400" dirty="0"/>
+            <a:endParaRPr lang="en-US" sz="1500" dirty="0"/>
           </a:p>
         </p:txBody>
       </p:sp>
@@ -4591,7 +4376,7 @@
         </p:nvSpPr>
         <p:spPr>
           <a:xfrm>
-            <a:off x="6400800" y="3657600"/>
+            <a:off x="6400800" y="4114800"/>
             <a:ext cx="5486400" cy="274320"/>
           </a:xfrm>
           <a:prstGeom prst="rect">
@@ -4608,7 +4393,7 @@
               <a:buNone/>
             </a:pPr>
             <a:r>
-              <a:rPr lang="en-US" sz="1000" b="1" spc="800" kern="0" dirty="0">
+              <a:rPr lang="en-US" sz="1100" b="1" spc="1000" kern="0" dirty="0">
                 <a:solidFill>
                   <a:srgbClr val="EC4899"/>
                 </a:solidFill>
@@ -4618,7 +4403,7 @@
               </a:rPr>
               <a:t>OPTIONAL</a:t>
             </a:r>
-            <a:endParaRPr lang="en-US" sz="1000" dirty="0"/>
+            <a:endParaRPr lang="en-US" sz="1100" dirty="0"/>
           </a:p>
         </p:txBody>
       </p:sp>
@@ -4630,7 +4415,7 @@
         </p:nvSpPr>
         <p:spPr>
           <a:xfrm>
-            <a:off x="6400800" y="4023360"/>
+            <a:off x="6400800" y="4480560"/>
             <a:ext cx="5486400" cy="2194560"/>
           </a:xfrm>
           <a:prstGeom prst="rect">
@@ -4647,7 +4432,7 @@
               <a:buNone/>
             </a:pPr>
             <a:r>
-              <a:rPr lang="en-US" sz="1400" dirty="0">
+              <a:rPr lang="en-US" sz="1500" dirty="0">
                 <a:solidFill>
                   <a:srgbClr val="111418"/>
                 </a:solidFill>
@@ -4657,85 +4442,7 @@
               </a:rPr>
               <a:t>Private museums, festivals, private educational centers, commissioned exhibition versions, international cultural programs.</a:t>
             </a:r>
-            <a:endParaRPr lang="en-US" sz="1400" dirty="0"/>
-          </a:p>
-        </p:txBody>
-      </p:sp>
-      <p:sp>
-        <p:nvSpPr>
-          <p:cNvPr id="9" name="Text 7"/>
-          <p:cNvSpPr/>
-          <p:nvPr/>
-        </p:nvSpPr>
-        <p:spPr>
-          <a:xfrm>
-            <a:off x="10728655" y="6400800"/>
-            <a:ext cx="1097280" cy="274320"/>
-          </a:xfrm>
-          <a:prstGeom prst="rect">
-            <a:avLst/>
-          </a:prstGeom>
-          <a:noFill/>
-          <a:ln/>
-        </p:spPr>
-        <p:txBody>
-          <a:bodyPr wrap="square" rtlCol="0" anchor="ctr"/>
-          <a:lstStyle/>
-          <a:p>
-            <a:pPr algn="r" indent="0" marL="0">
-              <a:buNone/>
-            </a:pPr>
-            <a:r>
-              <a:rPr lang="en-US" sz="900" dirty="0">
-                <a:solidFill>
-                  <a:srgbClr val="5B6068"/>
-                </a:solidFill>
-                <a:latin typeface="IBM Plex Mono" pitchFamily="34" charset="0"/>
-                <a:ea typeface="IBM Plex Mono" pitchFamily="34" charset="-122"/>
-                <a:cs typeface="IBM Plex Mono" pitchFamily="34" charset="-120"/>
-              </a:rPr>
-              <a:t>13 / 14</a:t>
-            </a:r>
-            <a:endParaRPr lang="en-US" sz="900" dirty="0"/>
-          </a:p>
-        </p:txBody>
-      </p:sp>
-      <p:sp>
-        <p:nvSpPr>
-          <p:cNvPr id="10" name="Text 8"/>
-          <p:cNvSpPr/>
-          <p:nvPr/>
-        </p:nvSpPr>
-        <p:spPr>
-          <a:xfrm>
-            <a:off x="548640" y="6400800"/>
-            <a:ext cx="5486400" cy="274320"/>
-          </a:xfrm>
-          <a:prstGeom prst="rect">
-            <a:avLst/>
-          </a:prstGeom>
-          <a:noFill/>
-          <a:ln/>
-        </p:spPr>
-        <p:txBody>
-          <a:bodyPr wrap="square" rtlCol="0" anchor="ctr"/>
-          <a:lstStyle/>
-          <a:p>
-            <a:pPr indent="0" marL="0">
-              <a:buNone/>
-            </a:pPr>
-            <a:r>
-              <a:rPr lang="en-US" sz="900" spc="600" kern="0" dirty="0">
-                <a:solidFill>
-                  <a:srgbClr val="5B6068"/>
-                </a:solidFill>
-                <a:latin typeface="IBM Plex Mono" pitchFamily="34" charset="0"/>
-                <a:ea typeface="IBM Plex Mono" pitchFamily="34" charset="-122"/>
-                <a:cs typeface="IBM Plex Mono" pitchFamily="34" charset="-120"/>
-              </a:rPr>
-              <a:t>ARAL3D</a:t>
-            </a:r>
-            <a:endParaRPr lang="en-US" sz="900" dirty="0"/>
+            <a:endParaRPr lang="en-US" sz="1500" dirty="0"/>
           </a:p>
         </p:txBody>
       </p:sp>
@@ -4779,24 +4486,63 @@
         </p:nvSpPr>
         <p:spPr>
           <a:xfrm>
-            <a:off x="548640" y="2011680"/>
-            <a:ext cx="10972800" cy="1463040"/>
-          </a:xfrm>
-          <a:prstGeom prst="rect">
-            <a:avLst/>
-          </a:prstGeom>
-          <a:noFill/>
-          <a:ln/>
-        </p:spPr>
-        <p:txBody>
-          <a:bodyPr wrap="square" rtlCol="0" anchor="ctr"/>
-          <a:lstStyle/>
-          <a:p>
-            <a:pPr indent="0" marL="0">
-              <a:buNone/>
-            </a:pPr>
-            <a:r>
-              <a:rPr lang="en-US" sz="14000" b="1" spc="800" kern="0" dirty="0">
+            <a:off x="548640" y="822960"/>
+            <a:ext cx="10972800" cy="365760"/>
+          </a:xfrm>
+          <a:prstGeom prst="rect">
+            <a:avLst/>
+          </a:prstGeom>
+          <a:noFill/>
+          <a:ln/>
+        </p:spPr>
+        <p:txBody>
+          <a:bodyPr wrap="square" rtlCol="0" anchor="ctr"/>
+          <a:lstStyle/>
+          <a:p>
+            <a:pPr indent="0" marL="0">
+              <a:buNone/>
+            </a:pPr>
+            <a:r>
+              <a:rPr lang="en-US" sz="1200" b="1" spc="1600" kern="0" dirty="0">
+                <a:solidFill>
+                  <a:srgbClr val="3B82F6"/>
+                </a:solidFill>
+                <a:latin typeface="IBM Plex Mono" pitchFamily="34" charset="0"/>
+                <a:ea typeface="IBM Plex Mono" pitchFamily="34" charset="-122"/>
+                <a:cs typeface="IBM Plex Mono" pitchFamily="34" charset="-120"/>
+              </a:rPr>
+              <a:t>TEAM</a:t>
+            </a:r>
+            <a:endParaRPr lang="en-US" sz="1200" dirty="0"/>
+          </a:p>
+        </p:txBody>
+      </p:sp>
+      <p:sp>
+        <p:nvSpPr>
+          <p:cNvPr id="3" name="Text 1"/>
+          <p:cNvSpPr/>
+          <p:nvPr/>
+        </p:nvSpPr>
+        <p:spPr>
+          <a:xfrm>
+            <a:off x="548640" y="1463040"/>
+            <a:ext cx="10972800" cy="1097280"/>
+          </a:xfrm>
+          <a:prstGeom prst="rect">
+            <a:avLst/>
+          </a:prstGeom>
+          <a:noFill/>
+          <a:ln/>
+        </p:spPr>
+        <p:txBody>
+          <a:bodyPr wrap="square" rtlCol="0" anchor="ctr"/>
+          <a:lstStyle/>
+          <a:p>
+            <a:pPr indent="0" marL="0">
+              <a:buNone/>
+            </a:pPr>
+            <a:r>
+              <a:rPr lang="en-US" sz="5600" b="1" spc="400" kern="0" dirty="0">
                 <a:solidFill>
                   <a:srgbClr val="111418"/>
                 </a:solidFill>
@@ -4804,38 +4550,155 @@
                 <a:ea typeface="Trebuchet MS" pitchFamily="34" charset="-122"/>
                 <a:cs typeface="Trebuchet MS" pitchFamily="34" charset="-120"/>
               </a:rPr>
-              <a:t>ARAL3D</a:t>
-            </a:r>
-            <a:endParaRPr lang="en-US" sz="14000" dirty="0"/>
-          </a:p>
-        </p:txBody>
-      </p:sp>
-      <p:sp>
-        <p:nvSpPr>
-          <p:cNvPr id="3" name="Text 1"/>
+              <a:t>BY.</a:t>
+            </a:r>
+            <a:endParaRPr lang="en-US" sz="5600" dirty="0"/>
+          </a:p>
+        </p:txBody>
+      </p:sp>
+      <p:sp>
+        <p:nvSpPr>
+          <p:cNvPr id="4" name="Text 2"/>
+          <p:cNvSpPr/>
+          <p:nvPr/>
+        </p:nvSpPr>
+        <p:spPr>
+          <a:xfrm>
+            <a:off x="548640" y="2926080"/>
+            <a:ext cx="10972800" cy="914400"/>
+          </a:xfrm>
+          <a:prstGeom prst="rect">
+            <a:avLst/>
+          </a:prstGeom>
+          <a:noFill/>
+          <a:ln/>
+        </p:spPr>
+        <p:txBody>
+          <a:bodyPr wrap="square" rtlCol="0" anchor="ctr"/>
+          <a:lstStyle/>
+          <a:p>
+            <a:pPr indent="0" marL="0">
+              <a:buNone/>
+            </a:pPr>
+            <a:r>
+              <a:rPr lang="en-US" sz="6000" b="1" spc="400" kern="0" dirty="0">
+                <a:solidFill>
+                  <a:srgbClr val="111418"/>
+                </a:solidFill>
+                <a:latin typeface="Trebuchet MS" pitchFamily="34" charset="0"/>
+                <a:ea typeface="Trebuchet MS" pitchFamily="34" charset="-122"/>
+                <a:cs typeface="Trebuchet MS" pitchFamily="34" charset="-120"/>
+              </a:rPr>
+              <a:t>TIMOFEY NOSOV</a:t>
+            </a:r>
+            <a:endParaRPr lang="en-US" sz="6000" dirty="0"/>
+          </a:p>
+        </p:txBody>
+      </p:sp>
+      <p:sp>
+        <p:nvSpPr>
+          <p:cNvPr id="5" name="Text 3"/>
           <p:cNvSpPr/>
           <p:nvPr/>
         </p:nvSpPr>
         <p:spPr>
           <a:xfrm>
             <a:off x="548640" y="3840480"/>
-            <a:ext cx="10972800" cy="731520"/>
-          </a:xfrm>
-          <a:prstGeom prst="rect">
-            <a:avLst/>
-          </a:prstGeom>
-          <a:noFill/>
-          <a:ln/>
-        </p:spPr>
-        <p:txBody>
-          <a:bodyPr wrap="square" rtlCol="0" anchor="ctr"/>
-          <a:lstStyle/>
-          <a:p>
-            <a:pPr indent="0" marL="0">
-              <a:buNone/>
-            </a:pPr>
-            <a:r>
-              <a:rPr lang="en-US" sz="2800" i="1" dirty="0">
+            <a:ext cx="10972800" cy="914400"/>
+          </a:xfrm>
+          <a:prstGeom prst="rect">
+            <a:avLst/>
+          </a:prstGeom>
+          <a:noFill/>
+          <a:ln/>
+        </p:spPr>
+        <p:txBody>
+          <a:bodyPr wrap="square" rtlCol="0" anchor="ctr"/>
+          <a:lstStyle/>
+          <a:p>
+            <a:pPr indent="0" marL="0">
+              <a:buNone/>
+            </a:pPr>
+            <a:r>
+              <a:rPr lang="en-US" sz="6000" b="1" spc="400" kern="0" dirty="0">
+                <a:solidFill>
+                  <a:srgbClr val="111418"/>
+                </a:solidFill>
+                <a:latin typeface="Trebuchet MS" pitchFamily="34" charset="0"/>
+                <a:ea typeface="Trebuchet MS" pitchFamily="34" charset="-122"/>
+                <a:cs typeface="Trebuchet MS" pitchFamily="34" charset="-120"/>
+              </a:rPr>
+              <a:t>ROBERT WILLARD</a:t>
+            </a:r>
+            <a:endParaRPr lang="en-US" sz="6000" dirty="0"/>
+          </a:p>
+        </p:txBody>
+      </p:sp>
+      <p:sp>
+        <p:nvSpPr>
+          <p:cNvPr id="6" name="Text 4"/>
+          <p:cNvSpPr/>
+          <p:nvPr/>
+        </p:nvSpPr>
+        <p:spPr>
+          <a:xfrm>
+            <a:off x="548640" y="5303520"/>
+            <a:ext cx="10972800" cy="320040"/>
+          </a:xfrm>
+          <a:prstGeom prst="rect">
+            <a:avLst/>
+          </a:prstGeom>
+          <a:noFill/>
+          <a:ln/>
+        </p:spPr>
+        <p:txBody>
+          <a:bodyPr wrap="square" rtlCol="0" anchor="ctr"/>
+          <a:lstStyle/>
+          <a:p>
+            <a:pPr indent="0" marL="0">
+              <a:buNone/>
+            </a:pPr>
+            <a:r>
+              <a:rPr lang="en-US" sz="1100" b="1" spc="1000" kern="0" dirty="0">
+                <a:solidFill>
+                  <a:srgbClr val="3B82F6"/>
+                </a:solidFill>
+                <a:latin typeface="IBM Plex Mono" pitchFamily="34" charset="0"/>
+                <a:ea typeface="IBM Plex Mono" pitchFamily="34" charset="-122"/>
+                <a:cs typeface="IBM Plex Mono" pitchFamily="34" charset="-120"/>
+              </a:rPr>
+              <a:t>CONTACT</a:t>
+            </a:r>
+            <a:endParaRPr lang="en-US" sz="1100" dirty="0"/>
+          </a:p>
+        </p:txBody>
+      </p:sp>
+      <p:sp>
+        <p:nvSpPr>
+          <p:cNvPr id="7" name="Text 5"/>
+          <p:cNvSpPr/>
+          <p:nvPr/>
+        </p:nvSpPr>
+        <p:spPr>
+          <a:xfrm>
+            <a:off x="548640" y="5669280"/>
+            <a:ext cx="10972800" cy="640080"/>
+          </a:xfrm>
+          <a:prstGeom prst="rect">
+            <a:avLst/>
+          </a:prstGeom>
+          <a:noFill/>
+          <a:ln/>
+        </p:spPr>
+        <p:txBody>
+          <a:bodyPr wrap="square" rtlCol="0" anchor="ctr"/>
+          <a:lstStyle/>
+          <a:p>
+            <a:pPr indent="0" marL="0">
+              <a:buNone/>
+            </a:pPr>
+            <a:r>
+              <a:rPr lang="en-US" sz="3200" i="1" dirty="0">
                 <a:solidFill>
                   <a:srgbClr val="EC4899"/>
                 </a:solidFill>
@@ -4843,61 +4706,148 @@
                 <a:ea typeface="Georgia" pitchFamily="34" charset="-122"/>
                 <a:cs typeface="Georgia" pitchFamily="34" charset="-120"/>
               </a:rPr>
+              <a:t>timnosov@gmail.com</a:t>
+            </a:r>
+            <a:endParaRPr lang="en-US" sz="3200" dirty="0"/>
+          </a:p>
+        </p:txBody>
+      </p:sp>
+    </p:spTree>
+  </p:cSld>
+  <p:clrMapOvr>
+    <a:masterClrMapping/>
+  </p:clrMapOvr>
+</p:sld>
+</file>
+
+<file path=ppt/slides/slide15.xml><?xml version="1.0" encoding="utf-8"?>
+<p:sld xmlns:a="http://schemas.openxmlformats.org/drawingml/2006/main" xmlns:r="http://schemas.openxmlformats.org/officeDocument/2006/relationships" xmlns:p="http://schemas.openxmlformats.org/presentationml/2006/main">
+  <p:cSld name="Slide 15">
+    <p:bg>
+      <p:bgPr>
+        <a:solidFill>
+          <a:srgbClr val="FFFFFF"/>
+        </a:solidFill>
+      </p:bgPr>
+    </p:bg>
+    <p:spTree>
+      <p:nvGrpSpPr>
+        <p:cNvPr id="1" name=""/>
+        <p:cNvGrpSpPr/>
+        <p:nvPr/>
+      </p:nvGrpSpPr>
+      <p:grpSpPr>
+        <a:xfrm>
+          <a:off x="0" y="0"/>
+          <a:ext cx="0" cy="0"/>
+          <a:chOff x="0" y="0"/>
+          <a:chExt cx="0" cy="0"/>
+        </a:xfrm>
+      </p:grpSpPr>
+      <p:sp>
+        <p:nvSpPr>
+          <p:cNvPr id="2" name="Text 0"/>
+          <p:cNvSpPr/>
+          <p:nvPr/>
+        </p:nvSpPr>
+        <p:spPr>
+          <a:xfrm>
+            <a:off x="548640" y="2377440"/>
+            <a:ext cx="10972800" cy="1645920"/>
+          </a:xfrm>
+          <a:prstGeom prst="rect">
+            <a:avLst/>
+          </a:prstGeom>
+          <a:noFill/>
+          <a:ln/>
+        </p:spPr>
+        <p:txBody>
+          <a:bodyPr wrap="square" rtlCol="0" anchor="ctr"/>
+          <a:lstStyle/>
+          <a:p>
+            <a:pPr indent="0" marL="0">
+              <a:buNone/>
+            </a:pPr>
+            <a:r>
+              <a:rPr lang="en-US" sz="16000" b="1" spc="800" kern="0" dirty="0">
+                <a:solidFill>
+                  <a:srgbClr val="111418"/>
+                </a:solidFill>
+                <a:latin typeface="Trebuchet MS" pitchFamily="34" charset="0"/>
+                <a:ea typeface="Trebuchet MS" pitchFamily="34" charset="-122"/>
+                <a:cs typeface="Trebuchet MS" pitchFamily="34" charset="-120"/>
+              </a:rPr>
+              <a:t>ARAL3D</a:t>
+            </a:r>
+            <a:endParaRPr lang="en-US" sz="16000" dirty="0"/>
+          </a:p>
+        </p:txBody>
+      </p:sp>
+      <p:sp>
+        <p:nvSpPr>
+          <p:cNvPr id="3" name="Text 1"/>
+          <p:cNvSpPr/>
+          <p:nvPr/>
+        </p:nvSpPr>
+        <p:spPr>
+          <a:xfrm>
+            <a:off x="548640" y="4297680"/>
+            <a:ext cx="10972800" cy="731520"/>
+          </a:xfrm>
+          <a:prstGeom prst="rect">
+            <a:avLst/>
+          </a:prstGeom>
+          <a:noFill/>
+          <a:ln/>
+        </p:spPr>
+        <p:txBody>
+          <a:bodyPr wrap="square" rtlCol="0" anchor="ctr"/>
+          <a:lstStyle/>
+          <a:p>
+            <a:pPr indent="0" marL="0">
+              <a:buNone/>
+            </a:pPr>
+            <a:r>
+              <a:rPr lang="en-US" sz="3000" i="1" dirty="0">
+                <a:solidFill>
+                  <a:srgbClr val="EC4899"/>
+                </a:solidFill>
+                <a:latin typeface="Georgia" pitchFamily="34" charset="0"/>
+                <a:ea typeface="Georgia" pitchFamily="34" charset="-122"/>
+                <a:cs typeface="Georgia" pitchFamily="34" charset="-120"/>
+              </a:rPr>
               <a:t>A 3D platform for the Aral Sea basin.</a:t>
             </a:r>
-            <a:endParaRPr lang="en-US" sz="2800" dirty="0"/>
-          </a:p>
-        </p:txBody>
-      </p:sp>
-      <p:sp>
-        <p:nvSpPr>
-          <p:cNvPr id="4" name="Shape 2"/>
-          <p:cNvSpPr/>
-          <p:nvPr/>
-        </p:nvSpPr>
-        <p:spPr>
-          <a:xfrm>
-            <a:off x="548640" y="5303520"/>
-            <a:ext cx="11094415" cy="0"/>
-          </a:xfrm>
-          <a:prstGeom prst="line">
-            <a:avLst/>
-          </a:prstGeom>
-          <a:noFill/>
-          <a:ln w="9525">
-            <a:solidFill>
-              <a:srgbClr val="E5E5E2"/>
-            </a:solidFill>
-            <a:prstDash val="solid"/>
-          </a:ln>
-        </p:spPr>
-      </p:sp>
-      <p:sp>
-        <p:nvSpPr>
-          <p:cNvPr id="5" name="Text 3"/>
-          <p:cNvSpPr/>
-          <p:nvPr/>
-        </p:nvSpPr>
-        <p:spPr>
-          <a:xfrm>
-            <a:off x="548640" y="5577840"/>
-            <a:ext cx="10972800" cy="365760"/>
-          </a:xfrm>
-          <a:prstGeom prst="rect">
-            <a:avLst/>
-          </a:prstGeom>
-          <a:noFill/>
-          <a:ln/>
-        </p:spPr>
-        <p:txBody>
-          <a:bodyPr wrap="square" rtlCol="0" anchor="ctr"/>
-          <a:lstStyle/>
-          <a:p>
-            <a:pPr indent="0" marL="0">
-              <a:buNone/>
-            </a:pPr>
-            <a:r>
-              <a:rPr lang="en-US" sz="1200" b="1" spc="600" kern="0" dirty="0">
+            <a:endParaRPr lang="en-US" sz="3000" dirty="0"/>
+          </a:p>
+        </p:txBody>
+      </p:sp>
+      <p:sp>
+        <p:nvSpPr>
+          <p:cNvPr id="4" name="Text 2"/>
+          <p:cNvSpPr/>
+          <p:nvPr/>
+        </p:nvSpPr>
+        <p:spPr>
+          <a:xfrm>
+            <a:off x="548640" y="5120640"/>
+            <a:ext cx="10972800" cy="457200"/>
+          </a:xfrm>
+          <a:prstGeom prst="rect">
+            <a:avLst/>
+          </a:prstGeom>
+          <a:noFill/>
+          <a:ln/>
+        </p:spPr>
+        <p:txBody>
+          <a:bodyPr wrap="square" rtlCol="0" anchor="ctr"/>
+          <a:lstStyle/>
+          <a:p>
+            <a:pPr indent="0" marL="0">
+              <a:buNone/>
+            </a:pPr>
+            <a:r>
+              <a:rPr lang="en-US" sz="1400" b="1" spc="1000" kern="0" dirty="0">
                 <a:solidFill>
                   <a:srgbClr val="3B82F6"/>
                 </a:solidFill>
@@ -4905,9 +4855,9 @@
                 <a:ea typeface="IBM Plex Mono" pitchFamily="34" charset="-122"/>
                 <a:cs typeface="IBM Plex Mono" pitchFamily="34" charset="-120"/>
               </a:rPr>
-              <a:t>aral3d.com  ·  Aral School 2026</a:t>
-            </a:r>
-            <a:endParaRPr lang="en-US" sz="1200" dirty="0"/>
+              <a:t>aral3d.com</a:t>
+            </a:r>
+            <a:endParaRPr lang="en-US" sz="1400" dirty="0"/>
           </a:p>
         </p:txBody>
       </p:sp>
@@ -4951,24 +4901,24 @@
         </p:nvSpPr>
         <p:spPr>
           <a:xfrm>
-            <a:off x="548640" y="457200"/>
-            <a:ext cx="9144000" cy="274320"/>
-          </a:xfrm>
-          <a:prstGeom prst="rect">
-            <a:avLst/>
-          </a:prstGeom>
-          <a:noFill/>
-          <a:ln/>
-        </p:spPr>
-        <p:txBody>
-          <a:bodyPr wrap="square" rtlCol="0" anchor="ctr"/>
-          <a:lstStyle/>
-          <a:p>
-            <a:pPr indent="0" marL="0">
-              <a:buNone/>
-            </a:pPr>
-            <a:r>
-              <a:rPr lang="en-US" sz="900" b="1" spc="800" kern="0" dirty="0">
+            <a:off x="548640" y="822960"/>
+            <a:ext cx="10972800" cy="365760"/>
+          </a:xfrm>
+          <a:prstGeom prst="rect">
+            <a:avLst/>
+          </a:prstGeom>
+          <a:noFill/>
+          <a:ln/>
+        </p:spPr>
+        <p:txBody>
+          <a:bodyPr wrap="square" rtlCol="0" anchor="ctr"/>
+          <a:lstStyle/>
+          <a:p>
+            <a:pPr indent="0" marL="0">
+              <a:buNone/>
+            </a:pPr>
+            <a:r>
+              <a:rPr lang="en-US" sz="1200" b="1" spc="1600" kern="0" dirty="0">
                 <a:solidFill>
                   <a:srgbClr val="EC4899"/>
                 </a:solidFill>
@@ -4978,7 +4928,7 @@
               </a:rPr>
               <a:t>STARTING POINT</a:t>
             </a:r>
-            <a:endParaRPr lang="en-US" sz="900" dirty="0"/>
+            <a:endParaRPr lang="en-US" sz="1200" dirty="0"/>
           </a:p>
         </p:txBody>
       </p:sp>
@@ -4991,23 +4941,23 @@
         <p:spPr>
           <a:xfrm>
             <a:off x="548640" y="1645920"/>
-            <a:ext cx="10972800" cy="1463040"/>
-          </a:xfrm>
-          <a:prstGeom prst="rect">
-            <a:avLst/>
-          </a:prstGeom>
-          <a:noFill/>
-          <a:ln/>
-        </p:spPr>
-        <p:txBody>
-          <a:bodyPr wrap="square" rtlCol="0" anchor="ctr"/>
-          <a:lstStyle/>
-          <a:p>
-            <a:pPr indent="0" marL="0">
-              <a:buNone/>
-            </a:pPr>
-            <a:r>
-              <a:rPr lang="en-US" sz="11000" b="1" spc="600" kern="0" dirty="0">
+            <a:ext cx="10972800" cy="1645920"/>
+          </a:xfrm>
+          <a:prstGeom prst="rect">
+            <a:avLst/>
+          </a:prstGeom>
+          <a:noFill/>
+          <a:ln/>
+        </p:spPr>
+        <p:txBody>
+          <a:bodyPr wrap="square" rtlCol="0" anchor="ctr"/>
+          <a:lstStyle/>
+          <a:p>
+            <a:pPr indent="0" marL="0">
+              <a:buNone/>
+            </a:pPr>
+            <a:r>
+              <a:rPr lang="en-US" sz="12000" b="1" spc="600" kern="0" dirty="0">
                 <a:solidFill>
                   <a:srgbClr val="111418"/>
                 </a:solidFill>
@@ -5017,7 +4967,7 @@
               </a:rPr>
               <a:t>WHAT IS WATER?</a:t>
             </a:r>
-            <a:endParaRPr lang="en-US" sz="11000" dirty="0"/>
+            <a:endParaRPr lang="en-US" sz="12000" dirty="0"/>
           </a:p>
         </p:txBody>
       </p:sp>
@@ -5029,24 +4979,24 @@
         </p:nvSpPr>
         <p:spPr>
           <a:xfrm>
-            <a:off x="548640" y="3566160"/>
-            <a:ext cx="10972800" cy="731520"/>
-          </a:xfrm>
-          <a:prstGeom prst="rect">
-            <a:avLst/>
-          </a:prstGeom>
-          <a:noFill/>
-          <a:ln/>
-        </p:spPr>
-        <p:txBody>
-          <a:bodyPr wrap="square" rtlCol="0" anchor="ctr"/>
-          <a:lstStyle/>
-          <a:p>
-            <a:pPr indent="0" marL="0">
-              <a:buNone/>
-            </a:pPr>
-            <a:r>
-              <a:rPr lang="en-US" sz="3400" i="1" dirty="0">
+            <a:off x="548640" y="3749040"/>
+            <a:ext cx="10972800" cy="822960"/>
+          </a:xfrm>
+          <a:prstGeom prst="rect">
+            <a:avLst/>
+          </a:prstGeom>
+          <a:noFill/>
+          <a:ln/>
+        </p:spPr>
+        <p:txBody>
+          <a:bodyPr wrap="square" rtlCol="0" anchor="ctr"/>
+          <a:lstStyle/>
+          <a:p>
+            <a:pPr indent="0" marL="0">
+              <a:buNone/>
+            </a:pPr>
+            <a:r>
+              <a:rPr lang="en-US" sz="3600" i="1" dirty="0">
                 <a:solidFill>
                   <a:srgbClr val="3B82F6"/>
                 </a:solidFill>
@@ -5056,7 +5006,7 @@
               </a:rPr>
               <a:t>How we picture water shapes how we use it.</a:t>
             </a:r>
-            <a:endParaRPr lang="en-US" sz="3400" dirty="0"/>
+            <a:endParaRPr lang="en-US" sz="3600" dirty="0"/>
           </a:p>
         </p:txBody>
       </p:sp>
@@ -5068,7 +5018,7 @@
         </p:nvSpPr>
         <p:spPr>
           <a:xfrm>
-            <a:off x="548640" y="4480560"/>
+            <a:off x="548640" y="4663440"/>
             <a:ext cx="10058400" cy="1463040"/>
           </a:xfrm>
           <a:prstGeom prst="rect">
@@ -5096,84 +5046,6 @@
               <a:t>Aral3D explores different ways of seeing the basin — as map, as terrain, as climate, as everyday life.</a:t>
             </a:r>
             <a:endParaRPr lang="en-US" sz="2000" dirty="0"/>
-          </a:p>
-        </p:txBody>
-      </p:sp>
-      <p:sp>
-        <p:nvSpPr>
-          <p:cNvPr id="6" name="Text 4"/>
-          <p:cNvSpPr/>
-          <p:nvPr/>
-        </p:nvSpPr>
-        <p:spPr>
-          <a:xfrm>
-            <a:off x="10728655" y="6400800"/>
-            <a:ext cx="1097280" cy="274320"/>
-          </a:xfrm>
-          <a:prstGeom prst="rect">
-            <a:avLst/>
-          </a:prstGeom>
-          <a:noFill/>
-          <a:ln/>
-        </p:spPr>
-        <p:txBody>
-          <a:bodyPr wrap="square" rtlCol="0" anchor="ctr"/>
-          <a:lstStyle/>
-          <a:p>
-            <a:pPr algn="r" indent="0" marL="0">
-              <a:buNone/>
-            </a:pPr>
-            <a:r>
-              <a:rPr lang="en-US" sz="900" dirty="0">
-                <a:solidFill>
-                  <a:srgbClr val="5B6068"/>
-                </a:solidFill>
-                <a:latin typeface="IBM Plex Mono" pitchFamily="34" charset="0"/>
-                <a:ea typeface="IBM Plex Mono" pitchFamily="34" charset="-122"/>
-                <a:cs typeface="IBM Plex Mono" pitchFamily="34" charset="-120"/>
-              </a:rPr>
-              <a:t>02 / 14</a:t>
-            </a:r>
-            <a:endParaRPr lang="en-US" sz="900" dirty="0"/>
-          </a:p>
-        </p:txBody>
-      </p:sp>
-      <p:sp>
-        <p:nvSpPr>
-          <p:cNvPr id="7" name="Text 5"/>
-          <p:cNvSpPr/>
-          <p:nvPr/>
-        </p:nvSpPr>
-        <p:spPr>
-          <a:xfrm>
-            <a:off x="548640" y="6400800"/>
-            <a:ext cx="5486400" cy="274320"/>
-          </a:xfrm>
-          <a:prstGeom prst="rect">
-            <a:avLst/>
-          </a:prstGeom>
-          <a:noFill/>
-          <a:ln/>
-        </p:spPr>
-        <p:txBody>
-          <a:bodyPr wrap="square" rtlCol="0" anchor="ctr"/>
-          <a:lstStyle/>
-          <a:p>
-            <a:pPr indent="0" marL="0">
-              <a:buNone/>
-            </a:pPr>
-            <a:r>
-              <a:rPr lang="en-US" sz="900" spc="600" kern="0" dirty="0">
-                <a:solidFill>
-                  <a:srgbClr val="5B6068"/>
-                </a:solidFill>
-                <a:latin typeface="IBM Plex Mono" pitchFamily="34" charset="0"/>
-                <a:ea typeface="IBM Plex Mono" pitchFamily="34" charset="-122"/>
-                <a:cs typeface="IBM Plex Mono" pitchFamily="34" charset="-120"/>
-              </a:rPr>
-              <a:t>ARAL3D</a:t>
-            </a:r>
-            <a:endParaRPr lang="en-US" sz="900" dirty="0"/>
           </a:p>
         </p:txBody>
       </p:sp>
@@ -5217,24 +5089,24 @@
         </p:nvSpPr>
         <p:spPr>
           <a:xfrm>
-            <a:off x="548640" y="457200"/>
-            <a:ext cx="9144000" cy="274320"/>
-          </a:xfrm>
-          <a:prstGeom prst="rect">
-            <a:avLst/>
-          </a:prstGeom>
-          <a:noFill/>
-          <a:ln/>
-        </p:spPr>
-        <p:txBody>
-          <a:bodyPr wrap="square" rtlCol="0" anchor="ctr"/>
-          <a:lstStyle/>
-          <a:p>
-            <a:pPr indent="0" marL="0">
-              <a:buNone/>
-            </a:pPr>
-            <a:r>
-              <a:rPr lang="en-US" sz="900" b="1" spc="800" kern="0" dirty="0">
+            <a:off x="548640" y="822960"/>
+            <a:ext cx="10972800" cy="365760"/>
+          </a:xfrm>
+          <a:prstGeom prst="rect">
+            <a:avLst/>
+          </a:prstGeom>
+          <a:noFill/>
+          <a:ln/>
+        </p:spPr>
+        <p:txBody>
+          <a:bodyPr wrap="square" rtlCol="0" anchor="ctr"/>
+          <a:lstStyle/>
+          <a:p>
+            <a:pPr indent="0" marL="0">
+              <a:buNone/>
+            </a:pPr>
+            <a:r>
+              <a:rPr lang="en-US" sz="1200" b="1" spc="1600" kern="0" dirty="0">
                 <a:solidFill>
                   <a:srgbClr val="3B82F6"/>
                 </a:solidFill>
@@ -5244,7 +5116,7 @@
               </a:rPr>
               <a:t>THE PLATFORM</a:t>
             </a:r>
-            <a:endParaRPr lang="en-US" sz="900" dirty="0"/>
+            <a:endParaRPr lang="en-US" sz="1200" dirty="0"/>
           </a:p>
         </p:txBody>
       </p:sp>
@@ -5256,24 +5128,24 @@
         </p:nvSpPr>
         <p:spPr>
           <a:xfrm>
-            <a:off x="548640" y="914400"/>
-            <a:ext cx="10972800" cy="914400"/>
-          </a:xfrm>
-          <a:prstGeom prst="rect">
-            <a:avLst/>
-          </a:prstGeom>
-          <a:noFill/>
-          <a:ln/>
-        </p:spPr>
-        <p:txBody>
-          <a:bodyPr wrap="square" rtlCol="0" anchor="ctr"/>
-          <a:lstStyle/>
-          <a:p>
-            <a:pPr indent="0" marL="0">
-              <a:buNone/>
-            </a:pPr>
-            <a:r>
-              <a:rPr lang="en-US" sz="5400" b="1" spc="400" kern="0" dirty="0">
+            <a:off x="548640" y="1463040"/>
+            <a:ext cx="10972800" cy="1097280"/>
+          </a:xfrm>
+          <a:prstGeom prst="rect">
+            <a:avLst/>
+          </a:prstGeom>
+          <a:noFill/>
+          <a:ln/>
+        </p:spPr>
+        <p:txBody>
+          <a:bodyPr wrap="square" rtlCol="0" anchor="ctr"/>
+          <a:lstStyle/>
+          <a:p>
+            <a:pPr indent="0" marL="0">
+              <a:buNone/>
+            </a:pPr>
+            <a:r>
+              <a:rPr lang="en-US" sz="6400" b="1" spc="400" kern="0" dirty="0">
                 <a:solidFill>
                   <a:srgbClr val="111418"/>
                 </a:solidFill>
@@ -5283,7 +5155,7 @@
               </a:rPr>
               <a:t>TWO MODES.</a:t>
             </a:r>
-            <a:endParaRPr lang="en-US" sz="5400" dirty="0"/>
+            <a:endParaRPr lang="en-US" sz="6400" dirty="0"/>
           </a:p>
         </p:txBody>
       </p:sp>
@@ -5295,8 +5167,8 @@
         </p:nvSpPr>
         <p:spPr>
           <a:xfrm>
-            <a:off x="548640" y="2377440"/>
-            <a:ext cx="5486400" cy="3840480"/>
+            <a:off x="548640" y="2926080"/>
+            <a:ext cx="5486400" cy="3291840"/>
           </a:xfrm>
           <a:prstGeom prst="rect">
             <a:avLst/>
@@ -5320,7 +5192,7 @@
         </p:nvSpPr>
         <p:spPr>
           <a:xfrm>
-            <a:off x="822960" y="2606040"/>
+            <a:off x="822960" y="3154680"/>
             <a:ext cx="4572000" cy="365760"/>
           </a:xfrm>
           <a:prstGeom prst="rect">
@@ -5337,7 +5209,7 @@
               <a:buNone/>
             </a:pPr>
             <a:r>
-              <a:rPr lang="en-US" sz="1100" b="1" spc="800" kern="0" dirty="0">
+              <a:rPr lang="en-US" sz="1200" b="1" spc="1200" kern="0" dirty="0">
                 <a:solidFill>
                   <a:srgbClr val="3B82F6"/>
                 </a:solidFill>
@@ -5347,7 +5219,7 @@
               </a:rPr>
               <a:t>01 — GAME</a:t>
             </a:r>
-            <a:endParaRPr lang="en-US" sz="1100" dirty="0"/>
+            <a:endParaRPr lang="en-US" sz="1200" dirty="0"/>
           </a:p>
         </p:txBody>
       </p:sp>
@@ -5359,7 +5231,7 @@
         </p:nvSpPr>
         <p:spPr>
           <a:xfrm>
-            <a:off x="822960" y="3108960"/>
+            <a:off x="822960" y="3703320"/>
             <a:ext cx="4937760" cy="731520"/>
           </a:xfrm>
           <a:prstGeom prst="rect">
@@ -5376,7 +5248,7 @@
               <a:buNone/>
             </a:pPr>
             <a:r>
-              <a:rPr lang="en-US" sz="3400" b="1" spc="300" kern="0" dirty="0">
+              <a:rPr lang="en-US" sz="3600" b="1" spc="600" kern="0" dirty="0">
                 <a:solidFill>
                   <a:srgbClr val="111418"/>
                 </a:solidFill>
@@ -5386,7 +5258,7 @@
               </a:rPr>
               <a:t>PLAY THE BASIN</a:t>
             </a:r>
-            <a:endParaRPr lang="en-US" sz="3400" dirty="0"/>
+            <a:endParaRPr lang="en-US" sz="3600" dirty="0"/>
           </a:p>
         </p:txBody>
       </p:sp>
@@ -5398,34 +5270,34 @@
         </p:nvSpPr>
         <p:spPr>
           <a:xfrm>
-            <a:off x="822960" y="4206240"/>
-            <a:ext cx="4937760" cy="1828800"/>
-          </a:xfrm>
-          <a:prstGeom prst="rect">
-            <a:avLst/>
-          </a:prstGeom>
-          <a:noFill/>
-          <a:ln/>
-        </p:spPr>
-        <p:txBody>
-          <a:bodyPr wrap="square" rtlCol="0" anchor="ctr"/>
-          <a:lstStyle/>
-          <a:p>
-            <a:pPr indent="0" marL="0">
-              <a:buNone/>
-            </a:pPr>
-            <a:r>
-              <a:rPr lang="en-US" sz="1700" dirty="0">
+            <a:off x="822960" y="4663440"/>
+            <a:ext cx="4937760" cy="1371600"/>
+          </a:xfrm>
+          <a:prstGeom prst="rect">
+            <a:avLst/>
+          </a:prstGeom>
+          <a:noFill/>
+          <a:ln/>
+        </p:spPr>
+        <p:txBody>
+          <a:bodyPr wrap="square" rtlCol="0" anchor="ctr"/>
+          <a:lstStyle/>
+          <a:p>
+            <a:pPr indent="0" marL="0">
+              <a:buNone/>
+            </a:pPr>
+            <a:r>
+              <a:rPr lang="en-US" sz="2000" i="1" dirty="0">
                 <a:solidFill>
                   <a:srgbClr val="5B6068"/>
                 </a:solidFill>
-                <a:latin typeface="Trebuchet MS" pitchFamily="34" charset="0"/>
-                <a:ea typeface="Trebuchet MS" pitchFamily="34" charset="-122"/>
-                <a:cs typeface="Trebuchet MS" pitchFamily="34" charset="-120"/>
-              </a:rPr>
-              <a:t>Short missions and playable worlds for students, schools and museum visitors.</a:t>
-            </a:r>
-            <a:endParaRPr lang="en-US" sz="1700" dirty="0"/>
+                <a:latin typeface="Georgia" pitchFamily="34" charset="0"/>
+                <a:ea typeface="Georgia" pitchFamily="34" charset="-122"/>
+                <a:cs typeface="Georgia" pitchFamily="34" charset="-120"/>
+              </a:rPr>
+              <a:t>Short missions, playable worlds. For students, schools and museums.</a:t>
+            </a:r>
+            <a:endParaRPr lang="en-US" sz="2000" dirty="0"/>
           </a:p>
         </p:txBody>
       </p:sp>
@@ -5437,8 +5309,8 @@
         </p:nvSpPr>
         <p:spPr>
           <a:xfrm>
-            <a:off x="6309360" y="2377440"/>
-            <a:ext cx="5486400" cy="3840480"/>
+            <a:off x="6309360" y="2926080"/>
+            <a:ext cx="5486400" cy="3291840"/>
           </a:xfrm>
           <a:prstGeom prst="rect">
             <a:avLst/>
@@ -5462,7 +5334,7 @@
         </p:nvSpPr>
         <p:spPr>
           <a:xfrm>
-            <a:off x="6583680" y="2606040"/>
+            <a:off x="6583680" y="3154680"/>
             <a:ext cx="4572000" cy="365760"/>
           </a:xfrm>
           <a:prstGeom prst="rect">
@@ -5479,7 +5351,7 @@
               <a:buNone/>
             </a:pPr>
             <a:r>
-              <a:rPr lang="en-US" sz="1100" b="1" spc="800" kern="0" dirty="0">
+              <a:rPr lang="en-US" sz="1200" b="1" spc="1200" kern="0" dirty="0">
                 <a:solidFill>
                   <a:srgbClr val="EC4899"/>
                 </a:solidFill>
@@ -5489,7 +5361,7 @@
               </a:rPr>
               <a:t>02 — EXPLORE</a:t>
             </a:r>
-            <a:endParaRPr lang="en-US" sz="1100" dirty="0"/>
+            <a:endParaRPr lang="en-US" sz="1200" dirty="0"/>
           </a:p>
         </p:txBody>
       </p:sp>
@@ -5501,7 +5373,7 @@
         </p:nvSpPr>
         <p:spPr>
           <a:xfrm>
-            <a:off x="6583680" y="3108960"/>
+            <a:off x="6583680" y="3703320"/>
             <a:ext cx="4937760" cy="731520"/>
           </a:xfrm>
           <a:prstGeom prst="rect">
@@ -5518,7 +5390,7 @@
               <a:buNone/>
             </a:pPr>
             <a:r>
-              <a:rPr lang="en-US" sz="3400" b="1" spc="300" kern="0" dirty="0">
+              <a:rPr lang="en-US" sz="3600" b="1" spc="600" kern="0" dirty="0">
                 <a:solidFill>
                   <a:srgbClr val="111418"/>
                 </a:solidFill>
@@ -5528,7 +5400,7 @@
               </a:rPr>
               <a:t>READ THE BASIN</a:t>
             </a:r>
-            <a:endParaRPr lang="en-US" sz="3400" dirty="0"/>
+            <a:endParaRPr lang="en-US" sz="3600" dirty="0"/>
           </a:p>
         </p:txBody>
       </p:sp>
@@ -5540,112 +5412,34 @@
         </p:nvSpPr>
         <p:spPr>
           <a:xfrm>
-            <a:off x="6583680" y="4206240"/>
-            <a:ext cx="4937760" cy="1828800"/>
-          </a:xfrm>
-          <a:prstGeom prst="rect">
-            <a:avLst/>
-          </a:prstGeom>
-          <a:noFill/>
-          <a:ln/>
-        </p:spPr>
-        <p:txBody>
-          <a:bodyPr wrap="square" rtlCol="0" anchor="ctr"/>
-          <a:lstStyle/>
-          <a:p>
-            <a:pPr indent="0" marL="0">
-              <a:buNone/>
-            </a:pPr>
-            <a:r>
-              <a:rPr lang="en-US" sz="1700" dirty="0">
+            <a:off x="6583680" y="4663440"/>
+            <a:ext cx="4937760" cy="1371600"/>
+          </a:xfrm>
+          <a:prstGeom prst="rect">
+            <a:avLst/>
+          </a:prstGeom>
+          <a:noFill/>
+          <a:ln/>
+        </p:spPr>
+        <p:txBody>
+          <a:bodyPr wrap="square" rtlCol="0" anchor="ctr"/>
+          <a:lstStyle/>
+          <a:p>
+            <a:pPr indent="0" marL="0">
+              <a:buNone/>
+            </a:pPr>
+            <a:r>
+              <a:rPr lang="en-US" sz="2000" i="1" dirty="0">
                 <a:solidFill>
                   <a:srgbClr val="5B6068"/>
                 </a:solidFill>
-                <a:latin typeface="Trebuchet MS" pitchFamily="34" charset="0"/>
-                <a:ea typeface="Trebuchet MS" pitchFamily="34" charset="-122"/>
-                <a:cs typeface="Trebuchet MS" pitchFamily="34" charset="-120"/>
-              </a:rPr>
-              <a:t>Real elevation, historical basins, demographics, climate and water timeline. Shareable views.</a:t>
-            </a:r>
-            <a:endParaRPr lang="en-US" sz="1700" dirty="0"/>
-          </a:p>
-        </p:txBody>
-      </p:sp>
-      <p:sp>
-        <p:nvSpPr>
-          <p:cNvPr id="12" name="Text 10"/>
-          <p:cNvSpPr/>
-          <p:nvPr/>
-        </p:nvSpPr>
-        <p:spPr>
-          <a:xfrm>
-            <a:off x="10728655" y="6400800"/>
-            <a:ext cx="1097280" cy="274320"/>
-          </a:xfrm>
-          <a:prstGeom prst="rect">
-            <a:avLst/>
-          </a:prstGeom>
-          <a:noFill/>
-          <a:ln/>
-        </p:spPr>
-        <p:txBody>
-          <a:bodyPr wrap="square" rtlCol="0" anchor="ctr"/>
-          <a:lstStyle/>
-          <a:p>
-            <a:pPr algn="r" indent="0" marL="0">
-              <a:buNone/>
-            </a:pPr>
-            <a:r>
-              <a:rPr lang="en-US" sz="900" dirty="0">
-                <a:solidFill>
-                  <a:srgbClr val="5B6068"/>
-                </a:solidFill>
-                <a:latin typeface="IBM Plex Mono" pitchFamily="34" charset="0"/>
-                <a:ea typeface="IBM Plex Mono" pitchFamily="34" charset="-122"/>
-                <a:cs typeface="IBM Plex Mono" pitchFamily="34" charset="-120"/>
-              </a:rPr>
-              <a:t>03 / 14</a:t>
-            </a:r>
-            <a:endParaRPr lang="en-US" sz="900" dirty="0"/>
-          </a:p>
-        </p:txBody>
-      </p:sp>
-      <p:sp>
-        <p:nvSpPr>
-          <p:cNvPr id="13" name="Text 11"/>
-          <p:cNvSpPr/>
-          <p:nvPr/>
-        </p:nvSpPr>
-        <p:spPr>
-          <a:xfrm>
-            <a:off x="548640" y="6400800"/>
-            <a:ext cx="5486400" cy="274320"/>
-          </a:xfrm>
-          <a:prstGeom prst="rect">
-            <a:avLst/>
-          </a:prstGeom>
-          <a:noFill/>
-          <a:ln/>
-        </p:spPr>
-        <p:txBody>
-          <a:bodyPr wrap="square" rtlCol="0" anchor="ctr"/>
-          <a:lstStyle/>
-          <a:p>
-            <a:pPr indent="0" marL="0">
-              <a:buNone/>
-            </a:pPr>
-            <a:r>
-              <a:rPr lang="en-US" sz="900" spc="600" kern="0" dirty="0">
-                <a:solidFill>
-                  <a:srgbClr val="5B6068"/>
-                </a:solidFill>
-                <a:latin typeface="IBM Plex Mono" pitchFamily="34" charset="0"/>
-                <a:ea typeface="IBM Plex Mono" pitchFamily="34" charset="-122"/>
-                <a:cs typeface="IBM Plex Mono" pitchFamily="34" charset="-120"/>
-              </a:rPr>
-              <a:t>ARAL3D</a:t>
-            </a:r>
-            <a:endParaRPr lang="en-US" sz="900" dirty="0"/>
+                <a:latin typeface="Georgia" pitchFamily="34" charset="0"/>
+                <a:ea typeface="Georgia" pitchFamily="34" charset="-122"/>
+                <a:cs typeface="Georgia" pitchFamily="34" charset="-120"/>
+              </a:rPr>
+              <a:t>Real elevation, historical basins, climate, demographics. Shareable views.</a:t>
+            </a:r>
+            <a:endParaRPr lang="en-US" sz="2000" dirty="0"/>
           </a:p>
         </p:txBody>
       </p:sp>
@@ -5663,7 +5457,7 @@
     <p:bg>
       <p:bgPr>
         <a:solidFill>
-          <a:srgbClr val="FFFFFF"/>
+          <a:srgbClr val="06080E"/>
         </a:solidFill>
       </p:bgPr>
     </p:bg>
@@ -5697,7 +5491,7 @@
         <p:spPr>
           <a:xfrm>
             <a:off x="0" y="0"/>
-            <a:ext cx="12191695" cy="5029200"/>
+            <a:ext cx="12191695" cy="6858000"/>
           </a:xfrm>
           <a:prstGeom prst="rect">
             <a:avLst/>
@@ -5712,16 +5506,25 @@
         </p:nvSpPr>
         <p:spPr>
           <a:xfrm>
-            <a:off x="0" y="5029200"/>
-            <a:ext cx="12191695" cy="1828800"/>
+            <a:off x="457200" y="457200"/>
+            <a:ext cx="5669280" cy="1554480"/>
           </a:xfrm>
           <a:prstGeom prst="rect">
             <a:avLst/>
           </a:prstGeom>
           <a:solidFill>
-            <a:srgbClr val="FFFFFF"/>
+            <a:srgbClr val="06080E">
+              <a:alpha val="85000"/>
+            </a:srgbClr>
           </a:solidFill>
-          <a:ln/>
+          <a:ln w="12700">
+            <a:solidFill>
+              <a:srgbClr val="FFFFFF">
+                <a:alpha val="0"/>
+              </a:srgbClr>
+            </a:solidFill>
+            <a:prstDash val="solid"/>
+          </a:ln>
         </p:spPr>
       </p:sp>
       <p:sp>
@@ -5732,24 +5535,24 @@
         </p:nvSpPr>
         <p:spPr>
           <a:xfrm>
-            <a:off x="548640" y="5303520"/>
-            <a:ext cx="7315200" cy="274320"/>
-          </a:xfrm>
-          <a:prstGeom prst="rect">
-            <a:avLst/>
-          </a:prstGeom>
-          <a:noFill/>
-          <a:ln/>
-        </p:spPr>
-        <p:txBody>
-          <a:bodyPr wrap="square" rtlCol="0" anchor="ctr"/>
-          <a:lstStyle/>
-          <a:p>
-            <a:pPr indent="0" marL="0">
-              <a:buNone/>
-            </a:pPr>
-            <a:r>
-              <a:rPr lang="en-US" sz="1000" b="1" spc="800" kern="0" dirty="0">
+            <a:off x="685800" y="640080"/>
+            <a:ext cx="5303520" cy="320040"/>
+          </a:xfrm>
+          <a:prstGeom prst="rect">
+            <a:avLst/>
+          </a:prstGeom>
+          <a:noFill/>
+          <a:ln/>
+        </p:spPr>
+        <p:txBody>
+          <a:bodyPr wrap="square" rtlCol="0" anchor="ctr"/>
+          <a:lstStyle/>
+          <a:p>
+            <a:pPr indent="0" marL="0">
+              <a:buNone/>
+            </a:pPr>
+            <a:r>
+              <a:rPr lang="en-US" sz="1100" b="1" spc="1000" kern="0" dirty="0">
                 <a:solidFill>
                   <a:srgbClr val="3B82F6"/>
                 </a:solidFill>
@@ -5757,9 +5560,9 @@
                 <a:ea typeface="IBM Plex Mono" pitchFamily="34" charset="-122"/>
                 <a:cs typeface="IBM Plex Mono" pitchFamily="34" charset="-120"/>
               </a:rPr>
-              <a:t>GAME · MISSION 01</a:t>
-            </a:r>
-            <a:endParaRPr lang="en-US" sz="1000" dirty="0"/>
+              <a:t>LEVEL 01 · GAME</a:t>
+            </a:r>
+            <a:endParaRPr lang="en-US" sz="1100" dirty="0"/>
           </a:p>
         </p:txBody>
       </p:sp>
@@ -5771,26 +5574,26 @@
         </p:nvSpPr>
         <p:spPr>
           <a:xfrm>
-            <a:off x="548640" y="5669280"/>
-            <a:ext cx="10972800" cy="822960"/>
-          </a:xfrm>
-          <a:prstGeom prst="rect">
-            <a:avLst/>
-          </a:prstGeom>
-          <a:noFill/>
-          <a:ln/>
-        </p:spPr>
-        <p:txBody>
-          <a:bodyPr wrap="square" rtlCol="0" anchor="ctr"/>
-          <a:lstStyle/>
-          <a:p>
-            <a:pPr indent="0" marL="0">
-              <a:buNone/>
-            </a:pPr>
-            <a:r>
-              <a:rPr lang="en-US" sz="4000" b="1" spc="400" kern="0" dirty="0">
-                <a:solidFill>
-                  <a:srgbClr val="111418"/>
+            <a:off x="685800" y="1005840"/>
+            <a:ext cx="5303520" cy="502920"/>
+          </a:xfrm>
+          <a:prstGeom prst="rect">
+            <a:avLst/>
+          </a:prstGeom>
+          <a:noFill/>
+          <a:ln/>
+        </p:spPr>
+        <p:txBody>
+          <a:bodyPr wrap="square" rtlCol="0" anchor="ctr"/>
+          <a:lstStyle/>
+          <a:p>
+            <a:pPr indent="0" marL="0">
+              <a:buNone/>
+            </a:pPr>
+            <a:r>
+              <a:rPr lang="en-US" sz="2600" b="1" dirty="0">
+                <a:solidFill>
+                  <a:srgbClr val="FFFFFF"/>
                 </a:solidFill>
                 <a:latin typeface="Trebuchet MS" pitchFamily="34" charset="0"/>
                 <a:ea typeface="Trebuchet MS" pitchFamily="34" charset="-122"/>
@@ -5798,7 +5601,7 @@
               </a:rPr>
               <a:t>WELCOME TO NUKUS</a:t>
             </a:r>
-            <a:endParaRPr lang="en-US" sz="4000" dirty="0"/>
+            <a:endParaRPr lang="en-US" sz="2600" dirty="0"/>
           </a:p>
         </p:txBody>
       </p:sp>
@@ -5810,73 +5613,34 @@
         </p:nvSpPr>
         <p:spPr>
           <a:xfrm>
-            <a:off x="10728655" y="6400800"/>
-            <a:ext cx="1097280" cy="274320"/>
-          </a:xfrm>
-          <a:prstGeom prst="rect">
-            <a:avLst/>
-          </a:prstGeom>
-          <a:noFill/>
-          <a:ln/>
-        </p:spPr>
-        <p:txBody>
-          <a:bodyPr wrap="square" rtlCol="0" anchor="ctr"/>
-          <a:lstStyle/>
-          <a:p>
-            <a:pPr algn="r" indent="0" marL="0">
-              <a:buNone/>
-            </a:pPr>
-            <a:r>
-              <a:rPr lang="en-US" sz="900" dirty="0">
-                <a:solidFill>
-                  <a:srgbClr val="5B6068"/>
-                </a:solidFill>
-                <a:latin typeface="IBM Plex Mono" pitchFamily="34" charset="0"/>
-                <a:ea typeface="IBM Plex Mono" pitchFamily="34" charset="-122"/>
-                <a:cs typeface="IBM Plex Mono" pitchFamily="34" charset="-120"/>
-              </a:rPr>
-              <a:t>04 / 14</a:t>
-            </a:r>
-            <a:endParaRPr lang="en-US" sz="900" dirty="0"/>
-          </a:p>
-        </p:txBody>
-      </p:sp>
-      <p:sp>
-        <p:nvSpPr>
-          <p:cNvPr id="7" name="Text 4"/>
-          <p:cNvSpPr/>
-          <p:nvPr/>
-        </p:nvSpPr>
-        <p:spPr>
-          <a:xfrm>
-            <a:off x="548640" y="6400800"/>
-            <a:ext cx="5486400" cy="274320"/>
-          </a:xfrm>
-          <a:prstGeom prst="rect">
-            <a:avLst/>
-          </a:prstGeom>
-          <a:noFill/>
-          <a:ln/>
-        </p:spPr>
-        <p:txBody>
-          <a:bodyPr wrap="square" rtlCol="0" anchor="ctr"/>
-          <a:lstStyle/>
-          <a:p>
-            <a:pPr indent="0" marL="0">
-              <a:buNone/>
-            </a:pPr>
-            <a:r>
-              <a:rPr lang="en-US" sz="900" spc="600" kern="0" dirty="0">
-                <a:solidFill>
-                  <a:srgbClr val="5B6068"/>
-                </a:solidFill>
-                <a:latin typeface="IBM Plex Mono" pitchFamily="34" charset="0"/>
-                <a:ea typeface="IBM Plex Mono" pitchFamily="34" charset="-122"/>
-                <a:cs typeface="IBM Plex Mono" pitchFamily="34" charset="-120"/>
-              </a:rPr>
-              <a:t>ARAL3D</a:t>
-            </a:r>
-            <a:endParaRPr lang="en-US" sz="900" dirty="0"/>
+            <a:off x="685800" y="1508760"/>
+            <a:ext cx="5303520" cy="457200"/>
+          </a:xfrm>
+          <a:prstGeom prst="rect">
+            <a:avLst/>
+          </a:prstGeom>
+          <a:noFill/>
+          <a:ln/>
+        </p:spPr>
+        <p:txBody>
+          <a:bodyPr wrap="square" rtlCol="0" anchor="ctr"/>
+          <a:lstStyle/>
+          <a:p>
+            <a:pPr indent="0" marL="0">
+              <a:buNone/>
+            </a:pPr>
+            <a:r>
+              <a:rPr lang="en-US" sz="1600" i="1" dirty="0">
+                <a:solidFill>
+                  <a:srgbClr val="F5F1FF"/>
+                </a:solidFill>
+                <a:latin typeface="Georgia" pitchFamily="34" charset="0"/>
+                <a:ea typeface="Georgia" pitchFamily="34" charset="-122"/>
+                <a:cs typeface="Georgia" pitchFamily="34" charset="-120"/>
+              </a:rPr>
+              <a:t>Travel to the capital of Karakalpakstan.</a:t>
+            </a:r>
+            <a:endParaRPr lang="en-US" sz="1600" dirty="0"/>
           </a:p>
         </p:txBody>
       </p:sp>
@@ -5894,7 +5658,7 @@
     <p:bg>
       <p:bgPr>
         <a:solidFill>
-          <a:srgbClr val="FFFFFF"/>
+          <a:srgbClr val="06080E"/>
         </a:solidFill>
       </p:bgPr>
     </p:bg>
@@ -5928,7 +5692,7 @@
         <p:spPr>
           <a:xfrm>
             <a:off x="0" y="0"/>
-            <a:ext cx="12191695" cy="5029200"/>
+            <a:ext cx="12191695" cy="6858000"/>
           </a:xfrm>
           <a:prstGeom prst="rect">
             <a:avLst/>
@@ -5943,16 +5707,25 @@
         </p:nvSpPr>
         <p:spPr>
           <a:xfrm>
-            <a:off x="0" y="5029200"/>
-            <a:ext cx="12191695" cy="1828800"/>
+            <a:off x="457200" y="457200"/>
+            <a:ext cx="5669280" cy="1554480"/>
           </a:xfrm>
           <a:prstGeom prst="rect">
             <a:avLst/>
           </a:prstGeom>
           <a:solidFill>
-            <a:srgbClr val="FFFFFF"/>
+            <a:srgbClr val="06080E">
+              <a:alpha val="85000"/>
+            </a:srgbClr>
           </a:solidFill>
-          <a:ln/>
+          <a:ln w="12700">
+            <a:solidFill>
+              <a:srgbClr val="FFFFFF">
+                <a:alpha val="0"/>
+              </a:srgbClr>
+            </a:solidFill>
+            <a:prstDash val="solid"/>
+          </a:ln>
         </p:spPr>
       </p:sp>
       <p:sp>
@@ -5963,24 +5736,24 @@
         </p:nvSpPr>
         <p:spPr>
           <a:xfrm>
-            <a:off x="548640" y="5303520"/>
-            <a:ext cx="7315200" cy="274320"/>
-          </a:xfrm>
-          <a:prstGeom prst="rect">
-            <a:avLst/>
-          </a:prstGeom>
-          <a:noFill/>
-          <a:ln/>
-        </p:spPr>
-        <p:txBody>
-          <a:bodyPr wrap="square" rtlCol="0" anchor="ctr"/>
-          <a:lstStyle/>
-          <a:p>
-            <a:pPr indent="0" marL="0">
-              <a:buNone/>
-            </a:pPr>
-            <a:r>
-              <a:rPr lang="en-US" sz="1000" b="1" spc="800" kern="0" dirty="0">
+            <a:off x="685800" y="640080"/>
+            <a:ext cx="5303520" cy="320040"/>
+          </a:xfrm>
+          <a:prstGeom prst="rect">
+            <a:avLst/>
+          </a:prstGeom>
+          <a:noFill/>
+          <a:ln/>
+        </p:spPr>
+        <p:txBody>
+          <a:bodyPr wrap="square" rtlCol="0" anchor="ctr"/>
+          <a:lstStyle/>
+          <a:p>
+            <a:pPr indent="0" marL="0">
+              <a:buNone/>
+            </a:pPr>
+            <a:r>
+              <a:rPr lang="en-US" sz="1100" b="1" spc="1000" kern="0" dirty="0">
                 <a:solidFill>
                   <a:srgbClr val="10B981"/>
                 </a:solidFill>
@@ -5988,9 +5761,9 @@
                 <a:ea typeface="IBM Plex Mono" pitchFamily="34" charset="-122"/>
                 <a:cs typeface="IBM Plex Mono" pitchFamily="34" charset="-120"/>
               </a:rPr>
-              <a:t>GAME · VOXEL</a:t>
-            </a:r>
-            <a:endParaRPr lang="en-US" sz="1000" dirty="0"/>
+              <a:t>LEVEL 02 · VOXEL</a:t>
+            </a:r>
+            <a:endParaRPr lang="en-US" sz="1100" dirty="0"/>
           </a:p>
         </p:txBody>
       </p:sp>
@@ -6002,26 +5775,26 @@
         </p:nvSpPr>
         <p:spPr>
           <a:xfrm>
-            <a:off x="548640" y="5669280"/>
-            <a:ext cx="10972800" cy="822960"/>
-          </a:xfrm>
-          <a:prstGeom prst="rect">
-            <a:avLst/>
-          </a:prstGeom>
-          <a:noFill/>
-          <a:ln/>
-        </p:spPr>
-        <p:txBody>
-          <a:bodyPr wrap="square" rtlCol="0" anchor="ctr"/>
-          <a:lstStyle/>
-          <a:p>
-            <a:pPr indent="0" marL="0">
-              <a:buNone/>
-            </a:pPr>
-            <a:r>
-              <a:rPr lang="en-US" sz="4000" b="1" spc="400" kern="0" dirty="0">
-                <a:solidFill>
-                  <a:srgbClr val="111418"/>
+            <a:off x="685800" y="1005840"/>
+            <a:ext cx="5303520" cy="502920"/>
+          </a:xfrm>
+          <a:prstGeom prst="rect">
+            <a:avLst/>
+          </a:prstGeom>
+          <a:noFill/>
+          <a:ln/>
+        </p:spPr>
+        <p:txBody>
+          <a:bodyPr wrap="square" rtlCol="0" anchor="ctr"/>
+          <a:lstStyle/>
+          <a:p>
+            <a:pPr indent="0" marL="0">
+              <a:buNone/>
+            </a:pPr>
+            <a:r>
+              <a:rPr lang="en-US" sz="2600" b="1" dirty="0">
+                <a:solidFill>
+                  <a:srgbClr val="FFFFFF"/>
                 </a:solidFill>
                 <a:latin typeface="Trebuchet MS" pitchFamily="34" charset="0"/>
                 <a:ea typeface="Trebuchet MS" pitchFamily="34" charset="-122"/>
@@ -6029,7 +5802,7 @@
               </a:rPr>
               <a:t>BUILD AND SURVIVE</a:t>
             </a:r>
-            <a:endParaRPr lang="en-US" sz="4000" dirty="0"/>
+            <a:endParaRPr lang="en-US" sz="2600" dirty="0"/>
           </a:p>
         </p:txBody>
       </p:sp>
@@ -6041,73 +5814,34 @@
         </p:nvSpPr>
         <p:spPr>
           <a:xfrm>
-            <a:off x="10728655" y="6400800"/>
-            <a:ext cx="1097280" cy="274320"/>
-          </a:xfrm>
-          <a:prstGeom prst="rect">
-            <a:avLst/>
-          </a:prstGeom>
-          <a:noFill/>
-          <a:ln/>
-        </p:spPr>
-        <p:txBody>
-          <a:bodyPr wrap="square" rtlCol="0" anchor="ctr"/>
-          <a:lstStyle/>
-          <a:p>
-            <a:pPr algn="r" indent="0" marL="0">
-              <a:buNone/>
-            </a:pPr>
-            <a:r>
-              <a:rPr lang="en-US" sz="900" dirty="0">
-                <a:solidFill>
-                  <a:srgbClr val="5B6068"/>
-                </a:solidFill>
-                <a:latin typeface="IBM Plex Mono" pitchFamily="34" charset="0"/>
-                <a:ea typeface="IBM Plex Mono" pitchFamily="34" charset="-122"/>
-                <a:cs typeface="IBM Plex Mono" pitchFamily="34" charset="-120"/>
-              </a:rPr>
-              <a:t>05 / 14</a:t>
-            </a:r>
-            <a:endParaRPr lang="en-US" sz="900" dirty="0"/>
-          </a:p>
-        </p:txBody>
-      </p:sp>
-      <p:sp>
-        <p:nvSpPr>
-          <p:cNvPr id="7" name="Text 4"/>
-          <p:cNvSpPr/>
-          <p:nvPr/>
-        </p:nvSpPr>
-        <p:spPr>
-          <a:xfrm>
-            <a:off x="548640" y="6400800"/>
-            <a:ext cx="5486400" cy="274320"/>
-          </a:xfrm>
-          <a:prstGeom prst="rect">
-            <a:avLst/>
-          </a:prstGeom>
-          <a:noFill/>
-          <a:ln/>
-        </p:spPr>
-        <p:txBody>
-          <a:bodyPr wrap="square" rtlCol="0" anchor="ctr"/>
-          <a:lstStyle/>
-          <a:p>
-            <a:pPr indent="0" marL="0">
-              <a:buNone/>
-            </a:pPr>
-            <a:r>
-              <a:rPr lang="en-US" sz="900" spc="600" kern="0" dirty="0">
-                <a:solidFill>
-                  <a:srgbClr val="5B6068"/>
-                </a:solidFill>
-                <a:latin typeface="IBM Plex Mono" pitchFamily="34" charset="0"/>
-                <a:ea typeface="IBM Plex Mono" pitchFamily="34" charset="-122"/>
-                <a:cs typeface="IBM Plex Mono" pitchFamily="34" charset="-120"/>
-              </a:rPr>
-              <a:t>ARAL3D</a:t>
-            </a:r>
-            <a:endParaRPr lang="en-US" sz="900" dirty="0"/>
+            <a:off x="685800" y="1508760"/>
+            <a:ext cx="5303520" cy="457200"/>
+          </a:xfrm>
+          <a:prstGeom prst="rect">
+            <a:avLst/>
+          </a:prstGeom>
+          <a:noFill/>
+          <a:ln/>
+        </p:spPr>
+        <p:txBody>
+          <a:bodyPr wrap="square" rtlCol="0" anchor="ctr"/>
+          <a:lstStyle/>
+          <a:p>
+            <a:pPr indent="0" marL="0">
+              <a:buNone/>
+            </a:pPr>
+            <a:r>
+              <a:rPr lang="en-US" sz="1600" i="1" dirty="0">
+                <a:solidFill>
+                  <a:srgbClr val="F5F1FF"/>
+                </a:solidFill>
+                <a:latin typeface="Georgia" pitchFamily="34" charset="0"/>
+                <a:ea typeface="Georgia" pitchFamily="34" charset="-122"/>
+                <a:cs typeface="Georgia" pitchFamily="34" charset="-120"/>
+              </a:rPr>
+              <a:t>A playable world on the dried seabed.</a:t>
+            </a:r>
+            <a:endParaRPr lang="en-US" sz="1600" dirty="0"/>
           </a:p>
         </p:txBody>
       </p:sp>
@@ -6125,7 +5859,7 @@
     <p:bg>
       <p:bgPr>
         <a:solidFill>
-          <a:srgbClr val="FFFFFF"/>
+          <a:srgbClr val="06080E"/>
         </a:solidFill>
       </p:bgPr>
     </p:bg>
@@ -6159,7 +5893,7 @@
         <p:spPr>
           <a:xfrm>
             <a:off x="0" y="0"/>
-            <a:ext cx="12191695" cy="5029200"/>
+            <a:ext cx="12191695" cy="6858000"/>
           </a:xfrm>
           <a:prstGeom prst="rect">
             <a:avLst/>
@@ -6174,16 +5908,25 @@
         </p:nvSpPr>
         <p:spPr>
           <a:xfrm>
-            <a:off x="0" y="5029200"/>
-            <a:ext cx="12191695" cy="1828800"/>
+            <a:off x="457200" y="457200"/>
+            <a:ext cx="5669280" cy="1554480"/>
           </a:xfrm>
           <a:prstGeom prst="rect">
             <a:avLst/>
           </a:prstGeom>
           <a:solidFill>
-            <a:srgbClr val="FFFFFF"/>
+            <a:srgbClr val="06080E">
+              <a:alpha val="85000"/>
+            </a:srgbClr>
           </a:solidFill>
-          <a:ln/>
+          <a:ln w="12700">
+            <a:solidFill>
+              <a:srgbClr val="FFFFFF">
+                <a:alpha val="0"/>
+              </a:srgbClr>
+            </a:solidFill>
+            <a:prstDash val="solid"/>
+          </a:ln>
         </p:spPr>
       </p:sp>
       <p:sp>
@@ -6194,24 +5937,24 @@
         </p:nvSpPr>
         <p:spPr>
           <a:xfrm>
-            <a:off x="548640" y="5303520"/>
-            <a:ext cx="7315200" cy="274320"/>
-          </a:xfrm>
-          <a:prstGeom prst="rect">
-            <a:avLst/>
-          </a:prstGeom>
-          <a:noFill/>
-          <a:ln/>
-        </p:spPr>
-        <p:txBody>
-          <a:bodyPr wrap="square" rtlCol="0" anchor="ctr"/>
-          <a:lstStyle/>
-          <a:p>
-            <a:pPr indent="0" marL="0">
-              <a:buNone/>
-            </a:pPr>
-            <a:r>
-              <a:rPr lang="en-US" sz="1000" b="1" spc="800" kern="0" dirty="0">
+            <a:off x="685800" y="640080"/>
+            <a:ext cx="5303520" cy="320040"/>
+          </a:xfrm>
+          <a:prstGeom prst="rect">
+            <a:avLst/>
+          </a:prstGeom>
+          <a:noFill/>
+          <a:ln/>
+        </p:spPr>
+        <p:txBody>
+          <a:bodyPr wrap="square" rtlCol="0" anchor="ctr"/>
+          <a:lstStyle/>
+          <a:p>
+            <a:pPr indent="0" marL="0">
+              <a:buNone/>
+            </a:pPr>
+            <a:r>
+              <a:rPr lang="en-US" sz="1100" b="1" spc="1000" kern="0" dirty="0">
                 <a:solidFill>
                   <a:srgbClr val="EC4899"/>
                 </a:solidFill>
@@ -6219,9 +5962,9 @@
                 <a:ea typeface="IBM Plex Mono" pitchFamily="34" charset="-122"/>
                 <a:cs typeface="IBM Plex Mono" pitchFamily="34" charset="-120"/>
               </a:rPr>
-              <a:t>EXPLORE</a:t>
-            </a:r>
-            <a:endParaRPr lang="en-US" sz="1000" dirty="0"/>
+              <a:t>MODE · EXPLORE</a:t>
+            </a:r>
+            <a:endParaRPr lang="en-US" sz="1100" dirty="0"/>
           </a:p>
         </p:txBody>
       </p:sp>
@@ -6233,34 +5976,34 @@
         </p:nvSpPr>
         <p:spPr>
           <a:xfrm>
-            <a:off x="548640" y="5669280"/>
-            <a:ext cx="10972800" cy="822960"/>
-          </a:xfrm>
-          <a:prstGeom prst="rect">
-            <a:avLst/>
-          </a:prstGeom>
-          <a:noFill/>
-          <a:ln/>
-        </p:spPr>
-        <p:txBody>
-          <a:bodyPr wrap="square" rtlCol="0" anchor="ctr"/>
-          <a:lstStyle/>
-          <a:p>
-            <a:pPr indent="0" marL="0">
-              <a:buNone/>
-            </a:pPr>
-            <a:r>
-              <a:rPr lang="en-US" sz="4000" b="1" spc="400" kern="0" dirty="0">
-                <a:solidFill>
-                  <a:srgbClr val="111418"/>
+            <a:off x="685800" y="1005840"/>
+            <a:ext cx="5303520" cy="502920"/>
+          </a:xfrm>
+          <a:prstGeom prst="rect">
+            <a:avLst/>
+          </a:prstGeom>
+          <a:noFill/>
+          <a:ln/>
+        </p:spPr>
+        <p:txBody>
+          <a:bodyPr wrap="square" rtlCol="0" anchor="ctr"/>
+          <a:lstStyle/>
+          <a:p>
+            <a:pPr indent="0" marL="0">
+              <a:buNone/>
+            </a:pPr>
+            <a:r>
+              <a:rPr lang="en-US" sz="2600" b="1" dirty="0">
+                <a:solidFill>
+                  <a:srgbClr val="FFFFFF"/>
                 </a:solidFill>
                 <a:latin typeface="Trebuchet MS" pitchFamily="34" charset="0"/>
                 <a:ea typeface="Trebuchet MS" pitchFamily="34" charset="-122"/>
                 <a:cs typeface="Trebuchet MS" pitchFamily="34" charset="-120"/>
               </a:rPr>
-              <a:t>REAL DATA, REAL TERRAIN</a:t>
-            </a:r>
-            <a:endParaRPr lang="en-US" sz="4000" dirty="0"/>
+              <a:t>READ THE BASIN</a:t>
+            </a:r>
+            <a:endParaRPr lang="en-US" sz="2600" dirty="0"/>
           </a:p>
         </p:txBody>
       </p:sp>
@@ -6272,73 +6015,34 @@
         </p:nvSpPr>
         <p:spPr>
           <a:xfrm>
-            <a:off x="10728655" y="6400800"/>
-            <a:ext cx="1097280" cy="274320"/>
-          </a:xfrm>
-          <a:prstGeom prst="rect">
-            <a:avLst/>
-          </a:prstGeom>
-          <a:noFill/>
-          <a:ln/>
-        </p:spPr>
-        <p:txBody>
-          <a:bodyPr wrap="square" rtlCol="0" anchor="ctr"/>
-          <a:lstStyle/>
-          <a:p>
-            <a:pPr algn="r" indent="0" marL="0">
-              <a:buNone/>
-            </a:pPr>
-            <a:r>
-              <a:rPr lang="en-US" sz="900" dirty="0">
-                <a:solidFill>
-                  <a:srgbClr val="5B6068"/>
-                </a:solidFill>
-                <a:latin typeface="IBM Plex Mono" pitchFamily="34" charset="0"/>
-                <a:ea typeface="IBM Plex Mono" pitchFamily="34" charset="-122"/>
-                <a:cs typeface="IBM Plex Mono" pitchFamily="34" charset="-120"/>
-              </a:rPr>
-              <a:t>06 / 14</a:t>
-            </a:r>
-            <a:endParaRPr lang="en-US" sz="900" dirty="0"/>
-          </a:p>
-        </p:txBody>
-      </p:sp>
-      <p:sp>
-        <p:nvSpPr>
-          <p:cNvPr id="7" name="Text 4"/>
-          <p:cNvSpPr/>
-          <p:nvPr/>
-        </p:nvSpPr>
-        <p:spPr>
-          <a:xfrm>
-            <a:off x="548640" y="6400800"/>
-            <a:ext cx="5486400" cy="274320"/>
-          </a:xfrm>
-          <a:prstGeom prst="rect">
-            <a:avLst/>
-          </a:prstGeom>
-          <a:noFill/>
-          <a:ln/>
-        </p:spPr>
-        <p:txBody>
-          <a:bodyPr wrap="square" rtlCol="0" anchor="ctr"/>
-          <a:lstStyle/>
-          <a:p>
-            <a:pPr indent="0" marL="0">
-              <a:buNone/>
-            </a:pPr>
-            <a:r>
-              <a:rPr lang="en-US" sz="900" spc="600" kern="0" dirty="0">
-                <a:solidFill>
-                  <a:srgbClr val="5B6068"/>
-                </a:solidFill>
-                <a:latin typeface="IBM Plex Mono" pitchFamily="34" charset="0"/>
-                <a:ea typeface="IBM Plex Mono" pitchFamily="34" charset="-122"/>
-                <a:cs typeface="IBM Plex Mono" pitchFamily="34" charset="-120"/>
-              </a:rPr>
-              <a:t>ARAL3D</a:t>
-            </a:r>
-            <a:endParaRPr lang="en-US" sz="900" dirty="0"/>
+            <a:off x="685800" y="1508760"/>
+            <a:ext cx="5303520" cy="457200"/>
+          </a:xfrm>
+          <a:prstGeom prst="rect">
+            <a:avLst/>
+          </a:prstGeom>
+          <a:noFill/>
+          <a:ln/>
+        </p:spPr>
+        <p:txBody>
+          <a:bodyPr wrap="square" rtlCol="0" anchor="ctr"/>
+          <a:lstStyle/>
+          <a:p>
+            <a:pPr indent="0" marL="0">
+              <a:buNone/>
+            </a:pPr>
+            <a:r>
+              <a:rPr lang="en-US" sz="1600" i="1" dirty="0">
+                <a:solidFill>
+                  <a:srgbClr val="F5F1FF"/>
+                </a:solidFill>
+                <a:latin typeface="Georgia" pitchFamily="34" charset="0"/>
+                <a:ea typeface="Georgia" pitchFamily="34" charset="-122"/>
+                <a:cs typeface="Georgia" pitchFamily="34" charset="-120"/>
+              </a:rPr>
+              <a:t>Real elevation, historical basins, climate.</a:t>
+            </a:r>
+            <a:endParaRPr lang="en-US" sz="1600" dirty="0"/>
           </a:p>
         </p:txBody>
       </p:sp>
@@ -6382,24 +6086,24 @@
         </p:nvSpPr>
         <p:spPr>
           <a:xfrm>
-            <a:off x="548640" y="457200"/>
-            <a:ext cx="9144000" cy="274320"/>
-          </a:xfrm>
-          <a:prstGeom prst="rect">
-            <a:avLst/>
-          </a:prstGeom>
-          <a:noFill/>
-          <a:ln/>
-        </p:spPr>
-        <p:txBody>
-          <a:bodyPr wrap="square" rtlCol="0" anchor="ctr"/>
-          <a:lstStyle/>
-          <a:p>
-            <a:pPr indent="0" marL="0">
-              <a:buNone/>
-            </a:pPr>
-            <a:r>
-              <a:rPr lang="en-US" sz="900" b="1" spc="800" kern="0" dirty="0">
+            <a:off x="548640" y="822960"/>
+            <a:ext cx="10972800" cy="365760"/>
+          </a:xfrm>
+          <a:prstGeom prst="rect">
+            <a:avLst/>
+          </a:prstGeom>
+          <a:noFill/>
+          <a:ln/>
+        </p:spPr>
+        <p:txBody>
+          <a:bodyPr wrap="square" rtlCol="0" anchor="ctr"/>
+          <a:lstStyle/>
+          <a:p>
+            <a:pPr indent="0" marL="0">
+              <a:buNone/>
+            </a:pPr>
+            <a:r>
+              <a:rPr lang="en-US" sz="1200" b="1" spc="1600" kern="0" dirty="0">
                 <a:solidFill>
                   <a:srgbClr val="3B82F6"/>
                 </a:solidFill>
@@ -6409,7 +6113,7 @@
               </a:rPr>
               <a:t>WHO IT IS FOR</a:t>
             </a:r>
-            <a:endParaRPr lang="en-US" sz="900" dirty="0"/>
+            <a:endParaRPr lang="en-US" sz="1200" dirty="0"/>
           </a:p>
         </p:txBody>
       </p:sp>
@@ -6421,24 +6125,24 @@
         </p:nvSpPr>
         <p:spPr>
           <a:xfrm>
-            <a:off x="548640" y="914400"/>
-            <a:ext cx="10972800" cy="914400"/>
-          </a:xfrm>
-          <a:prstGeom prst="rect">
-            <a:avLst/>
-          </a:prstGeom>
-          <a:noFill/>
-          <a:ln/>
-        </p:spPr>
-        <p:txBody>
-          <a:bodyPr wrap="square" rtlCol="0" anchor="ctr"/>
-          <a:lstStyle/>
-          <a:p>
-            <a:pPr indent="0" marL="0">
-              <a:buNone/>
-            </a:pPr>
-            <a:r>
-              <a:rPr lang="en-US" sz="5400" b="1" spc="400" kern="0" dirty="0">
+            <a:off x="548640" y="1463040"/>
+            <a:ext cx="10972800" cy="1097280"/>
+          </a:xfrm>
+          <a:prstGeom prst="rect">
+            <a:avLst/>
+          </a:prstGeom>
+          <a:noFill/>
+          <a:ln/>
+        </p:spPr>
+        <p:txBody>
+          <a:bodyPr wrap="square" rtlCol="0" anchor="ctr"/>
+          <a:lstStyle/>
+          <a:p>
+            <a:pPr indent="0" marL="0">
+              <a:buNone/>
+            </a:pPr>
+            <a:r>
+              <a:rPr lang="en-US" sz="6400" b="1" spc="400" kern="0" dirty="0">
                 <a:solidFill>
                   <a:srgbClr val="111418"/>
                 </a:solidFill>
@@ -6448,7 +6152,7 @@
               </a:rPr>
               <a:t>AUDIENCES.</a:t>
             </a:r>
-            <a:endParaRPr lang="en-US" sz="5400" dirty="0"/>
+            <a:endParaRPr lang="en-US" sz="6400" dirty="0"/>
           </a:p>
         </p:txBody>
       </p:sp>
@@ -6460,24 +6164,24 @@
         </p:nvSpPr>
         <p:spPr>
           <a:xfrm>
-            <a:off x="548640" y="2377440"/>
-            <a:ext cx="2926080" cy="365760"/>
-          </a:xfrm>
-          <a:prstGeom prst="rect">
-            <a:avLst/>
-          </a:prstGeom>
-          <a:noFill/>
-          <a:ln/>
-        </p:spPr>
-        <p:txBody>
-          <a:bodyPr wrap="square" rtlCol="0" anchor="ctr"/>
-          <a:lstStyle/>
-          <a:p>
-            <a:pPr indent="0" marL="0">
-              <a:buNone/>
-            </a:pPr>
-            <a:r>
-              <a:rPr lang="en-US" sz="1100" b="1" spc="600" kern="0" dirty="0">
+            <a:off x="548640" y="2926080"/>
+            <a:ext cx="2926080" cy="457200"/>
+          </a:xfrm>
+          <a:prstGeom prst="rect">
+            <a:avLst/>
+          </a:prstGeom>
+          <a:noFill/>
+          <a:ln/>
+        </p:spPr>
+        <p:txBody>
+          <a:bodyPr wrap="square" rtlCol="0" anchor="ctr"/>
+          <a:lstStyle/>
+          <a:p>
+            <a:pPr indent="0" marL="0">
+              <a:buNone/>
+            </a:pPr>
+            <a:r>
+              <a:rPr lang="en-US" sz="1200" b="1" spc="1000" kern="0" dirty="0">
                 <a:solidFill>
                   <a:srgbClr val="3B82F6"/>
                 </a:solidFill>
@@ -6487,7 +6191,7 @@
               </a:rPr>
               <a:t>SCHOOLS</a:t>
             </a:r>
-            <a:endParaRPr lang="en-US" sz="1100" dirty="0"/>
+            <a:endParaRPr lang="en-US" sz="1200" dirty="0"/>
           </a:p>
         </p:txBody>
       </p:sp>
@@ -6499,24 +6203,24 @@
         </p:nvSpPr>
         <p:spPr>
           <a:xfrm>
-            <a:off x="3474720" y="2377440"/>
-            <a:ext cx="8229600" cy="365760"/>
-          </a:xfrm>
-          <a:prstGeom prst="rect">
-            <a:avLst/>
-          </a:prstGeom>
-          <a:noFill/>
-          <a:ln/>
-        </p:spPr>
-        <p:txBody>
-          <a:bodyPr wrap="square" rtlCol="0" anchor="ctr"/>
-          <a:lstStyle/>
-          <a:p>
-            <a:pPr indent="0" marL="0">
-              <a:buNone/>
-            </a:pPr>
-            <a:r>
-              <a:rPr lang="en-US" sz="1700" dirty="0">
+            <a:off x="3566160" y="2926080"/>
+            <a:ext cx="8229600" cy="457200"/>
+          </a:xfrm>
+          <a:prstGeom prst="rect">
+            <a:avLst/>
+          </a:prstGeom>
+          <a:noFill/>
+          <a:ln/>
+        </p:spPr>
+        <p:txBody>
+          <a:bodyPr wrap="square" rtlCol="0" anchor="ctr"/>
+          <a:lstStyle/>
+          <a:p>
+            <a:pPr indent="0" marL="0">
+              <a:buNone/>
+            </a:pPr>
+            <a:r>
+              <a:rPr lang="en-US" sz="2000" dirty="0">
                 <a:solidFill>
                   <a:srgbClr val="111418"/>
                 </a:solidFill>
@@ -6526,59 +6230,36 @@
               </a:rPr>
               <a:t>Curriculum-ready missions and classroom workshops.</a:t>
             </a:r>
-            <a:endParaRPr lang="en-US" sz="1700" dirty="0"/>
-          </a:p>
-        </p:txBody>
-      </p:sp>
-      <p:sp>
-        <p:nvSpPr>
-          <p:cNvPr id="6" name="Shape 4"/>
-          <p:cNvSpPr/>
-          <p:nvPr/>
-        </p:nvSpPr>
-        <p:spPr>
-          <a:xfrm>
-            <a:off x="548640" y="2880360"/>
-            <a:ext cx="11094415" cy="0"/>
-          </a:xfrm>
-          <a:prstGeom prst="line">
-            <a:avLst/>
-          </a:prstGeom>
-          <a:noFill/>
-          <a:ln w="9525">
-            <a:solidFill>
-              <a:srgbClr val="E5E5E2"/>
-            </a:solidFill>
-            <a:prstDash val="solid"/>
-          </a:ln>
-        </p:spPr>
-      </p:sp>
-      <p:sp>
-        <p:nvSpPr>
-          <p:cNvPr id="7" name="Text 5"/>
-          <p:cNvSpPr/>
-          <p:nvPr/>
-        </p:nvSpPr>
-        <p:spPr>
-          <a:xfrm>
-            <a:off x="548640" y="3090672"/>
-            <a:ext cx="2926080" cy="365760"/>
-          </a:xfrm>
-          <a:prstGeom prst="rect">
-            <a:avLst/>
-          </a:prstGeom>
-          <a:noFill/>
-          <a:ln/>
-        </p:spPr>
-        <p:txBody>
-          <a:bodyPr wrap="square" rtlCol="0" anchor="ctr"/>
-          <a:lstStyle/>
-          <a:p>
-            <a:pPr indent="0" marL="0">
-              <a:buNone/>
-            </a:pPr>
-            <a:r>
-              <a:rPr lang="en-US" sz="1100" b="1" spc="600" kern="0" dirty="0">
+            <a:endParaRPr lang="en-US" sz="2000" dirty="0"/>
+          </a:p>
+        </p:txBody>
+      </p:sp>
+      <p:sp>
+        <p:nvSpPr>
+          <p:cNvPr id="6" name="Text 4"/>
+          <p:cNvSpPr/>
+          <p:nvPr/>
+        </p:nvSpPr>
+        <p:spPr>
+          <a:xfrm>
+            <a:off x="548640" y="3639312"/>
+            <a:ext cx="2926080" cy="457200"/>
+          </a:xfrm>
+          <a:prstGeom prst="rect">
+            <a:avLst/>
+          </a:prstGeom>
+          <a:noFill/>
+          <a:ln/>
+        </p:spPr>
+        <p:txBody>
+          <a:bodyPr wrap="square" rtlCol="0" anchor="ctr"/>
+          <a:lstStyle/>
+          <a:p>
+            <a:pPr indent="0" marL="0">
+              <a:buNone/>
+            </a:pPr>
+            <a:r>
+              <a:rPr lang="en-US" sz="1200" b="1" spc="1000" kern="0" dirty="0">
                 <a:solidFill>
                   <a:srgbClr val="EC4899"/>
                 </a:solidFill>
@@ -6588,36 +6269,36 @@
               </a:rPr>
               <a:t>MUSEUMS</a:t>
             </a:r>
-            <a:endParaRPr lang="en-US" sz="1100" dirty="0"/>
-          </a:p>
-        </p:txBody>
-      </p:sp>
-      <p:sp>
-        <p:nvSpPr>
-          <p:cNvPr id="8" name="Text 6"/>
-          <p:cNvSpPr/>
-          <p:nvPr/>
-        </p:nvSpPr>
-        <p:spPr>
-          <a:xfrm>
-            <a:off x="3474720" y="3090672"/>
-            <a:ext cx="8229600" cy="365760"/>
-          </a:xfrm>
-          <a:prstGeom prst="rect">
-            <a:avLst/>
-          </a:prstGeom>
-          <a:noFill/>
-          <a:ln/>
-        </p:spPr>
-        <p:txBody>
-          <a:bodyPr wrap="square" rtlCol="0" anchor="ctr"/>
-          <a:lstStyle/>
-          <a:p>
-            <a:pPr indent="0" marL="0">
-              <a:buNone/>
-            </a:pPr>
-            <a:r>
-              <a:rPr lang="en-US" sz="1700" dirty="0">
+            <a:endParaRPr lang="en-US" sz="1200" dirty="0"/>
+          </a:p>
+        </p:txBody>
+      </p:sp>
+      <p:sp>
+        <p:nvSpPr>
+          <p:cNvPr id="7" name="Text 5"/>
+          <p:cNvSpPr/>
+          <p:nvPr/>
+        </p:nvSpPr>
+        <p:spPr>
+          <a:xfrm>
+            <a:off x="3566160" y="3639312"/>
+            <a:ext cx="8229600" cy="457200"/>
+          </a:xfrm>
+          <a:prstGeom prst="rect">
+            <a:avLst/>
+          </a:prstGeom>
+          <a:noFill/>
+          <a:ln/>
+        </p:spPr>
+        <p:txBody>
+          <a:bodyPr wrap="square" rtlCol="0" anchor="ctr"/>
+          <a:lstStyle/>
+          <a:p>
+            <a:pPr indent="0" marL="0">
+              <a:buNone/>
+            </a:pPr>
+            <a:r>
+              <a:rPr lang="en-US" sz="2000" dirty="0">
                 <a:solidFill>
                   <a:srgbClr val="111418"/>
                 </a:solidFill>
@@ -6625,61 +6306,38 @@
                 <a:ea typeface="Trebuchet MS" pitchFamily="34" charset="-122"/>
                 <a:cs typeface="Trebuchet MS" pitchFamily="34" charset="-120"/>
               </a:rPr>
-              <a:t>Touchscreens, projections and controller installations.</a:t>
-            </a:r>
-            <a:endParaRPr lang="en-US" sz="1700" dirty="0"/>
-          </a:p>
-        </p:txBody>
-      </p:sp>
-      <p:sp>
-        <p:nvSpPr>
-          <p:cNvPr id="9" name="Shape 7"/>
-          <p:cNvSpPr/>
-          <p:nvPr/>
-        </p:nvSpPr>
-        <p:spPr>
-          <a:xfrm>
-            <a:off x="548640" y="3593592"/>
-            <a:ext cx="11094415" cy="0"/>
-          </a:xfrm>
-          <a:prstGeom prst="line">
-            <a:avLst/>
-          </a:prstGeom>
-          <a:noFill/>
-          <a:ln w="9525">
-            <a:solidFill>
-              <a:srgbClr val="E5E5E2"/>
-            </a:solidFill>
-            <a:prstDash val="solid"/>
-          </a:ln>
-        </p:spPr>
-      </p:sp>
-      <p:sp>
-        <p:nvSpPr>
-          <p:cNvPr id="10" name="Text 8"/>
-          <p:cNvSpPr/>
-          <p:nvPr/>
-        </p:nvSpPr>
-        <p:spPr>
-          <a:xfrm>
-            <a:off x="548640" y="3803904"/>
-            <a:ext cx="2926080" cy="365760"/>
-          </a:xfrm>
-          <a:prstGeom prst="rect">
-            <a:avLst/>
-          </a:prstGeom>
-          <a:noFill/>
-          <a:ln/>
-        </p:spPr>
-        <p:txBody>
-          <a:bodyPr wrap="square" rtlCol="0" anchor="ctr"/>
-          <a:lstStyle/>
-          <a:p>
-            <a:pPr indent="0" marL="0">
-              <a:buNone/>
-            </a:pPr>
-            <a:r>
-              <a:rPr lang="en-US" sz="1100" b="1" spc="600" kern="0" dirty="0">
+              <a:t>Touchscreens, projections, controller installations.</a:t>
+            </a:r>
+            <a:endParaRPr lang="en-US" sz="2000" dirty="0"/>
+          </a:p>
+        </p:txBody>
+      </p:sp>
+      <p:sp>
+        <p:nvSpPr>
+          <p:cNvPr id="8" name="Text 6"/>
+          <p:cNvSpPr/>
+          <p:nvPr/>
+        </p:nvSpPr>
+        <p:spPr>
+          <a:xfrm>
+            <a:off x="548640" y="4352544"/>
+            <a:ext cx="2926080" cy="457200"/>
+          </a:xfrm>
+          <a:prstGeom prst="rect">
+            <a:avLst/>
+          </a:prstGeom>
+          <a:noFill/>
+          <a:ln/>
+        </p:spPr>
+        <p:txBody>
+          <a:bodyPr wrap="square" rtlCol="0" anchor="ctr"/>
+          <a:lstStyle/>
+          <a:p>
+            <a:pPr indent="0" marL="0">
+              <a:buNone/>
+            </a:pPr>
+            <a:r>
+              <a:rPr lang="en-US" sz="1200" b="1" spc="1000" kern="0" dirty="0">
                 <a:solidFill>
                   <a:srgbClr val="10B981"/>
                 </a:solidFill>
@@ -6689,36 +6347,36 @@
               </a:rPr>
               <a:t>RESEARCHERS</a:t>
             </a:r>
-            <a:endParaRPr lang="en-US" sz="1100" dirty="0"/>
-          </a:p>
-        </p:txBody>
-      </p:sp>
-      <p:sp>
-        <p:nvSpPr>
-          <p:cNvPr id="11" name="Text 9"/>
-          <p:cNvSpPr/>
-          <p:nvPr/>
-        </p:nvSpPr>
-        <p:spPr>
-          <a:xfrm>
-            <a:off x="3474720" y="3803904"/>
-            <a:ext cx="8229600" cy="365760"/>
-          </a:xfrm>
-          <a:prstGeom prst="rect">
-            <a:avLst/>
-          </a:prstGeom>
-          <a:noFill/>
-          <a:ln/>
-        </p:spPr>
-        <p:txBody>
-          <a:bodyPr wrap="square" rtlCol="0" anchor="ctr"/>
-          <a:lstStyle/>
-          <a:p>
-            <a:pPr indent="0" marL="0">
-              <a:buNone/>
-            </a:pPr>
-            <a:r>
-              <a:rPr lang="en-US" sz="1700" dirty="0">
+            <a:endParaRPr lang="en-US" sz="1200" dirty="0"/>
+          </a:p>
+        </p:txBody>
+      </p:sp>
+      <p:sp>
+        <p:nvSpPr>
+          <p:cNvPr id="9" name="Text 7"/>
+          <p:cNvSpPr/>
+          <p:nvPr/>
+        </p:nvSpPr>
+        <p:spPr>
+          <a:xfrm>
+            <a:off x="3566160" y="4352544"/>
+            <a:ext cx="8229600" cy="457200"/>
+          </a:xfrm>
+          <a:prstGeom prst="rect">
+            <a:avLst/>
+          </a:prstGeom>
+          <a:noFill/>
+          <a:ln/>
+        </p:spPr>
+        <p:txBody>
+          <a:bodyPr wrap="square" rtlCol="0" anchor="ctr"/>
+          <a:lstStyle/>
+          <a:p>
+            <a:pPr indent="0" marL="0">
+              <a:buNone/>
+            </a:pPr>
+            <a:r>
+              <a:rPr lang="en-US" sz="2000" dirty="0">
                 <a:solidFill>
                   <a:srgbClr val="111418"/>
                 </a:solidFill>
@@ -6726,63 +6384,40 @@
                 <a:ea typeface="Trebuchet MS" pitchFamily="34" charset="-122"/>
                 <a:cs typeface="Trebuchet MS" pitchFamily="34" charset="-120"/>
               </a:rPr>
-              <a:t>Real elevation and historical layers with shareable views.</a:t>
-            </a:r>
-            <a:endParaRPr lang="en-US" sz="1700" dirty="0"/>
-          </a:p>
-        </p:txBody>
-      </p:sp>
-      <p:sp>
-        <p:nvSpPr>
-          <p:cNvPr id="12" name="Shape 10"/>
-          <p:cNvSpPr/>
-          <p:nvPr/>
-        </p:nvSpPr>
-        <p:spPr>
-          <a:xfrm>
-            <a:off x="548640" y="4306824"/>
-            <a:ext cx="11094415" cy="0"/>
-          </a:xfrm>
-          <a:prstGeom prst="line">
-            <a:avLst/>
-          </a:prstGeom>
-          <a:noFill/>
-          <a:ln w="9525">
-            <a:solidFill>
-              <a:srgbClr val="E5E5E2"/>
-            </a:solidFill>
-            <a:prstDash val="solid"/>
-          </a:ln>
-        </p:spPr>
-      </p:sp>
-      <p:sp>
-        <p:nvSpPr>
-          <p:cNvPr id="13" name="Text 11"/>
-          <p:cNvSpPr/>
-          <p:nvPr/>
-        </p:nvSpPr>
-        <p:spPr>
-          <a:xfrm>
-            <a:off x="548640" y="4517136"/>
-            <a:ext cx="2926080" cy="365760"/>
-          </a:xfrm>
-          <a:prstGeom prst="rect">
-            <a:avLst/>
-          </a:prstGeom>
-          <a:noFill/>
-          <a:ln/>
-        </p:spPr>
-        <p:txBody>
-          <a:bodyPr wrap="square" rtlCol="0" anchor="ctr"/>
-          <a:lstStyle/>
-          <a:p>
-            <a:pPr indent="0" marL="0">
-              <a:buNone/>
-            </a:pPr>
-            <a:r>
-              <a:rPr lang="en-US" sz="1100" b="1" spc="600" kern="0" dirty="0">
-                <a:solidFill>
-                  <a:srgbClr val="F59E0B"/>
+              <a:t>Real elevation and historical layers, shareable views.</a:t>
+            </a:r>
+            <a:endParaRPr lang="en-US" sz="2000" dirty="0"/>
+          </a:p>
+        </p:txBody>
+      </p:sp>
+      <p:sp>
+        <p:nvSpPr>
+          <p:cNvPr id="10" name="Text 8"/>
+          <p:cNvSpPr/>
+          <p:nvPr/>
+        </p:nvSpPr>
+        <p:spPr>
+          <a:xfrm>
+            <a:off x="548640" y="5065776"/>
+            <a:ext cx="2926080" cy="457200"/>
+          </a:xfrm>
+          <a:prstGeom prst="rect">
+            <a:avLst/>
+          </a:prstGeom>
+          <a:noFill/>
+          <a:ln/>
+        </p:spPr>
+        <p:txBody>
+          <a:bodyPr wrap="square" rtlCol="0" anchor="ctr"/>
+          <a:lstStyle/>
+          <a:p>
+            <a:pPr indent="0" marL="0">
+              <a:buNone/>
+            </a:pPr>
+            <a:r>
+              <a:rPr lang="en-US" sz="1200" b="1" spc="1000" kern="0" dirty="0">
+                <a:solidFill>
+                  <a:srgbClr val="3B82F6"/>
                 </a:solidFill>
                 <a:latin typeface="IBM Plex Mono" pitchFamily="34" charset="0"/>
                 <a:ea typeface="IBM Plex Mono" pitchFamily="34" charset="-122"/>
@@ -6790,36 +6425,36 @@
               </a:rPr>
               <a:t>MINISTRIES</a:t>
             </a:r>
-            <a:endParaRPr lang="en-US" sz="1100" dirty="0"/>
-          </a:p>
-        </p:txBody>
-      </p:sp>
-      <p:sp>
-        <p:nvSpPr>
-          <p:cNvPr id="14" name="Text 12"/>
-          <p:cNvSpPr/>
-          <p:nvPr/>
-        </p:nvSpPr>
-        <p:spPr>
-          <a:xfrm>
-            <a:off x="3474720" y="4517136"/>
-            <a:ext cx="8229600" cy="365760"/>
-          </a:xfrm>
-          <a:prstGeom prst="rect">
-            <a:avLst/>
-          </a:prstGeom>
-          <a:noFill/>
-          <a:ln/>
-        </p:spPr>
-        <p:txBody>
-          <a:bodyPr wrap="square" rtlCol="0" anchor="ctr"/>
-          <a:lstStyle/>
-          <a:p>
-            <a:pPr indent="0" marL="0">
-              <a:buNone/>
-            </a:pPr>
-            <a:r>
-              <a:rPr lang="en-US" sz="1700" dirty="0">
+            <a:endParaRPr lang="en-US" sz="1200" dirty="0"/>
+          </a:p>
+        </p:txBody>
+      </p:sp>
+      <p:sp>
+        <p:nvSpPr>
+          <p:cNvPr id="11" name="Text 9"/>
+          <p:cNvSpPr/>
+          <p:nvPr/>
+        </p:nvSpPr>
+        <p:spPr>
+          <a:xfrm>
+            <a:off x="3566160" y="5065776"/>
+            <a:ext cx="8229600" cy="457200"/>
+          </a:xfrm>
+          <a:prstGeom prst="rect">
+            <a:avLst/>
+          </a:prstGeom>
+          <a:noFill/>
+          <a:ln/>
+        </p:spPr>
+        <p:txBody>
+          <a:bodyPr wrap="square" rtlCol="0" anchor="ctr"/>
+          <a:lstStyle/>
+          <a:p>
+            <a:pPr indent="0" marL="0">
+              <a:buNone/>
+            </a:pPr>
+            <a:r>
+              <a:rPr lang="en-US" sz="2000" dirty="0">
                 <a:solidFill>
                   <a:srgbClr val="111418"/>
                 </a:solidFill>
@@ -6829,61 +6464,38 @@
               </a:rPr>
               <a:t>Scenario tools for water, agriculture and ecology.</a:t>
             </a:r>
-            <a:endParaRPr lang="en-US" sz="1700" dirty="0"/>
-          </a:p>
-        </p:txBody>
-      </p:sp>
-      <p:sp>
-        <p:nvSpPr>
-          <p:cNvPr id="15" name="Shape 13"/>
-          <p:cNvSpPr/>
-          <p:nvPr/>
-        </p:nvSpPr>
-        <p:spPr>
-          <a:xfrm>
-            <a:off x="548640" y="5020056"/>
-            <a:ext cx="11094415" cy="0"/>
-          </a:xfrm>
-          <a:prstGeom prst="line">
-            <a:avLst/>
-          </a:prstGeom>
-          <a:noFill/>
-          <a:ln w="9525">
-            <a:solidFill>
-              <a:srgbClr val="E5E5E2"/>
-            </a:solidFill>
-            <a:prstDash val="solid"/>
-          </a:ln>
-        </p:spPr>
-      </p:sp>
-      <p:sp>
-        <p:nvSpPr>
-          <p:cNvPr id="16" name="Text 14"/>
-          <p:cNvSpPr/>
-          <p:nvPr/>
-        </p:nvSpPr>
-        <p:spPr>
-          <a:xfrm>
-            <a:off x="548640" y="5230368"/>
-            <a:ext cx="2926080" cy="365760"/>
-          </a:xfrm>
-          <a:prstGeom prst="rect">
-            <a:avLst/>
-          </a:prstGeom>
-          <a:noFill/>
-          <a:ln/>
-        </p:spPr>
-        <p:txBody>
-          <a:bodyPr wrap="square" rtlCol="0" anchor="ctr"/>
-          <a:lstStyle/>
-          <a:p>
-            <a:pPr indent="0" marL="0">
-              <a:buNone/>
-            </a:pPr>
-            <a:r>
-              <a:rPr lang="en-US" sz="1100" b="1" spc="600" kern="0" dirty="0">
-                <a:solidFill>
-                  <a:srgbClr val="3B82F6"/>
+            <a:endParaRPr lang="en-US" sz="2000" dirty="0"/>
+          </a:p>
+        </p:txBody>
+      </p:sp>
+      <p:sp>
+        <p:nvSpPr>
+          <p:cNvPr id="12" name="Text 10"/>
+          <p:cNvSpPr/>
+          <p:nvPr/>
+        </p:nvSpPr>
+        <p:spPr>
+          <a:xfrm>
+            <a:off x="548640" y="5779008"/>
+            <a:ext cx="2926080" cy="457200"/>
+          </a:xfrm>
+          <a:prstGeom prst="rect">
+            <a:avLst/>
+          </a:prstGeom>
+          <a:noFill/>
+          <a:ln/>
+        </p:spPr>
+        <p:txBody>
+          <a:bodyPr wrap="square" rtlCol="0" anchor="ctr"/>
+          <a:lstStyle/>
+          <a:p>
+            <a:pPr indent="0" marL="0">
+              <a:buNone/>
+            </a:pPr>
+            <a:r>
+              <a:rPr lang="en-US" sz="1200" b="1" spc="1000" kern="0" dirty="0">
+                <a:solidFill>
+                  <a:srgbClr val="EC4899"/>
                 </a:solidFill>
                 <a:latin typeface="IBM Plex Mono" pitchFamily="34" charset="0"/>
                 <a:ea typeface="IBM Plex Mono" pitchFamily="34" charset="-122"/>
@@ -6891,36 +6503,36 @@
               </a:rPr>
               <a:t>PUBLIC</a:t>
             </a:r>
-            <a:endParaRPr lang="en-US" sz="1100" dirty="0"/>
-          </a:p>
-        </p:txBody>
-      </p:sp>
-      <p:sp>
-        <p:nvSpPr>
-          <p:cNvPr id="17" name="Text 15"/>
-          <p:cNvSpPr/>
-          <p:nvPr/>
-        </p:nvSpPr>
-        <p:spPr>
-          <a:xfrm>
-            <a:off x="3474720" y="5230368"/>
-            <a:ext cx="8229600" cy="365760"/>
-          </a:xfrm>
-          <a:prstGeom prst="rect">
-            <a:avLst/>
-          </a:prstGeom>
-          <a:noFill/>
-          <a:ln/>
-        </p:spPr>
-        <p:txBody>
-          <a:bodyPr wrap="square" rtlCol="0" anchor="ctr"/>
-          <a:lstStyle/>
-          <a:p>
-            <a:pPr indent="0" marL="0">
-              <a:buNone/>
-            </a:pPr>
-            <a:r>
-              <a:rPr lang="en-US" sz="1700" dirty="0">
+            <a:endParaRPr lang="en-US" sz="1200" dirty="0"/>
+          </a:p>
+        </p:txBody>
+      </p:sp>
+      <p:sp>
+        <p:nvSpPr>
+          <p:cNvPr id="13" name="Text 11"/>
+          <p:cNvSpPr/>
+          <p:nvPr/>
+        </p:nvSpPr>
+        <p:spPr>
+          <a:xfrm>
+            <a:off x="3566160" y="5779008"/>
+            <a:ext cx="8229600" cy="457200"/>
+          </a:xfrm>
+          <a:prstGeom prst="rect">
+            <a:avLst/>
+          </a:prstGeom>
+          <a:noFill/>
+          <a:ln/>
+        </p:spPr>
+        <p:txBody>
+          <a:bodyPr wrap="square" rtlCol="0" anchor="ctr"/>
+          <a:lstStyle/>
+          <a:p>
+            <a:pPr indent="0" marL="0">
+              <a:buNone/>
+            </a:pPr>
+            <a:r>
+              <a:rPr lang="en-US" sz="2000" dirty="0">
                 <a:solidFill>
                   <a:srgbClr val="111418"/>
                 </a:solidFill>
@@ -6930,108 +6542,7 @@
               </a:rPr>
               <a:t>A playable Aral Sea for festivals and exhibitions.</a:t>
             </a:r>
-            <a:endParaRPr lang="en-US" sz="1700" dirty="0"/>
-          </a:p>
-        </p:txBody>
-      </p:sp>
-      <p:sp>
-        <p:nvSpPr>
-          <p:cNvPr id="18" name="Shape 16"/>
-          <p:cNvSpPr/>
-          <p:nvPr/>
-        </p:nvSpPr>
-        <p:spPr>
-          <a:xfrm>
-            <a:off x="548640" y="5733288"/>
-            <a:ext cx="11094415" cy="0"/>
-          </a:xfrm>
-          <a:prstGeom prst="line">
-            <a:avLst/>
-          </a:prstGeom>
-          <a:noFill/>
-          <a:ln w="9525">
-            <a:solidFill>
-              <a:srgbClr val="E5E5E2"/>
-            </a:solidFill>
-            <a:prstDash val="solid"/>
-          </a:ln>
-        </p:spPr>
-      </p:sp>
-      <p:sp>
-        <p:nvSpPr>
-          <p:cNvPr id="19" name="Text 17"/>
-          <p:cNvSpPr/>
-          <p:nvPr/>
-        </p:nvSpPr>
-        <p:spPr>
-          <a:xfrm>
-            <a:off x="10728655" y="6400800"/>
-            <a:ext cx="1097280" cy="274320"/>
-          </a:xfrm>
-          <a:prstGeom prst="rect">
-            <a:avLst/>
-          </a:prstGeom>
-          <a:noFill/>
-          <a:ln/>
-        </p:spPr>
-        <p:txBody>
-          <a:bodyPr wrap="square" rtlCol="0" anchor="ctr"/>
-          <a:lstStyle/>
-          <a:p>
-            <a:pPr algn="r" indent="0" marL="0">
-              <a:buNone/>
-            </a:pPr>
-            <a:r>
-              <a:rPr lang="en-US" sz="900" dirty="0">
-                <a:solidFill>
-                  <a:srgbClr val="5B6068"/>
-                </a:solidFill>
-                <a:latin typeface="IBM Plex Mono" pitchFamily="34" charset="0"/>
-                <a:ea typeface="IBM Plex Mono" pitchFamily="34" charset="-122"/>
-                <a:cs typeface="IBM Plex Mono" pitchFamily="34" charset="-120"/>
-              </a:rPr>
-              <a:t>07 / 14</a:t>
-            </a:r>
-            <a:endParaRPr lang="en-US" sz="900" dirty="0"/>
-          </a:p>
-        </p:txBody>
-      </p:sp>
-      <p:sp>
-        <p:nvSpPr>
-          <p:cNvPr id="20" name="Text 18"/>
-          <p:cNvSpPr/>
-          <p:nvPr/>
-        </p:nvSpPr>
-        <p:spPr>
-          <a:xfrm>
-            <a:off x="548640" y="6400800"/>
-            <a:ext cx="5486400" cy="274320"/>
-          </a:xfrm>
-          <a:prstGeom prst="rect">
-            <a:avLst/>
-          </a:prstGeom>
-          <a:noFill/>
-          <a:ln/>
-        </p:spPr>
-        <p:txBody>
-          <a:bodyPr wrap="square" rtlCol="0" anchor="ctr"/>
-          <a:lstStyle/>
-          <a:p>
-            <a:pPr indent="0" marL="0">
-              <a:buNone/>
-            </a:pPr>
-            <a:r>
-              <a:rPr lang="en-US" sz="900" spc="600" kern="0" dirty="0">
-                <a:solidFill>
-                  <a:srgbClr val="5B6068"/>
-                </a:solidFill>
-                <a:latin typeface="IBM Plex Mono" pitchFamily="34" charset="0"/>
-                <a:ea typeface="IBM Plex Mono" pitchFamily="34" charset="-122"/>
-                <a:cs typeface="IBM Plex Mono" pitchFamily="34" charset="-120"/>
-              </a:rPr>
-              <a:t>ARAL3D</a:t>
-            </a:r>
-            <a:endParaRPr lang="en-US" sz="900" dirty="0"/>
+            <a:endParaRPr lang="en-US" sz="2000" dirty="0"/>
           </a:p>
         </p:txBody>
       </p:sp>
@@ -7075,24 +6586,24 @@
         </p:nvSpPr>
         <p:spPr>
           <a:xfrm>
-            <a:off x="548640" y="457200"/>
-            <a:ext cx="9144000" cy="274320"/>
-          </a:xfrm>
-          <a:prstGeom prst="rect">
-            <a:avLst/>
-          </a:prstGeom>
-          <a:noFill/>
-          <a:ln/>
-        </p:spPr>
-        <p:txBody>
-          <a:bodyPr wrap="square" rtlCol="0" anchor="ctr"/>
-          <a:lstStyle/>
-          <a:p>
-            <a:pPr indent="0" marL="0">
-              <a:buNone/>
-            </a:pPr>
-            <a:r>
-              <a:rPr lang="en-US" sz="900" b="1" spc="800" kern="0" dirty="0">
+            <a:off x="548640" y="822960"/>
+            <a:ext cx="10972800" cy="365760"/>
+          </a:xfrm>
+          <a:prstGeom prst="rect">
+            <a:avLst/>
+          </a:prstGeom>
+          <a:noFill/>
+          <a:ln/>
+        </p:spPr>
+        <p:txBody>
+          <a:bodyPr wrap="square" rtlCol="0" anchor="ctr"/>
+          <a:lstStyle/>
+          <a:p>
+            <a:pPr indent="0" marL="0">
+              <a:buNone/>
+            </a:pPr>
+            <a:r>
+              <a:rPr lang="en-US" sz="1200" b="1" spc="1600" kern="0" dirty="0">
                 <a:solidFill>
                   <a:srgbClr val="EC4899"/>
                 </a:solidFill>
@@ -7102,7 +6613,7 @@
               </a:rPr>
               <a:t>THE ASK</a:t>
             </a:r>
-            <a:endParaRPr lang="en-US" sz="900" dirty="0"/>
+            <a:endParaRPr lang="en-US" sz="1200" dirty="0"/>
           </a:p>
         </p:txBody>
       </p:sp>
@@ -7114,24 +6625,24 @@
         </p:nvSpPr>
         <p:spPr>
           <a:xfrm>
-            <a:off x="548640" y="1463040"/>
-            <a:ext cx="10972800" cy="2194560"/>
-          </a:xfrm>
-          <a:prstGeom prst="rect">
-            <a:avLst/>
-          </a:prstGeom>
-          <a:noFill/>
-          <a:ln/>
-        </p:spPr>
-        <p:txBody>
-          <a:bodyPr wrap="square" rtlCol="0" anchor="ctr"/>
-          <a:lstStyle/>
-          <a:p>
-            <a:pPr indent="0" marL="0">
-              <a:buNone/>
-            </a:pPr>
-            <a:r>
-              <a:rPr lang="en-US" sz="20000" b="1" dirty="0">
+            <a:off x="548640" y="1645920"/>
+            <a:ext cx="10972800" cy="2377440"/>
+          </a:xfrm>
+          <a:prstGeom prst="rect">
+            <a:avLst/>
+          </a:prstGeom>
+          <a:noFill/>
+          <a:ln/>
+        </p:spPr>
+        <p:txBody>
+          <a:bodyPr wrap="square" rtlCol="0" anchor="ctr"/>
+          <a:lstStyle/>
+          <a:p>
+            <a:pPr indent="0" marL="0">
+              <a:buNone/>
+            </a:pPr>
+            <a:r>
+              <a:rPr lang="en-US" sz="22000" b="1" spc="200" kern="0" dirty="0">
                 <a:solidFill>
                   <a:srgbClr val="111418"/>
                 </a:solidFill>
@@ -7141,7 +6652,7 @@
               </a:rPr>
               <a:t>$30,000</a:t>
             </a:r>
-            <a:endParaRPr lang="en-US" sz="20000" dirty="0"/>
+            <a:endParaRPr lang="en-US" sz="22000" dirty="0"/>
           </a:p>
         </p:txBody>
       </p:sp>
@@ -7153,24 +6664,24 @@
         </p:nvSpPr>
         <p:spPr>
           <a:xfrm>
-            <a:off x="548640" y="3840480"/>
-            <a:ext cx="10972800" cy="731520"/>
-          </a:xfrm>
-          <a:prstGeom prst="rect">
-            <a:avLst/>
-          </a:prstGeom>
-          <a:noFill/>
-          <a:ln/>
-        </p:spPr>
-        <p:txBody>
-          <a:bodyPr wrap="square" rtlCol="0" anchor="ctr"/>
-          <a:lstStyle/>
-          <a:p>
-            <a:pPr indent="0" marL="0">
-              <a:buNone/>
-            </a:pPr>
-            <a:r>
-              <a:rPr lang="en-US" sz="3600" i="1" dirty="0">
+            <a:off x="548640" y="4297680"/>
+            <a:ext cx="10972800" cy="822960"/>
+          </a:xfrm>
+          <a:prstGeom prst="rect">
+            <a:avLst/>
+          </a:prstGeom>
+          <a:noFill/>
+          <a:ln/>
+        </p:spPr>
+        <p:txBody>
+          <a:bodyPr wrap="square" rtlCol="0" anchor="ctr"/>
+          <a:lstStyle/>
+          <a:p>
+            <a:pPr indent="0" marL="0">
+              <a:buNone/>
+            </a:pPr>
+            <a:r>
+              <a:rPr lang="en-US" sz="4000" i="1" dirty="0">
                 <a:solidFill>
                   <a:srgbClr val="3B82F6"/>
                 </a:solidFill>
@@ -7180,7 +6691,7 @@
               </a:rPr>
               <a:t>for six months.</a:t>
             </a:r>
-            <a:endParaRPr lang="en-US" sz="3600" dirty="0"/>
+            <a:endParaRPr lang="en-US" sz="4000" dirty="0"/>
           </a:p>
         </p:txBody>
       </p:sp>
@@ -7192,24 +6703,24 @@
         </p:nvSpPr>
         <p:spPr>
           <a:xfrm>
-            <a:off x="548640" y="4754880"/>
-            <a:ext cx="10058400" cy="1371600"/>
-          </a:xfrm>
-          <a:prstGeom prst="rect">
-            <a:avLst/>
-          </a:prstGeom>
-          <a:noFill/>
-          <a:ln/>
-        </p:spPr>
-        <p:txBody>
-          <a:bodyPr wrap="square" rtlCol="0" anchor="ctr"/>
-          <a:lstStyle/>
-          <a:p>
-            <a:pPr indent="0" marL="0">
-              <a:buNone/>
-            </a:pPr>
-            <a:r>
-              <a:rPr lang="en-US" sz="1800" dirty="0">
+            <a:off x="548640" y="5303520"/>
+            <a:ext cx="10058400" cy="1280160"/>
+          </a:xfrm>
+          <a:prstGeom prst="rect">
+            <a:avLst/>
+          </a:prstGeom>
+          <a:noFill/>
+          <a:ln/>
+        </p:spPr>
+        <p:txBody>
+          <a:bodyPr wrap="square" rtlCol="0" anchor="ctr"/>
+          <a:lstStyle/>
+          <a:p>
+            <a:pPr indent="0" marL="0">
+              <a:buNone/>
+            </a:pPr>
+            <a:r>
+              <a:rPr lang="en-US" sz="2000" dirty="0">
                 <a:solidFill>
                   <a:srgbClr val="5B6068"/>
                 </a:solidFill>
@@ -7219,85 +6730,7 @@
               </a:rPr>
               <a:t>Product polish, curriculum integration with the Ministry of Education, and museum-ready versions.</a:t>
             </a:r>
-            <a:endParaRPr lang="en-US" sz="1800" dirty="0"/>
-          </a:p>
-        </p:txBody>
-      </p:sp>
-      <p:sp>
-        <p:nvSpPr>
-          <p:cNvPr id="6" name="Text 4"/>
-          <p:cNvSpPr/>
-          <p:nvPr/>
-        </p:nvSpPr>
-        <p:spPr>
-          <a:xfrm>
-            <a:off x="10728655" y="6400800"/>
-            <a:ext cx="1097280" cy="274320"/>
-          </a:xfrm>
-          <a:prstGeom prst="rect">
-            <a:avLst/>
-          </a:prstGeom>
-          <a:noFill/>
-          <a:ln/>
-        </p:spPr>
-        <p:txBody>
-          <a:bodyPr wrap="square" rtlCol="0" anchor="ctr"/>
-          <a:lstStyle/>
-          <a:p>
-            <a:pPr algn="r" indent="0" marL="0">
-              <a:buNone/>
-            </a:pPr>
-            <a:r>
-              <a:rPr lang="en-US" sz="900" dirty="0">
-                <a:solidFill>
-                  <a:srgbClr val="5B6068"/>
-                </a:solidFill>
-                <a:latin typeface="IBM Plex Mono" pitchFamily="34" charset="0"/>
-                <a:ea typeface="IBM Plex Mono" pitchFamily="34" charset="-122"/>
-                <a:cs typeface="IBM Plex Mono" pitchFamily="34" charset="-120"/>
-              </a:rPr>
-              <a:t>08 / 14</a:t>
-            </a:r>
-            <a:endParaRPr lang="en-US" sz="900" dirty="0"/>
-          </a:p>
-        </p:txBody>
-      </p:sp>
-      <p:sp>
-        <p:nvSpPr>
-          <p:cNvPr id="7" name="Text 5"/>
-          <p:cNvSpPr/>
-          <p:nvPr/>
-        </p:nvSpPr>
-        <p:spPr>
-          <a:xfrm>
-            <a:off x="548640" y="6400800"/>
-            <a:ext cx="5486400" cy="274320"/>
-          </a:xfrm>
-          <a:prstGeom prst="rect">
-            <a:avLst/>
-          </a:prstGeom>
-          <a:noFill/>
-          <a:ln/>
-        </p:spPr>
-        <p:txBody>
-          <a:bodyPr wrap="square" rtlCol="0" anchor="ctr"/>
-          <a:lstStyle/>
-          <a:p>
-            <a:pPr indent="0" marL="0">
-              <a:buNone/>
-            </a:pPr>
-            <a:r>
-              <a:rPr lang="en-US" sz="900" spc="600" kern="0" dirty="0">
-                <a:solidFill>
-                  <a:srgbClr val="5B6068"/>
-                </a:solidFill>
-                <a:latin typeface="IBM Plex Mono" pitchFamily="34" charset="0"/>
-                <a:ea typeface="IBM Plex Mono" pitchFamily="34" charset="-122"/>
-                <a:cs typeface="IBM Plex Mono" pitchFamily="34" charset="-120"/>
-              </a:rPr>
-              <a:t>ARAL3D</a:t>
-            </a:r>
-            <a:endParaRPr lang="en-US" sz="900" dirty="0"/>
+            <a:endParaRPr lang="en-US" sz="2000" dirty="0"/>
           </a:p>
         </p:txBody>
       </p:sp>
@@ -7341,24 +6774,24 @@
         </p:nvSpPr>
         <p:spPr>
           <a:xfrm>
-            <a:off x="548640" y="457200"/>
-            <a:ext cx="9144000" cy="274320"/>
-          </a:xfrm>
-          <a:prstGeom prst="rect">
-            <a:avLst/>
-          </a:prstGeom>
-          <a:noFill/>
-          <a:ln/>
-        </p:spPr>
-        <p:txBody>
-          <a:bodyPr wrap="square" rtlCol="0" anchor="ctr"/>
-          <a:lstStyle/>
-          <a:p>
-            <a:pPr indent="0" marL="0">
-              <a:buNone/>
-            </a:pPr>
-            <a:r>
-              <a:rPr lang="en-US" sz="900" b="1" spc="800" kern="0" dirty="0">
+            <a:off x="548640" y="822960"/>
+            <a:ext cx="10972800" cy="365760"/>
+          </a:xfrm>
+          <a:prstGeom prst="rect">
+            <a:avLst/>
+          </a:prstGeom>
+          <a:noFill/>
+          <a:ln/>
+        </p:spPr>
+        <p:txBody>
+          <a:bodyPr wrap="square" rtlCol="0" anchor="ctr"/>
+          <a:lstStyle/>
+          <a:p>
+            <a:pPr indent="0" marL="0">
+              <a:buNone/>
+            </a:pPr>
+            <a:r>
+              <a:rPr lang="en-US" sz="1200" b="1" spc="1600" kern="0" dirty="0">
                 <a:solidFill>
                   <a:srgbClr val="3B82F6"/>
                 </a:solidFill>
@@ -7368,7 +6801,7 @@
               </a:rPr>
               <a:t>6-MONTH PLAN</a:t>
             </a:r>
-            <a:endParaRPr lang="en-US" sz="900" dirty="0"/>
+            <a:endParaRPr lang="en-US" sz="1200" dirty="0"/>
           </a:p>
         </p:txBody>
       </p:sp>
@@ -7380,24 +6813,24 @@
         </p:nvSpPr>
         <p:spPr>
           <a:xfrm>
-            <a:off x="548640" y="914400"/>
-            <a:ext cx="10972800" cy="914400"/>
-          </a:xfrm>
-          <a:prstGeom prst="rect">
-            <a:avLst/>
-          </a:prstGeom>
-          <a:noFill/>
-          <a:ln/>
-        </p:spPr>
-        <p:txBody>
-          <a:bodyPr wrap="square" rtlCol="0" anchor="ctr"/>
-          <a:lstStyle/>
-          <a:p>
-            <a:pPr indent="0" marL="0">
-              <a:buNone/>
-            </a:pPr>
-            <a:r>
-              <a:rPr lang="en-US" sz="4800" b="1" spc="400" kern="0" dirty="0">
+            <a:off x="548640" y="1463040"/>
+            <a:ext cx="10972800" cy="1097280"/>
+          </a:xfrm>
+          <a:prstGeom prst="rect">
+            <a:avLst/>
+          </a:prstGeom>
+          <a:noFill/>
+          <a:ln/>
+        </p:spPr>
+        <p:txBody>
+          <a:bodyPr wrap="square" rtlCol="0" anchor="ctr"/>
+          <a:lstStyle/>
+          <a:p>
+            <a:pPr indent="0" marL="0">
+              <a:buNone/>
+            </a:pPr>
+            <a:r>
+              <a:rPr lang="en-US" sz="5600" b="1" spc="400" kern="0" dirty="0">
                 <a:solidFill>
                   <a:srgbClr val="111418"/>
                 </a:solidFill>
@@ -7407,7 +6840,7 @@
               </a:rPr>
               <a:t>SIX MONTHS.</a:t>
             </a:r>
-            <a:endParaRPr lang="en-US" sz="4800" dirty="0"/>
+            <a:endParaRPr lang="en-US" sz="5600" dirty="0"/>
           </a:p>
         </p:txBody>
       </p:sp>
@@ -7419,7 +6852,7 @@
         </p:nvSpPr>
         <p:spPr>
           <a:xfrm>
-            <a:off x="548640" y="2286000"/>
+            <a:off x="548640" y="2834640"/>
             <a:ext cx="914400" cy="457200"/>
           </a:xfrm>
           <a:prstGeom prst="rect">
@@ -7436,7 +6869,7 @@
               <a:buNone/>
             </a:pPr>
             <a:r>
-              <a:rPr lang="en-US" sz="1400" b="1" dirty="0">
+              <a:rPr lang="en-US" sz="1600" b="1" dirty="0">
                 <a:solidFill>
                   <a:srgbClr val="3B82F6"/>
                 </a:solidFill>
@@ -7446,7 +6879,7 @@
               </a:rPr>
               <a:t>M1</a:t>
             </a:r>
-            <a:endParaRPr lang="en-US" sz="1400" dirty="0"/>
+            <a:endParaRPr lang="en-US" sz="1600" dirty="0"/>
           </a:p>
         </p:txBody>
       </p:sp>
@@ -7458,7 +6891,7 @@
         </p:nvSpPr>
         <p:spPr>
           <a:xfrm>
-            <a:off x="1645920" y="2286000"/>
+            <a:off x="1737360" y="2834640"/>
             <a:ext cx="10058400" cy="457200"/>
           </a:xfrm>
           <a:prstGeom prst="rect">
@@ -7475,7 +6908,7 @@
               <a:buNone/>
             </a:pPr>
             <a:r>
-              <a:rPr lang="en-US" sz="1800" dirty="0">
+              <a:rPr lang="en-US" sz="2000" dirty="0">
                 <a:solidFill>
                   <a:srgbClr val="111418"/>
                 </a:solidFill>
@@ -7485,42 +6918,19 @@
               </a:rPr>
               <a:t>Polish product, public demo.</a:t>
             </a:r>
-            <a:endParaRPr lang="en-US" sz="1800" dirty="0"/>
-          </a:p>
-        </p:txBody>
-      </p:sp>
-      <p:sp>
-        <p:nvSpPr>
-          <p:cNvPr id="6" name="Shape 4"/>
-          <p:cNvSpPr/>
-          <p:nvPr/>
-        </p:nvSpPr>
-        <p:spPr>
-          <a:xfrm>
-            <a:off x="548640" y="2834640"/>
-            <a:ext cx="11094415" cy="0"/>
-          </a:xfrm>
-          <a:prstGeom prst="line">
-            <a:avLst/>
-          </a:prstGeom>
-          <a:noFill/>
-          <a:ln w="9525">
-            <a:solidFill>
-              <a:srgbClr val="E5E5E2"/>
-            </a:solidFill>
-            <a:prstDash val="solid"/>
-          </a:ln>
-        </p:spPr>
-      </p:sp>
-      <p:sp>
-        <p:nvSpPr>
-          <p:cNvPr id="7" name="Text 5"/>
-          <p:cNvSpPr/>
-          <p:nvPr/>
-        </p:nvSpPr>
-        <p:spPr>
-          <a:xfrm>
-            <a:off x="548640" y="2944368"/>
+            <a:endParaRPr lang="en-US" sz="2000" dirty="0"/>
+          </a:p>
+        </p:txBody>
+      </p:sp>
+      <p:sp>
+        <p:nvSpPr>
+          <p:cNvPr id="6" name="Text 4"/>
+          <p:cNvSpPr/>
+          <p:nvPr/>
+        </p:nvSpPr>
+        <p:spPr>
+          <a:xfrm>
+            <a:off x="548640" y="3474720"/>
             <a:ext cx="914400" cy="457200"/>
           </a:xfrm>
           <a:prstGeom prst="rect">
@@ -7537,7 +6947,7 @@
               <a:buNone/>
             </a:pPr>
             <a:r>
-              <a:rPr lang="en-US" sz="1400" b="1" dirty="0">
+              <a:rPr lang="en-US" sz="1600" b="1" dirty="0">
                 <a:solidFill>
                   <a:srgbClr val="3B82F6"/>
                 </a:solidFill>
@@ -7547,19 +6957,19 @@
               </a:rPr>
               <a:t>M2</a:t>
             </a:r>
-            <a:endParaRPr lang="en-US" sz="1400" dirty="0"/>
-          </a:p>
-        </p:txBody>
-      </p:sp>
-      <p:sp>
-        <p:nvSpPr>
-          <p:cNvPr id="8" name="Text 6"/>
-          <p:cNvSpPr/>
-          <p:nvPr/>
-        </p:nvSpPr>
-        <p:spPr>
-          <a:xfrm>
-            <a:off x="1645920" y="2944368"/>
+            <a:endParaRPr lang="en-US" sz="1600" dirty="0"/>
+          </a:p>
+        </p:txBody>
+      </p:sp>
+      <p:sp>
+        <p:nvSpPr>
+          <p:cNvPr id="7" name="Text 5"/>
+          <p:cNvSpPr/>
+          <p:nvPr/>
+        </p:nvSpPr>
+        <p:spPr>
+          <a:xfrm>
+            <a:off x="1737360" y="3474720"/>
             <a:ext cx="10058400" cy="457200"/>
           </a:xfrm>
           <a:prstGeom prst="rect">
@@ -7576,7 +6986,7 @@
               <a:buNone/>
             </a:pPr>
             <a:r>
-              <a:rPr lang="en-US" sz="1800" dirty="0">
+              <a:rPr lang="en-US" sz="2000" dirty="0">
                 <a:solidFill>
                   <a:srgbClr val="111418"/>
                 </a:solidFill>
@@ -7586,42 +6996,19 @@
               </a:rPr>
               <a:t>Educational version and ministry talks.</a:t>
             </a:r>
-            <a:endParaRPr lang="en-US" sz="1800" dirty="0"/>
-          </a:p>
-        </p:txBody>
-      </p:sp>
-      <p:sp>
-        <p:nvSpPr>
-          <p:cNvPr id="9" name="Shape 7"/>
-          <p:cNvSpPr/>
-          <p:nvPr/>
-        </p:nvSpPr>
-        <p:spPr>
-          <a:xfrm>
-            <a:off x="548640" y="3493008"/>
-            <a:ext cx="11094415" cy="0"/>
-          </a:xfrm>
-          <a:prstGeom prst="line">
-            <a:avLst/>
-          </a:prstGeom>
-          <a:noFill/>
-          <a:ln w="9525">
-            <a:solidFill>
-              <a:srgbClr val="E5E5E2"/>
-            </a:solidFill>
-            <a:prstDash val="solid"/>
-          </a:ln>
-        </p:spPr>
-      </p:sp>
-      <p:sp>
-        <p:nvSpPr>
-          <p:cNvPr id="10" name="Text 8"/>
-          <p:cNvSpPr/>
-          <p:nvPr/>
-        </p:nvSpPr>
-        <p:spPr>
-          <a:xfrm>
-            <a:off x="548640" y="3602736"/>
+            <a:endParaRPr lang="en-US" sz="2000" dirty="0"/>
+          </a:p>
+        </p:txBody>
+      </p:sp>
+      <p:sp>
+        <p:nvSpPr>
+          <p:cNvPr id="8" name="Text 6"/>
+          <p:cNvSpPr/>
+          <p:nvPr/>
+        </p:nvSpPr>
+        <p:spPr>
+          <a:xfrm>
+            <a:off x="548640" y="4114800"/>
             <a:ext cx="914400" cy="457200"/>
           </a:xfrm>
           <a:prstGeom prst="rect">
@@ -7638,7 +7025,7 @@
               <a:buNone/>
             </a:pPr>
             <a:r>
-              <a:rPr lang="en-US" sz="1400" b="1" dirty="0">
+              <a:rPr lang="en-US" sz="1600" b="1" dirty="0">
                 <a:solidFill>
                   <a:srgbClr val="3B82F6"/>
                 </a:solidFill>
@@ -7648,19 +7035,19 @@
               </a:rPr>
               <a:t>M3</a:t>
             </a:r>
-            <a:endParaRPr lang="en-US" sz="1400" dirty="0"/>
-          </a:p>
-        </p:txBody>
-      </p:sp>
-      <p:sp>
-        <p:nvSpPr>
-          <p:cNvPr id="11" name="Text 9"/>
-          <p:cNvSpPr/>
-          <p:nvPr/>
-        </p:nvSpPr>
-        <p:spPr>
-          <a:xfrm>
-            <a:off x="1645920" y="3602736"/>
+            <a:endParaRPr lang="en-US" sz="1600" dirty="0"/>
+          </a:p>
+        </p:txBody>
+      </p:sp>
+      <p:sp>
+        <p:nvSpPr>
+          <p:cNvPr id="9" name="Text 7"/>
+          <p:cNvSpPr/>
+          <p:nvPr/>
+        </p:nvSpPr>
+        <p:spPr>
+          <a:xfrm>
+            <a:off x="1737360" y="4114800"/>
             <a:ext cx="10058400" cy="457200"/>
           </a:xfrm>
           <a:prstGeom prst="rect">
@@ -7677,7 +7064,7 @@
               <a:buNone/>
             </a:pPr>
             <a:r>
-              <a:rPr lang="en-US" sz="1800" dirty="0">
+              <a:rPr lang="en-US" sz="2000" dirty="0">
                 <a:solidFill>
                   <a:srgbClr val="111418"/>
                 </a:solidFill>
@@ -7687,42 +7074,19 @@
               </a:rPr>
               <a:t>First curriculum-ready learning module.</a:t>
             </a:r>
-            <a:endParaRPr lang="en-US" sz="1800" dirty="0"/>
-          </a:p>
-        </p:txBody>
-      </p:sp>
-      <p:sp>
-        <p:nvSpPr>
-          <p:cNvPr id="12" name="Shape 10"/>
-          <p:cNvSpPr/>
-          <p:nvPr/>
-        </p:nvSpPr>
-        <p:spPr>
-          <a:xfrm>
-            <a:off x="548640" y="4151376"/>
-            <a:ext cx="11094415" cy="0"/>
-          </a:xfrm>
-          <a:prstGeom prst="line">
-            <a:avLst/>
-          </a:prstGeom>
-          <a:noFill/>
-          <a:ln w="9525">
-            <a:solidFill>
-              <a:srgbClr val="E5E5E2"/>
-            </a:solidFill>
-            <a:prstDash val="solid"/>
-          </a:ln>
-        </p:spPr>
-      </p:sp>
-      <p:sp>
-        <p:nvSpPr>
-          <p:cNvPr id="13" name="Text 11"/>
-          <p:cNvSpPr/>
-          <p:nvPr/>
-        </p:nvSpPr>
-        <p:spPr>
-          <a:xfrm>
-            <a:off x="548640" y="4261104"/>
+            <a:endParaRPr lang="en-US" sz="2000" dirty="0"/>
+          </a:p>
+        </p:txBody>
+      </p:sp>
+      <p:sp>
+        <p:nvSpPr>
+          <p:cNvPr id="10" name="Text 8"/>
+          <p:cNvSpPr/>
+          <p:nvPr/>
+        </p:nvSpPr>
+        <p:spPr>
+          <a:xfrm>
+            <a:off x="548640" y="4754880"/>
             <a:ext cx="914400" cy="457200"/>
           </a:xfrm>
           <a:prstGeom prst="rect">
@@ -7739,7 +7103,7 @@
               <a:buNone/>
             </a:pPr>
             <a:r>
-              <a:rPr lang="en-US" sz="1400" b="1" dirty="0">
+              <a:rPr lang="en-US" sz="1600" b="1" dirty="0">
                 <a:solidFill>
                   <a:srgbClr val="3B82F6"/>
                 </a:solidFill>
@@ -7749,19 +7113,19 @@
               </a:rPr>
               <a:t>M4</a:t>
             </a:r>
-            <a:endParaRPr lang="en-US" sz="1400" dirty="0"/>
-          </a:p>
-        </p:txBody>
-      </p:sp>
-      <p:sp>
-        <p:nvSpPr>
-          <p:cNvPr id="14" name="Text 12"/>
-          <p:cNvSpPr/>
-          <p:nvPr/>
-        </p:nvSpPr>
-        <p:spPr>
-          <a:xfrm>
-            <a:off x="1645920" y="4261104"/>
+            <a:endParaRPr lang="en-US" sz="1600" dirty="0"/>
+          </a:p>
+        </p:txBody>
+      </p:sp>
+      <p:sp>
+        <p:nvSpPr>
+          <p:cNvPr id="11" name="Text 9"/>
+          <p:cNvSpPr/>
+          <p:nvPr/>
+        </p:nvSpPr>
+        <p:spPr>
+          <a:xfrm>
+            <a:off x="1737360" y="4754880"/>
             <a:ext cx="10058400" cy="457200"/>
           </a:xfrm>
           <a:prstGeom prst="rect">
@@ -7778,7 +7142,7 @@
               <a:buNone/>
             </a:pPr>
             <a:r>
-              <a:rPr lang="en-US" sz="1800" dirty="0">
+              <a:rPr lang="en-US" sz="2000" dirty="0">
                 <a:solidFill>
                   <a:srgbClr val="111418"/>
                 </a:solidFill>
@@ -7788,42 +7152,19 @@
               </a:rPr>
               <a:t>Adapt for Aral Culture Summit 2026.</a:t>
             </a:r>
-            <a:endParaRPr lang="en-US" sz="1800" dirty="0"/>
-          </a:p>
-        </p:txBody>
-      </p:sp>
-      <p:sp>
-        <p:nvSpPr>
-          <p:cNvPr id="15" name="Shape 13"/>
-          <p:cNvSpPr/>
-          <p:nvPr/>
-        </p:nvSpPr>
-        <p:spPr>
-          <a:xfrm>
-            <a:off x="548640" y="4809744"/>
-            <a:ext cx="11094415" cy="0"/>
-          </a:xfrm>
-          <a:prstGeom prst="line">
-            <a:avLst/>
-          </a:prstGeom>
-          <a:noFill/>
-          <a:ln w="9525">
-            <a:solidFill>
-              <a:srgbClr val="E5E5E2"/>
-            </a:solidFill>
-            <a:prstDash val="solid"/>
-          </a:ln>
-        </p:spPr>
-      </p:sp>
-      <p:sp>
-        <p:nvSpPr>
-          <p:cNvPr id="16" name="Text 14"/>
-          <p:cNvSpPr/>
-          <p:nvPr/>
-        </p:nvSpPr>
-        <p:spPr>
-          <a:xfrm>
-            <a:off x="548640" y="4919472"/>
+            <a:endParaRPr lang="en-US" sz="2000" dirty="0"/>
+          </a:p>
+        </p:txBody>
+      </p:sp>
+      <p:sp>
+        <p:nvSpPr>
+          <p:cNvPr id="12" name="Text 10"/>
+          <p:cNvSpPr/>
+          <p:nvPr/>
+        </p:nvSpPr>
+        <p:spPr>
+          <a:xfrm>
+            <a:off x="548640" y="5394960"/>
             <a:ext cx="914400" cy="457200"/>
           </a:xfrm>
           <a:prstGeom prst="rect">
@@ -7840,7 +7181,7 @@
               <a:buNone/>
             </a:pPr>
             <a:r>
-              <a:rPr lang="en-US" sz="1400" b="1" dirty="0">
+              <a:rPr lang="en-US" sz="1600" b="1" dirty="0">
                 <a:solidFill>
                   <a:srgbClr val="3B82F6"/>
                 </a:solidFill>
@@ -7850,19 +7191,19 @@
               </a:rPr>
               <a:t>M5</a:t>
             </a:r>
-            <a:endParaRPr lang="en-US" sz="1400" dirty="0"/>
-          </a:p>
-        </p:txBody>
-      </p:sp>
-      <p:sp>
-        <p:nvSpPr>
-          <p:cNvPr id="17" name="Text 15"/>
-          <p:cNvSpPr/>
-          <p:nvPr/>
-        </p:nvSpPr>
-        <p:spPr>
-          <a:xfrm>
-            <a:off x="1645920" y="4919472"/>
+            <a:endParaRPr lang="en-US" sz="1600" dirty="0"/>
+          </a:p>
+        </p:txBody>
+      </p:sp>
+      <p:sp>
+        <p:nvSpPr>
+          <p:cNvPr id="13" name="Text 11"/>
+          <p:cNvSpPr/>
+          <p:nvPr/>
+        </p:nvSpPr>
+        <p:spPr>
+          <a:xfrm>
+            <a:off x="1737360" y="5394960"/>
             <a:ext cx="10058400" cy="457200"/>
           </a:xfrm>
           <a:prstGeom prst="rect">
@@ -7879,7 +7220,7 @@
               <a:buNone/>
             </a:pPr>
             <a:r>
-              <a:rPr lang="en-US" sz="1800" dirty="0">
+              <a:rPr lang="en-US" sz="2000" dirty="0">
                 <a:solidFill>
                   <a:srgbClr val="111418"/>
                 </a:solidFill>
@@ -7889,42 +7230,19 @@
               </a:rPr>
               <a:t>Museum versions: Savitsky, Aral Sea Museum, CCA Tashkent.</a:t>
             </a:r>
-            <a:endParaRPr lang="en-US" sz="1800" dirty="0"/>
-          </a:p>
-        </p:txBody>
-      </p:sp>
-      <p:sp>
-        <p:nvSpPr>
-          <p:cNvPr id="18" name="Shape 16"/>
-          <p:cNvSpPr/>
-          <p:nvPr/>
-        </p:nvSpPr>
-        <p:spPr>
-          <a:xfrm>
-            <a:off x="548640" y="5468112"/>
-            <a:ext cx="11094415" cy="0"/>
-          </a:xfrm>
-          <a:prstGeom prst="line">
-            <a:avLst/>
-          </a:prstGeom>
-          <a:noFill/>
-          <a:ln w="9525">
-            <a:solidFill>
-              <a:srgbClr val="E5E5E2"/>
-            </a:solidFill>
-            <a:prstDash val="solid"/>
-          </a:ln>
-        </p:spPr>
-      </p:sp>
-      <p:sp>
-        <p:nvSpPr>
-          <p:cNvPr id="19" name="Text 17"/>
-          <p:cNvSpPr/>
-          <p:nvPr/>
-        </p:nvSpPr>
-        <p:spPr>
-          <a:xfrm>
-            <a:off x="548640" y="5577840"/>
+            <a:endParaRPr lang="en-US" sz="2000" dirty="0"/>
+          </a:p>
+        </p:txBody>
+      </p:sp>
+      <p:sp>
+        <p:nvSpPr>
+          <p:cNvPr id="14" name="Text 12"/>
+          <p:cNvSpPr/>
+          <p:nvPr/>
+        </p:nvSpPr>
+        <p:spPr>
+          <a:xfrm>
+            <a:off x="548640" y="6035040"/>
             <a:ext cx="914400" cy="457200"/>
           </a:xfrm>
           <a:prstGeom prst="rect">
@@ -7941,7 +7259,7 @@
               <a:buNone/>
             </a:pPr>
             <a:r>
-              <a:rPr lang="en-US" sz="1400" b="1" dirty="0">
+              <a:rPr lang="en-US" sz="1600" b="1" dirty="0">
                 <a:solidFill>
                   <a:srgbClr val="3B82F6"/>
                 </a:solidFill>
@@ -7951,19 +7269,19 @@
               </a:rPr>
               <a:t>M6</a:t>
             </a:r>
-            <a:endParaRPr lang="en-US" sz="1400" dirty="0"/>
-          </a:p>
-        </p:txBody>
-      </p:sp>
-      <p:sp>
-        <p:nvSpPr>
-          <p:cNvPr id="20" name="Text 18"/>
-          <p:cNvSpPr/>
-          <p:nvPr/>
-        </p:nvSpPr>
-        <p:spPr>
-          <a:xfrm>
-            <a:off x="1645920" y="5577840"/>
+            <a:endParaRPr lang="en-US" sz="1600" dirty="0"/>
+          </a:p>
+        </p:txBody>
+      </p:sp>
+      <p:sp>
+        <p:nvSpPr>
+          <p:cNvPr id="15" name="Text 13"/>
+          <p:cNvSpPr/>
+          <p:nvPr/>
+        </p:nvSpPr>
+        <p:spPr>
+          <a:xfrm>
+            <a:off x="1737360" y="6035040"/>
             <a:ext cx="10058400" cy="457200"/>
           </a:xfrm>
           <a:prstGeom prst="rect">
@@ -7980,7 +7298,7 @@
               <a:buNone/>
             </a:pPr>
             <a:r>
-              <a:rPr lang="en-US" sz="1800" dirty="0">
+              <a:rPr lang="en-US" sz="2000" dirty="0">
                 <a:solidFill>
                   <a:srgbClr val="111418"/>
                 </a:solidFill>
@@ -7990,108 +7308,7 @@
               </a:rPr>
               <a:t>Documentation, demo video, 3-year roadmap.</a:t>
             </a:r>
-            <a:endParaRPr lang="en-US" sz="1800" dirty="0"/>
-          </a:p>
-        </p:txBody>
-      </p:sp>
-      <p:sp>
-        <p:nvSpPr>
-          <p:cNvPr id="21" name="Shape 19"/>
-          <p:cNvSpPr/>
-          <p:nvPr/>
-        </p:nvSpPr>
-        <p:spPr>
-          <a:xfrm>
-            <a:off x="548640" y="6126480"/>
-            <a:ext cx="11094415" cy="0"/>
-          </a:xfrm>
-          <a:prstGeom prst="line">
-            <a:avLst/>
-          </a:prstGeom>
-          <a:noFill/>
-          <a:ln w="9525">
-            <a:solidFill>
-              <a:srgbClr val="E5E5E2"/>
-            </a:solidFill>
-            <a:prstDash val="solid"/>
-          </a:ln>
-        </p:spPr>
-      </p:sp>
-      <p:sp>
-        <p:nvSpPr>
-          <p:cNvPr id="22" name="Text 20"/>
-          <p:cNvSpPr/>
-          <p:nvPr/>
-        </p:nvSpPr>
-        <p:spPr>
-          <a:xfrm>
-            <a:off x="10728655" y="6400800"/>
-            <a:ext cx="1097280" cy="274320"/>
-          </a:xfrm>
-          <a:prstGeom prst="rect">
-            <a:avLst/>
-          </a:prstGeom>
-          <a:noFill/>
-          <a:ln/>
-        </p:spPr>
-        <p:txBody>
-          <a:bodyPr wrap="square" rtlCol="0" anchor="ctr"/>
-          <a:lstStyle/>
-          <a:p>
-            <a:pPr algn="r" indent="0" marL="0">
-              <a:buNone/>
-            </a:pPr>
-            <a:r>
-              <a:rPr lang="en-US" sz="900" dirty="0">
-                <a:solidFill>
-                  <a:srgbClr val="5B6068"/>
-                </a:solidFill>
-                <a:latin typeface="IBM Plex Mono" pitchFamily="34" charset="0"/>
-                <a:ea typeface="IBM Plex Mono" pitchFamily="34" charset="-122"/>
-                <a:cs typeface="IBM Plex Mono" pitchFamily="34" charset="-120"/>
-              </a:rPr>
-              <a:t>09 / 14</a:t>
-            </a:r>
-            <a:endParaRPr lang="en-US" sz="900" dirty="0"/>
-          </a:p>
-        </p:txBody>
-      </p:sp>
-      <p:sp>
-        <p:nvSpPr>
-          <p:cNvPr id="23" name="Text 21"/>
-          <p:cNvSpPr/>
-          <p:nvPr/>
-        </p:nvSpPr>
-        <p:spPr>
-          <a:xfrm>
-            <a:off x="548640" y="6400800"/>
-            <a:ext cx="5486400" cy="274320"/>
-          </a:xfrm>
-          <a:prstGeom prst="rect">
-            <a:avLst/>
-          </a:prstGeom>
-          <a:noFill/>
-          <a:ln/>
-        </p:spPr>
-        <p:txBody>
-          <a:bodyPr wrap="square" rtlCol="0" anchor="ctr"/>
-          <a:lstStyle/>
-          <a:p>
-            <a:pPr indent="0" marL="0">
-              <a:buNone/>
-            </a:pPr>
-            <a:r>
-              <a:rPr lang="en-US" sz="900" spc="600" kern="0" dirty="0">
-                <a:solidFill>
-                  <a:srgbClr val="5B6068"/>
-                </a:solidFill>
-                <a:latin typeface="IBM Plex Mono" pitchFamily="34" charset="0"/>
-                <a:ea typeface="IBM Plex Mono" pitchFamily="34" charset="-122"/>
-                <a:cs typeface="IBM Plex Mono" pitchFamily="34" charset="-120"/>
-              </a:rPr>
-              <a:t>ARAL3D</a:t>
-            </a:r>
-            <a:endParaRPr lang="en-US" sz="900" dirty="0"/>
+            <a:endParaRPr lang="en-US" sz="2000" dirty="0"/>
           </a:p>
         </p:txBody>
       </p:sp>

--- a/public/aral3d-presentation.pptx
+++ b/public/aral3d-presentation.pptx
@@ -2129,8 +2129,8 @@
         </p:nvSpPr>
         <p:spPr>
           <a:xfrm>
-            <a:off x="548640" y="1463040"/>
-            <a:ext cx="10972800" cy="457200"/>
+            <a:off x="548640" y="822960"/>
+            <a:ext cx="10972800" cy="365760"/>
           </a:xfrm>
           <a:prstGeom prst="rect">
             <a:avLst/>
@@ -2146,7 +2146,7 @@
               <a:buNone/>
             </a:pPr>
             <a:r>
-              <a:rPr lang="en-US" sz="1400" b="1" spc="2400" kern="0" dirty="0">
+              <a:rPr lang="en-US" sz="1300" b="1" spc="2400" kern="0" dirty="0">
                 <a:solidFill>
                   <a:srgbClr val="FFFFFF"/>
                 </a:solidFill>
@@ -2156,7 +2156,7 @@
               </a:rPr>
               <a:t>LEVEL 00</a:t>
             </a:r>
-            <a:endParaRPr lang="en-US" sz="1400" dirty="0"/>
+            <a:endParaRPr lang="en-US" sz="1300" dirty="0"/>
           </a:p>
         </p:txBody>
       </p:sp>
@@ -2168,8 +2168,8 @@
         </p:nvSpPr>
         <p:spPr>
           <a:xfrm>
-            <a:off x="548640" y="2194560"/>
-            <a:ext cx="10972800" cy="2011680"/>
+            <a:off x="548640" y="2011680"/>
+            <a:ext cx="10972800" cy="1645920"/>
           </a:xfrm>
           <a:prstGeom prst="rect">
             <a:avLst/>
@@ -2185,7 +2185,7 @@
               <a:buNone/>
             </a:pPr>
             <a:r>
-              <a:rPr lang="en-US" sz="20000" b="1" spc="800" kern="0" dirty="0">
+              <a:rPr lang="en-US" sz="14000" b="1" spc="1000" kern="0" dirty="0">
                 <a:solidFill>
                   <a:srgbClr val="FFFFFF"/>
                 </a:solidFill>
@@ -2195,7 +2195,7 @@
               </a:rPr>
               <a:t>ARAL3D</a:t>
             </a:r>
-            <a:endParaRPr lang="en-US" sz="20000" dirty="0"/>
+            <a:endParaRPr lang="en-US" sz="14000" dirty="0"/>
           </a:p>
         </p:txBody>
       </p:sp>
@@ -2207,7 +2207,7 @@
         </p:nvSpPr>
         <p:spPr>
           <a:xfrm>
-            <a:off x="548640" y="4572000"/>
+            <a:off x="548640" y="4023360"/>
             <a:ext cx="10972800" cy="640080"/>
           </a:xfrm>
           <a:prstGeom prst="rect">
@@ -2224,7 +2224,7 @@
               <a:buNone/>
             </a:pPr>
             <a:r>
-              <a:rPr lang="en-US" sz="3200" i="1" dirty="0">
+              <a:rPr lang="en-US" sz="3000" i="1" dirty="0">
                 <a:solidFill>
                   <a:srgbClr val="F5F1FF"/>
                 </a:solidFill>
@@ -2234,7 +2234,7 @@
               </a:rPr>
               <a:t>A 3D platform for the Aral Sea basin.</a:t>
             </a:r>
-            <a:endParaRPr lang="en-US" sz="3200" dirty="0"/>
+            <a:endParaRPr lang="en-US" sz="3000" dirty="0"/>
           </a:p>
         </p:txBody>
       </p:sp>
@@ -2246,7 +2246,7 @@
         </p:nvSpPr>
         <p:spPr>
           <a:xfrm>
-            <a:off x="548640" y="5212080"/>
+            <a:off x="548640" y="4663440"/>
             <a:ext cx="10972800" cy="640080"/>
           </a:xfrm>
           <a:prstGeom prst="rect">
@@ -2263,7 +2263,7 @@
               <a:buNone/>
             </a:pPr>
             <a:r>
-              <a:rPr lang="en-US" sz="2800" i="1" dirty="0">
+              <a:rPr lang="en-US" sz="2400" i="1" dirty="0">
                 <a:solidFill>
                   <a:srgbClr val="F5F1FF"/>
                 </a:solidFill>
@@ -2273,7 +2273,7 @@
               </a:rPr>
               <a:t>An educational game and a data exploration tool.</a:t>
             </a:r>
-            <a:endParaRPr lang="en-US" sz="2800" dirty="0"/>
+            <a:endParaRPr lang="en-US" sz="2400" dirty="0"/>
           </a:p>
         </p:txBody>
       </p:sp>
@@ -2285,8 +2285,8 @@
         </p:nvSpPr>
         <p:spPr>
           <a:xfrm>
-            <a:off x="3992728" y="5989320"/>
-            <a:ext cx="4206240" cy="777240"/>
+            <a:off x="3626968" y="5760720"/>
+            <a:ext cx="4937760" cy="777240"/>
           </a:xfrm>
           <a:prstGeom prst="rect">
             <a:avLst>
@@ -2312,7 +2312,7 @@
         </p:nvSpPr>
         <p:spPr>
           <a:xfrm>
-            <a:off x="4157320" y="6108192"/>
+            <a:off x="3791560" y="5879592"/>
             <a:ext cx="548640" cy="548640"/>
           </a:xfrm>
           <a:prstGeom prst="ellipse">
@@ -2337,7 +2337,7 @@
         </p:nvSpPr>
         <p:spPr>
           <a:xfrm>
-            <a:off x="4157320" y="6108192"/>
+            <a:off x="3791560" y="5879592"/>
             <a:ext cx="548640" cy="548640"/>
           </a:xfrm>
           <a:prstGeom prst="rect">
@@ -2376,8 +2376,8 @@
         </p:nvSpPr>
         <p:spPr>
           <a:xfrm>
-            <a:off x="4861408" y="6153912"/>
-            <a:ext cx="3246120" cy="457200"/>
+            <a:off x="4495648" y="5760720"/>
+            <a:ext cx="3931920" cy="777240"/>
           </a:xfrm>
           <a:prstGeom prst="rect">
             <a:avLst/>
@@ -5506,8 +5506,8 @@
         </p:nvSpPr>
         <p:spPr>
           <a:xfrm>
-            <a:off x="457200" y="457200"/>
-            <a:ext cx="5669280" cy="1554480"/>
+            <a:off x="0" y="5120640"/>
+            <a:ext cx="12191695" cy="1737360"/>
           </a:xfrm>
           <a:prstGeom prst="rect">
             <a:avLst/>
@@ -5535,24 +5535,24 @@
         </p:nvSpPr>
         <p:spPr>
           <a:xfrm>
-            <a:off x="685800" y="640080"/>
-            <a:ext cx="5303520" cy="320040"/>
-          </a:xfrm>
-          <a:prstGeom prst="rect">
-            <a:avLst/>
-          </a:prstGeom>
-          <a:noFill/>
-          <a:ln/>
-        </p:spPr>
-        <p:txBody>
-          <a:bodyPr wrap="square" rtlCol="0" anchor="ctr"/>
-          <a:lstStyle/>
-          <a:p>
-            <a:pPr indent="0" marL="0">
-              <a:buNone/>
-            </a:pPr>
-            <a:r>
-              <a:rPr lang="en-US" sz="1100" b="1" spc="1000" kern="0" dirty="0">
+            <a:off x="640080" y="5303520"/>
+            <a:ext cx="10972800" cy="320040"/>
+          </a:xfrm>
+          <a:prstGeom prst="rect">
+            <a:avLst/>
+          </a:prstGeom>
+          <a:noFill/>
+          <a:ln/>
+        </p:spPr>
+        <p:txBody>
+          <a:bodyPr wrap="square" rtlCol="0" anchor="ctr"/>
+          <a:lstStyle/>
+          <a:p>
+            <a:pPr indent="0" marL="0">
+              <a:buNone/>
+            </a:pPr>
+            <a:r>
+              <a:rPr lang="en-US" sz="1200" b="1" spc="1200" kern="0" dirty="0">
                 <a:solidFill>
                   <a:srgbClr val="3B82F6"/>
                 </a:solidFill>
@@ -5562,7 +5562,7 @@
               </a:rPr>
               <a:t>LEVEL 01 · GAME</a:t>
             </a:r>
-            <a:endParaRPr lang="en-US" sz="1100" dirty="0"/>
+            <a:endParaRPr lang="en-US" sz="1200" dirty="0"/>
           </a:p>
         </p:txBody>
       </p:sp>
@@ -5574,24 +5574,24 @@
         </p:nvSpPr>
         <p:spPr>
           <a:xfrm>
-            <a:off x="685800" y="1005840"/>
-            <a:ext cx="5303520" cy="502920"/>
-          </a:xfrm>
-          <a:prstGeom prst="rect">
-            <a:avLst/>
-          </a:prstGeom>
-          <a:noFill/>
-          <a:ln/>
-        </p:spPr>
-        <p:txBody>
-          <a:bodyPr wrap="square" rtlCol="0" anchor="ctr"/>
-          <a:lstStyle/>
-          <a:p>
-            <a:pPr indent="0" marL="0">
-              <a:buNone/>
-            </a:pPr>
-            <a:r>
-              <a:rPr lang="en-US" sz="2600" b="1" dirty="0">
+            <a:off x="640080" y="5669280"/>
+            <a:ext cx="10972800" cy="640080"/>
+          </a:xfrm>
+          <a:prstGeom prst="rect">
+            <a:avLst/>
+          </a:prstGeom>
+          <a:noFill/>
+          <a:ln/>
+        </p:spPr>
+        <p:txBody>
+          <a:bodyPr wrap="square" rtlCol="0" anchor="ctr"/>
+          <a:lstStyle/>
+          <a:p>
+            <a:pPr indent="0" marL="0">
+              <a:buNone/>
+            </a:pPr>
+            <a:r>
+              <a:rPr lang="en-US" sz="3600" b="1" spc="400" kern="0" dirty="0">
                 <a:solidFill>
                   <a:srgbClr val="FFFFFF"/>
                 </a:solidFill>
@@ -5601,7 +5601,7 @@
               </a:rPr>
               <a:t>WELCOME TO NUKUS</a:t>
             </a:r>
-            <a:endParaRPr lang="en-US" sz="2600" dirty="0"/>
+            <a:endParaRPr lang="en-US" sz="3600" dirty="0"/>
           </a:p>
         </p:txBody>
       </p:sp>
@@ -5613,24 +5613,24 @@
         </p:nvSpPr>
         <p:spPr>
           <a:xfrm>
-            <a:off x="685800" y="1508760"/>
-            <a:ext cx="5303520" cy="457200"/>
-          </a:xfrm>
-          <a:prstGeom prst="rect">
-            <a:avLst/>
-          </a:prstGeom>
-          <a:noFill/>
-          <a:ln/>
-        </p:spPr>
-        <p:txBody>
-          <a:bodyPr wrap="square" rtlCol="0" anchor="ctr"/>
-          <a:lstStyle/>
-          <a:p>
-            <a:pPr indent="0" marL="0">
-              <a:buNone/>
-            </a:pPr>
-            <a:r>
-              <a:rPr lang="en-US" sz="1600" i="1" dirty="0">
+            <a:off x="640080" y="6309360"/>
+            <a:ext cx="10972800" cy="365760"/>
+          </a:xfrm>
+          <a:prstGeom prst="rect">
+            <a:avLst/>
+          </a:prstGeom>
+          <a:noFill/>
+          <a:ln/>
+        </p:spPr>
+        <p:txBody>
+          <a:bodyPr wrap="square" rtlCol="0" anchor="ctr"/>
+          <a:lstStyle/>
+          <a:p>
+            <a:pPr indent="0" marL="0">
+              <a:buNone/>
+            </a:pPr>
+            <a:r>
+              <a:rPr lang="en-US" sz="1800" i="1" dirty="0">
                 <a:solidFill>
                   <a:srgbClr val="F5F1FF"/>
                 </a:solidFill>
@@ -5640,7 +5640,7 @@
               </a:rPr>
               <a:t>Travel to the capital of Karakalpakstan.</a:t>
             </a:r>
-            <a:endParaRPr lang="en-US" sz="1600" dirty="0"/>
+            <a:endParaRPr lang="en-US" sz="1800" dirty="0"/>
           </a:p>
         </p:txBody>
       </p:sp>
@@ -5707,8 +5707,8 @@
         </p:nvSpPr>
         <p:spPr>
           <a:xfrm>
-            <a:off x="457200" y="457200"/>
-            <a:ext cx="5669280" cy="1554480"/>
+            <a:off x="0" y="5120640"/>
+            <a:ext cx="12191695" cy="1737360"/>
           </a:xfrm>
           <a:prstGeom prst="rect">
             <a:avLst/>
@@ -5736,24 +5736,24 @@
         </p:nvSpPr>
         <p:spPr>
           <a:xfrm>
-            <a:off x="685800" y="640080"/>
-            <a:ext cx="5303520" cy="320040"/>
-          </a:xfrm>
-          <a:prstGeom prst="rect">
-            <a:avLst/>
-          </a:prstGeom>
-          <a:noFill/>
-          <a:ln/>
-        </p:spPr>
-        <p:txBody>
-          <a:bodyPr wrap="square" rtlCol="0" anchor="ctr"/>
-          <a:lstStyle/>
-          <a:p>
-            <a:pPr indent="0" marL="0">
-              <a:buNone/>
-            </a:pPr>
-            <a:r>
-              <a:rPr lang="en-US" sz="1100" b="1" spc="1000" kern="0" dirty="0">
+            <a:off x="640080" y="5303520"/>
+            <a:ext cx="10972800" cy="320040"/>
+          </a:xfrm>
+          <a:prstGeom prst="rect">
+            <a:avLst/>
+          </a:prstGeom>
+          <a:noFill/>
+          <a:ln/>
+        </p:spPr>
+        <p:txBody>
+          <a:bodyPr wrap="square" rtlCol="0" anchor="ctr"/>
+          <a:lstStyle/>
+          <a:p>
+            <a:pPr indent="0" marL="0">
+              <a:buNone/>
+            </a:pPr>
+            <a:r>
+              <a:rPr lang="en-US" sz="1200" b="1" spc="1200" kern="0" dirty="0">
                 <a:solidFill>
                   <a:srgbClr val="10B981"/>
                 </a:solidFill>
@@ -5763,7 +5763,7 @@
               </a:rPr>
               <a:t>LEVEL 02 · VOXEL</a:t>
             </a:r>
-            <a:endParaRPr lang="en-US" sz="1100" dirty="0"/>
+            <a:endParaRPr lang="en-US" sz="1200" dirty="0"/>
           </a:p>
         </p:txBody>
       </p:sp>
@@ -5775,24 +5775,24 @@
         </p:nvSpPr>
         <p:spPr>
           <a:xfrm>
-            <a:off x="685800" y="1005840"/>
-            <a:ext cx="5303520" cy="502920"/>
-          </a:xfrm>
-          <a:prstGeom prst="rect">
-            <a:avLst/>
-          </a:prstGeom>
-          <a:noFill/>
-          <a:ln/>
-        </p:spPr>
-        <p:txBody>
-          <a:bodyPr wrap="square" rtlCol="0" anchor="ctr"/>
-          <a:lstStyle/>
-          <a:p>
-            <a:pPr indent="0" marL="0">
-              <a:buNone/>
-            </a:pPr>
-            <a:r>
-              <a:rPr lang="en-US" sz="2600" b="1" dirty="0">
+            <a:off x="640080" y="5669280"/>
+            <a:ext cx="10972800" cy="640080"/>
+          </a:xfrm>
+          <a:prstGeom prst="rect">
+            <a:avLst/>
+          </a:prstGeom>
+          <a:noFill/>
+          <a:ln/>
+        </p:spPr>
+        <p:txBody>
+          <a:bodyPr wrap="square" rtlCol="0" anchor="ctr"/>
+          <a:lstStyle/>
+          <a:p>
+            <a:pPr indent="0" marL="0">
+              <a:buNone/>
+            </a:pPr>
+            <a:r>
+              <a:rPr lang="en-US" sz="3600" b="1" spc="400" kern="0" dirty="0">
                 <a:solidFill>
                   <a:srgbClr val="FFFFFF"/>
                 </a:solidFill>
@@ -5802,7 +5802,7 @@
               </a:rPr>
               <a:t>BUILD AND SURVIVE</a:t>
             </a:r>
-            <a:endParaRPr lang="en-US" sz="2600" dirty="0"/>
+            <a:endParaRPr lang="en-US" sz="3600" dirty="0"/>
           </a:p>
         </p:txBody>
       </p:sp>
@@ -5814,24 +5814,24 @@
         </p:nvSpPr>
         <p:spPr>
           <a:xfrm>
-            <a:off x="685800" y="1508760"/>
-            <a:ext cx="5303520" cy="457200"/>
-          </a:xfrm>
-          <a:prstGeom prst="rect">
-            <a:avLst/>
-          </a:prstGeom>
-          <a:noFill/>
-          <a:ln/>
-        </p:spPr>
-        <p:txBody>
-          <a:bodyPr wrap="square" rtlCol="0" anchor="ctr"/>
-          <a:lstStyle/>
-          <a:p>
-            <a:pPr indent="0" marL="0">
-              <a:buNone/>
-            </a:pPr>
-            <a:r>
-              <a:rPr lang="en-US" sz="1600" i="1" dirty="0">
+            <a:off x="640080" y="6309360"/>
+            <a:ext cx="10972800" cy="365760"/>
+          </a:xfrm>
+          <a:prstGeom prst="rect">
+            <a:avLst/>
+          </a:prstGeom>
+          <a:noFill/>
+          <a:ln/>
+        </p:spPr>
+        <p:txBody>
+          <a:bodyPr wrap="square" rtlCol="0" anchor="ctr"/>
+          <a:lstStyle/>
+          <a:p>
+            <a:pPr indent="0" marL="0">
+              <a:buNone/>
+            </a:pPr>
+            <a:r>
+              <a:rPr lang="en-US" sz="1800" i="1" dirty="0">
                 <a:solidFill>
                   <a:srgbClr val="F5F1FF"/>
                 </a:solidFill>
@@ -5841,7 +5841,7 @@
               </a:rPr>
               <a:t>A playable world on the dried seabed.</a:t>
             </a:r>
-            <a:endParaRPr lang="en-US" sz="1600" dirty="0"/>
+            <a:endParaRPr lang="en-US" sz="1800" dirty="0"/>
           </a:p>
         </p:txBody>
       </p:sp>
@@ -5908,8 +5908,8 @@
         </p:nvSpPr>
         <p:spPr>
           <a:xfrm>
-            <a:off x="457200" y="457200"/>
-            <a:ext cx="5669280" cy="1554480"/>
+            <a:off x="0" y="5120640"/>
+            <a:ext cx="12191695" cy="1737360"/>
           </a:xfrm>
           <a:prstGeom prst="rect">
             <a:avLst/>
@@ -5937,24 +5937,24 @@
         </p:nvSpPr>
         <p:spPr>
           <a:xfrm>
-            <a:off x="685800" y="640080"/>
-            <a:ext cx="5303520" cy="320040"/>
-          </a:xfrm>
-          <a:prstGeom prst="rect">
-            <a:avLst/>
-          </a:prstGeom>
-          <a:noFill/>
-          <a:ln/>
-        </p:spPr>
-        <p:txBody>
-          <a:bodyPr wrap="square" rtlCol="0" anchor="ctr"/>
-          <a:lstStyle/>
-          <a:p>
-            <a:pPr indent="0" marL="0">
-              <a:buNone/>
-            </a:pPr>
-            <a:r>
-              <a:rPr lang="en-US" sz="1100" b="1" spc="1000" kern="0" dirty="0">
+            <a:off x="640080" y="5303520"/>
+            <a:ext cx="10972800" cy="320040"/>
+          </a:xfrm>
+          <a:prstGeom prst="rect">
+            <a:avLst/>
+          </a:prstGeom>
+          <a:noFill/>
+          <a:ln/>
+        </p:spPr>
+        <p:txBody>
+          <a:bodyPr wrap="square" rtlCol="0" anchor="ctr"/>
+          <a:lstStyle/>
+          <a:p>
+            <a:pPr indent="0" marL="0">
+              <a:buNone/>
+            </a:pPr>
+            <a:r>
+              <a:rPr lang="en-US" sz="1200" b="1" spc="1200" kern="0" dirty="0">
                 <a:solidFill>
                   <a:srgbClr val="EC4899"/>
                 </a:solidFill>
@@ -5964,7 +5964,7 @@
               </a:rPr>
               <a:t>MODE · EXPLORE</a:t>
             </a:r>
-            <a:endParaRPr lang="en-US" sz="1100" dirty="0"/>
+            <a:endParaRPr lang="en-US" sz="1200" dirty="0"/>
           </a:p>
         </p:txBody>
       </p:sp>
@@ -5976,24 +5976,24 @@
         </p:nvSpPr>
         <p:spPr>
           <a:xfrm>
-            <a:off x="685800" y="1005840"/>
-            <a:ext cx="5303520" cy="502920"/>
-          </a:xfrm>
-          <a:prstGeom prst="rect">
-            <a:avLst/>
-          </a:prstGeom>
-          <a:noFill/>
-          <a:ln/>
-        </p:spPr>
-        <p:txBody>
-          <a:bodyPr wrap="square" rtlCol="0" anchor="ctr"/>
-          <a:lstStyle/>
-          <a:p>
-            <a:pPr indent="0" marL="0">
-              <a:buNone/>
-            </a:pPr>
-            <a:r>
-              <a:rPr lang="en-US" sz="2600" b="1" dirty="0">
+            <a:off x="640080" y="5669280"/>
+            <a:ext cx="10972800" cy="640080"/>
+          </a:xfrm>
+          <a:prstGeom prst="rect">
+            <a:avLst/>
+          </a:prstGeom>
+          <a:noFill/>
+          <a:ln/>
+        </p:spPr>
+        <p:txBody>
+          <a:bodyPr wrap="square" rtlCol="0" anchor="ctr"/>
+          <a:lstStyle/>
+          <a:p>
+            <a:pPr indent="0" marL="0">
+              <a:buNone/>
+            </a:pPr>
+            <a:r>
+              <a:rPr lang="en-US" sz="3600" b="1" spc="400" kern="0" dirty="0">
                 <a:solidFill>
                   <a:srgbClr val="FFFFFF"/>
                 </a:solidFill>
@@ -6003,7 +6003,7 @@
               </a:rPr>
               <a:t>READ THE BASIN</a:t>
             </a:r>
-            <a:endParaRPr lang="en-US" sz="2600" dirty="0"/>
+            <a:endParaRPr lang="en-US" sz="3600" dirty="0"/>
           </a:p>
         </p:txBody>
       </p:sp>
@@ -6015,24 +6015,24 @@
         </p:nvSpPr>
         <p:spPr>
           <a:xfrm>
-            <a:off x="685800" y="1508760"/>
-            <a:ext cx="5303520" cy="457200"/>
-          </a:xfrm>
-          <a:prstGeom prst="rect">
-            <a:avLst/>
-          </a:prstGeom>
-          <a:noFill/>
-          <a:ln/>
-        </p:spPr>
-        <p:txBody>
-          <a:bodyPr wrap="square" rtlCol="0" anchor="ctr"/>
-          <a:lstStyle/>
-          <a:p>
-            <a:pPr indent="0" marL="0">
-              <a:buNone/>
-            </a:pPr>
-            <a:r>
-              <a:rPr lang="en-US" sz="1600" i="1" dirty="0">
+            <a:off x="640080" y="6309360"/>
+            <a:ext cx="10972800" cy="365760"/>
+          </a:xfrm>
+          <a:prstGeom prst="rect">
+            <a:avLst/>
+          </a:prstGeom>
+          <a:noFill/>
+          <a:ln/>
+        </p:spPr>
+        <p:txBody>
+          <a:bodyPr wrap="square" rtlCol="0" anchor="ctr"/>
+          <a:lstStyle/>
+          <a:p>
+            <a:pPr indent="0" marL="0">
+              <a:buNone/>
+            </a:pPr>
+            <a:r>
+              <a:rPr lang="en-US" sz="1800" i="1" dirty="0">
                 <a:solidFill>
                   <a:srgbClr val="F5F1FF"/>
                 </a:solidFill>
@@ -6042,7 +6042,7 @@
               </a:rPr>
               <a:t>Real elevation, historical basins, climate.</a:t>
             </a:r>
-            <a:endParaRPr lang="en-US" sz="1600" dirty="0"/>
+            <a:endParaRPr lang="en-US" sz="1800" dirty="0"/>
           </a:p>
         </p:txBody>
       </p:sp>

--- a/public/aral3d-presentation.pptx
+++ b/public/aral3d-presentation.pptx
@@ -2285,8 +2285,8 @@
         </p:nvSpPr>
         <p:spPr>
           <a:xfrm>
-            <a:off x="3626968" y="5760720"/>
-            <a:ext cx="4937760" cy="777240"/>
+            <a:off x="3169768" y="5760720"/>
+            <a:ext cx="5852160" cy="777240"/>
           </a:xfrm>
           <a:prstGeom prst="rect">
             <a:avLst>
@@ -2312,7 +2312,7 @@
         </p:nvSpPr>
         <p:spPr>
           <a:xfrm>
-            <a:off x="3791560" y="5879592"/>
+            <a:off x="3334360" y="5879592"/>
             <a:ext cx="548640" cy="548640"/>
           </a:xfrm>
           <a:prstGeom prst="ellipse">
@@ -2337,7 +2337,7 @@
         </p:nvSpPr>
         <p:spPr>
           <a:xfrm>
-            <a:off x="3791560" y="5879592"/>
+            <a:off x="3334360" y="5879592"/>
             <a:ext cx="548640" cy="548640"/>
           </a:xfrm>
           <a:prstGeom prst="rect">
@@ -2376,8 +2376,8 @@
         </p:nvSpPr>
         <p:spPr>
           <a:xfrm>
-            <a:off x="4495648" y="5760720"/>
-            <a:ext cx="3931920" cy="777240"/>
+            <a:off x="4038448" y="5760720"/>
+            <a:ext cx="4846320" cy="777240"/>
           </a:xfrm>
           <a:prstGeom prst="rect">
             <a:avLst/>

--- a/public/aral3d-presentation.pptx
+++ b/public/aral3d-presentation.pptx
@@ -20,9 +20,11 @@
     <p:sldId id="268" r:id="rId14"/>
     <p:sldId id="269" r:id="rId15"/>
     <p:sldId id="270" r:id="rId16"/>
+    <p:sldId id="271" r:id="rId17"/>
+    <p:sldId id="272" r:id="rId18"/>
   </p:sldIdLst>
   <p:notesMasterIdLst>
-    <p:notesMasterId r:id="rId17"/>
+    <p:notesMasterId r:id="rId19"/>
   </p:notesMasterIdLst>
   <p:sldSz cx="12192000" cy="6858000"/>
   <p:notesSz cx="6858000" cy="12192000"/>
@@ -1068,6 +1070,182 @@
             <a:fld id="{F7021451-1387-4CA6-816F-3879F97B5CBC}" type="slidenum">
               <a:rPr lang="en-US"/>
               <a:t>15</a:t>
+            </a:fld>
+            <a:endParaRPr lang="en-US"/>
+          </a:p>
+        </p:txBody>
+      </p:sp>
+    </p:spTree>
+    <p:extLst>
+      <p:ext uri="{BB962C8B-B14F-4D97-AF65-F5344CB8AC3E}">
+        <p14:creationId xmlns:p14="http://schemas.microsoft.com/office/powerpoint/2010/main" val="1024086991"/>
+      </p:ext>
+    </p:extLst>
+  </p:cSld>
+  <p:clrMapOvr>
+    <a:masterClrMapping/>
+  </p:clrMapOvr>
+</p:notes>
+</file>
+
+<file path=ppt/notesSlides/notesSlide16.xml><?xml version="1.0" encoding="utf-8"?>
+<p:notes xmlns:a="http://schemas.openxmlformats.org/drawingml/2006/main" xmlns:r="http://schemas.openxmlformats.org/officeDocument/2006/relationships" xmlns:p="http://schemas.openxmlformats.org/presentationml/2006/main">
+  <p:cSld>
+    <p:spTree>
+      <p:nvGrpSpPr>
+        <p:cNvPr id="1" name=""/>
+        <p:cNvGrpSpPr/>
+        <p:nvPr/>
+      </p:nvGrpSpPr>
+      <p:grpSpPr>
+        <a:xfrm>
+          <a:off x="0" y="0"/>
+          <a:ext cx="0" cy="0"/>
+          <a:chOff x="0" y="0"/>
+          <a:chExt cx="0" cy="0"/>
+        </a:xfrm>
+      </p:grpSpPr>
+      <p:sp>
+        <p:nvSpPr>
+          <p:cNvPr id="2" name="Slide Image Placeholder 1"/>
+          <p:cNvSpPr>
+            <a:spLocks noGrp="1" noRot="1" noChangeAspect="1"/>
+          </p:cNvSpPr>
+          <p:nvPr>
+            <p:ph type="sldImg"/>
+          </p:nvPr>
+        </p:nvSpPr>
+        <p:spPr/>
+      </p:sp>
+      <p:sp>
+        <p:nvSpPr>
+          <p:cNvPr id="3" name="Notes Placeholder 2"/>
+          <p:cNvSpPr>
+            <a:spLocks noGrp="1"/>
+          </p:cNvSpPr>
+          <p:nvPr>
+            <p:ph type="body" idx="1"/>
+          </p:nvPr>
+        </p:nvSpPr>
+        <p:spPr/>
+        <p:txBody>
+          <a:bodyPr/>
+          <a:lstStyle/>
+          <a:p>
+            <a:r>
+              <a:rPr lang="en-US" dirty="0"/>
+              <a:t/>
+            </a:r>
+            <a:endParaRPr lang="en-US" dirty="0"/>
+          </a:p>
+        </p:txBody>
+      </p:sp>
+      <p:sp>
+        <p:nvSpPr>
+          <p:cNvPr id="4" name="Slide Number Placeholder 3"/>
+          <p:cNvSpPr>
+            <a:spLocks noGrp="1"/>
+          </p:cNvSpPr>
+          <p:nvPr>
+            <p:ph type="sldNum" sz="quarter" idx="10"/>
+          </p:nvPr>
+        </p:nvSpPr>
+        <p:spPr/>
+        <p:txBody>
+          <a:bodyPr/>
+          <a:lstStyle/>
+          <a:p>
+            <a:fld id="{F7021451-1387-4CA6-816F-3879F97B5CBC}" type="slidenum">
+              <a:rPr lang="en-US"/>
+              <a:t>16</a:t>
+            </a:fld>
+            <a:endParaRPr lang="en-US"/>
+          </a:p>
+        </p:txBody>
+      </p:sp>
+    </p:spTree>
+    <p:extLst>
+      <p:ext uri="{BB962C8B-B14F-4D97-AF65-F5344CB8AC3E}">
+        <p14:creationId xmlns:p14="http://schemas.microsoft.com/office/powerpoint/2010/main" val="1024086991"/>
+      </p:ext>
+    </p:extLst>
+  </p:cSld>
+  <p:clrMapOvr>
+    <a:masterClrMapping/>
+  </p:clrMapOvr>
+</p:notes>
+</file>
+
+<file path=ppt/notesSlides/notesSlide17.xml><?xml version="1.0" encoding="utf-8"?>
+<p:notes xmlns:a="http://schemas.openxmlformats.org/drawingml/2006/main" xmlns:r="http://schemas.openxmlformats.org/officeDocument/2006/relationships" xmlns:p="http://schemas.openxmlformats.org/presentationml/2006/main">
+  <p:cSld>
+    <p:spTree>
+      <p:nvGrpSpPr>
+        <p:cNvPr id="1" name=""/>
+        <p:cNvGrpSpPr/>
+        <p:nvPr/>
+      </p:nvGrpSpPr>
+      <p:grpSpPr>
+        <a:xfrm>
+          <a:off x="0" y="0"/>
+          <a:ext cx="0" cy="0"/>
+          <a:chOff x="0" y="0"/>
+          <a:chExt cx="0" cy="0"/>
+        </a:xfrm>
+      </p:grpSpPr>
+      <p:sp>
+        <p:nvSpPr>
+          <p:cNvPr id="2" name="Slide Image Placeholder 1"/>
+          <p:cNvSpPr>
+            <a:spLocks noGrp="1" noRot="1" noChangeAspect="1"/>
+          </p:cNvSpPr>
+          <p:nvPr>
+            <p:ph type="sldImg"/>
+          </p:nvPr>
+        </p:nvSpPr>
+        <p:spPr/>
+      </p:sp>
+      <p:sp>
+        <p:nvSpPr>
+          <p:cNvPr id="3" name="Notes Placeholder 2"/>
+          <p:cNvSpPr>
+            <a:spLocks noGrp="1"/>
+          </p:cNvSpPr>
+          <p:nvPr>
+            <p:ph type="body" idx="1"/>
+          </p:nvPr>
+        </p:nvSpPr>
+        <p:spPr/>
+        <p:txBody>
+          <a:bodyPr/>
+          <a:lstStyle/>
+          <a:p>
+            <a:r>
+              <a:rPr lang="en-US" dirty="0"/>
+              <a:t/>
+            </a:r>
+            <a:endParaRPr lang="en-US" dirty="0"/>
+          </a:p>
+        </p:txBody>
+      </p:sp>
+      <p:sp>
+        <p:nvSpPr>
+          <p:cNvPr id="4" name="Slide Number Placeholder 3"/>
+          <p:cNvSpPr>
+            <a:spLocks noGrp="1"/>
+          </p:cNvSpPr>
+          <p:nvPr>
+            <p:ph type="sldNum" sz="quarter" idx="10"/>
+          </p:nvPr>
+        </p:nvSpPr>
+        <p:spPr/>
+        <p:txBody>
+          <a:bodyPr/>
+          <a:lstStyle/>
+          <a:p>
+            <a:fld id="{F7021451-1387-4CA6-816F-3879F97B5CBC}" type="slidenum">
+              <a:rPr lang="en-US"/>
+              <a:t>17</a:t>
             </a:fld>
             <a:endParaRPr lang="en-US"/>
           </a:p>
@@ -2222,9 +2400,61 @@
           </a:ln>
         </p:spPr>
       </p:sp>
-      <p:sp>
-        <p:nvSpPr>
-          <p:cNvPr id="5" name="Text 3"/>
+      <p:pic>
+        <p:nvPicPr>
+          <p:cNvPr id="5" name="Image 0" descr="docs/screenshots/01-landing.png">    </p:cNvPr>
+          <p:cNvPicPr>
+            <a:picLocks noChangeAspect="1"/>
+          </p:cNvPicPr>
+          <p:nvPr/>
+        </p:nvPicPr>
+        <p:blipFill>
+          <a:blip r:embed="rId1"/>
+          <a:srcRect l="0" r="0" t="0" b="0"/>
+          <a:stretch/>
+        </p:blipFill>
+        <p:spPr>
+          <a:xfrm>
+            <a:off x="914400" y="1828800"/>
+            <a:ext cx="10362895" cy="3840480"/>
+          </a:xfrm>
+          <a:prstGeom prst="rect">
+            <a:avLst/>
+          </a:prstGeom>
+        </p:spPr>
+      </p:pic>
+      <p:sp>
+        <p:nvSpPr>
+          <p:cNvPr id="6" name="Shape 3"/>
+          <p:cNvSpPr/>
+          <p:nvPr/>
+        </p:nvSpPr>
+        <p:spPr>
+          <a:xfrm>
+            <a:off x="0" y="1828800"/>
+            <a:ext cx="12191695" cy="3840480"/>
+          </a:xfrm>
+          <a:prstGeom prst="rect">
+            <a:avLst/>
+          </a:prstGeom>
+          <a:solidFill>
+            <a:srgbClr val="F5F0E8">
+              <a:alpha val="45000"/>
+            </a:srgbClr>
+          </a:solidFill>
+          <a:ln w="12700">
+            <a:solidFill>
+              <a:srgbClr val="F5F0E8">
+                <a:alpha val="0"/>
+              </a:srgbClr>
+            </a:solidFill>
+            <a:prstDash val="solid"/>
+          </a:ln>
+        </p:spPr>
+      </p:sp>
+      <p:sp>
+        <p:nvSpPr>
+          <p:cNvPr id="7" name="Text 4"/>
           <p:cNvSpPr/>
           <p:nvPr/>
         </p:nvSpPr>
@@ -2247,7 +2477,7 @@
               <a:buNone/>
             </a:pPr>
             <a:r>
-              <a:rPr lang="en-US" sz="10000" b="1" i="1" dirty="0">
+              <a:rPr lang="en-US" sz="8800" b="1" i="1" dirty="0">
                 <a:solidFill>
                   <a:srgbClr val="E84C2C"/>
                 </a:solidFill>
@@ -2261,7 +2491,7 @@
               <a:buNone/>
             </a:pPr>
             <a:r>
-              <a:rPr lang="en-US" sz="10000" b="1" i="1" dirty="0">
+              <a:rPr lang="en-US" sz="8800" b="1" i="1" dirty="0">
                 <a:solidFill>
                   <a:srgbClr val="1FAE52"/>
                 </a:solidFill>
@@ -2275,7 +2505,7 @@
               <a:buNone/>
             </a:pPr>
             <a:r>
-              <a:rPr lang="en-US" sz="10000" b="1" i="1" dirty="0">
+              <a:rPr lang="en-US" sz="8800" b="1" i="1" dirty="0">
                 <a:solidFill>
                   <a:srgbClr val="1A1FE0"/>
                 </a:solidFill>
@@ -2289,7 +2519,7 @@
               <a:buNone/>
             </a:pPr>
             <a:r>
-              <a:rPr lang="en-US" sz="10000" b="1" i="1" dirty="0">
+              <a:rPr lang="en-US" sz="8800" b="1" i="1" dirty="0">
                 <a:solidFill>
                   <a:srgbClr val="EC4899"/>
                 </a:solidFill>
@@ -2299,36 +2529,36 @@
               </a:rPr>
               <a:t> sea</a:t>
             </a:r>
-            <a:endParaRPr lang="en-US" sz="10000" dirty="0"/>
-          </a:p>
-        </p:txBody>
-      </p:sp>
-      <p:sp>
-        <p:nvSpPr>
-          <p:cNvPr id="6" name="Text 4"/>
-          <p:cNvSpPr/>
-          <p:nvPr/>
-        </p:nvSpPr>
-        <p:spPr>
-          <a:xfrm>
-            <a:off x="274320" y="4937760"/>
-            <a:ext cx="11643055" cy="640080"/>
-          </a:xfrm>
-          <a:prstGeom prst="rect">
-            <a:avLst/>
-          </a:prstGeom>
-          <a:noFill/>
-          <a:ln/>
-        </p:spPr>
-        <p:txBody>
-          <a:bodyPr wrap="square" rtlCol="0" anchor="ctr"/>
-          <a:lstStyle/>
-          <a:p>
-            <a:pPr algn="ctr" indent="0" marL="0">
-              <a:buNone/>
-            </a:pPr>
-            <a:r>
-              <a:rPr lang="en-US" sz="2800" i="1" dirty="0">
+            <a:endParaRPr lang="en-US" sz="8800" dirty="0"/>
+          </a:p>
+        </p:txBody>
+      </p:sp>
+      <p:sp>
+        <p:nvSpPr>
+          <p:cNvPr id="8" name="Text 5"/>
+          <p:cNvSpPr/>
+          <p:nvPr/>
+        </p:nvSpPr>
+        <p:spPr>
+          <a:xfrm>
+            <a:off x="548640" y="4937760"/>
+            <a:ext cx="11094415" cy="914400"/>
+          </a:xfrm>
+          <a:prstGeom prst="rect">
+            <a:avLst/>
+          </a:prstGeom>
+          <a:noFill/>
+          <a:ln/>
+        </p:spPr>
+        <p:txBody>
+          <a:bodyPr wrap="square" rtlCol="0" anchor="ctr"/>
+          <a:lstStyle/>
+          <a:p>
+            <a:pPr algn="ctr" indent="0" marL="0">
+              <a:buNone/>
+            </a:pPr>
+            <a:r>
+              <a:rPr lang="en-US" sz="2400" i="1" dirty="0">
                 <a:solidFill>
                   <a:srgbClr val="1A1FE0"/>
                 </a:solidFill>
@@ -2342,7 +2572,7 @@
               <a:buNone/>
             </a:pPr>
             <a:r>
-              <a:rPr lang="en-US" sz="2800" i="1" dirty="0">
+              <a:rPr lang="en-US" sz="2400" i="1" dirty="0">
                 <a:solidFill>
                   <a:srgbClr val="EC4899"/>
                 </a:solidFill>
@@ -2350,13 +2580,97 @@
                 <a:ea typeface="Georgia" pitchFamily="34" charset="-122"/>
                 <a:cs typeface="Georgia" pitchFamily="34" charset="-120"/>
               </a:rPr>
+              <a:t> public</a:t>
+            </a:r>
+            <a:pPr algn="ctr" indent="0" marL="0">
+              <a:buNone/>
+            </a:pPr>
+            <a:r>
+              <a:rPr lang="en-US" sz="2400" i="1" dirty="0">
+                <a:solidFill>
+                  <a:srgbClr val="F59E0B"/>
+                </a:solidFill>
+                <a:latin typeface="Georgia" pitchFamily="34" charset="0"/>
+                <a:ea typeface="Georgia" pitchFamily="34" charset="-122"/>
+                <a:cs typeface="Georgia" pitchFamily="34" charset="-120"/>
+              </a:rPr>
               <a:t> 3D</a:t>
             </a:r>
             <a:pPr algn="ctr" indent="0" marL="0">
               <a:buNone/>
             </a:pPr>
             <a:r>
-              <a:rPr lang="en-US" sz="2800" i="1" dirty="0">
+              <a:rPr lang="en-US" sz="2400" i="1" dirty="0">
+                <a:solidFill>
+                  <a:srgbClr val="22D3EE"/>
+                </a:solidFill>
+                <a:latin typeface="Georgia" pitchFamily="34" charset="0"/>
+                <a:ea typeface="Georgia" pitchFamily="34" charset="-122"/>
+                <a:cs typeface="Georgia" pitchFamily="34" charset="-120"/>
+              </a:rPr>
+              <a:t> platform</a:t>
+            </a:r>
+            <a:pPr algn="ctr" indent="0" marL="0">
+              <a:buNone/>
+            </a:pPr>
+            <a:r>
+              <a:rPr lang="en-US" sz="2400" i="1" dirty="0">
+                <a:solidFill>
+                  <a:srgbClr val="E84C2C"/>
+                </a:solidFill>
+                <a:latin typeface="Georgia" pitchFamily="34" charset="0"/>
+                <a:ea typeface="Georgia" pitchFamily="34" charset="-122"/>
+                <a:cs typeface="Georgia" pitchFamily="34" charset="-120"/>
+              </a:rPr>
+              <a:t> for</a:t>
+            </a:r>
+            <a:pPr algn="ctr" indent="0" marL="0">
+              <a:buNone/>
+            </a:pPr>
+            <a:r>
+              <a:rPr lang="en-US" sz="2400" i="1" dirty="0">
+                <a:solidFill>
+                  <a:srgbClr val="1FAE52"/>
+                </a:solidFill>
+                <a:latin typeface="Georgia" pitchFamily="34" charset="0"/>
+                <a:ea typeface="Georgia" pitchFamily="34" charset="-122"/>
+                <a:cs typeface="Georgia" pitchFamily="34" charset="-120"/>
+              </a:rPr>
+              <a:t> learning,</a:t>
+            </a:r>
+            <a:pPr algn="ctr" indent="0" marL="0">
+              <a:buNone/>
+            </a:pPr>
+            <a:r>
+              <a:rPr lang="en-US" sz="2400" i="1" dirty="0">
+                <a:solidFill>
+                  <a:srgbClr val="1A1FE0"/>
+                </a:solidFill>
+                <a:latin typeface="Georgia" pitchFamily="34" charset="0"/>
+                <a:ea typeface="Georgia" pitchFamily="34" charset="-122"/>
+                <a:cs typeface="Georgia" pitchFamily="34" charset="-120"/>
+              </a:rPr>
+              <a:t> memory,</a:t>
+            </a:r>
+            <a:pPr algn="ctr" indent="0" marL="0">
+              <a:buNone/>
+            </a:pPr>
+            <a:r>
+              <a:rPr lang="en-US" sz="2400" i="1" dirty="0">
+                <a:solidFill>
+                  <a:srgbClr val="EC4899"/>
+                </a:solidFill>
+                <a:latin typeface="Georgia" pitchFamily="34" charset="0"/>
+                <a:ea typeface="Georgia" pitchFamily="34" charset="-122"/>
+                <a:cs typeface="Georgia" pitchFamily="34" charset="-120"/>
+              </a:rPr>
+              <a:t> and</a:t>
+            </a:r>
+            <a:pPr algn="ctr" indent="0" marL="0">
+              <a:buNone/>
+            </a:pPr>
+            <a:r>
+              <a:rPr lang="en-US" sz="2400" i="1" dirty="0">
                 <a:solidFill>
                   <a:srgbClr val="F59E0B"/>
                 </a:solidFill>
@@ -2364,13 +2678,13 @@
                 <a:ea typeface="Georgia" pitchFamily="34" charset="-122"/>
                 <a:cs typeface="Georgia" pitchFamily="34" charset="-120"/>
               </a:rPr>
-              <a:t> platform</a:t>
-            </a:r>
-            <a:pPr algn="ctr" indent="0" marL="0">
-              <a:buNone/>
-            </a:pPr>
-            <a:r>
-              <a:rPr lang="en-US" sz="2800" i="1" dirty="0">
+              <a:t> environmental</a:t>
+            </a:r>
+            <a:pPr algn="ctr" indent="0" marL="0">
+              <a:buNone/>
+            </a:pPr>
+            <a:r>
+              <a:rPr lang="en-US" sz="2400" i="1" dirty="0">
                 <a:solidFill>
                   <a:srgbClr val="22D3EE"/>
                 </a:solidFill>
@@ -2378,51 +2692,9 @@
                 <a:ea typeface="Georgia" pitchFamily="34" charset="-122"/>
                 <a:cs typeface="Georgia" pitchFamily="34" charset="-120"/>
               </a:rPr>
-              <a:t> for</a:t>
-            </a:r>
-            <a:pPr algn="ctr" indent="0" marL="0">
-              <a:buNone/>
-            </a:pPr>
-            <a:r>
-              <a:rPr lang="en-US" sz="2800" i="1" dirty="0">
-                <a:solidFill>
-                  <a:srgbClr val="E84C2C"/>
-                </a:solidFill>
-                <a:latin typeface="Georgia" pitchFamily="34" charset="0"/>
-                <a:ea typeface="Georgia" pitchFamily="34" charset="-122"/>
-                <a:cs typeface="Georgia" pitchFamily="34" charset="-120"/>
-              </a:rPr>
-              <a:t> education</a:t>
-            </a:r>
-            <a:pPr algn="ctr" indent="0" marL="0">
-              <a:buNone/>
-            </a:pPr>
-            <a:r>
-              <a:rPr lang="en-US" sz="2800" i="1" dirty="0">
-                <a:solidFill>
-                  <a:srgbClr val="1FAE52"/>
-                </a:solidFill>
-                <a:latin typeface="Georgia" pitchFamily="34" charset="0"/>
-                <a:ea typeface="Georgia" pitchFamily="34" charset="-122"/>
-                <a:cs typeface="Georgia" pitchFamily="34" charset="-120"/>
-              </a:rPr>
-              <a:t> and</a:t>
-            </a:r>
-            <a:pPr algn="ctr" indent="0" marL="0">
-              <a:buNone/>
-            </a:pPr>
-            <a:r>
-              <a:rPr lang="en-US" sz="2800" i="1" dirty="0">
-                <a:solidFill>
-                  <a:srgbClr val="1A1FE0"/>
-                </a:solidFill>
-                <a:latin typeface="Georgia" pitchFamily="34" charset="0"/>
-                <a:ea typeface="Georgia" pitchFamily="34" charset="-122"/>
-                <a:cs typeface="Georgia" pitchFamily="34" charset="-120"/>
-              </a:rPr>
-              <a:t> exploration</a:t>
-            </a:r>
-            <a:endParaRPr lang="en-US" sz="2800" dirty="0"/>
+              <a:t> imagination</a:t>
+            </a:r>
+            <a:endParaRPr lang="en-US" sz="2400" dirty="0"/>
           </a:p>
         </p:txBody>
       </p:sp>
@@ -2491,7 +2763,7 @@
                 <a:ea typeface="Helvetica" pitchFamily="34" charset="-122"/>
                 <a:cs typeface="Helvetica" pitchFamily="34" charset="-120"/>
               </a:rPr>
-              <a:t>LEVEL 9</a:t>
+              <a:t>CHAPTER 9</a:t>
             </a:r>
             <a:endParaRPr lang="en-US" sz="1100" dirty="0"/>
           </a:p>
@@ -2530,7 +2802,7 @@
                 <a:ea typeface="Helvetica" pitchFamily="34" charset="-122"/>
                 <a:cs typeface="Helvetica" pitchFamily="34" charset="-120"/>
               </a:rPr>
-              <a:t>WHERE THE BUDGET GOES</a:t>
+              <a:t>CULTURAL &amp; DESIGN POTENTIAL</a:t>
             </a:r>
             <a:endParaRPr lang="en-US" sz="1600" dirty="0"/>
           </a:p>
@@ -2584,7 +2856,7 @@
               <a:buNone/>
             </a:pPr>
             <a:r>
-              <a:rPr lang="en-US" sz="7800" b="1" i="1" dirty="0">
+              <a:rPr lang="en-US" sz="6400" b="1" i="1" dirty="0">
                 <a:solidFill>
                   <a:srgbClr val="E84C2C"/>
                 </a:solidFill>
@@ -2592,13 +2864,13 @@
                 <a:ea typeface="Georgia" pitchFamily="34" charset="-122"/>
                 <a:cs typeface="Georgia" pitchFamily="34" charset="-120"/>
               </a:rPr>
-              <a:t>$30,000</a:t>
-            </a:r>
-            <a:pPr algn="ctr" indent="0" marL="0">
-              <a:buNone/>
-            </a:pPr>
-            <a:r>
-              <a:rPr lang="en-US" sz="7800" b="1" i="1" dirty="0">
+              <a:t>installation,</a:t>
+            </a:r>
+            <a:pPr algn="ctr" indent="0" marL="0">
+              <a:buNone/>
+            </a:pPr>
+            <a:r>
+              <a:rPr lang="en-US" sz="6400" b="1" i="1" dirty="0">
                 <a:solidFill>
                   <a:srgbClr val="1FAE52"/>
                 </a:solidFill>
@@ -2606,13 +2878,13 @@
                 <a:ea typeface="Georgia" pitchFamily="34" charset="-122"/>
                 <a:cs typeface="Georgia" pitchFamily="34" charset="-120"/>
               </a:rPr>
-              <a:t> in</a:t>
-            </a:r>
-            <a:pPr algn="ctr" indent="0" marL="0">
-              <a:buNone/>
-            </a:pPr>
-            <a:r>
-              <a:rPr lang="en-US" sz="7800" b="1" i="1" dirty="0">
+              <a:t> archive,</a:t>
+            </a:r>
+            <a:pPr algn="ctr" indent="0" marL="0">
+              <a:buNone/>
+            </a:pPr>
+            <a:r>
+              <a:rPr lang="en-US" sz="6400" b="1" i="1" dirty="0">
                 <a:solidFill>
                   <a:srgbClr val="1A1FE0"/>
                 </a:solidFill>
@@ -2620,23 +2892,9 @@
                 <a:ea typeface="Georgia" pitchFamily="34" charset="-122"/>
                 <a:cs typeface="Georgia" pitchFamily="34" charset="-120"/>
               </a:rPr>
-              <a:t> six</a:t>
-            </a:r>
-            <a:pPr algn="ctr" indent="0" marL="0">
-              <a:buNone/>
-            </a:pPr>
-            <a:r>
-              <a:rPr lang="en-US" sz="7800" b="1" i="1" dirty="0">
-                <a:solidFill>
-                  <a:srgbClr val="EC4899"/>
-                </a:solidFill>
-                <a:latin typeface="Georgia" pitchFamily="34" charset="0"/>
-                <a:ea typeface="Georgia" pitchFamily="34" charset="-122"/>
-                <a:cs typeface="Georgia" pitchFamily="34" charset="-120"/>
-              </a:rPr>
-              <a:t> parts</a:t>
-            </a:r>
-            <a:endParaRPr lang="en-US" sz="7800" dirty="0"/>
+              <a:t> speculation</a:t>
+            </a:r>
+            <a:endParaRPr lang="en-US" sz="6400" dirty="0"/>
           </a:p>
         </p:txBody>
       </p:sp>
@@ -2648,8 +2906,47 @@
         </p:nvSpPr>
         <p:spPr>
           <a:xfrm>
-            <a:off x="1280160" y="3657600"/>
-            <a:ext cx="7315200" cy="411480"/>
+            <a:off x="1280160" y="3840480"/>
+            <a:ext cx="548640" cy="411480"/>
+          </a:xfrm>
+          <a:prstGeom prst="rect">
+            <a:avLst/>
+          </a:prstGeom>
+          <a:noFill/>
+          <a:ln/>
+        </p:spPr>
+        <p:txBody>
+          <a:bodyPr wrap="square" rtlCol="0" anchor="ctr"/>
+          <a:lstStyle/>
+          <a:p>
+            <a:pPr indent="0" marL="0">
+              <a:buNone/>
+            </a:pPr>
+            <a:r>
+              <a:rPr lang="en-US" sz="1600" b="1" i="1" dirty="0">
+                <a:solidFill>
+                  <a:srgbClr val="E84C2C"/>
+                </a:solidFill>
+                <a:latin typeface="Georgia" pitchFamily="34" charset="0"/>
+                <a:ea typeface="Georgia" pitchFamily="34" charset="-122"/>
+                <a:cs typeface="Georgia" pitchFamily="34" charset="-120"/>
+              </a:rPr>
+              <a:t>01</a:t>
+            </a:r>
+            <a:endParaRPr lang="en-US" sz="1600" dirty="0"/>
+          </a:p>
+        </p:txBody>
+      </p:sp>
+      <p:sp>
+        <p:nvSpPr>
+          <p:cNvPr id="7" name="Text 5"/>
+          <p:cNvSpPr/>
+          <p:nvPr/>
+        </p:nvSpPr>
+        <p:spPr>
+          <a:xfrm>
+            <a:off x="1920240" y="3867912"/>
+            <a:ext cx="9144000" cy="411480"/>
           </a:xfrm>
           <a:prstGeom prst="rect">
             <a:avLst/>
@@ -2673,7 +2970,7 @@
                 <a:ea typeface="Helvetica" pitchFamily="34" charset="-122"/>
                 <a:cs typeface="Helvetica" pitchFamily="34" charset="-120"/>
               </a:rPr>
-              <a:t>Product polishing and frontend</a:t>
+              <a:t>Tashkent Design Week</a:t>
             </a:r>
             <a:endParaRPr lang="en-US" sz="1500" dirty="0"/>
           </a:p>
@@ -2681,38 +2978,38 @@
       </p:sp>
       <p:sp>
         <p:nvSpPr>
-          <p:cNvPr id="7" name="Text 5"/>
-          <p:cNvSpPr/>
-          <p:nvPr/>
-        </p:nvSpPr>
-        <p:spPr>
-          <a:xfrm>
-            <a:off x="8778240" y="3657600"/>
-            <a:ext cx="2194560" cy="411480"/>
-          </a:xfrm>
-          <a:prstGeom prst="rect">
-            <a:avLst/>
-          </a:prstGeom>
-          <a:noFill/>
-          <a:ln/>
-        </p:spPr>
-        <p:txBody>
-          <a:bodyPr wrap="square" rtlCol="0" anchor="ctr"/>
-          <a:lstStyle/>
-          <a:p>
-            <a:pPr algn="r" indent="0" marL="0">
+          <p:cNvPr id="8" name="Text 6"/>
+          <p:cNvSpPr/>
+          <p:nvPr/>
+        </p:nvSpPr>
+        <p:spPr>
+          <a:xfrm>
+            <a:off x="1280160" y="4389120"/>
+            <a:ext cx="548640" cy="411480"/>
+          </a:xfrm>
+          <a:prstGeom prst="rect">
+            <a:avLst/>
+          </a:prstGeom>
+          <a:noFill/>
+          <a:ln/>
+        </p:spPr>
+        <p:txBody>
+          <a:bodyPr wrap="square" rtlCol="0" anchor="ctr"/>
+          <a:lstStyle/>
+          <a:p>
+            <a:pPr indent="0" marL="0">
               <a:buNone/>
             </a:pPr>
             <a:r>
               <a:rPr lang="en-US" sz="1600" b="1" i="1" dirty="0">
                 <a:solidFill>
-                  <a:srgbClr val="E84C2C"/>
-                </a:solidFill>
-                <a:latin typeface="Georgia" pitchFamily="34" charset="0"/>
-                <a:ea typeface="Georgia" pitchFamily="34" charset="-122"/>
-                <a:cs typeface="Georgia" pitchFamily="34" charset="-120"/>
-              </a:rPr>
-              <a:t>$8,000</a:t>
+                  <a:srgbClr val="1FAE52"/>
+                </a:solidFill>
+                <a:latin typeface="Georgia" pitchFamily="34" charset="0"/>
+                <a:ea typeface="Georgia" pitchFamily="34" charset="-122"/>
+                <a:cs typeface="Georgia" pitchFamily="34" charset="-120"/>
+              </a:rPr>
+              <a:t>02</a:t>
             </a:r>
             <a:endParaRPr lang="en-US" sz="1600" dirty="0"/>
           </a:p>
@@ -2720,14 +3017,14 @@
       </p:sp>
       <p:sp>
         <p:nvSpPr>
-          <p:cNvPr id="8" name="Text 6"/>
-          <p:cNvSpPr/>
-          <p:nvPr/>
-        </p:nvSpPr>
-        <p:spPr>
-          <a:xfrm>
-            <a:off x="1280160" y="4069080"/>
-            <a:ext cx="7315200" cy="411480"/>
+          <p:cNvPr id="9" name="Text 7"/>
+          <p:cNvSpPr/>
+          <p:nvPr/>
+        </p:nvSpPr>
+        <p:spPr>
+          <a:xfrm>
+            <a:off x="1920240" y="4416552"/>
+            <a:ext cx="9144000" cy="411480"/>
           </a:xfrm>
           <a:prstGeom prst="rect">
             <a:avLst/>
@@ -2751,7 +3048,7 @@
                 <a:ea typeface="Helvetica" pitchFamily="34" charset="-122"/>
                 <a:cs typeface="Helvetica" pitchFamily="34" charset="-120"/>
               </a:rPr>
-              <a:t>Educational module and curriculum</a:t>
+              <a:t>Milan Design Week</a:t>
             </a:r>
             <a:endParaRPr lang="en-US" sz="1500" dirty="0"/>
           </a:p>
@@ -2759,38 +3056,38 @@
       </p:sp>
       <p:sp>
         <p:nvSpPr>
-          <p:cNvPr id="9" name="Text 7"/>
-          <p:cNvSpPr/>
-          <p:nvPr/>
-        </p:nvSpPr>
-        <p:spPr>
-          <a:xfrm>
-            <a:off x="8778240" y="4069080"/>
-            <a:ext cx="2194560" cy="411480"/>
-          </a:xfrm>
-          <a:prstGeom prst="rect">
-            <a:avLst/>
-          </a:prstGeom>
-          <a:noFill/>
-          <a:ln/>
-        </p:spPr>
-        <p:txBody>
-          <a:bodyPr wrap="square" rtlCol="0" anchor="ctr"/>
-          <a:lstStyle/>
-          <a:p>
-            <a:pPr algn="r" indent="0" marL="0">
+          <p:cNvPr id="10" name="Text 8"/>
+          <p:cNvSpPr/>
+          <p:nvPr/>
+        </p:nvSpPr>
+        <p:spPr>
+          <a:xfrm>
+            <a:off x="1280160" y="4937760"/>
+            <a:ext cx="548640" cy="411480"/>
+          </a:xfrm>
+          <a:prstGeom prst="rect">
+            <a:avLst/>
+          </a:prstGeom>
+          <a:noFill/>
+          <a:ln/>
+        </p:spPr>
+        <p:txBody>
+          <a:bodyPr wrap="square" rtlCol="0" anchor="ctr"/>
+          <a:lstStyle/>
+          <a:p>
+            <a:pPr indent="0" marL="0">
               <a:buNone/>
             </a:pPr>
             <a:r>
               <a:rPr lang="en-US" sz="1600" b="1" i="1" dirty="0">
                 <a:solidFill>
-                  <a:srgbClr val="1FAE52"/>
-                </a:solidFill>
-                <a:latin typeface="Georgia" pitchFamily="34" charset="0"/>
-                <a:ea typeface="Georgia" pitchFamily="34" charset="-122"/>
-                <a:cs typeface="Georgia" pitchFamily="34" charset="-120"/>
-              </a:rPr>
-              <a:t>$6,000</a:t>
+                  <a:srgbClr val="1A1FE0"/>
+                </a:solidFill>
+                <a:latin typeface="Georgia" pitchFamily="34" charset="0"/>
+                <a:ea typeface="Georgia" pitchFamily="34" charset="-122"/>
+                <a:cs typeface="Georgia" pitchFamily="34" charset="-120"/>
+              </a:rPr>
+              <a:t>03</a:t>
             </a:r>
             <a:endParaRPr lang="en-US" sz="1600" dirty="0"/>
           </a:p>
@@ -2798,14 +3095,14 @@
       </p:sp>
       <p:sp>
         <p:nvSpPr>
-          <p:cNvPr id="10" name="Text 8"/>
-          <p:cNvSpPr/>
-          <p:nvPr/>
-        </p:nvSpPr>
-        <p:spPr>
-          <a:xfrm>
-            <a:off x="1280160" y="4480560"/>
-            <a:ext cx="7315200" cy="411480"/>
+          <p:cNvPr id="11" name="Text 9"/>
+          <p:cNvSpPr/>
+          <p:nvPr/>
+        </p:nvSpPr>
+        <p:spPr>
+          <a:xfrm>
+            <a:off x="1920240" y="4965192"/>
+            <a:ext cx="9144000" cy="411480"/>
           </a:xfrm>
           <a:prstGeom prst="rect">
             <a:avLst/>
@@ -2829,7 +3126,7 @@
                 <a:ea typeface="Helvetica" pitchFamily="34" charset="-122"/>
                 <a:cs typeface="Helvetica" pitchFamily="34" charset="-120"/>
               </a:rPr>
-              <a:t>Museum and exhibition adaptation</a:t>
+              <a:t>Venice Architecture Biennale</a:t>
             </a:r>
             <a:endParaRPr lang="en-US" sz="1500" dirty="0"/>
           </a:p>
@@ -2837,38 +3134,38 @@
       </p:sp>
       <p:sp>
         <p:nvSpPr>
-          <p:cNvPr id="11" name="Text 9"/>
-          <p:cNvSpPr/>
-          <p:nvPr/>
-        </p:nvSpPr>
-        <p:spPr>
-          <a:xfrm>
-            <a:off x="8778240" y="4480560"/>
-            <a:ext cx="2194560" cy="411480"/>
-          </a:xfrm>
-          <a:prstGeom prst="rect">
-            <a:avLst/>
-          </a:prstGeom>
-          <a:noFill/>
-          <a:ln/>
-        </p:spPr>
-        <p:txBody>
-          <a:bodyPr wrap="square" rtlCol="0" anchor="ctr"/>
-          <a:lstStyle/>
-          <a:p>
-            <a:pPr algn="r" indent="0" marL="0">
+          <p:cNvPr id="12" name="Text 10"/>
+          <p:cNvSpPr/>
+          <p:nvPr/>
+        </p:nvSpPr>
+        <p:spPr>
+          <a:xfrm>
+            <a:off x="1280160" y="5486400"/>
+            <a:ext cx="548640" cy="411480"/>
+          </a:xfrm>
+          <a:prstGeom prst="rect">
+            <a:avLst/>
+          </a:prstGeom>
+          <a:noFill/>
+          <a:ln/>
+        </p:spPr>
+        <p:txBody>
+          <a:bodyPr wrap="square" rtlCol="0" anchor="ctr"/>
+          <a:lstStyle/>
+          <a:p>
+            <a:pPr indent="0" marL="0">
               <a:buNone/>
             </a:pPr>
             <a:r>
               <a:rPr lang="en-US" sz="1600" b="1" i="1" dirty="0">
                 <a:solidFill>
-                  <a:srgbClr val="1A1FE0"/>
-                </a:solidFill>
-                <a:latin typeface="Georgia" pitchFamily="34" charset="0"/>
-                <a:ea typeface="Georgia" pitchFamily="34" charset="-122"/>
-                <a:cs typeface="Georgia" pitchFamily="34" charset="-120"/>
-              </a:rPr>
-              <a:t>$9,000</a:t>
+                  <a:srgbClr val="EC4899"/>
+                </a:solidFill>
+                <a:latin typeface="Georgia" pitchFamily="34" charset="0"/>
+                <a:ea typeface="Georgia" pitchFamily="34" charset="-122"/>
+                <a:cs typeface="Georgia" pitchFamily="34" charset="-120"/>
+              </a:rPr>
+              <a:t>04</a:t>
             </a:r>
             <a:endParaRPr lang="en-US" sz="1600" dirty="0"/>
           </a:p>
@@ -2876,14 +3173,14 @@
       </p:sp>
       <p:sp>
         <p:nvSpPr>
-          <p:cNvPr id="12" name="Text 10"/>
-          <p:cNvSpPr/>
-          <p:nvPr/>
-        </p:nvSpPr>
-        <p:spPr>
-          <a:xfrm>
-            <a:off x="1280160" y="4892040"/>
-            <a:ext cx="7315200" cy="411480"/>
+          <p:cNvPr id="13" name="Text 11"/>
+          <p:cNvSpPr/>
+          <p:nvPr/>
+        </p:nvSpPr>
+        <p:spPr>
+          <a:xfrm>
+            <a:off x="1920240" y="5513832"/>
+            <a:ext cx="9144000" cy="411480"/>
           </a:xfrm>
           <a:prstGeom prst="rect">
             <a:avLst/>
@@ -2907,282 +3204,9 @@
                 <a:ea typeface="Helvetica" pitchFamily="34" charset="-122"/>
                 <a:cs typeface="Helvetica" pitchFamily="34" charset="-120"/>
               </a:rPr>
-              <a:t>Visual and interface design</a:t>
+              <a:t>Venice Art Biennale</a:t>
             </a:r>
             <a:endParaRPr lang="en-US" sz="1500" dirty="0"/>
-          </a:p>
-        </p:txBody>
-      </p:sp>
-      <p:sp>
-        <p:nvSpPr>
-          <p:cNvPr id="13" name="Text 11"/>
-          <p:cNvSpPr/>
-          <p:nvPr/>
-        </p:nvSpPr>
-        <p:spPr>
-          <a:xfrm>
-            <a:off x="8778240" y="4892040"/>
-            <a:ext cx="2194560" cy="411480"/>
-          </a:xfrm>
-          <a:prstGeom prst="rect">
-            <a:avLst/>
-          </a:prstGeom>
-          <a:noFill/>
-          <a:ln/>
-        </p:spPr>
-        <p:txBody>
-          <a:bodyPr wrap="square" rtlCol="0" anchor="ctr"/>
-          <a:lstStyle/>
-          <a:p>
-            <a:pPr algn="r" indent="0" marL="0">
-              <a:buNone/>
-            </a:pPr>
-            <a:r>
-              <a:rPr lang="en-US" sz="1600" b="1" i="1" dirty="0">
-                <a:solidFill>
-                  <a:srgbClr val="EC4899"/>
-                </a:solidFill>
-                <a:latin typeface="Georgia" pitchFamily="34" charset="0"/>
-                <a:ea typeface="Georgia" pitchFamily="34" charset="-122"/>
-                <a:cs typeface="Georgia" pitchFamily="34" charset="-120"/>
-              </a:rPr>
-              <a:t>$3,000</a:t>
-            </a:r>
-            <a:endParaRPr lang="en-US" sz="1600" dirty="0"/>
-          </a:p>
-        </p:txBody>
-      </p:sp>
-      <p:sp>
-        <p:nvSpPr>
-          <p:cNvPr id="14" name="Text 12"/>
-          <p:cNvSpPr/>
-          <p:nvPr/>
-        </p:nvSpPr>
-        <p:spPr>
-          <a:xfrm>
-            <a:off x="1280160" y="5303520"/>
-            <a:ext cx="7315200" cy="411480"/>
-          </a:xfrm>
-          <a:prstGeom prst="rect">
-            <a:avLst/>
-          </a:prstGeom>
-          <a:noFill/>
-          <a:ln/>
-        </p:spPr>
-        <p:txBody>
-          <a:bodyPr wrap="square" rtlCol="0" anchor="ctr"/>
-          <a:lstStyle/>
-          <a:p>
-            <a:pPr indent="0" marL="0">
-              <a:buNone/>
-            </a:pPr>
-            <a:r>
-              <a:rPr lang="en-US" sz="1500" dirty="0">
-                <a:solidFill>
-                  <a:srgbClr val="2B2B2B"/>
-                </a:solidFill>
-                <a:latin typeface="Helvetica" pitchFamily="34" charset="0"/>
-                <a:ea typeface="Helvetica" pitchFamily="34" charset="-122"/>
-                <a:cs typeface="Helvetica" pitchFamily="34" charset="-120"/>
-              </a:rPr>
-              <a:t>Documentation, video, materials</a:t>
-            </a:r>
-            <a:endParaRPr lang="en-US" sz="1500" dirty="0"/>
-          </a:p>
-        </p:txBody>
-      </p:sp>
-      <p:sp>
-        <p:nvSpPr>
-          <p:cNvPr id="15" name="Text 13"/>
-          <p:cNvSpPr/>
-          <p:nvPr/>
-        </p:nvSpPr>
-        <p:spPr>
-          <a:xfrm>
-            <a:off x="8778240" y="5303520"/>
-            <a:ext cx="2194560" cy="411480"/>
-          </a:xfrm>
-          <a:prstGeom prst="rect">
-            <a:avLst/>
-          </a:prstGeom>
-          <a:noFill/>
-          <a:ln/>
-        </p:spPr>
-        <p:txBody>
-          <a:bodyPr wrap="square" rtlCol="0" anchor="ctr"/>
-          <a:lstStyle/>
-          <a:p>
-            <a:pPr algn="r" indent="0" marL="0">
-              <a:buNone/>
-            </a:pPr>
-            <a:r>
-              <a:rPr lang="en-US" sz="1600" b="1" i="1" dirty="0">
-                <a:solidFill>
-                  <a:srgbClr val="F59E0B"/>
-                </a:solidFill>
-                <a:latin typeface="Georgia" pitchFamily="34" charset="0"/>
-                <a:ea typeface="Georgia" pitchFamily="34" charset="-122"/>
-                <a:cs typeface="Georgia" pitchFamily="34" charset="-120"/>
-              </a:rPr>
-              <a:t>$2,000</a:t>
-            </a:r>
-            <a:endParaRPr lang="en-US" sz="1600" dirty="0"/>
-          </a:p>
-        </p:txBody>
-      </p:sp>
-      <p:sp>
-        <p:nvSpPr>
-          <p:cNvPr id="16" name="Text 14"/>
-          <p:cNvSpPr/>
-          <p:nvPr/>
-        </p:nvSpPr>
-        <p:spPr>
-          <a:xfrm>
-            <a:off x="1280160" y="5715000"/>
-            <a:ext cx="7315200" cy="411480"/>
-          </a:xfrm>
-          <a:prstGeom prst="rect">
-            <a:avLst/>
-          </a:prstGeom>
-          <a:noFill/>
-          <a:ln/>
-        </p:spPr>
-        <p:txBody>
-          <a:bodyPr wrap="square" rtlCol="0" anchor="ctr"/>
-          <a:lstStyle/>
-          <a:p>
-            <a:pPr indent="0" marL="0">
-              <a:buNone/>
-            </a:pPr>
-            <a:r>
-              <a:rPr lang="en-US" sz="1500" dirty="0">
-                <a:solidFill>
-                  <a:srgbClr val="2B2B2B"/>
-                </a:solidFill>
-                <a:latin typeface="Helvetica" pitchFamily="34" charset="0"/>
-                <a:ea typeface="Helvetica" pitchFamily="34" charset="-122"/>
-                <a:cs typeface="Helvetica" pitchFamily="34" charset="-120"/>
-              </a:rPr>
-              <a:t>Coordination and production</a:t>
-            </a:r>
-            <a:endParaRPr lang="en-US" sz="1500" dirty="0"/>
-          </a:p>
-        </p:txBody>
-      </p:sp>
-      <p:sp>
-        <p:nvSpPr>
-          <p:cNvPr id="17" name="Text 15"/>
-          <p:cNvSpPr/>
-          <p:nvPr/>
-        </p:nvSpPr>
-        <p:spPr>
-          <a:xfrm>
-            <a:off x="8778240" y="5715000"/>
-            <a:ext cx="2194560" cy="411480"/>
-          </a:xfrm>
-          <a:prstGeom prst="rect">
-            <a:avLst/>
-          </a:prstGeom>
-          <a:noFill/>
-          <a:ln/>
-        </p:spPr>
-        <p:txBody>
-          <a:bodyPr wrap="square" rtlCol="0" anchor="ctr"/>
-          <a:lstStyle/>
-          <a:p>
-            <a:pPr algn="r" indent="0" marL="0">
-              <a:buNone/>
-            </a:pPr>
-            <a:r>
-              <a:rPr lang="en-US" sz="1600" b="1" i="1" dirty="0">
-                <a:solidFill>
-                  <a:srgbClr val="22D3EE"/>
-                </a:solidFill>
-                <a:latin typeface="Georgia" pitchFamily="34" charset="0"/>
-                <a:ea typeface="Georgia" pitchFamily="34" charset="-122"/>
-                <a:cs typeface="Georgia" pitchFamily="34" charset="-120"/>
-              </a:rPr>
-              <a:t>$2,000</a:t>
-            </a:r>
-            <a:endParaRPr lang="en-US" sz="1600" dirty="0"/>
-          </a:p>
-        </p:txBody>
-      </p:sp>
-      <p:sp>
-        <p:nvSpPr>
-          <p:cNvPr id="18" name="Text 16"/>
-          <p:cNvSpPr/>
-          <p:nvPr/>
-        </p:nvSpPr>
-        <p:spPr>
-          <a:xfrm>
-            <a:off x="1280160" y="6309360"/>
-            <a:ext cx="7315200" cy="411480"/>
-          </a:xfrm>
-          <a:prstGeom prst="rect">
-            <a:avLst/>
-          </a:prstGeom>
-          <a:noFill/>
-          <a:ln/>
-        </p:spPr>
-        <p:txBody>
-          <a:bodyPr wrap="square" rtlCol="0" anchor="ctr"/>
-          <a:lstStyle/>
-          <a:p>
-            <a:pPr indent="0" marL="0">
-              <a:buNone/>
-            </a:pPr>
-            <a:r>
-              <a:rPr lang="en-US" sz="1200" spc="800" kern="0" dirty="0">
-                <a:solidFill>
-                  <a:srgbClr val="8A8A8A"/>
-                </a:solidFill>
-                <a:latin typeface="Helvetica" pitchFamily="34" charset="0"/>
-                <a:ea typeface="Helvetica" pitchFamily="34" charset="-122"/>
-                <a:cs typeface="Helvetica" pitchFamily="34" charset="-120"/>
-              </a:rPr>
-              <a:t>TOTAL</a:t>
-            </a:r>
-            <a:endParaRPr lang="en-US" sz="1200" dirty="0"/>
-          </a:p>
-        </p:txBody>
-      </p:sp>
-      <p:sp>
-        <p:nvSpPr>
-          <p:cNvPr id="19" name="Text 17"/>
-          <p:cNvSpPr/>
-          <p:nvPr/>
-        </p:nvSpPr>
-        <p:spPr>
-          <a:xfrm>
-            <a:off x="8778240" y="6263640"/>
-            <a:ext cx="2194560" cy="457200"/>
-          </a:xfrm>
-          <a:prstGeom prst="rect">
-            <a:avLst/>
-          </a:prstGeom>
-          <a:noFill/>
-          <a:ln/>
-        </p:spPr>
-        <p:txBody>
-          <a:bodyPr wrap="square" rtlCol="0" anchor="ctr"/>
-          <a:lstStyle/>
-          <a:p>
-            <a:pPr algn="r" indent="0" marL="0">
-              <a:buNone/>
-            </a:pPr>
-            <a:r>
-              <a:rPr lang="en-US" sz="2400" b="1" i="1" dirty="0">
-                <a:solidFill>
-                  <a:srgbClr val="EC4899"/>
-                </a:solidFill>
-                <a:latin typeface="Georgia" pitchFamily="34" charset="0"/>
-                <a:ea typeface="Georgia" pitchFamily="34" charset="-122"/>
-                <a:cs typeface="Georgia" pitchFamily="34" charset="-120"/>
-              </a:rPr>
-              <a:t>$30,000</a:t>
-            </a:r>
-            <a:endParaRPr lang="en-US" sz="2400" dirty="0"/>
           </a:p>
         </p:txBody>
       </p:sp>
@@ -3251,7 +3275,7 @@
                 <a:ea typeface="Helvetica" pitchFamily="34" charset="-122"/>
                 <a:cs typeface="Helvetica" pitchFamily="34" charset="-120"/>
               </a:rPr>
-              <a:t>LEVEL 10</a:t>
+              <a:t>CHAPTER 10</a:t>
             </a:r>
             <a:endParaRPr lang="en-US" sz="1100" dirty="0"/>
           </a:p>
@@ -3290,7 +3314,7 @@
                 <a:ea typeface="Helvetica" pitchFamily="34" charset="-122"/>
                 <a:cs typeface="Helvetica" pitchFamily="34" charset="-120"/>
               </a:rPr>
-              <a:t>THREE-YEAR PLAN</a:t>
+              <a:t>INSTITUTIONAL MODEL</a:t>
             </a:r>
             <a:endParaRPr lang="en-US" sz="1600" dirty="0"/>
           </a:p>
@@ -3344,7 +3368,7 @@
               <a:buNone/>
             </a:pPr>
             <a:r>
-              <a:rPr lang="en-US" sz="8000" b="1" i="1" dirty="0">
+              <a:rPr lang="en-US" sz="9200" b="1" i="1" dirty="0">
                 <a:solidFill>
                   <a:srgbClr val="E84C2C"/>
                 </a:solidFill>
@@ -3352,13 +3376,13 @@
                 <a:ea typeface="Georgia" pitchFamily="34" charset="-122"/>
                 <a:cs typeface="Georgia" pitchFamily="34" charset="-120"/>
               </a:rPr>
-              <a:t>$150k</a:t>
-            </a:r>
-            <a:pPr algn="ctr" indent="0" marL="0">
-              <a:buNone/>
-            </a:pPr>
-            <a:r>
-              <a:rPr lang="en-US" sz="8000" b="1" i="1" dirty="0">
+              <a:t>free,</a:t>
+            </a:r>
+            <a:pPr algn="ctr" indent="0" marL="0">
+              <a:buNone/>
+            </a:pPr>
+            <a:r>
+              <a:rPr lang="en-US" sz="9200" b="1" i="1" dirty="0">
                 <a:solidFill>
                   <a:srgbClr val="1FAE52"/>
                 </a:solidFill>
@@ -3366,13 +3390,13 @@
                 <a:ea typeface="Georgia" pitchFamily="34" charset="-122"/>
                 <a:cs typeface="Georgia" pitchFamily="34" charset="-120"/>
               </a:rPr>
-              <a:t> over</a:t>
-            </a:r>
-            <a:pPr algn="ctr" indent="0" marL="0">
-              <a:buNone/>
-            </a:pPr>
-            <a:r>
-              <a:rPr lang="en-US" sz="8000" b="1" i="1" dirty="0">
+              <a:t> by</a:t>
+            </a:r>
+            <a:pPr algn="ctr" indent="0" marL="0">
+              <a:buNone/>
+            </a:pPr>
+            <a:r>
+              <a:rPr lang="en-US" sz="9200" b="1" i="1" dirty="0">
                 <a:solidFill>
                   <a:srgbClr val="1A1FE0"/>
                 </a:solidFill>
@@ -3380,13 +3404,52 @@
                 <a:ea typeface="Georgia" pitchFamily="34" charset="-122"/>
                 <a:cs typeface="Georgia" pitchFamily="34" charset="-120"/>
               </a:rPr>
-              <a:t> 3</a:t>
-            </a:r>
-            <a:pPr algn="ctr" indent="0" marL="0">
-              <a:buNone/>
-            </a:pPr>
-            <a:r>
-              <a:rPr lang="en-US" sz="8000" b="1" i="1" dirty="0">
+              <a:t> default</a:t>
+            </a:r>
+            <a:endParaRPr lang="en-US" sz="9200" dirty="0"/>
+          </a:p>
+        </p:txBody>
+      </p:sp>
+      <p:sp>
+        <p:nvSpPr>
+          <p:cNvPr id="6" name="Text 4"/>
+          <p:cNvSpPr/>
+          <p:nvPr/>
+        </p:nvSpPr>
+        <p:spPr>
+          <a:xfrm>
+            <a:off x="548640" y="3383280"/>
+            <a:ext cx="11094415" cy="914400"/>
+          </a:xfrm>
+          <a:prstGeom prst="rect">
+            <a:avLst/>
+          </a:prstGeom>
+          <a:noFill/>
+          <a:ln/>
+        </p:spPr>
+        <p:txBody>
+          <a:bodyPr wrap="square" rtlCol="0" anchor="ctr"/>
+          <a:lstStyle/>
+          <a:p>
+            <a:pPr algn="ctr" indent="0" marL="0">
+              <a:buNone/>
+            </a:pPr>
+            <a:r>
+              <a:rPr lang="en-US" sz="2200" i="1" dirty="0">
+                <a:solidFill>
+                  <a:srgbClr val="1A1FE0"/>
+                </a:solidFill>
+                <a:latin typeface="Georgia" pitchFamily="34" charset="0"/>
+                <a:ea typeface="Georgia" pitchFamily="34" charset="-122"/>
+                <a:cs typeface="Georgia" pitchFamily="34" charset="-120"/>
+              </a:rPr>
+              <a:t>for</a:t>
+            </a:r>
+            <a:pPr algn="ctr" indent="0" marL="0">
+              <a:buNone/>
+            </a:pPr>
+            <a:r>
+              <a:rPr lang="en-US" sz="2200" i="1" dirty="0">
                 <a:solidFill>
                   <a:srgbClr val="EC4899"/>
                 </a:solidFill>
@@ -3394,22 +3457,92 @@
                 <a:ea typeface="Georgia" pitchFamily="34" charset="-122"/>
                 <a:cs typeface="Georgia" pitchFamily="34" charset="-120"/>
               </a:rPr>
-              <a:t> years</a:t>
-            </a:r>
-            <a:endParaRPr lang="en-US" sz="8000" dirty="0"/>
-          </a:p>
-        </p:txBody>
-      </p:sp>
-      <p:sp>
-        <p:nvSpPr>
-          <p:cNvPr id="6" name="Text 4"/>
-          <p:cNvSpPr/>
-          <p:nvPr/>
-        </p:nvSpPr>
-        <p:spPr>
-          <a:xfrm>
-            <a:off x="1280160" y="4023360"/>
-            <a:ext cx="914400" cy="548640"/>
+              <a:t> schools,</a:t>
+            </a:r>
+            <a:pPr algn="ctr" indent="0" marL="0">
+              <a:buNone/>
+            </a:pPr>
+            <a:r>
+              <a:rPr lang="en-US" sz="2200" i="1" dirty="0">
+                <a:solidFill>
+                  <a:srgbClr val="F59E0B"/>
+                </a:solidFill>
+                <a:latin typeface="Georgia" pitchFamily="34" charset="0"/>
+                <a:ea typeface="Georgia" pitchFamily="34" charset="-122"/>
+                <a:cs typeface="Georgia" pitchFamily="34" charset="-120"/>
+              </a:rPr>
+              <a:t> museums,</a:t>
+            </a:r>
+            <a:pPr algn="ctr" indent="0" marL="0">
+              <a:buNone/>
+            </a:pPr>
+            <a:r>
+              <a:rPr lang="en-US" sz="2200" i="1" dirty="0">
+                <a:solidFill>
+                  <a:srgbClr val="22D3EE"/>
+                </a:solidFill>
+                <a:latin typeface="Georgia" pitchFamily="34" charset="0"/>
+                <a:ea typeface="Georgia" pitchFamily="34" charset="-122"/>
+                <a:cs typeface="Georgia" pitchFamily="34" charset="-120"/>
+              </a:rPr>
+              <a:t> researchers,</a:t>
+            </a:r>
+            <a:pPr algn="ctr" indent="0" marL="0">
+              <a:buNone/>
+            </a:pPr>
+            <a:r>
+              <a:rPr lang="en-US" sz="2200" i="1" dirty="0">
+                <a:solidFill>
+                  <a:srgbClr val="E84C2C"/>
+                </a:solidFill>
+                <a:latin typeface="Georgia" pitchFamily="34" charset="0"/>
+                <a:ea typeface="Georgia" pitchFamily="34" charset="-122"/>
+                <a:cs typeface="Georgia" pitchFamily="34" charset="-120"/>
+              </a:rPr>
+              <a:t> and</a:t>
+            </a:r>
+            <a:pPr algn="ctr" indent="0" marL="0">
+              <a:buNone/>
+            </a:pPr>
+            <a:r>
+              <a:rPr lang="en-US" sz="2200" i="1" dirty="0">
+                <a:solidFill>
+                  <a:srgbClr val="1FAE52"/>
+                </a:solidFill>
+                <a:latin typeface="Georgia" pitchFamily="34" charset="0"/>
+                <a:ea typeface="Georgia" pitchFamily="34" charset="-122"/>
+                <a:cs typeface="Georgia" pitchFamily="34" charset="-120"/>
+              </a:rPr>
+              <a:t> the</a:t>
+            </a:r>
+            <a:pPr algn="ctr" indent="0" marL="0">
+              <a:buNone/>
+            </a:pPr>
+            <a:r>
+              <a:rPr lang="en-US" sz="2200" i="1" dirty="0">
+                <a:solidFill>
+                  <a:srgbClr val="1A1FE0"/>
+                </a:solidFill>
+                <a:latin typeface="Georgia" pitchFamily="34" charset="0"/>
+                <a:ea typeface="Georgia" pitchFamily="34" charset="-122"/>
+                <a:cs typeface="Georgia" pitchFamily="34" charset="-120"/>
+              </a:rPr>
+              <a:t> public</a:t>
+            </a:r>
+            <a:endParaRPr lang="en-US" sz="2200" dirty="0"/>
+          </a:p>
+        </p:txBody>
+      </p:sp>
+      <p:sp>
+        <p:nvSpPr>
+          <p:cNvPr id="7" name="Text 5"/>
+          <p:cNvSpPr/>
+          <p:nvPr/>
+        </p:nvSpPr>
+        <p:spPr>
+          <a:xfrm>
+            <a:off x="914400" y="4389120"/>
+            <a:ext cx="5029200" cy="320040"/>
           </a:xfrm>
           <a:prstGeom prst="rect">
             <a:avLst/>
@@ -3425,56 +3558,17 @@
               <a:buNone/>
             </a:pPr>
             <a:r>
-              <a:rPr lang="en-US" sz="2600" b="1" i="1" dirty="0">
-                <a:solidFill>
-                  <a:srgbClr val="E84C2C"/>
-                </a:solidFill>
-                <a:latin typeface="Georgia" pitchFamily="34" charset="0"/>
-                <a:ea typeface="Georgia" pitchFamily="34" charset="-122"/>
-                <a:cs typeface="Georgia" pitchFamily="34" charset="-120"/>
-              </a:rPr>
-              <a:t>Y1</a:t>
-            </a:r>
-            <a:endParaRPr lang="en-US" sz="2600" dirty="0"/>
-          </a:p>
-        </p:txBody>
-      </p:sp>
-      <p:sp>
-        <p:nvSpPr>
-          <p:cNvPr id="7" name="Text 5"/>
-          <p:cNvSpPr/>
-          <p:nvPr/>
-        </p:nvSpPr>
-        <p:spPr>
-          <a:xfrm>
-            <a:off x="2377440" y="4069080"/>
-            <a:ext cx="8686800" cy="548640"/>
-          </a:xfrm>
-          <a:prstGeom prst="rect">
-            <a:avLst/>
-          </a:prstGeom>
-          <a:noFill/>
-          <a:ln/>
-        </p:spPr>
-        <p:txBody>
-          <a:bodyPr wrap="square" rtlCol="0" anchor="ctr"/>
-          <a:lstStyle/>
-          <a:p>
-            <a:pPr indent="0" marL="0">
-              <a:buNone/>
-            </a:pPr>
-            <a:r>
-              <a:rPr lang="en-US" sz="1700" dirty="0">
-                <a:solidFill>
-                  <a:srgbClr val="2B2B2B"/>
+              <a:rPr lang="en-US" sz="1100" spc="800" kern="0" dirty="0">
+                <a:solidFill>
+                  <a:srgbClr val="8A8A8A"/>
                 </a:solidFill>
                 <a:latin typeface="Helvetica" pitchFamily="34" charset="0"/>
                 <a:ea typeface="Helvetica" pitchFamily="34" charset="-122"/>
                 <a:cs typeface="Helvetica" pitchFamily="34" charset="-120"/>
               </a:rPr>
-              <a:t>Curriculum alignment, school pilots, museum installations.</a:t>
-            </a:r>
-            <a:endParaRPr lang="en-US" sz="1700" dirty="0"/>
+              <a:t>CORE SUPPORT</a:t>
+            </a:r>
+            <a:endParaRPr lang="en-US" sz="1100" dirty="0"/>
           </a:p>
         </p:txBody>
       </p:sp>
@@ -3486,8 +3580,8 @@
         </p:nvSpPr>
         <p:spPr>
           <a:xfrm>
-            <a:off x="1280160" y="4800600"/>
-            <a:ext cx="914400" cy="548640"/>
+            <a:off x="914400" y="4754880"/>
+            <a:ext cx="5029200" cy="1645920"/>
           </a:xfrm>
           <a:prstGeom prst="rect">
             <a:avLst/>
@@ -3503,46 +3597,7 @@
               <a:buNone/>
             </a:pPr>
             <a:r>
-              <a:rPr lang="en-US" sz="2600" b="1" i="1" dirty="0">
-                <a:solidFill>
-                  <a:srgbClr val="1FAE52"/>
-                </a:solidFill>
-                <a:latin typeface="Georgia" pitchFamily="34" charset="0"/>
-                <a:ea typeface="Georgia" pitchFamily="34" charset="-122"/>
-                <a:cs typeface="Georgia" pitchFamily="34" charset="-120"/>
-              </a:rPr>
-              <a:t>Y2</a:t>
-            </a:r>
-            <a:endParaRPr lang="en-US" sz="2600" dirty="0"/>
-          </a:p>
-        </p:txBody>
-      </p:sp>
-      <p:sp>
-        <p:nvSpPr>
-          <p:cNvPr id="9" name="Text 7"/>
-          <p:cNvSpPr/>
-          <p:nvPr/>
-        </p:nvSpPr>
-        <p:spPr>
-          <a:xfrm>
-            <a:off x="2377440" y="4846320"/>
-            <a:ext cx="8686800" cy="548640"/>
-          </a:xfrm>
-          <a:prstGeom prst="rect">
-            <a:avLst/>
-          </a:prstGeom>
-          <a:noFill/>
-          <a:ln/>
-        </p:spPr>
-        <p:txBody>
-          <a:bodyPr wrap="square" rtlCol="0" anchor="ctr"/>
-          <a:lstStyle/>
-          <a:p>
-            <a:pPr indent="0" marL="0">
-              <a:buNone/>
-            </a:pPr>
-            <a:r>
-              <a:rPr lang="en-US" sz="1700" dirty="0">
+              <a:rPr lang="en-US" sz="1400" dirty="0">
                 <a:solidFill>
                   <a:srgbClr val="2B2B2B"/>
                 </a:solidFill>
@@ -3550,22 +3605,22 @@
                 <a:ea typeface="Helvetica" pitchFamily="34" charset="-122"/>
                 <a:cs typeface="Helvetica" pitchFamily="34" charset="-120"/>
               </a:rPr>
-              <a:t>New learning modules, exhibition formats, regional stories.</a:t>
-            </a:r>
-            <a:endParaRPr lang="en-US" sz="1700" dirty="0"/>
-          </a:p>
-        </p:txBody>
-      </p:sp>
-      <p:sp>
-        <p:nvSpPr>
-          <p:cNvPr id="10" name="Text 8"/>
-          <p:cNvSpPr/>
-          <p:nvPr/>
-        </p:nvSpPr>
-        <p:spPr>
-          <a:xfrm>
-            <a:off x="1280160" y="5577840"/>
-            <a:ext cx="914400" cy="548640"/>
+              <a:t>Ministries, museums, schools, cultural foundations, environmental organisations, and international institutions.</a:t>
+            </a:r>
+            <a:endParaRPr lang="en-US" sz="1400" dirty="0"/>
+          </a:p>
+        </p:txBody>
+      </p:sp>
+      <p:sp>
+        <p:nvSpPr>
+          <p:cNvPr id="9" name="Text 7"/>
+          <p:cNvSpPr/>
+          <p:nvPr/>
+        </p:nvSpPr>
+        <p:spPr>
+          <a:xfrm>
+            <a:off x="6400800" y="4389120"/>
+            <a:ext cx="5029200" cy="320040"/>
           </a:xfrm>
           <a:prstGeom prst="rect">
             <a:avLst/>
@@ -3581,56 +3636,56 @@
               <a:buNone/>
             </a:pPr>
             <a:r>
-              <a:rPr lang="en-US" sz="2600" b="1" i="1" dirty="0">
-                <a:solidFill>
-                  <a:srgbClr val="1A1FE0"/>
-                </a:solidFill>
-                <a:latin typeface="Georgia" pitchFamily="34" charset="0"/>
-                <a:ea typeface="Georgia" pitchFamily="34" charset="-122"/>
-                <a:cs typeface="Georgia" pitchFamily="34" charset="-120"/>
-              </a:rPr>
-              <a:t>Y3</a:t>
-            </a:r>
-            <a:endParaRPr lang="en-US" sz="2600" dirty="0"/>
-          </a:p>
-        </p:txBody>
-      </p:sp>
-      <p:sp>
-        <p:nvSpPr>
-          <p:cNvPr id="11" name="Text 9"/>
-          <p:cNvSpPr/>
-          <p:nvPr/>
-        </p:nvSpPr>
-        <p:spPr>
-          <a:xfrm>
-            <a:off x="2377440" y="5623560"/>
-            <a:ext cx="8686800" cy="548640"/>
-          </a:xfrm>
-          <a:prstGeom prst="rect">
-            <a:avLst/>
-          </a:prstGeom>
-          <a:noFill/>
-          <a:ln/>
-        </p:spPr>
-        <p:txBody>
-          <a:bodyPr wrap="square" rtlCol="0" anchor="ctr"/>
-          <a:lstStyle/>
-          <a:p>
-            <a:pPr indent="0" marL="0">
-              <a:buNone/>
-            </a:pPr>
-            <a:r>
-              <a:rPr lang="en-US" sz="1700" dirty="0">
-                <a:solidFill>
-                  <a:srgbClr val="2B2B2B"/>
+              <a:rPr lang="en-US" sz="1100" spc="800" kern="0" dirty="0">
+                <a:solidFill>
+                  <a:srgbClr val="8A8A8A"/>
                 </a:solidFill>
                 <a:latin typeface="Helvetica" pitchFamily="34" charset="0"/>
                 <a:ea typeface="Helvetica" pitchFamily="34" charset="-122"/>
                 <a:cs typeface="Helvetica" pitchFamily="34" charset="-120"/>
               </a:rPr>
-              <a:t>Free public platform for education, culture and ecology.</a:t>
-            </a:r>
-            <a:endParaRPr lang="en-US" sz="1700" dirty="0"/>
+              <a:t>OPTIONAL</a:t>
+            </a:r>
+            <a:endParaRPr lang="en-US" sz="1100" dirty="0"/>
+          </a:p>
+        </p:txBody>
+      </p:sp>
+      <p:sp>
+        <p:nvSpPr>
+          <p:cNvPr id="10" name="Text 8"/>
+          <p:cNvSpPr/>
+          <p:nvPr/>
+        </p:nvSpPr>
+        <p:spPr>
+          <a:xfrm>
+            <a:off x="6400800" y="4754880"/>
+            <a:ext cx="5029200" cy="1645920"/>
+          </a:xfrm>
+          <a:prstGeom prst="rect">
+            <a:avLst/>
+          </a:prstGeom>
+          <a:noFill/>
+          <a:ln/>
+        </p:spPr>
+        <p:txBody>
+          <a:bodyPr wrap="square" rtlCol="0" anchor="ctr"/>
+          <a:lstStyle/>
+          <a:p>
+            <a:pPr indent="0" marL="0">
+              <a:buNone/>
+            </a:pPr>
+            <a:r>
+              <a:rPr lang="en-US" sz="1400" dirty="0">
+                <a:solidFill>
+                  <a:srgbClr val="2B2B2B"/>
+                </a:solidFill>
+                <a:latin typeface="Helvetica" pitchFamily="34" charset="0"/>
+                <a:ea typeface="Helvetica" pitchFamily="34" charset="-122"/>
+                <a:cs typeface="Helvetica" pitchFamily="34" charset="-120"/>
+              </a:rPr>
+              <a:t>Paid adaptations for private museums, festivals, educational centres, and commissioned exhibitions.</a:t>
+            </a:r>
+            <a:endParaRPr lang="en-US" sz="1400" dirty="0"/>
           </a:p>
         </p:txBody>
       </p:sp>
@@ -3699,7 +3754,7 @@
                 <a:ea typeface="Helvetica" pitchFamily="34" charset="-122"/>
                 <a:cs typeface="Helvetica" pitchFamily="34" charset="-120"/>
               </a:rPr>
-              <a:t>LEVEL 11</a:t>
+              <a:t>CHAPTER 11</a:t>
             </a:r>
             <a:endParaRPr lang="en-US" sz="1100" dirty="0"/>
           </a:p>
@@ -3738,7 +3793,7 @@
                 <a:ea typeface="Helvetica" pitchFamily="34" charset="-122"/>
                 <a:cs typeface="Helvetica" pitchFamily="34" charset="-120"/>
               </a:rPr>
-              <a:t>VENUES</a:t>
+              <a:t>IMPLEMENTATION SUPPORT</a:t>
             </a:r>
             <a:endParaRPr lang="en-US" sz="1600" dirty="0"/>
           </a:p>
@@ -3792,7 +3847,7 @@
               <a:buNone/>
             </a:pPr>
             <a:r>
-              <a:rPr lang="en-US" sz="9000" b="1" i="1" dirty="0">
+              <a:rPr lang="en-US" sz="7000" b="1" i="1" dirty="0">
                 <a:solidFill>
                   <a:srgbClr val="E84C2C"/>
                 </a:solidFill>
@@ -3800,13 +3855,13 @@
                 <a:ea typeface="Georgia" pitchFamily="34" charset="-122"/>
                 <a:cs typeface="Georgia" pitchFamily="34" charset="-120"/>
               </a:rPr>
-              <a:t>where</a:t>
-            </a:r>
-            <a:pPr algn="ctr" indent="0" marL="0">
-              <a:buNone/>
-            </a:pPr>
-            <a:r>
-              <a:rPr lang="en-US" sz="9000" b="1" i="1" dirty="0">
+              <a:t>from</a:t>
+            </a:r>
+            <a:pPr algn="ctr" indent="0" marL="0">
+              <a:buNone/>
+            </a:pPr>
+            <a:r>
+              <a:rPr lang="en-US" sz="7000" b="1" i="1" dirty="0">
                 <a:solidFill>
                   <a:srgbClr val="1FAE52"/>
                 </a:solidFill>
@@ -3814,13 +3869,13 @@
                 <a:ea typeface="Georgia" pitchFamily="34" charset="-122"/>
                 <a:cs typeface="Georgia" pitchFamily="34" charset="-120"/>
               </a:rPr>
-              <a:t> it</a:t>
-            </a:r>
-            <a:pPr algn="ctr" indent="0" marL="0">
-              <a:buNone/>
-            </a:pPr>
-            <a:r>
-              <a:rPr lang="en-US" sz="9000" b="1" i="1" dirty="0">
+              <a:t> prototype</a:t>
+            </a:r>
+            <a:pPr algn="ctr" indent="0" marL="0">
+              <a:buNone/>
+            </a:pPr>
+            <a:r>
+              <a:rPr lang="en-US" sz="7000" b="1" i="1" dirty="0">
                 <a:solidFill>
                   <a:srgbClr val="1A1FE0"/>
                 </a:solidFill>
@@ -3828,9 +3883,23 @@
                 <a:ea typeface="Georgia" pitchFamily="34" charset="-122"/>
                 <a:cs typeface="Georgia" pitchFamily="34" charset="-120"/>
               </a:rPr>
-              <a:t> travels</a:t>
-            </a:r>
-            <a:endParaRPr lang="en-US" sz="9000" dirty="0"/>
+              <a:t> to</a:t>
+            </a:r>
+            <a:pPr algn="ctr" indent="0" marL="0">
+              <a:buNone/>
+            </a:pPr>
+            <a:r>
+              <a:rPr lang="en-US" sz="7000" b="1" i="1" dirty="0">
+                <a:solidFill>
+                  <a:srgbClr val="EC4899"/>
+                </a:solidFill>
+                <a:latin typeface="Georgia" pitchFamily="34" charset="0"/>
+                <a:ea typeface="Georgia" pitchFamily="34" charset="-122"/>
+                <a:cs typeface="Georgia" pitchFamily="34" charset="-120"/>
+              </a:rPr>
+              <a:t> platform</a:t>
+            </a:r>
+            <a:endParaRPr lang="en-US" sz="7000" dirty="0"/>
           </a:p>
         </p:txBody>
       </p:sp>
@@ -3842,34 +3911,34 @@
         </p:nvSpPr>
         <p:spPr>
           <a:xfrm>
-            <a:off x="914400" y="3657600"/>
-            <a:ext cx="548640" cy="411480"/>
-          </a:xfrm>
-          <a:prstGeom prst="rect">
-            <a:avLst/>
-          </a:prstGeom>
-          <a:noFill/>
-          <a:ln/>
-        </p:spPr>
-        <p:txBody>
-          <a:bodyPr wrap="square" rtlCol="0" anchor="ctr"/>
-          <a:lstStyle/>
-          <a:p>
-            <a:pPr indent="0" marL="0">
-              <a:buNone/>
-            </a:pPr>
-            <a:r>
-              <a:rPr lang="en-US" sz="1600" b="1" i="1" dirty="0">
-                <a:solidFill>
-                  <a:srgbClr val="E84C2C"/>
-                </a:solidFill>
-                <a:latin typeface="Georgia" pitchFamily="34" charset="0"/>
-                <a:ea typeface="Georgia" pitchFamily="34" charset="-122"/>
-                <a:cs typeface="Georgia" pitchFamily="34" charset="-120"/>
-              </a:rPr>
-              <a:t>01</a:t>
-            </a:r>
-            <a:endParaRPr lang="en-US" sz="1600" dirty="0"/>
+            <a:off x="548640" y="3291840"/>
+            <a:ext cx="5486400" cy="1280160"/>
+          </a:xfrm>
+          <a:prstGeom prst="rect">
+            <a:avLst/>
+          </a:prstGeom>
+          <a:noFill/>
+          <a:ln/>
+        </p:spPr>
+        <p:txBody>
+          <a:bodyPr wrap="square" rtlCol="0" anchor="ctr"/>
+          <a:lstStyle/>
+          <a:p>
+            <a:pPr algn="ctr" indent="0" marL="0">
+              <a:buNone/>
+            </a:pPr>
+            <a:r>
+              <a:rPr lang="en-US" sz="8000" b="1" i="1" dirty="0">
+                <a:solidFill>
+                  <a:srgbClr val="1A1FE0"/>
+                </a:solidFill>
+                <a:latin typeface="Georgia" pitchFamily="34" charset="0"/>
+                <a:ea typeface="Georgia" pitchFamily="34" charset="-122"/>
+                <a:cs typeface="Georgia" pitchFamily="34" charset="-120"/>
+              </a:rPr>
+              <a:t>$30,000</a:t>
+            </a:r>
+            <a:endParaRPr lang="en-US" sz="8000" dirty="0"/>
           </a:p>
         </p:txBody>
       </p:sp>
@@ -3881,34 +3950,34 @@
         </p:nvSpPr>
         <p:spPr>
           <a:xfrm>
-            <a:off x="1554480" y="3685032"/>
-            <a:ext cx="4572000" cy="411480"/>
-          </a:xfrm>
-          <a:prstGeom prst="rect">
-            <a:avLst/>
-          </a:prstGeom>
-          <a:noFill/>
-          <a:ln/>
-        </p:spPr>
-        <p:txBody>
-          <a:bodyPr wrap="square" rtlCol="0" anchor="ctr"/>
-          <a:lstStyle/>
-          <a:p>
-            <a:pPr indent="0" marL="0">
-              <a:buNone/>
-            </a:pPr>
-            <a:r>
-              <a:rPr lang="en-US" sz="1500" dirty="0">
-                <a:solidFill>
-                  <a:srgbClr val="2B2B2B"/>
+            <a:off x="548640" y="4480560"/>
+            <a:ext cx="5486400" cy="457200"/>
+          </a:xfrm>
+          <a:prstGeom prst="rect">
+            <a:avLst/>
+          </a:prstGeom>
+          <a:noFill/>
+          <a:ln/>
+        </p:spPr>
+        <p:txBody>
+          <a:bodyPr wrap="square" rtlCol="0" anchor="ctr"/>
+          <a:lstStyle/>
+          <a:p>
+            <a:pPr algn="ctr" indent="0" marL="0">
+              <a:buNone/>
+            </a:pPr>
+            <a:r>
+              <a:rPr lang="en-US" sz="1400" dirty="0">
+                <a:solidFill>
+                  <a:srgbClr val="8A8A8A"/>
                 </a:solidFill>
                 <a:latin typeface="Helvetica" pitchFamily="34" charset="0"/>
                 <a:ea typeface="Helvetica" pitchFamily="34" charset="-122"/>
                 <a:cs typeface="Helvetica" pitchFamily="34" charset="-120"/>
               </a:rPr>
-              <a:t>Aral Culture Summit 2026</a:t>
-            </a:r>
-            <a:endParaRPr lang="en-US" sz="1500" dirty="0"/>
+              <a:t>for the first 6 months</a:t>
+            </a:r>
+            <a:endParaRPr lang="en-US" sz="1400" dirty="0"/>
           </a:p>
         </p:txBody>
       </p:sp>
@@ -3920,63 +3989,24 @@
         </p:nvSpPr>
         <p:spPr>
           <a:xfrm>
-            <a:off x="6217920" y="3657600"/>
-            <a:ext cx="548640" cy="411480"/>
-          </a:xfrm>
-          <a:prstGeom prst="rect">
-            <a:avLst/>
-          </a:prstGeom>
-          <a:noFill/>
-          <a:ln/>
-        </p:spPr>
-        <p:txBody>
-          <a:bodyPr wrap="square" rtlCol="0" anchor="ctr"/>
-          <a:lstStyle/>
-          <a:p>
-            <a:pPr indent="0" marL="0">
-              <a:buNone/>
-            </a:pPr>
-            <a:r>
-              <a:rPr lang="en-US" sz="1600" b="1" i="1" dirty="0">
-                <a:solidFill>
-                  <a:srgbClr val="1FAE52"/>
-                </a:solidFill>
-                <a:latin typeface="Georgia" pitchFamily="34" charset="0"/>
-                <a:ea typeface="Georgia" pitchFamily="34" charset="-122"/>
-                <a:cs typeface="Georgia" pitchFamily="34" charset="-120"/>
-              </a:rPr>
-              <a:t>02</a:t>
-            </a:r>
-            <a:endParaRPr lang="en-US" sz="1600" dirty="0"/>
-          </a:p>
-        </p:txBody>
-      </p:sp>
-      <p:sp>
-        <p:nvSpPr>
-          <p:cNvPr id="9" name="Text 7"/>
-          <p:cNvSpPr/>
-          <p:nvPr/>
-        </p:nvSpPr>
-        <p:spPr>
-          <a:xfrm>
-            <a:off x="6858000" y="3685032"/>
-            <a:ext cx="4572000" cy="411480"/>
-          </a:xfrm>
-          <a:prstGeom prst="rect">
-            <a:avLst/>
-          </a:prstGeom>
-          <a:noFill/>
-          <a:ln/>
-        </p:spPr>
-        <p:txBody>
-          <a:bodyPr wrap="square" rtlCol="0" anchor="ctr"/>
-          <a:lstStyle/>
-          <a:p>
-            <a:pPr indent="0" marL="0">
-              <a:buNone/>
-            </a:pPr>
-            <a:r>
-              <a:rPr lang="en-US" sz="1500" dirty="0">
+            <a:off x="548640" y="4937760"/>
+            <a:ext cx="5486400" cy="1097280"/>
+          </a:xfrm>
+          <a:prstGeom prst="rect">
+            <a:avLst/>
+          </a:prstGeom>
+          <a:noFill/>
+          <a:ln/>
+        </p:spPr>
+        <p:txBody>
+          <a:bodyPr wrap="square" rtlCol="0" anchor="ctr"/>
+          <a:lstStyle/>
+          <a:p>
+            <a:pPr algn="ctr" indent="0" marL="0">
+              <a:buNone/>
+            </a:pPr>
+            <a:r>
+              <a:rPr lang="en-US" sz="1300" dirty="0">
                 <a:solidFill>
                   <a:srgbClr val="2B2B2B"/>
                 </a:solidFill>
@@ -3984,9 +4014,48 @@
                 <a:ea typeface="Helvetica" pitchFamily="34" charset="-122"/>
                 <a:cs typeface="Helvetica" pitchFamily="34" charset="-120"/>
               </a:rPr>
-              <a:t>Savitsky Museum</a:t>
-            </a:r>
-            <a:endParaRPr lang="en-US" sz="1500" dirty="0"/>
+              <a:t>polish, learning materials, audience testing, museum &amp; festival formats</a:t>
+            </a:r>
+            <a:endParaRPr lang="en-US" sz="1300" dirty="0"/>
+          </a:p>
+        </p:txBody>
+      </p:sp>
+      <p:sp>
+        <p:nvSpPr>
+          <p:cNvPr id="9" name="Text 7"/>
+          <p:cNvSpPr/>
+          <p:nvPr/>
+        </p:nvSpPr>
+        <p:spPr>
+          <a:xfrm>
+            <a:off x="6126480" y="3291840"/>
+            <a:ext cx="5486400" cy="1280160"/>
+          </a:xfrm>
+          <a:prstGeom prst="rect">
+            <a:avLst/>
+          </a:prstGeom>
+          <a:noFill/>
+          <a:ln/>
+        </p:spPr>
+        <p:txBody>
+          <a:bodyPr wrap="square" rtlCol="0" anchor="ctr"/>
+          <a:lstStyle/>
+          <a:p>
+            <a:pPr algn="ctr" indent="0" marL="0">
+              <a:buNone/>
+            </a:pPr>
+            <a:r>
+              <a:rPr lang="en-US" sz="8000" b="1" i="1" dirty="0">
+                <a:solidFill>
+                  <a:srgbClr val="EC4899"/>
+                </a:solidFill>
+                <a:latin typeface="Georgia" pitchFamily="34" charset="0"/>
+                <a:ea typeface="Georgia" pitchFamily="34" charset="-122"/>
+                <a:cs typeface="Georgia" pitchFamily="34" charset="-120"/>
+              </a:rPr>
+              <a:t>$50,000</a:t>
+            </a:r>
+            <a:endParaRPr lang="en-US" sz="8000" dirty="0"/>
           </a:p>
         </p:txBody>
       </p:sp>
@@ -3998,141 +4067,63 @@
         </p:nvSpPr>
         <p:spPr>
           <a:xfrm>
-            <a:off x="914400" y="4160520"/>
-            <a:ext cx="548640" cy="411480"/>
-          </a:xfrm>
-          <a:prstGeom prst="rect">
-            <a:avLst/>
-          </a:prstGeom>
-          <a:noFill/>
-          <a:ln/>
-        </p:spPr>
-        <p:txBody>
-          <a:bodyPr wrap="square" rtlCol="0" anchor="ctr"/>
-          <a:lstStyle/>
-          <a:p>
-            <a:pPr indent="0" marL="0">
-              <a:buNone/>
-            </a:pPr>
-            <a:r>
-              <a:rPr lang="en-US" sz="1600" b="1" i="1" dirty="0">
-                <a:solidFill>
-                  <a:srgbClr val="1A1FE0"/>
-                </a:solidFill>
-                <a:latin typeface="Georgia" pitchFamily="34" charset="0"/>
-                <a:ea typeface="Georgia" pitchFamily="34" charset="-122"/>
-                <a:cs typeface="Georgia" pitchFamily="34" charset="-120"/>
-              </a:rPr>
-              <a:t>03</a:t>
-            </a:r>
-            <a:endParaRPr lang="en-US" sz="1600" dirty="0"/>
-          </a:p>
-        </p:txBody>
-      </p:sp>
-      <p:sp>
-        <p:nvSpPr>
-          <p:cNvPr id="11" name="Text 9"/>
-          <p:cNvSpPr/>
-          <p:nvPr/>
-        </p:nvSpPr>
-        <p:spPr>
-          <a:xfrm>
-            <a:off x="1554480" y="4187952"/>
-            <a:ext cx="4572000" cy="411480"/>
-          </a:xfrm>
-          <a:prstGeom prst="rect">
-            <a:avLst/>
-          </a:prstGeom>
-          <a:noFill/>
-          <a:ln/>
-        </p:spPr>
-        <p:txBody>
-          <a:bodyPr wrap="square" rtlCol="0" anchor="ctr"/>
-          <a:lstStyle/>
-          <a:p>
-            <a:pPr indent="0" marL="0">
-              <a:buNone/>
-            </a:pPr>
-            <a:r>
-              <a:rPr lang="en-US" sz="1500" dirty="0">
-                <a:solidFill>
-                  <a:srgbClr val="2B2B2B"/>
+            <a:off x="6126480" y="4480560"/>
+            <a:ext cx="5486400" cy="457200"/>
+          </a:xfrm>
+          <a:prstGeom prst="rect">
+            <a:avLst/>
+          </a:prstGeom>
+          <a:noFill/>
+          <a:ln/>
+        </p:spPr>
+        <p:txBody>
+          <a:bodyPr wrap="square" rtlCol="0" anchor="ctr"/>
+          <a:lstStyle/>
+          <a:p>
+            <a:pPr algn="ctr" indent="0" marL="0">
+              <a:buNone/>
+            </a:pPr>
+            <a:r>
+              <a:rPr lang="en-US" sz="1400" dirty="0">
+                <a:solidFill>
+                  <a:srgbClr val="8A8A8A"/>
                 </a:solidFill>
                 <a:latin typeface="Helvetica" pitchFamily="34" charset="0"/>
                 <a:ea typeface="Helvetica" pitchFamily="34" charset="-122"/>
                 <a:cs typeface="Helvetica" pitchFamily="34" charset="-120"/>
               </a:rPr>
-              <a:t>History and Aral Sea Museum</a:t>
-            </a:r>
-            <a:endParaRPr lang="en-US" sz="1500" dirty="0"/>
-          </a:p>
-        </p:txBody>
-      </p:sp>
-      <p:sp>
-        <p:nvSpPr>
-          <p:cNvPr id="12" name="Text 10"/>
-          <p:cNvSpPr/>
-          <p:nvPr/>
-        </p:nvSpPr>
-        <p:spPr>
-          <a:xfrm>
-            <a:off x="6217920" y="4160520"/>
-            <a:ext cx="548640" cy="411480"/>
-          </a:xfrm>
-          <a:prstGeom prst="rect">
-            <a:avLst/>
-          </a:prstGeom>
-          <a:noFill/>
-          <a:ln/>
-        </p:spPr>
-        <p:txBody>
-          <a:bodyPr wrap="square" rtlCol="0" anchor="ctr"/>
-          <a:lstStyle/>
-          <a:p>
-            <a:pPr indent="0" marL="0">
-              <a:buNone/>
-            </a:pPr>
-            <a:r>
-              <a:rPr lang="en-US" sz="1600" b="1" i="1" dirty="0">
-                <a:solidFill>
-                  <a:srgbClr val="EC4899"/>
-                </a:solidFill>
-                <a:latin typeface="Georgia" pitchFamily="34" charset="0"/>
-                <a:ea typeface="Georgia" pitchFamily="34" charset="-122"/>
-                <a:cs typeface="Georgia" pitchFamily="34" charset="-120"/>
-              </a:rPr>
-              <a:t>04</a:t>
-            </a:r>
-            <a:endParaRPr lang="en-US" sz="1600" dirty="0"/>
-          </a:p>
-        </p:txBody>
-      </p:sp>
-      <p:sp>
-        <p:nvSpPr>
-          <p:cNvPr id="13" name="Text 11"/>
-          <p:cNvSpPr/>
-          <p:nvPr/>
-        </p:nvSpPr>
-        <p:spPr>
-          <a:xfrm>
-            <a:off x="6858000" y="4187952"/>
-            <a:ext cx="4572000" cy="411480"/>
-          </a:xfrm>
-          <a:prstGeom prst="rect">
-            <a:avLst/>
-          </a:prstGeom>
-          <a:noFill/>
-          <a:ln/>
-        </p:spPr>
-        <p:txBody>
-          <a:bodyPr wrap="square" rtlCol="0" anchor="ctr"/>
-          <a:lstStyle/>
-          <a:p>
-            <a:pPr indent="0" marL="0">
-              <a:buNone/>
-            </a:pPr>
-            <a:r>
-              <a:rPr lang="en-US" sz="1500" dirty="0">
+              <a:t>per year, 3-year phase</a:t>
+            </a:r>
+            <a:endParaRPr lang="en-US" sz="1400" dirty="0"/>
+          </a:p>
+        </p:txBody>
+      </p:sp>
+      <p:sp>
+        <p:nvSpPr>
+          <p:cNvPr id="11" name="Text 9"/>
+          <p:cNvSpPr/>
+          <p:nvPr/>
+        </p:nvSpPr>
+        <p:spPr>
+          <a:xfrm>
+            <a:off x="6126480" y="4937760"/>
+            <a:ext cx="5486400" cy="1097280"/>
+          </a:xfrm>
+          <a:prstGeom prst="rect">
+            <a:avLst/>
+          </a:prstGeom>
+          <a:noFill/>
+          <a:ln/>
+        </p:spPr>
+        <p:txBody>
+          <a:bodyPr wrap="square" rtlCol="0" anchor="ctr"/>
+          <a:lstStyle/>
+          <a:p>
+            <a:pPr algn="ctr" indent="0" marL="0">
+              <a:buNone/>
+            </a:pPr>
+            <a:r>
+              <a:rPr lang="en-US" sz="1300" dirty="0">
                 <a:solidFill>
                   <a:srgbClr val="2B2B2B"/>
                 </a:solidFill>
@@ -4140,321 +4131,9 @@
                 <a:ea typeface="Helvetica" pitchFamily="34" charset="-122"/>
                 <a:cs typeface="Helvetica" pitchFamily="34" charset="-120"/>
               </a:rPr>
-              <a:t>Center for Contemporary Art, Tashkent</a:t>
-            </a:r>
-            <a:endParaRPr lang="en-US" sz="1500" dirty="0"/>
-          </a:p>
-        </p:txBody>
-      </p:sp>
-      <p:sp>
-        <p:nvSpPr>
-          <p:cNvPr id="14" name="Text 12"/>
-          <p:cNvSpPr/>
-          <p:nvPr/>
-        </p:nvSpPr>
-        <p:spPr>
-          <a:xfrm>
-            <a:off x="914400" y="4663440"/>
-            <a:ext cx="548640" cy="411480"/>
-          </a:xfrm>
-          <a:prstGeom prst="rect">
-            <a:avLst/>
-          </a:prstGeom>
-          <a:noFill/>
-          <a:ln/>
-        </p:spPr>
-        <p:txBody>
-          <a:bodyPr wrap="square" rtlCol="0" anchor="ctr"/>
-          <a:lstStyle/>
-          <a:p>
-            <a:pPr indent="0" marL="0">
-              <a:buNone/>
-            </a:pPr>
-            <a:r>
-              <a:rPr lang="en-US" sz="1600" b="1" i="1" dirty="0">
-                <a:solidFill>
-                  <a:srgbClr val="F59E0B"/>
-                </a:solidFill>
-                <a:latin typeface="Georgia" pitchFamily="34" charset="0"/>
-                <a:ea typeface="Georgia" pitchFamily="34" charset="-122"/>
-                <a:cs typeface="Georgia" pitchFamily="34" charset="-120"/>
-              </a:rPr>
-              <a:t>05</a:t>
-            </a:r>
-            <a:endParaRPr lang="en-US" sz="1600" dirty="0"/>
-          </a:p>
-        </p:txBody>
-      </p:sp>
-      <p:sp>
-        <p:nvSpPr>
-          <p:cNvPr id="15" name="Text 13"/>
-          <p:cNvSpPr/>
-          <p:nvPr/>
-        </p:nvSpPr>
-        <p:spPr>
-          <a:xfrm>
-            <a:off x="1554480" y="4690872"/>
-            <a:ext cx="4572000" cy="411480"/>
-          </a:xfrm>
-          <a:prstGeom prst="rect">
-            <a:avLst/>
-          </a:prstGeom>
-          <a:noFill/>
-          <a:ln/>
-        </p:spPr>
-        <p:txBody>
-          <a:bodyPr wrap="square" rtlCol="0" anchor="ctr"/>
-          <a:lstStyle/>
-          <a:p>
-            <a:pPr indent="0" marL="0">
-              <a:buNone/>
-            </a:pPr>
-            <a:r>
-              <a:rPr lang="en-US" sz="1500" dirty="0">
-                <a:solidFill>
-                  <a:srgbClr val="2B2B2B"/>
-                </a:solidFill>
-                <a:latin typeface="Helvetica" pitchFamily="34" charset="0"/>
-                <a:ea typeface="Helvetica" pitchFamily="34" charset="-122"/>
-                <a:cs typeface="Helvetica" pitchFamily="34" charset="-120"/>
-              </a:rPr>
-              <a:t>Tashkent Design Week</a:t>
-            </a:r>
-            <a:endParaRPr lang="en-US" sz="1500" dirty="0"/>
-          </a:p>
-        </p:txBody>
-      </p:sp>
-      <p:sp>
-        <p:nvSpPr>
-          <p:cNvPr id="16" name="Text 14"/>
-          <p:cNvSpPr/>
-          <p:nvPr/>
-        </p:nvSpPr>
-        <p:spPr>
-          <a:xfrm>
-            <a:off x="6217920" y="4663440"/>
-            <a:ext cx="548640" cy="411480"/>
-          </a:xfrm>
-          <a:prstGeom prst="rect">
-            <a:avLst/>
-          </a:prstGeom>
-          <a:noFill/>
-          <a:ln/>
-        </p:spPr>
-        <p:txBody>
-          <a:bodyPr wrap="square" rtlCol="0" anchor="ctr"/>
-          <a:lstStyle/>
-          <a:p>
-            <a:pPr indent="0" marL="0">
-              <a:buNone/>
-            </a:pPr>
-            <a:r>
-              <a:rPr lang="en-US" sz="1600" b="1" i="1" dirty="0">
-                <a:solidFill>
-                  <a:srgbClr val="22D3EE"/>
-                </a:solidFill>
-                <a:latin typeface="Georgia" pitchFamily="34" charset="0"/>
-                <a:ea typeface="Georgia" pitchFamily="34" charset="-122"/>
-                <a:cs typeface="Georgia" pitchFamily="34" charset="-120"/>
-              </a:rPr>
-              <a:t>06</a:t>
-            </a:r>
-            <a:endParaRPr lang="en-US" sz="1600" dirty="0"/>
-          </a:p>
-        </p:txBody>
-      </p:sp>
-      <p:sp>
-        <p:nvSpPr>
-          <p:cNvPr id="17" name="Text 15"/>
-          <p:cNvSpPr/>
-          <p:nvPr/>
-        </p:nvSpPr>
-        <p:spPr>
-          <a:xfrm>
-            <a:off x="6858000" y="4690872"/>
-            <a:ext cx="4572000" cy="411480"/>
-          </a:xfrm>
-          <a:prstGeom prst="rect">
-            <a:avLst/>
-          </a:prstGeom>
-          <a:noFill/>
-          <a:ln/>
-        </p:spPr>
-        <p:txBody>
-          <a:bodyPr wrap="square" rtlCol="0" anchor="ctr"/>
-          <a:lstStyle/>
-          <a:p>
-            <a:pPr indent="0" marL="0">
-              <a:buNone/>
-            </a:pPr>
-            <a:r>
-              <a:rPr lang="en-US" sz="1500" dirty="0">
-                <a:solidFill>
-                  <a:srgbClr val="2B2B2B"/>
-                </a:solidFill>
-                <a:latin typeface="Helvetica" pitchFamily="34" charset="0"/>
-                <a:ea typeface="Helvetica" pitchFamily="34" charset="-122"/>
-                <a:cs typeface="Helvetica" pitchFamily="34" charset="-120"/>
-              </a:rPr>
-              <a:t>Milan Design Week</a:t>
-            </a:r>
-            <a:endParaRPr lang="en-US" sz="1500" dirty="0"/>
-          </a:p>
-        </p:txBody>
-      </p:sp>
-      <p:sp>
-        <p:nvSpPr>
-          <p:cNvPr id="18" name="Text 16"/>
-          <p:cNvSpPr/>
-          <p:nvPr/>
-        </p:nvSpPr>
-        <p:spPr>
-          <a:xfrm>
-            <a:off x="914400" y="5166360"/>
-            <a:ext cx="548640" cy="411480"/>
-          </a:xfrm>
-          <a:prstGeom prst="rect">
-            <a:avLst/>
-          </a:prstGeom>
-          <a:noFill/>
-          <a:ln/>
-        </p:spPr>
-        <p:txBody>
-          <a:bodyPr wrap="square" rtlCol="0" anchor="ctr"/>
-          <a:lstStyle/>
-          <a:p>
-            <a:pPr indent="0" marL="0">
-              <a:buNone/>
-            </a:pPr>
-            <a:r>
-              <a:rPr lang="en-US" sz="1600" b="1" i="1" dirty="0">
-                <a:solidFill>
-                  <a:srgbClr val="E84C2C"/>
-                </a:solidFill>
-                <a:latin typeface="Georgia" pitchFamily="34" charset="0"/>
-                <a:ea typeface="Georgia" pitchFamily="34" charset="-122"/>
-                <a:cs typeface="Georgia" pitchFamily="34" charset="-120"/>
-              </a:rPr>
-              <a:t>07</a:t>
-            </a:r>
-            <a:endParaRPr lang="en-US" sz="1600" dirty="0"/>
-          </a:p>
-        </p:txBody>
-      </p:sp>
-      <p:sp>
-        <p:nvSpPr>
-          <p:cNvPr id="19" name="Text 17"/>
-          <p:cNvSpPr/>
-          <p:nvPr/>
-        </p:nvSpPr>
-        <p:spPr>
-          <a:xfrm>
-            <a:off x="1554480" y="5193792"/>
-            <a:ext cx="4572000" cy="411480"/>
-          </a:xfrm>
-          <a:prstGeom prst="rect">
-            <a:avLst/>
-          </a:prstGeom>
-          <a:noFill/>
-          <a:ln/>
-        </p:spPr>
-        <p:txBody>
-          <a:bodyPr wrap="square" rtlCol="0" anchor="ctr"/>
-          <a:lstStyle/>
-          <a:p>
-            <a:pPr indent="0" marL="0">
-              <a:buNone/>
-            </a:pPr>
-            <a:r>
-              <a:rPr lang="en-US" sz="1500" dirty="0">
-                <a:solidFill>
-                  <a:srgbClr val="2B2B2B"/>
-                </a:solidFill>
-                <a:latin typeface="Helvetica" pitchFamily="34" charset="0"/>
-                <a:ea typeface="Helvetica" pitchFamily="34" charset="-122"/>
-                <a:cs typeface="Helvetica" pitchFamily="34" charset="-120"/>
-              </a:rPr>
-              <a:t>Venice Architecture Biennale</a:t>
-            </a:r>
-            <a:endParaRPr lang="en-US" sz="1500" dirty="0"/>
-          </a:p>
-        </p:txBody>
-      </p:sp>
-      <p:sp>
-        <p:nvSpPr>
-          <p:cNvPr id="20" name="Text 18"/>
-          <p:cNvSpPr/>
-          <p:nvPr/>
-        </p:nvSpPr>
-        <p:spPr>
-          <a:xfrm>
-            <a:off x="6217920" y="5166360"/>
-            <a:ext cx="548640" cy="411480"/>
-          </a:xfrm>
-          <a:prstGeom prst="rect">
-            <a:avLst/>
-          </a:prstGeom>
-          <a:noFill/>
-          <a:ln/>
-        </p:spPr>
-        <p:txBody>
-          <a:bodyPr wrap="square" rtlCol="0" anchor="ctr"/>
-          <a:lstStyle/>
-          <a:p>
-            <a:pPr indent="0" marL="0">
-              <a:buNone/>
-            </a:pPr>
-            <a:r>
-              <a:rPr lang="en-US" sz="1600" b="1" i="1" dirty="0">
-                <a:solidFill>
-                  <a:srgbClr val="1FAE52"/>
-                </a:solidFill>
-                <a:latin typeface="Georgia" pitchFamily="34" charset="0"/>
-                <a:ea typeface="Georgia" pitchFamily="34" charset="-122"/>
-                <a:cs typeface="Georgia" pitchFamily="34" charset="-120"/>
-              </a:rPr>
-              <a:t>08</a:t>
-            </a:r>
-            <a:endParaRPr lang="en-US" sz="1600" dirty="0"/>
-          </a:p>
-        </p:txBody>
-      </p:sp>
-      <p:sp>
-        <p:nvSpPr>
-          <p:cNvPr id="21" name="Text 19"/>
-          <p:cNvSpPr/>
-          <p:nvPr/>
-        </p:nvSpPr>
-        <p:spPr>
-          <a:xfrm>
-            <a:off x="6858000" y="5193792"/>
-            <a:ext cx="4572000" cy="411480"/>
-          </a:xfrm>
-          <a:prstGeom prst="rect">
-            <a:avLst/>
-          </a:prstGeom>
-          <a:noFill/>
-          <a:ln/>
-        </p:spPr>
-        <p:txBody>
-          <a:bodyPr wrap="square" rtlCol="0" anchor="ctr"/>
-          <a:lstStyle/>
-          <a:p>
-            <a:pPr indent="0" marL="0">
-              <a:buNone/>
-            </a:pPr>
-            <a:r>
-              <a:rPr lang="en-US" sz="1500" dirty="0">
-                <a:solidFill>
-                  <a:srgbClr val="2B2B2B"/>
-                </a:solidFill>
-                <a:latin typeface="Helvetica" pitchFamily="34" charset="0"/>
-                <a:ea typeface="Helvetica" pitchFamily="34" charset="-122"/>
-                <a:cs typeface="Helvetica" pitchFamily="34" charset="-120"/>
-              </a:rPr>
-              <a:t>Venice Art Biennale</a:t>
-            </a:r>
-            <a:endParaRPr lang="en-US" sz="1500" dirty="0"/>
+              <a:t>maintain the platform, expand content, support workshops, keep it free</a:t>
+            </a:r>
+            <a:endParaRPr lang="en-US" sz="1300" dirty="0"/>
           </a:p>
         </p:txBody>
       </p:sp>
@@ -4523,7 +4202,7 @@
                 <a:ea typeface="Helvetica" pitchFamily="34" charset="-122"/>
                 <a:cs typeface="Helvetica" pitchFamily="34" charset="-120"/>
               </a:rPr>
-              <a:t>LEVEL 12</a:t>
+              <a:t>CHAPTER 12</a:t>
             </a:r>
             <a:endParaRPr lang="en-US" sz="1100" dirty="0"/>
           </a:p>
@@ -4562,7 +4241,7 @@
                 <a:ea typeface="Helvetica" pitchFamily="34" charset="-122"/>
                 <a:cs typeface="Helvetica" pitchFamily="34" charset="-120"/>
               </a:rPr>
-              <a:t>FUNDING MODEL</a:t>
+              <a:t>FIRST 6 MONTHS</a:t>
             </a:r>
             <a:endParaRPr lang="en-US" sz="1600" dirty="0"/>
           </a:p>
@@ -4616,7 +4295,7 @@
               <a:buNone/>
             </a:pPr>
             <a:r>
-              <a:rPr lang="en-US" sz="9600" b="1" i="1" dirty="0">
+              <a:rPr lang="en-US" sz="6200" b="1" i="1" dirty="0">
                 <a:solidFill>
                   <a:srgbClr val="E84C2C"/>
                 </a:solidFill>
@@ -4624,13 +4303,13 @@
                 <a:ea typeface="Georgia" pitchFamily="34" charset="-122"/>
                 <a:cs typeface="Georgia" pitchFamily="34" charset="-120"/>
               </a:rPr>
-              <a:t>free,</a:t>
-            </a:r>
-            <a:pPr algn="ctr" indent="0" marL="0">
-              <a:buNone/>
-            </a:pPr>
-            <a:r>
-              <a:rPr lang="en-US" sz="9600" b="1" i="1" dirty="0">
+              <a:t>six</a:t>
+            </a:r>
+            <a:pPr algn="ctr" indent="0" marL="0">
+              <a:buNone/>
+            </a:pPr>
+            <a:r>
+              <a:rPr lang="en-US" sz="6200" b="1" i="1" dirty="0">
                 <a:solidFill>
                   <a:srgbClr val="1FAE52"/>
                 </a:solidFill>
@@ -4638,13 +4317,13 @@
                 <a:ea typeface="Georgia" pitchFamily="34" charset="-122"/>
                 <a:cs typeface="Georgia" pitchFamily="34" charset="-120"/>
               </a:rPr>
-              <a:t> by</a:t>
-            </a:r>
-            <a:pPr algn="ctr" indent="0" marL="0">
-              <a:buNone/>
-            </a:pPr>
-            <a:r>
-              <a:rPr lang="en-US" sz="9600" b="1" i="1" dirty="0">
+              <a:t> months,</a:t>
+            </a:r>
+            <a:pPr algn="ctr" indent="0" marL="0">
+              <a:buNone/>
+            </a:pPr>
+            <a:r>
+              <a:rPr lang="en-US" sz="6200" b="1" i="1" dirty="0">
                 <a:solidFill>
                   <a:srgbClr val="1A1FE0"/>
                 </a:solidFill>
@@ -4652,9 +4331,37 @@
                 <a:ea typeface="Georgia" pitchFamily="34" charset="-122"/>
                 <a:cs typeface="Georgia" pitchFamily="34" charset="-120"/>
               </a:rPr>
-              <a:t> default</a:t>
-            </a:r>
-            <a:endParaRPr lang="en-US" sz="9600" dirty="0"/>
+              <a:t> one</a:t>
+            </a:r>
+            <a:pPr algn="ctr" indent="0" marL="0">
+              <a:buNone/>
+            </a:pPr>
+            <a:r>
+              <a:rPr lang="en-US" sz="6200" b="1" i="1" dirty="0">
+                <a:solidFill>
+                  <a:srgbClr val="EC4899"/>
+                </a:solidFill>
+                <a:latin typeface="Georgia" pitchFamily="34" charset="0"/>
+                <a:ea typeface="Georgia" pitchFamily="34" charset="-122"/>
+                <a:cs typeface="Georgia" pitchFamily="34" charset="-120"/>
+              </a:rPr>
+              <a:t> public</a:t>
+            </a:r>
+            <a:pPr algn="ctr" indent="0" marL="0">
+              <a:buNone/>
+            </a:pPr>
+            <a:r>
+              <a:rPr lang="en-US" sz="6200" b="1" i="1" dirty="0">
+                <a:solidFill>
+                  <a:srgbClr val="F59E0B"/>
+                </a:solidFill>
+                <a:latin typeface="Georgia" pitchFamily="34" charset="0"/>
+                <a:ea typeface="Georgia" pitchFamily="34" charset="-122"/>
+                <a:cs typeface="Georgia" pitchFamily="34" charset="-120"/>
+              </a:rPr>
+              <a:t> version</a:t>
+            </a:r>
+            <a:endParaRPr lang="en-US" sz="6200" dirty="0"/>
           </a:p>
         </p:txBody>
       </p:sp>
@@ -4666,80 +4373,24 @@
         </p:nvSpPr>
         <p:spPr>
           <a:xfrm>
-            <a:off x="274320" y="3657600"/>
-            <a:ext cx="11643055" cy="640080"/>
-          </a:xfrm>
-          <a:prstGeom prst="rect">
-            <a:avLst/>
-          </a:prstGeom>
-          <a:noFill/>
-          <a:ln/>
-        </p:spPr>
-        <p:txBody>
-          <a:bodyPr wrap="square" rtlCol="0" anchor="ctr"/>
-          <a:lstStyle/>
-          <a:p>
-            <a:pPr algn="ctr" indent="0" marL="0">
-              <a:buNone/>
-            </a:pPr>
-            <a:r>
-              <a:rPr lang="en-US" sz="2400" i="1" dirty="0">
-                <a:solidFill>
-                  <a:srgbClr val="1A1FE0"/>
-                </a:solidFill>
-                <a:latin typeface="Georgia" pitchFamily="34" charset="0"/>
-                <a:ea typeface="Georgia" pitchFamily="34" charset="-122"/>
-                <a:cs typeface="Georgia" pitchFamily="34" charset="-120"/>
-              </a:rPr>
-              <a:t>for</a:t>
-            </a:r>
-            <a:pPr algn="ctr" indent="0" marL="0">
-              <a:buNone/>
-            </a:pPr>
-            <a:r>
-              <a:rPr lang="en-US" sz="2400" i="1" dirty="0">
-                <a:solidFill>
-                  <a:srgbClr val="EC4899"/>
-                </a:solidFill>
-                <a:latin typeface="Georgia" pitchFamily="34" charset="0"/>
-                <a:ea typeface="Georgia" pitchFamily="34" charset="-122"/>
-                <a:cs typeface="Georgia" pitchFamily="34" charset="-120"/>
-              </a:rPr>
-              <a:t> schools,</a:t>
-            </a:r>
-            <a:pPr algn="ctr" indent="0" marL="0">
-              <a:buNone/>
-            </a:pPr>
-            <a:r>
-              <a:rPr lang="en-US" sz="2400" i="1" dirty="0">
-                <a:solidFill>
-                  <a:srgbClr val="F59E0B"/>
-                </a:solidFill>
-                <a:latin typeface="Georgia" pitchFamily="34" charset="0"/>
-                <a:ea typeface="Georgia" pitchFamily="34" charset="-122"/>
-                <a:cs typeface="Georgia" pitchFamily="34" charset="-120"/>
-              </a:rPr>
-              <a:t> museums,</a:t>
-            </a:r>
-            <a:pPr algn="ctr" indent="0" marL="0">
-              <a:buNone/>
-            </a:pPr>
-            <a:r>
-              <a:rPr lang="en-US" sz="2400" i="1" dirty="0">
-                <a:solidFill>
-                  <a:srgbClr val="22D3EE"/>
-                </a:solidFill>
-                <a:latin typeface="Georgia" pitchFamily="34" charset="0"/>
-                <a:ea typeface="Georgia" pitchFamily="34" charset="-122"/>
-                <a:cs typeface="Georgia" pitchFamily="34" charset="-120"/>
-              </a:rPr>
-              <a:t> researchers,</a:t>
-            </a:r>
-            <a:pPr algn="ctr" indent="0" marL="0">
-              <a:buNone/>
-            </a:pPr>
-            <a:r>
-              <a:rPr lang="en-US" sz="2400" i="1" dirty="0">
+            <a:off x="1280160" y="3291840"/>
+            <a:ext cx="2743200" cy="411480"/>
+          </a:xfrm>
+          <a:prstGeom prst="rect">
+            <a:avLst/>
+          </a:prstGeom>
+          <a:noFill/>
+          <a:ln/>
+        </p:spPr>
+        <p:txBody>
+          <a:bodyPr wrap="square" rtlCol="0" anchor="ctr"/>
+          <a:lstStyle/>
+          <a:p>
+            <a:pPr indent="0" marL="0">
+              <a:buNone/>
+            </a:pPr>
+            <a:r>
+              <a:rPr lang="en-US" sz="1800" b="1" i="1" dirty="0">
                 <a:solidFill>
                   <a:srgbClr val="E84C2C"/>
                 </a:solidFill>
@@ -4747,37 +4398,9 @@
                 <a:ea typeface="Georgia" pitchFamily="34" charset="-122"/>
                 <a:cs typeface="Georgia" pitchFamily="34" charset="-120"/>
               </a:rPr>
-              <a:t> and</a:t>
-            </a:r>
-            <a:pPr algn="ctr" indent="0" marL="0">
-              <a:buNone/>
-            </a:pPr>
-            <a:r>
-              <a:rPr lang="en-US" sz="2400" i="1" dirty="0">
-                <a:solidFill>
-                  <a:srgbClr val="1FAE52"/>
-                </a:solidFill>
-                <a:latin typeface="Georgia" pitchFamily="34" charset="0"/>
-                <a:ea typeface="Georgia" pitchFamily="34" charset="-122"/>
-                <a:cs typeface="Georgia" pitchFamily="34" charset="-120"/>
-              </a:rPr>
-              <a:t> the</a:t>
-            </a:r>
-            <a:pPr algn="ctr" indent="0" marL="0">
-              <a:buNone/>
-            </a:pPr>
-            <a:r>
-              <a:rPr lang="en-US" sz="2400" i="1" dirty="0">
-                <a:solidFill>
-                  <a:srgbClr val="1A1FE0"/>
-                </a:solidFill>
-                <a:latin typeface="Georgia" pitchFamily="34" charset="0"/>
-                <a:ea typeface="Georgia" pitchFamily="34" charset="-122"/>
-                <a:cs typeface="Georgia" pitchFamily="34" charset="-120"/>
-              </a:rPr>
-              <a:t> public</a:t>
-            </a:r>
-            <a:endParaRPr lang="en-US" sz="2400" dirty="0"/>
+              <a:t>Polish</a:t>
+            </a:r>
+            <a:endParaRPr lang="en-US" sz="1800" dirty="0"/>
           </a:p>
         </p:txBody>
       </p:sp>
@@ -4789,8 +4412,8 @@
         </p:nvSpPr>
         <p:spPr>
           <a:xfrm>
-            <a:off x="914400" y="4572000"/>
-            <a:ext cx="5029200" cy="320040"/>
+            <a:off x="4206240" y="3328416"/>
+            <a:ext cx="6858000" cy="411480"/>
           </a:xfrm>
           <a:prstGeom prst="rect">
             <a:avLst/>
@@ -4806,17 +4429,17 @@
               <a:buNone/>
             </a:pPr>
             <a:r>
-              <a:rPr lang="en-US" sz="1100" spc="800" kern="0" dirty="0">
-                <a:solidFill>
-                  <a:srgbClr val="8A8A8A"/>
+              <a:rPr lang="en-US" sz="1400" dirty="0">
+                <a:solidFill>
+                  <a:srgbClr val="2B2B2B"/>
                 </a:solidFill>
                 <a:latin typeface="Helvetica" pitchFamily="34" charset="0"/>
                 <a:ea typeface="Helvetica" pitchFamily="34" charset="-122"/>
                 <a:cs typeface="Helvetica" pitchFamily="34" charset="-120"/>
               </a:rPr>
-              <a:t>CORE SUPPORT</a:t>
-            </a:r>
-            <a:endParaRPr lang="en-US" sz="1100" dirty="0"/>
+              <a:t>Product and user experience.</a:t>
+            </a:r>
+            <a:endParaRPr lang="en-US" sz="1400" dirty="0"/>
           </a:p>
         </p:txBody>
       </p:sp>
@@ -4828,8 +4451,47 @@
         </p:nvSpPr>
         <p:spPr>
           <a:xfrm>
-            <a:off x="914400" y="4937760"/>
-            <a:ext cx="5029200" cy="1463040"/>
+            <a:off x="1280160" y="3749040"/>
+            <a:ext cx="2743200" cy="411480"/>
+          </a:xfrm>
+          <a:prstGeom prst="rect">
+            <a:avLst/>
+          </a:prstGeom>
+          <a:noFill/>
+          <a:ln/>
+        </p:spPr>
+        <p:txBody>
+          <a:bodyPr wrap="square" rtlCol="0" anchor="ctr"/>
+          <a:lstStyle/>
+          <a:p>
+            <a:pPr indent="0" marL="0">
+              <a:buNone/>
+            </a:pPr>
+            <a:r>
+              <a:rPr lang="en-US" sz="1800" b="1" i="1" dirty="0">
+                <a:solidFill>
+                  <a:srgbClr val="1FAE52"/>
+                </a:solidFill>
+                <a:latin typeface="Georgia" pitchFamily="34" charset="0"/>
+                <a:ea typeface="Georgia" pitchFamily="34" charset="-122"/>
+                <a:cs typeface="Georgia" pitchFamily="34" charset="-120"/>
+              </a:rPr>
+              <a:t>Demo</a:t>
+            </a:r>
+            <a:endParaRPr lang="en-US" sz="1800" dirty="0"/>
+          </a:p>
+        </p:txBody>
+      </p:sp>
+      <p:sp>
+        <p:nvSpPr>
+          <p:cNvPr id="9" name="Text 7"/>
+          <p:cNvSpPr/>
+          <p:nvPr/>
+        </p:nvSpPr>
+        <p:spPr>
+          <a:xfrm>
+            <a:off x="4206240" y="3785616"/>
+            <a:ext cx="6858000" cy="411480"/>
           </a:xfrm>
           <a:prstGeom prst="rect">
             <a:avLst/>
@@ -4853,7 +4515,7 @@
                 <a:ea typeface="Helvetica" pitchFamily="34" charset="-122"/>
                 <a:cs typeface="Helvetica" pitchFamily="34" charset="-120"/>
               </a:rPr>
-              <a:t>Ministry of Education, Ministry of Ecology, state museums, universities, public programs.</a:t>
+              <a:t>A presentable public version.</a:t>
             </a:r>
             <a:endParaRPr lang="en-US" sz="1400" dirty="0"/>
           </a:p>
@@ -4861,14 +4523,14 @@
       </p:sp>
       <p:sp>
         <p:nvSpPr>
-          <p:cNvPr id="9" name="Text 7"/>
-          <p:cNvSpPr/>
-          <p:nvPr/>
-        </p:nvSpPr>
-        <p:spPr>
-          <a:xfrm>
-            <a:off x="6400800" y="4572000"/>
-            <a:ext cx="5029200" cy="320040"/>
+          <p:cNvPr id="10" name="Text 8"/>
+          <p:cNvSpPr/>
+          <p:nvPr/>
+        </p:nvSpPr>
+        <p:spPr>
+          <a:xfrm>
+            <a:off x="1280160" y="4206240"/>
+            <a:ext cx="2743200" cy="411480"/>
           </a:xfrm>
           <a:prstGeom prst="rect">
             <a:avLst/>
@@ -4884,30 +4546,108 @@
               <a:buNone/>
             </a:pPr>
             <a:r>
-              <a:rPr lang="en-US" sz="1100" spc="800" kern="0" dirty="0">
-                <a:solidFill>
-                  <a:srgbClr val="8A8A8A"/>
+              <a:rPr lang="en-US" sz="1800" b="1" i="1" dirty="0">
+                <a:solidFill>
+                  <a:srgbClr val="1A1FE0"/>
+                </a:solidFill>
+                <a:latin typeface="Georgia" pitchFamily="34" charset="0"/>
+                <a:ea typeface="Georgia" pitchFamily="34" charset="-122"/>
+                <a:cs typeface="Georgia" pitchFamily="34" charset="-120"/>
+              </a:rPr>
+              <a:t>Materials</a:t>
+            </a:r>
+            <a:endParaRPr lang="en-US" sz="1800" dirty="0"/>
+          </a:p>
+        </p:txBody>
+      </p:sp>
+      <p:sp>
+        <p:nvSpPr>
+          <p:cNvPr id="11" name="Text 9"/>
+          <p:cNvSpPr/>
+          <p:nvPr/>
+        </p:nvSpPr>
+        <p:spPr>
+          <a:xfrm>
+            <a:off x="4206240" y="4242816"/>
+            <a:ext cx="6858000" cy="411480"/>
+          </a:xfrm>
+          <a:prstGeom prst="rect">
+            <a:avLst/>
+          </a:prstGeom>
+          <a:noFill/>
+          <a:ln/>
+        </p:spPr>
+        <p:txBody>
+          <a:bodyPr wrap="square" rtlCol="0" anchor="ctr"/>
+          <a:lstStyle/>
+          <a:p>
+            <a:pPr indent="0" marL="0">
+              <a:buNone/>
+            </a:pPr>
+            <a:r>
+              <a:rPr lang="en-US" sz="1400" dirty="0">
+                <a:solidFill>
+                  <a:srgbClr val="2B2B2B"/>
                 </a:solidFill>
                 <a:latin typeface="Helvetica" pitchFamily="34" charset="0"/>
                 <a:ea typeface="Helvetica" pitchFamily="34" charset="-122"/>
                 <a:cs typeface="Helvetica" pitchFamily="34" charset="-120"/>
               </a:rPr>
-              <a:t>OPTIONAL</a:t>
-            </a:r>
-            <a:endParaRPr lang="en-US" sz="1100" dirty="0"/>
-          </a:p>
-        </p:txBody>
-      </p:sp>
-      <p:sp>
-        <p:nvSpPr>
-          <p:cNvPr id="10" name="Text 8"/>
-          <p:cNvSpPr/>
-          <p:nvPr/>
-        </p:nvSpPr>
-        <p:spPr>
-          <a:xfrm>
-            <a:off x="6400800" y="4937760"/>
-            <a:ext cx="5029200" cy="1463040"/>
+              <a:t>Educational content for classrooms.</a:t>
+            </a:r>
+            <a:endParaRPr lang="en-US" sz="1400" dirty="0"/>
+          </a:p>
+        </p:txBody>
+      </p:sp>
+      <p:sp>
+        <p:nvSpPr>
+          <p:cNvPr id="12" name="Text 10"/>
+          <p:cNvSpPr/>
+          <p:nvPr/>
+        </p:nvSpPr>
+        <p:spPr>
+          <a:xfrm>
+            <a:off x="1280160" y="4663440"/>
+            <a:ext cx="2743200" cy="411480"/>
+          </a:xfrm>
+          <a:prstGeom prst="rect">
+            <a:avLst/>
+          </a:prstGeom>
+          <a:noFill/>
+          <a:ln/>
+        </p:spPr>
+        <p:txBody>
+          <a:bodyPr wrap="square" rtlCol="0" anchor="ctr"/>
+          <a:lstStyle/>
+          <a:p>
+            <a:pPr indent="0" marL="0">
+              <a:buNone/>
+            </a:pPr>
+            <a:r>
+              <a:rPr lang="en-US" sz="1800" b="1" i="1" dirty="0">
+                <a:solidFill>
+                  <a:srgbClr val="EC4899"/>
+                </a:solidFill>
+                <a:latin typeface="Georgia" pitchFamily="34" charset="0"/>
+                <a:ea typeface="Georgia" pitchFamily="34" charset="-122"/>
+                <a:cs typeface="Georgia" pitchFamily="34" charset="-120"/>
+              </a:rPr>
+              <a:t>Testing</a:t>
+            </a:r>
+            <a:endParaRPr lang="en-US" sz="1800" dirty="0"/>
+          </a:p>
+        </p:txBody>
+      </p:sp>
+      <p:sp>
+        <p:nvSpPr>
+          <p:cNvPr id="13" name="Text 11"/>
+          <p:cNvSpPr/>
+          <p:nvPr/>
+        </p:nvSpPr>
+        <p:spPr>
+          <a:xfrm>
+            <a:off x="4206240" y="4700016"/>
+            <a:ext cx="6858000" cy="411480"/>
           </a:xfrm>
           <a:prstGeom prst="rect">
             <a:avLst/>
@@ -4931,7 +4671,163 @@
                 <a:ea typeface="Helvetica" pitchFamily="34" charset="-122"/>
                 <a:cs typeface="Helvetica" pitchFamily="34" charset="-120"/>
               </a:rPr>
-              <a:t>Private museums, festivals, commissioned exhibition versions, international cultural programs.</a:t>
+              <a:t>With students, teachers, museum audiences.</a:t>
+            </a:r>
+            <a:endParaRPr lang="en-US" sz="1400" dirty="0"/>
+          </a:p>
+        </p:txBody>
+      </p:sp>
+      <p:sp>
+        <p:nvSpPr>
+          <p:cNvPr id="14" name="Text 12"/>
+          <p:cNvSpPr/>
+          <p:nvPr/>
+        </p:nvSpPr>
+        <p:spPr>
+          <a:xfrm>
+            <a:off x="1280160" y="5120640"/>
+            <a:ext cx="2743200" cy="411480"/>
+          </a:xfrm>
+          <a:prstGeom prst="rect">
+            <a:avLst/>
+          </a:prstGeom>
+          <a:noFill/>
+          <a:ln/>
+        </p:spPr>
+        <p:txBody>
+          <a:bodyPr wrap="square" rtlCol="0" anchor="ctr"/>
+          <a:lstStyle/>
+          <a:p>
+            <a:pPr indent="0" marL="0">
+              <a:buNone/>
+            </a:pPr>
+            <a:r>
+              <a:rPr lang="en-US" sz="1800" b="1" i="1" dirty="0">
+                <a:solidFill>
+                  <a:srgbClr val="F59E0B"/>
+                </a:solidFill>
+                <a:latin typeface="Georgia" pitchFamily="34" charset="0"/>
+                <a:ea typeface="Georgia" pitchFamily="34" charset="-122"/>
+                <a:cs typeface="Georgia" pitchFamily="34" charset="-120"/>
+              </a:rPr>
+              <a:t>Formats</a:t>
+            </a:r>
+            <a:endParaRPr lang="en-US" sz="1800" dirty="0"/>
+          </a:p>
+        </p:txBody>
+      </p:sp>
+      <p:sp>
+        <p:nvSpPr>
+          <p:cNvPr id="15" name="Text 13"/>
+          <p:cNvSpPr/>
+          <p:nvPr/>
+        </p:nvSpPr>
+        <p:spPr>
+          <a:xfrm>
+            <a:off x="4206240" y="5157216"/>
+            <a:ext cx="6858000" cy="411480"/>
+          </a:xfrm>
+          <a:prstGeom prst="rect">
+            <a:avLst/>
+          </a:prstGeom>
+          <a:noFill/>
+          <a:ln/>
+        </p:spPr>
+        <p:txBody>
+          <a:bodyPr wrap="square" rtlCol="0" anchor="ctr"/>
+          <a:lstStyle/>
+          <a:p>
+            <a:pPr indent="0" marL="0">
+              <a:buNone/>
+            </a:pPr>
+            <a:r>
+              <a:rPr lang="en-US" sz="1400" dirty="0">
+                <a:solidFill>
+                  <a:srgbClr val="2B2B2B"/>
+                </a:solidFill>
+                <a:latin typeface="Helvetica" pitchFamily="34" charset="0"/>
+                <a:ea typeface="Helvetica" pitchFamily="34" charset="-122"/>
+                <a:cs typeface="Helvetica" pitchFamily="34" charset="-120"/>
+              </a:rPr>
+              <a:t>Festival and exhibition adaptations.</a:t>
+            </a:r>
+            <a:endParaRPr lang="en-US" sz="1400" dirty="0"/>
+          </a:p>
+        </p:txBody>
+      </p:sp>
+      <p:sp>
+        <p:nvSpPr>
+          <p:cNvPr id="16" name="Text 14"/>
+          <p:cNvSpPr/>
+          <p:nvPr/>
+        </p:nvSpPr>
+        <p:spPr>
+          <a:xfrm>
+            <a:off x="1280160" y="5577840"/>
+            <a:ext cx="2743200" cy="411480"/>
+          </a:xfrm>
+          <a:prstGeom prst="rect">
+            <a:avLst/>
+          </a:prstGeom>
+          <a:noFill/>
+          <a:ln/>
+        </p:spPr>
+        <p:txBody>
+          <a:bodyPr wrap="square" rtlCol="0" anchor="ctr"/>
+          <a:lstStyle/>
+          <a:p>
+            <a:pPr indent="0" marL="0">
+              <a:buNone/>
+            </a:pPr>
+            <a:r>
+              <a:rPr lang="en-US" sz="1800" b="1" i="1" dirty="0">
+                <a:solidFill>
+                  <a:srgbClr val="22D3EE"/>
+                </a:solidFill>
+                <a:latin typeface="Georgia" pitchFamily="34" charset="0"/>
+                <a:ea typeface="Georgia" pitchFamily="34" charset="-122"/>
+                <a:cs typeface="Georgia" pitchFamily="34" charset="-120"/>
+              </a:rPr>
+              <a:t>Partners</a:t>
+            </a:r>
+            <a:endParaRPr lang="en-US" sz="1800" dirty="0"/>
+          </a:p>
+        </p:txBody>
+      </p:sp>
+      <p:sp>
+        <p:nvSpPr>
+          <p:cNvPr id="17" name="Text 15"/>
+          <p:cNvSpPr/>
+          <p:nvPr/>
+        </p:nvSpPr>
+        <p:spPr>
+          <a:xfrm>
+            <a:off x="4206240" y="5614416"/>
+            <a:ext cx="6858000" cy="411480"/>
+          </a:xfrm>
+          <a:prstGeom prst="rect">
+            <a:avLst/>
+          </a:prstGeom>
+          <a:noFill/>
+          <a:ln/>
+        </p:spPr>
+        <p:txBody>
+          <a:bodyPr wrap="square" rtlCol="0" anchor="ctr"/>
+          <a:lstStyle/>
+          <a:p>
+            <a:pPr indent="0" marL="0">
+              <a:buNone/>
+            </a:pPr>
+            <a:r>
+              <a:rPr lang="en-US" sz="1400" dirty="0">
+                <a:solidFill>
+                  <a:srgbClr val="2B2B2B"/>
+                </a:solidFill>
+                <a:latin typeface="Helvetica" pitchFamily="34" charset="0"/>
+                <a:ea typeface="Helvetica" pitchFamily="34" charset="-122"/>
+                <a:cs typeface="Helvetica" pitchFamily="34" charset="-120"/>
+              </a:rPr>
+              <a:t>Institutional partnerships and documentation.</a:t>
             </a:r>
             <a:endParaRPr lang="en-US" sz="1400" dirty="0"/>
           </a:p>
@@ -5002,7 +4898,7 @@
                 <a:ea typeface="Helvetica" pitchFamily="34" charset="-122"/>
                 <a:cs typeface="Helvetica" pitchFamily="34" charset="-120"/>
               </a:rPr>
-              <a:t>LEVEL 13</a:t>
+              <a:t>CHAPTER 13</a:t>
             </a:r>
             <a:endParaRPr lang="en-US" sz="1100" dirty="0"/>
           </a:p>
@@ -5041,7 +4937,7 @@
                 <a:ea typeface="Helvetica" pitchFamily="34" charset="-122"/>
                 <a:cs typeface="Helvetica" pitchFamily="34" charset="-120"/>
               </a:rPr>
-              <a:t>TEAM</a:t>
+              <a:t>THREE-YEAR VISION</a:t>
             </a:r>
             <a:endParaRPr lang="en-US" sz="1600" dirty="0"/>
           </a:p>
@@ -5078,7 +4974,7 @@
         </p:nvSpPr>
         <p:spPr>
           <a:xfrm>
-            <a:off x="274320" y="2194560"/>
+            <a:off x="274320" y="1645920"/>
             <a:ext cx="11643055" cy="1463040"/>
           </a:xfrm>
           <a:prstGeom prst="rect">
@@ -5095,7 +4991,7 @@
               <a:buNone/>
             </a:pPr>
             <a:r>
-              <a:rPr lang="en-US" sz="9600" b="1" i="1" dirty="0">
+              <a:rPr lang="en-US" sz="7000" b="1" i="1" dirty="0">
                 <a:solidFill>
                   <a:srgbClr val="E84C2C"/>
                 </a:solidFill>
@@ -5103,13 +4999,13 @@
                 <a:ea typeface="Georgia" pitchFamily="34" charset="-122"/>
                 <a:cs typeface="Georgia" pitchFamily="34" charset="-120"/>
               </a:rPr>
-              <a:t>timofey</a:t>
-            </a:r>
-            <a:pPr algn="ctr" indent="0" marL="0">
-              <a:buNone/>
-            </a:pPr>
-            <a:r>
-              <a:rPr lang="en-US" sz="9600" b="1" i="1" dirty="0">
+              <a:t>a</a:t>
+            </a:r>
+            <a:pPr algn="ctr" indent="0" marL="0">
+              <a:buNone/>
+            </a:pPr>
+            <a:r>
+              <a:rPr lang="en-US" sz="7000" b="1" i="1" dirty="0">
                 <a:solidFill>
                   <a:srgbClr val="1FAE52"/>
                 </a:solidFill>
@@ -5117,13 +5013,13 @@
                 <a:ea typeface="Georgia" pitchFamily="34" charset="-122"/>
                 <a:cs typeface="Georgia" pitchFamily="34" charset="-120"/>
               </a:rPr>
-              <a:t> and</a:t>
-            </a:r>
-            <a:pPr algn="ctr" indent="0" marL="0">
-              <a:buNone/>
-            </a:pPr>
-            <a:r>
-              <a:rPr lang="en-US" sz="9600" b="1" i="1" dirty="0">
+              <a:t> living</a:t>
+            </a:r>
+            <a:pPr algn="ctr" indent="0" marL="0">
+              <a:buNone/>
+            </a:pPr>
+            <a:r>
+              <a:rPr lang="en-US" sz="7000" b="1" i="1" dirty="0">
                 <a:solidFill>
                   <a:srgbClr val="1A1FE0"/>
                 </a:solidFill>
@@ -5131,9 +5027,23 @@
                 <a:ea typeface="Georgia" pitchFamily="34" charset="-122"/>
                 <a:cs typeface="Georgia" pitchFamily="34" charset="-120"/>
               </a:rPr>
-              <a:t> robert</a:t>
-            </a:r>
-            <a:endParaRPr lang="en-US" sz="9600" dirty="0"/>
+              <a:t> public</a:t>
+            </a:r>
+            <a:pPr algn="ctr" indent="0" marL="0">
+              <a:buNone/>
+            </a:pPr>
+            <a:r>
+              <a:rPr lang="en-US" sz="7000" b="1" i="1" dirty="0">
+                <a:solidFill>
+                  <a:srgbClr val="EC4899"/>
+                </a:solidFill>
+                <a:latin typeface="Georgia" pitchFamily="34" charset="0"/>
+                <a:ea typeface="Georgia" pitchFamily="34" charset="-122"/>
+                <a:cs typeface="Georgia" pitchFamily="34" charset="-120"/>
+              </a:rPr>
+              <a:t> platform</a:t>
+            </a:r>
+            <a:endParaRPr lang="en-US" sz="7000" dirty="0"/>
           </a:p>
         </p:txBody>
       </p:sp>
@@ -5145,154 +5055,73 @@
         </p:nvSpPr>
         <p:spPr>
           <a:xfrm>
-            <a:off x="274320" y="4023360"/>
-            <a:ext cx="11643055" cy="640080"/>
-          </a:xfrm>
-          <a:prstGeom prst="rect">
-            <a:avLst/>
-          </a:prstGeom>
-          <a:noFill/>
-          <a:ln/>
-        </p:spPr>
-        <p:txBody>
-          <a:bodyPr wrap="square" rtlCol="0" anchor="ctr"/>
-          <a:lstStyle/>
-          <a:p>
-            <a:pPr algn="ctr" indent="0" marL="0">
-              <a:buNone/>
-            </a:pPr>
-            <a:r>
-              <a:rPr lang="en-US" sz="2800" i="1" dirty="0">
-                <a:solidFill>
-                  <a:srgbClr val="1A1FE0"/>
-                </a:solidFill>
-                <a:latin typeface="Georgia" pitchFamily="34" charset="0"/>
-                <a:ea typeface="Georgia" pitchFamily="34" charset="-122"/>
-                <a:cs typeface="Georgia" pitchFamily="34" charset="-120"/>
-              </a:rPr>
-              <a:t>the</a:t>
-            </a:r>
-            <a:pPr algn="ctr" indent="0" marL="0">
-              <a:buNone/>
-            </a:pPr>
-            <a:r>
-              <a:rPr lang="en-US" sz="2800" i="1" dirty="0">
-                <a:solidFill>
-                  <a:srgbClr val="EC4899"/>
-                </a:solidFill>
-                <a:latin typeface="Georgia" pitchFamily="34" charset="0"/>
-                <a:ea typeface="Georgia" pitchFamily="34" charset="-122"/>
-                <a:cs typeface="Georgia" pitchFamily="34" charset="-120"/>
-              </a:rPr>
-              <a:t> people</a:t>
-            </a:r>
-            <a:pPr algn="ctr" indent="0" marL="0">
-              <a:buNone/>
-            </a:pPr>
-            <a:r>
-              <a:rPr lang="en-US" sz="2800" i="1" dirty="0">
-                <a:solidFill>
-                  <a:srgbClr val="F59E0B"/>
-                </a:solidFill>
-                <a:latin typeface="Georgia" pitchFamily="34" charset="0"/>
-                <a:ea typeface="Georgia" pitchFamily="34" charset="-122"/>
-                <a:cs typeface="Georgia" pitchFamily="34" charset="-120"/>
-              </a:rPr>
-              <a:t> behind</a:t>
-            </a:r>
-            <a:pPr algn="ctr" indent="0" marL="0">
-              <a:buNone/>
-            </a:pPr>
-            <a:r>
-              <a:rPr lang="en-US" sz="2800" i="1" dirty="0">
-                <a:solidFill>
-                  <a:srgbClr val="22D3EE"/>
-                </a:solidFill>
-                <a:latin typeface="Georgia" pitchFamily="34" charset="0"/>
-                <a:ea typeface="Georgia" pitchFamily="34" charset="-122"/>
-                <a:cs typeface="Georgia" pitchFamily="34" charset="-120"/>
-              </a:rPr>
-              <a:t> aral3d</a:t>
-            </a:r>
-            <a:endParaRPr lang="en-US" sz="2800" dirty="0"/>
-          </a:p>
-        </p:txBody>
-      </p:sp>
-      <p:sp>
-        <p:nvSpPr>
-          <p:cNvPr id="7" name="Text 5"/>
-          <p:cNvSpPr/>
-          <p:nvPr/>
-        </p:nvSpPr>
-        <p:spPr>
-          <a:xfrm>
-            <a:off x="0" y="5120640"/>
-            <a:ext cx="12191695" cy="320040"/>
-          </a:xfrm>
-          <a:prstGeom prst="rect">
-            <a:avLst/>
-          </a:prstGeom>
-          <a:noFill/>
-          <a:ln/>
-        </p:spPr>
-        <p:txBody>
-          <a:bodyPr wrap="square" rtlCol="0" anchor="ctr"/>
-          <a:lstStyle/>
-          <a:p>
-            <a:pPr algn="ctr" indent="0" marL="0">
-              <a:buNone/>
-            </a:pPr>
-            <a:r>
-              <a:rPr lang="en-US" sz="1100" spc="800" kern="0" dirty="0">
-                <a:solidFill>
-                  <a:srgbClr val="8A8A8A"/>
+            <a:off x="1280160" y="3840480"/>
+            <a:ext cx="9631375" cy="822960"/>
+          </a:xfrm>
+          <a:prstGeom prst="rect">
+            <a:avLst/>
+          </a:prstGeom>
+          <a:noFill/>
+          <a:ln/>
+        </p:spPr>
+        <p:txBody>
+          <a:bodyPr wrap="square" rtlCol="0" anchor="ctr"/>
+          <a:lstStyle/>
+          <a:p>
+            <a:pPr algn="ctr" indent="0" marL="0">
+              <a:buNone/>
+            </a:pPr>
+            <a:r>
+              <a:rPr lang="en-US" sz="1500" dirty="0">
+                <a:solidFill>
+                  <a:srgbClr val="2B2B2B"/>
                 </a:solidFill>
                 <a:latin typeface="Helvetica" pitchFamily="34" charset="0"/>
                 <a:ea typeface="Helvetica" pitchFamily="34" charset="-122"/>
                 <a:cs typeface="Helvetica" pitchFamily="34" charset="-120"/>
               </a:rPr>
-              <a:t>CONTACT</a:t>
-            </a:r>
-            <a:endParaRPr lang="en-US" sz="1100" dirty="0"/>
-          </a:p>
-        </p:txBody>
-      </p:sp>
-      <p:sp>
-        <p:nvSpPr>
-          <p:cNvPr id="8" name="Text 6"/>
-          <p:cNvSpPr/>
-          <p:nvPr/>
-        </p:nvSpPr>
-        <p:spPr>
-          <a:xfrm>
-            <a:off x="0" y="5440680"/>
-            <a:ext cx="12191695" cy="548640"/>
-          </a:xfrm>
-          <a:prstGeom prst="rect">
-            <a:avLst/>
-          </a:prstGeom>
-          <a:noFill/>
-          <a:ln/>
-        </p:spPr>
-        <p:txBody>
-          <a:bodyPr wrap="square" rtlCol="0" anchor="ctr"/>
-          <a:lstStyle/>
-          <a:p>
-            <a:pPr algn="ctr" indent="0" marL="0">
-              <a:buNone/>
-            </a:pPr>
-            <a:r>
-              <a:rPr lang="en-US" sz="2800" i="1" dirty="0">
-                <a:solidFill>
-                  <a:srgbClr val="1A1FE0"/>
-                </a:solidFill>
-                <a:latin typeface="Georgia" pitchFamily="34" charset="0"/>
-                <a:ea typeface="Georgia" pitchFamily="34" charset="-122"/>
-                <a:cs typeface="Georgia" pitchFamily="34" charset="-120"/>
-              </a:rPr>
-              <a:t>timnosov@gmail.com</a:t>
-            </a:r>
-            <a:endParaRPr lang="en-US" sz="2800" dirty="0"/>
+              <a:t>Over three years Aral3D can grow into a long-term public platform for the Aral Sea region.</a:t>
+            </a:r>
+            <a:endParaRPr lang="en-US" sz="1500" dirty="0"/>
+          </a:p>
+        </p:txBody>
+      </p:sp>
+      <p:sp>
+        <p:nvSpPr>
+          <p:cNvPr id="7" name="Text 5"/>
+          <p:cNvSpPr/>
+          <p:nvPr/>
+        </p:nvSpPr>
+        <p:spPr>
+          <a:xfrm>
+            <a:off x="1280160" y="4754880"/>
+            <a:ext cx="9631375" cy="822960"/>
+          </a:xfrm>
+          <a:prstGeom prst="rect">
+            <a:avLst/>
+          </a:prstGeom>
+          <a:noFill/>
+          <a:ln/>
+        </p:spPr>
+        <p:txBody>
+          <a:bodyPr wrap="square" rtlCol="0" anchor="ctr"/>
+          <a:lstStyle/>
+          <a:p>
+            <a:pPr algn="ctr" indent="0" marL="0">
+              <a:buNone/>
+            </a:pPr>
+            <a:r>
+              <a:rPr lang="en-US" sz="1500" dirty="0">
+                <a:solidFill>
+                  <a:srgbClr val="2B2B2B"/>
+                </a:solidFill>
+                <a:latin typeface="Helvetica" pitchFamily="34" charset="0"/>
+                <a:ea typeface="Helvetica" pitchFamily="34" charset="-122"/>
+                <a:cs typeface="Helvetica" pitchFamily="34" charset="-120"/>
+              </a:rPr>
+              <a:t>New layers, new stories, new educational modules and installations — a learning tool and a cultural archive that stays alive, updates over time, and remains accessible.</a:t>
+            </a:r>
+            <a:endParaRPr lang="en-US" sz="1500" dirty="0"/>
           </a:p>
         </p:txBody>
       </p:sp>
@@ -5361,7 +5190,7 @@
                 <a:ea typeface="Helvetica" pitchFamily="34" charset="-122"/>
                 <a:cs typeface="Helvetica" pitchFamily="34" charset="-120"/>
               </a:rPr>
-              <a:t>OUTRO</a:t>
+              <a:t>CHAPTER 14</a:t>
             </a:r>
             <a:endParaRPr lang="en-US" sz="1100" dirty="0"/>
           </a:p>
@@ -5400,7 +5229,7 @@
                 <a:ea typeface="Helvetica" pitchFamily="34" charset="-122"/>
                 <a:cs typeface="Helvetica" pitchFamily="34" charset="-120"/>
               </a:rPr>
-              <a:t>ARAL3D</a:t>
+              <a:t>EXPANSION POTENTIAL</a:t>
             </a:r>
             <a:endParaRPr lang="en-US" sz="1600" dirty="0"/>
           </a:p>
@@ -5437,7 +5266,7 @@
         </p:nvSpPr>
         <p:spPr>
           <a:xfrm>
-            <a:off x="274320" y="2377440"/>
+            <a:off x="274320" y="1645920"/>
             <a:ext cx="11643055" cy="1463040"/>
           </a:xfrm>
           <a:prstGeom prst="rect">
@@ -5454,7 +5283,7 @@
               <a:buNone/>
             </a:pPr>
             <a:r>
-              <a:rPr lang="en-US" sz="10000" b="1" i="1" dirty="0">
+              <a:rPr lang="en-US" sz="7000" b="1" i="1" dirty="0">
                 <a:solidFill>
                   <a:srgbClr val="E84C2C"/>
                 </a:solidFill>
@@ -5462,13 +5291,13 @@
                 <a:ea typeface="Georgia" pitchFamily="34" charset="-122"/>
                 <a:cs typeface="Georgia" pitchFamily="34" charset="-120"/>
               </a:rPr>
-              <a:t>thank</a:t>
-            </a:r>
-            <a:pPr algn="ctr" indent="0" marL="0">
-              <a:buNone/>
-            </a:pPr>
-            <a:r>
-              <a:rPr lang="en-US" sz="10000" b="1" i="1" dirty="0">
+              <a:t>aral</a:t>
+            </a:r>
+            <a:pPr algn="ctr" indent="0" marL="0">
+              <a:buNone/>
+            </a:pPr>
+            <a:r>
+              <a:rPr lang="en-US" sz="7000" b="1" i="1" dirty="0">
                 <a:solidFill>
                   <a:srgbClr val="1FAE52"/>
                 </a:solidFill>
@@ -5476,9 +5305,51 @@
                 <a:ea typeface="Georgia" pitchFamily="34" charset="-122"/>
                 <a:cs typeface="Georgia" pitchFamily="34" charset="-120"/>
               </a:rPr>
-              <a:t> you</a:t>
-            </a:r>
-            <a:endParaRPr lang="en-US" sz="10000" dirty="0"/>
+              <a:t> is</a:t>
+            </a:r>
+            <a:pPr algn="ctr" indent="0" marL="0">
+              <a:buNone/>
+            </a:pPr>
+            <a:r>
+              <a:rPr lang="en-US" sz="7000" b="1" i="1" dirty="0">
+                <a:solidFill>
+                  <a:srgbClr val="1A1FE0"/>
+                </a:solidFill>
+                <a:latin typeface="Georgia" pitchFamily="34" charset="0"/>
+                <a:ea typeface="Georgia" pitchFamily="34" charset="-122"/>
+                <a:cs typeface="Georgia" pitchFamily="34" charset="-120"/>
+              </a:rPr>
+              <a:t> the</a:t>
+            </a:r>
+            <a:pPr algn="ctr" indent="0" marL="0">
+              <a:buNone/>
+            </a:pPr>
+            <a:r>
+              <a:rPr lang="en-US" sz="7000" b="1" i="1" dirty="0">
+                <a:solidFill>
+                  <a:srgbClr val="EC4899"/>
+                </a:solidFill>
+                <a:latin typeface="Georgia" pitchFamily="34" charset="0"/>
+                <a:ea typeface="Georgia" pitchFamily="34" charset="-122"/>
+                <a:cs typeface="Georgia" pitchFamily="34" charset="-120"/>
+              </a:rPr>
+              <a:t> first</a:t>
+            </a:r>
+            <a:pPr algn="ctr" indent="0" marL="0">
+              <a:buNone/>
+            </a:pPr>
+            <a:r>
+              <a:rPr lang="en-US" sz="7000" b="1" i="1" dirty="0">
+                <a:solidFill>
+                  <a:srgbClr val="F59E0B"/>
+                </a:solidFill>
+                <a:latin typeface="Georgia" pitchFamily="34" charset="0"/>
+                <a:ea typeface="Georgia" pitchFamily="34" charset="-122"/>
+                <a:cs typeface="Georgia" pitchFamily="34" charset="-120"/>
+              </a:rPr>
+              <a:t> case</a:t>
+            </a:r>
+            <a:endParaRPr lang="en-US" sz="7000" dirty="0"/>
           </a:p>
         </p:txBody>
       </p:sp>
@@ -5490,8 +5361,1102 @@
         </p:nvSpPr>
         <p:spPr>
           <a:xfrm>
-            <a:off x="274320" y="4937760"/>
-            <a:ext cx="11643055" cy="640080"/>
+            <a:off x="1280160" y="3383280"/>
+            <a:ext cx="548640" cy="411480"/>
+          </a:xfrm>
+          <a:prstGeom prst="rect">
+            <a:avLst/>
+          </a:prstGeom>
+          <a:noFill/>
+          <a:ln/>
+        </p:spPr>
+        <p:txBody>
+          <a:bodyPr wrap="square" rtlCol="0" anchor="ctr"/>
+          <a:lstStyle/>
+          <a:p>
+            <a:pPr indent="0" marL="0">
+              <a:buNone/>
+            </a:pPr>
+            <a:r>
+              <a:rPr lang="en-US" sz="1600" b="1" i="1" dirty="0">
+                <a:solidFill>
+                  <a:srgbClr val="E84C2C"/>
+                </a:solidFill>
+                <a:latin typeface="Georgia" pitchFamily="34" charset="0"/>
+                <a:ea typeface="Georgia" pitchFamily="34" charset="-122"/>
+                <a:cs typeface="Georgia" pitchFamily="34" charset="-120"/>
+              </a:rPr>
+              <a:t>01</a:t>
+            </a:r>
+            <a:endParaRPr lang="en-US" sz="1600" dirty="0"/>
+          </a:p>
+        </p:txBody>
+      </p:sp>
+      <p:sp>
+        <p:nvSpPr>
+          <p:cNvPr id="7" name="Text 5"/>
+          <p:cNvSpPr/>
+          <p:nvPr/>
+        </p:nvSpPr>
+        <p:spPr>
+          <a:xfrm>
+            <a:off x="1920240" y="3410712"/>
+            <a:ext cx="9144000" cy="411480"/>
+          </a:xfrm>
+          <a:prstGeom prst="rect">
+            <a:avLst/>
+          </a:prstGeom>
+          <a:noFill/>
+          <a:ln/>
+        </p:spPr>
+        <p:txBody>
+          <a:bodyPr wrap="square" rtlCol="0" anchor="ctr"/>
+          <a:lstStyle/>
+          <a:p>
+            <a:pPr indent="0" marL="0">
+              <a:buNone/>
+            </a:pPr>
+            <a:r>
+              <a:rPr lang="en-US" sz="1500" dirty="0">
+                <a:solidFill>
+                  <a:srgbClr val="2B2B2B"/>
+                </a:solidFill>
+                <a:latin typeface="Helvetica" pitchFamily="34" charset="0"/>
+                <a:ea typeface="Helvetica" pitchFamily="34" charset="-122"/>
+                <a:cs typeface="Helvetica" pitchFamily="34" charset="-120"/>
+              </a:rPr>
+              <a:t>Caspian Sea</a:t>
+            </a:r>
+            <a:endParaRPr lang="en-US" sz="1500" dirty="0"/>
+          </a:p>
+        </p:txBody>
+      </p:sp>
+      <p:sp>
+        <p:nvSpPr>
+          <p:cNvPr id="8" name="Text 6"/>
+          <p:cNvSpPr/>
+          <p:nvPr/>
+        </p:nvSpPr>
+        <p:spPr>
+          <a:xfrm>
+            <a:off x="1280160" y="3840480"/>
+            <a:ext cx="548640" cy="411480"/>
+          </a:xfrm>
+          <a:prstGeom prst="rect">
+            <a:avLst/>
+          </a:prstGeom>
+          <a:noFill/>
+          <a:ln/>
+        </p:spPr>
+        <p:txBody>
+          <a:bodyPr wrap="square" rtlCol="0" anchor="ctr"/>
+          <a:lstStyle/>
+          <a:p>
+            <a:pPr indent="0" marL="0">
+              <a:buNone/>
+            </a:pPr>
+            <a:r>
+              <a:rPr lang="en-US" sz="1600" b="1" i="1" dirty="0">
+                <a:solidFill>
+                  <a:srgbClr val="1FAE52"/>
+                </a:solidFill>
+                <a:latin typeface="Georgia" pitchFamily="34" charset="0"/>
+                <a:ea typeface="Georgia" pitchFamily="34" charset="-122"/>
+                <a:cs typeface="Georgia" pitchFamily="34" charset="-120"/>
+              </a:rPr>
+              <a:t>02</a:t>
+            </a:r>
+            <a:endParaRPr lang="en-US" sz="1600" dirty="0"/>
+          </a:p>
+        </p:txBody>
+      </p:sp>
+      <p:sp>
+        <p:nvSpPr>
+          <p:cNvPr id="9" name="Text 7"/>
+          <p:cNvSpPr/>
+          <p:nvPr/>
+        </p:nvSpPr>
+        <p:spPr>
+          <a:xfrm>
+            <a:off x="1920240" y="3867912"/>
+            <a:ext cx="9144000" cy="411480"/>
+          </a:xfrm>
+          <a:prstGeom prst="rect">
+            <a:avLst/>
+          </a:prstGeom>
+          <a:noFill/>
+          <a:ln/>
+        </p:spPr>
+        <p:txBody>
+          <a:bodyPr wrap="square" rtlCol="0" anchor="ctr"/>
+          <a:lstStyle/>
+          <a:p>
+            <a:pPr indent="0" marL="0">
+              <a:buNone/>
+            </a:pPr>
+            <a:r>
+              <a:rPr lang="en-US" sz="1500" dirty="0">
+                <a:solidFill>
+                  <a:srgbClr val="2B2B2B"/>
+                </a:solidFill>
+                <a:latin typeface="Helvetica" pitchFamily="34" charset="0"/>
+                <a:ea typeface="Helvetica" pitchFamily="34" charset="-122"/>
+                <a:cs typeface="Helvetica" pitchFamily="34" charset="-120"/>
+              </a:rPr>
+              <a:t>Venice</a:t>
+            </a:r>
+            <a:endParaRPr lang="en-US" sz="1500" dirty="0"/>
+          </a:p>
+        </p:txBody>
+      </p:sp>
+      <p:sp>
+        <p:nvSpPr>
+          <p:cNvPr id="10" name="Text 8"/>
+          <p:cNvSpPr/>
+          <p:nvPr/>
+        </p:nvSpPr>
+        <p:spPr>
+          <a:xfrm>
+            <a:off x="1280160" y="4297680"/>
+            <a:ext cx="548640" cy="411480"/>
+          </a:xfrm>
+          <a:prstGeom prst="rect">
+            <a:avLst/>
+          </a:prstGeom>
+          <a:noFill/>
+          <a:ln/>
+        </p:spPr>
+        <p:txBody>
+          <a:bodyPr wrap="square" rtlCol="0" anchor="ctr"/>
+          <a:lstStyle/>
+          <a:p>
+            <a:pPr indent="0" marL="0">
+              <a:buNone/>
+            </a:pPr>
+            <a:r>
+              <a:rPr lang="en-US" sz="1600" b="1" i="1" dirty="0">
+                <a:solidFill>
+                  <a:srgbClr val="1A1FE0"/>
+                </a:solidFill>
+                <a:latin typeface="Georgia" pitchFamily="34" charset="0"/>
+                <a:ea typeface="Georgia" pitchFamily="34" charset="-122"/>
+                <a:cs typeface="Georgia" pitchFamily="34" charset="-120"/>
+              </a:rPr>
+              <a:t>03</a:t>
+            </a:r>
+            <a:endParaRPr lang="en-US" sz="1600" dirty="0"/>
+          </a:p>
+        </p:txBody>
+      </p:sp>
+      <p:sp>
+        <p:nvSpPr>
+          <p:cNvPr id="11" name="Text 9"/>
+          <p:cNvSpPr/>
+          <p:nvPr/>
+        </p:nvSpPr>
+        <p:spPr>
+          <a:xfrm>
+            <a:off x="1920240" y="4325112"/>
+            <a:ext cx="9144000" cy="411480"/>
+          </a:xfrm>
+          <a:prstGeom prst="rect">
+            <a:avLst/>
+          </a:prstGeom>
+          <a:noFill/>
+          <a:ln/>
+        </p:spPr>
+        <p:txBody>
+          <a:bodyPr wrap="square" rtlCol="0" anchor="ctr"/>
+          <a:lstStyle/>
+          <a:p>
+            <a:pPr indent="0" marL="0">
+              <a:buNone/>
+            </a:pPr>
+            <a:r>
+              <a:rPr lang="en-US" sz="1500" dirty="0">
+                <a:solidFill>
+                  <a:srgbClr val="2B2B2B"/>
+                </a:solidFill>
+                <a:latin typeface="Helvetica" pitchFamily="34" charset="0"/>
+                <a:ea typeface="Helvetica" pitchFamily="34" charset="-122"/>
+                <a:cs typeface="Helvetica" pitchFamily="34" charset="-120"/>
+              </a:rPr>
+              <a:t>River deltas</a:t>
+            </a:r>
+            <a:endParaRPr lang="en-US" sz="1500" dirty="0"/>
+          </a:p>
+        </p:txBody>
+      </p:sp>
+      <p:sp>
+        <p:nvSpPr>
+          <p:cNvPr id="12" name="Text 10"/>
+          <p:cNvSpPr/>
+          <p:nvPr/>
+        </p:nvSpPr>
+        <p:spPr>
+          <a:xfrm>
+            <a:off x="1280160" y="4754880"/>
+            <a:ext cx="548640" cy="411480"/>
+          </a:xfrm>
+          <a:prstGeom prst="rect">
+            <a:avLst/>
+          </a:prstGeom>
+          <a:noFill/>
+          <a:ln/>
+        </p:spPr>
+        <p:txBody>
+          <a:bodyPr wrap="square" rtlCol="0" anchor="ctr"/>
+          <a:lstStyle/>
+          <a:p>
+            <a:pPr indent="0" marL="0">
+              <a:buNone/>
+            </a:pPr>
+            <a:r>
+              <a:rPr lang="en-US" sz="1600" b="1" i="1" dirty="0">
+                <a:solidFill>
+                  <a:srgbClr val="EC4899"/>
+                </a:solidFill>
+                <a:latin typeface="Georgia" pitchFamily="34" charset="0"/>
+                <a:ea typeface="Georgia" pitchFamily="34" charset="-122"/>
+                <a:cs typeface="Georgia" pitchFamily="34" charset="-120"/>
+              </a:rPr>
+              <a:t>04</a:t>
+            </a:r>
+            <a:endParaRPr lang="en-US" sz="1600" dirty="0"/>
+          </a:p>
+        </p:txBody>
+      </p:sp>
+      <p:sp>
+        <p:nvSpPr>
+          <p:cNvPr id="13" name="Text 11"/>
+          <p:cNvSpPr/>
+          <p:nvPr/>
+        </p:nvSpPr>
+        <p:spPr>
+          <a:xfrm>
+            <a:off x="1920240" y="4782312"/>
+            <a:ext cx="9144000" cy="411480"/>
+          </a:xfrm>
+          <a:prstGeom prst="rect">
+            <a:avLst/>
+          </a:prstGeom>
+          <a:noFill/>
+          <a:ln/>
+        </p:spPr>
+        <p:txBody>
+          <a:bodyPr wrap="square" rtlCol="0" anchor="ctr"/>
+          <a:lstStyle/>
+          <a:p>
+            <a:pPr indent="0" marL="0">
+              <a:buNone/>
+            </a:pPr>
+            <a:r>
+              <a:rPr lang="en-US" sz="1500" dirty="0">
+                <a:solidFill>
+                  <a:srgbClr val="2B2B2B"/>
+                </a:solidFill>
+                <a:latin typeface="Helvetica" pitchFamily="34" charset="0"/>
+                <a:ea typeface="Helvetica" pitchFamily="34" charset="-122"/>
+                <a:cs typeface="Helvetica" pitchFamily="34" charset="-120"/>
+              </a:rPr>
+              <a:t>Drylands</a:t>
+            </a:r>
+            <a:endParaRPr lang="en-US" sz="1500" dirty="0"/>
+          </a:p>
+        </p:txBody>
+      </p:sp>
+      <p:sp>
+        <p:nvSpPr>
+          <p:cNvPr id="14" name="Text 12"/>
+          <p:cNvSpPr/>
+          <p:nvPr/>
+        </p:nvSpPr>
+        <p:spPr>
+          <a:xfrm>
+            <a:off x="1280160" y="5212080"/>
+            <a:ext cx="548640" cy="411480"/>
+          </a:xfrm>
+          <a:prstGeom prst="rect">
+            <a:avLst/>
+          </a:prstGeom>
+          <a:noFill/>
+          <a:ln/>
+        </p:spPr>
+        <p:txBody>
+          <a:bodyPr wrap="square" rtlCol="0" anchor="ctr"/>
+          <a:lstStyle/>
+          <a:p>
+            <a:pPr indent="0" marL="0">
+              <a:buNone/>
+            </a:pPr>
+            <a:r>
+              <a:rPr lang="en-US" sz="1600" b="1" i="1" dirty="0">
+                <a:solidFill>
+                  <a:srgbClr val="F59E0B"/>
+                </a:solidFill>
+                <a:latin typeface="Georgia" pitchFamily="34" charset="0"/>
+                <a:ea typeface="Georgia" pitchFamily="34" charset="-122"/>
+                <a:cs typeface="Georgia" pitchFamily="34" charset="-120"/>
+              </a:rPr>
+              <a:t>05</a:t>
+            </a:r>
+            <a:endParaRPr lang="en-US" sz="1600" dirty="0"/>
+          </a:p>
+        </p:txBody>
+      </p:sp>
+      <p:sp>
+        <p:nvSpPr>
+          <p:cNvPr id="15" name="Text 13"/>
+          <p:cNvSpPr/>
+          <p:nvPr/>
+        </p:nvSpPr>
+        <p:spPr>
+          <a:xfrm>
+            <a:off x="1920240" y="5239512"/>
+            <a:ext cx="9144000" cy="411480"/>
+          </a:xfrm>
+          <a:prstGeom prst="rect">
+            <a:avLst/>
+          </a:prstGeom>
+          <a:noFill/>
+          <a:ln/>
+        </p:spPr>
+        <p:txBody>
+          <a:bodyPr wrap="square" rtlCol="0" anchor="ctr"/>
+          <a:lstStyle/>
+          <a:p>
+            <a:pPr indent="0" marL="0">
+              <a:buNone/>
+            </a:pPr>
+            <a:r>
+              <a:rPr lang="en-US" sz="1500" dirty="0">
+                <a:solidFill>
+                  <a:srgbClr val="2B2B2B"/>
+                </a:solidFill>
+                <a:latin typeface="Helvetica" pitchFamily="34" charset="0"/>
+                <a:ea typeface="Helvetica" pitchFamily="34" charset="-122"/>
+                <a:cs typeface="Helvetica" pitchFamily="34" charset="-120"/>
+              </a:rPr>
+              <a:t>Irrigation landscapes</a:t>
+            </a:r>
+            <a:endParaRPr lang="en-US" sz="1500" dirty="0"/>
+          </a:p>
+        </p:txBody>
+      </p:sp>
+      <p:sp>
+        <p:nvSpPr>
+          <p:cNvPr id="16" name="Text 14"/>
+          <p:cNvSpPr/>
+          <p:nvPr/>
+        </p:nvSpPr>
+        <p:spPr>
+          <a:xfrm>
+            <a:off x="1280160" y="5669280"/>
+            <a:ext cx="548640" cy="411480"/>
+          </a:xfrm>
+          <a:prstGeom prst="rect">
+            <a:avLst/>
+          </a:prstGeom>
+          <a:noFill/>
+          <a:ln/>
+        </p:spPr>
+        <p:txBody>
+          <a:bodyPr wrap="square" rtlCol="0" anchor="ctr"/>
+          <a:lstStyle/>
+          <a:p>
+            <a:pPr indent="0" marL="0">
+              <a:buNone/>
+            </a:pPr>
+            <a:r>
+              <a:rPr lang="en-US" sz="1600" b="1" i="1" dirty="0">
+                <a:solidFill>
+                  <a:srgbClr val="22D3EE"/>
+                </a:solidFill>
+                <a:latin typeface="Georgia" pitchFamily="34" charset="0"/>
+                <a:ea typeface="Georgia" pitchFamily="34" charset="-122"/>
+                <a:cs typeface="Georgia" pitchFamily="34" charset="-120"/>
+              </a:rPr>
+              <a:t>06</a:t>
+            </a:r>
+            <a:endParaRPr lang="en-US" sz="1600" dirty="0"/>
+          </a:p>
+        </p:txBody>
+      </p:sp>
+      <p:sp>
+        <p:nvSpPr>
+          <p:cNvPr id="17" name="Text 15"/>
+          <p:cNvSpPr/>
+          <p:nvPr/>
+        </p:nvSpPr>
+        <p:spPr>
+          <a:xfrm>
+            <a:off x="1920240" y="5696712"/>
+            <a:ext cx="9144000" cy="411480"/>
+          </a:xfrm>
+          <a:prstGeom prst="rect">
+            <a:avLst/>
+          </a:prstGeom>
+          <a:noFill/>
+          <a:ln/>
+        </p:spPr>
+        <p:txBody>
+          <a:bodyPr wrap="square" rtlCol="0" anchor="ctr"/>
+          <a:lstStyle/>
+          <a:p>
+            <a:pPr indent="0" marL="0">
+              <a:buNone/>
+            </a:pPr>
+            <a:r>
+              <a:rPr lang="en-US" sz="1500" dirty="0">
+                <a:solidFill>
+                  <a:srgbClr val="2B2B2B"/>
+                </a:solidFill>
+                <a:latin typeface="Helvetica" pitchFamily="34" charset="0"/>
+                <a:ea typeface="Helvetica" pitchFamily="34" charset="-122"/>
+                <a:cs typeface="Helvetica" pitchFamily="34" charset="-120"/>
+              </a:rPr>
+              <a:t>Other climate-affected regions</a:t>
+            </a:r>
+            <a:endParaRPr lang="en-US" sz="1500" dirty="0"/>
+          </a:p>
+        </p:txBody>
+      </p:sp>
+    </p:spTree>
+  </p:cSld>
+  <p:clrMapOvr>
+    <a:masterClrMapping/>
+  </p:clrMapOvr>
+</p:sld>
+</file>
+
+<file path=ppt/slides/slide16.xml><?xml version="1.0" encoding="utf-8"?>
+<p:sld xmlns:a="http://schemas.openxmlformats.org/drawingml/2006/main" xmlns:r="http://schemas.openxmlformats.org/officeDocument/2006/relationships" xmlns:p="http://schemas.openxmlformats.org/presentationml/2006/main">
+  <p:cSld name="Slide 16">
+    <p:bg>
+      <p:bgPr>
+        <a:solidFill>
+          <a:srgbClr val="F5F0E8"/>
+        </a:solidFill>
+      </p:bgPr>
+    </p:bg>
+    <p:spTree>
+      <p:nvGrpSpPr>
+        <p:cNvPr id="1" name=""/>
+        <p:cNvGrpSpPr/>
+        <p:nvPr/>
+      </p:nvGrpSpPr>
+      <p:grpSpPr>
+        <a:xfrm>
+          <a:off x="0" y="0"/>
+          <a:ext cx="0" cy="0"/>
+          <a:chOff x="0" y="0"/>
+          <a:chExt cx="0" cy="0"/>
+        </a:xfrm>
+      </p:grpSpPr>
+      <p:sp>
+        <p:nvSpPr>
+          <p:cNvPr id="2" name="Text 0"/>
+          <p:cNvSpPr/>
+          <p:nvPr/>
+        </p:nvSpPr>
+        <p:spPr>
+          <a:xfrm>
+            <a:off x="0" y="320040"/>
+            <a:ext cx="12191695" cy="320040"/>
+          </a:xfrm>
+          <a:prstGeom prst="rect">
+            <a:avLst/>
+          </a:prstGeom>
+          <a:noFill/>
+          <a:ln/>
+        </p:spPr>
+        <p:txBody>
+          <a:bodyPr wrap="square" rtlCol="0" anchor="ctr"/>
+          <a:lstStyle/>
+          <a:p>
+            <a:pPr algn="ctr" indent="0" marL="0">
+              <a:buNone/>
+            </a:pPr>
+            <a:r>
+              <a:rPr lang="en-US" sz="1100" spc="800" kern="0" dirty="0">
+                <a:solidFill>
+                  <a:srgbClr val="8A8A8A"/>
+                </a:solidFill>
+                <a:latin typeface="Helvetica" pitchFamily="34" charset="0"/>
+                <a:ea typeface="Helvetica" pitchFamily="34" charset="-122"/>
+                <a:cs typeface="Helvetica" pitchFamily="34" charset="-120"/>
+              </a:rPr>
+              <a:t>CHAPTER 15</a:t>
+            </a:r>
+            <a:endParaRPr lang="en-US" sz="1100" dirty="0"/>
+          </a:p>
+        </p:txBody>
+      </p:sp>
+      <p:sp>
+        <p:nvSpPr>
+          <p:cNvPr id="3" name="Text 1"/>
+          <p:cNvSpPr/>
+          <p:nvPr/>
+        </p:nvSpPr>
+        <p:spPr>
+          <a:xfrm>
+            <a:off x="0" y="640080"/>
+            <a:ext cx="12191695" cy="411480"/>
+          </a:xfrm>
+          <a:prstGeom prst="rect">
+            <a:avLst/>
+          </a:prstGeom>
+          <a:noFill/>
+          <a:ln/>
+        </p:spPr>
+        <p:txBody>
+          <a:bodyPr wrap="square" rtlCol="0" anchor="ctr"/>
+          <a:lstStyle/>
+          <a:p>
+            <a:pPr algn="ctr" indent="0" marL="0">
+              <a:buNone/>
+            </a:pPr>
+            <a:r>
+              <a:rPr lang="en-US" sz="1600" spc="800" kern="0" dirty="0">
+                <a:solidFill>
+                  <a:srgbClr val="2B2B2B"/>
+                </a:solidFill>
+                <a:latin typeface="Helvetica" pitchFamily="34" charset="0"/>
+                <a:ea typeface="Helvetica" pitchFamily="34" charset="-122"/>
+                <a:cs typeface="Helvetica" pitchFamily="34" charset="-120"/>
+              </a:rPr>
+              <a:t>WHY NOW</a:t>
+            </a:r>
+            <a:endParaRPr lang="en-US" sz="1600" dirty="0"/>
+          </a:p>
+        </p:txBody>
+      </p:sp>
+      <p:sp>
+        <p:nvSpPr>
+          <p:cNvPr id="4" name="Shape 2"/>
+          <p:cNvSpPr/>
+          <p:nvPr/>
+        </p:nvSpPr>
+        <p:spPr>
+          <a:xfrm>
+            <a:off x="5364328" y="1143000"/>
+            <a:ext cx="1463040" cy="0"/>
+          </a:xfrm>
+          <a:prstGeom prst="line">
+            <a:avLst/>
+          </a:prstGeom>
+          <a:noFill/>
+          <a:ln w="9525">
+            <a:solidFill>
+              <a:srgbClr val="BFB9AE"/>
+            </a:solidFill>
+            <a:prstDash val="solid"/>
+          </a:ln>
+        </p:spPr>
+      </p:sp>
+      <p:sp>
+        <p:nvSpPr>
+          <p:cNvPr id="5" name="Text 3"/>
+          <p:cNvSpPr/>
+          <p:nvPr/>
+        </p:nvSpPr>
+        <p:spPr>
+          <a:xfrm>
+            <a:off x="274320" y="1645920"/>
+            <a:ext cx="11643055" cy="1463040"/>
+          </a:xfrm>
+          <a:prstGeom prst="rect">
+            <a:avLst/>
+          </a:prstGeom>
+          <a:noFill/>
+          <a:ln/>
+        </p:spPr>
+        <p:txBody>
+          <a:bodyPr wrap="square" rtlCol="0" anchor="ctr"/>
+          <a:lstStyle/>
+          <a:p>
+            <a:pPr algn="ctr" indent="0" marL="0">
+              <a:buNone/>
+            </a:pPr>
+            <a:r>
+              <a:rPr lang="en-US" sz="7000" b="1" i="1" dirty="0">
+                <a:solidFill>
+                  <a:srgbClr val="E84C2C"/>
+                </a:solidFill>
+                <a:latin typeface="Georgia" pitchFamily="34" charset="0"/>
+                <a:ea typeface="Georgia" pitchFamily="34" charset="-122"/>
+                <a:cs typeface="Georgia" pitchFamily="34" charset="-120"/>
+              </a:rPr>
+              <a:t>the</a:t>
+            </a:r>
+            <a:pPr algn="ctr" indent="0" marL="0">
+              <a:buNone/>
+            </a:pPr>
+            <a:r>
+              <a:rPr lang="en-US" sz="7000" b="1" i="1" dirty="0">
+                <a:solidFill>
+                  <a:srgbClr val="1FAE52"/>
+                </a:solidFill>
+                <a:latin typeface="Georgia" pitchFamily="34" charset="0"/>
+                <a:ea typeface="Georgia" pitchFamily="34" charset="-122"/>
+                <a:cs typeface="Georgia" pitchFamily="34" charset="-120"/>
+              </a:rPr>
+              <a:t> prototype</a:t>
+            </a:r>
+            <a:pPr algn="ctr" indent="0" marL="0">
+              <a:buNone/>
+            </a:pPr>
+            <a:r>
+              <a:rPr lang="en-US" sz="7000" b="1" i="1" dirty="0">
+                <a:solidFill>
+                  <a:srgbClr val="1A1FE0"/>
+                </a:solidFill>
+                <a:latin typeface="Georgia" pitchFamily="34" charset="0"/>
+                <a:ea typeface="Georgia" pitchFamily="34" charset="-122"/>
+                <a:cs typeface="Georgia" pitchFamily="34" charset="-120"/>
+              </a:rPr>
+              <a:t> is</a:t>
+            </a:r>
+            <a:pPr algn="ctr" indent="0" marL="0">
+              <a:buNone/>
+            </a:pPr>
+            <a:r>
+              <a:rPr lang="en-US" sz="7000" b="1" i="1" dirty="0">
+                <a:solidFill>
+                  <a:srgbClr val="EC4899"/>
+                </a:solidFill>
+                <a:latin typeface="Georgia" pitchFamily="34" charset="0"/>
+                <a:ea typeface="Georgia" pitchFamily="34" charset="-122"/>
+                <a:cs typeface="Georgia" pitchFamily="34" charset="-120"/>
+              </a:rPr>
+              <a:t> already</a:t>
+            </a:r>
+            <a:pPr algn="ctr" indent="0" marL="0">
+              <a:buNone/>
+            </a:pPr>
+            <a:r>
+              <a:rPr lang="en-US" sz="7000" b="1" i="1" dirty="0">
+                <a:solidFill>
+                  <a:srgbClr val="F59E0B"/>
+                </a:solidFill>
+                <a:latin typeface="Georgia" pitchFamily="34" charset="0"/>
+                <a:ea typeface="Georgia" pitchFamily="34" charset="-122"/>
+                <a:cs typeface="Georgia" pitchFamily="34" charset="-120"/>
+              </a:rPr>
+              <a:t> alive</a:t>
+            </a:r>
+            <a:endParaRPr lang="en-US" sz="7000" dirty="0"/>
+          </a:p>
+        </p:txBody>
+      </p:sp>
+      <p:sp>
+        <p:nvSpPr>
+          <p:cNvPr id="6" name="Text 4"/>
+          <p:cNvSpPr/>
+          <p:nvPr/>
+        </p:nvSpPr>
+        <p:spPr>
+          <a:xfrm>
+            <a:off x="1280160" y="3840480"/>
+            <a:ext cx="9631375" cy="822960"/>
+          </a:xfrm>
+          <a:prstGeom prst="rect">
+            <a:avLst/>
+          </a:prstGeom>
+          <a:noFill/>
+          <a:ln/>
+        </p:spPr>
+        <p:txBody>
+          <a:bodyPr wrap="square" rtlCol="0" anchor="ctr"/>
+          <a:lstStyle/>
+          <a:p>
+            <a:pPr algn="ctr" indent="0" marL="0">
+              <a:buNone/>
+            </a:pPr>
+            <a:r>
+              <a:rPr lang="en-US" sz="1500" dirty="0">
+                <a:solidFill>
+                  <a:srgbClr val="2B2B2B"/>
+                </a:solidFill>
+                <a:latin typeface="Helvetica" pitchFamily="34" charset="0"/>
+                <a:ea typeface="Helvetica" pitchFamily="34" charset="-122"/>
+                <a:cs typeface="Helvetica" pitchFamily="34" charset="-120"/>
+              </a:rPr>
+              <a:t>Environmental education needs better tools. Museums and schools need formats that are visual, interactive, and accessible.</a:t>
+            </a:r>
+            <a:endParaRPr lang="en-US" sz="1500" dirty="0"/>
+          </a:p>
+        </p:txBody>
+      </p:sp>
+      <p:sp>
+        <p:nvSpPr>
+          <p:cNvPr id="7" name="Text 5"/>
+          <p:cNvSpPr/>
+          <p:nvPr/>
+        </p:nvSpPr>
+        <p:spPr>
+          <a:xfrm>
+            <a:off x="1280160" y="4754880"/>
+            <a:ext cx="9631375" cy="822960"/>
+          </a:xfrm>
+          <a:prstGeom prst="rect">
+            <a:avLst/>
+          </a:prstGeom>
+          <a:noFill/>
+          <a:ln/>
+        </p:spPr>
+        <p:txBody>
+          <a:bodyPr wrap="square" rtlCol="0" anchor="ctr"/>
+          <a:lstStyle/>
+          <a:p>
+            <a:pPr algn="ctr" indent="0" marL="0">
+              <a:buNone/>
+            </a:pPr>
+            <a:r>
+              <a:rPr lang="en-US" sz="1500" dirty="0">
+                <a:solidFill>
+                  <a:srgbClr val="2B2B2B"/>
+                </a:solidFill>
+                <a:latin typeface="Helvetica" pitchFamily="34" charset="0"/>
+                <a:ea typeface="Helvetica" pitchFamily="34" charset="-122"/>
+                <a:cs typeface="Helvetica" pitchFamily="34" charset="-120"/>
+              </a:rPr>
+              <a:t>The Aral Sea story needs to be told not only as a past disaster, but as a living question about the future. With support, Aral3D moves from prototype to public platform.</a:t>
+            </a:r>
+            <a:endParaRPr lang="en-US" sz="1500" dirty="0"/>
+          </a:p>
+        </p:txBody>
+      </p:sp>
+    </p:spTree>
+  </p:cSld>
+  <p:clrMapOvr>
+    <a:masterClrMapping/>
+  </p:clrMapOvr>
+</p:sld>
+</file>
+
+<file path=ppt/slides/slide17.xml><?xml version="1.0" encoding="utf-8"?>
+<p:sld xmlns:a="http://schemas.openxmlformats.org/drawingml/2006/main" xmlns:r="http://schemas.openxmlformats.org/officeDocument/2006/relationships" xmlns:p="http://schemas.openxmlformats.org/presentationml/2006/main">
+  <p:cSld name="Slide 17">
+    <p:bg>
+      <p:bgPr>
+        <a:solidFill>
+          <a:srgbClr val="F5F0E8"/>
+        </a:solidFill>
+      </p:bgPr>
+    </p:bg>
+    <p:spTree>
+      <p:nvGrpSpPr>
+        <p:cNvPr id="1" name=""/>
+        <p:cNvGrpSpPr/>
+        <p:nvPr/>
+      </p:nvGrpSpPr>
+      <p:grpSpPr>
+        <a:xfrm>
+          <a:off x="0" y="0"/>
+          <a:ext cx="0" cy="0"/>
+          <a:chOff x="0" y="0"/>
+          <a:chExt cx="0" cy="0"/>
+        </a:xfrm>
+      </p:grpSpPr>
+      <p:sp>
+        <p:nvSpPr>
+          <p:cNvPr id="2" name="Text 0"/>
+          <p:cNvSpPr/>
+          <p:nvPr/>
+        </p:nvSpPr>
+        <p:spPr>
+          <a:xfrm>
+            <a:off x="0" y="320040"/>
+            <a:ext cx="12191695" cy="320040"/>
+          </a:xfrm>
+          <a:prstGeom prst="rect">
+            <a:avLst/>
+          </a:prstGeom>
+          <a:noFill/>
+          <a:ln/>
+        </p:spPr>
+        <p:txBody>
+          <a:bodyPr wrap="square" rtlCol="0" anchor="ctr"/>
+          <a:lstStyle/>
+          <a:p>
+            <a:pPr algn="ctr" indent="0" marL="0">
+              <a:buNone/>
+            </a:pPr>
+            <a:r>
+              <a:rPr lang="en-US" sz="1100" spc="800" kern="0" dirty="0">
+                <a:solidFill>
+                  <a:srgbClr val="8A8A8A"/>
+                </a:solidFill>
+                <a:latin typeface="Helvetica" pitchFamily="34" charset="0"/>
+                <a:ea typeface="Helvetica" pitchFamily="34" charset="-122"/>
+                <a:cs typeface="Helvetica" pitchFamily="34" charset="-120"/>
+              </a:rPr>
+              <a:t>CHAPTER 16</a:t>
+            </a:r>
+            <a:endParaRPr lang="en-US" sz="1100" dirty="0"/>
+          </a:p>
+        </p:txBody>
+      </p:sp>
+      <p:sp>
+        <p:nvSpPr>
+          <p:cNvPr id="3" name="Text 1"/>
+          <p:cNvSpPr/>
+          <p:nvPr/>
+        </p:nvSpPr>
+        <p:spPr>
+          <a:xfrm>
+            <a:off x="0" y="640080"/>
+            <a:ext cx="12191695" cy="411480"/>
+          </a:xfrm>
+          <a:prstGeom prst="rect">
+            <a:avLst/>
+          </a:prstGeom>
+          <a:noFill/>
+          <a:ln/>
+        </p:spPr>
+        <p:txBody>
+          <a:bodyPr wrap="square" rtlCol="0" anchor="ctr"/>
+          <a:lstStyle/>
+          <a:p>
+            <a:pPr algn="ctr" indent="0" marL="0">
+              <a:buNone/>
+            </a:pPr>
+            <a:r>
+              <a:rPr lang="en-US" sz="1600" spc="800" kern="0" dirty="0">
+                <a:solidFill>
+                  <a:srgbClr val="2B2B2B"/>
+                </a:solidFill>
+                <a:latin typeface="Helvetica" pitchFamily="34" charset="0"/>
+                <a:ea typeface="Helvetica" pitchFamily="34" charset="-122"/>
+                <a:cs typeface="Helvetica" pitchFamily="34" charset="-120"/>
+              </a:rPr>
+              <a:t>TEAM</a:t>
+            </a:r>
+            <a:endParaRPr lang="en-US" sz="1600" dirty="0"/>
+          </a:p>
+        </p:txBody>
+      </p:sp>
+      <p:sp>
+        <p:nvSpPr>
+          <p:cNvPr id="4" name="Shape 2"/>
+          <p:cNvSpPr/>
+          <p:nvPr/>
+        </p:nvSpPr>
+        <p:spPr>
+          <a:xfrm>
+            <a:off x="5364328" y="1143000"/>
+            <a:ext cx="1463040" cy="0"/>
+          </a:xfrm>
+          <a:prstGeom prst="line">
+            <a:avLst/>
+          </a:prstGeom>
+          <a:noFill/>
+          <a:ln w="9525">
+            <a:solidFill>
+              <a:srgbClr val="BFB9AE"/>
+            </a:solidFill>
+            <a:prstDash val="solid"/>
+          </a:ln>
+        </p:spPr>
+      </p:sp>
+      <p:sp>
+        <p:nvSpPr>
+          <p:cNvPr id="5" name="Text 3"/>
+          <p:cNvSpPr/>
+          <p:nvPr/>
+        </p:nvSpPr>
+        <p:spPr>
+          <a:xfrm>
+            <a:off x="274320" y="2194560"/>
+            <a:ext cx="11643055" cy="1463040"/>
+          </a:xfrm>
+          <a:prstGeom prst="rect">
+            <a:avLst/>
+          </a:prstGeom>
+          <a:noFill/>
+          <a:ln/>
+        </p:spPr>
+        <p:txBody>
+          <a:bodyPr wrap="square" rtlCol="0" anchor="ctr"/>
+          <a:lstStyle/>
+          <a:p>
+            <a:pPr algn="ctr" indent="0" marL="0">
+              <a:buNone/>
+            </a:pPr>
+            <a:r>
+              <a:rPr lang="en-US" sz="9600" b="1" i="1" dirty="0">
+                <a:solidFill>
+                  <a:srgbClr val="E84C2C"/>
+                </a:solidFill>
+                <a:latin typeface="Georgia" pitchFamily="34" charset="0"/>
+                <a:ea typeface="Georgia" pitchFamily="34" charset="-122"/>
+                <a:cs typeface="Georgia" pitchFamily="34" charset="-120"/>
+              </a:rPr>
+              <a:t>timofey</a:t>
+            </a:r>
+            <a:pPr algn="ctr" indent="0" marL="0">
+              <a:buNone/>
+            </a:pPr>
+            <a:r>
+              <a:rPr lang="en-US" sz="9600" b="1" i="1" dirty="0">
+                <a:solidFill>
+                  <a:srgbClr val="1FAE52"/>
+                </a:solidFill>
+                <a:latin typeface="Georgia" pitchFamily="34" charset="0"/>
+                <a:ea typeface="Georgia" pitchFamily="34" charset="-122"/>
+                <a:cs typeface="Georgia" pitchFamily="34" charset="-120"/>
+              </a:rPr>
+              <a:t> and</a:t>
+            </a:r>
+            <a:pPr algn="ctr" indent="0" marL="0">
+              <a:buNone/>
+            </a:pPr>
+            <a:r>
+              <a:rPr lang="en-US" sz="9600" b="1" i="1" dirty="0">
+                <a:solidFill>
+                  <a:srgbClr val="1A1FE0"/>
+                </a:solidFill>
+                <a:latin typeface="Georgia" pitchFamily="34" charset="0"/>
+                <a:ea typeface="Georgia" pitchFamily="34" charset="-122"/>
+                <a:cs typeface="Georgia" pitchFamily="34" charset="-120"/>
+              </a:rPr>
+              <a:t> robert</a:t>
+            </a:r>
+            <a:endParaRPr lang="en-US" sz="9600" dirty="0"/>
+          </a:p>
+        </p:txBody>
+      </p:sp>
+      <p:sp>
+        <p:nvSpPr>
+          <p:cNvPr id="6" name="Text 4"/>
+          <p:cNvSpPr/>
+          <p:nvPr/>
+        </p:nvSpPr>
+        <p:spPr>
+          <a:xfrm>
+            <a:off x="548640" y="4023360"/>
+            <a:ext cx="11094415" cy="914400"/>
+          </a:xfrm>
+          <a:prstGeom prst="rect">
+            <a:avLst/>
+          </a:prstGeom>
+          <a:noFill/>
+          <a:ln/>
+        </p:spPr>
+        <p:txBody>
+          <a:bodyPr wrap="square" rtlCol="0" anchor="ctr"/>
+          <a:lstStyle/>
+          <a:p>
+            <a:pPr algn="ctr" indent="0" marL="0">
+              <a:buNone/>
+            </a:pPr>
+            <a:r>
+              <a:rPr lang="en-US" sz="2600" i="1" dirty="0">
+                <a:solidFill>
+                  <a:srgbClr val="1A1FE0"/>
+                </a:solidFill>
+                <a:latin typeface="Georgia" pitchFamily="34" charset="0"/>
+                <a:ea typeface="Georgia" pitchFamily="34" charset="-122"/>
+                <a:cs typeface="Georgia" pitchFamily="34" charset="-120"/>
+              </a:rPr>
+              <a:t>the</a:t>
+            </a:r>
+            <a:pPr algn="ctr" indent="0" marL="0">
+              <a:buNone/>
+            </a:pPr>
+            <a:r>
+              <a:rPr lang="en-US" sz="2600" i="1" dirty="0">
+                <a:solidFill>
+                  <a:srgbClr val="EC4899"/>
+                </a:solidFill>
+                <a:latin typeface="Georgia" pitchFamily="34" charset="0"/>
+                <a:ea typeface="Georgia" pitchFamily="34" charset="-122"/>
+                <a:cs typeface="Georgia" pitchFamily="34" charset="-120"/>
+              </a:rPr>
+              <a:t> people</a:t>
+            </a:r>
+            <a:pPr algn="ctr" indent="0" marL="0">
+              <a:buNone/>
+            </a:pPr>
+            <a:r>
+              <a:rPr lang="en-US" sz="2600" i="1" dirty="0">
+                <a:solidFill>
+                  <a:srgbClr val="F59E0B"/>
+                </a:solidFill>
+                <a:latin typeface="Georgia" pitchFamily="34" charset="0"/>
+                <a:ea typeface="Georgia" pitchFamily="34" charset="-122"/>
+                <a:cs typeface="Georgia" pitchFamily="34" charset="-120"/>
+              </a:rPr>
+              <a:t> behind</a:t>
+            </a:r>
+            <a:pPr algn="ctr" indent="0" marL="0">
+              <a:buNone/>
+            </a:pPr>
+            <a:r>
+              <a:rPr lang="en-US" sz="2600" i="1" dirty="0">
+                <a:solidFill>
+                  <a:srgbClr val="22D3EE"/>
+                </a:solidFill>
+                <a:latin typeface="Georgia" pitchFamily="34" charset="0"/>
+                <a:ea typeface="Georgia" pitchFamily="34" charset="-122"/>
+                <a:cs typeface="Georgia" pitchFamily="34" charset="-120"/>
+              </a:rPr>
+              <a:t> aral3d</a:t>
+            </a:r>
+            <a:endParaRPr lang="en-US" sz="2600" dirty="0"/>
+          </a:p>
+        </p:txBody>
+      </p:sp>
+      <p:sp>
+        <p:nvSpPr>
+          <p:cNvPr id="7" name="Text 5"/>
+          <p:cNvSpPr/>
+          <p:nvPr/>
+        </p:nvSpPr>
+        <p:spPr>
+          <a:xfrm>
+            <a:off x="0" y="5120640"/>
+            <a:ext cx="12191695" cy="320040"/>
+          </a:xfrm>
+          <a:prstGeom prst="rect">
+            <a:avLst/>
+          </a:prstGeom>
+          <a:noFill/>
+          <a:ln/>
+        </p:spPr>
+        <p:txBody>
+          <a:bodyPr wrap="square" rtlCol="0" anchor="ctr"/>
+          <a:lstStyle/>
+          <a:p>
+            <a:pPr algn="ctr" indent="0" marL="0">
+              <a:buNone/>
+            </a:pPr>
+            <a:r>
+              <a:rPr lang="en-US" sz="1100" spc="800" kern="0" dirty="0">
+                <a:solidFill>
+                  <a:srgbClr val="8A8A8A"/>
+                </a:solidFill>
+                <a:latin typeface="Helvetica" pitchFamily="34" charset="0"/>
+                <a:ea typeface="Helvetica" pitchFamily="34" charset="-122"/>
+                <a:cs typeface="Helvetica" pitchFamily="34" charset="-120"/>
+              </a:rPr>
+              <a:t>CONTACT</a:t>
+            </a:r>
+            <a:endParaRPr lang="en-US" sz="1100" dirty="0"/>
+          </a:p>
+        </p:txBody>
+      </p:sp>
+      <p:sp>
+        <p:nvSpPr>
+          <p:cNvPr id="8" name="Text 6"/>
+          <p:cNvSpPr/>
+          <p:nvPr/>
+        </p:nvSpPr>
+        <p:spPr>
+          <a:xfrm>
+            <a:off x="0" y="5440680"/>
+            <a:ext cx="12191695" cy="548640"/>
           </a:xfrm>
           <a:prstGeom prst="rect">
             <a:avLst/>
@@ -5515,7 +6480,7 @@
                 <a:ea typeface="Georgia" pitchFamily="34" charset="-122"/>
                 <a:cs typeface="Georgia" pitchFamily="34" charset="-120"/>
               </a:rPr>
-              <a:t>aral3d.com</a:t>
+              <a:t>timnosov@gmail.com</a:t>
             </a:r>
             <a:endParaRPr lang="en-US" sz="2800" dirty="0"/>
           </a:p>
@@ -5586,7 +6551,7 @@
                 <a:ea typeface="Helvetica" pitchFamily="34" charset="-122"/>
                 <a:cs typeface="Helvetica" pitchFamily="34" charset="-120"/>
               </a:rPr>
-              <a:t>LEVEL 1</a:t>
+              <a:t>CHAPTER 1</a:t>
             </a:r>
             <a:endParaRPr lang="en-US" sz="1100" dirty="0"/>
           </a:p>
@@ -5625,7 +6590,7 @@
                 <a:ea typeface="Helvetica" pitchFamily="34" charset="-122"/>
                 <a:cs typeface="Helvetica" pitchFamily="34" charset="-120"/>
               </a:rPr>
-              <a:t>THE STARTING QUESTION</a:t>
+              <a:t>WHAT IT IS</a:t>
             </a:r>
             <a:endParaRPr lang="en-US" sz="1600" dirty="0"/>
           </a:p>
@@ -5662,7 +6627,7 @@
         </p:nvSpPr>
         <p:spPr>
           <a:xfrm>
-            <a:off x="274320" y="2377440"/>
+            <a:off x="274320" y="1645920"/>
             <a:ext cx="11643055" cy="1463040"/>
           </a:xfrm>
           <a:prstGeom prst="rect">
@@ -5679,7 +6644,7 @@
               <a:buNone/>
             </a:pPr>
             <a:r>
-              <a:rPr lang="en-US" sz="10000" b="1" i="1" dirty="0">
+              <a:rPr lang="en-US" sz="7000" b="1" i="1" dirty="0">
                 <a:solidFill>
                   <a:srgbClr val="E84C2C"/>
                 </a:solidFill>
@@ -5687,13 +6652,13 @@
                 <a:ea typeface="Georgia" pitchFamily="34" charset="-122"/>
                 <a:cs typeface="Georgia" pitchFamily="34" charset="-120"/>
               </a:rPr>
-              <a:t>what</a:t>
-            </a:r>
-            <a:pPr algn="ctr" indent="0" marL="0">
-              <a:buNone/>
-            </a:pPr>
-            <a:r>
-              <a:rPr lang="en-US" sz="10000" b="1" i="1" dirty="0">
+              <a:t>one</a:t>
+            </a:r>
+            <a:pPr algn="ctr" indent="0" marL="0">
+              <a:buNone/>
+            </a:pPr>
+            <a:r>
+              <a:rPr lang="en-US" sz="7000" b="1" i="1" dirty="0">
                 <a:solidFill>
                   <a:srgbClr val="1FAE52"/>
                 </a:solidFill>
@@ -5701,13 +6666,13 @@
                 <a:ea typeface="Georgia" pitchFamily="34" charset="-122"/>
                 <a:cs typeface="Georgia" pitchFamily="34" charset="-120"/>
               </a:rPr>
-              <a:t> is</a:t>
-            </a:r>
-            <a:pPr algn="ctr" indent="0" marL="0">
-              <a:buNone/>
-            </a:pPr>
-            <a:r>
-              <a:rPr lang="en-US" sz="10000" b="1" i="1" dirty="0">
+              <a:t> browser,</a:t>
+            </a:r>
+            <a:pPr algn="ctr" indent="0" marL="0">
+              <a:buNone/>
+            </a:pPr>
+            <a:r>
+              <a:rPr lang="en-US" sz="7000" b="1" i="1" dirty="0">
                 <a:solidFill>
                   <a:srgbClr val="1A1FE0"/>
                 </a:solidFill>
@@ -5715,9 +6680,23 @@
                 <a:ea typeface="Georgia" pitchFamily="34" charset="-122"/>
                 <a:cs typeface="Georgia" pitchFamily="34" charset="-120"/>
               </a:rPr>
-              <a:t> water?</a:t>
-            </a:r>
-            <a:endParaRPr lang="en-US" sz="10000" dirty="0"/>
+              <a:t> one</a:t>
+            </a:r>
+            <a:pPr algn="ctr" indent="0" marL="0">
+              <a:buNone/>
+            </a:pPr>
+            <a:r>
+              <a:rPr lang="en-US" sz="7000" b="1" i="1" dirty="0">
+                <a:solidFill>
+                  <a:srgbClr val="EC4899"/>
+                </a:solidFill>
+                <a:latin typeface="Georgia" pitchFamily="34" charset="0"/>
+                <a:ea typeface="Georgia" pitchFamily="34" charset="-122"/>
+                <a:cs typeface="Georgia" pitchFamily="34" charset="-120"/>
+              </a:rPr>
+              <a:t> basin</a:t>
+            </a:r>
+            <a:endParaRPr lang="en-US" sz="7000" dirty="0"/>
           </a:p>
         </p:txBody>
       </p:sp>
@@ -5729,146 +6708,73 @@
         </p:nvSpPr>
         <p:spPr>
           <a:xfrm>
-            <a:off x="274320" y="4937760"/>
-            <a:ext cx="11643055" cy="640080"/>
-          </a:xfrm>
-          <a:prstGeom prst="rect">
-            <a:avLst/>
-          </a:prstGeom>
-          <a:noFill/>
-          <a:ln/>
-        </p:spPr>
-        <p:txBody>
-          <a:bodyPr wrap="square" rtlCol="0" anchor="ctr"/>
-          <a:lstStyle/>
-          <a:p>
-            <a:pPr algn="ctr" indent="0" marL="0">
-              <a:buNone/>
-            </a:pPr>
-            <a:r>
-              <a:rPr lang="en-US" sz="2800" i="1" dirty="0">
-                <a:solidFill>
-                  <a:srgbClr val="1A1FE0"/>
-                </a:solidFill>
-                <a:latin typeface="Georgia" pitchFamily="34" charset="0"/>
-                <a:ea typeface="Georgia" pitchFamily="34" charset="-122"/>
-                <a:cs typeface="Georgia" pitchFamily="34" charset="-120"/>
-              </a:rPr>
-              <a:t>how</a:t>
-            </a:r>
-            <a:pPr algn="ctr" indent="0" marL="0">
-              <a:buNone/>
-            </a:pPr>
-            <a:r>
-              <a:rPr lang="en-US" sz="2800" i="1" dirty="0">
-                <a:solidFill>
-                  <a:srgbClr val="EC4899"/>
-                </a:solidFill>
-                <a:latin typeface="Georgia" pitchFamily="34" charset="0"/>
-                <a:ea typeface="Georgia" pitchFamily="34" charset="-122"/>
-                <a:cs typeface="Georgia" pitchFamily="34" charset="-120"/>
-              </a:rPr>
-              <a:t> we</a:t>
-            </a:r>
-            <a:pPr algn="ctr" indent="0" marL="0">
-              <a:buNone/>
-            </a:pPr>
-            <a:r>
-              <a:rPr lang="en-US" sz="2800" i="1" dirty="0">
-                <a:solidFill>
-                  <a:srgbClr val="F59E0B"/>
-                </a:solidFill>
-                <a:latin typeface="Georgia" pitchFamily="34" charset="0"/>
-                <a:ea typeface="Georgia" pitchFamily="34" charset="-122"/>
-                <a:cs typeface="Georgia" pitchFamily="34" charset="-120"/>
-              </a:rPr>
-              <a:t> picture</a:t>
-            </a:r>
-            <a:pPr algn="ctr" indent="0" marL="0">
-              <a:buNone/>
-            </a:pPr>
-            <a:r>
-              <a:rPr lang="en-US" sz="2800" i="1" dirty="0">
-                <a:solidFill>
-                  <a:srgbClr val="22D3EE"/>
-                </a:solidFill>
-                <a:latin typeface="Georgia" pitchFamily="34" charset="0"/>
-                <a:ea typeface="Georgia" pitchFamily="34" charset="-122"/>
-                <a:cs typeface="Georgia" pitchFamily="34" charset="-120"/>
-              </a:rPr>
-              <a:t> water</a:t>
-            </a:r>
-            <a:pPr algn="ctr" indent="0" marL="0">
-              <a:buNone/>
-            </a:pPr>
-            <a:r>
-              <a:rPr lang="en-US" sz="2800" i="1" dirty="0">
-                <a:solidFill>
-                  <a:srgbClr val="E84C2C"/>
-                </a:solidFill>
-                <a:latin typeface="Georgia" pitchFamily="34" charset="0"/>
-                <a:ea typeface="Georgia" pitchFamily="34" charset="-122"/>
-                <a:cs typeface="Georgia" pitchFamily="34" charset="-120"/>
-              </a:rPr>
-              <a:t> shapes</a:t>
-            </a:r>
-            <a:pPr algn="ctr" indent="0" marL="0">
-              <a:buNone/>
-            </a:pPr>
-            <a:r>
-              <a:rPr lang="en-US" sz="2800" i="1" dirty="0">
-                <a:solidFill>
-                  <a:srgbClr val="1FAE52"/>
-                </a:solidFill>
-                <a:latin typeface="Georgia" pitchFamily="34" charset="0"/>
-                <a:ea typeface="Georgia" pitchFamily="34" charset="-122"/>
-                <a:cs typeface="Georgia" pitchFamily="34" charset="-120"/>
-              </a:rPr>
-              <a:t> how</a:t>
-            </a:r>
-            <a:pPr algn="ctr" indent="0" marL="0">
-              <a:buNone/>
-            </a:pPr>
-            <a:r>
-              <a:rPr lang="en-US" sz="2800" i="1" dirty="0">
-                <a:solidFill>
-                  <a:srgbClr val="1A1FE0"/>
-                </a:solidFill>
-                <a:latin typeface="Georgia" pitchFamily="34" charset="0"/>
-                <a:ea typeface="Georgia" pitchFamily="34" charset="-122"/>
-                <a:cs typeface="Georgia" pitchFamily="34" charset="-120"/>
-              </a:rPr>
-              <a:t> we</a:t>
-            </a:r>
-            <a:pPr algn="ctr" indent="0" marL="0">
-              <a:buNone/>
-            </a:pPr>
-            <a:r>
-              <a:rPr lang="en-US" sz="2800" i="1" dirty="0">
-                <a:solidFill>
-                  <a:srgbClr val="EC4899"/>
-                </a:solidFill>
-                <a:latin typeface="Georgia" pitchFamily="34" charset="0"/>
-                <a:ea typeface="Georgia" pitchFamily="34" charset="-122"/>
-                <a:cs typeface="Georgia" pitchFamily="34" charset="-120"/>
-              </a:rPr>
-              <a:t> use</a:t>
-            </a:r>
-            <a:pPr algn="ctr" indent="0" marL="0">
-              <a:buNone/>
-            </a:pPr>
-            <a:r>
-              <a:rPr lang="en-US" sz="2800" i="1" dirty="0">
-                <a:solidFill>
-                  <a:srgbClr val="F59E0B"/>
-                </a:solidFill>
-                <a:latin typeface="Georgia" pitchFamily="34" charset="0"/>
-                <a:ea typeface="Georgia" pitchFamily="34" charset="-122"/>
-                <a:cs typeface="Georgia" pitchFamily="34" charset="-120"/>
-              </a:rPr>
-              <a:t> it</a:t>
-            </a:r>
-            <a:endParaRPr lang="en-US" sz="2800" dirty="0"/>
+            <a:off x="1280160" y="3840480"/>
+            <a:ext cx="9631375" cy="822960"/>
+          </a:xfrm>
+          <a:prstGeom prst="rect">
+            <a:avLst/>
+          </a:prstGeom>
+          <a:noFill/>
+          <a:ln/>
+        </p:spPr>
+        <p:txBody>
+          <a:bodyPr wrap="square" rtlCol="0" anchor="ctr"/>
+          <a:lstStyle/>
+          <a:p>
+            <a:pPr algn="ctr" indent="0" marL="0">
+              <a:buNone/>
+            </a:pPr>
+            <a:r>
+              <a:rPr lang="en-US" sz="1500" dirty="0">
+                <a:solidFill>
+                  <a:srgbClr val="2B2B2B"/>
+                </a:solidFill>
+                <a:latin typeface="Helvetica" pitchFamily="34" charset="0"/>
+                <a:ea typeface="Helvetica" pitchFamily="34" charset="-122"/>
+                <a:cs typeface="Helvetica" pitchFamily="34" charset="-120"/>
+              </a:rPr>
+              <a:t>Aral3D is a browser-based 3D platform about the Aral Sea region.</a:t>
+            </a:r>
+            <a:endParaRPr lang="en-US" sz="1500" dirty="0"/>
+          </a:p>
+        </p:txBody>
+      </p:sp>
+      <p:sp>
+        <p:nvSpPr>
+          <p:cNvPr id="7" name="Text 5"/>
+          <p:cNvSpPr/>
+          <p:nvPr/>
+        </p:nvSpPr>
+        <p:spPr>
+          <a:xfrm>
+            <a:off x="1280160" y="4754880"/>
+            <a:ext cx="9631375" cy="822960"/>
+          </a:xfrm>
+          <a:prstGeom prst="rect">
+            <a:avLst/>
+          </a:prstGeom>
+          <a:noFill/>
+          <a:ln/>
+        </p:spPr>
+        <p:txBody>
+          <a:bodyPr wrap="square" rtlCol="0" anchor="ctr"/>
+          <a:lstStyle/>
+          <a:p>
+            <a:pPr algn="ctr" indent="0" marL="0">
+              <a:buNone/>
+            </a:pPr>
+            <a:r>
+              <a:rPr lang="en-US" sz="1500" dirty="0">
+                <a:solidFill>
+                  <a:srgbClr val="2B2B2B"/>
+                </a:solidFill>
+                <a:latin typeface="Helvetica" pitchFamily="34" charset="0"/>
+                <a:ea typeface="Helvetica" pitchFamily="34" charset="-122"/>
+                <a:cs typeface="Helvetica" pitchFamily="34" charset="-120"/>
+              </a:rPr>
+              <a:t>It combines maps, terrain, stories, environmental data, and interactive scenarios into one public learning tool — for schools, museums, festivals, and cultural institutions.</a:t>
+            </a:r>
+            <a:endParaRPr lang="en-US" sz="1500" dirty="0"/>
           </a:p>
         </p:txBody>
       </p:sp>
@@ -5937,7 +6843,7 @@
                 <a:ea typeface="Helvetica" pitchFamily="34" charset="-122"/>
                 <a:cs typeface="Helvetica" pitchFamily="34" charset="-120"/>
               </a:rPr>
-              <a:t>LEVEL 2</a:t>
+              <a:t>CHAPTER 2</a:t>
             </a:r>
             <a:endParaRPr lang="en-US" sz="1100" dirty="0"/>
           </a:p>
@@ -5976,7 +6882,7 @@
                 <a:ea typeface="Helvetica" pitchFamily="34" charset="-122"/>
                 <a:cs typeface="Helvetica" pitchFamily="34" charset="-120"/>
               </a:rPr>
-              <a:t>THE PLATFORM</a:t>
+              <a:t>WHY THE ARAL SEA</a:t>
             </a:r>
             <a:endParaRPr lang="en-US" sz="1600" dirty="0"/>
           </a:p>
@@ -6013,7 +6919,7 @@
         </p:nvSpPr>
         <p:spPr>
           <a:xfrm>
-            <a:off x="274320" y="2377440"/>
+            <a:off x="274320" y="1645920"/>
             <a:ext cx="11643055" cy="1463040"/>
           </a:xfrm>
           <a:prstGeom prst="rect">
@@ -6030,7 +6936,7 @@
               <a:buNone/>
             </a:pPr>
             <a:r>
-              <a:rPr lang="en-US" sz="10000" b="1" i="1" dirty="0">
+              <a:rPr lang="en-US" sz="7000" b="1" i="1" dirty="0">
                 <a:solidFill>
                   <a:srgbClr val="E84C2C"/>
                 </a:solidFill>
@@ -6038,13 +6944,13 @@
                 <a:ea typeface="Georgia" pitchFamily="34" charset="-122"/>
                 <a:cs typeface="Georgia" pitchFamily="34" charset="-120"/>
               </a:rPr>
-              <a:t>two</a:t>
-            </a:r>
-            <a:pPr algn="ctr" indent="0" marL="0">
-              <a:buNone/>
-            </a:pPr>
-            <a:r>
-              <a:rPr lang="en-US" sz="10000" b="1" i="1" dirty="0">
+              <a:t>more</a:t>
+            </a:r>
+            <a:pPr algn="ctr" indent="0" marL="0">
+              <a:buNone/>
+            </a:pPr>
+            <a:r>
+              <a:rPr lang="en-US" sz="7000" b="1" i="1" dirty="0">
                 <a:solidFill>
                   <a:srgbClr val="1FAE52"/>
                 </a:solidFill>
@@ -6052,13 +6958,13 @@
                 <a:ea typeface="Georgia" pitchFamily="34" charset="-122"/>
                 <a:cs typeface="Georgia" pitchFamily="34" charset="-120"/>
               </a:rPr>
-              <a:t> modes,</a:t>
-            </a:r>
-            <a:pPr algn="ctr" indent="0" marL="0">
-              <a:buNone/>
-            </a:pPr>
-            <a:r>
-              <a:rPr lang="en-US" sz="10000" b="1" i="1" dirty="0">
+              <a:t> than</a:t>
+            </a:r>
+            <a:pPr algn="ctr" indent="0" marL="0">
+              <a:buNone/>
+            </a:pPr>
+            <a:r>
+              <a:rPr lang="en-US" sz="7000" b="1" i="1" dirty="0">
                 <a:solidFill>
                   <a:srgbClr val="1A1FE0"/>
                 </a:solidFill>
@@ -6066,13 +6972,13 @@
                 <a:ea typeface="Georgia" pitchFamily="34" charset="-122"/>
                 <a:cs typeface="Georgia" pitchFamily="34" charset="-120"/>
               </a:rPr>
-              <a:t> one</a:t>
-            </a:r>
-            <a:pPr algn="ctr" indent="0" marL="0">
-              <a:buNone/>
-            </a:pPr>
-            <a:r>
-              <a:rPr lang="en-US" sz="10000" b="1" i="1" dirty="0">
+              <a:t> a</a:t>
+            </a:r>
+            <a:pPr algn="ctr" indent="0" marL="0">
+              <a:buNone/>
+            </a:pPr>
+            <a:r>
+              <a:rPr lang="en-US" sz="7000" b="1" i="1" dirty="0">
                 <a:solidFill>
                   <a:srgbClr val="EC4899"/>
                 </a:solidFill>
@@ -6080,9 +6986,23 @@
                 <a:ea typeface="Georgia" pitchFamily="34" charset="-122"/>
                 <a:cs typeface="Georgia" pitchFamily="34" charset="-120"/>
               </a:rPr>
-              <a:t> basin</a:t>
-            </a:r>
-            <a:endParaRPr lang="en-US" sz="10000" dirty="0"/>
+              <a:t> disappearing</a:t>
+            </a:r>
+            <a:pPr algn="ctr" indent="0" marL="0">
+              <a:buNone/>
+            </a:pPr>
+            <a:r>
+              <a:rPr lang="en-US" sz="7000" b="1" i="1" dirty="0">
+                <a:solidFill>
+                  <a:srgbClr val="F59E0B"/>
+                </a:solidFill>
+                <a:latin typeface="Georgia" pitchFamily="34" charset="0"/>
+                <a:ea typeface="Georgia" pitchFamily="34" charset="-122"/>
+                <a:cs typeface="Georgia" pitchFamily="34" charset="-120"/>
+              </a:rPr>
+              <a:t> sea</a:t>
+            </a:r>
+            <a:endParaRPr lang="en-US" sz="7000" dirty="0"/>
           </a:p>
         </p:txBody>
       </p:sp>
@@ -6094,146 +7014,73 @@
         </p:nvSpPr>
         <p:spPr>
           <a:xfrm>
-            <a:off x="274320" y="4937760"/>
-            <a:ext cx="11643055" cy="640080"/>
-          </a:xfrm>
-          <a:prstGeom prst="rect">
-            <a:avLst/>
-          </a:prstGeom>
-          <a:noFill/>
-          <a:ln/>
-        </p:spPr>
-        <p:txBody>
-          <a:bodyPr wrap="square" rtlCol="0" anchor="ctr"/>
-          <a:lstStyle/>
-          <a:p>
-            <a:pPr algn="ctr" indent="0" marL="0">
-              <a:buNone/>
-            </a:pPr>
-            <a:r>
-              <a:rPr lang="en-US" sz="2800" i="1" dirty="0">
-                <a:solidFill>
-                  <a:srgbClr val="1A1FE0"/>
-                </a:solidFill>
-                <a:latin typeface="Georgia" pitchFamily="34" charset="0"/>
-                <a:ea typeface="Georgia" pitchFamily="34" charset="-122"/>
-                <a:cs typeface="Georgia" pitchFamily="34" charset="-120"/>
-              </a:rPr>
-              <a:t>a</a:t>
-            </a:r>
-            <a:pPr algn="ctr" indent="0" marL="0">
-              <a:buNone/>
-            </a:pPr>
-            <a:r>
-              <a:rPr lang="en-US" sz="2800" i="1" dirty="0">
-                <a:solidFill>
-                  <a:srgbClr val="EC4899"/>
-                </a:solidFill>
-                <a:latin typeface="Georgia" pitchFamily="34" charset="0"/>
-                <a:ea typeface="Georgia" pitchFamily="34" charset="-122"/>
-                <a:cs typeface="Georgia" pitchFamily="34" charset="-120"/>
-              </a:rPr>
-              <a:t> game</a:t>
-            </a:r>
-            <a:pPr algn="ctr" indent="0" marL="0">
-              <a:buNone/>
-            </a:pPr>
-            <a:r>
-              <a:rPr lang="en-US" sz="2800" i="1" dirty="0">
-                <a:solidFill>
-                  <a:srgbClr val="F59E0B"/>
-                </a:solidFill>
-                <a:latin typeface="Georgia" pitchFamily="34" charset="0"/>
-                <a:ea typeface="Georgia" pitchFamily="34" charset="-122"/>
-                <a:cs typeface="Georgia" pitchFamily="34" charset="-120"/>
-              </a:rPr>
-              <a:t> to</a:t>
-            </a:r>
-            <a:pPr algn="ctr" indent="0" marL="0">
-              <a:buNone/>
-            </a:pPr>
-            <a:r>
-              <a:rPr lang="en-US" sz="2800" i="1" dirty="0">
-                <a:solidFill>
-                  <a:srgbClr val="22D3EE"/>
-                </a:solidFill>
-                <a:latin typeface="Georgia" pitchFamily="34" charset="0"/>
-                <a:ea typeface="Georgia" pitchFamily="34" charset="-122"/>
-                <a:cs typeface="Georgia" pitchFamily="34" charset="-120"/>
-              </a:rPr>
-              <a:t> play</a:t>
-            </a:r>
-            <a:pPr algn="ctr" indent="0" marL="0">
-              <a:buNone/>
-            </a:pPr>
-            <a:r>
-              <a:rPr lang="en-US" sz="2800" i="1" dirty="0">
-                <a:solidFill>
-                  <a:srgbClr val="E84C2C"/>
-                </a:solidFill>
-                <a:latin typeface="Georgia" pitchFamily="34" charset="0"/>
-                <a:ea typeface="Georgia" pitchFamily="34" charset="-122"/>
-                <a:cs typeface="Georgia" pitchFamily="34" charset="-120"/>
-              </a:rPr>
-              <a:t> —</a:t>
-            </a:r>
-            <a:pPr algn="ctr" indent="0" marL="0">
-              <a:buNone/>
-            </a:pPr>
-            <a:r>
-              <a:rPr lang="en-US" sz="2800" i="1" dirty="0">
-                <a:solidFill>
-                  <a:srgbClr val="1FAE52"/>
-                </a:solidFill>
-                <a:latin typeface="Georgia" pitchFamily="34" charset="0"/>
-                <a:ea typeface="Georgia" pitchFamily="34" charset="-122"/>
-                <a:cs typeface="Georgia" pitchFamily="34" charset="-120"/>
-              </a:rPr>
-              <a:t> an</a:t>
-            </a:r>
-            <a:pPr algn="ctr" indent="0" marL="0">
-              <a:buNone/>
-            </a:pPr>
-            <a:r>
-              <a:rPr lang="en-US" sz="2800" i="1" dirty="0">
-                <a:solidFill>
-                  <a:srgbClr val="1A1FE0"/>
-                </a:solidFill>
-                <a:latin typeface="Georgia" pitchFamily="34" charset="0"/>
-                <a:ea typeface="Georgia" pitchFamily="34" charset="-122"/>
-                <a:cs typeface="Georgia" pitchFamily="34" charset="-120"/>
-              </a:rPr>
-              <a:t> explorer</a:t>
-            </a:r>
-            <a:pPr algn="ctr" indent="0" marL="0">
-              <a:buNone/>
-            </a:pPr>
-            <a:r>
-              <a:rPr lang="en-US" sz="2800" i="1" dirty="0">
-                <a:solidFill>
-                  <a:srgbClr val="EC4899"/>
-                </a:solidFill>
-                <a:latin typeface="Georgia" pitchFamily="34" charset="0"/>
-                <a:ea typeface="Georgia" pitchFamily="34" charset="-122"/>
-                <a:cs typeface="Georgia" pitchFamily="34" charset="-120"/>
-              </a:rPr>
-              <a:t> to</a:t>
-            </a:r>
-            <a:pPr algn="ctr" indent="0" marL="0">
-              <a:buNone/>
-            </a:pPr>
-            <a:r>
-              <a:rPr lang="en-US" sz="2800" i="1" dirty="0">
-                <a:solidFill>
-                  <a:srgbClr val="F59E0B"/>
-                </a:solidFill>
-                <a:latin typeface="Georgia" pitchFamily="34" charset="0"/>
-                <a:ea typeface="Georgia" pitchFamily="34" charset="-122"/>
-                <a:cs typeface="Georgia" pitchFamily="34" charset="-120"/>
-              </a:rPr>
-              <a:t> read</a:t>
-            </a:r>
-            <a:endParaRPr lang="en-US" sz="2800" dirty="0"/>
+            <a:off x="1280160" y="3840480"/>
+            <a:ext cx="9631375" cy="822960"/>
+          </a:xfrm>
+          <a:prstGeom prst="rect">
+            <a:avLst/>
+          </a:prstGeom>
+          <a:noFill/>
+          <a:ln/>
+        </p:spPr>
+        <p:txBody>
+          <a:bodyPr wrap="square" rtlCol="0" anchor="ctr"/>
+          <a:lstStyle/>
+          <a:p>
+            <a:pPr algn="ctr" indent="0" marL="0">
+              <a:buNone/>
+            </a:pPr>
+            <a:r>
+              <a:rPr lang="en-US" sz="1500" dirty="0">
+                <a:solidFill>
+                  <a:srgbClr val="2B2B2B"/>
+                </a:solidFill>
+                <a:latin typeface="Helvetica" pitchFamily="34" charset="0"/>
+                <a:ea typeface="Helvetica" pitchFamily="34" charset="-122"/>
+                <a:cs typeface="Helvetica" pitchFamily="34" charset="-120"/>
+              </a:rPr>
+              <a:t>The Aral Sea is one of the most important environmental stories of the region.</a:t>
+            </a:r>
+            <a:endParaRPr lang="en-US" sz="1500" dirty="0"/>
+          </a:p>
+        </p:txBody>
+      </p:sp>
+      <p:sp>
+        <p:nvSpPr>
+          <p:cNvPr id="7" name="Text 5"/>
+          <p:cNvSpPr/>
+          <p:nvPr/>
+        </p:nvSpPr>
+        <p:spPr>
+          <a:xfrm>
+            <a:off x="1280160" y="4754880"/>
+            <a:ext cx="9631375" cy="822960"/>
+          </a:xfrm>
+          <a:prstGeom prst="rect">
+            <a:avLst/>
+          </a:prstGeom>
+          <a:noFill/>
+          <a:ln/>
+        </p:spPr>
+        <p:txBody>
+          <a:bodyPr wrap="square" rtlCol="0" anchor="ctr"/>
+          <a:lstStyle/>
+          <a:p>
+            <a:pPr algn="ctr" indent="0" marL="0">
+              <a:buNone/>
+            </a:pPr>
+            <a:r>
+              <a:rPr lang="en-US" sz="1500" dirty="0">
+                <a:solidFill>
+                  <a:srgbClr val="2B2B2B"/>
+                </a:solidFill>
+                <a:latin typeface="Helvetica" pitchFamily="34" charset="0"/>
+                <a:ea typeface="Helvetica" pitchFamily="34" charset="-122"/>
+                <a:cs typeface="Helvetica" pitchFamily="34" charset="-120"/>
+              </a:rPr>
+              <a:t>But it is not only about a vanishing sea — it is about water, health, infrastructure, agriculture, memory, climate, borders, and future choices. Aral3D helps people see these layers together.</a:t>
+            </a:r>
+            <a:endParaRPr lang="en-US" sz="1500" dirty="0"/>
           </a:p>
         </p:txBody>
       </p:sp>
@@ -6302,7 +7149,7 @@
                 <a:ea typeface="Helvetica" pitchFamily="34" charset="-122"/>
                 <a:cs typeface="Helvetica" pitchFamily="34" charset="-120"/>
               </a:rPr>
-              <a:t>LEVEL 3</a:t>
+              <a:t>CHAPTER 3</a:t>
             </a:r>
             <a:endParaRPr lang="en-US" sz="1100" dirty="0"/>
           </a:p>
@@ -6341,7 +7188,7 @@
                 <a:ea typeface="Helvetica" pitchFamily="34" charset="-122"/>
                 <a:cs typeface="Helvetica" pitchFamily="34" charset="-120"/>
               </a:rPr>
-              <a:t>GAME MODE</a:t>
+              <a:t>THE PROBLEM</a:t>
             </a:r>
             <a:endParaRPr lang="en-US" sz="1600" dirty="0"/>
           </a:p>
@@ -6370,67 +7217,15 @@
           </a:ln>
         </p:spPr>
       </p:sp>
-      <p:pic>
-        <p:nvPicPr>
-          <p:cNvPr id="5" name="Image 0" descr="docs/screenshots/04-game-mission1.png">    </p:cNvPr>
-          <p:cNvPicPr>
-            <a:picLocks noChangeAspect="1"/>
-          </p:cNvPicPr>
-          <p:nvPr/>
-        </p:nvPicPr>
-        <p:blipFill>
-          <a:blip r:embed="rId1"/>
-          <a:srcRect l="0" r="0" t="0" b="0"/>
-          <a:stretch/>
-        </p:blipFill>
-        <p:spPr>
-          <a:xfrm>
-            <a:off x="914400" y="1828800"/>
-            <a:ext cx="10362895" cy="3840480"/>
-          </a:xfrm>
-          <a:prstGeom prst="rect">
-            <a:avLst/>
-          </a:prstGeom>
-        </p:spPr>
-      </p:pic>
-      <p:sp>
-        <p:nvSpPr>
-          <p:cNvPr id="6" name="Shape 3"/>
-          <p:cNvSpPr/>
-          <p:nvPr/>
-        </p:nvSpPr>
-        <p:spPr>
-          <a:xfrm>
-            <a:off x="0" y="1828800"/>
-            <a:ext cx="12191695" cy="3840480"/>
-          </a:xfrm>
-          <a:prstGeom prst="rect">
-            <a:avLst/>
-          </a:prstGeom>
-          <a:solidFill>
-            <a:srgbClr val="F5F0E8">
-              <a:alpha val="45000"/>
-            </a:srgbClr>
-          </a:solidFill>
-          <a:ln w="12700">
-            <a:solidFill>
-              <a:srgbClr val="F5F0E8">
-                <a:alpha val="0"/>
-              </a:srgbClr>
-            </a:solidFill>
-            <a:prstDash val="solid"/>
-          </a:ln>
-        </p:spPr>
-      </p:sp>
-      <p:sp>
-        <p:nvSpPr>
-          <p:cNvPr id="7" name="Text 4"/>
-          <p:cNvSpPr/>
-          <p:nvPr/>
-        </p:nvSpPr>
-        <p:spPr>
-          <a:xfrm>
-            <a:off x="274320" y="2377440"/>
+      <p:sp>
+        <p:nvSpPr>
+          <p:cNvPr id="5" name="Text 3"/>
+          <p:cNvSpPr/>
+          <p:nvPr/>
+        </p:nvSpPr>
+        <p:spPr>
+          <a:xfrm>
+            <a:off x="274320" y="1645920"/>
             <a:ext cx="11643055" cy="1463040"/>
           </a:xfrm>
           <a:prstGeom prst="rect">
@@ -6447,7 +7242,7 @@
               <a:buNone/>
             </a:pPr>
             <a:r>
-              <a:rPr lang="en-US" sz="10000" b="1" i="1" dirty="0">
+              <a:rPr lang="en-US" sz="7000" b="1" i="1" dirty="0">
                 <a:solidFill>
                   <a:srgbClr val="E84C2C"/>
                 </a:solidFill>
@@ -6455,13 +7250,13 @@
                 <a:ea typeface="Georgia" pitchFamily="34" charset="-122"/>
                 <a:cs typeface="Georgia" pitchFamily="34" charset="-120"/>
               </a:rPr>
-              <a:t>play</a:t>
-            </a:r>
-            <a:pPr algn="ctr" indent="0" marL="0">
-              <a:buNone/>
-            </a:pPr>
-            <a:r>
-              <a:rPr lang="en-US" sz="10000" b="1" i="1" dirty="0">
+              <a:t>flat</a:t>
+            </a:r>
+            <a:pPr algn="ctr" indent="0" marL="0">
+              <a:buNone/>
+            </a:pPr>
+            <a:r>
+              <a:rPr lang="en-US" sz="7000" b="1" i="1" dirty="0">
                 <a:solidFill>
                   <a:srgbClr val="1FAE52"/>
                 </a:solidFill>
@@ -6469,13 +7264,13 @@
                 <a:ea typeface="Georgia" pitchFamily="34" charset="-122"/>
                 <a:cs typeface="Georgia" pitchFamily="34" charset="-120"/>
               </a:rPr>
-              <a:t> the</a:t>
-            </a:r>
-            <a:pPr algn="ctr" indent="0" marL="0">
-              <a:buNone/>
-            </a:pPr>
-            <a:r>
-              <a:rPr lang="en-US" sz="10000" b="1" i="1" dirty="0">
+              <a:t> maps,</a:t>
+            </a:r>
+            <a:pPr algn="ctr" indent="0" marL="0">
+              <a:buNone/>
+            </a:pPr>
+            <a:r>
+              <a:rPr lang="en-US" sz="7000" b="1" i="1" dirty="0">
                 <a:solidFill>
                   <a:srgbClr val="1A1FE0"/>
                 </a:solidFill>
@@ -6483,52 +7278,13 @@
                 <a:ea typeface="Georgia" pitchFamily="34" charset="-122"/>
                 <a:cs typeface="Georgia" pitchFamily="34" charset="-120"/>
               </a:rPr>
-              <a:t> basin</a:t>
-            </a:r>
-            <a:endParaRPr lang="en-US" sz="10000" dirty="0"/>
-          </a:p>
-        </p:txBody>
-      </p:sp>
-      <p:sp>
-        <p:nvSpPr>
-          <p:cNvPr id="8" name="Text 5"/>
-          <p:cNvSpPr/>
-          <p:nvPr/>
-        </p:nvSpPr>
-        <p:spPr>
-          <a:xfrm>
-            <a:off x="274320" y="4937760"/>
-            <a:ext cx="11643055" cy="640080"/>
-          </a:xfrm>
-          <a:prstGeom prst="rect">
-            <a:avLst/>
-          </a:prstGeom>
-          <a:noFill/>
-          <a:ln/>
-        </p:spPr>
-        <p:txBody>
-          <a:bodyPr wrap="square" rtlCol="0" anchor="ctr"/>
-          <a:lstStyle/>
-          <a:p>
-            <a:pPr algn="ctr" indent="0" marL="0">
-              <a:buNone/>
-            </a:pPr>
-            <a:r>
-              <a:rPr lang="en-US" sz="2800" i="1" dirty="0">
-                <a:solidFill>
-                  <a:srgbClr val="1A1FE0"/>
-                </a:solidFill>
-                <a:latin typeface="Georgia" pitchFamily="34" charset="0"/>
-                <a:ea typeface="Georgia" pitchFamily="34" charset="-122"/>
-                <a:cs typeface="Georgia" pitchFamily="34" charset="-120"/>
-              </a:rPr>
-              <a:t>short</a:t>
-            </a:r>
-            <a:pPr algn="ctr" indent="0" marL="0">
-              <a:buNone/>
-            </a:pPr>
-            <a:r>
-              <a:rPr lang="en-US" sz="2800" i="1" dirty="0">
+              <a:t> distant</a:t>
+            </a:r>
+            <a:pPr algn="ctr" indent="0" marL="0">
+              <a:buNone/>
+            </a:pPr>
+            <a:r>
+              <a:rPr lang="en-US" sz="7000" b="1" i="1" dirty="0">
                 <a:solidFill>
                   <a:srgbClr val="EC4899"/>
                 </a:solidFill>
@@ -6536,93 +7292,87 @@
                 <a:ea typeface="Georgia" pitchFamily="34" charset="-122"/>
                 <a:cs typeface="Georgia" pitchFamily="34" charset="-120"/>
               </a:rPr>
-              <a:t> missions</a:t>
-            </a:r>
-            <a:pPr algn="ctr" indent="0" marL="0">
-              <a:buNone/>
-            </a:pPr>
-            <a:r>
-              <a:rPr lang="en-US" sz="2800" i="1" dirty="0">
-                <a:solidFill>
-                  <a:srgbClr val="F59E0B"/>
-                </a:solidFill>
-                <a:latin typeface="Georgia" pitchFamily="34" charset="0"/>
-                <a:ea typeface="Georgia" pitchFamily="34" charset="-122"/>
-                <a:cs typeface="Georgia" pitchFamily="34" charset="-120"/>
-              </a:rPr>
-              <a:t> for</a:t>
-            </a:r>
-            <a:pPr algn="ctr" indent="0" marL="0">
-              <a:buNone/>
-            </a:pPr>
-            <a:r>
-              <a:rPr lang="en-US" sz="2800" i="1" dirty="0">
-                <a:solidFill>
-                  <a:srgbClr val="22D3EE"/>
-                </a:solidFill>
-                <a:latin typeface="Georgia" pitchFamily="34" charset="0"/>
-                <a:ea typeface="Georgia" pitchFamily="34" charset="-122"/>
-                <a:cs typeface="Georgia" pitchFamily="34" charset="-120"/>
-              </a:rPr>
-              <a:t> schools,</a:t>
-            </a:r>
-            <a:pPr algn="ctr" indent="0" marL="0">
-              <a:buNone/>
-            </a:pPr>
-            <a:r>
-              <a:rPr lang="en-US" sz="2800" i="1" dirty="0">
-                <a:solidFill>
-                  <a:srgbClr val="E84C2C"/>
-                </a:solidFill>
-                <a:latin typeface="Georgia" pitchFamily="34" charset="0"/>
-                <a:ea typeface="Georgia" pitchFamily="34" charset="-122"/>
-                <a:cs typeface="Georgia" pitchFamily="34" charset="-120"/>
-              </a:rPr>
-              <a:t> museums,</a:t>
-            </a:r>
-            <a:pPr algn="ctr" indent="0" marL="0">
-              <a:buNone/>
-            </a:pPr>
-            <a:r>
-              <a:rPr lang="en-US" sz="2800" i="1" dirty="0">
-                <a:solidFill>
-                  <a:srgbClr val="1FAE52"/>
-                </a:solidFill>
-                <a:latin typeface="Georgia" pitchFamily="34" charset="0"/>
-                <a:ea typeface="Georgia" pitchFamily="34" charset="-122"/>
-                <a:cs typeface="Georgia" pitchFamily="34" charset="-120"/>
-              </a:rPr>
-              <a:t> and</a:t>
-            </a:r>
-            <a:pPr algn="ctr" indent="0" marL="0">
-              <a:buNone/>
-            </a:pPr>
-            <a:r>
-              <a:rPr lang="en-US" sz="2800" i="1" dirty="0">
-                <a:solidFill>
-                  <a:srgbClr val="1A1FE0"/>
-                </a:solidFill>
-                <a:latin typeface="Georgia" pitchFamily="34" charset="0"/>
-                <a:ea typeface="Georgia" pitchFamily="34" charset="-122"/>
-                <a:cs typeface="Georgia" pitchFamily="34" charset="-120"/>
-              </a:rPr>
-              <a:t> the</a:t>
-            </a:r>
-            <a:pPr algn="ctr" indent="0" marL="0">
-              <a:buNone/>
-            </a:pPr>
-            <a:r>
-              <a:rPr lang="en-US" sz="2800" i="1" dirty="0">
-                <a:solidFill>
-                  <a:srgbClr val="EC4899"/>
-                </a:solidFill>
-                <a:latin typeface="Georgia" pitchFamily="34" charset="0"/>
-                <a:ea typeface="Georgia" pitchFamily="34" charset="-122"/>
-                <a:cs typeface="Georgia" pitchFamily="34" charset="-120"/>
-              </a:rPr>
-              <a:t> public</a:t>
-            </a:r>
-            <a:endParaRPr lang="en-US" sz="2800" dirty="0"/>
+              <a:t> stories</a:t>
+            </a:r>
+            <a:endParaRPr lang="en-US" sz="7000" dirty="0"/>
+          </a:p>
+        </p:txBody>
+      </p:sp>
+      <p:sp>
+        <p:nvSpPr>
+          <p:cNvPr id="6" name="Text 4"/>
+          <p:cNvSpPr/>
+          <p:nvPr/>
+        </p:nvSpPr>
+        <p:spPr>
+          <a:xfrm>
+            <a:off x="1280160" y="3840480"/>
+            <a:ext cx="9631375" cy="822960"/>
+          </a:xfrm>
+          <a:prstGeom prst="rect">
+            <a:avLst/>
+          </a:prstGeom>
+          <a:noFill/>
+          <a:ln/>
+        </p:spPr>
+        <p:txBody>
+          <a:bodyPr wrap="square" rtlCol="0" anchor="ctr"/>
+          <a:lstStyle/>
+          <a:p>
+            <a:pPr algn="ctr" indent="0" marL="0">
+              <a:buNone/>
+            </a:pPr>
+            <a:r>
+              <a:rPr lang="en-US" sz="1500" dirty="0">
+                <a:solidFill>
+                  <a:srgbClr val="2B2B2B"/>
+                </a:solidFill>
+                <a:latin typeface="Helvetica" pitchFamily="34" charset="0"/>
+                <a:ea typeface="Helvetica" pitchFamily="34" charset="-122"/>
+                <a:cs typeface="Helvetica" pitchFamily="34" charset="-120"/>
+              </a:rPr>
+              <a:t>Most people meet the Aral Sea through flat maps, old photographs, statistics, or disaster narratives — important, but distant.</a:t>
+            </a:r>
+            <a:endParaRPr lang="en-US" sz="1500" dirty="0"/>
+          </a:p>
+        </p:txBody>
+      </p:sp>
+      <p:sp>
+        <p:nvSpPr>
+          <p:cNvPr id="7" name="Text 5"/>
+          <p:cNvSpPr/>
+          <p:nvPr/>
+        </p:nvSpPr>
+        <p:spPr>
+          <a:xfrm>
+            <a:off x="1280160" y="4754880"/>
+            <a:ext cx="9631375" cy="822960"/>
+          </a:xfrm>
+          <a:prstGeom prst="rect">
+            <a:avLst/>
+          </a:prstGeom>
+          <a:noFill/>
+          <a:ln/>
+        </p:spPr>
+        <p:txBody>
+          <a:bodyPr wrap="square" rtlCol="0" anchor="ctr"/>
+          <a:lstStyle/>
+          <a:p>
+            <a:pPr algn="ctr" indent="0" marL="0">
+              <a:buNone/>
+            </a:pPr>
+            <a:r>
+              <a:rPr lang="en-US" sz="1500" dirty="0">
+                <a:solidFill>
+                  <a:srgbClr val="2B2B2B"/>
+                </a:solidFill>
+                <a:latin typeface="Helvetica" pitchFamily="34" charset="0"/>
+                <a:ea typeface="Helvetica" pitchFamily="34" charset="-122"/>
+                <a:cs typeface="Helvetica" pitchFamily="34" charset="-120"/>
+              </a:rPr>
+              <a:t>Aral3D makes the region spatial, interactive, and easier to understand. Instead of only reading about change, users can move through it, test scenarios, and ask questions.</a:t>
+            </a:r>
+            <a:endParaRPr lang="en-US" sz="1500" dirty="0"/>
           </a:p>
         </p:txBody>
       </p:sp>
@@ -6691,7 +7441,7 @@
                 <a:ea typeface="Helvetica" pitchFamily="34" charset="-122"/>
                 <a:cs typeface="Helvetica" pitchFamily="34" charset="-120"/>
               </a:rPr>
-              <a:t>LEVEL 4</a:t>
+              <a:t>CHAPTER 4</a:t>
             </a:r>
             <a:endParaRPr lang="en-US" sz="1100" dirty="0"/>
           </a:p>
@@ -6730,7 +7480,7 @@
                 <a:ea typeface="Helvetica" pitchFamily="34" charset="-122"/>
                 <a:cs typeface="Helvetica" pitchFamily="34" charset="-120"/>
               </a:rPr>
-              <a:t>BUILD AND SURVIVE</a:t>
+              <a:t>CORE PHILOSOPHY</a:t>
             </a:r>
             <a:endParaRPr lang="en-US" sz="1600" dirty="0"/>
           </a:p>
@@ -6759,67 +7509,15 @@
           </a:ln>
         </p:spPr>
       </p:sp>
-      <p:pic>
-        <p:nvPicPr>
-          <p:cNvPr id="5" name="Image 0" descr="docs/screenshots/03-voxel-survive.png">    </p:cNvPr>
-          <p:cNvPicPr>
-            <a:picLocks noChangeAspect="1"/>
-          </p:cNvPicPr>
-          <p:nvPr/>
-        </p:nvPicPr>
-        <p:blipFill>
-          <a:blip r:embed="rId1"/>
-          <a:srcRect l="0" r="0" t="0" b="0"/>
-          <a:stretch/>
-        </p:blipFill>
-        <p:spPr>
-          <a:xfrm>
-            <a:off x="914400" y="1828800"/>
-            <a:ext cx="10362895" cy="3840480"/>
-          </a:xfrm>
-          <a:prstGeom prst="rect">
-            <a:avLst/>
-          </a:prstGeom>
-        </p:spPr>
-      </p:pic>
-      <p:sp>
-        <p:nvSpPr>
-          <p:cNvPr id="6" name="Shape 3"/>
-          <p:cNvSpPr/>
-          <p:nvPr/>
-        </p:nvSpPr>
-        <p:spPr>
-          <a:xfrm>
-            <a:off x="0" y="1828800"/>
-            <a:ext cx="12191695" cy="3840480"/>
-          </a:xfrm>
-          <a:prstGeom prst="rect">
-            <a:avLst/>
-          </a:prstGeom>
-          <a:solidFill>
-            <a:srgbClr val="F5F0E8">
-              <a:alpha val="45000"/>
-            </a:srgbClr>
-          </a:solidFill>
-          <a:ln w="12700">
-            <a:solidFill>
-              <a:srgbClr val="F5F0E8">
-                <a:alpha val="0"/>
-              </a:srgbClr>
-            </a:solidFill>
-            <a:prstDash val="solid"/>
-          </a:ln>
-        </p:spPr>
-      </p:sp>
-      <p:sp>
-        <p:nvSpPr>
-          <p:cNvPr id="7" name="Text 4"/>
-          <p:cNvSpPr/>
-          <p:nvPr/>
-        </p:nvSpPr>
-        <p:spPr>
-          <a:xfrm>
-            <a:off x="274320" y="2377440"/>
+      <p:sp>
+        <p:nvSpPr>
+          <p:cNvPr id="5" name="Text 3"/>
+          <p:cNvSpPr/>
+          <p:nvPr/>
+        </p:nvSpPr>
+        <p:spPr>
+          <a:xfrm>
+            <a:off x="274320" y="1645920"/>
             <a:ext cx="11643055" cy="1463040"/>
           </a:xfrm>
           <a:prstGeom prst="rect">
@@ -6836,7 +7534,7 @@
               <a:buNone/>
             </a:pPr>
             <a:r>
-              <a:rPr lang="en-US" sz="10000" b="1" i="1" dirty="0">
+              <a:rPr lang="en-US" sz="8800" b="1" i="1" dirty="0">
                 <a:solidFill>
                   <a:srgbClr val="E84C2C"/>
                 </a:solidFill>
@@ -6844,13 +7542,13 @@
                 <a:ea typeface="Georgia" pitchFamily="34" charset="-122"/>
                 <a:cs typeface="Georgia" pitchFamily="34" charset="-120"/>
               </a:rPr>
-              <a:t>a</a:t>
-            </a:r>
-            <a:pPr algn="ctr" indent="0" marL="0">
-              <a:buNone/>
-            </a:pPr>
-            <a:r>
-              <a:rPr lang="en-US" sz="10000" b="1" i="1" dirty="0">
+              <a:t>maps</a:t>
+            </a:r>
+            <a:pPr algn="ctr" indent="0" marL="0">
+              <a:buNone/>
+            </a:pPr>
+            <a:r>
+              <a:rPr lang="en-US" sz="8800" b="1" i="1" dirty="0">
                 <a:solidFill>
                   <a:srgbClr val="1FAE52"/>
                 </a:solidFill>
@@ -6858,13 +7556,13 @@
                 <a:ea typeface="Georgia" pitchFamily="34" charset="-122"/>
                 <a:cs typeface="Georgia" pitchFamily="34" charset="-120"/>
               </a:rPr>
-              <a:t> world</a:t>
-            </a:r>
-            <a:pPr algn="ctr" indent="0" marL="0">
-              <a:buNone/>
-            </a:pPr>
-            <a:r>
-              <a:rPr lang="en-US" sz="10000" b="1" i="1" dirty="0">
+              <a:t> are</a:t>
+            </a:r>
+            <a:pPr algn="ctr" indent="0" marL="0">
+              <a:buNone/>
+            </a:pPr>
+            <a:r>
+              <a:rPr lang="en-US" sz="8800" b="1" i="1" dirty="0">
                 <a:solidFill>
                   <a:srgbClr val="1A1FE0"/>
                 </a:solidFill>
@@ -6872,13 +7570,13 @@
                 <a:ea typeface="Georgia" pitchFamily="34" charset="-122"/>
                 <a:cs typeface="Georgia" pitchFamily="34" charset="-120"/>
               </a:rPr>
-              <a:t> on</a:t>
-            </a:r>
-            <a:pPr algn="ctr" indent="0" marL="0">
-              <a:buNone/>
-            </a:pPr>
-            <a:r>
-              <a:rPr lang="en-US" sz="10000" b="1" i="1" dirty="0">
+              <a:t> not</a:t>
+            </a:r>
+            <a:pPr algn="ctr" indent="0" marL="0">
+              <a:buNone/>
+            </a:pPr>
+            <a:r>
+              <a:rPr lang="en-US" sz="8800" b="1" i="1" dirty="0">
                 <a:solidFill>
                   <a:srgbClr val="EC4899"/>
                 </a:solidFill>
@@ -6886,104 +7584,87 @@
                 <a:ea typeface="Georgia" pitchFamily="34" charset="-122"/>
                 <a:cs typeface="Georgia" pitchFamily="34" charset="-120"/>
               </a:rPr>
-              <a:t> the</a:t>
-            </a:r>
-            <a:pPr algn="ctr" indent="0" marL="0">
-              <a:buNone/>
-            </a:pPr>
-            <a:r>
-              <a:rPr lang="en-US" sz="10000" b="1" i="1" dirty="0">
-                <a:solidFill>
-                  <a:srgbClr val="F59E0B"/>
-                </a:solidFill>
-                <a:latin typeface="Georgia" pitchFamily="34" charset="0"/>
-                <a:ea typeface="Georgia" pitchFamily="34" charset="-122"/>
-                <a:cs typeface="Georgia" pitchFamily="34" charset="-120"/>
-              </a:rPr>
-              <a:t> seabed</a:t>
-            </a:r>
-            <a:endParaRPr lang="en-US" sz="10000" dirty="0"/>
-          </a:p>
-        </p:txBody>
-      </p:sp>
-      <p:sp>
-        <p:nvSpPr>
-          <p:cNvPr id="8" name="Text 5"/>
-          <p:cNvSpPr/>
-          <p:nvPr/>
-        </p:nvSpPr>
-        <p:spPr>
-          <a:xfrm>
-            <a:off x="274320" y="4937760"/>
-            <a:ext cx="11643055" cy="640080"/>
-          </a:xfrm>
-          <a:prstGeom prst="rect">
-            <a:avLst/>
-          </a:prstGeom>
-          <a:noFill/>
-          <a:ln/>
-        </p:spPr>
-        <p:txBody>
-          <a:bodyPr wrap="square" rtlCol="0" anchor="ctr"/>
-          <a:lstStyle/>
-          <a:p>
-            <a:pPr algn="ctr" indent="0" marL="0">
-              <a:buNone/>
-            </a:pPr>
-            <a:r>
-              <a:rPr lang="en-US" sz="2800" i="1" dirty="0">
-                <a:solidFill>
-                  <a:srgbClr val="1A1FE0"/>
-                </a:solidFill>
-                <a:latin typeface="Georgia" pitchFamily="34" charset="0"/>
-                <a:ea typeface="Georgia" pitchFamily="34" charset="-122"/>
-                <a:cs typeface="Georgia" pitchFamily="34" charset="-120"/>
-              </a:rPr>
-              <a:t>mine,</a:t>
-            </a:r>
-            <a:pPr algn="ctr" indent="0" marL="0">
-              <a:buNone/>
-            </a:pPr>
-            <a:r>
-              <a:rPr lang="en-US" sz="2800" i="1" dirty="0">
-                <a:solidFill>
-                  <a:srgbClr val="EC4899"/>
-                </a:solidFill>
-                <a:latin typeface="Georgia" pitchFamily="34" charset="0"/>
-                <a:ea typeface="Georgia" pitchFamily="34" charset="-122"/>
-                <a:cs typeface="Georgia" pitchFamily="34" charset="-120"/>
-              </a:rPr>
-              <a:t> plant,</a:t>
-            </a:r>
-            <a:pPr algn="ctr" indent="0" marL="0">
-              <a:buNone/>
-            </a:pPr>
-            <a:r>
-              <a:rPr lang="en-US" sz="2800" i="1" dirty="0">
-                <a:solidFill>
-                  <a:srgbClr val="F59E0B"/>
-                </a:solidFill>
-                <a:latin typeface="Georgia" pitchFamily="34" charset="0"/>
-                <a:ea typeface="Georgia" pitchFamily="34" charset="-122"/>
-                <a:cs typeface="Georgia" pitchFamily="34" charset="-120"/>
-              </a:rPr>
-              <a:t> flood,</a:t>
-            </a:r>
-            <a:pPr algn="ctr" indent="0" marL="0">
-              <a:buNone/>
-            </a:pPr>
-            <a:r>
-              <a:rPr lang="en-US" sz="2800" i="1" dirty="0">
-                <a:solidFill>
-                  <a:srgbClr val="22D3EE"/>
-                </a:solidFill>
-                <a:latin typeface="Georgia" pitchFamily="34" charset="0"/>
-                <a:ea typeface="Georgia" pitchFamily="34" charset="-122"/>
-                <a:cs typeface="Georgia" pitchFamily="34" charset="-120"/>
-              </a:rPr>
-              <a:t> restore</a:t>
-            </a:r>
-            <a:endParaRPr lang="en-US" sz="2800" dirty="0"/>
+              <a:t> neutral</a:t>
+            </a:r>
+            <a:endParaRPr lang="en-US" sz="8800" dirty="0"/>
+          </a:p>
+        </p:txBody>
+      </p:sp>
+      <p:sp>
+        <p:nvSpPr>
+          <p:cNvPr id="6" name="Text 4"/>
+          <p:cNvSpPr/>
+          <p:nvPr/>
+        </p:nvSpPr>
+        <p:spPr>
+          <a:xfrm>
+            <a:off x="1280160" y="3840480"/>
+            <a:ext cx="9631375" cy="822960"/>
+          </a:xfrm>
+          <a:prstGeom prst="rect">
+            <a:avLst/>
+          </a:prstGeom>
+          <a:noFill/>
+          <a:ln/>
+        </p:spPr>
+        <p:txBody>
+          <a:bodyPr wrap="square" rtlCol="0" anchor="ctr"/>
+          <a:lstStyle/>
+          <a:p>
+            <a:pPr algn="ctr" indent="0" marL="0">
+              <a:buNone/>
+            </a:pPr>
+            <a:r>
+              <a:rPr lang="en-US" sz="1500" dirty="0">
+                <a:solidFill>
+                  <a:srgbClr val="2B2B2B"/>
+                </a:solidFill>
+                <a:latin typeface="Helvetica" pitchFamily="34" charset="0"/>
+                <a:ea typeface="Helvetica" pitchFamily="34" charset="-122"/>
+                <a:cs typeface="Helvetica" pitchFamily="34" charset="-120"/>
+              </a:rPr>
+              <a:t>The way we imagine water affects the way we treat it.</a:t>
+            </a:r>
+            <a:endParaRPr lang="en-US" sz="1500" dirty="0"/>
+          </a:p>
+        </p:txBody>
+      </p:sp>
+      <p:sp>
+        <p:nvSpPr>
+          <p:cNvPr id="7" name="Text 5"/>
+          <p:cNvSpPr/>
+          <p:nvPr/>
+        </p:nvSpPr>
+        <p:spPr>
+          <a:xfrm>
+            <a:off x="1280160" y="4754880"/>
+            <a:ext cx="9631375" cy="822960"/>
+          </a:xfrm>
+          <a:prstGeom prst="rect">
+            <a:avLst/>
+          </a:prstGeom>
+          <a:noFill/>
+          <a:ln/>
+        </p:spPr>
+        <p:txBody>
+          <a:bodyPr wrap="square" rtlCol="0" anchor="ctr"/>
+          <a:lstStyle/>
+          <a:p>
+            <a:pPr algn="ctr" indent="0" marL="0">
+              <a:buNone/>
+            </a:pPr>
+            <a:r>
+              <a:rPr lang="en-US" sz="1500" dirty="0">
+                <a:solidFill>
+                  <a:srgbClr val="2B2B2B"/>
+                </a:solidFill>
+                <a:latin typeface="Helvetica" pitchFamily="34" charset="0"/>
+                <a:ea typeface="Helvetica" pitchFamily="34" charset="-122"/>
+                <a:cs typeface="Helvetica" pitchFamily="34" charset="-120"/>
+              </a:rPr>
+              <a:t>Water can appear as a resource, a border, a memory, a health issue, an infrastructure system, a political question, or a shared future. Aral3D turns the map into a space for learning, questioning, and imagination.</a:t>
+            </a:r>
+            <a:endParaRPr lang="en-US" sz="1500" dirty="0"/>
           </a:p>
         </p:txBody>
       </p:sp>
@@ -7052,7 +7733,7 @@
                 <a:ea typeface="Helvetica" pitchFamily="34" charset="-122"/>
                 <a:cs typeface="Helvetica" pitchFamily="34" charset="-120"/>
               </a:rPr>
-              <a:t>LEVEL 5</a:t>
+              <a:t>CHAPTER 5</a:t>
             </a:r>
             <a:endParaRPr lang="en-US" sz="1100" dirty="0"/>
           </a:p>
@@ -7091,7 +7772,7 @@
                 <a:ea typeface="Helvetica" pitchFamily="34" charset="-122"/>
                 <a:cs typeface="Helvetica" pitchFamily="34" charset="-120"/>
               </a:rPr>
-              <a:t>EXPLORE MODE</a:t>
+              <a:t>WHAT IT DOES</a:t>
             </a:r>
             <a:endParaRPr lang="en-US" sz="1600" dirty="0"/>
           </a:p>
@@ -7197,7 +7878,7 @@
               <a:buNone/>
             </a:pPr>
             <a:r>
-              <a:rPr lang="en-US" sz="10000" b="1" i="1" dirty="0">
+              <a:rPr lang="en-US" sz="7000" b="1" i="1" dirty="0">
                 <a:solidFill>
                   <a:srgbClr val="E84C2C"/>
                 </a:solidFill>
@@ -7205,13 +7886,13 @@
                 <a:ea typeface="Georgia" pitchFamily="34" charset="-122"/>
                 <a:cs typeface="Georgia" pitchFamily="34" charset="-120"/>
               </a:rPr>
-              <a:t>read</a:t>
-            </a:r>
-            <a:pPr algn="ctr" indent="0" marL="0">
-              <a:buNone/>
-            </a:pPr>
-            <a:r>
-              <a:rPr lang="en-US" sz="10000" b="1" i="1" dirty="0">
+              <a:t>explore</a:t>
+            </a:r>
+            <a:pPr algn="ctr" indent="0" marL="0">
+              <a:buNone/>
+            </a:pPr>
+            <a:r>
+              <a:rPr lang="en-US" sz="7000" b="1" i="1" dirty="0">
                 <a:solidFill>
                   <a:srgbClr val="1FAE52"/>
                 </a:solidFill>
@@ -7225,7 +7906,7 @@
               <a:buNone/>
             </a:pPr>
             <a:r>
-              <a:rPr lang="en-US" sz="10000" b="1" i="1" dirty="0">
+              <a:rPr lang="en-US" sz="7000" b="1" i="1" dirty="0">
                 <a:solidFill>
                   <a:srgbClr val="1A1FE0"/>
                 </a:solidFill>
@@ -7235,7 +7916,35 @@
               </a:rPr>
               <a:t> basin</a:t>
             </a:r>
-            <a:endParaRPr lang="en-US" sz="10000" dirty="0"/>
+            <a:pPr algn="ctr" indent="0" marL="0">
+              <a:buNone/>
+            </a:pPr>
+            <a:r>
+              <a:rPr lang="en-US" sz="7000" b="1" i="1" dirty="0">
+                <a:solidFill>
+                  <a:srgbClr val="EC4899"/>
+                </a:solidFill>
+                <a:latin typeface="Georgia" pitchFamily="34" charset="0"/>
+                <a:ea typeface="Georgia" pitchFamily="34" charset="-122"/>
+                <a:cs typeface="Georgia" pitchFamily="34" charset="-120"/>
+              </a:rPr>
+              <a:t> in</a:t>
+            </a:r>
+            <a:pPr algn="ctr" indent="0" marL="0">
+              <a:buNone/>
+            </a:pPr>
+            <a:r>
+              <a:rPr lang="en-US" sz="7000" b="1" i="1" dirty="0">
+                <a:solidFill>
+                  <a:srgbClr val="F59E0B"/>
+                </a:solidFill>
+                <a:latin typeface="Georgia" pitchFamily="34" charset="0"/>
+                <a:ea typeface="Georgia" pitchFamily="34" charset="-122"/>
+                <a:cs typeface="Georgia" pitchFamily="34" charset="-120"/>
+              </a:rPr>
+              <a:t> 3D</a:t>
+            </a:r>
+            <a:endParaRPr lang="en-US" sz="7000" dirty="0"/>
           </a:p>
         </p:txBody>
       </p:sp>
@@ -7247,24 +7956,24 @@
         </p:nvSpPr>
         <p:spPr>
           <a:xfrm>
-            <a:off x="274320" y="4937760"/>
-            <a:ext cx="11643055" cy="640080"/>
-          </a:xfrm>
-          <a:prstGeom prst="rect">
-            <a:avLst/>
-          </a:prstGeom>
-          <a:noFill/>
-          <a:ln/>
-        </p:spPr>
-        <p:txBody>
-          <a:bodyPr wrap="square" rtlCol="0" anchor="ctr"/>
-          <a:lstStyle/>
-          <a:p>
-            <a:pPr algn="ctr" indent="0" marL="0">
-              <a:buNone/>
-            </a:pPr>
-            <a:r>
-              <a:rPr lang="en-US" sz="2800" i="1" dirty="0">
+            <a:off x="548640" y="4937760"/>
+            <a:ext cx="11094415" cy="914400"/>
+          </a:xfrm>
+          <a:prstGeom prst="rect">
+            <a:avLst/>
+          </a:prstGeom>
+          <a:noFill/>
+          <a:ln/>
+        </p:spPr>
+        <p:txBody>
+          <a:bodyPr wrap="square" rtlCol="0" anchor="ctr"/>
+          <a:lstStyle/>
+          <a:p>
+            <a:pPr algn="ctr" indent="0" marL="0">
+              <a:buNone/>
+            </a:pPr>
+            <a:r>
+              <a:rPr lang="en-US" sz="2400" i="1" dirty="0">
                 <a:solidFill>
                   <a:srgbClr val="1A1FE0"/>
                 </a:solidFill>
@@ -7272,13 +7981,13 @@
                 <a:ea typeface="Georgia" pitchFamily="34" charset="-122"/>
                 <a:cs typeface="Georgia" pitchFamily="34" charset="-120"/>
               </a:rPr>
-              <a:t>real</a:t>
-            </a:r>
-            <a:pPr algn="ctr" indent="0" marL="0">
-              <a:buNone/>
-            </a:pPr>
-            <a:r>
-              <a:rPr lang="en-US" sz="2800" i="1" dirty="0">
+              <a:t>terrain,</a:t>
+            </a:r>
+            <a:pPr algn="ctr" indent="0" marL="0">
+              <a:buNone/>
+            </a:pPr>
+            <a:r>
+              <a:rPr lang="en-US" sz="2400" i="1" dirty="0">
                 <a:solidFill>
                   <a:srgbClr val="EC4899"/>
                 </a:solidFill>
@@ -7286,13 +7995,13 @@
                 <a:ea typeface="Georgia" pitchFamily="34" charset="-122"/>
                 <a:cs typeface="Georgia" pitchFamily="34" charset="-120"/>
               </a:rPr>
-              <a:t> elevation,</a:t>
-            </a:r>
-            <a:pPr algn="ctr" indent="0" marL="0">
-              <a:buNone/>
-            </a:pPr>
-            <a:r>
-              <a:rPr lang="en-US" sz="2800" i="1" dirty="0">
+              <a:t> water,</a:t>
+            </a:r>
+            <a:pPr algn="ctr" indent="0" marL="0">
+              <a:buNone/>
+            </a:pPr>
+            <a:r>
+              <a:rPr lang="en-US" sz="2400" i="1" dirty="0">
                 <a:solidFill>
                   <a:srgbClr val="F59E0B"/>
                 </a:solidFill>
@@ -7300,13 +8009,13 @@
                 <a:ea typeface="Georgia" pitchFamily="34" charset="-122"/>
                 <a:cs typeface="Georgia" pitchFamily="34" charset="-120"/>
               </a:rPr>
-              <a:t> historical</a:t>
-            </a:r>
-            <a:pPr algn="ctr" indent="0" marL="0">
-              <a:buNone/>
-            </a:pPr>
-            <a:r>
-              <a:rPr lang="en-US" sz="2800" i="1" dirty="0">
+              <a:t> settlements,</a:t>
+            </a:r>
+            <a:pPr algn="ctr" indent="0" marL="0">
+              <a:buNone/>
+            </a:pPr>
+            <a:r>
+              <a:rPr lang="en-US" sz="2400" i="1" dirty="0">
                 <a:solidFill>
                   <a:srgbClr val="22D3EE"/>
                 </a:solidFill>
@@ -7314,13 +8023,13 @@
                 <a:ea typeface="Georgia" pitchFamily="34" charset="-122"/>
                 <a:cs typeface="Georgia" pitchFamily="34" charset="-120"/>
               </a:rPr>
-              <a:t> lakes,</a:t>
-            </a:r>
-            <a:pPr algn="ctr" indent="0" marL="0">
-              <a:buNone/>
-            </a:pPr>
-            <a:r>
-              <a:rPr lang="en-US" sz="2800" i="1" dirty="0">
+              <a:t> canals,</a:t>
+            </a:r>
+            <a:pPr algn="ctr" indent="0" marL="0">
+              <a:buNone/>
+            </a:pPr>
+            <a:r>
+              <a:rPr lang="en-US" sz="2400" i="1" dirty="0">
                 <a:solidFill>
                   <a:srgbClr val="E84C2C"/>
                 </a:solidFill>
@@ -7328,13 +8037,13 @@
                 <a:ea typeface="Georgia" pitchFamily="34" charset="-122"/>
                 <a:cs typeface="Georgia" pitchFamily="34" charset="-120"/>
               </a:rPr>
-              <a:t> climate,</a:t>
-            </a:r>
-            <a:pPr algn="ctr" indent="0" marL="0">
-              <a:buNone/>
-            </a:pPr>
-            <a:r>
-              <a:rPr lang="en-US" sz="2800" i="1" dirty="0">
+              <a:t> dams,</a:t>
+            </a:r>
+            <a:pPr algn="ctr" indent="0" marL="0">
+              <a:buNone/>
+            </a:pPr>
+            <a:r>
+              <a:rPr lang="en-US" sz="2400" i="1" dirty="0">
                 <a:solidFill>
                   <a:srgbClr val="1FAE52"/>
                 </a:solidFill>
@@ -7342,9 +8051,51 @@
                 <a:ea typeface="Georgia" pitchFamily="34" charset="-122"/>
                 <a:cs typeface="Georgia" pitchFamily="34" charset="-120"/>
               </a:rPr>
-              <a:t> demographics</a:t>
-            </a:r>
-            <a:endParaRPr lang="en-US" sz="2800" dirty="0"/>
+              <a:t> ecology,</a:t>
+            </a:r>
+            <a:pPr algn="ctr" indent="0" marL="0">
+              <a:buNone/>
+            </a:pPr>
+            <a:r>
+              <a:rPr lang="en-US" sz="2400" i="1" dirty="0">
+                <a:solidFill>
+                  <a:srgbClr val="1A1FE0"/>
+                </a:solidFill>
+                <a:latin typeface="Georgia" pitchFamily="34" charset="0"/>
+                <a:ea typeface="Georgia" pitchFamily="34" charset="-122"/>
+                <a:cs typeface="Georgia" pitchFamily="34" charset="-120"/>
+              </a:rPr>
+              <a:t> and</a:t>
+            </a:r>
+            <a:pPr algn="ctr" indent="0" marL="0">
+              <a:buNone/>
+            </a:pPr>
+            <a:r>
+              <a:rPr lang="en-US" sz="2400" i="1" dirty="0">
+                <a:solidFill>
+                  <a:srgbClr val="EC4899"/>
+                </a:solidFill>
+                <a:latin typeface="Georgia" pitchFamily="34" charset="0"/>
+                <a:ea typeface="Georgia" pitchFamily="34" charset="-122"/>
+                <a:cs typeface="Georgia" pitchFamily="34" charset="-120"/>
+              </a:rPr>
+              <a:t> future</a:t>
+            </a:r>
+            <a:pPr algn="ctr" indent="0" marL="0">
+              <a:buNone/>
+            </a:pPr>
+            <a:r>
+              <a:rPr lang="en-US" sz="2400" i="1" dirty="0">
+                <a:solidFill>
+                  <a:srgbClr val="F59E0B"/>
+                </a:solidFill>
+                <a:latin typeface="Georgia" pitchFamily="34" charset="0"/>
+                <a:ea typeface="Georgia" pitchFamily="34" charset="-122"/>
+                <a:cs typeface="Georgia" pitchFamily="34" charset="-120"/>
+              </a:rPr>
+              <a:t> scenarios</a:t>
+            </a:r>
+            <a:endParaRPr lang="en-US" sz="2400" dirty="0"/>
           </a:p>
         </p:txBody>
       </p:sp>
@@ -7413,7 +8164,7 @@
                 <a:ea typeface="Helvetica" pitchFamily="34" charset="-122"/>
                 <a:cs typeface="Helvetica" pitchFamily="34" charset="-120"/>
               </a:rPr>
-              <a:t>LEVEL 6</a:t>
+              <a:t>CHAPTER 6</a:t>
             </a:r>
             <a:endParaRPr lang="en-US" sz="1100" dirty="0"/>
           </a:p>
@@ -7452,7 +8203,7 @@
                 <a:ea typeface="Helvetica" pitchFamily="34" charset="-122"/>
                 <a:cs typeface="Helvetica" pitchFamily="34" charset="-120"/>
               </a:rPr>
-              <a:t>WHO IT IS FOR</a:t>
+              <a:t>CURRENT STATUS</a:t>
             </a:r>
             <a:endParaRPr lang="en-US" sz="1600" dirty="0"/>
           </a:p>
@@ -7481,15 +8232,67 @@
           </a:ln>
         </p:spPr>
       </p:sp>
-      <p:sp>
-        <p:nvSpPr>
-          <p:cNvPr id="5" name="Text 3"/>
-          <p:cNvSpPr/>
-          <p:nvPr/>
-        </p:nvSpPr>
-        <p:spPr>
-          <a:xfrm>
-            <a:off x="274320" y="1645920"/>
+      <p:pic>
+        <p:nvPicPr>
+          <p:cNvPr id="5" name="Image 0" descr="docs/screenshots/04-game-mission1.png">    </p:cNvPr>
+          <p:cNvPicPr>
+            <a:picLocks noChangeAspect="1"/>
+          </p:cNvPicPr>
+          <p:nvPr/>
+        </p:nvPicPr>
+        <p:blipFill>
+          <a:blip r:embed="rId1"/>
+          <a:srcRect l="0" r="0" t="0" b="0"/>
+          <a:stretch/>
+        </p:blipFill>
+        <p:spPr>
+          <a:xfrm>
+            <a:off x="914400" y="1828800"/>
+            <a:ext cx="10362895" cy="3840480"/>
+          </a:xfrm>
+          <a:prstGeom prst="rect">
+            <a:avLst/>
+          </a:prstGeom>
+        </p:spPr>
+      </p:pic>
+      <p:sp>
+        <p:nvSpPr>
+          <p:cNvPr id="6" name="Shape 3"/>
+          <p:cNvSpPr/>
+          <p:nvPr/>
+        </p:nvSpPr>
+        <p:spPr>
+          <a:xfrm>
+            <a:off x="0" y="1828800"/>
+            <a:ext cx="12191695" cy="3840480"/>
+          </a:xfrm>
+          <a:prstGeom prst="rect">
+            <a:avLst/>
+          </a:prstGeom>
+          <a:solidFill>
+            <a:srgbClr val="F5F0E8">
+              <a:alpha val="45000"/>
+            </a:srgbClr>
+          </a:solidFill>
+          <a:ln w="12700">
+            <a:solidFill>
+              <a:srgbClr val="F5F0E8">
+                <a:alpha val="0"/>
+              </a:srgbClr>
+            </a:solidFill>
+            <a:prstDash val="solid"/>
+          </a:ln>
+        </p:spPr>
+      </p:sp>
+      <p:sp>
+        <p:nvSpPr>
+          <p:cNvPr id="7" name="Text 4"/>
+          <p:cNvSpPr/>
+          <p:nvPr/>
+        </p:nvSpPr>
+        <p:spPr>
+          <a:xfrm>
+            <a:off x="274320" y="2377440"/>
             <a:ext cx="11643055" cy="1463040"/>
           </a:xfrm>
           <a:prstGeom prst="rect">
@@ -7506,7 +8309,7 @@
               <a:buNone/>
             </a:pPr>
             <a:r>
-              <a:rPr lang="en-US" sz="8400" b="1" i="1" dirty="0">
+              <a:rPr lang="en-US" sz="8800" b="1" i="1" dirty="0">
                 <a:solidFill>
                   <a:srgbClr val="E84C2C"/>
                 </a:solidFill>
@@ -7514,13 +8317,13 @@
                 <a:ea typeface="Georgia" pitchFamily="34" charset="-122"/>
                 <a:cs typeface="Georgia" pitchFamily="34" charset="-120"/>
               </a:rPr>
-              <a:t>who</a:t>
-            </a:r>
-            <a:pPr algn="ctr" indent="0" marL="0">
-              <a:buNone/>
-            </a:pPr>
-            <a:r>
-              <a:rPr lang="en-US" sz="8400" b="1" i="1" dirty="0">
+              <a:t>the</a:t>
+            </a:r>
+            <a:pPr algn="ctr" indent="0" marL="0">
+              <a:buNone/>
+            </a:pPr>
+            <a:r>
+              <a:rPr lang="en-US" sz="8800" b="1" i="1" dirty="0">
                 <a:solidFill>
                   <a:srgbClr val="1FAE52"/>
                 </a:solidFill>
@@ -7528,13 +8331,13 @@
                 <a:ea typeface="Georgia" pitchFamily="34" charset="-122"/>
                 <a:cs typeface="Georgia" pitchFamily="34" charset="-120"/>
               </a:rPr>
-              <a:t> plays</a:t>
-            </a:r>
-            <a:pPr algn="ctr" indent="0" marL="0">
-              <a:buNone/>
-            </a:pPr>
-            <a:r>
-              <a:rPr lang="en-US" sz="8400" b="1" i="1" dirty="0">
+              <a:t> prototype</a:t>
+            </a:r>
+            <a:pPr algn="ctr" indent="0" marL="0">
+              <a:buNone/>
+            </a:pPr>
+            <a:r>
+              <a:rPr lang="en-US" sz="8800" b="1" i="1" dirty="0">
                 <a:solidFill>
                   <a:srgbClr val="1A1FE0"/>
                 </a:solidFill>
@@ -7542,13 +8345,52 @@
                 <a:ea typeface="Georgia" pitchFamily="34" charset="-122"/>
                 <a:cs typeface="Georgia" pitchFamily="34" charset="-120"/>
               </a:rPr>
-              <a:t> with</a:t>
-            </a:r>
-            <a:pPr algn="ctr" indent="0" marL="0">
-              <a:buNone/>
-            </a:pPr>
-            <a:r>
-              <a:rPr lang="en-US" sz="8400" b="1" i="1" dirty="0">
+              <a:t> works</a:t>
+            </a:r>
+            <a:endParaRPr lang="en-US" sz="8800" dirty="0"/>
+          </a:p>
+        </p:txBody>
+      </p:sp>
+      <p:sp>
+        <p:nvSpPr>
+          <p:cNvPr id="8" name="Text 5"/>
+          <p:cNvSpPr/>
+          <p:nvPr/>
+        </p:nvSpPr>
+        <p:spPr>
+          <a:xfrm>
+            <a:off x="548640" y="4937760"/>
+            <a:ext cx="11094415" cy="914400"/>
+          </a:xfrm>
+          <a:prstGeom prst="rect">
+            <a:avLst/>
+          </a:prstGeom>
+          <a:noFill/>
+          <a:ln/>
+        </p:spPr>
+        <p:txBody>
+          <a:bodyPr wrap="square" rtlCol="0" anchor="ctr"/>
+          <a:lstStyle/>
+          <a:p>
+            <a:pPr algn="ctr" indent="0" marL="0">
+              <a:buNone/>
+            </a:pPr>
+            <a:r>
+              <a:rPr lang="en-US" sz="2400" i="1" dirty="0">
+                <a:solidFill>
+                  <a:srgbClr val="1A1FE0"/>
+                </a:solidFill>
+                <a:latin typeface="Georgia" pitchFamily="34" charset="0"/>
+                <a:ea typeface="Georgia" pitchFamily="34" charset="-122"/>
+                <a:cs typeface="Georgia" pitchFamily="34" charset="-120"/>
+              </a:rPr>
+              <a:t>3D</a:t>
+            </a:r>
+            <a:pPr algn="ctr" indent="0" marL="0">
+              <a:buNone/>
+            </a:pPr>
+            <a:r>
+              <a:rPr lang="en-US" sz="2400" i="1" dirty="0">
                 <a:solidFill>
                   <a:srgbClr val="EC4899"/>
                 </a:solidFill>
@@ -7556,38 +8398,41 @@
                 <a:ea typeface="Georgia" pitchFamily="34" charset="-122"/>
                 <a:cs typeface="Georgia" pitchFamily="34" charset="-120"/>
               </a:rPr>
-              <a:t> it</a:t>
-            </a:r>
-            <a:endParaRPr lang="en-US" sz="8400" dirty="0"/>
-          </a:p>
-        </p:txBody>
-      </p:sp>
-      <p:sp>
-        <p:nvSpPr>
-          <p:cNvPr id="6" name="Text 4"/>
-          <p:cNvSpPr/>
-          <p:nvPr/>
-        </p:nvSpPr>
-        <p:spPr>
-          <a:xfrm>
-            <a:off x="914400" y="3840480"/>
-            <a:ext cx="2743200" cy="411480"/>
-          </a:xfrm>
-          <a:prstGeom prst="rect">
-            <a:avLst/>
-          </a:prstGeom>
-          <a:noFill/>
-          <a:ln/>
-        </p:spPr>
-        <p:txBody>
-          <a:bodyPr wrap="square" rtlCol="0" anchor="ctr"/>
-          <a:lstStyle/>
-          <a:p>
-            <a:pPr indent="0" marL="0">
-              <a:buNone/>
-            </a:pPr>
-            <a:r>
-              <a:rPr lang="en-US" sz="2200" b="1" i="1" dirty="0">
+              <a:t> terrain,</a:t>
+            </a:r>
+            <a:pPr algn="ctr" indent="0" marL="0">
+              <a:buNone/>
+            </a:pPr>
+            <a:r>
+              <a:rPr lang="en-US" sz="2400" i="1" dirty="0">
+                <a:solidFill>
+                  <a:srgbClr val="F59E0B"/>
+                </a:solidFill>
+                <a:latin typeface="Georgia" pitchFamily="34" charset="0"/>
+                <a:ea typeface="Georgia" pitchFamily="34" charset="-122"/>
+                <a:cs typeface="Georgia" pitchFamily="34" charset="-120"/>
+              </a:rPr>
+              <a:t> map</a:t>
+            </a:r>
+            <a:pPr algn="ctr" indent="0" marL="0">
+              <a:buNone/>
+            </a:pPr>
+            <a:r>
+              <a:rPr lang="en-US" sz="2400" i="1" dirty="0">
+                <a:solidFill>
+                  <a:srgbClr val="22D3EE"/>
+                </a:solidFill>
+                <a:latin typeface="Georgia" pitchFamily="34" charset="0"/>
+                <a:ea typeface="Georgia" pitchFamily="34" charset="-122"/>
+                <a:cs typeface="Georgia" pitchFamily="34" charset="-120"/>
+              </a:rPr>
+              <a:t> layers,</a:t>
+            </a:r>
+            <a:pPr algn="ctr" indent="0" marL="0">
+              <a:buNone/>
+            </a:pPr>
+            <a:r>
+              <a:rPr lang="en-US" sz="2400" i="1" dirty="0">
                 <a:solidFill>
                   <a:srgbClr val="E84C2C"/>
                 </a:solidFill>
@@ -7595,77 +8440,13 @@
                 <a:ea typeface="Georgia" pitchFamily="34" charset="-122"/>
                 <a:cs typeface="Georgia" pitchFamily="34" charset="-120"/>
               </a:rPr>
-              <a:t>Schools</a:t>
-            </a:r>
-            <a:endParaRPr lang="en-US" sz="2200" dirty="0"/>
-          </a:p>
-        </p:txBody>
-      </p:sp>
-      <p:sp>
-        <p:nvSpPr>
-          <p:cNvPr id="7" name="Text 5"/>
-          <p:cNvSpPr/>
-          <p:nvPr/>
-        </p:nvSpPr>
-        <p:spPr>
-          <a:xfrm>
-            <a:off x="3840480" y="3886200"/>
-            <a:ext cx="7498080" cy="411480"/>
-          </a:xfrm>
-          <a:prstGeom prst="rect">
-            <a:avLst/>
-          </a:prstGeom>
-          <a:noFill/>
-          <a:ln/>
-        </p:spPr>
-        <p:txBody>
-          <a:bodyPr wrap="square" rtlCol="0" anchor="ctr"/>
-          <a:lstStyle/>
-          <a:p>
-            <a:pPr indent="0" marL="0">
-              <a:buNone/>
-            </a:pPr>
-            <a:r>
-              <a:rPr lang="en-US" sz="1400" dirty="0">
-                <a:solidFill>
-                  <a:srgbClr val="2B2B2B"/>
-                </a:solidFill>
-                <a:latin typeface="Helvetica" pitchFamily="34" charset="0"/>
-                <a:ea typeface="Helvetica" pitchFamily="34" charset="-122"/>
-                <a:cs typeface="Helvetica" pitchFamily="34" charset="-120"/>
-              </a:rPr>
-              <a:t>Curriculum-ready missions and classroom workshops.</a:t>
-            </a:r>
-            <a:endParaRPr lang="en-US" sz="1400" dirty="0"/>
-          </a:p>
-        </p:txBody>
-      </p:sp>
-      <p:sp>
-        <p:nvSpPr>
-          <p:cNvPr id="8" name="Text 6"/>
-          <p:cNvSpPr/>
-          <p:nvPr/>
-        </p:nvSpPr>
-        <p:spPr>
-          <a:xfrm>
-            <a:off x="914400" y="4343400"/>
-            <a:ext cx="2743200" cy="411480"/>
-          </a:xfrm>
-          <a:prstGeom prst="rect">
-            <a:avLst/>
-          </a:prstGeom>
-          <a:noFill/>
-          <a:ln/>
-        </p:spPr>
-        <p:txBody>
-          <a:bodyPr wrap="square" rtlCol="0" anchor="ctr"/>
-          <a:lstStyle/>
-          <a:p>
-            <a:pPr indent="0" marL="0">
-              <a:buNone/>
-            </a:pPr>
-            <a:r>
-              <a:rPr lang="en-US" sz="2200" b="1" i="1" dirty="0">
+              <a:t> water</a:t>
+            </a:r>
+            <a:pPr algn="ctr" indent="0" marL="0">
+              <a:buNone/>
+            </a:pPr>
+            <a:r>
+              <a:rPr lang="en-US" sz="2400" i="1" dirty="0">
                 <a:solidFill>
                   <a:srgbClr val="1FAE52"/>
                 </a:solidFill>
@@ -7673,77 +8454,13 @@
                 <a:ea typeface="Georgia" pitchFamily="34" charset="-122"/>
                 <a:cs typeface="Georgia" pitchFamily="34" charset="-120"/>
               </a:rPr>
-              <a:t>Museums</a:t>
-            </a:r>
-            <a:endParaRPr lang="en-US" sz="2200" dirty="0"/>
-          </a:p>
-        </p:txBody>
-      </p:sp>
-      <p:sp>
-        <p:nvSpPr>
-          <p:cNvPr id="9" name="Text 7"/>
-          <p:cNvSpPr/>
-          <p:nvPr/>
-        </p:nvSpPr>
-        <p:spPr>
-          <a:xfrm>
-            <a:off x="3840480" y="4389120"/>
-            <a:ext cx="7498080" cy="411480"/>
-          </a:xfrm>
-          <a:prstGeom prst="rect">
-            <a:avLst/>
-          </a:prstGeom>
-          <a:noFill/>
-          <a:ln/>
-        </p:spPr>
-        <p:txBody>
-          <a:bodyPr wrap="square" rtlCol="0" anchor="ctr"/>
-          <a:lstStyle/>
-          <a:p>
-            <a:pPr indent="0" marL="0">
-              <a:buNone/>
-            </a:pPr>
-            <a:r>
-              <a:rPr lang="en-US" sz="1400" dirty="0">
-                <a:solidFill>
-                  <a:srgbClr val="2B2B2B"/>
-                </a:solidFill>
-                <a:latin typeface="Helvetica" pitchFamily="34" charset="0"/>
-                <a:ea typeface="Helvetica" pitchFamily="34" charset="-122"/>
-                <a:cs typeface="Helvetica" pitchFamily="34" charset="-120"/>
-              </a:rPr>
-              <a:t>Touchscreens, projections, controller installations.</a:t>
-            </a:r>
-            <a:endParaRPr lang="en-US" sz="1400" dirty="0"/>
-          </a:p>
-        </p:txBody>
-      </p:sp>
-      <p:sp>
-        <p:nvSpPr>
-          <p:cNvPr id="10" name="Text 8"/>
-          <p:cNvSpPr/>
-          <p:nvPr/>
-        </p:nvSpPr>
-        <p:spPr>
-          <a:xfrm>
-            <a:off x="914400" y="4846320"/>
-            <a:ext cx="2743200" cy="411480"/>
-          </a:xfrm>
-          <a:prstGeom prst="rect">
-            <a:avLst/>
-          </a:prstGeom>
-          <a:noFill/>
-          <a:ln/>
-        </p:spPr>
-        <p:txBody>
-          <a:bodyPr wrap="square" rtlCol="0" anchor="ctr"/>
-          <a:lstStyle/>
-          <a:p>
-            <a:pPr indent="0" marL="0">
-              <a:buNone/>
-            </a:pPr>
-            <a:r>
-              <a:rPr lang="en-US" sz="2200" b="1" i="1" dirty="0">
+              <a:t> scenarios,</a:t>
+            </a:r>
+            <a:pPr algn="ctr" indent="0" marL="0">
+              <a:buNone/>
+            </a:pPr>
+            <a:r>
+              <a:rPr lang="en-US" sz="2400" i="1" dirty="0">
                 <a:solidFill>
                   <a:srgbClr val="1A1FE0"/>
                 </a:solidFill>
@@ -7751,77 +8468,13 @@
                 <a:ea typeface="Georgia" pitchFamily="34" charset="-122"/>
                 <a:cs typeface="Georgia" pitchFamily="34" charset="-120"/>
               </a:rPr>
-              <a:t>Researchers</a:t>
-            </a:r>
-            <a:endParaRPr lang="en-US" sz="2200" dirty="0"/>
-          </a:p>
-        </p:txBody>
-      </p:sp>
-      <p:sp>
-        <p:nvSpPr>
-          <p:cNvPr id="11" name="Text 9"/>
-          <p:cNvSpPr/>
-          <p:nvPr/>
-        </p:nvSpPr>
-        <p:spPr>
-          <a:xfrm>
-            <a:off x="3840480" y="4892040"/>
-            <a:ext cx="7498080" cy="411480"/>
-          </a:xfrm>
-          <a:prstGeom prst="rect">
-            <a:avLst/>
-          </a:prstGeom>
-          <a:noFill/>
-          <a:ln/>
-        </p:spPr>
-        <p:txBody>
-          <a:bodyPr wrap="square" rtlCol="0" anchor="ctr"/>
-          <a:lstStyle/>
-          <a:p>
-            <a:pPr indent="0" marL="0">
-              <a:buNone/>
-            </a:pPr>
-            <a:r>
-              <a:rPr lang="en-US" sz="1400" dirty="0">
-                <a:solidFill>
-                  <a:srgbClr val="2B2B2B"/>
-                </a:solidFill>
-                <a:latin typeface="Helvetica" pitchFamily="34" charset="0"/>
-                <a:ea typeface="Helvetica" pitchFamily="34" charset="-122"/>
-                <a:cs typeface="Helvetica" pitchFamily="34" charset="-120"/>
-              </a:rPr>
-              <a:t>Real elevation and historical layers, shareable views.</a:t>
-            </a:r>
-            <a:endParaRPr lang="en-US" sz="1400" dirty="0"/>
-          </a:p>
-        </p:txBody>
-      </p:sp>
-      <p:sp>
-        <p:nvSpPr>
-          <p:cNvPr id="12" name="Text 10"/>
-          <p:cNvSpPr/>
-          <p:nvPr/>
-        </p:nvSpPr>
-        <p:spPr>
-          <a:xfrm>
-            <a:off x="914400" y="5349240"/>
-            <a:ext cx="2743200" cy="411480"/>
-          </a:xfrm>
-          <a:prstGeom prst="rect">
-            <a:avLst/>
-          </a:prstGeom>
-          <a:noFill/>
-          <a:ln/>
-        </p:spPr>
-        <p:txBody>
-          <a:bodyPr wrap="square" rtlCol="0" anchor="ctr"/>
-          <a:lstStyle/>
-          <a:p>
-            <a:pPr indent="0" marL="0">
-              <a:buNone/>
-            </a:pPr>
-            <a:r>
-              <a:rPr lang="en-US" sz="2200" b="1" i="1" dirty="0">
+              <a:t> and</a:t>
+            </a:r>
+            <a:pPr algn="ctr" indent="0" marL="0">
+              <a:buNone/>
+            </a:pPr>
+            <a:r>
+              <a:rPr lang="en-US" sz="2400" i="1" dirty="0">
                 <a:solidFill>
                   <a:srgbClr val="EC4899"/>
                 </a:solidFill>
@@ -7829,77 +8482,13 @@
                 <a:ea typeface="Georgia" pitchFamily="34" charset="-122"/>
                 <a:cs typeface="Georgia" pitchFamily="34" charset="-120"/>
               </a:rPr>
-              <a:t>Ministries</a:t>
-            </a:r>
-            <a:endParaRPr lang="en-US" sz="2200" dirty="0"/>
-          </a:p>
-        </p:txBody>
-      </p:sp>
-      <p:sp>
-        <p:nvSpPr>
-          <p:cNvPr id="13" name="Text 11"/>
-          <p:cNvSpPr/>
-          <p:nvPr/>
-        </p:nvSpPr>
-        <p:spPr>
-          <a:xfrm>
-            <a:off x="3840480" y="5394960"/>
-            <a:ext cx="7498080" cy="411480"/>
-          </a:xfrm>
-          <a:prstGeom prst="rect">
-            <a:avLst/>
-          </a:prstGeom>
-          <a:noFill/>
-          <a:ln/>
-        </p:spPr>
-        <p:txBody>
-          <a:bodyPr wrap="square" rtlCol="0" anchor="ctr"/>
-          <a:lstStyle/>
-          <a:p>
-            <a:pPr indent="0" marL="0">
-              <a:buNone/>
-            </a:pPr>
-            <a:r>
-              <a:rPr lang="en-US" sz="1400" dirty="0">
-                <a:solidFill>
-                  <a:srgbClr val="2B2B2B"/>
-                </a:solidFill>
-                <a:latin typeface="Helvetica" pitchFamily="34" charset="0"/>
-                <a:ea typeface="Helvetica" pitchFamily="34" charset="-122"/>
-                <a:cs typeface="Helvetica" pitchFamily="34" charset="-120"/>
-              </a:rPr>
-              <a:t>Scenario tools for water, agriculture and ecology.</a:t>
-            </a:r>
-            <a:endParaRPr lang="en-US" sz="1400" dirty="0"/>
-          </a:p>
-        </p:txBody>
-      </p:sp>
-      <p:sp>
-        <p:nvSpPr>
-          <p:cNvPr id="14" name="Text 12"/>
-          <p:cNvSpPr/>
-          <p:nvPr/>
-        </p:nvSpPr>
-        <p:spPr>
-          <a:xfrm>
-            <a:off x="914400" y="5852160"/>
-            <a:ext cx="2743200" cy="411480"/>
-          </a:xfrm>
-          <a:prstGeom prst="rect">
-            <a:avLst/>
-          </a:prstGeom>
-          <a:noFill/>
-          <a:ln/>
-        </p:spPr>
-        <p:txBody>
-          <a:bodyPr wrap="square" rtlCol="0" anchor="ctr"/>
-          <a:lstStyle/>
-          <a:p>
-            <a:pPr indent="0" marL="0">
-              <a:buNone/>
-            </a:pPr>
-            <a:r>
-              <a:rPr lang="en-US" sz="2200" b="1" i="1" dirty="0">
+              <a:t> interactive</a:t>
+            </a:r>
+            <a:pPr algn="ctr" indent="0" marL="0">
+              <a:buNone/>
+            </a:pPr>
+            <a:r>
+              <a:rPr lang="en-US" sz="2400" i="1" dirty="0">
                 <a:solidFill>
                   <a:srgbClr val="F59E0B"/>
                 </a:solidFill>
@@ -7907,48 +8496,9 @@
                 <a:ea typeface="Georgia" pitchFamily="34" charset="-122"/>
                 <a:cs typeface="Georgia" pitchFamily="34" charset="-120"/>
               </a:rPr>
-              <a:t>Public</a:t>
-            </a:r>
-            <a:endParaRPr lang="en-US" sz="2200" dirty="0"/>
-          </a:p>
-        </p:txBody>
-      </p:sp>
-      <p:sp>
-        <p:nvSpPr>
-          <p:cNvPr id="15" name="Text 13"/>
-          <p:cNvSpPr/>
-          <p:nvPr/>
-        </p:nvSpPr>
-        <p:spPr>
-          <a:xfrm>
-            <a:off x="3840480" y="5897880"/>
-            <a:ext cx="7498080" cy="411480"/>
-          </a:xfrm>
-          <a:prstGeom prst="rect">
-            <a:avLst/>
-          </a:prstGeom>
-          <a:noFill/>
-          <a:ln/>
-        </p:spPr>
-        <p:txBody>
-          <a:bodyPr wrap="square" rtlCol="0" anchor="ctr"/>
-          <a:lstStyle/>
-          <a:p>
-            <a:pPr indent="0" marL="0">
-              <a:buNone/>
-            </a:pPr>
-            <a:r>
-              <a:rPr lang="en-US" sz="1400" dirty="0">
-                <a:solidFill>
-                  <a:srgbClr val="2B2B2B"/>
-                </a:solidFill>
-                <a:latin typeface="Helvetica" pitchFamily="34" charset="0"/>
-                <a:ea typeface="Helvetica" pitchFamily="34" charset="-122"/>
-                <a:cs typeface="Helvetica" pitchFamily="34" charset="-120"/>
-              </a:rPr>
-              <a:t>A playable Aral Sea for festivals and exhibitions.</a:t>
-            </a:r>
-            <a:endParaRPr lang="en-US" sz="1400" dirty="0"/>
+              <a:t> exploration</a:t>
+            </a:r>
+            <a:endParaRPr lang="en-US" sz="2400" dirty="0"/>
           </a:p>
         </p:txBody>
       </p:sp>
@@ -8017,7 +8567,7 @@
                 <a:ea typeface="Helvetica" pitchFamily="34" charset="-122"/>
                 <a:cs typeface="Helvetica" pitchFamily="34" charset="-120"/>
               </a:rPr>
-              <a:t>LEVEL 7</a:t>
+              <a:t>CHAPTER 7</a:t>
             </a:r>
             <a:endParaRPr lang="en-US" sz="1100" dirty="0"/>
           </a:p>
@@ -8056,7 +8606,7 @@
                 <a:ea typeface="Helvetica" pitchFamily="34" charset="-122"/>
                 <a:cs typeface="Helvetica" pitchFamily="34" charset="-120"/>
               </a:rPr>
-              <a:t>THE ASK</a:t>
+              <a:t>FIRST PUBLIC USES</a:t>
             </a:r>
             <a:endParaRPr lang="en-US" sz="1600" dirty="0"/>
           </a:p>
@@ -8093,7 +8643,7 @@
         </p:nvSpPr>
         <p:spPr>
           <a:xfrm>
-            <a:off x="274320" y="2377440"/>
+            <a:off x="274320" y="1645920"/>
             <a:ext cx="11643055" cy="1463040"/>
           </a:xfrm>
           <a:prstGeom prst="rect">
@@ -8110,7 +8660,7 @@
               <a:buNone/>
             </a:pPr>
             <a:r>
-              <a:rPr lang="en-US" sz="10000" b="1" i="1" dirty="0">
+              <a:rPr lang="en-US" sz="7200" b="1" i="1" dirty="0">
                 <a:solidFill>
                   <a:srgbClr val="E84C2C"/>
                 </a:solidFill>
@@ -8118,13 +8668,13 @@
                 <a:ea typeface="Georgia" pitchFamily="34" charset="-122"/>
                 <a:cs typeface="Georgia" pitchFamily="34" charset="-120"/>
               </a:rPr>
-              <a:t>$30,000</a:t>
-            </a:r>
-            <a:pPr algn="ctr" indent="0" marL="0">
-              <a:buNone/>
-            </a:pPr>
-            <a:r>
-              <a:rPr lang="en-US" sz="10000" b="1" i="1" dirty="0">
+              <a:t>where</a:t>
+            </a:r>
+            <a:pPr algn="ctr" indent="0" marL="0">
+              <a:buNone/>
+            </a:pPr>
+            <a:r>
+              <a:rPr lang="en-US" sz="7200" b="1" i="1" dirty="0">
                 <a:solidFill>
                   <a:srgbClr val="1FAE52"/>
                 </a:solidFill>
@@ -8132,13 +8682,13 @@
                 <a:ea typeface="Georgia" pitchFamily="34" charset="-122"/>
                 <a:cs typeface="Georgia" pitchFamily="34" charset="-120"/>
               </a:rPr>
-              <a:t> for</a:t>
-            </a:r>
-            <a:pPr algn="ctr" indent="0" marL="0">
-              <a:buNone/>
-            </a:pPr>
-            <a:r>
-              <a:rPr lang="en-US" sz="10000" b="1" i="1" dirty="0">
+              <a:t> it</a:t>
+            </a:r>
+            <a:pPr algn="ctr" indent="0" marL="0">
+              <a:buNone/>
+            </a:pPr>
+            <a:r>
+              <a:rPr lang="en-US" sz="7200" b="1" i="1" dirty="0">
                 <a:solidFill>
                   <a:srgbClr val="1A1FE0"/>
                 </a:solidFill>
@@ -8146,13 +8696,13 @@
                 <a:ea typeface="Georgia" pitchFamily="34" charset="-122"/>
                 <a:cs typeface="Georgia" pitchFamily="34" charset="-120"/>
               </a:rPr>
-              <a:t> 6</a:t>
-            </a:r>
-            <a:pPr algn="ctr" indent="0" marL="0">
-              <a:buNone/>
-            </a:pPr>
-            <a:r>
-              <a:rPr lang="en-US" sz="10000" b="1" i="1" dirty="0">
+              <a:t> lands</a:t>
+            </a:r>
+            <a:pPr algn="ctr" indent="0" marL="0">
+              <a:buNone/>
+            </a:pPr>
+            <a:r>
+              <a:rPr lang="en-US" sz="7200" b="1" i="1" dirty="0">
                 <a:solidFill>
                   <a:srgbClr val="EC4899"/>
                 </a:solidFill>
@@ -8160,9 +8710,9 @@
                 <a:ea typeface="Georgia" pitchFamily="34" charset="-122"/>
                 <a:cs typeface="Georgia" pitchFamily="34" charset="-120"/>
               </a:rPr>
-              <a:t> months</a:t>
-            </a:r>
-            <a:endParaRPr lang="en-US" sz="10000" dirty="0"/>
+              <a:t> first</a:t>
+            </a:r>
+            <a:endParaRPr lang="en-US" sz="7200" dirty="0"/>
           </a:p>
         </p:txBody>
       </p:sp>
@@ -8174,24 +8724,180 @@
         </p:nvSpPr>
         <p:spPr>
           <a:xfrm>
-            <a:off x="274320" y="4937760"/>
-            <a:ext cx="11643055" cy="640080"/>
-          </a:xfrm>
-          <a:prstGeom prst="rect">
-            <a:avLst/>
-          </a:prstGeom>
-          <a:noFill/>
-          <a:ln/>
-        </p:spPr>
-        <p:txBody>
-          <a:bodyPr wrap="square" rtlCol="0" anchor="ctr"/>
-          <a:lstStyle/>
-          <a:p>
-            <a:pPr algn="ctr" indent="0" marL="0">
-              <a:buNone/>
-            </a:pPr>
-            <a:r>
-              <a:rPr lang="en-US" sz="2800" i="1" dirty="0">
+            <a:off x="1280160" y="3383280"/>
+            <a:ext cx="548640" cy="411480"/>
+          </a:xfrm>
+          <a:prstGeom prst="rect">
+            <a:avLst/>
+          </a:prstGeom>
+          <a:noFill/>
+          <a:ln/>
+        </p:spPr>
+        <p:txBody>
+          <a:bodyPr wrap="square" rtlCol="0" anchor="ctr"/>
+          <a:lstStyle/>
+          <a:p>
+            <a:pPr indent="0" marL="0">
+              <a:buNone/>
+            </a:pPr>
+            <a:r>
+              <a:rPr lang="en-US" sz="1600" b="1" i="1" dirty="0">
+                <a:solidFill>
+                  <a:srgbClr val="E84C2C"/>
+                </a:solidFill>
+                <a:latin typeface="Georgia" pitchFamily="34" charset="0"/>
+                <a:ea typeface="Georgia" pitchFamily="34" charset="-122"/>
+                <a:cs typeface="Georgia" pitchFamily="34" charset="-120"/>
+              </a:rPr>
+              <a:t>01</a:t>
+            </a:r>
+            <a:endParaRPr lang="en-US" sz="1600" dirty="0"/>
+          </a:p>
+        </p:txBody>
+      </p:sp>
+      <p:sp>
+        <p:nvSpPr>
+          <p:cNvPr id="7" name="Text 5"/>
+          <p:cNvSpPr/>
+          <p:nvPr/>
+        </p:nvSpPr>
+        <p:spPr>
+          <a:xfrm>
+            <a:off x="1920240" y="3410712"/>
+            <a:ext cx="9144000" cy="411480"/>
+          </a:xfrm>
+          <a:prstGeom prst="rect">
+            <a:avLst/>
+          </a:prstGeom>
+          <a:noFill/>
+          <a:ln/>
+        </p:spPr>
+        <p:txBody>
+          <a:bodyPr wrap="square" rtlCol="0" anchor="ctr"/>
+          <a:lstStyle/>
+          <a:p>
+            <a:pPr indent="0" marL="0">
+              <a:buNone/>
+            </a:pPr>
+            <a:r>
+              <a:rPr lang="en-US" sz="1500" dirty="0">
+                <a:solidFill>
+                  <a:srgbClr val="2B2B2B"/>
+                </a:solidFill>
+                <a:latin typeface="Helvetica" pitchFamily="34" charset="0"/>
+                <a:ea typeface="Helvetica" pitchFamily="34" charset="-122"/>
+                <a:cs typeface="Helvetica" pitchFamily="34" charset="-120"/>
+              </a:rPr>
+              <a:t>Aral Culture Summit 2026</a:t>
+            </a:r>
+            <a:endParaRPr lang="en-US" sz="1500" dirty="0"/>
+          </a:p>
+        </p:txBody>
+      </p:sp>
+      <p:sp>
+        <p:nvSpPr>
+          <p:cNvPr id="8" name="Text 6"/>
+          <p:cNvSpPr/>
+          <p:nvPr/>
+        </p:nvSpPr>
+        <p:spPr>
+          <a:xfrm>
+            <a:off x="1280160" y="3840480"/>
+            <a:ext cx="548640" cy="411480"/>
+          </a:xfrm>
+          <a:prstGeom prst="rect">
+            <a:avLst/>
+          </a:prstGeom>
+          <a:noFill/>
+          <a:ln/>
+        </p:spPr>
+        <p:txBody>
+          <a:bodyPr wrap="square" rtlCol="0" anchor="ctr"/>
+          <a:lstStyle/>
+          <a:p>
+            <a:pPr indent="0" marL="0">
+              <a:buNone/>
+            </a:pPr>
+            <a:r>
+              <a:rPr lang="en-US" sz="1600" b="1" i="1" dirty="0">
+                <a:solidFill>
+                  <a:srgbClr val="1FAE52"/>
+                </a:solidFill>
+                <a:latin typeface="Georgia" pitchFamily="34" charset="0"/>
+                <a:ea typeface="Georgia" pitchFamily="34" charset="-122"/>
+                <a:cs typeface="Georgia" pitchFamily="34" charset="-120"/>
+              </a:rPr>
+              <a:t>02</a:t>
+            </a:r>
+            <a:endParaRPr lang="en-US" sz="1600" dirty="0"/>
+          </a:p>
+        </p:txBody>
+      </p:sp>
+      <p:sp>
+        <p:nvSpPr>
+          <p:cNvPr id="9" name="Text 7"/>
+          <p:cNvSpPr/>
+          <p:nvPr/>
+        </p:nvSpPr>
+        <p:spPr>
+          <a:xfrm>
+            <a:off x="1920240" y="3867912"/>
+            <a:ext cx="9144000" cy="411480"/>
+          </a:xfrm>
+          <a:prstGeom prst="rect">
+            <a:avLst/>
+          </a:prstGeom>
+          <a:noFill/>
+          <a:ln/>
+        </p:spPr>
+        <p:txBody>
+          <a:bodyPr wrap="square" rtlCol="0" anchor="ctr"/>
+          <a:lstStyle/>
+          <a:p>
+            <a:pPr indent="0" marL="0">
+              <a:buNone/>
+            </a:pPr>
+            <a:r>
+              <a:rPr lang="en-US" sz="1500" dirty="0">
+                <a:solidFill>
+                  <a:srgbClr val="2B2B2B"/>
+                </a:solidFill>
+                <a:latin typeface="Helvetica" pitchFamily="34" charset="0"/>
+                <a:ea typeface="Helvetica" pitchFamily="34" charset="-122"/>
+                <a:cs typeface="Helvetica" pitchFamily="34" charset="-120"/>
+              </a:rPr>
+              <a:t>Savitsky Museum</a:t>
+            </a:r>
+            <a:endParaRPr lang="en-US" sz="1500" dirty="0"/>
+          </a:p>
+        </p:txBody>
+      </p:sp>
+      <p:sp>
+        <p:nvSpPr>
+          <p:cNvPr id="10" name="Text 8"/>
+          <p:cNvSpPr/>
+          <p:nvPr/>
+        </p:nvSpPr>
+        <p:spPr>
+          <a:xfrm>
+            <a:off x="1280160" y="4297680"/>
+            <a:ext cx="548640" cy="411480"/>
+          </a:xfrm>
+          <a:prstGeom prst="rect">
+            <a:avLst/>
+          </a:prstGeom>
+          <a:noFill/>
+          <a:ln/>
+        </p:spPr>
+        <p:txBody>
+          <a:bodyPr wrap="square" rtlCol="0" anchor="ctr"/>
+          <a:lstStyle/>
+          <a:p>
+            <a:pPr indent="0" marL="0">
+              <a:buNone/>
+            </a:pPr>
+            <a:r>
+              <a:rPr lang="en-US" sz="1600" b="1" i="1" dirty="0">
                 <a:solidFill>
                   <a:srgbClr val="1A1FE0"/>
                 </a:solidFill>
@@ -8199,13 +8905,77 @@
                 <a:ea typeface="Georgia" pitchFamily="34" charset="-122"/>
                 <a:cs typeface="Georgia" pitchFamily="34" charset="-120"/>
               </a:rPr>
-              <a:t>polish,</a:t>
-            </a:r>
-            <a:pPr algn="ctr" indent="0" marL="0">
-              <a:buNone/>
-            </a:pPr>
-            <a:r>
-              <a:rPr lang="en-US" sz="2800" i="1" dirty="0">
+              <a:t>03</a:t>
+            </a:r>
+            <a:endParaRPr lang="en-US" sz="1600" dirty="0"/>
+          </a:p>
+        </p:txBody>
+      </p:sp>
+      <p:sp>
+        <p:nvSpPr>
+          <p:cNvPr id="11" name="Text 9"/>
+          <p:cNvSpPr/>
+          <p:nvPr/>
+        </p:nvSpPr>
+        <p:spPr>
+          <a:xfrm>
+            <a:off x="1920240" y="4325112"/>
+            <a:ext cx="9144000" cy="411480"/>
+          </a:xfrm>
+          <a:prstGeom prst="rect">
+            <a:avLst/>
+          </a:prstGeom>
+          <a:noFill/>
+          <a:ln/>
+        </p:spPr>
+        <p:txBody>
+          <a:bodyPr wrap="square" rtlCol="0" anchor="ctr"/>
+          <a:lstStyle/>
+          <a:p>
+            <a:pPr indent="0" marL="0">
+              <a:buNone/>
+            </a:pPr>
+            <a:r>
+              <a:rPr lang="en-US" sz="1500" dirty="0">
+                <a:solidFill>
+                  <a:srgbClr val="2B2B2B"/>
+                </a:solidFill>
+                <a:latin typeface="Helvetica" pitchFamily="34" charset="0"/>
+                <a:ea typeface="Helvetica" pitchFamily="34" charset="-122"/>
+                <a:cs typeface="Helvetica" pitchFamily="34" charset="-120"/>
+              </a:rPr>
+              <a:t>History and Aral Sea Museum</a:t>
+            </a:r>
+            <a:endParaRPr lang="en-US" sz="1500" dirty="0"/>
+          </a:p>
+        </p:txBody>
+      </p:sp>
+      <p:sp>
+        <p:nvSpPr>
+          <p:cNvPr id="12" name="Text 10"/>
+          <p:cNvSpPr/>
+          <p:nvPr/>
+        </p:nvSpPr>
+        <p:spPr>
+          <a:xfrm>
+            <a:off x="1280160" y="4754880"/>
+            <a:ext cx="548640" cy="411480"/>
+          </a:xfrm>
+          <a:prstGeom prst="rect">
+            <a:avLst/>
+          </a:prstGeom>
+          <a:noFill/>
+          <a:ln/>
+        </p:spPr>
+        <p:txBody>
+          <a:bodyPr wrap="square" rtlCol="0" anchor="ctr"/>
+          <a:lstStyle/>
+          <a:p>
+            <a:pPr indent="0" marL="0">
+              <a:buNone/>
+            </a:pPr>
+            <a:r>
+              <a:rPr lang="en-US" sz="1600" b="1" i="1" dirty="0">
                 <a:solidFill>
                   <a:srgbClr val="EC4899"/>
                 </a:solidFill>
@@ -8213,13 +8983,77 @@
                 <a:ea typeface="Georgia" pitchFamily="34" charset="-122"/>
                 <a:cs typeface="Georgia" pitchFamily="34" charset="-120"/>
               </a:rPr>
-              <a:t> curriculum,</a:t>
-            </a:r>
-            <a:pPr algn="ctr" indent="0" marL="0">
-              <a:buNone/>
-            </a:pPr>
-            <a:r>
-              <a:rPr lang="en-US" sz="2800" i="1" dirty="0">
+              <a:t>04</a:t>
+            </a:r>
+            <a:endParaRPr lang="en-US" sz="1600" dirty="0"/>
+          </a:p>
+        </p:txBody>
+      </p:sp>
+      <p:sp>
+        <p:nvSpPr>
+          <p:cNvPr id="13" name="Text 11"/>
+          <p:cNvSpPr/>
+          <p:nvPr/>
+        </p:nvSpPr>
+        <p:spPr>
+          <a:xfrm>
+            <a:off x="1920240" y="4782312"/>
+            <a:ext cx="9144000" cy="411480"/>
+          </a:xfrm>
+          <a:prstGeom prst="rect">
+            <a:avLst/>
+          </a:prstGeom>
+          <a:noFill/>
+          <a:ln/>
+        </p:spPr>
+        <p:txBody>
+          <a:bodyPr wrap="square" rtlCol="0" anchor="ctr"/>
+          <a:lstStyle/>
+          <a:p>
+            <a:pPr indent="0" marL="0">
+              <a:buNone/>
+            </a:pPr>
+            <a:r>
+              <a:rPr lang="en-US" sz="1500" dirty="0">
+                <a:solidFill>
+                  <a:srgbClr val="2B2B2B"/>
+                </a:solidFill>
+                <a:latin typeface="Helvetica" pitchFamily="34" charset="0"/>
+                <a:ea typeface="Helvetica" pitchFamily="34" charset="-122"/>
+                <a:cs typeface="Helvetica" pitchFamily="34" charset="-120"/>
+              </a:rPr>
+              <a:t>Center for Contemporary Art, Tashkent</a:t>
+            </a:r>
+            <a:endParaRPr lang="en-US" sz="1500" dirty="0"/>
+          </a:p>
+        </p:txBody>
+      </p:sp>
+      <p:sp>
+        <p:nvSpPr>
+          <p:cNvPr id="14" name="Text 12"/>
+          <p:cNvSpPr/>
+          <p:nvPr/>
+        </p:nvSpPr>
+        <p:spPr>
+          <a:xfrm>
+            <a:off x="1280160" y="5212080"/>
+            <a:ext cx="548640" cy="411480"/>
+          </a:xfrm>
+          <a:prstGeom prst="rect">
+            <a:avLst/>
+          </a:prstGeom>
+          <a:noFill/>
+          <a:ln/>
+        </p:spPr>
+        <p:txBody>
+          <a:bodyPr wrap="square" rtlCol="0" anchor="ctr"/>
+          <a:lstStyle/>
+          <a:p>
+            <a:pPr indent="0" marL="0">
+              <a:buNone/>
+            </a:pPr>
+            <a:r>
+              <a:rPr lang="en-US" sz="1600" b="1" i="1" dirty="0">
                 <a:solidFill>
                   <a:srgbClr val="F59E0B"/>
                 </a:solidFill>
@@ -8227,13 +9061,77 @@
                 <a:ea typeface="Georgia" pitchFamily="34" charset="-122"/>
                 <a:cs typeface="Georgia" pitchFamily="34" charset="-120"/>
               </a:rPr>
-              <a:t> and</a:t>
-            </a:r>
-            <a:pPr algn="ctr" indent="0" marL="0">
-              <a:buNone/>
-            </a:pPr>
-            <a:r>
-              <a:rPr lang="en-US" sz="2800" i="1" dirty="0">
+              <a:t>05</a:t>
+            </a:r>
+            <a:endParaRPr lang="en-US" sz="1600" dirty="0"/>
+          </a:p>
+        </p:txBody>
+      </p:sp>
+      <p:sp>
+        <p:nvSpPr>
+          <p:cNvPr id="15" name="Text 13"/>
+          <p:cNvSpPr/>
+          <p:nvPr/>
+        </p:nvSpPr>
+        <p:spPr>
+          <a:xfrm>
+            <a:off x="1920240" y="5239512"/>
+            <a:ext cx="9144000" cy="411480"/>
+          </a:xfrm>
+          <a:prstGeom prst="rect">
+            <a:avLst/>
+          </a:prstGeom>
+          <a:noFill/>
+          <a:ln/>
+        </p:spPr>
+        <p:txBody>
+          <a:bodyPr wrap="square" rtlCol="0" anchor="ctr"/>
+          <a:lstStyle/>
+          <a:p>
+            <a:pPr indent="0" marL="0">
+              <a:buNone/>
+            </a:pPr>
+            <a:r>
+              <a:rPr lang="en-US" sz="1500" dirty="0">
+                <a:solidFill>
+                  <a:srgbClr val="2B2B2B"/>
+                </a:solidFill>
+                <a:latin typeface="Helvetica" pitchFamily="34" charset="0"/>
+                <a:ea typeface="Helvetica" pitchFamily="34" charset="-122"/>
+                <a:cs typeface="Helvetica" pitchFamily="34" charset="-120"/>
+              </a:rPr>
+              <a:t>Schools and educational programs</a:t>
+            </a:r>
+            <a:endParaRPr lang="en-US" sz="1500" dirty="0"/>
+          </a:p>
+        </p:txBody>
+      </p:sp>
+      <p:sp>
+        <p:nvSpPr>
+          <p:cNvPr id="16" name="Text 14"/>
+          <p:cNvSpPr/>
+          <p:nvPr/>
+        </p:nvSpPr>
+        <p:spPr>
+          <a:xfrm>
+            <a:off x="1280160" y="5669280"/>
+            <a:ext cx="548640" cy="411480"/>
+          </a:xfrm>
+          <a:prstGeom prst="rect">
+            <a:avLst/>
+          </a:prstGeom>
+          <a:noFill/>
+          <a:ln/>
+        </p:spPr>
+        <p:txBody>
+          <a:bodyPr wrap="square" rtlCol="0" anchor="ctr"/>
+          <a:lstStyle/>
+          <a:p>
+            <a:pPr indent="0" marL="0">
+              <a:buNone/>
+            </a:pPr>
+            <a:r>
+              <a:rPr lang="en-US" sz="1600" b="1" i="1" dirty="0">
                 <a:solidFill>
                   <a:srgbClr val="22D3EE"/>
                 </a:solidFill>
@@ -8241,23 +9139,48 @@
                 <a:ea typeface="Georgia" pitchFamily="34" charset="-122"/>
                 <a:cs typeface="Georgia" pitchFamily="34" charset="-120"/>
               </a:rPr>
-              <a:t> museum-ready</a:t>
-            </a:r>
-            <a:pPr algn="ctr" indent="0" marL="0">
-              <a:buNone/>
-            </a:pPr>
-            <a:r>
-              <a:rPr lang="en-US" sz="2800" i="1" dirty="0">
-                <a:solidFill>
-                  <a:srgbClr val="E84C2C"/>
-                </a:solidFill>
-                <a:latin typeface="Georgia" pitchFamily="34" charset="0"/>
-                <a:ea typeface="Georgia" pitchFamily="34" charset="-122"/>
-                <a:cs typeface="Georgia" pitchFamily="34" charset="-120"/>
-              </a:rPr>
-              <a:t> versions</a:t>
-            </a:r>
-            <a:endParaRPr lang="en-US" sz="2800" dirty="0"/>
+              <a:t>06</a:t>
+            </a:r>
+            <a:endParaRPr lang="en-US" sz="1600" dirty="0"/>
+          </a:p>
+        </p:txBody>
+      </p:sp>
+      <p:sp>
+        <p:nvSpPr>
+          <p:cNvPr id="17" name="Text 15"/>
+          <p:cNvSpPr/>
+          <p:nvPr/>
+        </p:nvSpPr>
+        <p:spPr>
+          <a:xfrm>
+            <a:off x="1920240" y="5696712"/>
+            <a:ext cx="9144000" cy="411480"/>
+          </a:xfrm>
+          <a:prstGeom prst="rect">
+            <a:avLst/>
+          </a:prstGeom>
+          <a:noFill/>
+          <a:ln/>
+        </p:spPr>
+        <p:txBody>
+          <a:bodyPr wrap="square" rtlCol="0" anchor="ctr"/>
+          <a:lstStyle/>
+          <a:p>
+            <a:pPr indent="0" marL="0">
+              <a:buNone/>
+            </a:pPr>
+            <a:r>
+              <a:rPr lang="en-US" sz="1500" dirty="0">
+                <a:solidFill>
+                  <a:srgbClr val="2B2B2B"/>
+                </a:solidFill>
+                <a:latin typeface="Helvetica" pitchFamily="34" charset="0"/>
+                <a:ea typeface="Helvetica" pitchFamily="34" charset="-122"/>
+                <a:cs typeface="Helvetica" pitchFamily="34" charset="-120"/>
+              </a:rPr>
+              <a:t>Public workshops and festivals</a:t>
+            </a:r>
+            <a:endParaRPr lang="en-US" sz="1500" dirty="0"/>
           </a:p>
         </p:txBody>
       </p:sp>
@@ -8326,7 +9249,7 @@
                 <a:ea typeface="Helvetica" pitchFamily="34" charset="-122"/>
                 <a:cs typeface="Helvetica" pitchFamily="34" charset="-120"/>
               </a:rPr>
-              <a:t>LEVEL 8</a:t>
+              <a:t>CHAPTER 8</a:t>
             </a:r>
             <a:endParaRPr lang="en-US" sz="1100" dirty="0"/>
           </a:p>
@@ -8365,7 +9288,7 @@
                 <a:ea typeface="Helvetica" pitchFamily="34" charset="-122"/>
                 <a:cs typeface="Helvetica" pitchFamily="34" charset="-120"/>
               </a:rPr>
-              <a:t>SIX-MONTH PLAN</a:t>
+              <a:t>EDUCATION POTENTIAL</a:t>
             </a:r>
             <a:endParaRPr lang="en-US" sz="1600" dirty="0"/>
           </a:p>
@@ -8419,7 +9342,7 @@
               <a:buNone/>
             </a:pPr>
             <a:r>
-              <a:rPr lang="en-US" sz="8000" b="1" i="1" dirty="0">
+              <a:rPr lang="en-US" sz="7200" b="1" i="1" dirty="0">
                 <a:solidFill>
                   <a:srgbClr val="E84C2C"/>
                 </a:solidFill>
@@ -8427,13 +9350,13 @@
                 <a:ea typeface="Georgia" pitchFamily="34" charset="-122"/>
                 <a:cs typeface="Georgia" pitchFamily="34" charset="-120"/>
               </a:rPr>
-              <a:t>six</a:t>
-            </a:r>
-            <a:pPr algn="ctr" indent="0" marL="0">
-              <a:buNone/>
-            </a:pPr>
-            <a:r>
-              <a:rPr lang="en-US" sz="8000" b="1" i="1" dirty="0">
+              <a:t>a</a:t>
+            </a:r>
+            <a:pPr algn="ctr" indent="0" marL="0">
+              <a:buNone/>
+            </a:pPr>
+            <a:r>
+              <a:rPr lang="en-US" sz="7200" b="1" i="1" dirty="0">
                 <a:solidFill>
                   <a:srgbClr val="1FAE52"/>
                 </a:solidFill>
@@ -8441,13 +9364,13 @@
                 <a:ea typeface="Georgia" pitchFamily="34" charset="-122"/>
                 <a:cs typeface="Georgia" pitchFamily="34" charset="-120"/>
               </a:rPr>
-              <a:t> months,</a:t>
-            </a:r>
-            <a:pPr algn="ctr" indent="0" marL="0">
-              <a:buNone/>
-            </a:pPr>
-            <a:r>
-              <a:rPr lang="en-US" sz="8000" b="1" i="1" dirty="0">
+              <a:t> tool</a:t>
+            </a:r>
+            <a:pPr algn="ctr" indent="0" marL="0">
+              <a:buNone/>
+            </a:pPr>
+            <a:r>
+              <a:rPr lang="en-US" sz="7200" b="1" i="1" dirty="0">
                 <a:solidFill>
                   <a:srgbClr val="1A1FE0"/>
                 </a:solidFill>
@@ -8455,13 +9378,13 @@
                 <a:ea typeface="Georgia" pitchFamily="34" charset="-122"/>
                 <a:cs typeface="Georgia" pitchFamily="34" charset="-120"/>
               </a:rPr>
-              <a:t> six</a:t>
-            </a:r>
-            <a:pPr algn="ctr" indent="0" marL="0">
-              <a:buNone/>
-            </a:pPr>
-            <a:r>
-              <a:rPr lang="en-US" sz="8000" b="1" i="1" dirty="0">
+              <a:t> for</a:t>
+            </a:r>
+            <a:pPr algn="ctr" indent="0" marL="0">
+              <a:buNone/>
+            </a:pPr>
+            <a:r>
+              <a:rPr lang="en-US" sz="7200" b="1" i="1" dirty="0">
                 <a:solidFill>
                   <a:srgbClr val="EC4899"/>
                 </a:solidFill>
@@ -8469,9 +9392,9 @@
                 <a:ea typeface="Georgia" pitchFamily="34" charset="-122"/>
                 <a:cs typeface="Georgia" pitchFamily="34" charset="-120"/>
               </a:rPr>
-              <a:t> moves</a:t>
-            </a:r>
-            <a:endParaRPr lang="en-US" sz="8000" dirty="0"/>
+              <a:t> classrooms</a:t>
+            </a:r>
+            <a:endParaRPr lang="en-US" sz="7200" dirty="0"/>
           </a:p>
         </p:txBody>
       </p:sp>
@@ -8483,8 +9406,8 @@
         </p:nvSpPr>
         <p:spPr>
           <a:xfrm>
-            <a:off x="1280160" y="3657600"/>
-            <a:ext cx="822960" cy="411480"/>
+            <a:off x="1280160" y="3474720"/>
+            <a:ext cx="2743200" cy="411480"/>
           </a:xfrm>
           <a:prstGeom prst="rect">
             <a:avLst/>
@@ -8500,7 +9423,7 @@
               <a:buNone/>
             </a:pPr>
             <a:r>
-              <a:rPr lang="en-US" sz="2000" b="1" i="1" dirty="0">
+              <a:rPr lang="en-US" sz="1800" b="1" i="1" dirty="0">
                 <a:solidFill>
                   <a:srgbClr val="E84C2C"/>
                 </a:solidFill>
@@ -8508,9 +9431,9 @@
                 <a:ea typeface="Georgia" pitchFamily="34" charset="-122"/>
                 <a:cs typeface="Georgia" pitchFamily="34" charset="-120"/>
               </a:rPr>
-              <a:t>M1</a:t>
-            </a:r>
-            <a:endParaRPr lang="en-US" sz="2000" dirty="0"/>
+              <a:t>Geography</a:t>
+            </a:r>
+            <a:endParaRPr lang="en-US" sz="1800" dirty="0"/>
           </a:p>
         </p:txBody>
       </p:sp>
@@ -8522,8 +9445,8 @@
         </p:nvSpPr>
         <p:spPr>
           <a:xfrm>
-            <a:off x="2286000" y="3685032"/>
-            <a:ext cx="8686800" cy="411480"/>
+            <a:off x="4206240" y="3511296"/>
+            <a:ext cx="6858000" cy="411480"/>
           </a:xfrm>
           <a:prstGeom prst="rect">
             <a:avLst/>
@@ -8539,7 +9462,7 @@
               <a:buNone/>
             </a:pPr>
             <a:r>
-              <a:rPr lang="en-US" sz="1500" dirty="0">
+              <a:rPr lang="en-US" sz="1400" dirty="0">
                 <a:solidFill>
                   <a:srgbClr val="2B2B2B"/>
                 </a:solidFill>
@@ -8547,9 +9470,9 @@
                 <a:ea typeface="Helvetica" pitchFamily="34" charset="-122"/>
                 <a:cs typeface="Helvetica" pitchFamily="34" charset="-120"/>
               </a:rPr>
-              <a:t>Polish product, public demo.</a:t>
-            </a:r>
-            <a:endParaRPr lang="en-US" sz="1500" dirty="0"/>
+              <a:t>How water systems work and how landscapes change.</a:t>
+            </a:r>
+            <a:endParaRPr lang="en-US" sz="1400" dirty="0"/>
           </a:p>
         </p:txBody>
       </p:sp>
@@ -8561,8 +9484,8 @@
         </p:nvSpPr>
         <p:spPr>
           <a:xfrm>
-            <a:off x="1280160" y="4114800"/>
-            <a:ext cx="822960" cy="411480"/>
+            <a:off x="1280160" y="4023360"/>
+            <a:ext cx="2743200" cy="411480"/>
           </a:xfrm>
           <a:prstGeom prst="rect">
             <a:avLst/>
@@ -8578,7 +9501,7 @@
               <a:buNone/>
             </a:pPr>
             <a:r>
-              <a:rPr lang="en-US" sz="2000" b="1" i="1" dirty="0">
+              <a:rPr lang="en-US" sz="1800" b="1" i="1" dirty="0">
                 <a:solidFill>
                   <a:srgbClr val="1FAE52"/>
                 </a:solidFill>
@@ -8586,9 +9509,9 @@
                 <a:ea typeface="Georgia" pitchFamily="34" charset="-122"/>
                 <a:cs typeface="Georgia" pitchFamily="34" charset="-120"/>
               </a:rPr>
-              <a:t>M2</a:t>
-            </a:r>
-            <a:endParaRPr lang="en-US" sz="2000" dirty="0"/>
+              <a:t>Ecology</a:t>
+            </a:r>
+            <a:endParaRPr lang="en-US" sz="1800" dirty="0"/>
           </a:p>
         </p:txBody>
       </p:sp>
@@ -8600,8 +9523,8 @@
         </p:nvSpPr>
         <p:spPr>
           <a:xfrm>
-            <a:off x="2286000" y="4142232"/>
-            <a:ext cx="8686800" cy="411480"/>
+            <a:off x="4206240" y="4059936"/>
+            <a:ext cx="6858000" cy="411480"/>
           </a:xfrm>
           <a:prstGeom prst="rect">
             <a:avLst/>
@@ -8617,7 +9540,7 @@
               <a:buNone/>
             </a:pPr>
             <a:r>
-              <a:rPr lang="en-US" sz="1500" dirty="0">
+              <a:rPr lang="en-US" sz="1400" dirty="0">
                 <a:solidFill>
                   <a:srgbClr val="2B2B2B"/>
                 </a:solidFill>
@@ -8625,9 +9548,9 @@
                 <a:ea typeface="Helvetica" pitchFamily="34" charset="-122"/>
                 <a:cs typeface="Helvetica" pitchFamily="34" charset="-120"/>
               </a:rPr>
-              <a:t>Educational version, ministry talks.</a:t>
-            </a:r>
-            <a:endParaRPr lang="en-US" sz="1500" dirty="0"/>
+              <a:t>How human decisions shape fragile ecosystems.</a:t>
+            </a:r>
+            <a:endParaRPr lang="en-US" sz="1400" dirty="0"/>
           </a:p>
         </p:txBody>
       </p:sp>
@@ -8640,7 +9563,7 @@
         <p:spPr>
           <a:xfrm>
             <a:off x="1280160" y="4572000"/>
-            <a:ext cx="822960" cy="411480"/>
+            <a:ext cx="2743200" cy="411480"/>
           </a:xfrm>
           <a:prstGeom prst="rect">
             <a:avLst/>
@@ -8656,7 +9579,7 @@
               <a:buNone/>
             </a:pPr>
             <a:r>
-              <a:rPr lang="en-US" sz="2000" b="1" i="1" dirty="0">
+              <a:rPr lang="en-US" sz="1800" b="1" i="1" dirty="0">
                 <a:solidFill>
                   <a:srgbClr val="1A1FE0"/>
                 </a:solidFill>
@@ -8664,9 +9587,9 @@
                 <a:ea typeface="Georgia" pitchFamily="34" charset="-122"/>
                 <a:cs typeface="Georgia" pitchFamily="34" charset="-120"/>
               </a:rPr>
-              <a:t>M3</a:t>
-            </a:r>
-            <a:endParaRPr lang="en-US" sz="2000" dirty="0"/>
+              <a:t>History</a:t>
+            </a:r>
+            <a:endParaRPr lang="en-US" sz="1800" dirty="0"/>
           </a:p>
         </p:txBody>
       </p:sp>
@@ -8678,8 +9601,8 @@
         </p:nvSpPr>
         <p:spPr>
           <a:xfrm>
-            <a:off x="2286000" y="4599432"/>
-            <a:ext cx="8686800" cy="411480"/>
+            <a:off x="4206240" y="4608576"/>
+            <a:ext cx="6858000" cy="411480"/>
           </a:xfrm>
           <a:prstGeom prst="rect">
             <a:avLst/>
@@ -8695,7 +9618,7 @@
               <a:buNone/>
             </a:pPr>
             <a:r>
-              <a:rPr lang="en-US" sz="1500" dirty="0">
+              <a:rPr lang="en-US" sz="1400" dirty="0">
                 <a:solidFill>
                   <a:srgbClr val="2B2B2B"/>
                 </a:solidFill>
@@ -8703,9 +9626,9 @@
                 <a:ea typeface="Helvetica" pitchFamily="34" charset="-122"/>
                 <a:cs typeface="Helvetica" pitchFamily="34" charset="-120"/>
               </a:rPr>
-              <a:t>First curriculum-ready learning module.</a:t>
-            </a:r>
-            <a:endParaRPr lang="en-US" sz="1500" dirty="0"/>
+              <a:t>Memory of a region told through its terrain.</a:t>
+            </a:r>
+            <a:endParaRPr lang="en-US" sz="1400" dirty="0"/>
           </a:p>
         </p:txBody>
       </p:sp>
@@ -8717,8 +9640,8 @@
         </p:nvSpPr>
         <p:spPr>
           <a:xfrm>
-            <a:off x="1280160" y="5029200"/>
-            <a:ext cx="822960" cy="411480"/>
+            <a:off x="1280160" y="5120640"/>
+            <a:ext cx="2743200" cy="411480"/>
           </a:xfrm>
           <a:prstGeom prst="rect">
             <a:avLst/>
@@ -8734,7 +9657,7 @@
               <a:buNone/>
             </a:pPr>
             <a:r>
-              <a:rPr lang="en-US" sz="2000" b="1" i="1" dirty="0">
+              <a:rPr lang="en-US" sz="1800" b="1" i="1" dirty="0">
                 <a:solidFill>
                   <a:srgbClr val="EC4899"/>
                 </a:solidFill>
@@ -8742,9 +9665,9 @@
                 <a:ea typeface="Georgia" pitchFamily="34" charset="-122"/>
                 <a:cs typeface="Georgia" pitchFamily="34" charset="-120"/>
               </a:rPr>
-              <a:t>M4</a:t>
-            </a:r>
-            <a:endParaRPr lang="en-US" sz="2000" dirty="0"/>
+              <a:t>Design</a:t>
+            </a:r>
+            <a:endParaRPr lang="en-US" sz="1800" dirty="0"/>
           </a:p>
         </p:txBody>
       </p:sp>
@@ -8756,8 +9679,8 @@
         </p:nvSpPr>
         <p:spPr>
           <a:xfrm>
-            <a:off x="2286000" y="5056632"/>
-            <a:ext cx="8686800" cy="411480"/>
+            <a:off x="4206240" y="5157216"/>
+            <a:ext cx="6858000" cy="411480"/>
           </a:xfrm>
           <a:prstGeom prst="rect">
             <a:avLst/>
@@ -8773,7 +9696,7 @@
               <a:buNone/>
             </a:pPr>
             <a:r>
-              <a:rPr lang="en-US" sz="1500" dirty="0">
+              <a:rPr lang="en-US" sz="1400" dirty="0">
                 <a:solidFill>
                   <a:srgbClr val="2B2B2B"/>
                 </a:solidFill>
@@ -8781,9 +9704,9 @@
                 <a:ea typeface="Helvetica" pitchFamily="34" charset="-122"/>
                 <a:cs typeface="Helvetica" pitchFamily="34" charset="-120"/>
               </a:rPr>
-              <a:t>Adapt for Aral Culture Summit 2026.</a:t>
-            </a:r>
-            <a:endParaRPr lang="en-US" sz="1500" dirty="0"/>
+              <a:t>Visual literacy for maps, data, and storytelling.</a:t>
+            </a:r>
+            <a:endParaRPr lang="en-US" sz="1400" dirty="0"/>
           </a:p>
         </p:txBody>
       </p:sp>
@@ -8795,8 +9718,8 @@
         </p:nvSpPr>
         <p:spPr>
           <a:xfrm>
-            <a:off x="1280160" y="5486400"/>
-            <a:ext cx="822960" cy="411480"/>
+            <a:off x="1280160" y="5669280"/>
+            <a:ext cx="2743200" cy="411480"/>
           </a:xfrm>
           <a:prstGeom prst="rect">
             <a:avLst/>
@@ -8812,7 +9735,7 @@
               <a:buNone/>
             </a:pPr>
             <a:r>
-              <a:rPr lang="en-US" sz="2000" b="1" i="1" dirty="0">
+              <a:rPr lang="en-US" sz="1800" b="1" i="1" dirty="0">
                 <a:solidFill>
                   <a:srgbClr val="F59E0B"/>
                 </a:solidFill>
@@ -8820,9 +9743,9 @@
                 <a:ea typeface="Georgia" pitchFamily="34" charset="-122"/>
                 <a:cs typeface="Georgia" pitchFamily="34" charset="-120"/>
               </a:rPr>
-              <a:t>M5</a:t>
-            </a:r>
-            <a:endParaRPr lang="en-US" sz="2000" dirty="0"/>
+              <a:t>Civics</a:t>
+            </a:r>
+            <a:endParaRPr lang="en-US" sz="1800" dirty="0"/>
           </a:p>
         </p:txBody>
       </p:sp>
@@ -8834,8 +9757,8 @@
         </p:nvSpPr>
         <p:spPr>
           <a:xfrm>
-            <a:off x="2286000" y="5513832"/>
-            <a:ext cx="8686800" cy="411480"/>
+            <a:off x="4206240" y="5705856"/>
+            <a:ext cx="6858000" cy="411480"/>
           </a:xfrm>
           <a:prstGeom prst="rect">
             <a:avLst/>
@@ -8851,7 +9774,7 @@
               <a:buNone/>
             </a:pPr>
             <a:r>
-              <a:rPr lang="en-US" sz="1500" dirty="0">
+              <a:rPr lang="en-US" sz="1400" dirty="0">
                 <a:solidFill>
                   <a:srgbClr val="2B2B2B"/>
                 </a:solidFill>
@@ -8859,87 +9782,9 @@
                 <a:ea typeface="Helvetica" pitchFamily="34" charset="-122"/>
                 <a:cs typeface="Helvetica" pitchFamily="34" charset="-120"/>
               </a:rPr>
-              <a:t>Museum versions: Savitsky, Aral Sea Museum, CCA Tashkent.</a:t>
-            </a:r>
-            <a:endParaRPr lang="en-US" sz="1500" dirty="0"/>
-          </a:p>
-        </p:txBody>
-      </p:sp>
-      <p:sp>
-        <p:nvSpPr>
-          <p:cNvPr id="16" name="Text 14"/>
-          <p:cNvSpPr/>
-          <p:nvPr/>
-        </p:nvSpPr>
-        <p:spPr>
-          <a:xfrm>
-            <a:off x="1280160" y="5943600"/>
-            <a:ext cx="822960" cy="411480"/>
-          </a:xfrm>
-          <a:prstGeom prst="rect">
-            <a:avLst/>
-          </a:prstGeom>
-          <a:noFill/>
-          <a:ln/>
-        </p:spPr>
-        <p:txBody>
-          <a:bodyPr wrap="square" rtlCol="0" anchor="ctr"/>
-          <a:lstStyle/>
-          <a:p>
-            <a:pPr indent="0" marL="0">
-              <a:buNone/>
-            </a:pPr>
-            <a:r>
-              <a:rPr lang="en-US" sz="2000" b="1" i="1" dirty="0">
-                <a:solidFill>
-                  <a:srgbClr val="22D3EE"/>
-                </a:solidFill>
-                <a:latin typeface="Georgia" pitchFamily="34" charset="0"/>
-                <a:ea typeface="Georgia" pitchFamily="34" charset="-122"/>
-                <a:cs typeface="Georgia" pitchFamily="34" charset="-120"/>
-              </a:rPr>
-              <a:t>M6</a:t>
-            </a:r>
-            <a:endParaRPr lang="en-US" sz="2000" dirty="0"/>
-          </a:p>
-        </p:txBody>
-      </p:sp>
-      <p:sp>
-        <p:nvSpPr>
-          <p:cNvPr id="17" name="Text 15"/>
-          <p:cNvSpPr/>
-          <p:nvPr/>
-        </p:nvSpPr>
-        <p:spPr>
-          <a:xfrm>
-            <a:off x="2286000" y="5971032"/>
-            <a:ext cx="8686800" cy="411480"/>
-          </a:xfrm>
-          <a:prstGeom prst="rect">
-            <a:avLst/>
-          </a:prstGeom>
-          <a:noFill/>
-          <a:ln/>
-        </p:spPr>
-        <p:txBody>
-          <a:bodyPr wrap="square" rtlCol="0" anchor="ctr"/>
-          <a:lstStyle/>
-          <a:p>
-            <a:pPr indent="0" marL="0">
-              <a:buNone/>
-            </a:pPr>
-            <a:r>
-              <a:rPr lang="en-US" sz="1500" dirty="0">
-                <a:solidFill>
-                  <a:srgbClr val="2B2B2B"/>
-                </a:solidFill>
-                <a:latin typeface="Helvetica" pitchFamily="34" charset="0"/>
-                <a:ea typeface="Helvetica" pitchFamily="34" charset="-122"/>
-                <a:cs typeface="Helvetica" pitchFamily="34" charset="-120"/>
-              </a:rPr>
-              <a:t>Documentation, demo video, 3-year roadmap.</a:t>
-            </a:r>
-            <a:endParaRPr lang="en-US" sz="1500" dirty="0"/>
+              <a:t>Shared decisions about water, land, and future.</a:t>
+            </a:r>
+            <a:endParaRPr lang="en-US" sz="1400" dirty="0"/>
           </a:p>
         </p:txBody>
       </p:sp>
